--- a/output/4.pptx
+++ b/output/4.pptx
@@ -3174,8 +3174,8 @@
         </p:nvCxnSpPr>
         <p:spPr>
           <a:xfrm flipV="1">
-            <a:off x="4572000.0" y="2282571.0"/>
-            <a:ext cx="114300.0" cy="289179.0"/>
+            <a:off x="4572000.0" y="2418588.0"/>
+            <a:ext cx="51206.40000000037" cy="153162.0"/>
           </a:xfrm>
           <a:prstGeom prst="line">
             <a:avLst/>
@@ -3209,8 +3209,8 @@
         </p:nvCxnSpPr>
         <p:spPr>
           <a:xfrm flipV="1">
-            <a:off x="4686300.0" y="2163013.2"/>
-            <a:ext cx="114300.0" cy="119557.79999999981"/>
+            <a:off x="4623206.4" y="2355494.4"/>
+            <a:ext cx="51206.39999999944" cy="63093.60000000009"/>
           </a:xfrm>
           <a:prstGeom prst="line">
             <a:avLst/>
@@ -3244,8 +3244,8 @@
         </p:nvCxnSpPr>
         <p:spPr>
           <a:xfrm flipV="1">
-            <a:off x="4800600.0" y="2071116.0"/>
-            <a:ext cx="114300.0" cy="91897.20000000019"/>
+            <a:off x="4674412.8" y="2306574.0"/>
+            <a:ext cx="51663.60000000056" cy="48920.39999999991"/>
           </a:xfrm>
           <a:prstGeom prst="line">
             <a:avLst/>
@@ -3279,8 +3279,8 @@
         </p:nvCxnSpPr>
         <p:spPr>
           <a:xfrm flipV="1">
-            <a:off x="4914900.0" y="1993392.0"/>
-            <a:ext cx="114300.0" cy="77724.0"/>
+            <a:off x="4726076.4" y="2265426.0"/>
+            <a:ext cx="51206.39999999944" cy="41148.0"/>
           </a:xfrm>
           <a:prstGeom prst="line">
             <a:avLst/>
@@ -3314,8 +3314,8 @@
         </p:nvCxnSpPr>
         <p:spPr>
           <a:xfrm flipV="1">
-            <a:off x="5029200.0" y="1925269.2000000002"/>
-            <a:ext cx="114300.0" cy="68122.79999999981"/>
+            <a:off x="4777282.8" y="2229307.2"/>
+            <a:ext cx="51206.40000000037" cy="36118.799999999814"/>
           </a:xfrm>
           <a:prstGeom prst="line">
             <a:avLst/>
@@ -3349,8 +3349,8 @@
         </p:nvCxnSpPr>
         <p:spPr>
           <a:xfrm flipV="1">
-            <a:off x="5143500.0" y="1863090.0"/>
-            <a:ext cx="114300.0" cy="62179.200000000186"/>
+            <a:off x="4828489.2" y="2196846.0"/>
+            <a:ext cx="51206.39999999944" cy="32461.200000000186"/>
           </a:xfrm>
           <a:prstGeom prst="line">
             <a:avLst/>
@@ -3384,8 +3384,8 @@
         </p:nvCxnSpPr>
         <p:spPr>
           <a:xfrm flipV="1">
-            <a:off x="5257800.0" y="1806397.2000000002"/>
-            <a:ext cx="114300.0" cy="56692.799999999814"/>
+            <a:off x="4879695.6" y="2166213.6"/>
+            <a:ext cx="51663.60000000056" cy="30632.399999999907"/>
           </a:xfrm>
           <a:prstGeom prst="line">
             <a:avLst/>
@@ -3419,8 +3419,8 @@
         </p:nvCxnSpPr>
         <p:spPr>
           <a:xfrm flipV="1">
-            <a:off x="5372100.0" y="1753819.2000000002"/>
-            <a:ext cx="114300.0" cy="52578.0"/>
+            <a:off x="4931359.2" y="2138324.4"/>
+            <a:ext cx="51206.39999999944" cy="27889.200000000186"/>
           </a:xfrm>
           <a:prstGeom prst="line">
             <a:avLst/>
@@ -3454,8 +3454,8 @@
         </p:nvCxnSpPr>
         <p:spPr>
           <a:xfrm flipV="1">
-            <a:off x="5486400.0" y="1704441.6"/>
-            <a:ext cx="114300.0" cy="49377.60000000009"/>
+            <a:off x="4982565.6" y="2112264.0"/>
+            <a:ext cx="51206.40000000037" cy="26060.399999999907"/>
           </a:xfrm>
           <a:prstGeom prst="line">
             <a:avLst/>
@@ -3489,8 +3489,8 @@
         </p:nvCxnSpPr>
         <p:spPr>
           <a:xfrm flipV="1">
-            <a:off x="5600700.0" y="1657350.0"/>
-            <a:ext cx="114300.0" cy="47091.60000000009"/>
+            <a:off x="5033772.0" y="2087575.2"/>
+            <a:ext cx="51206.40000000037" cy="24688.800000000047"/>
           </a:xfrm>
           <a:prstGeom prst="line">
             <a:avLst/>
@@ -3524,8 +3524,8 @@
         </p:nvCxnSpPr>
         <p:spPr>
           <a:xfrm flipV="1">
-            <a:off x="5715000.0" y="1613001.6"/>
-            <a:ext cx="114300.0" cy="44348.39999999991"/>
+            <a:off x="5084978.4" y="2063800.8"/>
+            <a:ext cx="51663.59999999963" cy="23774.399999999907"/>
           </a:xfrm>
           <a:prstGeom prst="line">
             <a:avLst/>
@@ -3559,8 +3559,8 @@
         </p:nvCxnSpPr>
         <p:spPr>
           <a:xfrm flipV="1">
-            <a:off x="5829300.0" y="1570024.8"/>
-            <a:ext cx="114300.0" cy="42976.80000000005"/>
+            <a:off x="5136642.0" y="2040940.7999999998"/>
+            <a:ext cx="51206.40000000037" cy="22860.000000000233"/>
           </a:xfrm>
           <a:prstGeom prst="line">
             <a:avLst/>
@@ -3594,8 +3594,8 @@
         </p:nvCxnSpPr>
         <p:spPr>
           <a:xfrm flipV="1">
-            <a:off x="5943600.0" y="1528876.7999999998"/>
-            <a:ext cx="114300.0" cy="41148.00000000023"/>
+            <a:off x="5187848.4" y="2019452.4"/>
+            <a:ext cx="51206.39999999944" cy="21488.399999999907"/>
           </a:xfrm>
           <a:prstGeom prst="line">
             <a:avLst/>
@@ -3629,8 +3629,8 @@
         </p:nvCxnSpPr>
         <p:spPr>
           <a:xfrm flipV="1">
-            <a:off x="6057900.0" y="1489557.6"/>
-            <a:ext cx="114300.0" cy="39319.19999999972"/>
+            <a:off x="5239054.8" y="1998878.4"/>
+            <a:ext cx="51206.40000000037" cy="20574.0"/>
           </a:xfrm>
           <a:prstGeom prst="line">
             <a:avLst/>
@@ -3664,8 +3664,8 @@
         </p:nvCxnSpPr>
         <p:spPr>
           <a:xfrm flipV="1">
-            <a:off x="6172200.0" y="1452067.2000000002"/>
-            <a:ext cx="114300.0" cy="37490.39999999991"/>
+            <a:off x="5290261.2" y="1978304.4"/>
+            <a:ext cx="51663.59999999963" cy="20574.0"/>
           </a:xfrm>
           <a:prstGeom prst="line">
             <a:avLst/>
@@ -3699,8 +3699,8 @@
         </p:nvCxnSpPr>
         <p:spPr>
           <a:xfrm flipV="1">
-            <a:off x="6286500.0" y="1415034.0"/>
-            <a:ext cx="114300.0" cy="37033.200000000186"/>
+            <a:off x="5341924.8" y="1959102.0"/>
+            <a:ext cx="51206.40000000037" cy="19202.399999999907"/>
           </a:xfrm>
           <a:prstGeom prst="line">
             <a:avLst/>
@@ -3734,8 +3734,8 @@
         </p:nvCxnSpPr>
         <p:spPr>
           <a:xfrm flipV="1">
-            <a:off x="6400800.0" y="1378915.2"/>
-            <a:ext cx="114300.0" cy="36118.80000000005"/>
+            <a:off x="5393131.2" y="1940356.8"/>
+            <a:ext cx="51206.39999999944" cy="18745.199999999953"/>
           </a:xfrm>
           <a:prstGeom prst="line">
             <a:avLst/>
@@ -3769,8 +3769,8 @@
         </p:nvCxnSpPr>
         <p:spPr>
           <a:xfrm flipV="1">
-            <a:off x="6515100.0" y="1344625.2"/>
-            <a:ext cx="114300.0" cy="34290.0"/>
+            <a:off x="5444337.6" y="1922068.7999999998"/>
+            <a:ext cx="51206.40000000037" cy="18288.000000000233"/>
           </a:xfrm>
           <a:prstGeom prst="line">
             <a:avLst/>
@@ -3804,8 +3804,8 @@
         </p:nvCxnSpPr>
         <p:spPr>
           <a:xfrm flipV="1">
-            <a:off x="6629400.0" y="1311249.5999999999"/>
-            <a:ext cx="114300.0" cy="33375.60000000009"/>
+            <a:off x="5495544.0" y="1904238.0"/>
+            <a:ext cx="51663.59999999963" cy="17830.799999999814"/>
           </a:xfrm>
           <a:prstGeom prst="line">
             <a:avLst/>
@@ -3839,8 +3839,8 @@
         </p:nvCxnSpPr>
         <p:spPr>
           <a:xfrm flipV="1">
-            <a:off x="6743700.0" y="1279245.6"/>
-            <a:ext cx="114300.0" cy="32003.999999999767"/>
+            <a:off x="5547207.6" y="1886864.4"/>
+            <a:ext cx="51206.40000000037" cy="17373.600000000093"/>
           </a:xfrm>
           <a:prstGeom prst="line">
             <a:avLst/>
@@ -3866,15 +3866,1030 @@
           </a:fontRef>
         </p:style>
       </p:cxnSp>
-      <p:sp>
-        <p:nvSpPr>
-          <p:cNvPr id="24" name="Oval 23"/>
+      <p:cxnSp>
+        <p:nvCxnSpPr>
+          <p:cNvPr id="24" name="Connector 23"/>
+          <p:cNvCxnSpPr/>
+          <p:nvPr/>
+        </p:nvCxnSpPr>
+        <p:spPr>
+          <a:xfrm flipV="1">
+            <a:off x="5598414.0" y="1869948.0"/>
+            <a:ext cx="51206.40000000037" cy="16916.399999999907"/>
+          </a:xfrm>
+          <a:prstGeom prst="line">
+            <a:avLst/>
+          </a:prstGeom>
+          <a:ln w="25400">
+            <a:solidFill>
+              <a:srgbClr val="00C8FF"/>
+            </a:solidFill>
+          </a:ln>
+        </p:spPr>
+        <p:style>
+          <a:lnRef idx="2">
+            <a:schemeClr val="accent1"/>
+          </a:lnRef>
+          <a:fillRef idx="0">
+            <a:schemeClr val="accent1"/>
+          </a:fillRef>
+          <a:effectRef idx="1">
+            <a:schemeClr val="accent1"/>
+          </a:effectRef>
+          <a:fontRef idx="minor">
+            <a:schemeClr val="tx1"/>
+          </a:fontRef>
+        </p:style>
+      </p:cxnSp>
+      <p:cxnSp>
+        <p:nvCxnSpPr>
+          <p:cNvPr id="25" name="Connector 24"/>
+          <p:cNvCxnSpPr/>
+          <p:nvPr/>
+        </p:nvCxnSpPr>
+        <p:spPr>
+          <a:xfrm flipV="1">
+            <a:off x="5649620.4" y="1853488.8"/>
+            <a:ext cx="51206.39999999944" cy="16459.199999999953"/>
+          </a:xfrm>
+          <a:prstGeom prst="line">
+            <a:avLst/>
+          </a:prstGeom>
+          <a:ln w="25400">
+            <a:solidFill>
+              <a:srgbClr val="00C8FF"/>
+            </a:solidFill>
+          </a:ln>
+        </p:spPr>
+        <p:style>
+          <a:lnRef idx="2">
+            <a:schemeClr val="accent1"/>
+          </a:lnRef>
+          <a:fillRef idx="0">
+            <a:schemeClr val="accent1"/>
+          </a:fillRef>
+          <a:effectRef idx="1">
+            <a:schemeClr val="accent1"/>
+          </a:effectRef>
+          <a:fontRef idx="minor">
+            <a:schemeClr val="tx1"/>
+          </a:fontRef>
+        </p:style>
+      </p:cxnSp>
+      <p:cxnSp>
+        <p:nvCxnSpPr>
+          <p:cNvPr id="26" name="Connector 25"/>
+          <p:cNvCxnSpPr/>
+          <p:nvPr/>
+        </p:nvCxnSpPr>
+        <p:spPr>
+          <a:xfrm flipV="1">
+            <a:off x="5700826.8" y="1837029.6"/>
+            <a:ext cx="51663.60000000056" cy="16459.199999999953"/>
+          </a:xfrm>
+          <a:prstGeom prst="line">
+            <a:avLst/>
+          </a:prstGeom>
+          <a:ln w="25400">
+            <a:solidFill>
+              <a:srgbClr val="00C8FF"/>
+            </a:solidFill>
+          </a:ln>
+        </p:spPr>
+        <p:style>
+          <a:lnRef idx="2">
+            <a:schemeClr val="accent1"/>
+          </a:lnRef>
+          <a:fillRef idx="0">
+            <a:schemeClr val="accent1"/>
+          </a:fillRef>
+          <a:effectRef idx="1">
+            <a:schemeClr val="accent1"/>
+          </a:effectRef>
+          <a:fontRef idx="minor">
+            <a:schemeClr val="tx1"/>
+          </a:fontRef>
+        </p:style>
+      </p:cxnSp>
+      <p:cxnSp>
+        <p:nvCxnSpPr>
+          <p:cNvPr id="27" name="Connector 26"/>
+          <p:cNvCxnSpPr/>
+          <p:nvPr/>
+        </p:nvCxnSpPr>
+        <p:spPr>
+          <a:xfrm flipV="1">
+            <a:off x="5752490.4" y="1821484.8"/>
+            <a:ext cx="51206.39999999944" cy="15544.800000000047"/>
+          </a:xfrm>
+          <a:prstGeom prst="line">
+            <a:avLst/>
+          </a:prstGeom>
+          <a:ln w="25400">
+            <a:solidFill>
+              <a:srgbClr val="00C8FF"/>
+            </a:solidFill>
+          </a:ln>
+        </p:spPr>
+        <p:style>
+          <a:lnRef idx="2">
+            <a:schemeClr val="accent1"/>
+          </a:lnRef>
+          <a:fillRef idx="0">
+            <a:schemeClr val="accent1"/>
+          </a:fillRef>
+          <a:effectRef idx="1">
+            <a:schemeClr val="accent1"/>
+          </a:effectRef>
+          <a:fontRef idx="minor">
+            <a:schemeClr val="tx1"/>
+          </a:fontRef>
+        </p:style>
+      </p:cxnSp>
+      <p:cxnSp>
+        <p:nvCxnSpPr>
+          <p:cNvPr id="28" name="Connector 27"/>
+          <p:cNvCxnSpPr/>
+          <p:nvPr/>
+        </p:nvCxnSpPr>
+        <p:spPr>
+          <a:xfrm flipV="1">
+            <a:off x="5803696.8" y="1805940.0"/>
+            <a:ext cx="51206.40000000037" cy="15544.800000000047"/>
+          </a:xfrm>
+          <a:prstGeom prst="line">
+            <a:avLst/>
+          </a:prstGeom>
+          <a:ln w="25400">
+            <a:solidFill>
+              <a:srgbClr val="00C8FF"/>
+            </a:solidFill>
+          </a:ln>
+        </p:spPr>
+        <p:style>
+          <a:lnRef idx="2">
+            <a:schemeClr val="accent1"/>
+          </a:lnRef>
+          <a:fillRef idx="0">
+            <a:schemeClr val="accent1"/>
+          </a:fillRef>
+          <a:effectRef idx="1">
+            <a:schemeClr val="accent1"/>
+          </a:effectRef>
+          <a:fontRef idx="minor">
+            <a:schemeClr val="tx1"/>
+          </a:fontRef>
+        </p:style>
+      </p:cxnSp>
+      <p:cxnSp>
+        <p:nvCxnSpPr>
+          <p:cNvPr id="29" name="Connector 28"/>
+          <p:cNvCxnSpPr/>
+          <p:nvPr/>
+        </p:nvCxnSpPr>
+        <p:spPr>
+          <a:xfrm flipV="1">
+            <a:off x="5854903.2" y="1790852.4"/>
+            <a:ext cx="51206.39999999944" cy="15087.600000000093"/>
+          </a:xfrm>
+          <a:prstGeom prst="line">
+            <a:avLst/>
+          </a:prstGeom>
+          <a:ln w="25400">
+            <a:solidFill>
+              <a:srgbClr val="00C8FF"/>
+            </a:solidFill>
+          </a:ln>
+        </p:spPr>
+        <p:style>
+          <a:lnRef idx="2">
+            <a:schemeClr val="accent1"/>
+          </a:lnRef>
+          <a:fillRef idx="0">
+            <a:schemeClr val="accent1"/>
+          </a:fillRef>
+          <a:effectRef idx="1">
+            <a:schemeClr val="accent1"/>
+          </a:effectRef>
+          <a:fontRef idx="minor">
+            <a:schemeClr val="tx1"/>
+          </a:fontRef>
+        </p:style>
+      </p:cxnSp>
+      <p:cxnSp>
+        <p:nvCxnSpPr>
+          <p:cNvPr id="30" name="Connector 29"/>
+          <p:cNvCxnSpPr/>
+          <p:nvPr/>
+        </p:nvCxnSpPr>
+        <p:spPr>
+          <a:xfrm flipV="1">
+            <a:off x="5906109.6" y="1775764.7999999998"/>
+            <a:ext cx="51663.60000000056" cy="15087.600000000093"/>
+          </a:xfrm>
+          <a:prstGeom prst="line">
+            <a:avLst/>
+          </a:prstGeom>
+          <a:ln w="25400">
+            <a:solidFill>
+              <a:srgbClr val="00C8FF"/>
+            </a:solidFill>
+          </a:ln>
+        </p:spPr>
+        <p:style>
+          <a:lnRef idx="2">
+            <a:schemeClr val="accent1"/>
+          </a:lnRef>
+          <a:fillRef idx="0">
+            <a:schemeClr val="accent1"/>
+          </a:fillRef>
+          <a:effectRef idx="1">
+            <a:schemeClr val="accent1"/>
+          </a:effectRef>
+          <a:fontRef idx="minor">
+            <a:schemeClr val="tx1"/>
+          </a:fontRef>
+        </p:style>
+      </p:cxnSp>
+      <p:cxnSp>
+        <p:nvCxnSpPr>
+          <p:cNvPr id="31" name="Connector 30"/>
+          <p:cNvCxnSpPr/>
+          <p:nvPr/>
+        </p:nvCxnSpPr>
+        <p:spPr>
+          <a:xfrm flipV="1">
+            <a:off x="5957773.2" y="1761134.4"/>
+            <a:ext cx="51206.39999999944" cy="14630.399999999907"/>
+          </a:xfrm>
+          <a:prstGeom prst="line">
+            <a:avLst/>
+          </a:prstGeom>
+          <a:ln w="25400">
+            <a:solidFill>
+              <a:srgbClr val="00C8FF"/>
+            </a:solidFill>
+          </a:ln>
+        </p:spPr>
+        <p:style>
+          <a:lnRef idx="2">
+            <a:schemeClr val="accent1"/>
+          </a:lnRef>
+          <a:fillRef idx="0">
+            <a:schemeClr val="accent1"/>
+          </a:fillRef>
+          <a:effectRef idx="1">
+            <a:schemeClr val="accent1"/>
+          </a:effectRef>
+          <a:fontRef idx="minor">
+            <a:schemeClr val="tx1"/>
+          </a:fontRef>
+        </p:style>
+      </p:cxnSp>
+      <p:cxnSp>
+        <p:nvCxnSpPr>
+          <p:cNvPr id="32" name="Connector 31"/>
+          <p:cNvCxnSpPr/>
+          <p:nvPr/>
+        </p:nvCxnSpPr>
+        <p:spPr>
+          <a:xfrm flipV="1">
+            <a:off x="6008979.6" y="1746961.2"/>
+            <a:ext cx="51206.40000000037" cy="14173.199999999953"/>
+          </a:xfrm>
+          <a:prstGeom prst="line">
+            <a:avLst/>
+          </a:prstGeom>
+          <a:ln w="25400">
+            <a:solidFill>
+              <a:srgbClr val="00C8FF"/>
+            </a:solidFill>
+          </a:ln>
+        </p:spPr>
+        <p:style>
+          <a:lnRef idx="2">
+            <a:schemeClr val="accent1"/>
+          </a:lnRef>
+          <a:fillRef idx="0">
+            <a:schemeClr val="accent1"/>
+          </a:fillRef>
+          <a:effectRef idx="1">
+            <a:schemeClr val="accent1"/>
+          </a:effectRef>
+          <a:fontRef idx="minor">
+            <a:schemeClr val="tx1"/>
+          </a:fontRef>
+        </p:style>
+      </p:cxnSp>
+      <p:cxnSp>
+        <p:nvCxnSpPr>
+          <p:cNvPr id="33" name="Connector 32"/>
+          <p:cNvCxnSpPr/>
+          <p:nvPr/>
+        </p:nvCxnSpPr>
+        <p:spPr>
+          <a:xfrm flipV="1">
+            <a:off x="6060186.0" y="1732788.0"/>
+            <a:ext cx="51206.40000000037" cy="14173.199999999953"/>
+          </a:xfrm>
+          <a:prstGeom prst="line">
+            <a:avLst/>
+          </a:prstGeom>
+          <a:ln w="25400">
+            <a:solidFill>
+              <a:srgbClr val="00C8FF"/>
+            </a:solidFill>
+          </a:ln>
+        </p:spPr>
+        <p:style>
+          <a:lnRef idx="2">
+            <a:schemeClr val="accent1"/>
+          </a:lnRef>
+          <a:fillRef idx="0">
+            <a:schemeClr val="accent1"/>
+          </a:fillRef>
+          <a:effectRef idx="1">
+            <a:schemeClr val="accent1"/>
+          </a:effectRef>
+          <a:fontRef idx="minor">
+            <a:schemeClr val="tx1"/>
+          </a:fontRef>
+        </p:style>
+      </p:cxnSp>
+      <p:cxnSp>
+        <p:nvCxnSpPr>
+          <p:cNvPr id="34" name="Connector 33"/>
+          <p:cNvCxnSpPr/>
+          <p:nvPr/>
+        </p:nvCxnSpPr>
+        <p:spPr>
+          <a:xfrm flipV="1">
+            <a:off x="6111392.4" y="1719072.0"/>
+            <a:ext cx="51663.59999999963" cy="13716.0"/>
+          </a:xfrm>
+          <a:prstGeom prst="line">
+            <a:avLst/>
+          </a:prstGeom>
+          <a:ln w="25400">
+            <a:solidFill>
+              <a:srgbClr val="00C8FF"/>
+            </a:solidFill>
+          </a:ln>
+        </p:spPr>
+        <p:style>
+          <a:lnRef idx="2">
+            <a:schemeClr val="accent1"/>
+          </a:lnRef>
+          <a:fillRef idx="0">
+            <a:schemeClr val="accent1"/>
+          </a:fillRef>
+          <a:effectRef idx="1">
+            <a:schemeClr val="accent1"/>
+          </a:effectRef>
+          <a:fontRef idx="minor">
+            <a:schemeClr val="tx1"/>
+          </a:fontRef>
+        </p:style>
+      </p:cxnSp>
+      <p:cxnSp>
+        <p:nvCxnSpPr>
+          <p:cNvPr id="35" name="Connector 34"/>
+          <p:cNvCxnSpPr/>
+          <p:nvPr/>
+        </p:nvCxnSpPr>
+        <p:spPr>
+          <a:xfrm flipV="1">
+            <a:off x="6163056.0" y="1705356.0"/>
+            <a:ext cx="51206.40000000037" cy="13716.0"/>
+          </a:xfrm>
+          <a:prstGeom prst="line">
+            <a:avLst/>
+          </a:prstGeom>
+          <a:ln w="25400">
+            <a:solidFill>
+              <a:srgbClr val="00C8FF"/>
+            </a:solidFill>
+          </a:ln>
+        </p:spPr>
+        <p:style>
+          <a:lnRef idx="2">
+            <a:schemeClr val="accent1"/>
+          </a:lnRef>
+          <a:fillRef idx="0">
+            <a:schemeClr val="accent1"/>
+          </a:fillRef>
+          <a:effectRef idx="1">
+            <a:schemeClr val="accent1"/>
+          </a:effectRef>
+          <a:fontRef idx="minor">
+            <a:schemeClr val="tx1"/>
+          </a:fontRef>
+        </p:style>
+      </p:cxnSp>
+      <p:cxnSp>
+        <p:nvCxnSpPr>
+          <p:cNvPr id="36" name="Connector 35"/>
+          <p:cNvCxnSpPr/>
+          <p:nvPr/>
+        </p:nvCxnSpPr>
+        <p:spPr>
+          <a:xfrm flipV="1">
+            <a:off x="6214262.4" y="1691640.0"/>
+            <a:ext cx="51206.39999999944" cy="13716.0"/>
+          </a:xfrm>
+          <a:prstGeom prst="line">
+            <a:avLst/>
+          </a:prstGeom>
+          <a:ln w="25400">
+            <a:solidFill>
+              <a:srgbClr val="00C8FF"/>
+            </a:solidFill>
+          </a:ln>
+        </p:spPr>
+        <p:style>
+          <a:lnRef idx="2">
+            <a:schemeClr val="accent1"/>
+          </a:lnRef>
+          <a:fillRef idx="0">
+            <a:schemeClr val="accent1"/>
+          </a:fillRef>
+          <a:effectRef idx="1">
+            <a:schemeClr val="accent1"/>
+          </a:effectRef>
+          <a:fontRef idx="minor">
+            <a:schemeClr val="tx1"/>
+          </a:fontRef>
+        </p:style>
+      </p:cxnSp>
+      <p:cxnSp>
+        <p:nvCxnSpPr>
+          <p:cNvPr id="37" name="Connector 36"/>
+          <p:cNvCxnSpPr/>
+          <p:nvPr/>
+        </p:nvCxnSpPr>
+        <p:spPr>
+          <a:xfrm flipV="1">
+            <a:off x="6265468.8" y="1678838.4"/>
+            <a:ext cx="51206.40000000037" cy="12801.600000000093"/>
+          </a:xfrm>
+          <a:prstGeom prst="line">
+            <a:avLst/>
+          </a:prstGeom>
+          <a:ln w="25400">
+            <a:solidFill>
+              <a:srgbClr val="00C8FF"/>
+            </a:solidFill>
+          </a:ln>
+        </p:spPr>
+        <p:style>
+          <a:lnRef idx="2">
+            <a:schemeClr val="accent1"/>
+          </a:lnRef>
+          <a:fillRef idx="0">
+            <a:schemeClr val="accent1"/>
+          </a:fillRef>
+          <a:effectRef idx="1">
+            <a:schemeClr val="accent1"/>
+          </a:effectRef>
+          <a:fontRef idx="minor">
+            <a:schemeClr val="tx1"/>
+          </a:fontRef>
+        </p:style>
+      </p:cxnSp>
+      <p:cxnSp>
+        <p:nvCxnSpPr>
+          <p:cNvPr id="38" name="Connector 37"/>
+          <p:cNvCxnSpPr/>
+          <p:nvPr/>
+        </p:nvCxnSpPr>
+        <p:spPr>
+          <a:xfrm flipV="1">
+            <a:off x="6316675.2" y="1665579.6"/>
+            <a:ext cx="51663.59999999963" cy="13258.799999999814"/>
+          </a:xfrm>
+          <a:prstGeom prst="line">
+            <a:avLst/>
+          </a:prstGeom>
+          <a:ln w="25400">
+            <a:solidFill>
+              <a:srgbClr val="00C8FF"/>
+            </a:solidFill>
+          </a:ln>
+        </p:spPr>
+        <p:style>
+          <a:lnRef idx="2">
+            <a:schemeClr val="accent1"/>
+          </a:lnRef>
+          <a:fillRef idx="0">
+            <a:schemeClr val="accent1"/>
+          </a:fillRef>
+          <a:effectRef idx="1">
+            <a:schemeClr val="accent1"/>
+          </a:effectRef>
+          <a:fontRef idx="minor">
+            <a:schemeClr val="tx1"/>
+          </a:fontRef>
+        </p:style>
+      </p:cxnSp>
+      <p:cxnSp>
+        <p:nvCxnSpPr>
+          <p:cNvPr id="39" name="Connector 38"/>
+          <p:cNvCxnSpPr/>
+          <p:nvPr/>
+        </p:nvCxnSpPr>
+        <p:spPr>
+          <a:xfrm flipV="1">
+            <a:off x="6368338.8" y="1652778.0"/>
+            <a:ext cx="51206.40000000037" cy="12801.600000000093"/>
+          </a:xfrm>
+          <a:prstGeom prst="line">
+            <a:avLst/>
+          </a:prstGeom>
+          <a:ln w="25400">
+            <a:solidFill>
+              <a:srgbClr val="00C8FF"/>
+            </a:solidFill>
+          </a:ln>
+        </p:spPr>
+        <p:style>
+          <a:lnRef idx="2">
+            <a:schemeClr val="accent1"/>
+          </a:lnRef>
+          <a:fillRef idx="0">
+            <a:schemeClr val="accent1"/>
+          </a:fillRef>
+          <a:effectRef idx="1">
+            <a:schemeClr val="accent1"/>
+          </a:effectRef>
+          <a:fontRef idx="minor">
+            <a:schemeClr val="tx1"/>
+          </a:fontRef>
+        </p:style>
+      </p:cxnSp>
+      <p:cxnSp>
+        <p:nvCxnSpPr>
+          <p:cNvPr id="40" name="Connector 39"/>
+          <p:cNvCxnSpPr/>
+          <p:nvPr/>
+        </p:nvCxnSpPr>
+        <p:spPr>
+          <a:xfrm flipV="1">
+            <a:off x="6419545.2" y="1639976.4000000001"/>
+            <a:ext cx="51206.39999999944" cy="12801.59999999986"/>
+          </a:xfrm>
+          <a:prstGeom prst="line">
+            <a:avLst/>
+          </a:prstGeom>
+          <a:ln w="25400">
+            <a:solidFill>
+              <a:srgbClr val="00C8FF"/>
+            </a:solidFill>
+          </a:ln>
+        </p:spPr>
+        <p:style>
+          <a:lnRef idx="2">
+            <a:schemeClr val="accent1"/>
+          </a:lnRef>
+          <a:fillRef idx="0">
+            <a:schemeClr val="accent1"/>
+          </a:fillRef>
+          <a:effectRef idx="1">
+            <a:schemeClr val="accent1"/>
+          </a:effectRef>
+          <a:fontRef idx="minor">
+            <a:schemeClr val="tx1"/>
+          </a:fontRef>
+        </p:style>
+      </p:cxnSp>
+      <p:cxnSp>
+        <p:nvCxnSpPr>
+          <p:cNvPr id="41" name="Connector 40"/>
+          <p:cNvCxnSpPr/>
+          <p:nvPr/>
+        </p:nvCxnSpPr>
+        <p:spPr>
+          <a:xfrm flipV="1">
+            <a:off x="6470751.6" y="1627632.0"/>
+            <a:ext cx="51206.40000000037" cy="12344.40000000014"/>
+          </a:xfrm>
+          <a:prstGeom prst="line">
+            <a:avLst/>
+          </a:prstGeom>
+          <a:ln w="25400">
+            <a:solidFill>
+              <a:srgbClr val="00C8FF"/>
+            </a:solidFill>
+          </a:ln>
+        </p:spPr>
+        <p:style>
+          <a:lnRef idx="2">
+            <a:schemeClr val="accent1"/>
+          </a:lnRef>
+          <a:fillRef idx="0">
+            <a:schemeClr val="accent1"/>
+          </a:fillRef>
+          <a:effectRef idx="1">
+            <a:schemeClr val="accent1"/>
+          </a:effectRef>
+          <a:fontRef idx="minor">
+            <a:schemeClr val="tx1"/>
+          </a:fontRef>
+        </p:style>
+      </p:cxnSp>
+      <p:cxnSp>
+        <p:nvCxnSpPr>
+          <p:cNvPr id="42" name="Connector 41"/>
+          <p:cNvCxnSpPr/>
+          <p:nvPr/>
+        </p:nvCxnSpPr>
+        <p:spPr>
+          <a:xfrm flipV="1">
+            <a:off x="6521958.0" y="1615287.6"/>
+            <a:ext cx="51663.59999999963" cy="12344.399999999907"/>
+          </a:xfrm>
+          <a:prstGeom prst="line">
+            <a:avLst/>
+          </a:prstGeom>
+          <a:ln w="25400">
+            <a:solidFill>
+              <a:srgbClr val="00C8FF"/>
+            </a:solidFill>
+          </a:ln>
+        </p:spPr>
+        <p:style>
+          <a:lnRef idx="2">
+            <a:schemeClr val="accent1"/>
+          </a:lnRef>
+          <a:fillRef idx="0">
+            <a:schemeClr val="accent1"/>
+          </a:fillRef>
+          <a:effectRef idx="1">
+            <a:schemeClr val="accent1"/>
+          </a:effectRef>
+          <a:fontRef idx="minor">
+            <a:schemeClr val="tx1"/>
+          </a:fontRef>
+        </p:style>
+      </p:cxnSp>
+      <p:cxnSp>
+        <p:nvCxnSpPr>
+          <p:cNvPr id="43" name="Connector 42"/>
+          <p:cNvCxnSpPr/>
+          <p:nvPr/>
+        </p:nvCxnSpPr>
+        <p:spPr>
+          <a:xfrm flipV="1">
+            <a:off x="6573621.6" y="1602943.2"/>
+            <a:ext cx="51206.40000000037" cy="12344.40000000014"/>
+          </a:xfrm>
+          <a:prstGeom prst="line">
+            <a:avLst/>
+          </a:prstGeom>
+          <a:ln w="25400">
+            <a:solidFill>
+              <a:srgbClr val="00C8FF"/>
+            </a:solidFill>
+          </a:ln>
+        </p:spPr>
+        <p:style>
+          <a:lnRef idx="2">
+            <a:schemeClr val="accent1"/>
+          </a:lnRef>
+          <a:fillRef idx="0">
+            <a:schemeClr val="accent1"/>
+          </a:fillRef>
+          <a:effectRef idx="1">
+            <a:schemeClr val="accent1"/>
+          </a:effectRef>
+          <a:fontRef idx="minor">
+            <a:schemeClr val="tx1"/>
+          </a:fontRef>
+        </p:style>
+      </p:cxnSp>
+      <p:cxnSp>
+        <p:nvCxnSpPr>
+          <p:cNvPr id="44" name="Connector 43"/>
+          <p:cNvCxnSpPr/>
+          <p:nvPr/>
+        </p:nvCxnSpPr>
+        <p:spPr>
+          <a:xfrm flipV="1">
+            <a:off x="6624828.0" y="1591056.0"/>
+            <a:ext cx="51206.40000000037" cy="11887.199999999953"/>
+          </a:xfrm>
+          <a:prstGeom prst="line">
+            <a:avLst/>
+          </a:prstGeom>
+          <a:ln w="25400">
+            <a:solidFill>
+              <a:srgbClr val="00C8FF"/>
+            </a:solidFill>
+          </a:ln>
+        </p:spPr>
+        <p:style>
+          <a:lnRef idx="2">
+            <a:schemeClr val="accent1"/>
+          </a:lnRef>
+          <a:fillRef idx="0">
+            <a:schemeClr val="accent1"/>
+          </a:fillRef>
+          <a:effectRef idx="1">
+            <a:schemeClr val="accent1"/>
+          </a:effectRef>
+          <a:fontRef idx="minor">
+            <a:schemeClr val="tx1"/>
+          </a:fontRef>
+        </p:style>
+      </p:cxnSp>
+      <p:cxnSp>
+        <p:nvCxnSpPr>
+          <p:cNvPr id="45" name="Connector 44"/>
+          <p:cNvCxnSpPr/>
+          <p:nvPr/>
+        </p:nvCxnSpPr>
+        <p:spPr>
+          <a:xfrm flipV="1">
+            <a:off x="6676034.4" y="1579168.8"/>
+            <a:ext cx="51206.40000000037" cy="11887.199999999953"/>
+          </a:xfrm>
+          <a:prstGeom prst="line">
+            <a:avLst/>
+          </a:prstGeom>
+          <a:ln w="25400">
+            <a:solidFill>
+              <a:srgbClr val="00C8FF"/>
+            </a:solidFill>
+          </a:ln>
+        </p:spPr>
+        <p:style>
+          <a:lnRef idx="2">
+            <a:schemeClr val="accent1"/>
+          </a:lnRef>
+          <a:fillRef idx="0">
+            <a:schemeClr val="accent1"/>
+          </a:fillRef>
+          <a:effectRef idx="1">
+            <a:schemeClr val="accent1"/>
+          </a:effectRef>
+          <a:fontRef idx="minor">
+            <a:schemeClr val="tx1"/>
+          </a:fontRef>
+        </p:style>
+      </p:cxnSp>
+      <p:cxnSp>
+        <p:nvCxnSpPr>
+          <p:cNvPr id="46" name="Connector 45"/>
+          <p:cNvCxnSpPr/>
+          <p:nvPr/>
+        </p:nvCxnSpPr>
+        <p:spPr>
+          <a:xfrm flipV="1">
+            <a:off x="6727240.800000001" y="1567281.6"/>
+            <a:ext cx="51663.59999999963" cy="11887.199999999953"/>
+          </a:xfrm>
+          <a:prstGeom prst="line">
+            <a:avLst/>
+          </a:prstGeom>
+          <a:ln w="25400">
+            <a:solidFill>
+              <a:srgbClr val="00C8FF"/>
+            </a:solidFill>
+          </a:ln>
+        </p:spPr>
+        <p:style>
+          <a:lnRef idx="2">
+            <a:schemeClr val="accent1"/>
+          </a:lnRef>
+          <a:fillRef idx="0">
+            <a:schemeClr val="accent1"/>
+          </a:fillRef>
+          <a:effectRef idx="1">
+            <a:schemeClr val="accent1"/>
+          </a:effectRef>
+          <a:fontRef idx="minor">
+            <a:schemeClr val="tx1"/>
+          </a:fontRef>
+        </p:style>
+      </p:cxnSp>
+      <p:cxnSp>
+        <p:nvCxnSpPr>
+          <p:cNvPr id="47" name="Connector 46"/>
+          <p:cNvCxnSpPr/>
+          <p:nvPr/>
+        </p:nvCxnSpPr>
+        <p:spPr>
+          <a:xfrm flipV="1">
+            <a:off x="6778904.4" y="1555851.6"/>
+            <a:ext cx="51206.39999999944" cy="11430.0"/>
+          </a:xfrm>
+          <a:prstGeom prst="line">
+            <a:avLst/>
+          </a:prstGeom>
+          <a:ln w="25400">
+            <a:solidFill>
+              <a:srgbClr val="00C8FF"/>
+            </a:solidFill>
+          </a:ln>
+        </p:spPr>
+        <p:style>
+          <a:lnRef idx="2">
+            <a:schemeClr val="accent1"/>
+          </a:lnRef>
+          <a:fillRef idx="0">
+            <a:schemeClr val="accent1"/>
+          </a:fillRef>
+          <a:effectRef idx="1">
+            <a:schemeClr val="accent1"/>
+          </a:effectRef>
+          <a:fontRef idx="minor">
+            <a:schemeClr val="tx1"/>
+          </a:fontRef>
+        </p:style>
+      </p:cxnSp>
+      <p:cxnSp>
+        <p:nvCxnSpPr>
+          <p:cNvPr id="48" name="Connector 47"/>
+          <p:cNvCxnSpPr/>
+          <p:nvPr/>
+        </p:nvCxnSpPr>
+        <p:spPr>
+          <a:xfrm flipV="1">
+            <a:off x="6830110.8" y="1544421.6"/>
+            <a:ext cx="51206.40000000037" cy="11430.0"/>
+          </a:xfrm>
+          <a:prstGeom prst="line">
+            <a:avLst/>
+          </a:prstGeom>
+          <a:ln w="25400">
+            <a:solidFill>
+              <a:srgbClr val="00C8FF"/>
+            </a:solidFill>
+          </a:ln>
+        </p:spPr>
+        <p:style>
+          <a:lnRef idx="2">
+            <a:schemeClr val="accent1"/>
+          </a:lnRef>
+          <a:fillRef idx="0">
+            <a:schemeClr val="accent1"/>
+          </a:fillRef>
+          <a:effectRef idx="1">
+            <a:schemeClr val="accent1"/>
+          </a:effectRef>
+          <a:fontRef idx="minor">
+            <a:schemeClr val="tx1"/>
+          </a:fontRef>
+        </p:style>
+      </p:cxnSp>
+      <p:cxnSp>
+        <p:nvCxnSpPr>
+          <p:cNvPr id="49" name="Connector 48"/>
+          <p:cNvCxnSpPr/>
+          <p:nvPr/>
+        </p:nvCxnSpPr>
+        <p:spPr>
+          <a:xfrm flipV="1">
+            <a:off x="6881317.2" y="1532991.6"/>
+            <a:ext cx="51206.39999999944" cy="11430.0"/>
+          </a:xfrm>
+          <a:prstGeom prst="line">
+            <a:avLst/>
+          </a:prstGeom>
+          <a:ln w="25400">
+            <a:solidFill>
+              <a:srgbClr val="00C8FF"/>
+            </a:solidFill>
+          </a:ln>
+        </p:spPr>
+        <p:style>
+          <a:lnRef idx="2">
+            <a:schemeClr val="accent1"/>
+          </a:lnRef>
+          <a:fillRef idx="0">
+            <a:schemeClr val="accent1"/>
+          </a:fillRef>
+          <a:effectRef idx="1">
+            <a:schemeClr val="accent1"/>
+          </a:effectRef>
+          <a:fontRef idx="minor">
+            <a:schemeClr val="tx1"/>
+          </a:fontRef>
+        </p:style>
+      </p:cxnSp>
+      <p:cxnSp>
+        <p:nvCxnSpPr>
+          <p:cNvPr id="50" name="Connector 49"/>
+          <p:cNvCxnSpPr/>
+          <p:nvPr/>
+        </p:nvCxnSpPr>
+        <p:spPr>
+          <a:xfrm flipV="1">
+            <a:off x="6932523.6" y="1521561.5999999999"/>
+            <a:ext cx="51663.59999999963" cy="11430.000000000233"/>
+          </a:xfrm>
+          <a:prstGeom prst="line">
+            <a:avLst/>
+          </a:prstGeom>
+          <a:ln w="25400">
+            <a:solidFill>
+              <a:srgbClr val="00C8FF"/>
+            </a:solidFill>
+          </a:ln>
+        </p:spPr>
+        <p:style>
+          <a:lnRef idx="2">
+            <a:schemeClr val="accent1"/>
+          </a:lnRef>
+          <a:fillRef idx="0">
+            <a:schemeClr val="accent1"/>
+          </a:fillRef>
+          <a:effectRef idx="1">
+            <a:schemeClr val="accent1"/>
+          </a:effectRef>
+          <a:fontRef idx="minor">
+            <a:schemeClr val="tx1"/>
+          </a:fontRef>
+        </p:style>
+      </p:cxnSp>
+      <p:cxnSp>
+        <p:nvCxnSpPr>
+          <p:cNvPr id="51" name="Connector 50"/>
+          <p:cNvCxnSpPr/>
+          <p:nvPr/>
+        </p:nvCxnSpPr>
+        <p:spPr>
+          <a:xfrm flipV="1">
+            <a:off x="6984187.199999999" y="1510588.7999999998"/>
+            <a:ext cx="51206.40000000037" cy="10972.800000000047"/>
+          </a:xfrm>
+          <a:prstGeom prst="line">
+            <a:avLst/>
+          </a:prstGeom>
+          <a:ln w="25400">
+            <a:solidFill>
+              <a:srgbClr val="00C8FF"/>
+            </a:solidFill>
+          </a:ln>
+        </p:spPr>
+        <p:style>
+          <a:lnRef idx="2">
+            <a:schemeClr val="accent1"/>
+          </a:lnRef>
+          <a:fillRef idx="0">
+            <a:schemeClr val="accent1"/>
+          </a:fillRef>
+          <a:effectRef idx="1">
+            <a:schemeClr val="accent1"/>
+          </a:effectRef>
+          <a:fontRef idx="minor">
+            <a:schemeClr val="tx1"/>
+          </a:fontRef>
+        </p:style>
+      </p:cxnSp>
+      <p:cxnSp>
+        <p:nvCxnSpPr>
+          <p:cNvPr id="52" name="Connector 51"/>
+          <p:cNvCxnSpPr/>
+          <p:nvPr/>
+        </p:nvCxnSpPr>
+        <p:spPr>
+          <a:xfrm flipV="1">
+            <a:off x="7035393.6" y="1499616.0"/>
+            <a:ext cx="51206.40000000037" cy="10972.799999999814"/>
+          </a:xfrm>
+          <a:prstGeom prst="line">
+            <a:avLst/>
+          </a:prstGeom>
+          <a:ln w="25400">
+            <a:solidFill>
+              <a:srgbClr val="00C8FF"/>
+            </a:solidFill>
+          </a:ln>
+        </p:spPr>
+        <p:style>
+          <a:lnRef idx="2">
+            <a:schemeClr val="accent1"/>
+          </a:lnRef>
+          <a:fillRef idx="0">
+            <a:schemeClr val="accent1"/>
+          </a:fillRef>
+          <a:effectRef idx="1">
+            <a:schemeClr val="accent1"/>
+          </a:effectRef>
+          <a:fontRef idx="minor">
+            <a:schemeClr val="tx1"/>
+          </a:fontRef>
+        </p:style>
+      </p:cxnSp>
+      <p:sp>
+        <p:nvSpPr>
+          <p:cNvPr id="53" name="Oval 52"/>
           <p:cNvSpPr/>
           <p:nvPr/>
         </p:nvSpPr>
         <p:spPr>
           <a:xfrm>
-            <a:off x="5676900" y="1619250"/>
+            <a:off x="6134100" y="1678228"/>
             <a:ext cx="76200" cy="76200"/>
           </a:xfrm>
           <a:prstGeom prst="ellipse">
@@ -3911,13 +4926,13 @@
       </p:sp>
       <p:sp>
         <p:nvSpPr>
-          <p:cNvPr id="25" name="TextBox 24"/>
+          <p:cNvPr id="54" name="TextBox 53"/>
           <p:cNvSpPr txBox="1"/>
           <p:nvPr/>
         </p:nvSpPr>
         <p:spPr>
           <a:xfrm>
-            <a:off x="6400800" y="1200150"/>
+            <a:off x="6492240" y="971550"/>
             <a:ext cx="635000" cy="254000"/>
           </a:xfrm>
           <a:prstGeom prst="rect">
@@ -3941,42 +4956,6 @@
             </a:pPr>
             <a:r>
               <a:t>$y=f(x)$</a:t>
-            </a:r>
-          </a:p>
-        </p:txBody>
-      </p:sp>
-      <p:sp>
-        <p:nvSpPr>
-          <p:cNvPr id="26" name="TextBox 25"/>
-          <p:cNvSpPr txBox="1"/>
-          <p:nvPr/>
-        </p:nvSpPr>
-        <p:spPr>
-          <a:xfrm>
-            <a:off x="5715000" y="2663190"/>
-            <a:ext cx="635000" cy="254000"/>
-          </a:xfrm>
-          <a:prstGeom prst="rect">
-            <a:avLst/>
-          </a:prstGeom>
-          <a:noFill/>
-        </p:spPr>
-        <p:txBody>
-          <a:bodyPr wrap="none">
-            <a:spAutoFit/>
-          </a:bodyPr>
-          <a:lstStyle/>
-          <a:p>
-            <a:pPr>
-              <a:defRPr sz="1200">
-                <a:solidFill>
-                  <a:srgbClr val="FFFFFF"/>
-                </a:solidFill>
-                <a:latin typeface="Inter"/>
-              </a:defRPr>
-            </a:pPr>
-            <a:r>
-              <a:t>$a$</a:t>
             </a:r>
           </a:p>
         </p:txBody>

--- a/output/4.pptx
+++ b/output/4.pptx
@@ -3174,8 +3174,8 @@
         </p:nvCxnSpPr>
         <p:spPr>
           <a:xfrm flipV="1">
-            <a:off x="4572000.0" y="2418588.0"/>
-            <a:ext cx="51206.40000000037" cy="153162.0"/>
+            <a:off x="4572000.0" y="2172520.7020514654"/>
+            <a:ext cx="41987.75510204118" cy="262069.2979485346"/>
           </a:xfrm>
           <a:prstGeom prst="line">
             <a:avLst/>
@@ -3209,8 +3209,8 @@
         </p:nvCxnSpPr>
         <p:spPr>
           <a:xfrm flipV="1">
-            <a:off x="4623206.4" y="2355494.4"/>
-            <a:ext cx="51206.39999999944" cy="63093.60000000009"/>
+            <a:off x="4613987.755102041" y="2083760.827023324"/>
+            <a:ext cx="41987.755102040246" cy="88759.87502814131"/>
           </a:xfrm>
           <a:prstGeom prst="line">
             <a:avLst/>
@@ -3244,8 +3244,8 @@
         </p:nvCxnSpPr>
         <p:spPr>
           <a:xfrm flipV="1">
-            <a:off x="4674412.8" y="2306574.0"/>
-            <a:ext cx="51663.60000000056" cy="48920.39999999991"/>
+            <a:off x="4655975.510204081" y="2024515.960067215"/>
+            <a:ext cx="41987.75510204118" cy="59244.86695610918"/>
           </a:xfrm>
           <a:prstGeom prst="line">
             <a:avLst/>
@@ -3279,8 +3279,8 @@
         </p:nvCxnSpPr>
         <p:spPr>
           <a:xfrm flipV="1">
-            <a:off x="4726076.4" y="2265426.0"/>
-            <a:ext cx="51206.39999999944" cy="41148.0"/>
+            <a:off x="4697963.265306123" y="1977606.9779794822"/>
+            <a:ext cx="41987.755102040246" cy="46908.98208773276"/>
           </a:xfrm>
           <a:prstGeom prst="line">
             <a:avLst/>
@@ -3314,8 +3314,8 @@
         </p:nvCxnSpPr>
         <p:spPr>
           <a:xfrm flipV="1">
-            <a:off x="4777282.8" y="2229307.2"/>
-            <a:ext cx="51206.40000000037" cy="36118.799999999814"/>
+            <a:off x="4739951.020408163" y="1938385.1800869624"/>
+            <a:ext cx="41987.75510204118" cy="39221.79789251974"/>
           </a:xfrm>
           <a:prstGeom prst="line">
             <a:avLst/>
@@ -3349,8 +3349,8 @@
         </p:nvCxnSpPr>
         <p:spPr>
           <a:xfrm flipV="1">
-            <a:off x="4828489.2" y="2196846.0"/>
-            <a:ext cx="51206.39999999944" cy="32461.200000000186"/>
+            <a:off x="4781938.775510204" y="1904378.8787069714"/>
+            <a:ext cx="41987.75510204118" cy="34006.301379991"/>
           </a:xfrm>
           <a:prstGeom prst="line">
             <a:avLst/>
@@ -3384,8 +3384,8 @@
         </p:nvCxnSpPr>
         <p:spPr>
           <a:xfrm flipV="1">
-            <a:off x="4879695.6" y="2166213.6"/>
-            <a:ext cx="51663.60000000056" cy="30632.399999999907"/>
+            <a:off x="4823926.530612245" y="1873935.0980027935"/>
+            <a:ext cx="41987.755102040246" cy="30443.780704177916"/>
           </a:xfrm>
           <a:prstGeom prst="line">
             <a:avLst/>
@@ -3419,8 +3419,8 @@
         </p:nvCxnSpPr>
         <p:spPr>
           <a:xfrm flipV="1">
-            <a:off x="4931359.2" y="2138324.4"/>
-            <a:ext cx="51206.39999999944" cy="27889.200000000186"/>
+            <a:off x="4865914.285714285" y="1846172.6576112518"/>
+            <a:ext cx="41987.75510204118" cy="27762.44039154169"/>
           </a:xfrm>
           <a:prstGeom prst="line">
             <a:avLst/>
@@ -3454,8 +3454,8 @@
         </p:nvCxnSpPr>
         <p:spPr>
           <a:xfrm flipV="1">
-            <a:off x="4982565.6" y="2112264.0"/>
-            <a:ext cx="51206.40000000037" cy="26060.399999999907"/>
+            <a:off x="4907902.040816327" y="1820571.133193146"/>
+            <a:ext cx="41987.75510204118" cy="25601.524418105837"/>
           </a:xfrm>
           <a:prstGeom prst="line">
             <a:avLst/>
@@ -3489,8 +3489,8 @@
         </p:nvCxnSpPr>
         <p:spPr>
           <a:xfrm flipV="1">
-            <a:off x="5033772.0" y="2087575.2"/>
-            <a:ext cx="51206.40000000037" cy="24688.800000000047"/>
+            <a:off x="4949889.795918368" y="1796669.649658857"/>
+            <a:ext cx="41987.755102040246" cy="23901.48353428906"/>
           </a:xfrm>
           <a:prstGeom prst="line">
             <a:avLst/>
@@ -3524,8 +3524,8 @@
         </p:nvCxnSpPr>
         <p:spPr>
           <a:xfrm flipV="1">
-            <a:off x="5084978.4" y="2063800.8"/>
-            <a:ext cx="51663.59999999963" cy="23774.399999999907"/>
+            <a:off x="4991877.551020408" y="1774128.9955745246"/>
+            <a:ext cx="41987.75510204118" cy="22540.654084332287"/>
           </a:xfrm>
           <a:prstGeom prst="line">
             <a:avLst/>
@@ -3559,8 +3559,8 @@
         </p:nvCxnSpPr>
         <p:spPr>
           <a:xfrm flipV="1">
-            <a:off x="5136642.0" y="2040940.7999999998"/>
-            <a:ext cx="51206.40000000037" cy="22860.000000000233"/>
+            <a:off x="5033865.306122449" y="1752720.9110635037"/>
+            <a:ext cx="41987.755102040246" cy="21408.08451102092"/>
           </a:xfrm>
           <a:prstGeom prst="line">
             <a:avLst/>
@@ -3594,8 +3594,8 @@
         </p:nvCxnSpPr>
         <p:spPr>
           <a:xfrm flipV="1">
-            <a:off x="5187848.4" y="2019452.4"/>
-            <a:ext cx="51206.39999999944" cy="21488.399999999907"/>
+            <a:off x="5075853.0612244895" y="1732282.8457247848"/>
+            <a:ext cx="41987.75510204118" cy="20438.065338718938"/>
           </a:xfrm>
           <a:prstGeom prst="line">
             <a:avLst/>
@@ -3629,8 +3629,8 @@
         </p:nvCxnSpPr>
         <p:spPr>
           <a:xfrm flipV="1">
-            <a:off x="5239054.8" y="1998878.4"/>
-            <a:ext cx="51206.40000000037" cy="20574.0"/>
+            <a:off x="5117840.816326531" y="1712693.9259058111"/>
+            <a:ext cx="41987.755102040246" cy="19588.919818973634"/>
           </a:xfrm>
           <a:prstGeom prst="line">
             <a:avLst/>
@@ -3664,8 +3664,8 @@
         </p:nvCxnSpPr>
         <p:spPr>
           <a:xfrm flipV="1">
-            <a:off x="5290261.2" y="1978304.4"/>
-            <a:ext cx="51663.59999999963" cy="20574.0"/>
+            <a:off x="5159828.571428571" y="1693856.0628520916"/>
+            <a:ext cx="41987.75510204118" cy="18837.863053719513"/>
           </a:xfrm>
           <a:prstGeom prst="line">
             <a:avLst/>
@@ -3699,8 +3699,8 @@
         </p:nvCxnSpPr>
         <p:spPr>
           <a:xfrm flipV="1">
-            <a:off x="5341924.8" y="1959102.0"/>
-            <a:ext cx="51206.40000000037" cy="19202.399999999907"/>
+            <a:off x="5201816.326530612" y="1675685.0349138053"/>
+            <a:ext cx="41987.75510204118" cy="18171.02793828631"/>
           </a:xfrm>
           <a:prstGeom prst="line">
             <a:avLst/>
@@ -3734,8 +3734,8 @@
         </p:nvCxnSpPr>
         <p:spPr>
           <a:xfrm flipV="1">
-            <a:off x="5393131.2" y="1940356.8"/>
-            <a:ext cx="51206.39999999944" cy="18745.199999999953"/>
+            <a:off x="5243804.081632653" y="1658109.9805265223"/>
+            <a:ext cx="41987.755102040246" cy="17575.054387283046"/>
           </a:xfrm>
           <a:prstGeom prst="line">
             <a:avLst/>
@@ -3769,8 +3769,8 @@
         </p:nvCxnSpPr>
         <p:spPr>
           <a:xfrm flipV="1">
-            <a:off x="5444337.6" y="1922068.7999999998"/>
-            <a:ext cx="51206.40000000037" cy="18288.000000000233"/>
+            <a:off x="5285791.8367346935" y="1641070.0240802872"/>
+            <a:ext cx="41987.75510204118" cy="17039.956446235068"/>
           </a:xfrm>
           <a:prstGeom prst="line">
             <a:avLst/>
@@ -3804,8 +3804,8 @@
         </p:nvCxnSpPr>
         <p:spPr>
           <a:xfrm flipV="1">
-            <a:off x="5495544.0" y="1904238.0"/>
-            <a:ext cx="51663.59999999963" cy="17830.799999999814"/>
+            <a:off x="5327779.591836735" y="1624513.9978769394"/>
+            <a:ext cx="41987.75510204118" cy="16556.026203347836"/>
           </a:xfrm>
           <a:prstGeom prst="line">
             <a:avLst/>
@@ -3839,8 +3839,8 @@
         </p:nvCxnSpPr>
         <p:spPr>
           <a:xfrm flipV="1">
-            <a:off x="5547207.6" y="1886864.4"/>
-            <a:ext cx="51206.40000000037" cy="17373.600000000093"/>
+            <a:off x="5369767.346938776" y="1608394.0941109408"/>
+            <a:ext cx="41987.755102040246" cy="16119.903765998548"/>
           </a:xfrm>
           <a:prstGeom prst="line">
             <a:avLst/>
@@ -3874,8 +3874,8 @@
         </p:nvCxnSpPr>
         <p:spPr>
           <a:xfrm flipV="1">
-            <a:off x="5598414.0" y="1869948.0"/>
-            <a:ext cx="51206.40000000037" cy="16916.399999999907"/>
+            <a:off x="5411755.102040816" y="1592666.3701763437"/>
+            <a:ext cx="41987.75510204118" cy="15727.723934597103"/>
           </a:xfrm>
           <a:prstGeom prst="line">
             <a:avLst/>
@@ -3909,8 +3909,8 @@
         </p:nvCxnSpPr>
         <p:spPr>
           <a:xfrm flipV="1">
-            <a:off x="5649620.4" y="1853488.8"/>
-            <a:ext cx="51206.39999999944" cy="16459.199999999953"/>
+            <a:off x="5453742.857142857" y="1577291.0565026323"/>
+            <a:ext cx="41987.755102040246" cy="15375.313673711382"/>
           </a:xfrm>
           <a:prstGeom prst="line">
             <a:avLst/>
@@ -3944,8 +3944,8 @@
         </p:nvCxnSpPr>
         <p:spPr>
           <a:xfrm flipV="1">
-            <a:off x="5700826.8" y="1837029.6"/>
-            <a:ext cx="51663.60000000056" cy="16459.199999999953"/>
+            <a:off x="5495730.6122448975" y="1562231.9454545602"/>
+            <a:ext cx="41987.75510204118" cy="15059.11104807211"/>
           </a:xfrm>
           <a:prstGeom prst="line">
             <a:avLst/>
@@ -3979,8 +3979,8 @@
         </p:nvCxnSpPr>
         <p:spPr>
           <a:xfrm flipV="1">
-            <a:off x="5752490.4" y="1821484.8"/>
-            <a:ext cx="51206.39999999944" cy="15544.800000000047"/>
+            <a:off x="5537718.367346939" y="1547456.3146152832"/>
+            <a:ext cx="41987.75510204118" cy="14775.630839277059"/>
           </a:xfrm>
           <a:prstGeom prst="line">
             <a:avLst/>
@@ -4014,8 +4014,8 @@
         </p:nvCxnSpPr>
         <p:spPr>
           <a:xfrm flipV="1">
-            <a:off x="5803696.8" y="1805940.0"/>
-            <a:ext cx="51206.40000000037" cy="15544.800000000047"/>
+            <a:off x="5579706.12244898" y="1532934.6747169853"/>
+            <a:ext cx="41987.75510204118" cy="14521.639898297843"/>
           </a:xfrm>
           <a:prstGeom prst="line">
             <a:avLst/>
@@ -4049,8 +4049,8 @@
         </p:nvCxnSpPr>
         <p:spPr>
           <a:xfrm flipV="1">
-            <a:off x="5854903.2" y="1790852.4"/>
-            <a:ext cx="51206.39999999944" cy="15087.600000000093"/>
+            <a:off x="5621693.877551021" y="1518638.9618764606"/>
+            <a:ext cx="41987.755102040246" cy="14295.712840524735"/>
           </a:xfrm>
           <a:prstGeom prst="line">
             <a:avLst/>
@@ -4084,8 +4084,8 @@
         </p:nvCxnSpPr>
         <p:spPr>
           <a:xfrm flipV="1">
-            <a:off x="5906109.6" y="1775764.7999999998"/>
-            <a:ext cx="51663.60000000056" cy="15087.600000000093"/>
+            <a:off x="5663681.632653061" y="1504544.6060938505"/>
+            <a:ext cx="41987.75510204118" cy="14094.355782610131"/>
           </a:xfrm>
           <a:prstGeom prst="line">
             <a:avLst/>
@@ -4119,8 +4119,8 @@
         </p:nvCxnSpPr>
         <p:spPr>
           <a:xfrm flipV="1">
-            <a:off x="5957773.2" y="1761134.4"/>
-            <a:ext cx="51206.39999999944" cy="14630.399999999907"/>
+            <a:off x="5705669.3877551025" y="1490629.7660610809"/>
+            <a:ext cx="41987.755102040246" cy="13914.8400327696"/>
           </a:xfrm>
           <a:prstGeom prst="line">
             <a:avLst/>
@@ -4154,8 +4154,8 @@
         </p:nvCxnSpPr>
         <p:spPr>
           <a:xfrm flipV="1">
-            <a:off x="6008979.6" y="1746961.2"/>
-            <a:ext cx="51206.40000000037" cy="14173.199999999953"/>
+            <a:off x="5747657.142857143" y="1476871.5861808641"/>
+            <a:ext cx="41987.75510204118" cy="13758.179880216718"/>
           </a:xfrm>
           <a:prstGeom prst="line">
             <a:avLst/>
@@ -4189,8 +4189,8 @@
         </p:nvCxnSpPr>
         <p:spPr>
           <a:xfrm flipV="1">
-            <a:off x="6060186.0" y="1732788.0"/>
-            <a:ext cx="51206.40000000037" cy="14173.199999999953"/>
+            <a:off x="5789644.897959184" y="1463249.695635727"/>
+            <a:ext cx="41987.755102040246" cy="13621.890545137227"/>
           </a:xfrm>
           <a:prstGeom prst="line">
             <a:avLst/>
@@ -4224,8 +4224,8 @@
         </p:nvCxnSpPr>
         <p:spPr>
           <a:xfrm flipV="1">
-            <a:off x="6111392.4" y="1719072.0"/>
-            <a:ext cx="51663.59999999963" cy="13716.0"/>
+            <a:off x="5831632.653061224" y="1449745.3103133456"/>
+            <a:ext cx="41987.75510204118" cy="13504.385322381277"/>
           </a:xfrm>
           <a:prstGeom prst="line">
             <a:avLst/>
@@ -4259,8 +4259,8 @@
         </p:nvCxnSpPr>
         <p:spPr>
           <a:xfrm flipV="1">
-            <a:off x="6163056.0" y="1705356.0"/>
-            <a:ext cx="51206.40000000037" cy="13716.0"/>
+            <a:off x="5873620.408163265" y="1436341.458911792"/>
+            <a:ext cx="41987.75510204118" cy="13403.851401553722"/>
           </a:xfrm>
           <a:prstGeom prst="line">
             <a:avLst/>
@@ -4294,8 +4294,8 @@
         </p:nvCxnSpPr>
         <p:spPr>
           <a:xfrm flipV="1">
-            <a:off x="6214262.4" y="1691640.0"/>
-            <a:ext cx="51206.39999999944" cy="13716.0"/>
+            <a:off x="5915608.1632653065" y="1423022.7858100503"/>
+            <a:ext cx="41987.755102040246" cy="13318.673101741588"/>
           </a:xfrm>
           <a:prstGeom prst="line">
             <a:avLst/>
@@ -4329,8 +4329,8 @@
         </p:nvCxnSpPr>
         <p:spPr>
           <a:xfrm flipV="1">
-            <a:off x="6265468.8" y="1678838.4"/>
-            <a:ext cx="51206.40000000037" cy="12801.600000000093"/>
+            <a:off x="5957595.918367347" y="1409775.4109682476"/>
+            <a:ext cx="41987.75510204118" cy="13247.374841802754"/>
           </a:xfrm>
           <a:prstGeom prst="line">
             <a:avLst/>
@@ -4364,8 +4364,8 @@
         </p:nvCxnSpPr>
         <p:spPr>
           <a:xfrm flipV="1">
-            <a:off x="6316675.2" y="1665579.6"/>
-            <a:ext cx="51663.59999999963" cy="13258.799999999814"/>
+            <a:off x="5999583.673469388" y="1396586.9406409918"/>
+            <a:ext cx="41987.75510204118" cy="13188.470327255782"/>
           </a:xfrm>
           <a:prstGeom prst="line">
             <a:avLst/>
@@ -4399,8 +4399,8 @@
         </p:nvCxnSpPr>
         <p:spPr>
           <a:xfrm flipV="1">
-            <a:off x="6368338.8" y="1652778.0"/>
-            <a:ext cx="51206.40000000037" cy="12801.600000000093"/>
+            <a:off x="6041571.428571429" y="1383446.5046091985"/>
+            <a:ext cx="41987.755102040246" cy="13140.436031793244"/>
           </a:xfrm>
           <a:prstGeom prst="line">
             <a:avLst/>
@@ -4434,8 +4434,8 @@
         </p:nvCxnSpPr>
         <p:spPr>
           <a:xfrm flipV="1">
-            <a:off x="6419545.2" y="1639976.4000000001"/>
-            <a:ext cx="51206.39999999944" cy="12801.59999999986"/>
+            <a:off x="6083559.183673469" y="1370344.62991355"/>
+            <a:ext cx="41987.75510204118" cy="13101.87469564844"/>
           </a:xfrm>
           <a:prstGeom prst="line">
             <a:avLst/>
@@ -4469,8 +4469,8 @@
         </p:nvCxnSpPr>
         <p:spPr>
           <a:xfrm flipV="1">
-            <a:off x="6470751.6" y="1627632.0"/>
-            <a:ext cx="51206.40000000037" cy="12344.40000000014"/>
+            <a:off x="6125546.9387755105" y="1357272.5866425154"/>
+            <a:ext cx="41987.755102040246" cy="13072.043271034723"/>
           </a:xfrm>
           <a:prstGeom prst="line">
             <a:avLst/>
@@ -4504,8 +4504,8 @@
         </p:nvCxnSpPr>
         <p:spPr>
           <a:xfrm flipV="1">
-            <a:off x="6521958.0" y="1615287.6"/>
-            <a:ext cx="51663.59999999963" cy="12344.399999999907"/>
+            <a:off x="6167534.693877551" y="1344222.6187531205"/>
+            <a:ext cx="41987.75510204118" cy="13049.967889394844"/>
           </a:xfrm>
           <a:prstGeom prst="line">
             <a:avLst/>
@@ -4539,8 +4539,8 @@
         </p:nvCxnSpPr>
         <p:spPr>
           <a:xfrm flipV="1">
-            <a:off x="6573621.6" y="1602943.2"/>
-            <a:ext cx="51206.40000000037" cy="12344.40000000014"/>
+            <a:off x="6209522.448979592" y="1331187.27417255"/>
+            <a:ext cx="41987.755102040246" cy="13035.344580570469"/>
           </a:xfrm>
           <a:prstGeom prst="line">
             <a:avLst/>
@@ -4574,8 +4574,8 @@
         </p:nvCxnSpPr>
         <p:spPr>
           <a:xfrm flipV="1">
-            <a:off x="6624828.0" y="1591056.0"/>
-            <a:ext cx="51206.40000000037" cy="11887.199999999953"/>
+            <a:off x="6251510.204081632" y="1318159.6653471417"/>
+            <a:ext cx="41987.75510204118" cy="13027.608825408388"/>
           </a:xfrm>
           <a:prstGeom prst="line">
             <a:avLst/>
@@ -4609,8 +4609,8 @@
         </p:nvCxnSpPr>
         <p:spPr>
           <a:xfrm flipV="1">
-            <a:off x="6676034.4" y="1579168.8"/>
-            <a:ext cx="51206.40000000037" cy="11887.199999999953"/>
+            <a:off x="6293497.959183673" y="1305133.4033396558"/>
+            <a:ext cx="41987.75510204118" cy="13026.262007485842"/>
           </a:xfrm>
           <a:prstGeom prst="line">
             <a:avLst/>
@@ -4644,8 +4644,8 @@
         </p:nvCxnSpPr>
         <p:spPr>
           <a:xfrm flipV="1">
-            <a:off x="6727240.800000001" y="1567281.6"/>
-            <a:ext cx="51663.59999999963" cy="11887.199999999953"/>
+            <a:off x="6335485.714285715" y="1292097.8491805308"/>
+            <a:ext cx="41987.755102040246" cy="13035.55415912508"/>
           </a:xfrm>
           <a:prstGeom prst="line">
             <a:avLst/>
@@ -4679,8 +4679,8 @@
         </p:nvCxnSpPr>
         <p:spPr>
           <a:xfrm flipV="1">
-            <a:off x="6778904.4" y="1555851.6"/>
-            <a:ext cx="51206.39999999944" cy="11430.0"/>
+            <a:off x="6377473.469387755" y="1279047.8251087372"/>
+            <a:ext cx="41987.75510204118" cy="13050.024071793538"/>
           </a:xfrm>
           <a:prstGeom prst="line">
             <a:avLst/>
@@ -4714,8 +4714,8 @@
         </p:nvCxnSpPr>
         <p:spPr>
           <a:xfrm flipV="1">
-            <a:off x="6830110.8" y="1544421.6"/>
-            <a:ext cx="51206.40000000037" cy="11430.0"/>
+            <a:off x="6419461.224489796" y="1265979.0079866967"/>
+            <a:ext cx="41987.75510204118" cy="13068.81712204055"/>
           </a:xfrm>
           <a:prstGeom prst="line">
             <a:avLst/>
@@ -4749,8 +4749,8 @@
         </p:nvCxnSpPr>
         <p:spPr>
           <a:xfrm flipV="1">
-            <a:off x="6881317.2" y="1532991.6"/>
-            <a:ext cx="51206.39999999944" cy="11430.0"/>
+            <a:off x="6461448.979591837" y="1252887.3993064195"/>
+            <a:ext cx="41987.755102040246" cy="13091.608680277131"/>
           </a:xfrm>
           <a:prstGeom prst="line">
             <a:avLst/>
@@ -4784,8 +4784,8 @@
         </p:nvCxnSpPr>
         <p:spPr>
           <a:xfrm flipV="1">
-            <a:off x="6932523.6" y="1521561.5999999999"/>
-            <a:ext cx="51663.59999999963" cy="11430.000000000233"/>
+            <a:off x="6503436.734693877" y="1239769.4157106583"/>
+            <a:ext cx="41987.75510204118" cy="13117.983595761238"/>
           </a:xfrm>
           <a:prstGeom prst="line">
             <a:avLst/>
@@ -4819,8 +4819,8 @@
         </p:nvCxnSpPr>
         <p:spPr>
           <a:xfrm flipV="1">
-            <a:off x="6984187.199999999" y="1510588.7999999998"/>
-            <a:ext cx="51206.40000000037" cy="10972.800000000047"/>
+            <a:off x="6545424.489795919" y="1226621.9020934396"/>
+            <a:ext cx="41987.755102040246" cy="13147.513617218705"/>
           </a:xfrm>
           <a:prstGeom prst="line">
             <a:avLst/>
@@ -4854,8 +4854,8 @@
         </p:nvCxnSpPr>
         <p:spPr>
           <a:xfrm flipV="1">
-            <a:off x="7035393.6" y="1499616.0"/>
-            <a:ext cx="51206.40000000037" cy="10972.799999999814"/>
+            <a:off x="6587412.244897959" y="1213442.067357741"/>
+            <a:ext cx="41987.75510204118" cy="13179.834735698532"/>
           </a:xfrm>
           <a:prstGeom prst="line">
             <a:avLst/>
@@ -4889,7 +4889,7 @@
         </p:nvSpPr>
         <p:spPr>
           <a:xfrm>
-            <a:off x="6134100" y="1678228"/>
+            <a:off x="5905500" y="1619250"/>
             <a:ext cx="76200" cy="76200"/>
           </a:xfrm>
           <a:prstGeom prst="ellipse">
@@ -4932,7 +4932,7 @@
         </p:nvSpPr>
         <p:spPr>
           <a:xfrm>
-            <a:off x="6492240" y="971550"/>
+            <a:off x="6492240" y="1337310"/>
             <a:ext cx="635000" cy="254000"/>
           </a:xfrm>
           <a:prstGeom prst="rect">

--- a/output/4.pptx
+++ b/output/4.pptx
@@ -3104,8 +3104,8 @@
         </p:nvCxnSpPr>
         <p:spPr>
           <a:xfrm>
-            <a:off x="2286000.0" y="2571750.0"/>
-            <a:ext cx="4572000.0" cy="0.0"/>
+            <a:off x="4206240.0" y="2571750.0"/>
+            <a:ext cx="5623560.0" cy="0.0"/>
           </a:xfrm>
           <a:prstGeom prst="line">
             <a:avLst/>
@@ -3139,8 +3139,8 @@
         </p:nvCxnSpPr>
         <p:spPr>
           <a:xfrm flipV="1">
-            <a:off x="4572000.0" y="285750.0"/>
-            <a:ext cx="0.0" cy="4572000.0"/>
+            <a:off x="4572000.0" y="-1085850.0"/>
+            <a:ext cx="0.0" cy="4023360.0"/>
           </a:xfrm>
           <a:prstGeom prst="line">
             <a:avLst/>
@@ -3166,24 +3166,1274 @@
           </a:fontRef>
         </p:style>
       </p:cxnSp>
+      <p:sp>
+        <p:nvSpPr>
+          <p:cNvPr id="4" name="Freeform 3"/>
+          <p:cNvSpPr/>
+          <p:nvPr/>
+        </p:nvSpPr>
+        <p:spPr>
+          <a:xfrm>
+            <a:off x="4572000" y="-370789"/>
+            <a:ext cx="4823460" cy="2942539"/>
+          </a:xfrm>
+          <a:custGeom>
+            <a:avLst/>
+            <a:gdLst/>
+            <a:ahLst/>
+            <a:cxnLst/>
+            <a:rect l="l" t="t" r="r" b="b"/>
+            <a:pathLst>
+              <a:path w="4823460" h="2942539">
+                <a:moveTo>
+                  <a:pt x="0" y="2942539"/>
+                </a:moveTo>
+                <a:lnTo>
+                  <a:pt x="16132" y="2810171"/>
+                </a:lnTo>
+                <a:close/>
+                <a:lnTo>
+                  <a:pt x="32264" y="2740993"/>
+                </a:lnTo>
+                <a:close/>
+                <a:lnTo>
+                  <a:pt x="48396" y="2699804"/>
+                </a:lnTo>
+                <a:close/>
+                <a:lnTo>
+                  <a:pt x="64528" y="2662044"/>
+                </a:lnTo>
+                <a:close/>
+                <a:lnTo>
+                  <a:pt x="80660" y="2628689"/>
+                </a:lnTo>
+                <a:close/>
+                <a:lnTo>
+                  <a:pt x="96792" y="2599269"/>
+                </a:lnTo>
+                <a:close/>
+                <a:lnTo>
+                  <a:pt x="112924" y="2571734"/>
+                </a:lnTo>
+                <a:close/>
+                <a:lnTo>
+                  <a:pt x="129056" y="2545841"/>
+                </a:lnTo>
+                <a:close/>
+                <a:lnTo>
+                  <a:pt x="145188" y="2521236"/>
+                </a:lnTo>
+                <a:close/>
+                <a:lnTo>
+                  <a:pt x="161320" y="2497647"/>
+                </a:lnTo>
+                <a:close/>
+                <a:lnTo>
+                  <a:pt x="177452" y="2474962"/>
+                </a:lnTo>
+                <a:close/>
+                <a:lnTo>
+                  <a:pt x="193584" y="2453037"/>
+                </a:lnTo>
+                <a:close/>
+                <a:lnTo>
+                  <a:pt x="209716" y="2431634"/>
+                </a:lnTo>
+                <a:close/>
+                <a:lnTo>
+                  <a:pt x="225848" y="2410668"/>
+                </a:lnTo>
+                <a:close/>
+                <a:lnTo>
+                  <a:pt x="241980" y="2390412"/>
+                </a:lnTo>
+                <a:close/>
+                <a:lnTo>
+                  <a:pt x="258112" y="2370770"/>
+                </a:lnTo>
+                <a:close/>
+                <a:lnTo>
+                  <a:pt x="274244" y="2351470"/>
+                </a:lnTo>
+                <a:close/>
+                <a:lnTo>
+                  <a:pt x="290376" y="2332349"/>
+                </a:lnTo>
+                <a:close/>
+                <a:lnTo>
+                  <a:pt x="306507" y="2313683"/>
+                </a:lnTo>
+                <a:close/>
+                <a:lnTo>
+                  <a:pt x="322639" y="2295408"/>
+                </a:lnTo>
+                <a:close/>
+                <a:lnTo>
+                  <a:pt x="338771" y="2277308"/>
+                </a:lnTo>
+                <a:close/>
+                <a:lnTo>
+                  <a:pt x="354903" y="2259669"/>
+                </a:lnTo>
+                <a:close/>
+                <a:lnTo>
+                  <a:pt x="371035" y="2242454"/>
+                </a:lnTo>
+                <a:close/>
+                <a:lnTo>
+                  <a:pt x="387167" y="2225366"/>
+                </a:lnTo>
+                <a:close/>
+                <a:lnTo>
+                  <a:pt x="403299" y="2208181"/>
+                </a:lnTo>
+                <a:close/>
+                <a:lnTo>
+                  <a:pt x="419431" y="2191415"/>
+                </a:lnTo>
+                <a:close/>
+                <a:lnTo>
+                  <a:pt x="435563" y="2175023"/>
+                </a:lnTo>
+                <a:close/>
+                <a:lnTo>
+                  <a:pt x="451695" y="2158509"/>
+                </a:lnTo>
+                <a:close/>
+                <a:lnTo>
+                  <a:pt x="467827" y="2142466"/>
+                </a:lnTo>
+                <a:close/>
+                <a:lnTo>
+                  <a:pt x="483959" y="2126738"/>
+                </a:lnTo>
+                <a:close/>
+                <a:lnTo>
+                  <a:pt x="500091" y="2110910"/>
+                </a:lnTo>
+                <a:close/>
+                <a:lnTo>
+                  <a:pt x="516223" y="2095301"/>
+                </a:lnTo>
+                <a:close/>
+                <a:lnTo>
+                  <a:pt x="532355" y="2080002"/>
+                </a:lnTo>
+                <a:close/>
+                <a:lnTo>
+                  <a:pt x="548487" y="2064859"/>
+                </a:lnTo>
+                <a:close/>
+                <a:lnTo>
+                  <a:pt x="564619" y="2049672"/>
+                </a:lnTo>
+                <a:close/>
+                <a:lnTo>
+                  <a:pt x="580751" y="2034642"/>
+                </a:lnTo>
+                <a:close/>
+                <a:lnTo>
+                  <a:pt x="596883" y="2019911"/>
+                </a:lnTo>
+                <a:close/>
+                <a:lnTo>
+                  <a:pt x="613015" y="2005402"/>
+                </a:lnTo>
+                <a:close/>
+                <a:lnTo>
+                  <a:pt x="629147" y="1990867"/>
+                </a:lnTo>
+                <a:close/>
+                <a:lnTo>
+                  <a:pt x="645279" y="1976418"/>
+                </a:lnTo>
+                <a:close/>
+                <a:lnTo>
+                  <a:pt x="661411" y="1962257"/>
+                </a:lnTo>
+                <a:close/>
+                <a:lnTo>
+                  <a:pt x="677543" y="1948362"/>
+                </a:lnTo>
+                <a:close/>
+                <a:lnTo>
+                  <a:pt x="693675" y="1934480"/>
+                </a:lnTo>
+                <a:close/>
+                <a:lnTo>
+                  <a:pt x="709807" y="1920637"/>
+                </a:lnTo>
+                <a:close/>
+                <a:lnTo>
+                  <a:pt x="725939" y="1907076"/>
+                </a:lnTo>
+                <a:close/>
+                <a:lnTo>
+                  <a:pt x="742071" y="1893564"/>
+                </a:lnTo>
+                <a:close/>
+                <a:lnTo>
+                  <a:pt x="758203" y="1879984"/>
+                </a:lnTo>
+                <a:close/>
+                <a:lnTo>
+                  <a:pt x="774335" y="1866427"/>
+                </a:lnTo>
+                <a:close/>
+                <a:lnTo>
+                  <a:pt x="790467" y="1853089"/>
+                </a:lnTo>
+                <a:close/>
+                <a:lnTo>
+                  <a:pt x="806599" y="1840031"/>
+                </a:lnTo>
+                <a:close/>
+                <a:lnTo>
+                  <a:pt x="822731" y="1827154"/>
+                </a:lnTo>
+                <a:close/>
+                <a:lnTo>
+                  <a:pt x="838863" y="1814263"/>
+                </a:lnTo>
+                <a:close/>
+                <a:lnTo>
+                  <a:pt x="854995" y="1801311"/>
+                </a:lnTo>
+                <a:close/>
+                <a:lnTo>
+                  <a:pt x="871127" y="1788466"/>
+                </a:lnTo>
+                <a:close/>
+                <a:lnTo>
+                  <a:pt x="887259" y="1775888"/>
+                </a:lnTo>
+                <a:close/>
+                <a:lnTo>
+                  <a:pt x="903391" y="1763341"/>
+                </a:lnTo>
+                <a:close/>
+                <a:lnTo>
+                  <a:pt x="919522" y="1750717"/>
+                </a:lnTo>
+                <a:close/>
+                <a:lnTo>
+                  <a:pt x="935654" y="1738139"/>
+                </a:lnTo>
+                <a:close/>
+                <a:lnTo>
+                  <a:pt x="951786" y="1725845"/>
+                </a:lnTo>
+                <a:close/>
+                <a:lnTo>
+                  <a:pt x="967918" y="1713586"/>
+                </a:lnTo>
+                <a:close/>
+                <a:lnTo>
+                  <a:pt x="984050" y="1701353"/>
+                </a:lnTo>
+                <a:close/>
+                <a:lnTo>
+                  <a:pt x="1000182" y="1689403"/>
+                </a:lnTo>
+                <a:close/>
+                <a:lnTo>
+                  <a:pt x="1016314" y="1677508"/>
+                </a:lnTo>
+                <a:close/>
+                <a:lnTo>
+                  <a:pt x="1032446" y="1665536"/>
+                </a:lnTo>
+                <a:close/>
+                <a:lnTo>
+                  <a:pt x="1048578" y="1653589"/>
+                </a:lnTo>
+                <a:close/>
+                <a:lnTo>
+                  <a:pt x="1064710" y="1641904"/>
+                </a:lnTo>
+                <a:close/>
+                <a:lnTo>
+                  <a:pt x="1080842" y="1630338"/>
+                </a:lnTo>
+                <a:close/>
+                <a:lnTo>
+                  <a:pt x="1096974" y="1618709"/>
+                </a:lnTo>
+                <a:close/>
+                <a:lnTo>
+                  <a:pt x="1113106" y="1607054"/>
+                </a:lnTo>
+                <a:close/>
+                <a:lnTo>
+                  <a:pt x="1129238" y="1595620"/>
+                </a:lnTo>
+                <a:close/>
+                <a:lnTo>
+                  <a:pt x="1145370" y="1584375"/>
+                </a:lnTo>
+                <a:close/>
+                <a:lnTo>
+                  <a:pt x="1161502" y="1573087"/>
+                </a:lnTo>
+                <a:close/>
+                <a:lnTo>
+                  <a:pt x="1177634" y="1561744"/>
+                </a:lnTo>
+                <a:close/>
+                <a:lnTo>
+                  <a:pt x="1193766" y="1550557"/>
+                </a:lnTo>
+                <a:close/>
+                <a:lnTo>
+                  <a:pt x="1209898" y="1539615"/>
+                </a:lnTo>
+                <a:close/>
+                <a:lnTo>
+                  <a:pt x="1226030" y="1528673"/>
+                </a:lnTo>
+                <a:close/>
+                <a:lnTo>
+                  <a:pt x="1242162" y="1517645"/>
+                </a:lnTo>
+                <a:close/>
+                <a:lnTo>
+                  <a:pt x="1258294" y="1506727"/>
+                </a:lnTo>
+                <a:close/>
+                <a:lnTo>
+                  <a:pt x="1274426" y="1496107"/>
+                </a:lnTo>
+                <a:close/>
+                <a:lnTo>
+                  <a:pt x="1290558" y="1485256"/>
+                </a:lnTo>
+                <a:close/>
+                <a:lnTo>
+                  <a:pt x="1306690" y="1474282"/>
+                </a:lnTo>
+                <a:close/>
+                <a:lnTo>
+                  <a:pt x="1322822" y="1463642"/>
+                </a:lnTo>
+                <a:close/>
+                <a:lnTo>
+                  <a:pt x="1338954" y="1453325"/>
+                </a:lnTo>
+                <a:close/>
+                <a:lnTo>
+                  <a:pt x="1355086" y="1442879"/>
+                </a:lnTo>
+                <a:close/>
+                <a:lnTo>
+                  <a:pt x="1371218" y="1432201"/>
+                </a:lnTo>
+                <a:close/>
+                <a:lnTo>
+                  <a:pt x="1387350" y="1421788"/>
+                </a:lnTo>
+                <a:close/>
+                <a:lnTo>
+                  <a:pt x="1403482" y="1411741"/>
+                </a:lnTo>
+                <a:close/>
+                <a:lnTo>
+                  <a:pt x="1419614" y="1401693"/>
+                </a:lnTo>
+                <a:close/>
+                <a:lnTo>
+                  <a:pt x="1435746" y="1391338"/>
+                </a:lnTo>
+                <a:close/>
+                <a:lnTo>
+                  <a:pt x="1451878" y="1381230"/>
+                </a:lnTo>
+                <a:close/>
+                <a:lnTo>
+                  <a:pt x="1468010" y="1371251"/>
+                </a:lnTo>
+                <a:close/>
+                <a:lnTo>
+                  <a:pt x="1484142" y="1361241"/>
+                </a:lnTo>
+                <a:close/>
+                <a:lnTo>
+                  <a:pt x="1500274" y="1351564"/>
+                </a:lnTo>
+                <a:close/>
+                <a:lnTo>
+                  <a:pt x="1516405" y="1341735"/>
+                </a:lnTo>
+                <a:close/>
+                <a:lnTo>
+                  <a:pt x="1532537" y="1331720"/>
+                </a:lnTo>
+                <a:close/>
+                <a:lnTo>
+                  <a:pt x="1548669" y="1322037"/>
+                </a:lnTo>
+                <a:close/>
+                <a:lnTo>
+                  <a:pt x="1564801" y="1312340"/>
+                </a:lnTo>
+                <a:close/>
+                <a:lnTo>
+                  <a:pt x="1580933" y="1302750"/>
+                </a:lnTo>
+                <a:close/>
+                <a:lnTo>
+                  <a:pt x="1597065" y="1293428"/>
+                </a:lnTo>
+                <a:close/>
+                <a:lnTo>
+                  <a:pt x="1613197" y="1283792"/>
+                </a:lnTo>
+                <a:close/>
+                <a:lnTo>
+                  <a:pt x="1629329" y="1274196"/>
+                </a:lnTo>
+                <a:close/>
+                <a:lnTo>
+                  <a:pt x="1645461" y="1264881"/>
+                </a:lnTo>
+                <a:close/>
+                <a:lnTo>
+                  <a:pt x="1661593" y="1255483"/>
+                </a:lnTo>
+                <a:close/>
+                <a:lnTo>
+                  <a:pt x="1677725" y="1246343"/>
+                </a:lnTo>
+                <a:close/>
+                <a:lnTo>
+                  <a:pt x="1693857" y="1237286"/>
+                </a:lnTo>
+                <a:close/>
+                <a:lnTo>
+                  <a:pt x="1709989" y="1227900"/>
+                </a:lnTo>
+                <a:close/>
+                <a:lnTo>
+                  <a:pt x="1726121" y="1218740"/>
+                </a:lnTo>
+                <a:close/>
+                <a:lnTo>
+                  <a:pt x="1742253" y="1209765"/>
+                </a:lnTo>
+                <a:close/>
+                <a:lnTo>
+                  <a:pt x="1758385" y="1200721"/>
+                </a:lnTo>
+                <a:close/>
+                <a:lnTo>
+                  <a:pt x="1774517" y="1191694"/>
+                </a:lnTo>
+                <a:close/>
+                <a:lnTo>
+                  <a:pt x="1790649" y="1182628"/>
+                </a:lnTo>
+                <a:close/>
+                <a:lnTo>
+                  <a:pt x="1806781" y="1173627"/>
+                </a:lnTo>
+                <a:close/>
+                <a:lnTo>
+                  <a:pt x="1822913" y="1164904"/>
+                </a:lnTo>
+                <a:close/>
+                <a:lnTo>
+                  <a:pt x="1839045" y="1156224"/>
+                </a:lnTo>
+                <a:close/>
+                <a:lnTo>
+                  <a:pt x="1855177" y="1147499"/>
+                </a:lnTo>
+                <a:close/>
+                <a:lnTo>
+                  <a:pt x="1871309" y="1138788"/>
+                </a:lnTo>
+                <a:close/>
+                <a:lnTo>
+                  <a:pt x="1887441" y="1130090"/>
+                </a:lnTo>
+                <a:close/>
+                <a:lnTo>
+                  <a:pt x="1903573" y="1121346"/>
+                </a:lnTo>
+                <a:close/>
+                <a:lnTo>
+                  <a:pt x="1919705" y="1112651"/>
+                </a:lnTo>
+                <a:close/>
+                <a:lnTo>
+                  <a:pt x="1935837" y="1104232"/>
+                </a:lnTo>
+                <a:close/>
+                <a:lnTo>
+                  <a:pt x="1951969" y="1095879"/>
+                </a:lnTo>
+                <a:close/>
+                <a:lnTo>
+                  <a:pt x="1968101" y="1087478"/>
+                </a:lnTo>
+                <a:close/>
+                <a:lnTo>
+                  <a:pt x="1984233" y="1079088"/>
+                </a:lnTo>
+                <a:close/>
+                <a:lnTo>
+                  <a:pt x="2000365" y="1070713"/>
+                </a:lnTo>
+                <a:close/>
+                <a:lnTo>
+                  <a:pt x="2016497" y="1062298"/>
+                </a:lnTo>
+                <a:close/>
+                <a:lnTo>
+                  <a:pt x="2032629" y="1053909"/>
+                </a:lnTo>
+                <a:close/>
+                <a:lnTo>
+                  <a:pt x="2048761" y="1045792"/>
+                </a:lnTo>
+                <a:close/>
+                <a:lnTo>
+                  <a:pt x="2064893" y="1037766"/>
+                </a:lnTo>
+                <a:close/>
+                <a:lnTo>
+                  <a:pt x="2081025" y="1029688"/>
+                </a:lnTo>
+                <a:close/>
+                <a:lnTo>
+                  <a:pt x="2097157" y="1021618"/>
+                </a:lnTo>
+                <a:close/>
+                <a:lnTo>
+                  <a:pt x="2113288" y="1013570"/>
+                </a:lnTo>
+                <a:close/>
+                <a:lnTo>
+                  <a:pt x="2129420" y="1005476"/>
+                </a:lnTo>
+                <a:close/>
+                <a:lnTo>
+                  <a:pt x="2145552" y="997391"/>
+                </a:lnTo>
+                <a:close/>
+                <a:lnTo>
+                  <a:pt x="2161684" y="989631"/>
+                </a:lnTo>
+                <a:close/>
+                <a:lnTo>
+                  <a:pt x="2177816" y="981775"/>
+                </a:lnTo>
+                <a:close/>
+                <a:lnTo>
+                  <a:pt x="2193948" y="973681"/>
+                </a:lnTo>
+                <a:close/>
+                <a:lnTo>
+                  <a:pt x="2210080" y="965895"/>
+                </a:lnTo>
+                <a:close/>
+                <a:lnTo>
+                  <a:pt x="2226212" y="958200"/>
+                </a:lnTo>
+                <a:close/>
+                <a:lnTo>
+                  <a:pt x="2242344" y="950440"/>
+                </a:lnTo>
+                <a:close/>
+                <a:lnTo>
+                  <a:pt x="2258476" y="942694"/>
+                </a:lnTo>
+                <a:close/>
+                <a:lnTo>
+                  <a:pt x="2274608" y="934969"/>
+                </a:lnTo>
+                <a:close/>
+                <a:lnTo>
+                  <a:pt x="2290740" y="927191"/>
+                </a:lnTo>
+                <a:close/>
+                <a:lnTo>
+                  <a:pt x="2306872" y="919446"/>
+                </a:lnTo>
+                <a:close/>
+                <a:lnTo>
+                  <a:pt x="2323004" y="912028"/>
+                </a:lnTo>
+                <a:close/>
+                <a:lnTo>
+                  <a:pt x="2339136" y="904462"/>
+                </a:lnTo>
+                <a:close/>
+                <a:lnTo>
+                  <a:pt x="2355268" y="896701"/>
+                </a:lnTo>
+                <a:close/>
+                <a:lnTo>
+                  <a:pt x="2371400" y="889261"/>
+                </a:lnTo>
+                <a:close/>
+                <a:lnTo>
+                  <a:pt x="2387532" y="881883"/>
+                </a:lnTo>
+                <a:close/>
+                <a:lnTo>
+                  <a:pt x="2403664" y="874444"/>
+                </a:lnTo>
+                <a:close/>
+                <a:lnTo>
+                  <a:pt x="2419796" y="867023"/>
+                </a:lnTo>
+                <a:close/>
+                <a:lnTo>
+                  <a:pt x="2435928" y="859621"/>
+                </a:lnTo>
+                <a:close/>
+                <a:lnTo>
+                  <a:pt x="2452060" y="852158"/>
+                </a:lnTo>
+                <a:close/>
+                <a:lnTo>
+                  <a:pt x="2468192" y="844756"/>
+                </a:lnTo>
+                <a:close/>
+                <a:lnTo>
+                  <a:pt x="2484324" y="837676"/>
+                </a:lnTo>
+                <a:close/>
+                <a:lnTo>
+                  <a:pt x="2500456" y="830400"/>
+                </a:lnTo>
+                <a:close/>
+                <a:lnTo>
+                  <a:pt x="2516588" y="822977"/>
+                </a:lnTo>
+                <a:close/>
+                <a:lnTo>
+                  <a:pt x="2532720" y="815880"/>
+                </a:lnTo>
+                <a:close/>
+                <a:lnTo>
+                  <a:pt x="2548852" y="808816"/>
+                </a:lnTo>
+                <a:close/>
+                <a:lnTo>
+                  <a:pt x="2564984" y="801703"/>
+                </a:lnTo>
+                <a:close/>
+                <a:lnTo>
+                  <a:pt x="2581116" y="794607"/>
+                </a:lnTo>
+                <a:close/>
+                <a:lnTo>
+                  <a:pt x="2597248" y="787506"/>
+                </a:lnTo>
+                <a:close/>
+                <a:lnTo>
+                  <a:pt x="2613380" y="780420"/>
+                </a:lnTo>
+                <a:close/>
+                <a:lnTo>
+                  <a:pt x="2629512" y="773311"/>
+                </a:lnTo>
+                <a:close/>
+                <a:lnTo>
+                  <a:pt x="2645644" y="766167"/>
+                </a:lnTo>
+                <a:close/>
+                <a:lnTo>
+                  <a:pt x="2661776" y="759321"/>
+                </a:lnTo>
+                <a:close/>
+                <a:lnTo>
+                  <a:pt x="2677908" y="752498"/>
+                </a:lnTo>
+                <a:close/>
+                <a:lnTo>
+                  <a:pt x="2694040" y="745366"/>
+                </a:lnTo>
+                <a:close/>
+                <a:lnTo>
+                  <a:pt x="2710172" y="738489"/>
+                </a:lnTo>
+                <a:close/>
+                <a:lnTo>
+                  <a:pt x="2726303" y="731771"/>
+                </a:lnTo>
+                <a:close/>
+                <a:lnTo>
+                  <a:pt x="2742435" y="724984"/>
+                </a:lnTo>
+                <a:close/>
+                <a:lnTo>
+                  <a:pt x="2758567" y="718205"/>
+                </a:lnTo>
+                <a:close/>
+                <a:lnTo>
+                  <a:pt x="2774699" y="711434"/>
+                </a:lnTo>
+                <a:close/>
+                <a:lnTo>
+                  <a:pt x="2790831" y="704656"/>
+                </a:lnTo>
+                <a:close/>
+                <a:lnTo>
+                  <a:pt x="2806963" y="697878"/>
+                </a:lnTo>
+                <a:close/>
+                <a:lnTo>
+                  <a:pt x="2823095" y="691119"/>
+                </a:lnTo>
+                <a:close/>
+                <a:lnTo>
+                  <a:pt x="2839227" y="684310"/>
+                </a:lnTo>
+                <a:close/>
+                <a:lnTo>
+                  <a:pt x="2855359" y="677531"/>
+                </a:lnTo>
+                <a:close/>
+                <a:lnTo>
+                  <a:pt x="2871491" y="671079"/>
+                </a:lnTo>
+                <a:close/>
+                <a:lnTo>
+                  <a:pt x="2887623" y="664485"/>
+                </a:lnTo>
+                <a:close/>
+                <a:lnTo>
+                  <a:pt x="2903755" y="657690"/>
+                </a:lnTo>
+                <a:close/>
+                <a:lnTo>
+                  <a:pt x="2919887" y="651216"/>
+                </a:lnTo>
+                <a:close/>
+                <a:lnTo>
+                  <a:pt x="2936019" y="644805"/>
+                </a:lnTo>
+                <a:close/>
+                <a:lnTo>
+                  <a:pt x="2952151" y="638336"/>
+                </a:lnTo>
+                <a:close/>
+                <a:lnTo>
+                  <a:pt x="2968283" y="631884"/>
+                </a:lnTo>
+                <a:close/>
+                <a:lnTo>
+                  <a:pt x="2984415" y="625434"/>
+                </a:lnTo>
+                <a:close/>
+                <a:lnTo>
+                  <a:pt x="3000547" y="618978"/>
+                </a:lnTo>
+                <a:close/>
+                <a:lnTo>
+                  <a:pt x="3016679" y="612526"/>
+                </a:lnTo>
+                <a:close/>
+                <a:lnTo>
+                  <a:pt x="3032811" y="606088"/>
+                </a:lnTo>
+                <a:close/>
+                <a:lnTo>
+                  <a:pt x="3048943" y="599582"/>
+                </a:lnTo>
+                <a:close/>
+                <a:lnTo>
+                  <a:pt x="3065075" y="593197"/>
+                </a:lnTo>
+                <a:close/>
+                <a:lnTo>
+                  <a:pt x="3081207" y="587103"/>
+                </a:lnTo>
+                <a:close/>
+                <a:lnTo>
+                  <a:pt x="3097339" y="580719"/>
+                </a:lnTo>
+                <a:close/>
+                <a:lnTo>
+                  <a:pt x="3113471" y="574335"/>
+                </a:lnTo>
+                <a:close/>
+                <a:lnTo>
+                  <a:pt x="3129603" y="568242"/>
+                </a:lnTo>
+                <a:close/>
+                <a:lnTo>
+                  <a:pt x="3145735" y="561821"/>
+                </a:lnTo>
+                <a:close/>
+                <a:lnTo>
+                  <a:pt x="3161867" y="555458"/>
+                </a:lnTo>
+                <a:close/>
+                <a:lnTo>
+                  <a:pt x="3177999" y="549382"/>
+                </a:lnTo>
+                <a:close/>
+                <a:lnTo>
+                  <a:pt x="3194131" y="543258"/>
+                </a:lnTo>
+                <a:close/>
+                <a:lnTo>
+                  <a:pt x="3210263" y="537116"/>
+                </a:lnTo>
+                <a:close/>
+                <a:lnTo>
+                  <a:pt x="3226395" y="530990"/>
+                </a:lnTo>
+                <a:close/>
+                <a:lnTo>
+                  <a:pt x="3242527" y="524860"/>
+                </a:lnTo>
+                <a:close/>
+                <a:lnTo>
+                  <a:pt x="3258659" y="518725"/>
+                </a:lnTo>
+                <a:close/>
+                <a:lnTo>
+                  <a:pt x="3274791" y="512606"/>
+                </a:lnTo>
+                <a:close/>
+                <a:lnTo>
+                  <a:pt x="3290923" y="506472"/>
+                </a:lnTo>
+                <a:close/>
+                <a:lnTo>
+                  <a:pt x="3307055" y="500286"/>
+                </a:lnTo>
+                <a:close/>
+                <a:lnTo>
+                  <a:pt x="3323186" y="494378"/>
+                </a:lnTo>
+                <a:close/>
+                <a:lnTo>
+                  <a:pt x="3339318" y="488548"/>
+                </a:lnTo>
+                <a:close/>
+                <a:lnTo>
+                  <a:pt x="3355450" y="482383"/>
+                </a:lnTo>
+                <a:close/>
+                <a:lnTo>
+                  <a:pt x="3371582" y="476494"/>
+                </a:lnTo>
+                <a:close/>
+                <a:lnTo>
+                  <a:pt x="3387714" y="470631"/>
+                </a:lnTo>
+                <a:close/>
+                <a:lnTo>
+                  <a:pt x="3403846" y="464464"/>
+                </a:lnTo>
+                <a:close/>
+                <a:lnTo>
+                  <a:pt x="3419978" y="458564"/>
+                </a:lnTo>
+                <a:close/>
+                <a:lnTo>
+                  <a:pt x="3436110" y="452856"/>
+                </a:lnTo>
+                <a:close/>
+                <a:lnTo>
+                  <a:pt x="3452242" y="446998"/>
+                </a:lnTo>
+                <a:close/>
+                <a:lnTo>
+                  <a:pt x="3468374" y="440849"/>
+                </a:lnTo>
+                <a:close/>
+                <a:lnTo>
+                  <a:pt x="3484506" y="434884"/>
+                </a:lnTo>
+                <a:close/>
+                <a:lnTo>
+                  <a:pt x="3500638" y="429132"/>
+                </a:lnTo>
+                <a:close/>
+                <a:lnTo>
+                  <a:pt x="3516770" y="423320"/>
+                </a:lnTo>
+                <a:close/>
+                <a:lnTo>
+                  <a:pt x="3532902" y="417507"/>
+                </a:lnTo>
+                <a:close/>
+                <a:lnTo>
+                  <a:pt x="3549034" y="411701"/>
+                </a:lnTo>
+                <a:close/>
+                <a:lnTo>
+                  <a:pt x="3565166" y="405893"/>
+                </a:lnTo>
+                <a:close/>
+                <a:lnTo>
+                  <a:pt x="3581298" y="400099"/>
+                </a:lnTo>
+                <a:close/>
+                <a:lnTo>
+                  <a:pt x="3597430" y="394244"/>
+                </a:lnTo>
+                <a:close/>
+                <a:lnTo>
+                  <a:pt x="3613562" y="388495"/>
+                </a:lnTo>
+                <a:close/>
+                <a:lnTo>
+                  <a:pt x="3629694" y="383033"/>
+                </a:lnTo>
+                <a:close/>
+                <a:lnTo>
+                  <a:pt x="3645826" y="377373"/>
+                </a:lnTo>
+                <a:close/>
+                <a:lnTo>
+                  <a:pt x="3661958" y="371476"/>
+                </a:lnTo>
+                <a:close/>
+                <a:lnTo>
+                  <a:pt x="3678090" y="365669"/>
+                </a:lnTo>
+                <a:close/>
+                <a:lnTo>
+                  <a:pt x="3694222" y="360191"/>
+                </a:lnTo>
+                <a:close/>
+                <a:lnTo>
+                  <a:pt x="3710354" y="354556"/>
+                </a:lnTo>
+                <a:close/>
+                <a:lnTo>
+                  <a:pt x="3726486" y="348737"/>
+                </a:lnTo>
+                <a:close/>
+                <a:lnTo>
+                  <a:pt x="3742618" y="343272"/>
+                </a:lnTo>
+                <a:close/>
+                <a:lnTo>
+                  <a:pt x="3758750" y="337595"/>
+                </a:lnTo>
+                <a:close/>
+                <a:lnTo>
+                  <a:pt x="3774882" y="331796"/>
+                </a:lnTo>
+                <a:close/>
+                <a:lnTo>
+                  <a:pt x="3791014" y="326326"/>
+                </a:lnTo>
+                <a:close/>
+                <a:lnTo>
+                  <a:pt x="3807146" y="320870"/>
+                </a:lnTo>
+                <a:close/>
+                <a:lnTo>
+                  <a:pt x="3823278" y="315370"/>
+                </a:lnTo>
+                <a:close/>
+                <a:lnTo>
+                  <a:pt x="3839410" y="309888"/>
+                </a:lnTo>
+                <a:close/>
+                <a:lnTo>
+                  <a:pt x="3855542" y="304404"/>
+                </a:lnTo>
+                <a:close/>
+                <a:lnTo>
+                  <a:pt x="3871674" y="298918"/>
+                </a:lnTo>
+                <a:close/>
+                <a:lnTo>
+                  <a:pt x="3887806" y="293434"/>
+                </a:lnTo>
+                <a:close/>
+                <a:lnTo>
+                  <a:pt x="3903938" y="287950"/>
+                </a:lnTo>
+                <a:close/>
+                <a:lnTo>
+                  <a:pt x="3920069" y="282460"/>
+                </a:lnTo>
+                <a:close/>
+                <a:lnTo>
+                  <a:pt x="3936201" y="276984"/>
+                </a:lnTo>
+                <a:close/>
+                <a:lnTo>
+                  <a:pt x="3952333" y="271501"/>
+                </a:lnTo>
+                <a:close/>
+                <a:lnTo>
+                  <a:pt x="3968465" y="265956"/>
+                </a:lnTo>
+                <a:close/>
+                <a:lnTo>
+                  <a:pt x="3984597" y="260658"/>
+                </a:lnTo>
+                <a:close/>
+                <a:lnTo>
+                  <a:pt x="4000729" y="255499"/>
+                </a:lnTo>
+                <a:close/>
+                <a:lnTo>
+                  <a:pt x="4016861" y="249990"/>
+                </a:lnTo>
+                <a:close/>
+                <a:lnTo>
+                  <a:pt x="4032993" y="244712"/>
+                </a:lnTo>
+                <a:close/>
+                <a:lnTo>
+                  <a:pt x="4049125" y="239518"/>
+                </a:lnTo>
+                <a:close/>
+                <a:lnTo>
+                  <a:pt x="4065257" y="233994"/>
+                </a:lnTo>
+                <a:close/>
+                <a:lnTo>
+                  <a:pt x="4081389" y="228776"/>
+                </a:lnTo>
+                <a:close/>
+                <a:lnTo>
+                  <a:pt x="4097521" y="223530"/>
+                </a:lnTo>
+                <a:close/>
+                <a:lnTo>
+                  <a:pt x="4113653" y="218011"/>
+                </a:lnTo>
+                <a:close/>
+                <a:lnTo>
+                  <a:pt x="4129785" y="212795"/>
+                </a:lnTo>
+                <a:close/>
+                <a:lnTo>
+                  <a:pt x="4145917" y="207684"/>
+                </a:lnTo>
+                <a:close/>
+                <a:lnTo>
+                  <a:pt x="4162049" y="202506"/>
+                </a:lnTo>
+                <a:close/>
+                <a:lnTo>
+                  <a:pt x="4178181" y="197343"/>
+                </a:lnTo>
+                <a:close/>
+                <a:lnTo>
+                  <a:pt x="4194313" y="192184"/>
+                </a:lnTo>
+                <a:close/>
+                <a:lnTo>
+                  <a:pt x="4210445" y="187021"/>
+                </a:lnTo>
+                <a:close/>
+                <a:lnTo>
+                  <a:pt x="4226577" y="181859"/>
+                </a:lnTo>
+                <a:close/>
+                <a:lnTo>
+                  <a:pt x="4242709" y="176693"/>
+                </a:lnTo>
+                <a:close/>
+                <a:lnTo>
+                  <a:pt x="4258841" y="171542"/>
+                </a:lnTo>
+                <a:close/>
+                <a:lnTo>
+                  <a:pt x="4274973" y="166371"/>
+                </a:lnTo>
+                <a:close/>
+                <a:lnTo>
+                  <a:pt x="4291105" y="161164"/>
+                </a:lnTo>
+                <a:close/>
+                <a:lnTo>
+                  <a:pt x="4307237" y="156229"/>
+                </a:lnTo>
+                <a:close/>
+                <a:lnTo>
+                  <a:pt x="4323369" y="151374"/>
+                </a:lnTo>
+                <a:close/>
+                <a:lnTo>
+                  <a:pt x="4339501" y="146206"/>
+                </a:lnTo>
+                <a:close/>
+                <a:lnTo>
+                  <a:pt x="4355633" y="140955"/>
+                </a:lnTo>
+                <a:close/>
+                <a:lnTo>
+                  <a:pt x="4371765" y="135959"/>
+                </a:lnTo>
+                <a:close/>
+                <a:lnTo>
+                  <a:pt x="4387897" y="131138"/>
+                </a:lnTo>
+                <a:close/>
+                <a:lnTo>
+                  <a:pt x="4404029" y="125970"/>
+                </a:lnTo>
+                <a:close/>
+                <a:lnTo>
+                  <a:pt x="4420161" y="120973"/>
+                </a:lnTo>
+                <a:close/>
+                <a:lnTo>
+                  <a:pt x="4436293" y="116135"/>
+                </a:lnTo>
+                <a:close/>
+                <a:lnTo>
+                  <a:pt x="4452425" y="110952"/>
+                </a:lnTo>
+                <a:close/>
+                <a:lnTo>
+                  <a:pt x="4468557" y="105951"/>
+                </a:lnTo>
+                <a:close/>
+                <a:lnTo>
+                  <a:pt x="4484689" y="101202"/>
+                </a:lnTo>
+                <a:close/>
+                <a:lnTo>
+                  <a:pt x="4500821" y="96364"/>
+                </a:lnTo>
+                <a:close/>
+                <a:lnTo>
+                  <a:pt x="4516953" y="91214"/>
+                </a:lnTo>
+                <a:close/>
+                <a:lnTo>
+                  <a:pt x="4533084" y="86152"/>
+                </a:lnTo>
+                <a:close/>
+                <a:lnTo>
+                  <a:pt x="4549216" y="81359"/>
+                </a:lnTo>
+                <a:close/>
+                <a:lnTo>
+                  <a:pt x="4565348" y="76526"/>
+                </a:lnTo>
+                <a:close/>
+                <a:lnTo>
+                  <a:pt x="4581480" y="71676"/>
+                </a:lnTo>
+                <a:close/>
+                <a:lnTo>
+                  <a:pt x="4597612" y="66840"/>
+                </a:lnTo>
+                <a:close/>
+                <a:lnTo>
+                  <a:pt x="4613744" y="62000"/>
+                </a:lnTo>
+                <a:close/>
+                <a:lnTo>
+                  <a:pt x="4629876" y="57161"/>
+                </a:lnTo>
+                <a:close/>
+                <a:lnTo>
+                  <a:pt x="4646008" y="52319"/>
+                </a:lnTo>
+                <a:close/>
+                <a:lnTo>
+                  <a:pt x="4662140" y="47480"/>
+                </a:lnTo>
+                <a:close/>
+                <a:lnTo>
+                  <a:pt x="4678272" y="42655"/>
+                </a:lnTo>
+                <a:close/>
+                <a:lnTo>
+                  <a:pt x="4694404" y="37768"/>
+                </a:lnTo>
+                <a:close/>
+                <a:lnTo>
+                  <a:pt x="4710536" y="32981"/>
+                </a:lnTo>
+                <a:close/>
+                <a:lnTo>
+                  <a:pt x="4726668" y="28486"/>
+                </a:lnTo>
+                <a:close/>
+                <a:lnTo>
+                  <a:pt x="4742800" y="23798"/>
+                </a:lnTo>
+                <a:close/>
+                <a:lnTo>
+                  <a:pt x="4758932" y="18877"/>
+                </a:lnTo>
+                <a:close/>
+                <a:lnTo>
+                  <a:pt x="4775064" y="14035"/>
+                </a:lnTo>
+                <a:close/>
+                <a:lnTo>
+                  <a:pt x="4791196" y="9475"/>
+                </a:lnTo>
+                <a:close/>
+                <a:lnTo>
+                  <a:pt x="4807328" y="4943"/>
+                </a:lnTo>
+                <a:close/>
+                <a:lnTo>
+                  <a:pt x="4823460" y="0"/>
+                </a:lnTo>
+                <a:close/>
+              </a:path>
+            </a:pathLst>
+          </a:custGeom>
+          <a:ln w="31750">
+            <a:solidFill>
+              <a:srgbClr val="00E5FF"/>
+            </a:solidFill>
+          </a:ln>
+        </p:spPr>
+        <p:style>
+          <a:lnRef idx="1">
+            <a:schemeClr val="accent1"/>
+          </a:lnRef>
+          <a:fillRef idx="3">
+            <a:schemeClr val="accent1"/>
+          </a:fillRef>
+          <a:effectRef idx="2">
+            <a:schemeClr val="accent1"/>
+          </a:effectRef>
+          <a:fontRef idx="minor">
+            <a:schemeClr val="lt1"/>
+          </a:fontRef>
+        </p:style>
+        <p:txBody>
+          <a:bodyPr rtlCol="0" anchor="ctr"/>
+          <a:lstStyle/>
+          <a:p>
+            <a:pPr algn="ctr"/>
+          </a:p>
+        </p:txBody>
+      </p:sp>
       <p:cxnSp>
         <p:nvCxnSpPr>
-          <p:cNvPr id="4" name="Connector 3"/>
+          <p:cNvPr id="5" name="Connector 4"/>
           <p:cNvCxnSpPr/>
           <p:nvPr/>
         </p:nvCxnSpPr>
         <p:spPr>
           <a:xfrm flipV="1">
-            <a:off x="4572000.0" y="2172520.7020514654"/>
-            <a:ext cx="41987.75510204118" cy="262069.2979485346"/>
+            <a:off x="7315200.0" y="353872.7999999998"/>
+            <a:ext cx="0.0" cy="2217877.2"/>
           </a:xfrm>
           <a:prstGeom prst="line">
             <a:avLst/>
           </a:prstGeom>
-          <a:ln w="25400">
+          <a:ln w="12700">
             <a:solidFill>
-              <a:srgbClr val="00C8FF"/>
+              <a:srgbClr val="787878"/>
             </a:solidFill>
+            <a:prstDash val="sysDash"/>
           </a:ln>
         </p:spPr>
         <p:style>
@@ -3201,1702 +4451,24 @@
           </a:fontRef>
         </p:style>
       </p:cxnSp>
-      <p:cxnSp>
-        <p:nvCxnSpPr>
-          <p:cNvPr id="5" name="Connector 4"/>
-          <p:cNvCxnSpPr/>
-          <p:nvPr/>
-        </p:nvCxnSpPr>
-        <p:spPr>
-          <a:xfrm flipV="1">
-            <a:off x="4613987.755102041" y="2083760.827023324"/>
-            <a:ext cx="41987.755102040246" cy="88759.87502814131"/>
-          </a:xfrm>
-          <a:prstGeom prst="line">
-            <a:avLst/>
-          </a:prstGeom>
-          <a:ln w="25400">
-            <a:solidFill>
-              <a:srgbClr val="00C8FF"/>
-            </a:solidFill>
-          </a:ln>
-        </p:spPr>
-        <p:style>
-          <a:lnRef idx="2">
-            <a:schemeClr val="accent1"/>
-          </a:lnRef>
-          <a:fillRef idx="0">
-            <a:schemeClr val="accent1"/>
-          </a:fillRef>
-          <a:effectRef idx="1">
-            <a:schemeClr val="accent1"/>
-          </a:effectRef>
-          <a:fontRef idx="minor">
-            <a:schemeClr val="tx1"/>
-          </a:fontRef>
-        </p:style>
-      </p:cxnSp>
-      <p:cxnSp>
-        <p:nvCxnSpPr>
-          <p:cNvPr id="6" name="Connector 5"/>
-          <p:cNvCxnSpPr/>
-          <p:nvPr/>
-        </p:nvCxnSpPr>
-        <p:spPr>
-          <a:xfrm flipV="1">
-            <a:off x="4655975.510204081" y="2024515.960067215"/>
-            <a:ext cx="41987.75510204118" cy="59244.86695610918"/>
-          </a:xfrm>
-          <a:prstGeom prst="line">
-            <a:avLst/>
-          </a:prstGeom>
-          <a:ln w="25400">
-            <a:solidFill>
-              <a:srgbClr val="00C8FF"/>
-            </a:solidFill>
-          </a:ln>
-        </p:spPr>
-        <p:style>
-          <a:lnRef idx="2">
-            <a:schemeClr val="accent1"/>
-          </a:lnRef>
-          <a:fillRef idx="0">
-            <a:schemeClr val="accent1"/>
-          </a:fillRef>
-          <a:effectRef idx="1">
-            <a:schemeClr val="accent1"/>
-          </a:effectRef>
-          <a:fontRef idx="minor">
-            <a:schemeClr val="tx1"/>
-          </a:fontRef>
-        </p:style>
-      </p:cxnSp>
-      <p:cxnSp>
-        <p:nvCxnSpPr>
-          <p:cNvPr id="7" name="Connector 6"/>
-          <p:cNvCxnSpPr/>
-          <p:nvPr/>
-        </p:nvCxnSpPr>
-        <p:spPr>
-          <a:xfrm flipV="1">
-            <a:off x="4697963.265306123" y="1977606.9779794822"/>
-            <a:ext cx="41987.755102040246" cy="46908.98208773276"/>
-          </a:xfrm>
-          <a:prstGeom prst="line">
-            <a:avLst/>
-          </a:prstGeom>
-          <a:ln w="25400">
-            <a:solidFill>
-              <a:srgbClr val="00C8FF"/>
-            </a:solidFill>
-          </a:ln>
-        </p:spPr>
-        <p:style>
-          <a:lnRef idx="2">
-            <a:schemeClr val="accent1"/>
-          </a:lnRef>
-          <a:fillRef idx="0">
-            <a:schemeClr val="accent1"/>
-          </a:fillRef>
-          <a:effectRef idx="1">
-            <a:schemeClr val="accent1"/>
-          </a:effectRef>
-          <a:fontRef idx="minor">
-            <a:schemeClr val="tx1"/>
-          </a:fontRef>
-        </p:style>
-      </p:cxnSp>
-      <p:cxnSp>
-        <p:nvCxnSpPr>
-          <p:cNvPr id="8" name="Connector 7"/>
-          <p:cNvCxnSpPr/>
-          <p:nvPr/>
-        </p:nvCxnSpPr>
-        <p:spPr>
-          <a:xfrm flipV="1">
-            <a:off x="4739951.020408163" y="1938385.1800869624"/>
-            <a:ext cx="41987.75510204118" cy="39221.79789251974"/>
-          </a:xfrm>
-          <a:prstGeom prst="line">
-            <a:avLst/>
-          </a:prstGeom>
-          <a:ln w="25400">
-            <a:solidFill>
-              <a:srgbClr val="00C8FF"/>
-            </a:solidFill>
-          </a:ln>
-        </p:spPr>
-        <p:style>
-          <a:lnRef idx="2">
-            <a:schemeClr val="accent1"/>
-          </a:lnRef>
-          <a:fillRef idx="0">
-            <a:schemeClr val="accent1"/>
-          </a:fillRef>
-          <a:effectRef idx="1">
-            <a:schemeClr val="accent1"/>
-          </a:effectRef>
-          <a:fontRef idx="minor">
-            <a:schemeClr val="tx1"/>
-          </a:fontRef>
-        </p:style>
-      </p:cxnSp>
-      <p:cxnSp>
-        <p:nvCxnSpPr>
-          <p:cNvPr id="9" name="Connector 8"/>
-          <p:cNvCxnSpPr/>
-          <p:nvPr/>
-        </p:nvCxnSpPr>
-        <p:spPr>
-          <a:xfrm flipV="1">
-            <a:off x="4781938.775510204" y="1904378.8787069714"/>
-            <a:ext cx="41987.75510204118" cy="34006.301379991"/>
-          </a:xfrm>
-          <a:prstGeom prst="line">
-            <a:avLst/>
-          </a:prstGeom>
-          <a:ln w="25400">
-            <a:solidFill>
-              <a:srgbClr val="00C8FF"/>
-            </a:solidFill>
-          </a:ln>
-        </p:spPr>
-        <p:style>
-          <a:lnRef idx="2">
-            <a:schemeClr val="accent1"/>
-          </a:lnRef>
-          <a:fillRef idx="0">
-            <a:schemeClr val="accent1"/>
-          </a:fillRef>
-          <a:effectRef idx="1">
-            <a:schemeClr val="accent1"/>
-          </a:effectRef>
-          <a:fontRef idx="minor">
-            <a:schemeClr val="tx1"/>
-          </a:fontRef>
-        </p:style>
-      </p:cxnSp>
-      <p:cxnSp>
-        <p:nvCxnSpPr>
-          <p:cNvPr id="10" name="Connector 9"/>
-          <p:cNvCxnSpPr/>
-          <p:nvPr/>
-        </p:nvCxnSpPr>
-        <p:spPr>
-          <a:xfrm flipV="1">
-            <a:off x="4823926.530612245" y="1873935.0980027935"/>
-            <a:ext cx="41987.755102040246" cy="30443.780704177916"/>
-          </a:xfrm>
-          <a:prstGeom prst="line">
-            <a:avLst/>
-          </a:prstGeom>
-          <a:ln w="25400">
-            <a:solidFill>
-              <a:srgbClr val="00C8FF"/>
-            </a:solidFill>
-          </a:ln>
-        </p:spPr>
-        <p:style>
-          <a:lnRef idx="2">
-            <a:schemeClr val="accent1"/>
-          </a:lnRef>
-          <a:fillRef idx="0">
-            <a:schemeClr val="accent1"/>
-          </a:fillRef>
-          <a:effectRef idx="1">
-            <a:schemeClr val="accent1"/>
-          </a:effectRef>
-          <a:fontRef idx="minor">
-            <a:schemeClr val="tx1"/>
-          </a:fontRef>
-        </p:style>
-      </p:cxnSp>
-      <p:cxnSp>
-        <p:nvCxnSpPr>
-          <p:cNvPr id="11" name="Connector 10"/>
-          <p:cNvCxnSpPr/>
-          <p:nvPr/>
-        </p:nvCxnSpPr>
-        <p:spPr>
-          <a:xfrm flipV="1">
-            <a:off x="4865914.285714285" y="1846172.6576112518"/>
-            <a:ext cx="41987.75510204118" cy="27762.44039154169"/>
-          </a:xfrm>
-          <a:prstGeom prst="line">
-            <a:avLst/>
-          </a:prstGeom>
-          <a:ln w="25400">
-            <a:solidFill>
-              <a:srgbClr val="00C8FF"/>
-            </a:solidFill>
-          </a:ln>
-        </p:spPr>
-        <p:style>
-          <a:lnRef idx="2">
-            <a:schemeClr val="accent1"/>
-          </a:lnRef>
-          <a:fillRef idx="0">
-            <a:schemeClr val="accent1"/>
-          </a:fillRef>
-          <a:effectRef idx="1">
-            <a:schemeClr val="accent1"/>
-          </a:effectRef>
-          <a:fontRef idx="minor">
-            <a:schemeClr val="tx1"/>
-          </a:fontRef>
-        </p:style>
-      </p:cxnSp>
-      <p:cxnSp>
-        <p:nvCxnSpPr>
-          <p:cNvPr id="12" name="Connector 11"/>
-          <p:cNvCxnSpPr/>
-          <p:nvPr/>
-        </p:nvCxnSpPr>
-        <p:spPr>
-          <a:xfrm flipV="1">
-            <a:off x="4907902.040816327" y="1820571.133193146"/>
-            <a:ext cx="41987.75510204118" cy="25601.524418105837"/>
-          </a:xfrm>
-          <a:prstGeom prst="line">
-            <a:avLst/>
-          </a:prstGeom>
-          <a:ln w="25400">
-            <a:solidFill>
-              <a:srgbClr val="00C8FF"/>
-            </a:solidFill>
-          </a:ln>
-        </p:spPr>
-        <p:style>
-          <a:lnRef idx="2">
-            <a:schemeClr val="accent1"/>
-          </a:lnRef>
-          <a:fillRef idx="0">
-            <a:schemeClr val="accent1"/>
-          </a:fillRef>
-          <a:effectRef idx="1">
-            <a:schemeClr val="accent1"/>
-          </a:effectRef>
-          <a:fontRef idx="minor">
-            <a:schemeClr val="tx1"/>
-          </a:fontRef>
-        </p:style>
-      </p:cxnSp>
-      <p:cxnSp>
-        <p:nvCxnSpPr>
-          <p:cNvPr id="13" name="Connector 12"/>
-          <p:cNvCxnSpPr/>
-          <p:nvPr/>
-        </p:nvCxnSpPr>
-        <p:spPr>
-          <a:xfrm flipV="1">
-            <a:off x="4949889.795918368" y="1796669.649658857"/>
-            <a:ext cx="41987.755102040246" cy="23901.48353428906"/>
-          </a:xfrm>
-          <a:prstGeom prst="line">
-            <a:avLst/>
-          </a:prstGeom>
-          <a:ln w="25400">
-            <a:solidFill>
-              <a:srgbClr val="00C8FF"/>
-            </a:solidFill>
-          </a:ln>
-        </p:spPr>
-        <p:style>
-          <a:lnRef idx="2">
-            <a:schemeClr val="accent1"/>
-          </a:lnRef>
-          <a:fillRef idx="0">
-            <a:schemeClr val="accent1"/>
-          </a:fillRef>
-          <a:effectRef idx="1">
-            <a:schemeClr val="accent1"/>
-          </a:effectRef>
-          <a:fontRef idx="minor">
-            <a:schemeClr val="tx1"/>
-          </a:fontRef>
-        </p:style>
-      </p:cxnSp>
-      <p:cxnSp>
-        <p:nvCxnSpPr>
-          <p:cNvPr id="14" name="Connector 13"/>
-          <p:cNvCxnSpPr/>
-          <p:nvPr/>
-        </p:nvCxnSpPr>
-        <p:spPr>
-          <a:xfrm flipV="1">
-            <a:off x="4991877.551020408" y="1774128.9955745246"/>
-            <a:ext cx="41987.75510204118" cy="22540.654084332287"/>
-          </a:xfrm>
-          <a:prstGeom prst="line">
-            <a:avLst/>
-          </a:prstGeom>
-          <a:ln w="25400">
-            <a:solidFill>
-              <a:srgbClr val="00C8FF"/>
-            </a:solidFill>
-          </a:ln>
-        </p:spPr>
-        <p:style>
-          <a:lnRef idx="2">
-            <a:schemeClr val="accent1"/>
-          </a:lnRef>
-          <a:fillRef idx="0">
-            <a:schemeClr val="accent1"/>
-          </a:fillRef>
-          <a:effectRef idx="1">
-            <a:schemeClr val="accent1"/>
-          </a:effectRef>
-          <a:fontRef idx="minor">
-            <a:schemeClr val="tx1"/>
-          </a:fontRef>
-        </p:style>
-      </p:cxnSp>
-      <p:cxnSp>
-        <p:nvCxnSpPr>
-          <p:cNvPr id="15" name="Connector 14"/>
-          <p:cNvCxnSpPr/>
-          <p:nvPr/>
-        </p:nvCxnSpPr>
-        <p:spPr>
-          <a:xfrm flipV="1">
-            <a:off x="5033865.306122449" y="1752720.9110635037"/>
-            <a:ext cx="41987.755102040246" cy="21408.08451102092"/>
-          </a:xfrm>
-          <a:prstGeom prst="line">
-            <a:avLst/>
-          </a:prstGeom>
-          <a:ln w="25400">
-            <a:solidFill>
-              <a:srgbClr val="00C8FF"/>
-            </a:solidFill>
-          </a:ln>
-        </p:spPr>
-        <p:style>
-          <a:lnRef idx="2">
-            <a:schemeClr val="accent1"/>
-          </a:lnRef>
-          <a:fillRef idx="0">
-            <a:schemeClr val="accent1"/>
-          </a:fillRef>
-          <a:effectRef idx="1">
-            <a:schemeClr val="accent1"/>
-          </a:effectRef>
-          <a:fontRef idx="minor">
-            <a:schemeClr val="tx1"/>
-          </a:fontRef>
-        </p:style>
-      </p:cxnSp>
-      <p:cxnSp>
-        <p:nvCxnSpPr>
-          <p:cNvPr id="16" name="Connector 15"/>
-          <p:cNvCxnSpPr/>
-          <p:nvPr/>
-        </p:nvCxnSpPr>
-        <p:spPr>
-          <a:xfrm flipV="1">
-            <a:off x="5075853.0612244895" y="1732282.8457247848"/>
-            <a:ext cx="41987.75510204118" cy="20438.065338718938"/>
-          </a:xfrm>
-          <a:prstGeom prst="line">
-            <a:avLst/>
-          </a:prstGeom>
-          <a:ln w="25400">
-            <a:solidFill>
-              <a:srgbClr val="00C8FF"/>
-            </a:solidFill>
-          </a:ln>
-        </p:spPr>
-        <p:style>
-          <a:lnRef idx="2">
-            <a:schemeClr val="accent1"/>
-          </a:lnRef>
-          <a:fillRef idx="0">
-            <a:schemeClr val="accent1"/>
-          </a:fillRef>
-          <a:effectRef idx="1">
-            <a:schemeClr val="accent1"/>
-          </a:effectRef>
-          <a:fontRef idx="minor">
-            <a:schemeClr val="tx1"/>
-          </a:fontRef>
-        </p:style>
-      </p:cxnSp>
-      <p:cxnSp>
-        <p:nvCxnSpPr>
-          <p:cNvPr id="17" name="Connector 16"/>
-          <p:cNvCxnSpPr/>
-          <p:nvPr/>
-        </p:nvCxnSpPr>
-        <p:spPr>
-          <a:xfrm flipV="1">
-            <a:off x="5117840.816326531" y="1712693.9259058111"/>
-            <a:ext cx="41987.755102040246" cy="19588.919818973634"/>
-          </a:xfrm>
-          <a:prstGeom prst="line">
-            <a:avLst/>
-          </a:prstGeom>
-          <a:ln w="25400">
-            <a:solidFill>
-              <a:srgbClr val="00C8FF"/>
-            </a:solidFill>
-          </a:ln>
-        </p:spPr>
-        <p:style>
-          <a:lnRef idx="2">
-            <a:schemeClr val="accent1"/>
-          </a:lnRef>
-          <a:fillRef idx="0">
-            <a:schemeClr val="accent1"/>
-          </a:fillRef>
-          <a:effectRef idx="1">
-            <a:schemeClr val="accent1"/>
-          </a:effectRef>
-          <a:fontRef idx="minor">
-            <a:schemeClr val="tx1"/>
-          </a:fontRef>
-        </p:style>
-      </p:cxnSp>
-      <p:cxnSp>
-        <p:nvCxnSpPr>
-          <p:cNvPr id="18" name="Connector 17"/>
-          <p:cNvCxnSpPr/>
-          <p:nvPr/>
-        </p:nvCxnSpPr>
-        <p:spPr>
-          <a:xfrm flipV="1">
-            <a:off x="5159828.571428571" y="1693856.0628520916"/>
-            <a:ext cx="41987.75510204118" cy="18837.863053719513"/>
-          </a:xfrm>
-          <a:prstGeom prst="line">
-            <a:avLst/>
-          </a:prstGeom>
-          <a:ln w="25400">
-            <a:solidFill>
-              <a:srgbClr val="00C8FF"/>
-            </a:solidFill>
-          </a:ln>
-        </p:spPr>
-        <p:style>
-          <a:lnRef idx="2">
-            <a:schemeClr val="accent1"/>
-          </a:lnRef>
-          <a:fillRef idx="0">
-            <a:schemeClr val="accent1"/>
-          </a:fillRef>
-          <a:effectRef idx="1">
-            <a:schemeClr val="accent1"/>
-          </a:effectRef>
-          <a:fontRef idx="minor">
-            <a:schemeClr val="tx1"/>
-          </a:fontRef>
-        </p:style>
-      </p:cxnSp>
-      <p:cxnSp>
-        <p:nvCxnSpPr>
-          <p:cNvPr id="19" name="Connector 18"/>
-          <p:cNvCxnSpPr/>
-          <p:nvPr/>
-        </p:nvCxnSpPr>
-        <p:spPr>
-          <a:xfrm flipV="1">
-            <a:off x="5201816.326530612" y="1675685.0349138053"/>
-            <a:ext cx="41987.75510204118" cy="18171.02793828631"/>
-          </a:xfrm>
-          <a:prstGeom prst="line">
-            <a:avLst/>
-          </a:prstGeom>
-          <a:ln w="25400">
-            <a:solidFill>
-              <a:srgbClr val="00C8FF"/>
-            </a:solidFill>
-          </a:ln>
-        </p:spPr>
-        <p:style>
-          <a:lnRef idx="2">
-            <a:schemeClr val="accent1"/>
-          </a:lnRef>
-          <a:fillRef idx="0">
-            <a:schemeClr val="accent1"/>
-          </a:fillRef>
-          <a:effectRef idx="1">
-            <a:schemeClr val="accent1"/>
-          </a:effectRef>
-          <a:fontRef idx="minor">
-            <a:schemeClr val="tx1"/>
-          </a:fontRef>
-        </p:style>
-      </p:cxnSp>
-      <p:cxnSp>
-        <p:nvCxnSpPr>
-          <p:cNvPr id="20" name="Connector 19"/>
-          <p:cNvCxnSpPr/>
-          <p:nvPr/>
-        </p:nvCxnSpPr>
-        <p:spPr>
-          <a:xfrm flipV="1">
-            <a:off x="5243804.081632653" y="1658109.9805265223"/>
-            <a:ext cx="41987.755102040246" cy="17575.054387283046"/>
-          </a:xfrm>
-          <a:prstGeom prst="line">
-            <a:avLst/>
-          </a:prstGeom>
-          <a:ln w="25400">
-            <a:solidFill>
-              <a:srgbClr val="00C8FF"/>
-            </a:solidFill>
-          </a:ln>
-        </p:spPr>
-        <p:style>
-          <a:lnRef idx="2">
-            <a:schemeClr val="accent1"/>
-          </a:lnRef>
-          <a:fillRef idx="0">
-            <a:schemeClr val="accent1"/>
-          </a:fillRef>
-          <a:effectRef idx="1">
-            <a:schemeClr val="accent1"/>
-          </a:effectRef>
-          <a:fontRef idx="minor">
-            <a:schemeClr val="tx1"/>
-          </a:fontRef>
-        </p:style>
-      </p:cxnSp>
-      <p:cxnSp>
-        <p:nvCxnSpPr>
-          <p:cNvPr id="21" name="Connector 20"/>
-          <p:cNvCxnSpPr/>
-          <p:nvPr/>
-        </p:nvCxnSpPr>
-        <p:spPr>
-          <a:xfrm flipV="1">
-            <a:off x="5285791.8367346935" y="1641070.0240802872"/>
-            <a:ext cx="41987.75510204118" cy="17039.956446235068"/>
-          </a:xfrm>
-          <a:prstGeom prst="line">
-            <a:avLst/>
-          </a:prstGeom>
-          <a:ln w="25400">
-            <a:solidFill>
-              <a:srgbClr val="00C8FF"/>
-            </a:solidFill>
-          </a:ln>
-        </p:spPr>
-        <p:style>
-          <a:lnRef idx="2">
-            <a:schemeClr val="accent1"/>
-          </a:lnRef>
-          <a:fillRef idx="0">
-            <a:schemeClr val="accent1"/>
-          </a:fillRef>
-          <a:effectRef idx="1">
-            <a:schemeClr val="accent1"/>
-          </a:effectRef>
-          <a:fontRef idx="minor">
-            <a:schemeClr val="tx1"/>
-          </a:fontRef>
-        </p:style>
-      </p:cxnSp>
-      <p:cxnSp>
-        <p:nvCxnSpPr>
-          <p:cNvPr id="22" name="Connector 21"/>
-          <p:cNvCxnSpPr/>
-          <p:nvPr/>
-        </p:nvCxnSpPr>
-        <p:spPr>
-          <a:xfrm flipV="1">
-            <a:off x="5327779.591836735" y="1624513.9978769394"/>
-            <a:ext cx="41987.75510204118" cy="16556.026203347836"/>
-          </a:xfrm>
-          <a:prstGeom prst="line">
-            <a:avLst/>
-          </a:prstGeom>
-          <a:ln w="25400">
-            <a:solidFill>
-              <a:srgbClr val="00C8FF"/>
-            </a:solidFill>
-          </a:ln>
-        </p:spPr>
-        <p:style>
-          <a:lnRef idx="2">
-            <a:schemeClr val="accent1"/>
-          </a:lnRef>
-          <a:fillRef idx="0">
-            <a:schemeClr val="accent1"/>
-          </a:fillRef>
-          <a:effectRef idx="1">
-            <a:schemeClr val="accent1"/>
-          </a:effectRef>
-          <a:fontRef idx="minor">
-            <a:schemeClr val="tx1"/>
-          </a:fontRef>
-        </p:style>
-      </p:cxnSp>
-      <p:cxnSp>
-        <p:nvCxnSpPr>
-          <p:cNvPr id="23" name="Connector 22"/>
-          <p:cNvCxnSpPr/>
-          <p:nvPr/>
-        </p:nvCxnSpPr>
-        <p:spPr>
-          <a:xfrm flipV="1">
-            <a:off x="5369767.346938776" y="1608394.0941109408"/>
-            <a:ext cx="41987.755102040246" cy="16119.903765998548"/>
-          </a:xfrm>
-          <a:prstGeom prst="line">
-            <a:avLst/>
-          </a:prstGeom>
-          <a:ln w="25400">
-            <a:solidFill>
-              <a:srgbClr val="00C8FF"/>
-            </a:solidFill>
-          </a:ln>
-        </p:spPr>
-        <p:style>
-          <a:lnRef idx="2">
-            <a:schemeClr val="accent1"/>
-          </a:lnRef>
-          <a:fillRef idx="0">
-            <a:schemeClr val="accent1"/>
-          </a:fillRef>
-          <a:effectRef idx="1">
-            <a:schemeClr val="accent1"/>
-          </a:effectRef>
-          <a:fontRef idx="minor">
-            <a:schemeClr val="tx1"/>
-          </a:fontRef>
-        </p:style>
-      </p:cxnSp>
-      <p:cxnSp>
-        <p:nvCxnSpPr>
-          <p:cNvPr id="24" name="Connector 23"/>
-          <p:cNvCxnSpPr/>
-          <p:nvPr/>
-        </p:nvCxnSpPr>
-        <p:spPr>
-          <a:xfrm flipV="1">
-            <a:off x="5411755.102040816" y="1592666.3701763437"/>
-            <a:ext cx="41987.75510204118" cy="15727.723934597103"/>
-          </a:xfrm>
-          <a:prstGeom prst="line">
-            <a:avLst/>
-          </a:prstGeom>
-          <a:ln w="25400">
-            <a:solidFill>
-              <a:srgbClr val="00C8FF"/>
-            </a:solidFill>
-          </a:ln>
-        </p:spPr>
-        <p:style>
-          <a:lnRef idx="2">
-            <a:schemeClr val="accent1"/>
-          </a:lnRef>
-          <a:fillRef idx="0">
-            <a:schemeClr val="accent1"/>
-          </a:fillRef>
-          <a:effectRef idx="1">
-            <a:schemeClr val="accent1"/>
-          </a:effectRef>
-          <a:fontRef idx="minor">
-            <a:schemeClr val="tx1"/>
-          </a:fontRef>
-        </p:style>
-      </p:cxnSp>
-      <p:cxnSp>
-        <p:nvCxnSpPr>
-          <p:cNvPr id="25" name="Connector 24"/>
-          <p:cNvCxnSpPr/>
-          <p:nvPr/>
-        </p:nvCxnSpPr>
-        <p:spPr>
-          <a:xfrm flipV="1">
-            <a:off x="5453742.857142857" y="1577291.0565026323"/>
-            <a:ext cx="41987.755102040246" cy="15375.313673711382"/>
-          </a:xfrm>
-          <a:prstGeom prst="line">
-            <a:avLst/>
-          </a:prstGeom>
-          <a:ln w="25400">
-            <a:solidFill>
-              <a:srgbClr val="00C8FF"/>
-            </a:solidFill>
-          </a:ln>
-        </p:spPr>
-        <p:style>
-          <a:lnRef idx="2">
-            <a:schemeClr val="accent1"/>
-          </a:lnRef>
-          <a:fillRef idx="0">
-            <a:schemeClr val="accent1"/>
-          </a:fillRef>
-          <a:effectRef idx="1">
-            <a:schemeClr val="accent1"/>
-          </a:effectRef>
-          <a:fontRef idx="minor">
-            <a:schemeClr val="tx1"/>
-          </a:fontRef>
-        </p:style>
-      </p:cxnSp>
-      <p:cxnSp>
-        <p:nvCxnSpPr>
-          <p:cNvPr id="26" name="Connector 25"/>
-          <p:cNvCxnSpPr/>
-          <p:nvPr/>
-        </p:nvCxnSpPr>
-        <p:spPr>
-          <a:xfrm flipV="1">
-            <a:off x="5495730.6122448975" y="1562231.9454545602"/>
-            <a:ext cx="41987.75510204118" cy="15059.11104807211"/>
-          </a:xfrm>
-          <a:prstGeom prst="line">
-            <a:avLst/>
-          </a:prstGeom>
-          <a:ln w="25400">
-            <a:solidFill>
-              <a:srgbClr val="00C8FF"/>
-            </a:solidFill>
-          </a:ln>
-        </p:spPr>
-        <p:style>
-          <a:lnRef idx="2">
-            <a:schemeClr val="accent1"/>
-          </a:lnRef>
-          <a:fillRef idx="0">
-            <a:schemeClr val="accent1"/>
-          </a:fillRef>
-          <a:effectRef idx="1">
-            <a:schemeClr val="accent1"/>
-          </a:effectRef>
-          <a:fontRef idx="minor">
-            <a:schemeClr val="tx1"/>
-          </a:fontRef>
-        </p:style>
-      </p:cxnSp>
-      <p:cxnSp>
-        <p:nvCxnSpPr>
-          <p:cNvPr id="27" name="Connector 26"/>
-          <p:cNvCxnSpPr/>
-          <p:nvPr/>
-        </p:nvCxnSpPr>
-        <p:spPr>
-          <a:xfrm flipV="1">
-            <a:off x="5537718.367346939" y="1547456.3146152832"/>
-            <a:ext cx="41987.75510204118" cy="14775.630839277059"/>
-          </a:xfrm>
-          <a:prstGeom prst="line">
-            <a:avLst/>
-          </a:prstGeom>
-          <a:ln w="25400">
-            <a:solidFill>
-              <a:srgbClr val="00C8FF"/>
-            </a:solidFill>
-          </a:ln>
-        </p:spPr>
-        <p:style>
-          <a:lnRef idx="2">
-            <a:schemeClr val="accent1"/>
-          </a:lnRef>
-          <a:fillRef idx="0">
-            <a:schemeClr val="accent1"/>
-          </a:fillRef>
-          <a:effectRef idx="1">
-            <a:schemeClr val="accent1"/>
-          </a:effectRef>
-          <a:fontRef idx="minor">
-            <a:schemeClr val="tx1"/>
-          </a:fontRef>
-        </p:style>
-      </p:cxnSp>
-      <p:cxnSp>
-        <p:nvCxnSpPr>
-          <p:cNvPr id="28" name="Connector 27"/>
-          <p:cNvCxnSpPr/>
-          <p:nvPr/>
-        </p:nvCxnSpPr>
-        <p:spPr>
-          <a:xfrm flipV="1">
-            <a:off x="5579706.12244898" y="1532934.6747169853"/>
-            <a:ext cx="41987.75510204118" cy="14521.639898297843"/>
-          </a:xfrm>
-          <a:prstGeom prst="line">
-            <a:avLst/>
-          </a:prstGeom>
-          <a:ln w="25400">
-            <a:solidFill>
-              <a:srgbClr val="00C8FF"/>
-            </a:solidFill>
-          </a:ln>
-        </p:spPr>
-        <p:style>
-          <a:lnRef idx="2">
-            <a:schemeClr val="accent1"/>
-          </a:lnRef>
-          <a:fillRef idx="0">
-            <a:schemeClr val="accent1"/>
-          </a:fillRef>
-          <a:effectRef idx="1">
-            <a:schemeClr val="accent1"/>
-          </a:effectRef>
-          <a:fontRef idx="minor">
-            <a:schemeClr val="tx1"/>
-          </a:fontRef>
-        </p:style>
-      </p:cxnSp>
-      <p:cxnSp>
-        <p:nvCxnSpPr>
-          <p:cNvPr id="29" name="Connector 28"/>
-          <p:cNvCxnSpPr/>
-          <p:nvPr/>
-        </p:nvCxnSpPr>
-        <p:spPr>
-          <a:xfrm flipV="1">
-            <a:off x="5621693.877551021" y="1518638.9618764606"/>
-            <a:ext cx="41987.755102040246" cy="14295.712840524735"/>
-          </a:xfrm>
-          <a:prstGeom prst="line">
-            <a:avLst/>
-          </a:prstGeom>
-          <a:ln w="25400">
-            <a:solidFill>
-              <a:srgbClr val="00C8FF"/>
-            </a:solidFill>
-          </a:ln>
-        </p:spPr>
-        <p:style>
-          <a:lnRef idx="2">
-            <a:schemeClr val="accent1"/>
-          </a:lnRef>
-          <a:fillRef idx="0">
-            <a:schemeClr val="accent1"/>
-          </a:fillRef>
-          <a:effectRef idx="1">
-            <a:schemeClr val="accent1"/>
-          </a:effectRef>
-          <a:fontRef idx="minor">
-            <a:schemeClr val="tx1"/>
-          </a:fontRef>
-        </p:style>
-      </p:cxnSp>
-      <p:cxnSp>
-        <p:nvCxnSpPr>
-          <p:cNvPr id="30" name="Connector 29"/>
-          <p:cNvCxnSpPr/>
-          <p:nvPr/>
-        </p:nvCxnSpPr>
-        <p:spPr>
-          <a:xfrm flipV="1">
-            <a:off x="5663681.632653061" y="1504544.6060938505"/>
-            <a:ext cx="41987.75510204118" cy="14094.355782610131"/>
-          </a:xfrm>
-          <a:prstGeom prst="line">
-            <a:avLst/>
-          </a:prstGeom>
-          <a:ln w="25400">
-            <a:solidFill>
-              <a:srgbClr val="00C8FF"/>
-            </a:solidFill>
-          </a:ln>
-        </p:spPr>
-        <p:style>
-          <a:lnRef idx="2">
-            <a:schemeClr val="accent1"/>
-          </a:lnRef>
-          <a:fillRef idx="0">
-            <a:schemeClr val="accent1"/>
-          </a:fillRef>
-          <a:effectRef idx="1">
-            <a:schemeClr val="accent1"/>
-          </a:effectRef>
-          <a:fontRef idx="minor">
-            <a:schemeClr val="tx1"/>
-          </a:fontRef>
-        </p:style>
-      </p:cxnSp>
-      <p:cxnSp>
-        <p:nvCxnSpPr>
-          <p:cNvPr id="31" name="Connector 30"/>
-          <p:cNvCxnSpPr/>
-          <p:nvPr/>
-        </p:nvCxnSpPr>
-        <p:spPr>
-          <a:xfrm flipV="1">
-            <a:off x="5705669.3877551025" y="1490629.7660610809"/>
-            <a:ext cx="41987.755102040246" cy="13914.8400327696"/>
-          </a:xfrm>
-          <a:prstGeom prst="line">
-            <a:avLst/>
-          </a:prstGeom>
-          <a:ln w="25400">
-            <a:solidFill>
-              <a:srgbClr val="00C8FF"/>
-            </a:solidFill>
-          </a:ln>
-        </p:spPr>
-        <p:style>
-          <a:lnRef idx="2">
-            <a:schemeClr val="accent1"/>
-          </a:lnRef>
-          <a:fillRef idx="0">
-            <a:schemeClr val="accent1"/>
-          </a:fillRef>
-          <a:effectRef idx="1">
-            <a:schemeClr val="accent1"/>
-          </a:effectRef>
-          <a:fontRef idx="minor">
-            <a:schemeClr val="tx1"/>
-          </a:fontRef>
-        </p:style>
-      </p:cxnSp>
-      <p:cxnSp>
-        <p:nvCxnSpPr>
-          <p:cNvPr id="32" name="Connector 31"/>
-          <p:cNvCxnSpPr/>
-          <p:nvPr/>
-        </p:nvCxnSpPr>
-        <p:spPr>
-          <a:xfrm flipV="1">
-            <a:off x="5747657.142857143" y="1476871.5861808641"/>
-            <a:ext cx="41987.75510204118" cy="13758.179880216718"/>
-          </a:xfrm>
-          <a:prstGeom prst="line">
-            <a:avLst/>
-          </a:prstGeom>
-          <a:ln w="25400">
-            <a:solidFill>
-              <a:srgbClr val="00C8FF"/>
-            </a:solidFill>
-          </a:ln>
-        </p:spPr>
-        <p:style>
-          <a:lnRef idx="2">
-            <a:schemeClr val="accent1"/>
-          </a:lnRef>
-          <a:fillRef idx="0">
-            <a:schemeClr val="accent1"/>
-          </a:fillRef>
-          <a:effectRef idx="1">
-            <a:schemeClr val="accent1"/>
-          </a:effectRef>
-          <a:fontRef idx="minor">
-            <a:schemeClr val="tx1"/>
-          </a:fontRef>
-        </p:style>
-      </p:cxnSp>
-      <p:cxnSp>
-        <p:nvCxnSpPr>
-          <p:cNvPr id="33" name="Connector 32"/>
-          <p:cNvCxnSpPr/>
-          <p:nvPr/>
-        </p:nvCxnSpPr>
-        <p:spPr>
-          <a:xfrm flipV="1">
-            <a:off x="5789644.897959184" y="1463249.695635727"/>
-            <a:ext cx="41987.755102040246" cy="13621.890545137227"/>
-          </a:xfrm>
-          <a:prstGeom prst="line">
-            <a:avLst/>
-          </a:prstGeom>
-          <a:ln w="25400">
-            <a:solidFill>
-              <a:srgbClr val="00C8FF"/>
-            </a:solidFill>
-          </a:ln>
-        </p:spPr>
-        <p:style>
-          <a:lnRef idx="2">
-            <a:schemeClr val="accent1"/>
-          </a:lnRef>
-          <a:fillRef idx="0">
-            <a:schemeClr val="accent1"/>
-          </a:fillRef>
-          <a:effectRef idx="1">
-            <a:schemeClr val="accent1"/>
-          </a:effectRef>
-          <a:fontRef idx="minor">
-            <a:schemeClr val="tx1"/>
-          </a:fontRef>
-        </p:style>
-      </p:cxnSp>
-      <p:cxnSp>
-        <p:nvCxnSpPr>
-          <p:cNvPr id="34" name="Connector 33"/>
-          <p:cNvCxnSpPr/>
-          <p:nvPr/>
-        </p:nvCxnSpPr>
-        <p:spPr>
-          <a:xfrm flipV="1">
-            <a:off x="5831632.653061224" y="1449745.3103133456"/>
-            <a:ext cx="41987.75510204118" cy="13504.385322381277"/>
-          </a:xfrm>
-          <a:prstGeom prst="line">
-            <a:avLst/>
-          </a:prstGeom>
-          <a:ln w="25400">
-            <a:solidFill>
-              <a:srgbClr val="00C8FF"/>
-            </a:solidFill>
-          </a:ln>
-        </p:spPr>
-        <p:style>
-          <a:lnRef idx="2">
-            <a:schemeClr val="accent1"/>
-          </a:lnRef>
-          <a:fillRef idx="0">
-            <a:schemeClr val="accent1"/>
-          </a:fillRef>
-          <a:effectRef idx="1">
-            <a:schemeClr val="accent1"/>
-          </a:effectRef>
-          <a:fontRef idx="minor">
-            <a:schemeClr val="tx1"/>
-          </a:fontRef>
-        </p:style>
-      </p:cxnSp>
-      <p:cxnSp>
-        <p:nvCxnSpPr>
-          <p:cNvPr id="35" name="Connector 34"/>
-          <p:cNvCxnSpPr/>
-          <p:nvPr/>
-        </p:nvCxnSpPr>
-        <p:spPr>
-          <a:xfrm flipV="1">
-            <a:off x="5873620.408163265" y="1436341.458911792"/>
-            <a:ext cx="41987.75510204118" cy="13403.851401553722"/>
-          </a:xfrm>
-          <a:prstGeom prst="line">
-            <a:avLst/>
-          </a:prstGeom>
-          <a:ln w="25400">
-            <a:solidFill>
-              <a:srgbClr val="00C8FF"/>
-            </a:solidFill>
-          </a:ln>
-        </p:spPr>
-        <p:style>
-          <a:lnRef idx="2">
-            <a:schemeClr val="accent1"/>
-          </a:lnRef>
-          <a:fillRef idx="0">
-            <a:schemeClr val="accent1"/>
-          </a:fillRef>
-          <a:effectRef idx="1">
-            <a:schemeClr val="accent1"/>
-          </a:effectRef>
-          <a:fontRef idx="minor">
-            <a:schemeClr val="tx1"/>
-          </a:fontRef>
-        </p:style>
-      </p:cxnSp>
-      <p:cxnSp>
-        <p:nvCxnSpPr>
-          <p:cNvPr id="36" name="Connector 35"/>
-          <p:cNvCxnSpPr/>
-          <p:nvPr/>
-        </p:nvCxnSpPr>
-        <p:spPr>
-          <a:xfrm flipV="1">
-            <a:off x="5915608.1632653065" y="1423022.7858100503"/>
-            <a:ext cx="41987.755102040246" cy="13318.673101741588"/>
-          </a:xfrm>
-          <a:prstGeom prst="line">
-            <a:avLst/>
-          </a:prstGeom>
-          <a:ln w="25400">
-            <a:solidFill>
-              <a:srgbClr val="00C8FF"/>
-            </a:solidFill>
-          </a:ln>
-        </p:spPr>
-        <p:style>
-          <a:lnRef idx="2">
-            <a:schemeClr val="accent1"/>
-          </a:lnRef>
-          <a:fillRef idx="0">
-            <a:schemeClr val="accent1"/>
-          </a:fillRef>
-          <a:effectRef idx="1">
-            <a:schemeClr val="accent1"/>
-          </a:effectRef>
-          <a:fontRef idx="minor">
-            <a:schemeClr val="tx1"/>
-          </a:fontRef>
-        </p:style>
-      </p:cxnSp>
-      <p:cxnSp>
-        <p:nvCxnSpPr>
-          <p:cNvPr id="37" name="Connector 36"/>
-          <p:cNvCxnSpPr/>
-          <p:nvPr/>
-        </p:nvCxnSpPr>
-        <p:spPr>
-          <a:xfrm flipV="1">
-            <a:off x="5957595.918367347" y="1409775.4109682476"/>
-            <a:ext cx="41987.75510204118" cy="13247.374841802754"/>
-          </a:xfrm>
-          <a:prstGeom prst="line">
-            <a:avLst/>
-          </a:prstGeom>
-          <a:ln w="25400">
-            <a:solidFill>
-              <a:srgbClr val="00C8FF"/>
-            </a:solidFill>
-          </a:ln>
-        </p:spPr>
-        <p:style>
-          <a:lnRef idx="2">
-            <a:schemeClr val="accent1"/>
-          </a:lnRef>
-          <a:fillRef idx="0">
-            <a:schemeClr val="accent1"/>
-          </a:fillRef>
-          <a:effectRef idx="1">
-            <a:schemeClr val="accent1"/>
-          </a:effectRef>
-          <a:fontRef idx="minor">
-            <a:schemeClr val="tx1"/>
-          </a:fontRef>
-        </p:style>
-      </p:cxnSp>
-      <p:cxnSp>
-        <p:nvCxnSpPr>
-          <p:cNvPr id="38" name="Connector 37"/>
-          <p:cNvCxnSpPr/>
-          <p:nvPr/>
-        </p:nvCxnSpPr>
-        <p:spPr>
-          <a:xfrm flipV="1">
-            <a:off x="5999583.673469388" y="1396586.9406409918"/>
-            <a:ext cx="41987.75510204118" cy="13188.470327255782"/>
-          </a:xfrm>
-          <a:prstGeom prst="line">
-            <a:avLst/>
-          </a:prstGeom>
-          <a:ln w="25400">
-            <a:solidFill>
-              <a:srgbClr val="00C8FF"/>
-            </a:solidFill>
-          </a:ln>
-        </p:spPr>
-        <p:style>
-          <a:lnRef idx="2">
-            <a:schemeClr val="accent1"/>
-          </a:lnRef>
-          <a:fillRef idx="0">
-            <a:schemeClr val="accent1"/>
-          </a:fillRef>
-          <a:effectRef idx="1">
-            <a:schemeClr val="accent1"/>
-          </a:effectRef>
-          <a:fontRef idx="minor">
-            <a:schemeClr val="tx1"/>
-          </a:fontRef>
-        </p:style>
-      </p:cxnSp>
-      <p:cxnSp>
-        <p:nvCxnSpPr>
-          <p:cNvPr id="39" name="Connector 38"/>
-          <p:cNvCxnSpPr/>
-          <p:nvPr/>
-        </p:nvCxnSpPr>
-        <p:spPr>
-          <a:xfrm flipV="1">
-            <a:off x="6041571.428571429" y="1383446.5046091985"/>
-            <a:ext cx="41987.755102040246" cy="13140.436031793244"/>
-          </a:xfrm>
-          <a:prstGeom prst="line">
-            <a:avLst/>
-          </a:prstGeom>
-          <a:ln w="25400">
-            <a:solidFill>
-              <a:srgbClr val="00C8FF"/>
-            </a:solidFill>
-          </a:ln>
-        </p:spPr>
-        <p:style>
-          <a:lnRef idx="2">
-            <a:schemeClr val="accent1"/>
-          </a:lnRef>
-          <a:fillRef idx="0">
-            <a:schemeClr val="accent1"/>
-          </a:fillRef>
-          <a:effectRef idx="1">
-            <a:schemeClr val="accent1"/>
-          </a:effectRef>
-          <a:fontRef idx="minor">
-            <a:schemeClr val="tx1"/>
-          </a:fontRef>
-        </p:style>
-      </p:cxnSp>
-      <p:cxnSp>
-        <p:nvCxnSpPr>
-          <p:cNvPr id="40" name="Connector 39"/>
-          <p:cNvCxnSpPr/>
-          <p:nvPr/>
-        </p:nvCxnSpPr>
-        <p:spPr>
-          <a:xfrm flipV="1">
-            <a:off x="6083559.183673469" y="1370344.62991355"/>
-            <a:ext cx="41987.75510204118" cy="13101.87469564844"/>
-          </a:xfrm>
-          <a:prstGeom prst="line">
-            <a:avLst/>
-          </a:prstGeom>
-          <a:ln w="25400">
-            <a:solidFill>
-              <a:srgbClr val="00C8FF"/>
-            </a:solidFill>
-          </a:ln>
-        </p:spPr>
-        <p:style>
-          <a:lnRef idx="2">
-            <a:schemeClr val="accent1"/>
-          </a:lnRef>
-          <a:fillRef idx="0">
-            <a:schemeClr val="accent1"/>
-          </a:fillRef>
-          <a:effectRef idx="1">
-            <a:schemeClr val="accent1"/>
-          </a:effectRef>
-          <a:fontRef idx="minor">
-            <a:schemeClr val="tx1"/>
-          </a:fontRef>
-        </p:style>
-      </p:cxnSp>
-      <p:cxnSp>
-        <p:nvCxnSpPr>
-          <p:cNvPr id="41" name="Connector 40"/>
-          <p:cNvCxnSpPr/>
-          <p:nvPr/>
-        </p:nvCxnSpPr>
-        <p:spPr>
-          <a:xfrm flipV="1">
-            <a:off x="6125546.9387755105" y="1357272.5866425154"/>
-            <a:ext cx="41987.755102040246" cy="13072.043271034723"/>
-          </a:xfrm>
-          <a:prstGeom prst="line">
-            <a:avLst/>
-          </a:prstGeom>
-          <a:ln w="25400">
-            <a:solidFill>
-              <a:srgbClr val="00C8FF"/>
-            </a:solidFill>
-          </a:ln>
-        </p:spPr>
-        <p:style>
-          <a:lnRef idx="2">
-            <a:schemeClr val="accent1"/>
-          </a:lnRef>
-          <a:fillRef idx="0">
-            <a:schemeClr val="accent1"/>
-          </a:fillRef>
-          <a:effectRef idx="1">
-            <a:schemeClr val="accent1"/>
-          </a:effectRef>
-          <a:fontRef idx="minor">
-            <a:schemeClr val="tx1"/>
-          </a:fontRef>
-        </p:style>
-      </p:cxnSp>
-      <p:cxnSp>
-        <p:nvCxnSpPr>
-          <p:cNvPr id="42" name="Connector 41"/>
-          <p:cNvCxnSpPr/>
-          <p:nvPr/>
-        </p:nvCxnSpPr>
-        <p:spPr>
-          <a:xfrm flipV="1">
-            <a:off x="6167534.693877551" y="1344222.6187531205"/>
-            <a:ext cx="41987.75510204118" cy="13049.967889394844"/>
-          </a:xfrm>
-          <a:prstGeom prst="line">
-            <a:avLst/>
-          </a:prstGeom>
-          <a:ln w="25400">
-            <a:solidFill>
-              <a:srgbClr val="00C8FF"/>
-            </a:solidFill>
-          </a:ln>
-        </p:spPr>
-        <p:style>
-          <a:lnRef idx="2">
-            <a:schemeClr val="accent1"/>
-          </a:lnRef>
-          <a:fillRef idx="0">
-            <a:schemeClr val="accent1"/>
-          </a:fillRef>
-          <a:effectRef idx="1">
-            <a:schemeClr val="accent1"/>
-          </a:effectRef>
-          <a:fontRef idx="minor">
-            <a:schemeClr val="tx1"/>
-          </a:fontRef>
-        </p:style>
-      </p:cxnSp>
-      <p:cxnSp>
-        <p:nvCxnSpPr>
-          <p:cNvPr id="43" name="Connector 42"/>
-          <p:cNvCxnSpPr/>
-          <p:nvPr/>
-        </p:nvCxnSpPr>
-        <p:spPr>
-          <a:xfrm flipV="1">
-            <a:off x="6209522.448979592" y="1331187.27417255"/>
-            <a:ext cx="41987.755102040246" cy="13035.344580570469"/>
-          </a:xfrm>
-          <a:prstGeom prst="line">
-            <a:avLst/>
-          </a:prstGeom>
-          <a:ln w="25400">
-            <a:solidFill>
-              <a:srgbClr val="00C8FF"/>
-            </a:solidFill>
-          </a:ln>
-        </p:spPr>
-        <p:style>
-          <a:lnRef idx="2">
-            <a:schemeClr val="accent1"/>
-          </a:lnRef>
-          <a:fillRef idx="0">
-            <a:schemeClr val="accent1"/>
-          </a:fillRef>
-          <a:effectRef idx="1">
-            <a:schemeClr val="accent1"/>
-          </a:effectRef>
-          <a:fontRef idx="minor">
-            <a:schemeClr val="tx1"/>
-          </a:fontRef>
-        </p:style>
-      </p:cxnSp>
-      <p:cxnSp>
-        <p:nvCxnSpPr>
-          <p:cNvPr id="44" name="Connector 43"/>
-          <p:cNvCxnSpPr/>
-          <p:nvPr/>
-        </p:nvCxnSpPr>
-        <p:spPr>
-          <a:xfrm flipV="1">
-            <a:off x="6251510.204081632" y="1318159.6653471417"/>
-            <a:ext cx="41987.75510204118" cy="13027.608825408388"/>
-          </a:xfrm>
-          <a:prstGeom prst="line">
-            <a:avLst/>
-          </a:prstGeom>
-          <a:ln w="25400">
-            <a:solidFill>
-              <a:srgbClr val="00C8FF"/>
-            </a:solidFill>
-          </a:ln>
-        </p:spPr>
-        <p:style>
-          <a:lnRef idx="2">
-            <a:schemeClr val="accent1"/>
-          </a:lnRef>
-          <a:fillRef idx="0">
-            <a:schemeClr val="accent1"/>
-          </a:fillRef>
-          <a:effectRef idx="1">
-            <a:schemeClr val="accent1"/>
-          </a:effectRef>
-          <a:fontRef idx="minor">
-            <a:schemeClr val="tx1"/>
-          </a:fontRef>
-        </p:style>
-      </p:cxnSp>
-      <p:cxnSp>
-        <p:nvCxnSpPr>
-          <p:cNvPr id="45" name="Connector 44"/>
-          <p:cNvCxnSpPr/>
-          <p:nvPr/>
-        </p:nvCxnSpPr>
-        <p:spPr>
-          <a:xfrm flipV="1">
-            <a:off x="6293497.959183673" y="1305133.4033396558"/>
-            <a:ext cx="41987.75510204118" cy="13026.262007485842"/>
-          </a:xfrm>
-          <a:prstGeom prst="line">
-            <a:avLst/>
-          </a:prstGeom>
-          <a:ln w="25400">
-            <a:solidFill>
-              <a:srgbClr val="00C8FF"/>
-            </a:solidFill>
-          </a:ln>
-        </p:spPr>
-        <p:style>
-          <a:lnRef idx="2">
-            <a:schemeClr val="accent1"/>
-          </a:lnRef>
-          <a:fillRef idx="0">
-            <a:schemeClr val="accent1"/>
-          </a:fillRef>
-          <a:effectRef idx="1">
-            <a:schemeClr val="accent1"/>
-          </a:effectRef>
-          <a:fontRef idx="minor">
-            <a:schemeClr val="tx1"/>
-          </a:fontRef>
-        </p:style>
-      </p:cxnSp>
-      <p:cxnSp>
-        <p:nvCxnSpPr>
-          <p:cNvPr id="46" name="Connector 45"/>
-          <p:cNvCxnSpPr/>
-          <p:nvPr/>
-        </p:nvCxnSpPr>
-        <p:spPr>
-          <a:xfrm flipV="1">
-            <a:off x="6335485.714285715" y="1292097.8491805308"/>
-            <a:ext cx="41987.755102040246" cy="13035.55415912508"/>
-          </a:xfrm>
-          <a:prstGeom prst="line">
-            <a:avLst/>
-          </a:prstGeom>
-          <a:ln w="25400">
-            <a:solidFill>
-              <a:srgbClr val="00C8FF"/>
-            </a:solidFill>
-          </a:ln>
-        </p:spPr>
-        <p:style>
-          <a:lnRef idx="2">
-            <a:schemeClr val="accent1"/>
-          </a:lnRef>
-          <a:fillRef idx="0">
-            <a:schemeClr val="accent1"/>
-          </a:fillRef>
-          <a:effectRef idx="1">
-            <a:schemeClr val="accent1"/>
-          </a:effectRef>
-          <a:fontRef idx="minor">
-            <a:schemeClr val="tx1"/>
-          </a:fontRef>
-        </p:style>
-      </p:cxnSp>
-      <p:cxnSp>
-        <p:nvCxnSpPr>
-          <p:cNvPr id="47" name="Connector 46"/>
-          <p:cNvCxnSpPr/>
-          <p:nvPr/>
-        </p:nvCxnSpPr>
-        <p:spPr>
-          <a:xfrm flipV="1">
-            <a:off x="6377473.469387755" y="1279047.8251087372"/>
-            <a:ext cx="41987.75510204118" cy="13050.024071793538"/>
-          </a:xfrm>
-          <a:prstGeom prst="line">
-            <a:avLst/>
-          </a:prstGeom>
-          <a:ln w="25400">
-            <a:solidFill>
-              <a:srgbClr val="00C8FF"/>
-            </a:solidFill>
-          </a:ln>
-        </p:spPr>
-        <p:style>
-          <a:lnRef idx="2">
-            <a:schemeClr val="accent1"/>
-          </a:lnRef>
-          <a:fillRef idx="0">
-            <a:schemeClr val="accent1"/>
-          </a:fillRef>
-          <a:effectRef idx="1">
-            <a:schemeClr val="accent1"/>
-          </a:effectRef>
-          <a:fontRef idx="minor">
-            <a:schemeClr val="tx1"/>
-          </a:fontRef>
-        </p:style>
-      </p:cxnSp>
-      <p:cxnSp>
-        <p:nvCxnSpPr>
-          <p:cNvPr id="48" name="Connector 47"/>
-          <p:cNvCxnSpPr/>
-          <p:nvPr/>
-        </p:nvCxnSpPr>
-        <p:spPr>
-          <a:xfrm flipV="1">
-            <a:off x="6419461.224489796" y="1265979.0079866967"/>
-            <a:ext cx="41987.75510204118" cy="13068.81712204055"/>
-          </a:xfrm>
-          <a:prstGeom prst="line">
-            <a:avLst/>
-          </a:prstGeom>
-          <a:ln w="25400">
-            <a:solidFill>
-              <a:srgbClr val="00C8FF"/>
-            </a:solidFill>
-          </a:ln>
-        </p:spPr>
-        <p:style>
-          <a:lnRef idx="2">
-            <a:schemeClr val="accent1"/>
-          </a:lnRef>
-          <a:fillRef idx="0">
-            <a:schemeClr val="accent1"/>
-          </a:fillRef>
-          <a:effectRef idx="1">
-            <a:schemeClr val="accent1"/>
-          </a:effectRef>
-          <a:fontRef idx="minor">
-            <a:schemeClr val="tx1"/>
-          </a:fontRef>
-        </p:style>
-      </p:cxnSp>
-      <p:cxnSp>
-        <p:nvCxnSpPr>
-          <p:cNvPr id="49" name="Connector 48"/>
-          <p:cNvCxnSpPr/>
-          <p:nvPr/>
-        </p:nvCxnSpPr>
-        <p:spPr>
-          <a:xfrm flipV="1">
-            <a:off x="6461448.979591837" y="1252887.3993064195"/>
-            <a:ext cx="41987.755102040246" cy="13091.608680277131"/>
-          </a:xfrm>
-          <a:prstGeom prst="line">
-            <a:avLst/>
-          </a:prstGeom>
-          <a:ln w="25400">
-            <a:solidFill>
-              <a:srgbClr val="00C8FF"/>
-            </a:solidFill>
-          </a:ln>
-        </p:spPr>
-        <p:style>
-          <a:lnRef idx="2">
-            <a:schemeClr val="accent1"/>
-          </a:lnRef>
-          <a:fillRef idx="0">
-            <a:schemeClr val="accent1"/>
-          </a:fillRef>
-          <a:effectRef idx="1">
-            <a:schemeClr val="accent1"/>
-          </a:effectRef>
-          <a:fontRef idx="minor">
-            <a:schemeClr val="tx1"/>
-          </a:fontRef>
-        </p:style>
-      </p:cxnSp>
-      <p:cxnSp>
-        <p:nvCxnSpPr>
-          <p:cNvPr id="50" name="Connector 49"/>
-          <p:cNvCxnSpPr/>
-          <p:nvPr/>
-        </p:nvCxnSpPr>
-        <p:spPr>
-          <a:xfrm flipV="1">
-            <a:off x="6503436.734693877" y="1239769.4157106583"/>
-            <a:ext cx="41987.75510204118" cy="13117.983595761238"/>
-          </a:xfrm>
-          <a:prstGeom prst="line">
-            <a:avLst/>
-          </a:prstGeom>
-          <a:ln w="25400">
-            <a:solidFill>
-              <a:srgbClr val="00C8FF"/>
-            </a:solidFill>
-          </a:ln>
-        </p:spPr>
-        <p:style>
-          <a:lnRef idx="2">
-            <a:schemeClr val="accent1"/>
-          </a:lnRef>
-          <a:fillRef idx="0">
-            <a:schemeClr val="accent1"/>
-          </a:fillRef>
-          <a:effectRef idx="1">
-            <a:schemeClr val="accent1"/>
-          </a:effectRef>
-          <a:fontRef idx="minor">
-            <a:schemeClr val="tx1"/>
-          </a:fontRef>
-        </p:style>
-      </p:cxnSp>
-      <p:cxnSp>
-        <p:nvCxnSpPr>
-          <p:cNvPr id="51" name="Connector 50"/>
-          <p:cNvCxnSpPr/>
-          <p:nvPr/>
-        </p:nvCxnSpPr>
-        <p:spPr>
-          <a:xfrm flipV="1">
-            <a:off x="6545424.489795919" y="1226621.9020934396"/>
-            <a:ext cx="41987.755102040246" cy="13147.513617218705"/>
-          </a:xfrm>
-          <a:prstGeom prst="line">
-            <a:avLst/>
-          </a:prstGeom>
-          <a:ln w="25400">
-            <a:solidFill>
-              <a:srgbClr val="00C8FF"/>
-            </a:solidFill>
-          </a:ln>
-        </p:spPr>
-        <p:style>
-          <a:lnRef idx="2">
-            <a:schemeClr val="accent1"/>
-          </a:lnRef>
-          <a:fillRef idx="0">
-            <a:schemeClr val="accent1"/>
-          </a:fillRef>
-          <a:effectRef idx="1">
-            <a:schemeClr val="accent1"/>
-          </a:effectRef>
-          <a:fontRef idx="minor">
-            <a:schemeClr val="tx1"/>
-          </a:fontRef>
-        </p:style>
-      </p:cxnSp>
-      <p:cxnSp>
-        <p:nvCxnSpPr>
-          <p:cNvPr id="52" name="Connector 51"/>
-          <p:cNvCxnSpPr/>
-          <p:nvPr/>
-        </p:nvCxnSpPr>
-        <p:spPr>
-          <a:xfrm flipV="1">
-            <a:off x="6587412.244897959" y="1213442.067357741"/>
-            <a:ext cx="41987.75510204118" cy="13179.834735698532"/>
-          </a:xfrm>
-          <a:prstGeom prst="line">
-            <a:avLst/>
-          </a:prstGeom>
-          <a:ln w="25400">
-            <a:solidFill>
-              <a:srgbClr val="00C8FF"/>
-            </a:solidFill>
-          </a:ln>
-        </p:spPr>
-        <p:style>
-          <a:lnRef idx="2">
-            <a:schemeClr val="accent1"/>
-          </a:lnRef>
-          <a:fillRef idx="0">
-            <a:schemeClr val="accent1"/>
-          </a:fillRef>
-          <a:effectRef idx="1">
-            <a:schemeClr val="accent1"/>
-          </a:effectRef>
-          <a:fontRef idx="minor">
-            <a:schemeClr val="tx1"/>
-          </a:fontRef>
-        </p:style>
-      </p:cxnSp>
-      <p:sp>
-        <p:nvSpPr>
-          <p:cNvPr id="53" name="Oval 52"/>
+      <p:sp>
+        <p:nvSpPr>
+          <p:cNvPr id="6" name="Oval 5"/>
           <p:cNvSpPr/>
           <p:nvPr/>
         </p:nvSpPr>
         <p:spPr>
           <a:xfrm>
-            <a:off x="5905500" y="1619250"/>
-            <a:ext cx="76200" cy="76200"/>
+            <a:off x="7264400" y="303072"/>
+            <a:ext cx="101600" cy="101600"/>
           </a:xfrm>
           <a:prstGeom prst="ellipse">
             <a:avLst/>
           </a:prstGeom>
-          <a:noFill/>
-          <a:ln>
+          <a:solidFill>
+            <a:srgbClr val="0A0A0A"/>
+          </a:solidFill>
+          <a:ln w="12700">
             <a:solidFill>
               <a:srgbClr val="FFFFFF"/>
             </a:solidFill>
@@ -4926,14 +4498,14 @@
       </p:sp>
       <p:sp>
         <p:nvSpPr>
-          <p:cNvPr id="54" name="TextBox 53"/>
+          <p:cNvPr id="7" name="TextBox 6"/>
           <p:cNvSpPr txBox="1"/>
           <p:nvPr/>
         </p:nvSpPr>
         <p:spPr>
           <a:xfrm>
-            <a:off x="6492240" y="1337310"/>
-            <a:ext cx="635000" cy="254000"/>
+            <a:off x="4135120" y="2437130"/>
+            <a:ext cx="1524000" cy="508000"/>
           </a:xfrm>
           <a:prstGeom prst="rect">
             <a:avLst/>
@@ -4947,7 +4519,7 @@
           <a:lstStyle/>
           <a:p>
             <a:pPr>
-              <a:defRPr sz="1200">
+              <a:defRPr sz="1400" b="1">
                 <a:solidFill>
                   <a:srgbClr val="FFFFFF"/>
                 </a:solidFill>
@@ -4955,7 +4527,115 @@
               </a:defRPr>
             </a:pPr>
             <a:r>
-              <a:t>$y=f(x)$</a:t>
+              <a:t>O</a:t>
+            </a:r>
+          </a:p>
+        </p:txBody>
+      </p:sp>
+      <p:sp>
+        <p:nvSpPr>
+          <p:cNvPr id="8" name="TextBox 7"/>
+          <p:cNvSpPr txBox="1"/>
+          <p:nvPr/>
+        </p:nvSpPr>
+        <p:spPr>
+          <a:xfrm>
+            <a:off x="9347200" y="2437130"/>
+            <a:ext cx="1524000" cy="508000"/>
+          </a:xfrm>
+          <a:prstGeom prst="rect">
+            <a:avLst/>
+          </a:prstGeom>
+          <a:noFill/>
+        </p:spPr>
+        <p:txBody>
+          <a:bodyPr wrap="none">
+            <a:spAutoFit/>
+          </a:bodyPr>
+          <a:lstStyle/>
+          <a:p>
+            <a:pPr>
+              <a:defRPr sz="1400" b="1">
+                <a:solidFill>
+                  <a:srgbClr val="FFFFFF"/>
+                </a:solidFill>
+                <a:latin typeface="Inter"/>
+              </a:defRPr>
+            </a:pPr>
+            <a:r>
+              <a:t>x</a:t>
+            </a:r>
+          </a:p>
+        </p:txBody>
+      </p:sp>
+      <p:sp>
+        <p:nvSpPr>
+          <p:cNvPr id="9" name="TextBox 8"/>
+          <p:cNvSpPr txBox="1"/>
+          <p:nvPr/>
+        </p:nvSpPr>
+        <p:spPr>
+          <a:xfrm>
+            <a:off x="4135120" y="-1311910"/>
+            <a:ext cx="1524000" cy="508000"/>
+          </a:xfrm>
+          <a:prstGeom prst="rect">
+            <a:avLst/>
+          </a:prstGeom>
+          <a:noFill/>
+        </p:spPr>
+        <p:txBody>
+          <a:bodyPr wrap="none">
+            <a:spAutoFit/>
+          </a:bodyPr>
+          <a:lstStyle/>
+          <a:p>
+            <a:pPr>
+              <a:defRPr sz="1400" b="1">
+                <a:solidFill>
+                  <a:srgbClr val="FFFFFF"/>
+                </a:solidFill>
+                <a:latin typeface="Inter"/>
+              </a:defRPr>
+            </a:pPr>
+            <a:r>
+              <a:t>y</a:t>
+            </a:r>
+          </a:p>
+        </p:txBody>
+      </p:sp>
+      <p:sp>
+        <p:nvSpPr>
+          <p:cNvPr id="10" name="TextBox 9"/>
+          <p:cNvSpPr txBox="1"/>
+          <p:nvPr/>
+        </p:nvSpPr>
+        <p:spPr>
+          <a:xfrm>
+            <a:off x="7015480" y="2528570"/>
+            <a:ext cx="1524000" cy="508000"/>
+          </a:xfrm>
+          <a:prstGeom prst="rect">
+            <a:avLst/>
+          </a:prstGeom>
+          <a:noFill/>
+        </p:spPr>
+        <p:txBody>
+          <a:bodyPr wrap="none">
+            <a:spAutoFit/>
+          </a:bodyPr>
+          <a:lstStyle/>
+          <a:p>
+            <a:pPr>
+              <a:defRPr sz="1400" b="1">
+                <a:solidFill>
+                  <a:srgbClr val="FFFFFF"/>
+                </a:solidFill>
+                <a:latin typeface="Inter"/>
+              </a:defRPr>
+            </a:pPr>
+            <a:r>
+              <a:t>a</a:t>
             </a:r>
           </a:p>
         </p:txBody>

--- a/output/4.pptx
+++ b/output/4.pptx
@@ -3084,7 +3084,7 @@
     <p:bg>
       <p:bgPr>
         <a:solidFill>
-          <a:srgbClr val="1E1E23"/>
+          <a:srgbClr val="000000"/>
         </a:solidFill>
         <a:effectLst/>
       </p:bgPr>
@@ -3104,8 +3104,8 @@
         </p:nvCxnSpPr>
         <p:spPr>
           <a:xfrm>
-            <a:off x="4206240.0" y="2571750.0"/>
-            <a:ext cx="5623560.0" cy="0.0"/>
+            <a:off x="4343400.0" y="2571750.0"/>
+            <a:ext cx="2286000.0" cy="0.0"/>
           </a:xfrm>
           <a:prstGeom prst="line">
             <a:avLst/>
@@ -3139,8 +3139,8 @@
         </p:nvCxnSpPr>
         <p:spPr>
           <a:xfrm flipV="1">
-            <a:off x="4572000.0" y="-1085850.0"/>
-            <a:ext cx="0.0" cy="4023360.0"/>
+            <a:off x="4572000.0" y="971550.0"/>
+            <a:ext cx="0.0" cy="1828800.0"/>
           </a:xfrm>
           <a:prstGeom prst="line">
             <a:avLst/>
@@ -3174,8 +3174,8 @@
         </p:nvSpPr>
         <p:spPr>
           <a:xfrm>
-            <a:off x="4572000" y="-370789"/>
-            <a:ext cx="4823460" cy="2942539"/>
+            <a:off x="4572000" y="1468069"/>
+            <a:ext cx="1737360" cy="920801"/>
           </a:xfrm>
           <a:custGeom>
             <a:avLst/>
@@ -3184,1204 +3184,1204 @@
             <a:cxnLst/>
             <a:rect l="l" t="t" r="r" b="b"/>
             <a:pathLst>
-              <a:path w="4823460" h="2942539">
+              <a:path w="1737360" h="920801">
                 <a:moveTo>
-                  <a:pt x="0" y="2942539"/>
+                  <a:pt x="0" y="920801"/>
                 </a:moveTo>
                 <a:lnTo>
-                  <a:pt x="16132" y="2810171"/>
-                </a:lnTo>
-                <a:close/>
-                <a:lnTo>
-                  <a:pt x="32264" y="2740993"/>
-                </a:lnTo>
-                <a:close/>
-                <a:lnTo>
-                  <a:pt x="48396" y="2699804"/>
-                </a:lnTo>
-                <a:close/>
-                <a:lnTo>
-                  <a:pt x="64528" y="2662044"/>
-                </a:lnTo>
-                <a:close/>
-                <a:lnTo>
-                  <a:pt x="80660" y="2628689"/>
-                </a:lnTo>
-                <a:close/>
-                <a:lnTo>
-                  <a:pt x="96792" y="2599269"/>
-                </a:lnTo>
-                <a:close/>
-                <a:lnTo>
-                  <a:pt x="112924" y="2571734"/>
-                </a:lnTo>
-                <a:close/>
-                <a:lnTo>
-                  <a:pt x="129056" y="2545841"/>
-                </a:lnTo>
-                <a:close/>
-                <a:lnTo>
-                  <a:pt x="145188" y="2521236"/>
-                </a:lnTo>
-                <a:close/>
-                <a:lnTo>
-                  <a:pt x="161320" y="2497647"/>
-                </a:lnTo>
-                <a:close/>
-                <a:lnTo>
-                  <a:pt x="177452" y="2474962"/>
-                </a:lnTo>
-                <a:close/>
-                <a:lnTo>
-                  <a:pt x="193584" y="2453037"/>
-                </a:lnTo>
-                <a:close/>
-                <a:lnTo>
-                  <a:pt x="209716" y="2431634"/>
-                </a:lnTo>
-                <a:close/>
-                <a:lnTo>
-                  <a:pt x="225848" y="2410668"/>
-                </a:lnTo>
-                <a:close/>
-                <a:lnTo>
-                  <a:pt x="241980" y="2390412"/>
-                </a:lnTo>
-                <a:close/>
-                <a:lnTo>
-                  <a:pt x="258112" y="2370770"/>
-                </a:lnTo>
-                <a:close/>
-                <a:lnTo>
-                  <a:pt x="274244" y="2351470"/>
-                </a:lnTo>
-                <a:close/>
-                <a:lnTo>
-                  <a:pt x="290376" y="2332349"/>
-                </a:lnTo>
-                <a:close/>
-                <a:lnTo>
-                  <a:pt x="306507" y="2313683"/>
-                </a:lnTo>
-                <a:close/>
-                <a:lnTo>
-                  <a:pt x="322639" y="2295408"/>
-                </a:lnTo>
-                <a:close/>
-                <a:lnTo>
-                  <a:pt x="338771" y="2277308"/>
-                </a:lnTo>
-                <a:close/>
-                <a:lnTo>
-                  <a:pt x="354903" y="2259669"/>
-                </a:lnTo>
-                <a:close/>
-                <a:lnTo>
-                  <a:pt x="371035" y="2242454"/>
-                </a:lnTo>
-                <a:close/>
-                <a:lnTo>
-                  <a:pt x="387167" y="2225366"/>
-                </a:lnTo>
-                <a:close/>
-                <a:lnTo>
-                  <a:pt x="403299" y="2208181"/>
-                </a:lnTo>
-                <a:close/>
-                <a:lnTo>
-                  <a:pt x="419431" y="2191415"/>
-                </a:lnTo>
-                <a:close/>
-                <a:lnTo>
-                  <a:pt x="435563" y="2175023"/>
-                </a:lnTo>
-                <a:close/>
-                <a:lnTo>
-                  <a:pt x="451695" y="2158509"/>
-                </a:lnTo>
-                <a:close/>
-                <a:lnTo>
-                  <a:pt x="467827" y="2142466"/>
-                </a:lnTo>
-                <a:close/>
-                <a:lnTo>
-                  <a:pt x="483959" y="2126738"/>
-                </a:lnTo>
-                <a:close/>
-                <a:lnTo>
-                  <a:pt x="500091" y="2110910"/>
-                </a:lnTo>
-                <a:close/>
-                <a:lnTo>
-                  <a:pt x="516223" y="2095301"/>
-                </a:lnTo>
-                <a:close/>
-                <a:lnTo>
-                  <a:pt x="532355" y="2080002"/>
-                </a:lnTo>
-                <a:close/>
-                <a:lnTo>
-                  <a:pt x="548487" y="2064859"/>
-                </a:lnTo>
-                <a:close/>
-                <a:lnTo>
-                  <a:pt x="564619" y="2049672"/>
-                </a:lnTo>
-                <a:close/>
-                <a:lnTo>
-                  <a:pt x="580751" y="2034642"/>
-                </a:lnTo>
-                <a:close/>
-                <a:lnTo>
-                  <a:pt x="596883" y="2019911"/>
-                </a:lnTo>
-                <a:close/>
-                <a:lnTo>
-                  <a:pt x="613015" y="2005402"/>
-                </a:lnTo>
-                <a:close/>
-                <a:lnTo>
-                  <a:pt x="629147" y="1990867"/>
-                </a:lnTo>
-                <a:close/>
-                <a:lnTo>
-                  <a:pt x="645279" y="1976418"/>
-                </a:lnTo>
-                <a:close/>
-                <a:lnTo>
-                  <a:pt x="661411" y="1962257"/>
-                </a:lnTo>
-                <a:close/>
-                <a:lnTo>
-                  <a:pt x="677543" y="1948362"/>
-                </a:lnTo>
-                <a:close/>
-                <a:lnTo>
-                  <a:pt x="693675" y="1934480"/>
-                </a:lnTo>
-                <a:close/>
-                <a:lnTo>
-                  <a:pt x="709807" y="1920637"/>
-                </a:lnTo>
-                <a:close/>
-                <a:lnTo>
-                  <a:pt x="725939" y="1907076"/>
-                </a:lnTo>
-                <a:close/>
-                <a:lnTo>
-                  <a:pt x="742071" y="1893564"/>
-                </a:lnTo>
-                <a:close/>
-                <a:lnTo>
-                  <a:pt x="758203" y="1879984"/>
-                </a:lnTo>
-                <a:close/>
-                <a:lnTo>
-                  <a:pt x="774335" y="1866427"/>
-                </a:lnTo>
-                <a:close/>
-                <a:lnTo>
-                  <a:pt x="790467" y="1853089"/>
-                </a:lnTo>
-                <a:close/>
-                <a:lnTo>
-                  <a:pt x="806599" y="1840031"/>
-                </a:lnTo>
-                <a:close/>
-                <a:lnTo>
-                  <a:pt x="822731" y="1827154"/>
-                </a:lnTo>
-                <a:close/>
-                <a:lnTo>
-                  <a:pt x="838863" y="1814263"/>
-                </a:lnTo>
-                <a:close/>
-                <a:lnTo>
-                  <a:pt x="854995" y="1801311"/>
-                </a:lnTo>
-                <a:close/>
-                <a:lnTo>
-                  <a:pt x="871127" y="1788466"/>
-                </a:lnTo>
-                <a:close/>
-                <a:lnTo>
-                  <a:pt x="887259" y="1775888"/>
-                </a:lnTo>
-                <a:close/>
-                <a:lnTo>
-                  <a:pt x="903391" y="1763341"/>
-                </a:lnTo>
-                <a:close/>
-                <a:lnTo>
-                  <a:pt x="919522" y="1750717"/>
-                </a:lnTo>
-                <a:close/>
-                <a:lnTo>
-                  <a:pt x="935654" y="1738139"/>
-                </a:lnTo>
-                <a:close/>
-                <a:lnTo>
-                  <a:pt x="951786" y="1725845"/>
-                </a:lnTo>
-                <a:close/>
-                <a:lnTo>
-                  <a:pt x="967918" y="1713586"/>
-                </a:lnTo>
-                <a:close/>
-                <a:lnTo>
-                  <a:pt x="984050" y="1701353"/>
-                </a:lnTo>
-                <a:close/>
-                <a:lnTo>
-                  <a:pt x="1000182" y="1689403"/>
-                </a:lnTo>
-                <a:close/>
-                <a:lnTo>
-                  <a:pt x="1016314" y="1677508"/>
-                </a:lnTo>
-                <a:close/>
-                <a:lnTo>
-                  <a:pt x="1032446" y="1665536"/>
-                </a:lnTo>
-                <a:close/>
-                <a:lnTo>
-                  <a:pt x="1048578" y="1653589"/>
-                </a:lnTo>
-                <a:close/>
-                <a:lnTo>
-                  <a:pt x="1064710" y="1641904"/>
-                </a:lnTo>
-                <a:close/>
-                <a:lnTo>
-                  <a:pt x="1080842" y="1630338"/>
-                </a:lnTo>
-                <a:close/>
-                <a:lnTo>
-                  <a:pt x="1096974" y="1618709"/>
-                </a:lnTo>
-                <a:close/>
-                <a:lnTo>
-                  <a:pt x="1113106" y="1607054"/>
-                </a:lnTo>
-                <a:close/>
-                <a:lnTo>
-                  <a:pt x="1129238" y="1595620"/>
-                </a:lnTo>
-                <a:close/>
-                <a:lnTo>
-                  <a:pt x="1145370" y="1584375"/>
-                </a:lnTo>
-                <a:close/>
-                <a:lnTo>
-                  <a:pt x="1161502" y="1573087"/>
-                </a:lnTo>
-                <a:close/>
-                <a:lnTo>
-                  <a:pt x="1177634" y="1561744"/>
-                </a:lnTo>
-                <a:close/>
-                <a:lnTo>
-                  <a:pt x="1193766" y="1550557"/>
-                </a:lnTo>
-                <a:close/>
-                <a:lnTo>
-                  <a:pt x="1209898" y="1539615"/>
-                </a:lnTo>
-                <a:close/>
-                <a:lnTo>
-                  <a:pt x="1226030" y="1528673"/>
-                </a:lnTo>
-                <a:close/>
-                <a:lnTo>
-                  <a:pt x="1242162" y="1517645"/>
-                </a:lnTo>
-                <a:close/>
-                <a:lnTo>
-                  <a:pt x="1258294" y="1506727"/>
-                </a:lnTo>
-                <a:close/>
-                <a:lnTo>
-                  <a:pt x="1274426" y="1496107"/>
-                </a:lnTo>
-                <a:close/>
-                <a:lnTo>
-                  <a:pt x="1290558" y="1485256"/>
-                </a:lnTo>
-                <a:close/>
-                <a:lnTo>
-                  <a:pt x="1306690" y="1474282"/>
-                </a:lnTo>
-                <a:close/>
-                <a:lnTo>
-                  <a:pt x="1322822" y="1463642"/>
-                </a:lnTo>
-                <a:close/>
-                <a:lnTo>
-                  <a:pt x="1338954" y="1453325"/>
-                </a:lnTo>
-                <a:close/>
-                <a:lnTo>
-                  <a:pt x="1355086" y="1442879"/>
-                </a:lnTo>
-                <a:close/>
-                <a:lnTo>
-                  <a:pt x="1371218" y="1432201"/>
-                </a:lnTo>
-                <a:close/>
-                <a:lnTo>
-                  <a:pt x="1387350" y="1421788"/>
-                </a:lnTo>
-                <a:close/>
-                <a:lnTo>
-                  <a:pt x="1403482" y="1411741"/>
-                </a:lnTo>
-                <a:close/>
-                <a:lnTo>
-                  <a:pt x="1419614" y="1401693"/>
-                </a:lnTo>
-                <a:close/>
-                <a:lnTo>
-                  <a:pt x="1435746" y="1391338"/>
-                </a:lnTo>
-                <a:close/>
-                <a:lnTo>
-                  <a:pt x="1451878" y="1381230"/>
-                </a:lnTo>
-                <a:close/>
-                <a:lnTo>
-                  <a:pt x="1468010" y="1371251"/>
-                </a:lnTo>
-                <a:close/>
-                <a:lnTo>
-                  <a:pt x="1484142" y="1361241"/>
-                </a:lnTo>
-                <a:close/>
-                <a:lnTo>
-                  <a:pt x="1500274" y="1351564"/>
-                </a:lnTo>
-                <a:close/>
-                <a:lnTo>
-                  <a:pt x="1516405" y="1341735"/>
-                </a:lnTo>
-                <a:close/>
-                <a:lnTo>
-                  <a:pt x="1532537" y="1331720"/>
-                </a:lnTo>
-                <a:close/>
-                <a:lnTo>
-                  <a:pt x="1548669" y="1322037"/>
-                </a:lnTo>
-                <a:close/>
-                <a:lnTo>
-                  <a:pt x="1564801" y="1312340"/>
-                </a:lnTo>
-                <a:close/>
-                <a:lnTo>
-                  <a:pt x="1580933" y="1302750"/>
-                </a:lnTo>
-                <a:close/>
-                <a:lnTo>
-                  <a:pt x="1597065" y="1293428"/>
-                </a:lnTo>
-                <a:close/>
-                <a:lnTo>
-                  <a:pt x="1613197" y="1283792"/>
-                </a:lnTo>
-                <a:close/>
-                <a:lnTo>
-                  <a:pt x="1629329" y="1274196"/>
-                </a:lnTo>
-                <a:close/>
-                <a:lnTo>
-                  <a:pt x="1645461" y="1264881"/>
-                </a:lnTo>
-                <a:close/>
-                <a:lnTo>
-                  <a:pt x="1661593" y="1255483"/>
-                </a:lnTo>
-                <a:close/>
-                <a:lnTo>
-                  <a:pt x="1677725" y="1246343"/>
-                </a:lnTo>
-                <a:close/>
-                <a:lnTo>
-                  <a:pt x="1693857" y="1237286"/>
-                </a:lnTo>
-                <a:close/>
-                <a:lnTo>
-                  <a:pt x="1709989" y="1227900"/>
-                </a:lnTo>
-                <a:close/>
-                <a:lnTo>
-                  <a:pt x="1726121" y="1218740"/>
-                </a:lnTo>
-                <a:close/>
-                <a:lnTo>
-                  <a:pt x="1742253" y="1209765"/>
-                </a:lnTo>
-                <a:close/>
-                <a:lnTo>
-                  <a:pt x="1758385" y="1200721"/>
-                </a:lnTo>
-                <a:close/>
-                <a:lnTo>
-                  <a:pt x="1774517" y="1191694"/>
-                </a:lnTo>
-                <a:close/>
-                <a:lnTo>
-                  <a:pt x="1790649" y="1182628"/>
-                </a:lnTo>
-                <a:close/>
-                <a:lnTo>
-                  <a:pt x="1806781" y="1173627"/>
-                </a:lnTo>
-                <a:close/>
-                <a:lnTo>
-                  <a:pt x="1822913" y="1164904"/>
-                </a:lnTo>
-                <a:close/>
-                <a:lnTo>
-                  <a:pt x="1839045" y="1156224"/>
-                </a:lnTo>
-                <a:close/>
-                <a:lnTo>
-                  <a:pt x="1855177" y="1147499"/>
-                </a:lnTo>
-                <a:close/>
-                <a:lnTo>
-                  <a:pt x="1871309" y="1138788"/>
-                </a:lnTo>
-                <a:close/>
-                <a:lnTo>
-                  <a:pt x="1887441" y="1130090"/>
-                </a:lnTo>
-                <a:close/>
-                <a:lnTo>
-                  <a:pt x="1903573" y="1121346"/>
-                </a:lnTo>
-                <a:close/>
-                <a:lnTo>
-                  <a:pt x="1919705" y="1112651"/>
-                </a:lnTo>
-                <a:close/>
-                <a:lnTo>
-                  <a:pt x="1935837" y="1104232"/>
-                </a:lnTo>
-                <a:close/>
-                <a:lnTo>
-                  <a:pt x="1951969" y="1095879"/>
-                </a:lnTo>
-                <a:close/>
-                <a:lnTo>
-                  <a:pt x="1968101" y="1087478"/>
-                </a:lnTo>
-                <a:close/>
-                <a:lnTo>
-                  <a:pt x="1984233" y="1079088"/>
-                </a:lnTo>
-                <a:close/>
-                <a:lnTo>
-                  <a:pt x="2000365" y="1070713"/>
-                </a:lnTo>
-                <a:close/>
-                <a:lnTo>
-                  <a:pt x="2016497" y="1062298"/>
-                </a:lnTo>
-                <a:close/>
-                <a:lnTo>
-                  <a:pt x="2032629" y="1053909"/>
-                </a:lnTo>
-                <a:close/>
-                <a:lnTo>
-                  <a:pt x="2048761" y="1045792"/>
-                </a:lnTo>
-                <a:close/>
-                <a:lnTo>
-                  <a:pt x="2064893" y="1037766"/>
-                </a:lnTo>
-                <a:close/>
-                <a:lnTo>
-                  <a:pt x="2081025" y="1029688"/>
-                </a:lnTo>
-                <a:close/>
-                <a:lnTo>
-                  <a:pt x="2097157" y="1021618"/>
-                </a:lnTo>
-                <a:close/>
-                <a:lnTo>
-                  <a:pt x="2113288" y="1013570"/>
-                </a:lnTo>
-                <a:close/>
-                <a:lnTo>
-                  <a:pt x="2129420" y="1005476"/>
-                </a:lnTo>
-                <a:close/>
-                <a:lnTo>
-                  <a:pt x="2145552" y="997391"/>
-                </a:lnTo>
-                <a:close/>
-                <a:lnTo>
-                  <a:pt x="2161684" y="989631"/>
-                </a:lnTo>
-                <a:close/>
-                <a:lnTo>
-                  <a:pt x="2177816" y="981775"/>
-                </a:lnTo>
-                <a:close/>
-                <a:lnTo>
-                  <a:pt x="2193948" y="973681"/>
-                </a:lnTo>
-                <a:close/>
-                <a:lnTo>
-                  <a:pt x="2210080" y="965895"/>
-                </a:lnTo>
-                <a:close/>
-                <a:lnTo>
-                  <a:pt x="2226212" y="958200"/>
-                </a:lnTo>
-                <a:close/>
-                <a:lnTo>
-                  <a:pt x="2242344" y="950440"/>
-                </a:lnTo>
-                <a:close/>
-                <a:lnTo>
-                  <a:pt x="2258476" y="942694"/>
-                </a:lnTo>
-                <a:close/>
-                <a:lnTo>
-                  <a:pt x="2274608" y="934969"/>
-                </a:lnTo>
-                <a:close/>
-                <a:lnTo>
-                  <a:pt x="2290740" y="927191"/>
-                </a:lnTo>
-                <a:close/>
-                <a:lnTo>
-                  <a:pt x="2306872" y="919446"/>
-                </a:lnTo>
-                <a:close/>
-                <a:lnTo>
-                  <a:pt x="2323004" y="912028"/>
-                </a:lnTo>
-                <a:close/>
-                <a:lnTo>
-                  <a:pt x="2339136" y="904462"/>
-                </a:lnTo>
-                <a:close/>
-                <a:lnTo>
-                  <a:pt x="2355268" y="896701"/>
-                </a:lnTo>
-                <a:close/>
-                <a:lnTo>
-                  <a:pt x="2371400" y="889261"/>
-                </a:lnTo>
-                <a:close/>
-                <a:lnTo>
-                  <a:pt x="2387532" y="881883"/>
-                </a:lnTo>
-                <a:close/>
-                <a:lnTo>
-                  <a:pt x="2403664" y="874444"/>
-                </a:lnTo>
-                <a:close/>
-                <a:lnTo>
-                  <a:pt x="2419796" y="867023"/>
-                </a:lnTo>
-                <a:close/>
-                <a:lnTo>
-                  <a:pt x="2435928" y="859621"/>
-                </a:lnTo>
-                <a:close/>
-                <a:lnTo>
-                  <a:pt x="2452060" y="852158"/>
-                </a:lnTo>
-                <a:close/>
-                <a:lnTo>
-                  <a:pt x="2468192" y="844756"/>
-                </a:lnTo>
-                <a:close/>
-                <a:lnTo>
-                  <a:pt x="2484324" y="837676"/>
-                </a:lnTo>
-                <a:close/>
-                <a:lnTo>
-                  <a:pt x="2500456" y="830400"/>
-                </a:lnTo>
-                <a:close/>
-                <a:lnTo>
-                  <a:pt x="2516588" y="822977"/>
-                </a:lnTo>
-                <a:close/>
-                <a:lnTo>
-                  <a:pt x="2532720" y="815880"/>
-                </a:lnTo>
-                <a:close/>
-                <a:lnTo>
-                  <a:pt x="2548852" y="808816"/>
-                </a:lnTo>
-                <a:close/>
-                <a:lnTo>
-                  <a:pt x="2564984" y="801703"/>
-                </a:lnTo>
-                <a:close/>
-                <a:lnTo>
-                  <a:pt x="2581116" y="794607"/>
-                </a:lnTo>
-                <a:close/>
-                <a:lnTo>
-                  <a:pt x="2597248" y="787506"/>
-                </a:lnTo>
-                <a:close/>
-                <a:lnTo>
-                  <a:pt x="2613380" y="780420"/>
-                </a:lnTo>
-                <a:close/>
-                <a:lnTo>
-                  <a:pt x="2629512" y="773311"/>
-                </a:lnTo>
-                <a:close/>
-                <a:lnTo>
-                  <a:pt x="2645644" y="766167"/>
-                </a:lnTo>
-                <a:close/>
-                <a:lnTo>
-                  <a:pt x="2661776" y="759321"/>
-                </a:lnTo>
-                <a:close/>
-                <a:lnTo>
-                  <a:pt x="2677908" y="752498"/>
-                </a:lnTo>
-                <a:close/>
-                <a:lnTo>
-                  <a:pt x="2694040" y="745366"/>
-                </a:lnTo>
-                <a:close/>
-                <a:lnTo>
-                  <a:pt x="2710172" y="738489"/>
-                </a:lnTo>
-                <a:close/>
-                <a:lnTo>
-                  <a:pt x="2726303" y="731771"/>
-                </a:lnTo>
-                <a:close/>
-                <a:lnTo>
-                  <a:pt x="2742435" y="724984"/>
-                </a:lnTo>
-                <a:close/>
-                <a:lnTo>
-                  <a:pt x="2758567" y="718205"/>
-                </a:lnTo>
-                <a:close/>
-                <a:lnTo>
-                  <a:pt x="2774699" y="711434"/>
-                </a:lnTo>
-                <a:close/>
-                <a:lnTo>
-                  <a:pt x="2790831" y="704656"/>
-                </a:lnTo>
-                <a:close/>
-                <a:lnTo>
-                  <a:pt x="2806963" y="697878"/>
-                </a:lnTo>
-                <a:close/>
-                <a:lnTo>
-                  <a:pt x="2823095" y="691119"/>
-                </a:lnTo>
-                <a:close/>
-                <a:lnTo>
-                  <a:pt x="2839227" y="684310"/>
-                </a:lnTo>
-                <a:close/>
-                <a:lnTo>
-                  <a:pt x="2855359" y="677531"/>
-                </a:lnTo>
-                <a:close/>
-                <a:lnTo>
-                  <a:pt x="2871491" y="671079"/>
-                </a:lnTo>
-                <a:close/>
-                <a:lnTo>
-                  <a:pt x="2887623" y="664485"/>
-                </a:lnTo>
-                <a:close/>
-                <a:lnTo>
-                  <a:pt x="2903755" y="657690"/>
-                </a:lnTo>
-                <a:close/>
-                <a:lnTo>
-                  <a:pt x="2919887" y="651216"/>
-                </a:lnTo>
-                <a:close/>
-                <a:lnTo>
-                  <a:pt x="2936019" y="644805"/>
-                </a:lnTo>
-                <a:close/>
-                <a:lnTo>
-                  <a:pt x="2952151" y="638336"/>
-                </a:lnTo>
-                <a:close/>
-                <a:lnTo>
-                  <a:pt x="2968283" y="631884"/>
-                </a:lnTo>
-                <a:close/>
-                <a:lnTo>
-                  <a:pt x="2984415" y="625434"/>
-                </a:lnTo>
-                <a:close/>
-                <a:lnTo>
-                  <a:pt x="3000547" y="618978"/>
-                </a:lnTo>
-                <a:close/>
-                <a:lnTo>
-                  <a:pt x="3016679" y="612526"/>
-                </a:lnTo>
-                <a:close/>
-                <a:lnTo>
-                  <a:pt x="3032811" y="606088"/>
-                </a:lnTo>
-                <a:close/>
-                <a:lnTo>
-                  <a:pt x="3048943" y="599582"/>
-                </a:lnTo>
-                <a:close/>
-                <a:lnTo>
-                  <a:pt x="3065075" y="593197"/>
-                </a:lnTo>
-                <a:close/>
-                <a:lnTo>
-                  <a:pt x="3081207" y="587103"/>
-                </a:lnTo>
-                <a:close/>
-                <a:lnTo>
-                  <a:pt x="3097339" y="580719"/>
-                </a:lnTo>
-                <a:close/>
-                <a:lnTo>
-                  <a:pt x="3113471" y="574335"/>
-                </a:lnTo>
-                <a:close/>
-                <a:lnTo>
-                  <a:pt x="3129603" y="568242"/>
-                </a:lnTo>
-                <a:close/>
-                <a:lnTo>
-                  <a:pt x="3145735" y="561821"/>
-                </a:lnTo>
-                <a:close/>
-                <a:lnTo>
-                  <a:pt x="3161867" y="555458"/>
-                </a:lnTo>
-                <a:close/>
-                <a:lnTo>
-                  <a:pt x="3177999" y="549382"/>
-                </a:lnTo>
-                <a:close/>
-                <a:lnTo>
-                  <a:pt x="3194131" y="543258"/>
-                </a:lnTo>
-                <a:close/>
-                <a:lnTo>
-                  <a:pt x="3210263" y="537116"/>
-                </a:lnTo>
-                <a:close/>
-                <a:lnTo>
-                  <a:pt x="3226395" y="530990"/>
-                </a:lnTo>
-                <a:close/>
-                <a:lnTo>
-                  <a:pt x="3242527" y="524860"/>
-                </a:lnTo>
-                <a:close/>
-                <a:lnTo>
-                  <a:pt x="3258659" y="518725"/>
-                </a:lnTo>
-                <a:close/>
-                <a:lnTo>
-                  <a:pt x="3274791" y="512606"/>
-                </a:lnTo>
-                <a:close/>
-                <a:lnTo>
-                  <a:pt x="3290923" y="506472"/>
-                </a:lnTo>
-                <a:close/>
-                <a:lnTo>
-                  <a:pt x="3307055" y="500286"/>
-                </a:lnTo>
-                <a:close/>
-                <a:lnTo>
-                  <a:pt x="3323186" y="494378"/>
-                </a:lnTo>
-                <a:close/>
-                <a:lnTo>
-                  <a:pt x="3339318" y="488548"/>
-                </a:lnTo>
-                <a:close/>
-                <a:lnTo>
-                  <a:pt x="3355450" y="482383"/>
-                </a:lnTo>
-                <a:close/>
-                <a:lnTo>
-                  <a:pt x="3371582" y="476494"/>
-                </a:lnTo>
-                <a:close/>
-                <a:lnTo>
-                  <a:pt x="3387714" y="470631"/>
-                </a:lnTo>
-                <a:close/>
-                <a:lnTo>
-                  <a:pt x="3403846" y="464464"/>
-                </a:lnTo>
-                <a:close/>
-                <a:lnTo>
-                  <a:pt x="3419978" y="458564"/>
-                </a:lnTo>
-                <a:close/>
-                <a:lnTo>
-                  <a:pt x="3436110" y="452856"/>
-                </a:lnTo>
-                <a:close/>
-                <a:lnTo>
-                  <a:pt x="3452242" y="446998"/>
-                </a:lnTo>
-                <a:close/>
-                <a:lnTo>
-                  <a:pt x="3468374" y="440849"/>
-                </a:lnTo>
-                <a:close/>
-                <a:lnTo>
-                  <a:pt x="3484506" y="434884"/>
-                </a:lnTo>
-                <a:close/>
-                <a:lnTo>
-                  <a:pt x="3500638" y="429132"/>
-                </a:lnTo>
-                <a:close/>
-                <a:lnTo>
-                  <a:pt x="3516770" y="423320"/>
-                </a:lnTo>
-                <a:close/>
-                <a:lnTo>
-                  <a:pt x="3532902" y="417507"/>
-                </a:lnTo>
-                <a:close/>
-                <a:lnTo>
-                  <a:pt x="3549034" y="411701"/>
-                </a:lnTo>
-                <a:close/>
-                <a:lnTo>
-                  <a:pt x="3565166" y="405893"/>
-                </a:lnTo>
-                <a:close/>
-                <a:lnTo>
-                  <a:pt x="3581298" y="400099"/>
-                </a:lnTo>
-                <a:close/>
-                <a:lnTo>
-                  <a:pt x="3597430" y="394244"/>
-                </a:lnTo>
-                <a:close/>
-                <a:lnTo>
-                  <a:pt x="3613562" y="388495"/>
-                </a:lnTo>
-                <a:close/>
-                <a:lnTo>
-                  <a:pt x="3629694" y="383033"/>
-                </a:lnTo>
-                <a:close/>
-                <a:lnTo>
-                  <a:pt x="3645826" y="377373"/>
-                </a:lnTo>
-                <a:close/>
-                <a:lnTo>
-                  <a:pt x="3661958" y="371476"/>
-                </a:lnTo>
-                <a:close/>
-                <a:lnTo>
-                  <a:pt x="3678090" y="365669"/>
-                </a:lnTo>
-                <a:close/>
-                <a:lnTo>
-                  <a:pt x="3694222" y="360191"/>
-                </a:lnTo>
-                <a:close/>
-                <a:lnTo>
-                  <a:pt x="3710354" y="354556"/>
-                </a:lnTo>
-                <a:close/>
-                <a:lnTo>
-                  <a:pt x="3726486" y="348737"/>
-                </a:lnTo>
-                <a:close/>
-                <a:lnTo>
-                  <a:pt x="3742618" y="343272"/>
-                </a:lnTo>
-                <a:close/>
-                <a:lnTo>
-                  <a:pt x="3758750" y="337595"/>
-                </a:lnTo>
-                <a:close/>
-                <a:lnTo>
-                  <a:pt x="3774882" y="331796"/>
-                </a:lnTo>
-                <a:close/>
-                <a:lnTo>
-                  <a:pt x="3791014" y="326326"/>
-                </a:lnTo>
-                <a:close/>
-                <a:lnTo>
-                  <a:pt x="3807146" y="320870"/>
-                </a:lnTo>
-                <a:close/>
-                <a:lnTo>
-                  <a:pt x="3823278" y="315370"/>
-                </a:lnTo>
-                <a:close/>
-                <a:lnTo>
-                  <a:pt x="3839410" y="309888"/>
-                </a:lnTo>
-                <a:close/>
-                <a:lnTo>
-                  <a:pt x="3855542" y="304404"/>
-                </a:lnTo>
-                <a:close/>
-                <a:lnTo>
-                  <a:pt x="3871674" y="298918"/>
-                </a:lnTo>
-                <a:close/>
-                <a:lnTo>
-                  <a:pt x="3887806" y="293434"/>
-                </a:lnTo>
-                <a:close/>
-                <a:lnTo>
-                  <a:pt x="3903938" y="287950"/>
-                </a:lnTo>
-                <a:close/>
-                <a:lnTo>
-                  <a:pt x="3920069" y="282460"/>
-                </a:lnTo>
-                <a:close/>
-                <a:lnTo>
-                  <a:pt x="3936201" y="276984"/>
-                </a:lnTo>
-                <a:close/>
-                <a:lnTo>
-                  <a:pt x="3952333" y="271501"/>
-                </a:lnTo>
-                <a:close/>
-                <a:lnTo>
-                  <a:pt x="3968465" y="265956"/>
-                </a:lnTo>
-                <a:close/>
-                <a:lnTo>
-                  <a:pt x="3984597" y="260658"/>
-                </a:lnTo>
-                <a:close/>
-                <a:lnTo>
-                  <a:pt x="4000729" y="255499"/>
-                </a:lnTo>
-                <a:close/>
-                <a:lnTo>
-                  <a:pt x="4016861" y="249990"/>
-                </a:lnTo>
-                <a:close/>
-                <a:lnTo>
-                  <a:pt x="4032993" y="244712"/>
-                </a:lnTo>
-                <a:close/>
-                <a:lnTo>
-                  <a:pt x="4049125" y="239518"/>
-                </a:lnTo>
-                <a:close/>
-                <a:lnTo>
-                  <a:pt x="4065257" y="233994"/>
-                </a:lnTo>
-                <a:close/>
-                <a:lnTo>
-                  <a:pt x="4081389" y="228776"/>
-                </a:lnTo>
-                <a:close/>
-                <a:lnTo>
-                  <a:pt x="4097521" y="223530"/>
-                </a:lnTo>
-                <a:close/>
-                <a:lnTo>
-                  <a:pt x="4113653" y="218011"/>
-                </a:lnTo>
-                <a:close/>
-                <a:lnTo>
-                  <a:pt x="4129785" y="212795"/>
-                </a:lnTo>
-                <a:close/>
-                <a:lnTo>
-                  <a:pt x="4145917" y="207684"/>
-                </a:lnTo>
-                <a:close/>
-                <a:lnTo>
-                  <a:pt x="4162049" y="202506"/>
-                </a:lnTo>
-                <a:close/>
-                <a:lnTo>
-                  <a:pt x="4178181" y="197343"/>
-                </a:lnTo>
-                <a:close/>
-                <a:lnTo>
-                  <a:pt x="4194313" y="192184"/>
-                </a:lnTo>
-                <a:close/>
-                <a:lnTo>
-                  <a:pt x="4210445" y="187021"/>
-                </a:lnTo>
-                <a:close/>
-                <a:lnTo>
-                  <a:pt x="4226577" y="181859"/>
-                </a:lnTo>
-                <a:close/>
-                <a:lnTo>
-                  <a:pt x="4242709" y="176693"/>
-                </a:lnTo>
-                <a:close/>
-                <a:lnTo>
-                  <a:pt x="4258841" y="171542"/>
-                </a:lnTo>
-                <a:close/>
-                <a:lnTo>
-                  <a:pt x="4274973" y="166371"/>
-                </a:lnTo>
-                <a:close/>
-                <a:lnTo>
-                  <a:pt x="4291105" y="161164"/>
-                </a:lnTo>
-                <a:close/>
-                <a:lnTo>
-                  <a:pt x="4307237" y="156229"/>
-                </a:lnTo>
-                <a:close/>
-                <a:lnTo>
-                  <a:pt x="4323369" y="151374"/>
-                </a:lnTo>
-                <a:close/>
-                <a:lnTo>
-                  <a:pt x="4339501" y="146206"/>
-                </a:lnTo>
-                <a:close/>
-                <a:lnTo>
-                  <a:pt x="4355633" y="140955"/>
-                </a:lnTo>
-                <a:close/>
-                <a:lnTo>
-                  <a:pt x="4371765" y="135959"/>
-                </a:lnTo>
-                <a:close/>
-                <a:lnTo>
-                  <a:pt x="4387897" y="131138"/>
-                </a:lnTo>
-                <a:close/>
-                <a:lnTo>
-                  <a:pt x="4404029" y="125970"/>
-                </a:lnTo>
-                <a:close/>
-                <a:lnTo>
-                  <a:pt x="4420161" y="120973"/>
-                </a:lnTo>
-                <a:close/>
-                <a:lnTo>
-                  <a:pt x="4436293" y="116135"/>
-                </a:lnTo>
-                <a:close/>
-                <a:lnTo>
-                  <a:pt x="4452425" y="110952"/>
-                </a:lnTo>
-                <a:close/>
-                <a:lnTo>
-                  <a:pt x="4468557" y="105951"/>
-                </a:lnTo>
-                <a:close/>
-                <a:lnTo>
-                  <a:pt x="4484689" y="101202"/>
-                </a:lnTo>
-                <a:close/>
-                <a:lnTo>
-                  <a:pt x="4500821" y="96364"/>
-                </a:lnTo>
-                <a:close/>
-                <a:lnTo>
-                  <a:pt x="4516953" y="91214"/>
-                </a:lnTo>
-                <a:close/>
-                <a:lnTo>
-                  <a:pt x="4533084" y="86152"/>
-                </a:lnTo>
-                <a:close/>
-                <a:lnTo>
-                  <a:pt x="4549216" y="81359"/>
-                </a:lnTo>
-                <a:close/>
-                <a:lnTo>
-                  <a:pt x="4565348" y="76526"/>
-                </a:lnTo>
-                <a:close/>
-                <a:lnTo>
-                  <a:pt x="4581480" y="71676"/>
-                </a:lnTo>
-                <a:close/>
-                <a:lnTo>
-                  <a:pt x="4597612" y="66840"/>
-                </a:lnTo>
-                <a:close/>
-                <a:lnTo>
-                  <a:pt x="4613744" y="62000"/>
-                </a:lnTo>
-                <a:close/>
-                <a:lnTo>
-                  <a:pt x="4629876" y="57161"/>
-                </a:lnTo>
-                <a:close/>
-                <a:lnTo>
-                  <a:pt x="4646008" y="52319"/>
-                </a:lnTo>
-                <a:close/>
-                <a:lnTo>
-                  <a:pt x="4662140" y="47480"/>
-                </a:lnTo>
-                <a:close/>
-                <a:lnTo>
-                  <a:pt x="4678272" y="42655"/>
-                </a:lnTo>
-                <a:close/>
-                <a:lnTo>
-                  <a:pt x="4694404" y="37768"/>
-                </a:lnTo>
-                <a:close/>
-                <a:lnTo>
-                  <a:pt x="4710536" y="32981"/>
-                </a:lnTo>
-                <a:close/>
-                <a:lnTo>
-                  <a:pt x="4726668" y="28486"/>
-                </a:lnTo>
-                <a:close/>
-                <a:lnTo>
-                  <a:pt x="4742800" y="23798"/>
-                </a:lnTo>
-                <a:close/>
-                <a:lnTo>
-                  <a:pt x="4758932" y="18877"/>
-                </a:lnTo>
-                <a:close/>
-                <a:lnTo>
-                  <a:pt x="4775064" y="14035"/>
-                </a:lnTo>
-                <a:close/>
-                <a:lnTo>
-                  <a:pt x="4791196" y="9475"/>
-                </a:lnTo>
-                <a:close/>
-                <a:lnTo>
-                  <a:pt x="4807328" y="4943"/>
-                </a:lnTo>
-                <a:close/>
-                <a:lnTo>
-                  <a:pt x="4823460" y="0"/>
+                  <a:pt x="5811" y="873888"/>
+                </a:lnTo>
+                <a:close/>
+                <a:lnTo>
+                  <a:pt x="11621" y="844647"/>
+                </a:lnTo>
+                <a:close/>
+                <a:lnTo>
+                  <a:pt x="17432" y="825766"/>
+                </a:lnTo>
+                <a:close/>
+                <a:lnTo>
+                  <a:pt x="23242" y="810685"/>
+                </a:lnTo>
+                <a:close/>
+                <a:lnTo>
+                  <a:pt x="29053" y="797536"/>
+                </a:lnTo>
+                <a:close/>
+                <a:lnTo>
+                  <a:pt x="34863" y="785965"/>
+                </a:lnTo>
+                <a:close/>
+                <a:lnTo>
+                  <a:pt x="40674" y="775147"/>
+                </a:lnTo>
+                <a:close/>
+                <a:lnTo>
+                  <a:pt x="46485" y="764979"/>
+                </a:lnTo>
+                <a:close/>
+                <a:lnTo>
+                  <a:pt x="52295" y="755614"/>
+                </a:lnTo>
+                <a:close/>
+                <a:lnTo>
+                  <a:pt x="58106" y="746690"/>
+                </a:lnTo>
+                <a:close/>
+                <a:lnTo>
+                  <a:pt x="63916" y="738055"/>
+                </a:lnTo>
+                <a:close/>
+                <a:lnTo>
+                  <a:pt x="69727" y="729795"/>
+                </a:lnTo>
+                <a:close/>
+                <a:lnTo>
+                  <a:pt x="75537" y="721947"/>
+                </a:lnTo>
+                <a:close/>
+                <a:lnTo>
+                  <a:pt x="81348" y="714438"/>
+                </a:lnTo>
+                <a:close/>
+                <a:lnTo>
+                  <a:pt x="87159" y="707104"/>
+                </a:lnTo>
+                <a:close/>
+                <a:lnTo>
+                  <a:pt x="92969" y="699934"/>
+                </a:lnTo>
+                <a:close/>
+                <a:lnTo>
+                  <a:pt x="98780" y="692958"/>
+                </a:lnTo>
+                <a:close/>
+                <a:lnTo>
+                  <a:pt x="104590" y="686166"/>
+                </a:lnTo>
+                <a:close/>
+                <a:lnTo>
+                  <a:pt x="110401" y="679558"/>
+                </a:lnTo>
+                <a:close/>
+                <a:lnTo>
+                  <a:pt x="116211" y="673138"/>
+                </a:lnTo>
+                <a:close/>
+                <a:lnTo>
+                  <a:pt x="122022" y="666889"/>
+                </a:lnTo>
+                <a:close/>
+                <a:lnTo>
+                  <a:pt x="127833" y="660841"/>
+                </a:lnTo>
+                <a:close/>
+                <a:lnTo>
+                  <a:pt x="133643" y="655015"/>
+                </a:lnTo>
+                <a:close/>
+                <a:lnTo>
+                  <a:pt x="139454" y="649204"/>
+                </a:lnTo>
+                <a:close/>
+                <a:lnTo>
+                  <a:pt x="145264" y="643385"/>
+                </a:lnTo>
+                <a:close/>
+                <a:lnTo>
+                  <a:pt x="151075" y="637804"/>
+                </a:lnTo>
+                <a:close/>
+                <a:lnTo>
+                  <a:pt x="156885" y="632313"/>
+                </a:lnTo>
+                <a:close/>
+                <a:lnTo>
+                  <a:pt x="162696" y="626775"/>
+                </a:lnTo>
+                <a:close/>
+                <a:lnTo>
+                  <a:pt x="168506" y="621396"/>
+                </a:lnTo>
+                <a:close/>
+                <a:lnTo>
+                  <a:pt x="174317" y="616260"/>
+                </a:lnTo>
+                <a:close/>
+                <a:lnTo>
+                  <a:pt x="180128" y="611311"/>
+                </a:lnTo>
+                <a:close/>
+                <a:lnTo>
+                  <a:pt x="185938" y="606405"/>
+                </a:lnTo>
+                <a:close/>
+                <a:lnTo>
+                  <a:pt x="191749" y="601454"/>
+                </a:lnTo>
+                <a:close/>
+                <a:lnTo>
+                  <a:pt x="197559" y="596474"/>
+                </a:lnTo>
+                <a:close/>
+                <a:lnTo>
+                  <a:pt x="203370" y="591649"/>
+                </a:lnTo>
+                <a:close/>
+                <a:lnTo>
+                  <a:pt x="209180" y="587025"/>
+                </a:lnTo>
+                <a:close/>
+                <a:lnTo>
+                  <a:pt x="214991" y="582407"/>
+                </a:lnTo>
+                <a:close/>
+                <a:lnTo>
+                  <a:pt x="220802" y="577726"/>
+                </a:lnTo>
+                <a:close/>
+                <a:lnTo>
+                  <a:pt x="226612" y="573056"/>
+                </a:lnTo>
+                <a:close/>
+                <a:lnTo>
+                  <a:pt x="232423" y="568596"/>
+                </a:lnTo>
+                <a:close/>
+                <a:lnTo>
+                  <a:pt x="238233" y="564278"/>
+                </a:lnTo>
+                <a:close/>
+                <a:lnTo>
+                  <a:pt x="244044" y="559921"/>
+                </a:lnTo>
+                <a:close/>
+                <a:lnTo>
+                  <a:pt x="249854" y="555563"/>
+                </a:lnTo>
+                <a:close/>
+                <a:lnTo>
+                  <a:pt x="255665" y="551203"/>
+                </a:lnTo>
+                <a:close/>
+                <a:lnTo>
+                  <a:pt x="261476" y="546806"/>
+                </a:lnTo>
+                <a:close/>
+                <a:lnTo>
+                  <a:pt x="267286" y="542555"/>
+                </a:lnTo>
+                <a:close/>
+                <a:lnTo>
+                  <a:pt x="273097" y="538512"/>
+                </a:lnTo>
+                <a:close/>
+                <a:lnTo>
+                  <a:pt x="278907" y="534479"/>
+                </a:lnTo>
+                <a:close/>
+                <a:lnTo>
+                  <a:pt x="284718" y="530374"/>
+                </a:lnTo>
+                <a:close/>
+                <a:lnTo>
+                  <a:pt x="290528" y="526275"/>
+                </a:lnTo>
+                <a:close/>
+                <a:lnTo>
+                  <a:pt x="296339" y="522443"/>
+                </a:lnTo>
+                <a:close/>
+                <a:lnTo>
+                  <a:pt x="302150" y="518652"/>
+                </a:lnTo>
+                <a:close/>
+                <a:lnTo>
+                  <a:pt x="307960" y="514566"/>
+                </a:lnTo>
+                <a:close/>
+                <a:lnTo>
+                  <a:pt x="313771" y="510611"/>
+                </a:lnTo>
+                <a:close/>
+                <a:lnTo>
+                  <a:pt x="319581" y="506875"/>
+                </a:lnTo>
+                <a:close/>
+                <a:lnTo>
+                  <a:pt x="325392" y="503059"/>
+                </a:lnTo>
+                <a:close/>
+                <a:lnTo>
+                  <a:pt x="331202" y="499408"/>
+                </a:lnTo>
+                <a:close/>
+                <a:lnTo>
+                  <a:pt x="337013" y="495957"/>
+                </a:lnTo>
+                <a:close/>
+                <a:lnTo>
+                  <a:pt x="342824" y="492237"/>
+                </a:lnTo>
+                <a:close/>
+                <a:lnTo>
+                  <a:pt x="348634" y="488476"/>
+                </a:lnTo>
+                <a:close/>
+                <a:lnTo>
+                  <a:pt x="354445" y="484997"/>
+                </a:lnTo>
+                <a:close/>
+                <a:lnTo>
+                  <a:pt x="360255" y="481545"/>
+                </a:lnTo>
+                <a:close/>
+                <a:lnTo>
+                  <a:pt x="366066" y="478048"/>
+                </a:lnTo>
+                <a:close/>
+                <a:lnTo>
+                  <a:pt x="371876" y="474573"/>
+                </a:lnTo>
+                <a:close/>
+                <a:lnTo>
+                  <a:pt x="377687" y="471044"/>
+                </a:lnTo>
+                <a:close/>
+                <a:lnTo>
+                  <a:pt x="383498" y="467572"/>
+                </a:lnTo>
+                <a:close/>
+                <a:lnTo>
+                  <a:pt x="389308" y="464382"/>
+                </a:lnTo>
+                <a:close/>
+                <a:lnTo>
+                  <a:pt x="395119" y="461098"/>
+                </a:lnTo>
+                <a:close/>
+                <a:lnTo>
+                  <a:pt x="400929" y="457575"/>
+                </a:lnTo>
+                <a:close/>
+                <a:lnTo>
+                  <a:pt x="406740" y="454271"/>
+                </a:lnTo>
+                <a:close/>
+                <a:lnTo>
+                  <a:pt x="412550" y="451133"/>
+                </a:lnTo>
+                <a:close/>
+                <a:lnTo>
+                  <a:pt x="418361" y="447936"/>
+                </a:lnTo>
+                <a:close/>
+                <a:lnTo>
+                  <a:pt x="424172" y="444731"/>
+                </a:lnTo>
+                <a:close/>
+                <a:lnTo>
+                  <a:pt x="429982" y="441538"/>
+                </a:lnTo>
+                <a:close/>
+                <a:lnTo>
+                  <a:pt x="435793" y="438339"/>
+                </a:lnTo>
+                <a:close/>
+                <a:lnTo>
+                  <a:pt x="441603" y="435154"/>
+                </a:lnTo>
+                <a:close/>
+                <a:lnTo>
+                  <a:pt x="447414" y="431955"/>
+                </a:lnTo>
+                <a:close/>
+                <a:lnTo>
+                  <a:pt x="453224" y="428703"/>
+                </a:lnTo>
+                <a:close/>
+                <a:lnTo>
+                  <a:pt x="459035" y="425638"/>
+                </a:lnTo>
+                <a:close/>
+                <a:lnTo>
+                  <a:pt x="464845" y="422768"/>
+                </a:lnTo>
+                <a:close/>
+                <a:lnTo>
+                  <a:pt x="470656" y="419637"/>
+                </a:lnTo>
+                <a:close/>
+                <a:lnTo>
+                  <a:pt x="476467" y="416450"/>
+                </a:lnTo>
+                <a:close/>
+                <a:lnTo>
+                  <a:pt x="482277" y="413545"/>
+                </a:lnTo>
+                <a:close/>
+                <a:lnTo>
+                  <a:pt x="488088" y="410680"/>
+                </a:lnTo>
+                <a:close/>
+                <a:lnTo>
+                  <a:pt x="493898" y="407761"/>
+                </a:lnTo>
+                <a:close/>
+                <a:lnTo>
+                  <a:pt x="499709" y="404855"/>
+                </a:lnTo>
+                <a:close/>
+                <a:lnTo>
+                  <a:pt x="505519" y="401950"/>
+                </a:lnTo>
+                <a:close/>
+                <a:lnTo>
+                  <a:pt x="511330" y="399044"/>
+                </a:lnTo>
+                <a:close/>
+                <a:lnTo>
+                  <a:pt x="517141" y="396154"/>
+                </a:lnTo>
+                <a:close/>
+                <a:lnTo>
+                  <a:pt x="522951" y="393216"/>
+                </a:lnTo>
+                <a:close/>
+                <a:lnTo>
+                  <a:pt x="528762" y="390292"/>
+                </a:lnTo>
+                <a:close/>
+                <a:lnTo>
+                  <a:pt x="534572" y="387641"/>
+                </a:lnTo>
+                <a:close/>
+                <a:lnTo>
+                  <a:pt x="540383" y="384994"/>
+                </a:lnTo>
+                <a:close/>
+                <a:lnTo>
+                  <a:pt x="546193" y="382065"/>
+                </a:lnTo>
+                <a:close/>
+                <a:lnTo>
+                  <a:pt x="552004" y="379272"/>
+                </a:lnTo>
+                <a:close/>
+                <a:lnTo>
+                  <a:pt x="557815" y="376720"/>
+                </a:lnTo>
+                <a:close/>
+                <a:lnTo>
+                  <a:pt x="563625" y="374165"/>
+                </a:lnTo>
+                <a:close/>
+                <a:lnTo>
+                  <a:pt x="569436" y="371374"/>
+                </a:lnTo>
+                <a:close/>
+                <a:lnTo>
+                  <a:pt x="575246" y="368446"/>
+                </a:lnTo>
+                <a:close/>
+                <a:lnTo>
+                  <a:pt x="581057" y="365773"/>
+                </a:lnTo>
+                <a:close/>
+                <a:lnTo>
+                  <a:pt x="586867" y="363181"/>
+                </a:lnTo>
+                <a:close/>
+                <a:lnTo>
+                  <a:pt x="592678" y="360541"/>
+                </a:lnTo>
+                <a:close/>
+                <a:lnTo>
+                  <a:pt x="598489" y="358154"/>
+                </a:lnTo>
+                <a:close/>
+                <a:lnTo>
+                  <a:pt x="604299" y="355825"/>
+                </a:lnTo>
+                <a:close/>
+                <a:lnTo>
+                  <a:pt x="610110" y="353228"/>
+                </a:lnTo>
+                <a:close/>
+                <a:lnTo>
+                  <a:pt x="615920" y="350520"/>
+                </a:lnTo>
+                <a:close/>
+                <a:lnTo>
+                  <a:pt x="621731" y="347955"/>
+                </a:lnTo>
+                <a:close/>
+                <a:lnTo>
+                  <a:pt x="627541" y="345656"/>
+                </a:lnTo>
+                <a:close/>
+                <a:lnTo>
+                  <a:pt x="633352" y="343202"/>
+                </a:lnTo>
+                <a:close/>
+                <a:lnTo>
+                  <a:pt x="639163" y="340553"/>
+                </a:lnTo>
+                <a:close/>
+                <a:lnTo>
+                  <a:pt x="644973" y="338200"/>
+                </a:lnTo>
+                <a:close/>
+                <a:lnTo>
+                  <a:pt x="650784" y="335824"/>
+                </a:lnTo>
+                <a:close/>
+                <a:lnTo>
+                  <a:pt x="656594" y="333175"/>
+                </a:lnTo>
+                <a:close/>
+                <a:lnTo>
+                  <a:pt x="662405" y="330707"/>
+                </a:lnTo>
+                <a:close/>
+                <a:lnTo>
+                  <a:pt x="668215" y="328458"/>
+                </a:lnTo>
+                <a:close/>
+                <a:lnTo>
+                  <a:pt x="674026" y="326176"/>
+                </a:lnTo>
+                <a:close/>
+                <a:lnTo>
+                  <a:pt x="679837" y="323646"/>
+                </a:lnTo>
+                <a:close/>
+                <a:lnTo>
+                  <a:pt x="685647" y="321021"/>
+                </a:lnTo>
+                <a:close/>
+                <a:lnTo>
+                  <a:pt x="691458" y="318655"/>
+                </a:lnTo>
+                <a:close/>
+                <a:lnTo>
+                  <a:pt x="697268" y="316379"/>
+                </a:lnTo>
+                <a:close/>
+                <a:lnTo>
+                  <a:pt x="703079" y="314046"/>
+                </a:lnTo>
+                <a:close/>
+                <a:lnTo>
+                  <a:pt x="708889" y="311716"/>
+                </a:lnTo>
+                <a:close/>
+                <a:lnTo>
+                  <a:pt x="714700" y="309395"/>
+                </a:lnTo>
+                <a:close/>
+                <a:lnTo>
+                  <a:pt x="720511" y="307071"/>
+                </a:lnTo>
+                <a:close/>
+                <a:lnTo>
+                  <a:pt x="726321" y="304747"/>
+                </a:lnTo>
+                <a:close/>
+                <a:lnTo>
+                  <a:pt x="732132" y="302422"/>
+                </a:lnTo>
+                <a:close/>
+                <a:lnTo>
+                  <a:pt x="737942" y="300094"/>
+                </a:lnTo>
+                <a:close/>
+                <a:lnTo>
+                  <a:pt x="743753" y="297782"/>
+                </a:lnTo>
+                <a:close/>
+                <a:lnTo>
+                  <a:pt x="749563" y="295451"/>
+                </a:lnTo>
+                <a:close/>
+                <a:lnTo>
+                  <a:pt x="755374" y="293077"/>
+                </a:lnTo>
+                <a:close/>
+                <a:lnTo>
+                  <a:pt x="761184" y="290895"/>
+                </a:lnTo>
+                <a:close/>
+                <a:lnTo>
+                  <a:pt x="766995" y="288890"/>
+                </a:lnTo>
+                <a:close/>
+                <a:lnTo>
+                  <a:pt x="772806" y="286668"/>
+                </a:lnTo>
+                <a:close/>
+                <a:lnTo>
+                  <a:pt x="778616" y="284261"/>
+                </a:lnTo>
+                <a:close/>
+                <a:lnTo>
+                  <a:pt x="784427" y="281911"/>
+                </a:lnTo>
+                <a:close/>
+                <a:lnTo>
+                  <a:pt x="790237" y="279838"/>
+                </a:lnTo>
+                <a:close/>
+                <a:lnTo>
+                  <a:pt x="796048" y="277779"/>
+                </a:lnTo>
+                <a:close/>
+                <a:lnTo>
+                  <a:pt x="801858" y="275424"/>
+                </a:lnTo>
+                <a:close/>
+                <a:lnTo>
+                  <a:pt x="807669" y="273255"/>
+                </a:lnTo>
+                <a:close/>
+                <a:lnTo>
+                  <a:pt x="813480" y="271245"/>
+                </a:lnTo>
+                <a:close/>
+                <a:lnTo>
+                  <a:pt x="819290" y="268920"/>
+                </a:lnTo>
+                <a:close/>
+                <a:lnTo>
+                  <a:pt x="825101" y="266689"/>
+                </a:lnTo>
+                <a:close/>
+                <a:lnTo>
+                  <a:pt x="830911" y="264696"/>
+                </a:lnTo>
+                <a:close/>
+                <a:lnTo>
+                  <a:pt x="836722" y="262431"/>
+                </a:lnTo>
+                <a:close/>
+                <a:lnTo>
+                  <a:pt x="842532" y="260117"/>
+                </a:lnTo>
+                <a:close/>
+                <a:lnTo>
+                  <a:pt x="848343" y="258086"/>
+                </a:lnTo>
+                <a:close/>
+                <a:lnTo>
+                  <a:pt x="854154" y="256141"/>
+                </a:lnTo>
+                <a:close/>
+                <a:lnTo>
+                  <a:pt x="859964" y="254038"/>
+                </a:lnTo>
+                <a:close/>
+                <a:lnTo>
+                  <a:pt x="865775" y="251692"/>
+                </a:lnTo>
+                <a:close/>
+                <a:lnTo>
+                  <a:pt x="871585" y="249482"/>
+                </a:lnTo>
+                <a:close/>
+                <a:lnTo>
+                  <a:pt x="877396" y="247491"/>
+                </a:lnTo>
+                <a:close/>
+                <a:lnTo>
+                  <a:pt x="883206" y="245472"/>
+                </a:lnTo>
+                <a:close/>
+                <a:lnTo>
+                  <a:pt x="889017" y="243425"/>
+                </a:lnTo>
+                <a:close/>
+                <a:lnTo>
+                  <a:pt x="894828" y="241393"/>
+                </a:lnTo>
+                <a:close/>
+                <a:lnTo>
+                  <a:pt x="900638" y="239361"/>
+                </a:lnTo>
+                <a:close/>
+                <a:lnTo>
+                  <a:pt x="906449" y="237327"/>
+                </a:lnTo>
+                <a:close/>
+                <a:lnTo>
+                  <a:pt x="912259" y="235293"/>
+                </a:lnTo>
+                <a:close/>
+                <a:lnTo>
+                  <a:pt x="918070" y="233259"/>
+                </a:lnTo>
+                <a:close/>
+                <a:lnTo>
+                  <a:pt x="923880" y="231226"/>
+                </a:lnTo>
+                <a:close/>
+                <a:lnTo>
+                  <a:pt x="929691" y="229193"/>
+                </a:lnTo>
+                <a:close/>
+                <a:lnTo>
+                  <a:pt x="935502" y="227156"/>
+                </a:lnTo>
+                <a:close/>
+                <a:lnTo>
+                  <a:pt x="941312" y="225124"/>
+                </a:lnTo>
+                <a:close/>
+                <a:lnTo>
+                  <a:pt x="947123" y="223104"/>
+                </a:lnTo>
+                <a:close/>
+                <a:lnTo>
+                  <a:pt x="952933" y="221037"/>
+                </a:lnTo>
+                <a:close/>
+                <a:lnTo>
+                  <a:pt x="958744" y="218991"/>
+                </a:lnTo>
+                <a:close/>
+                <a:lnTo>
+                  <a:pt x="964554" y="217207"/>
+                </a:lnTo>
+                <a:close/>
+                <a:lnTo>
+                  <a:pt x="970365" y="215444"/>
+                </a:lnTo>
+                <a:close/>
+                <a:lnTo>
+                  <a:pt x="976176" y="213416"/>
+                </a:lnTo>
+                <a:close/>
+                <a:lnTo>
+                  <a:pt x="981986" y="211291"/>
+                </a:lnTo>
+                <a:close/>
+                <a:lnTo>
+                  <a:pt x="987797" y="209321"/>
+                </a:lnTo>
+                <a:close/>
+                <a:lnTo>
+                  <a:pt x="993607" y="207610"/>
+                </a:lnTo>
+                <a:close/>
+                <a:lnTo>
+                  <a:pt x="999418" y="205717"/>
+                </a:lnTo>
+                <a:close/>
+                <a:lnTo>
+                  <a:pt x="1005228" y="203655"/>
+                </a:lnTo>
+                <a:close/>
+                <a:lnTo>
+                  <a:pt x="1011039" y="201903"/>
+                </a:lnTo>
+                <a:close/>
+                <a:lnTo>
+                  <a:pt x="1016849" y="200080"/>
+                </a:lnTo>
+                <a:close/>
+                <a:lnTo>
+                  <a:pt x="1022660" y="198003"/>
+                </a:lnTo>
+                <a:close/>
+                <a:lnTo>
+                  <a:pt x="1028471" y="196205"/>
+                </a:lnTo>
+                <a:close/>
+                <a:lnTo>
+                  <a:pt x="1034281" y="194432"/>
+                </a:lnTo>
+                <a:close/>
+                <a:lnTo>
+                  <a:pt x="1040092" y="192360"/>
+                </a:lnTo>
+                <a:close/>
+                <a:lnTo>
+                  <a:pt x="1045902" y="190505"/>
+                </a:lnTo>
+                <a:close/>
+                <a:lnTo>
+                  <a:pt x="1051713" y="188774"/>
+                </a:lnTo>
+                <a:close/>
+                <a:lnTo>
+                  <a:pt x="1057523" y="186738"/>
+                </a:lnTo>
+                <a:close/>
+                <a:lnTo>
+                  <a:pt x="1063334" y="184776"/>
+                </a:lnTo>
+                <a:close/>
+                <a:lnTo>
+                  <a:pt x="1069145" y="183079"/>
+                </a:lnTo>
+                <a:close/>
+                <a:lnTo>
+                  <a:pt x="1074955" y="181409"/>
+                </a:lnTo>
+                <a:close/>
+                <a:lnTo>
+                  <a:pt x="1080766" y="179529"/>
+                </a:lnTo>
+                <a:close/>
+                <a:lnTo>
+                  <a:pt x="1086576" y="177466"/>
+                </a:lnTo>
+                <a:close/>
+                <a:lnTo>
+                  <a:pt x="1092387" y="175615"/>
+                </a:lnTo>
+                <a:close/>
+                <a:lnTo>
+                  <a:pt x="1098197" y="173924"/>
+                </a:lnTo>
+                <a:close/>
+                <a:lnTo>
+                  <a:pt x="1104008" y="172181"/>
+                </a:lnTo>
+                <a:close/>
+                <a:lnTo>
+                  <a:pt x="1109819" y="170431"/>
+                </a:lnTo>
+                <a:close/>
+                <a:lnTo>
+                  <a:pt x="1115629" y="168689"/>
+                </a:lnTo>
+                <a:close/>
+                <a:lnTo>
+                  <a:pt x="1121440" y="166933"/>
+                </a:lnTo>
+                <a:close/>
+                <a:lnTo>
+                  <a:pt x="1127250" y="165229"/>
+                </a:lnTo>
+                <a:close/>
+                <a:lnTo>
+                  <a:pt x="1133061" y="163481"/>
+                </a:lnTo>
+                <a:close/>
+                <a:lnTo>
+                  <a:pt x="1138871" y="161461"/>
+                </a:lnTo>
+                <a:close/>
+                <a:lnTo>
+                  <a:pt x="1144682" y="159478"/>
+                </a:lnTo>
+                <a:close/>
+                <a:lnTo>
+                  <a:pt x="1150493" y="157755"/>
+                </a:lnTo>
+                <a:close/>
+                <a:lnTo>
+                  <a:pt x="1156303" y="156042"/>
+                </a:lnTo>
+                <a:close/>
+                <a:lnTo>
+                  <a:pt x="1162114" y="154284"/>
+                </a:lnTo>
+                <a:close/>
+                <a:lnTo>
+                  <a:pt x="1167924" y="152541"/>
+                </a:lnTo>
+                <a:close/>
+                <a:lnTo>
+                  <a:pt x="1173735" y="150801"/>
+                </a:lnTo>
+                <a:close/>
+                <a:lnTo>
+                  <a:pt x="1179545" y="149057"/>
+                </a:lnTo>
+                <a:close/>
+                <a:lnTo>
+                  <a:pt x="1185356" y="147313"/>
+                </a:lnTo>
+                <a:close/>
+                <a:lnTo>
+                  <a:pt x="1191167" y="145570"/>
+                </a:lnTo>
+                <a:close/>
+                <a:lnTo>
+                  <a:pt x="1196977" y="143827"/>
+                </a:lnTo>
+                <a:close/>
+                <a:lnTo>
+                  <a:pt x="1202788" y="142084"/>
+                </a:lnTo>
+                <a:close/>
+                <a:lnTo>
+                  <a:pt x="1208598" y="140341"/>
+                </a:lnTo>
+                <a:close/>
+                <a:lnTo>
+                  <a:pt x="1214409" y="138598"/>
+                </a:lnTo>
+                <a:close/>
+                <a:lnTo>
+                  <a:pt x="1220219" y="136851"/>
+                </a:lnTo>
+                <a:close/>
+                <a:lnTo>
+                  <a:pt x="1226030" y="135113"/>
+                </a:lnTo>
+                <a:close/>
+                <a:lnTo>
+                  <a:pt x="1231841" y="133381"/>
+                </a:lnTo>
+                <a:close/>
+                <a:lnTo>
+                  <a:pt x="1237651" y="131590"/>
+                </a:lnTo>
+                <a:close/>
+                <a:lnTo>
+                  <a:pt x="1243462" y="129878"/>
+                </a:lnTo>
+                <a:close/>
+                <a:lnTo>
+                  <a:pt x="1249272" y="128433"/>
+                </a:lnTo>
+                <a:close/>
+                <a:lnTo>
+                  <a:pt x="1255083" y="126896"/>
+                </a:lnTo>
+                <a:close/>
+                <a:lnTo>
+                  <a:pt x="1260893" y="125117"/>
+                </a:lnTo>
+                <a:close/>
+                <a:lnTo>
+                  <a:pt x="1266704" y="123367"/>
+                </a:lnTo>
+                <a:close/>
+                <a:lnTo>
+                  <a:pt x="1272515" y="121610"/>
+                </a:lnTo>
+                <a:close/>
+                <a:lnTo>
+                  <a:pt x="1278325" y="119842"/>
+                </a:lnTo>
+                <a:close/>
+                <a:lnTo>
+                  <a:pt x="1284136" y="118326"/>
+                </a:lnTo>
+                <a:close/>
+                <a:lnTo>
+                  <a:pt x="1289946" y="116870"/>
+                </a:lnTo>
+                <a:close/>
+                <a:lnTo>
+                  <a:pt x="1295757" y="115149"/>
+                </a:lnTo>
+                <a:close/>
+                <a:lnTo>
+                  <a:pt x="1301567" y="113318"/>
+                </a:lnTo>
+                <a:close/>
+                <a:lnTo>
+                  <a:pt x="1307378" y="111614"/>
+                </a:lnTo>
+                <a:close/>
+                <a:lnTo>
+                  <a:pt x="1313188" y="110166"/>
+                </a:lnTo>
+                <a:close/>
+                <a:lnTo>
+                  <a:pt x="1318999" y="108642"/>
+                </a:lnTo>
+                <a:close/>
+                <a:lnTo>
+                  <a:pt x="1324810" y="106867"/>
+                </a:lnTo>
+                <a:close/>
+                <a:lnTo>
+                  <a:pt x="1330620" y="105043"/>
+                </a:lnTo>
+                <a:close/>
+                <a:lnTo>
+                  <a:pt x="1336431" y="103424"/>
+                </a:lnTo>
+                <a:close/>
+                <a:lnTo>
+                  <a:pt x="1342241" y="102010"/>
+                </a:lnTo>
+                <a:close/>
+                <a:lnTo>
+                  <a:pt x="1348052" y="100337"/>
+                </a:lnTo>
+                <a:close/>
+                <a:lnTo>
+                  <a:pt x="1353862" y="98607"/>
+                </a:lnTo>
+                <a:close/>
+                <a:lnTo>
+                  <a:pt x="1359673" y="97185"/>
+                </a:lnTo>
+                <a:close/>
+                <a:lnTo>
+                  <a:pt x="1365484" y="95578"/>
+                </a:lnTo>
+                <a:close/>
+                <a:lnTo>
+                  <a:pt x="1371294" y="93811"/>
+                </a:lnTo>
+                <a:close/>
+                <a:lnTo>
+                  <a:pt x="1377105" y="92361"/>
+                </a:lnTo>
+                <a:close/>
+                <a:lnTo>
+                  <a:pt x="1382915" y="90811"/>
+                </a:lnTo>
+                <a:close/>
+                <a:lnTo>
+                  <a:pt x="1388726" y="89027"/>
+                </a:lnTo>
+                <a:close/>
+                <a:lnTo>
+                  <a:pt x="1394536" y="87536"/>
+                </a:lnTo>
+                <a:close/>
+                <a:lnTo>
+                  <a:pt x="1400347" y="86037"/>
+                </a:lnTo>
+                <a:close/>
+                <a:lnTo>
+                  <a:pt x="1406158" y="84252"/>
+                </a:lnTo>
+                <a:close/>
+                <a:lnTo>
+                  <a:pt x="1411968" y="82706"/>
+                </a:lnTo>
+                <a:close/>
+                <a:lnTo>
+                  <a:pt x="1417779" y="81255"/>
+                </a:lnTo>
+                <a:close/>
+                <a:lnTo>
+                  <a:pt x="1423589" y="79500"/>
+                </a:lnTo>
+                <a:close/>
+                <a:lnTo>
+                  <a:pt x="1429400" y="77844"/>
+                </a:lnTo>
+                <a:close/>
+                <a:lnTo>
+                  <a:pt x="1435210" y="76445"/>
+                </a:lnTo>
+                <a:close/>
+                <a:lnTo>
+                  <a:pt x="1441021" y="75059"/>
+                </a:lnTo>
+                <a:close/>
+                <a:lnTo>
+                  <a:pt x="1446832" y="73457"/>
+                </a:lnTo>
+                <a:close/>
+                <a:lnTo>
+                  <a:pt x="1452642" y="71686"/>
+                </a:lnTo>
+                <a:close/>
+                <a:lnTo>
+                  <a:pt x="1458453" y="70127"/>
+                </a:lnTo>
+                <a:close/>
+                <a:lnTo>
+                  <a:pt x="1464263" y="68752"/>
+                </a:lnTo>
+                <a:close/>
+                <a:lnTo>
+                  <a:pt x="1470074" y="67328"/>
+                </a:lnTo>
+                <a:close/>
+                <a:lnTo>
+                  <a:pt x="1475884" y="65645"/>
+                </a:lnTo>
+                <a:close/>
+                <a:lnTo>
+                  <a:pt x="1481695" y="63906"/>
+                </a:lnTo>
+                <a:close/>
+                <a:lnTo>
+                  <a:pt x="1487506" y="62436"/>
+                </a:lnTo>
+                <a:close/>
+                <a:lnTo>
+                  <a:pt x="1493316" y="61016"/>
+                </a:lnTo>
+                <a:close/>
+                <a:lnTo>
+                  <a:pt x="1499127" y="59556"/>
+                </a:lnTo>
+                <a:close/>
+                <a:lnTo>
+                  <a:pt x="1504937" y="58152"/>
+                </a:lnTo>
+                <a:close/>
+                <a:lnTo>
+                  <a:pt x="1510748" y="56571"/>
+                </a:lnTo>
+                <a:close/>
+                <a:lnTo>
+                  <a:pt x="1516558" y="54796"/>
+                </a:lnTo>
+                <a:close/>
+                <a:lnTo>
+                  <a:pt x="1522369" y="53243"/>
+                </a:lnTo>
+                <a:close/>
+                <a:lnTo>
+                  <a:pt x="1528180" y="51847"/>
+                </a:lnTo>
+                <a:close/>
+                <a:lnTo>
+                  <a:pt x="1533990" y="50395"/>
+                </a:lnTo>
+                <a:close/>
+                <a:lnTo>
+                  <a:pt x="1539801" y="48919"/>
+                </a:lnTo>
+                <a:close/>
+                <a:lnTo>
+                  <a:pt x="1545611" y="47483"/>
+                </a:lnTo>
+                <a:close/>
+                <a:lnTo>
+                  <a:pt x="1551422" y="46077"/>
+                </a:lnTo>
+                <a:close/>
+                <a:lnTo>
+                  <a:pt x="1557232" y="44451"/>
+                </a:lnTo>
+                <a:close/>
+                <a:lnTo>
+                  <a:pt x="1563043" y="42685"/>
+                </a:lnTo>
+                <a:close/>
+                <a:lnTo>
+                  <a:pt x="1568854" y="41171"/>
+                </a:lnTo>
+                <a:close/>
+                <a:lnTo>
+                  <a:pt x="1574664" y="39771"/>
+                </a:lnTo>
+                <a:close/>
+                <a:lnTo>
+                  <a:pt x="1580475" y="38311"/>
+                </a:lnTo>
+                <a:close/>
+                <a:lnTo>
+                  <a:pt x="1586285" y="36851"/>
+                </a:lnTo>
+                <a:close/>
+                <a:lnTo>
+                  <a:pt x="1592096" y="35402"/>
+                </a:lnTo>
+                <a:close/>
+                <a:lnTo>
+                  <a:pt x="1597906" y="33950"/>
+                </a:lnTo>
+                <a:close/>
+                <a:lnTo>
+                  <a:pt x="1603717" y="32496"/>
+                </a:lnTo>
+                <a:close/>
+                <a:lnTo>
+                  <a:pt x="1609527" y="31044"/>
+                </a:lnTo>
+                <a:close/>
+                <a:lnTo>
+                  <a:pt x="1615338" y="29591"/>
+                </a:lnTo>
+                <a:close/>
+                <a:lnTo>
+                  <a:pt x="1621149" y="28139"/>
+                </a:lnTo>
+                <a:close/>
+                <a:lnTo>
+                  <a:pt x="1626959" y="26686"/>
+                </a:lnTo>
+                <a:close/>
+                <a:lnTo>
+                  <a:pt x="1632770" y="25233"/>
+                </a:lnTo>
+                <a:close/>
+                <a:lnTo>
+                  <a:pt x="1638580" y="23781"/>
+                </a:lnTo>
+                <a:close/>
+                <a:lnTo>
+                  <a:pt x="1644391" y="22328"/>
+                </a:lnTo>
+                <a:close/>
+                <a:lnTo>
+                  <a:pt x="1650201" y="20876"/>
+                </a:lnTo>
+                <a:close/>
+                <a:lnTo>
+                  <a:pt x="1656012" y="19422"/>
+                </a:lnTo>
+                <a:close/>
+                <a:lnTo>
+                  <a:pt x="1661823" y="17967"/>
+                </a:lnTo>
+                <a:close/>
+                <a:lnTo>
+                  <a:pt x="1667633" y="16527"/>
+                </a:lnTo>
+                <a:close/>
+                <a:lnTo>
+                  <a:pt x="1673444" y="15064"/>
+                </a:lnTo>
+                <a:close/>
+                <a:lnTo>
+                  <a:pt x="1679254" y="13563"/>
+                </a:lnTo>
+                <a:close/>
+                <a:lnTo>
+                  <a:pt x="1685065" y="12273"/>
+                </a:lnTo>
+                <a:close/>
+                <a:lnTo>
+                  <a:pt x="1690875" y="11137"/>
+                </a:lnTo>
+                <a:close/>
+                <a:lnTo>
+                  <a:pt x="1696686" y="9755"/>
+                </a:lnTo>
+                <a:close/>
+                <a:lnTo>
+                  <a:pt x="1702497" y="8248"/>
+                </a:lnTo>
+                <a:close/>
+                <a:lnTo>
+                  <a:pt x="1708307" y="6800"/>
+                </a:lnTo>
+                <a:close/>
+                <a:lnTo>
+                  <a:pt x="1714118" y="5362"/>
+                </a:lnTo>
+                <a:close/>
+                <a:lnTo>
+                  <a:pt x="1719928" y="3897"/>
+                </a:lnTo>
+                <a:close/>
+                <a:lnTo>
+                  <a:pt x="1725739" y="2427"/>
+                </a:lnTo>
+                <a:close/>
+                <a:lnTo>
+                  <a:pt x="1731549" y="1080"/>
+                </a:lnTo>
+                <a:close/>
+                <a:lnTo>
+                  <a:pt x="1737360" y="0"/>
                 </a:lnTo>
                 <a:close/>
               </a:path>
@@ -4389,7 +4389,7 @@
           </a:custGeom>
           <a:ln w="31750">
             <a:solidFill>
-              <a:srgbClr val="00E5FF"/>
+              <a:srgbClr val="FFFFFF"/>
             </a:solidFill>
           </a:ln>
         </p:spPr>
@@ -4423,8 +4423,8 @@
         </p:nvCxnSpPr>
         <p:spPr>
           <a:xfrm flipV="1">
-            <a:off x="7315200.0" y="353872.7999999998"/>
-            <a:ext cx="0.0" cy="2217877.2"/>
+            <a:off x="5715000.0" y="1628089.2"/>
+            <a:ext cx="0.0" cy="943660.8"/>
           </a:xfrm>
           <a:prstGeom prst="line">
             <a:avLst/>
@@ -4459,14 +4459,14 @@
         </p:nvSpPr>
         <p:spPr>
           <a:xfrm>
-            <a:off x="7264400" y="303072"/>
+            <a:off x="5664200" y="1577289"/>
             <a:ext cx="101600" cy="101600"/>
           </a:xfrm>
           <a:prstGeom prst="ellipse">
             <a:avLst/>
           </a:prstGeom>
           <a:solidFill>
-            <a:srgbClr val="0A0A0A"/>
+            <a:srgbClr val="000000"/>
           </a:solidFill>
           <a:ln w="12700">
             <a:solidFill>
@@ -4504,115 +4504,7 @@
         </p:nvSpPr>
         <p:spPr>
           <a:xfrm>
-            <a:off x="4135120" y="2437130"/>
-            <a:ext cx="1524000" cy="508000"/>
-          </a:xfrm>
-          <a:prstGeom prst="rect">
-            <a:avLst/>
-          </a:prstGeom>
-          <a:noFill/>
-        </p:spPr>
-        <p:txBody>
-          <a:bodyPr wrap="none">
-            <a:spAutoFit/>
-          </a:bodyPr>
-          <a:lstStyle/>
-          <a:p>
-            <a:pPr>
-              <a:defRPr sz="1400" b="1">
-                <a:solidFill>
-                  <a:srgbClr val="FFFFFF"/>
-                </a:solidFill>
-                <a:latin typeface="Inter"/>
-              </a:defRPr>
-            </a:pPr>
-            <a:r>
-              <a:t>O</a:t>
-            </a:r>
-          </a:p>
-        </p:txBody>
-      </p:sp>
-      <p:sp>
-        <p:nvSpPr>
-          <p:cNvPr id="8" name="TextBox 7"/>
-          <p:cNvSpPr txBox="1"/>
-          <p:nvPr/>
-        </p:nvSpPr>
-        <p:spPr>
-          <a:xfrm>
-            <a:off x="9347200" y="2437130"/>
-            <a:ext cx="1524000" cy="508000"/>
-          </a:xfrm>
-          <a:prstGeom prst="rect">
-            <a:avLst/>
-          </a:prstGeom>
-          <a:noFill/>
-        </p:spPr>
-        <p:txBody>
-          <a:bodyPr wrap="none">
-            <a:spAutoFit/>
-          </a:bodyPr>
-          <a:lstStyle/>
-          <a:p>
-            <a:pPr>
-              <a:defRPr sz="1400" b="1">
-                <a:solidFill>
-                  <a:srgbClr val="FFFFFF"/>
-                </a:solidFill>
-                <a:latin typeface="Inter"/>
-              </a:defRPr>
-            </a:pPr>
-            <a:r>
-              <a:t>x</a:t>
-            </a:r>
-          </a:p>
-        </p:txBody>
-      </p:sp>
-      <p:sp>
-        <p:nvSpPr>
-          <p:cNvPr id="9" name="TextBox 8"/>
-          <p:cNvSpPr txBox="1"/>
-          <p:nvPr/>
-        </p:nvSpPr>
-        <p:spPr>
-          <a:xfrm>
-            <a:off x="4135120" y="-1311910"/>
-            <a:ext cx="1524000" cy="508000"/>
-          </a:xfrm>
-          <a:prstGeom prst="rect">
-            <a:avLst/>
-          </a:prstGeom>
-          <a:noFill/>
-        </p:spPr>
-        <p:txBody>
-          <a:bodyPr wrap="none">
-            <a:spAutoFit/>
-          </a:bodyPr>
-          <a:lstStyle/>
-          <a:p>
-            <a:pPr>
-              <a:defRPr sz="1400" b="1">
-                <a:solidFill>
-                  <a:srgbClr val="FFFFFF"/>
-                </a:solidFill>
-                <a:latin typeface="Inter"/>
-              </a:defRPr>
-            </a:pPr>
-            <a:r>
-              <a:t>y</a:t>
-            </a:r>
-          </a:p>
-        </p:txBody>
-      </p:sp>
-      <p:sp>
-        <p:nvSpPr>
-          <p:cNvPr id="10" name="TextBox 9"/>
-          <p:cNvSpPr txBox="1"/>
-          <p:nvPr/>
-        </p:nvSpPr>
-        <p:spPr>
-          <a:xfrm>
-            <a:off x="7015480" y="2528570"/>
+            <a:off x="5438140" y="2345690"/>
             <a:ext cx="1524000" cy="508000"/>
           </a:xfrm>
           <a:prstGeom prst="rect">

--- a/output/4.pptx
+++ b/output/4.pptx
@@ -3104,8 +3104,8 @@
         </p:nvCxnSpPr>
         <p:spPr>
           <a:xfrm>
-            <a:off x="4343400.0" y="2571750.0"/>
-            <a:ext cx="2286000.0" cy="0.0"/>
+            <a:off x="4114800.0" y="2571750.0"/>
+            <a:ext cx="3200400.0" cy="0.0"/>
           </a:xfrm>
           <a:prstGeom prst="line">
             <a:avLst/>
@@ -3139,8 +3139,8 @@
         </p:nvCxnSpPr>
         <p:spPr>
           <a:xfrm flipV="1">
-            <a:off x="4572000.0" y="971550.0"/>
-            <a:ext cx="0.0" cy="1828800.0"/>
+            <a:off x="4572000.0" y="742950.0"/>
+            <a:ext cx="0.0" cy="2286000.0"/>
           </a:xfrm>
           <a:prstGeom prst="line">
             <a:avLst/>
@@ -3174,8 +3174,8 @@
         </p:nvSpPr>
         <p:spPr>
           <a:xfrm>
-            <a:off x="4572000" y="1468069"/>
-            <a:ext cx="1737360" cy="920801"/>
+            <a:off x="4572000" y="1499616"/>
+            <a:ext cx="2514600" cy="1072134"/>
           </a:xfrm>
           <a:custGeom>
             <a:avLst/>
@@ -3184,1204 +3184,1204 @@
             <a:cxnLst/>
             <a:rect l="l" t="t" r="r" b="b"/>
             <a:pathLst>
-              <a:path w="1737360" h="920801">
+              <a:path w="2514600" h="1072134">
                 <a:moveTo>
-                  <a:pt x="0" y="920801"/>
+                  <a:pt x="0" y="1072134"/>
                 </a:moveTo>
                 <a:lnTo>
-                  <a:pt x="5811" y="873888"/>
-                </a:lnTo>
-                <a:close/>
-                <a:lnTo>
-                  <a:pt x="11621" y="844647"/>
-                </a:lnTo>
-                <a:close/>
-                <a:lnTo>
-                  <a:pt x="17432" y="825766"/>
-                </a:lnTo>
-                <a:close/>
-                <a:lnTo>
-                  <a:pt x="23242" y="810685"/>
-                </a:lnTo>
-                <a:close/>
-                <a:lnTo>
-                  <a:pt x="29053" y="797536"/>
-                </a:lnTo>
-                <a:close/>
-                <a:lnTo>
-                  <a:pt x="34863" y="785965"/>
-                </a:lnTo>
-                <a:close/>
-                <a:lnTo>
-                  <a:pt x="40674" y="775147"/>
-                </a:lnTo>
-                <a:close/>
-                <a:lnTo>
-                  <a:pt x="46485" y="764979"/>
-                </a:lnTo>
-                <a:close/>
-                <a:lnTo>
-                  <a:pt x="52295" y="755614"/>
-                </a:lnTo>
-                <a:close/>
-                <a:lnTo>
-                  <a:pt x="58106" y="746690"/>
-                </a:lnTo>
-                <a:close/>
-                <a:lnTo>
-                  <a:pt x="63916" y="738055"/>
-                </a:lnTo>
-                <a:close/>
-                <a:lnTo>
-                  <a:pt x="69727" y="729795"/>
-                </a:lnTo>
-                <a:close/>
-                <a:lnTo>
-                  <a:pt x="75537" y="721947"/>
-                </a:lnTo>
-                <a:close/>
-                <a:lnTo>
-                  <a:pt x="81348" y="714438"/>
-                </a:lnTo>
-                <a:close/>
-                <a:lnTo>
-                  <a:pt x="87159" y="707104"/>
-                </a:lnTo>
-                <a:close/>
-                <a:lnTo>
-                  <a:pt x="92969" y="699934"/>
-                </a:lnTo>
-                <a:close/>
-                <a:lnTo>
-                  <a:pt x="98780" y="692958"/>
-                </a:lnTo>
-                <a:close/>
-                <a:lnTo>
-                  <a:pt x="104590" y="686166"/>
-                </a:lnTo>
-                <a:close/>
-                <a:lnTo>
-                  <a:pt x="110401" y="679558"/>
-                </a:lnTo>
-                <a:close/>
-                <a:lnTo>
-                  <a:pt x="116211" y="673138"/>
-                </a:lnTo>
-                <a:close/>
-                <a:lnTo>
-                  <a:pt x="122022" y="666889"/>
-                </a:lnTo>
-                <a:close/>
-                <a:lnTo>
-                  <a:pt x="127833" y="660841"/>
-                </a:lnTo>
-                <a:close/>
-                <a:lnTo>
-                  <a:pt x="133643" y="655015"/>
-                </a:lnTo>
-                <a:close/>
-                <a:lnTo>
-                  <a:pt x="139454" y="649204"/>
-                </a:lnTo>
-                <a:close/>
-                <a:lnTo>
-                  <a:pt x="145264" y="643385"/>
-                </a:lnTo>
-                <a:close/>
-                <a:lnTo>
-                  <a:pt x="151075" y="637804"/>
-                </a:lnTo>
-                <a:close/>
-                <a:lnTo>
-                  <a:pt x="156885" y="632313"/>
-                </a:lnTo>
-                <a:close/>
-                <a:lnTo>
-                  <a:pt x="162696" y="626775"/>
-                </a:lnTo>
-                <a:close/>
-                <a:lnTo>
-                  <a:pt x="168506" y="621396"/>
-                </a:lnTo>
-                <a:close/>
-                <a:lnTo>
-                  <a:pt x="174317" y="616260"/>
-                </a:lnTo>
-                <a:close/>
-                <a:lnTo>
-                  <a:pt x="180128" y="611311"/>
-                </a:lnTo>
-                <a:close/>
-                <a:lnTo>
-                  <a:pt x="185938" y="606405"/>
-                </a:lnTo>
-                <a:close/>
-                <a:lnTo>
-                  <a:pt x="191749" y="601454"/>
-                </a:lnTo>
-                <a:close/>
-                <a:lnTo>
-                  <a:pt x="197559" y="596474"/>
-                </a:lnTo>
-                <a:close/>
-                <a:lnTo>
-                  <a:pt x="203370" y="591649"/>
-                </a:lnTo>
-                <a:close/>
-                <a:lnTo>
-                  <a:pt x="209180" y="587025"/>
-                </a:lnTo>
-                <a:close/>
-                <a:lnTo>
-                  <a:pt x="214991" y="582407"/>
-                </a:lnTo>
-                <a:close/>
-                <a:lnTo>
-                  <a:pt x="220802" y="577726"/>
-                </a:lnTo>
-                <a:close/>
-                <a:lnTo>
-                  <a:pt x="226612" y="573056"/>
-                </a:lnTo>
-                <a:close/>
-                <a:lnTo>
-                  <a:pt x="232423" y="568596"/>
-                </a:lnTo>
-                <a:close/>
-                <a:lnTo>
-                  <a:pt x="238233" y="564278"/>
-                </a:lnTo>
-                <a:close/>
-                <a:lnTo>
-                  <a:pt x="244044" y="559921"/>
-                </a:lnTo>
-                <a:close/>
-                <a:lnTo>
-                  <a:pt x="249854" y="555563"/>
-                </a:lnTo>
-                <a:close/>
-                <a:lnTo>
-                  <a:pt x="255665" y="551203"/>
-                </a:lnTo>
-                <a:close/>
-                <a:lnTo>
-                  <a:pt x="261476" y="546806"/>
-                </a:lnTo>
-                <a:close/>
-                <a:lnTo>
-                  <a:pt x="267286" y="542555"/>
-                </a:lnTo>
-                <a:close/>
-                <a:lnTo>
-                  <a:pt x="273097" y="538512"/>
-                </a:lnTo>
-                <a:close/>
-                <a:lnTo>
-                  <a:pt x="278907" y="534479"/>
-                </a:lnTo>
-                <a:close/>
-                <a:lnTo>
-                  <a:pt x="284718" y="530374"/>
-                </a:lnTo>
-                <a:close/>
-                <a:lnTo>
-                  <a:pt x="290528" y="526275"/>
-                </a:lnTo>
-                <a:close/>
-                <a:lnTo>
-                  <a:pt x="296339" y="522443"/>
-                </a:lnTo>
-                <a:close/>
-                <a:lnTo>
-                  <a:pt x="302150" y="518652"/>
-                </a:lnTo>
-                <a:close/>
-                <a:lnTo>
-                  <a:pt x="307960" y="514566"/>
-                </a:lnTo>
-                <a:close/>
-                <a:lnTo>
-                  <a:pt x="313771" y="510611"/>
-                </a:lnTo>
-                <a:close/>
-                <a:lnTo>
-                  <a:pt x="319581" y="506875"/>
-                </a:lnTo>
-                <a:close/>
-                <a:lnTo>
-                  <a:pt x="325392" y="503059"/>
-                </a:lnTo>
-                <a:close/>
-                <a:lnTo>
-                  <a:pt x="331202" y="499408"/>
-                </a:lnTo>
-                <a:close/>
-                <a:lnTo>
-                  <a:pt x="337013" y="495957"/>
-                </a:lnTo>
-                <a:close/>
-                <a:lnTo>
-                  <a:pt x="342824" y="492237"/>
-                </a:lnTo>
-                <a:close/>
-                <a:lnTo>
-                  <a:pt x="348634" y="488476"/>
-                </a:lnTo>
-                <a:close/>
-                <a:lnTo>
-                  <a:pt x="354445" y="484997"/>
-                </a:lnTo>
-                <a:close/>
-                <a:lnTo>
-                  <a:pt x="360255" y="481545"/>
-                </a:lnTo>
-                <a:close/>
-                <a:lnTo>
-                  <a:pt x="366066" y="478048"/>
-                </a:lnTo>
-                <a:close/>
-                <a:lnTo>
-                  <a:pt x="371876" y="474573"/>
-                </a:lnTo>
-                <a:close/>
-                <a:lnTo>
-                  <a:pt x="377687" y="471044"/>
-                </a:lnTo>
-                <a:close/>
-                <a:lnTo>
-                  <a:pt x="383498" y="467572"/>
-                </a:lnTo>
-                <a:close/>
-                <a:lnTo>
-                  <a:pt x="389308" y="464382"/>
-                </a:lnTo>
-                <a:close/>
-                <a:lnTo>
-                  <a:pt x="395119" y="461098"/>
-                </a:lnTo>
-                <a:close/>
-                <a:lnTo>
-                  <a:pt x="400929" y="457575"/>
-                </a:lnTo>
-                <a:close/>
-                <a:lnTo>
-                  <a:pt x="406740" y="454271"/>
-                </a:lnTo>
-                <a:close/>
-                <a:lnTo>
-                  <a:pt x="412550" y="451133"/>
-                </a:lnTo>
-                <a:close/>
-                <a:lnTo>
-                  <a:pt x="418361" y="447936"/>
-                </a:lnTo>
-                <a:close/>
-                <a:lnTo>
-                  <a:pt x="424172" y="444731"/>
-                </a:lnTo>
-                <a:close/>
-                <a:lnTo>
-                  <a:pt x="429982" y="441538"/>
-                </a:lnTo>
-                <a:close/>
-                <a:lnTo>
-                  <a:pt x="435793" y="438339"/>
-                </a:lnTo>
-                <a:close/>
-                <a:lnTo>
-                  <a:pt x="441603" y="435154"/>
-                </a:lnTo>
-                <a:close/>
-                <a:lnTo>
-                  <a:pt x="447414" y="431955"/>
-                </a:lnTo>
-                <a:close/>
-                <a:lnTo>
-                  <a:pt x="453224" y="428703"/>
-                </a:lnTo>
-                <a:close/>
-                <a:lnTo>
-                  <a:pt x="459035" y="425638"/>
-                </a:lnTo>
-                <a:close/>
-                <a:lnTo>
-                  <a:pt x="464845" y="422768"/>
-                </a:lnTo>
-                <a:close/>
-                <a:lnTo>
-                  <a:pt x="470656" y="419637"/>
-                </a:lnTo>
-                <a:close/>
-                <a:lnTo>
-                  <a:pt x="476467" y="416450"/>
-                </a:lnTo>
-                <a:close/>
-                <a:lnTo>
-                  <a:pt x="482277" y="413545"/>
-                </a:lnTo>
-                <a:close/>
-                <a:lnTo>
-                  <a:pt x="488088" y="410680"/>
-                </a:lnTo>
-                <a:close/>
-                <a:lnTo>
-                  <a:pt x="493898" y="407761"/>
-                </a:lnTo>
-                <a:close/>
-                <a:lnTo>
-                  <a:pt x="499709" y="404855"/>
-                </a:lnTo>
-                <a:close/>
-                <a:lnTo>
-                  <a:pt x="505519" y="401950"/>
-                </a:lnTo>
-                <a:close/>
-                <a:lnTo>
-                  <a:pt x="511330" y="399044"/>
-                </a:lnTo>
-                <a:close/>
-                <a:lnTo>
-                  <a:pt x="517141" y="396154"/>
-                </a:lnTo>
-                <a:close/>
-                <a:lnTo>
-                  <a:pt x="522951" y="393216"/>
-                </a:lnTo>
-                <a:close/>
-                <a:lnTo>
-                  <a:pt x="528762" y="390292"/>
-                </a:lnTo>
-                <a:close/>
-                <a:lnTo>
-                  <a:pt x="534572" y="387641"/>
-                </a:lnTo>
-                <a:close/>
-                <a:lnTo>
-                  <a:pt x="540383" y="384994"/>
-                </a:lnTo>
-                <a:close/>
-                <a:lnTo>
-                  <a:pt x="546193" y="382065"/>
-                </a:lnTo>
-                <a:close/>
-                <a:lnTo>
-                  <a:pt x="552004" y="379272"/>
-                </a:lnTo>
-                <a:close/>
-                <a:lnTo>
-                  <a:pt x="557815" y="376720"/>
-                </a:lnTo>
-                <a:close/>
-                <a:lnTo>
-                  <a:pt x="563625" y="374165"/>
-                </a:lnTo>
-                <a:close/>
-                <a:lnTo>
-                  <a:pt x="569436" y="371374"/>
-                </a:lnTo>
-                <a:close/>
-                <a:lnTo>
-                  <a:pt x="575246" y="368446"/>
-                </a:lnTo>
-                <a:close/>
-                <a:lnTo>
-                  <a:pt x="581057" y="365773"/>
-                </a:lnTo>
-                <a:close/>
-                <a:lnTo>
-                  <a:pt x="586867" y="363181"/>
-                </a:lnTo>
-                <a:close/>
-                <a:lnTo>
-                  <a:pt x="592678" y="360541"/>
-                </a:lnTo>
-                <a:close/>
-                <a:lnTo>
-                  <a:pt x="598489" y="358154"/>
-                </a:lnTo>
-                <a:close/>
-                <a:lnTo>
-                  <a:pt x="604299" y="355825"/>
-                </a:lnTo>
-                <a:close/>
-                <a:lnTo>
-                  <a:pt x="610110" y="353228"/>
-                </a:lnTo>
-                <a:close/>
-                <a:lnTo>
-                  <a:pt x="615920" y="350520"/>
-                </a:lnTo>
-                <a:close/>
-                <a:lnTo>
-                  <a:pt x="621731" y="347955"/>
-                </a:lnTo>
-                <a:close/>
-                <a:lnTo>
-                  <a:pt x="627541" y="345656"/>
-                </a:lnTo>
-                <a:close/>
-                <a:lnTo>
-                  <a:pt x="633352" y="343202"/>
-                </a:lnTo>
-                <a:close/>
-                <a:lnTo>
-                  <a:pt x="639163" y="340553"/>
-                </a:lnTo>
-                <a:close/>
-                <a:lnTo>
-                  <a:pt x="644973" y="338200"/>
-                </a:lnTo>
-                <a:close/>
-                <a:lnTo>
-                  <a:pt x="650784" y="335824"/>
-                </a:lnTo>
-                <a:close/>
-                <a:lnTo>
-                  <a:pt x="656594" y="333175"/>
-                </a:lnTo>
-                <a:close/>
-                <a:lnTo>
-                  <a:pt x="662405" y="330707"/>
-                </a:lnTo>
-                <a:close/>
-                <a:lnTo>
-                  <a:pt x="668215" y="328458"/>
-                </a:lnTo>
-                <a:close/>
-                <a:lnTo>
-                  <a:pt x="674026" y="326176"/>
-                </a:lnTo>
-                <a:close/>
-                <a:lnTo>
-                  <a:pt x="679837" y="323646"/>
-                </a:lnTo>
-                <a:close/>
-                <a:lnTo>
-                  <a:pt x="685647" y="321021"/>
-                </a:lnTo>
-                <a:close/>
-                <a:lnTo>
-                  <a:pt x="691458" y="318655"/>
-                </a:lnTo>
-                <a:close/>
-                <a:lnTo>
-                  <a:pt x="697268" y="316379"/>
-                </a:lnTo>
-                <a:close/>
-                <a:lnTo>
-                  <a:pt x="703079" y="314046"/>
-                </a:lnTo>
-                <a:close/>
-                <a:lnTo>
-                  <a:pt x="708889" y="311716"/>
-                </a:lnTo>
-                <a:close/>
-                <a:lnTo>
-                  <a:pt x="714700" y="309395"/>
-                </a:lnTo>
-                <a:close/>
-                <a:lnTo>
-                  <a:pt x="720511" y="307071"/>
-                </a:lnTo>
-                <a:close/>
-                <a:lnTo>
-                  <a:pt x="726321" y="304747"/>
-                </a:lnTo>
-                <a:close/>
-                <a:lnTo>
-                  <a:pt x="732132" y="302422"/>
-                </a:lnTo>
-                <a:close/>
-                <a:lnTo>
-                  <a:pt x="737942" y="300094"/>
-                </a:lnTo>
-                <a:close/>
-                <a:lnTo>
-                  <a:pt x="743753" y="297782"/>
-                </a:lnTo>
-                <a:close/>
-                <a:lnTo>
-                  <a:pt x="749563" y="295451"/>
-                </a:lnTo>
-                <a:close/>
-                <a:lnTo>
-                  <a:pt x="755374" y="293077"/>
-                </a:lnTo>
-                <a:close/>
-                <a:lnTo>
-                  <a:pt x="761184" y="290895"/>
-                </a:lnTo>
-                <a:close/>
-                <a:lnTo>
-                  <a:pt x="766995" y="288890"/>
-                </a:lnTo>
-                <a:close/>
-                <a:lnTo>
-                  <a:pt x="772806" y="286668"/>
-                </a:lnTo>
-                <a:close/>
-                <a:lnTo>
-                  <a:pt x="778616" y="284261"/>
-                </a:lnTo>
-                <a:close/>
-                <a:lnTo>
-                  <a:pt x="784427" y="281911"/>
-                </a:lnTo>
-                <a:close/>
-                <a:lnTo>
-                  <a:pt x="790237" y="279838"/>
-                </a:lnTo>
-                <a:close/>
-                <a:lnTo>
-                  <a:pt x="796048" y="277779"/>
-                </a:lnTo>
-                <a:close/>
-                <a:lnTo>
-                  <a:pt x="801858" y="275424"/>
-                </a:lnTo>
-                <a:close/>
-                <a:lnTo>
-                  <a:pt x="807669" y="273255"/>
-                </a:lnTo>
-                <a:close/>
-                <a:lnTo>
-                  <a:pt x="813480" y="271245"/>
-                </a:lnTo>
-                <a:close/>
-                <a:lnTo>
-                  <a:pt x="819290" y="268920"/>
-                </a:lnTo>
-                <a:close/>
-                <a:lnTo>
-                  <a:pt x="825101" y="266689"/>
-                </a:lnTo>
-                <a:close/>
-                <a:lnTo>
-                  <a:pt x="830911" y="264696"/>
-                </a:lnTo>
-                <a:close/>
-                <a:lnTo>
-                  <a:pt x="836722" y="262431"/>
-                </a:lnTo>
-                <a:close/>
-                <a:lnTo>
-                  <a:pt x="842532" y="260117"/>
-                </a:lnTo>
-                <a:close/>
-                <a:lnTo>
-                  <a:pt x="848343" y="258086"/>
-                </a:lnTo>
-                <a:close/>
-                <a:lnTo>
-                  <a:pt x="854154" y="256141"/>
-                </a:lnTo>
-                <a:close/>
-                <a:lnTo>
-                  <a:pt x="859964" y="254038"/>
-                </a:lnTo>
-                <a:close/>
-                <a:lnTo>
-                  <a:pt x="865775" y="251692"/>
-                </a:lnTo>
-                <a:close/>
-                <a:lnTo>
-                  <a:pt x="871585" y="249482"/>
-                </a:lnTo>
-                <a:close/>
-                <a:lnTo>
-                  <a:pt x="877396" y="247491"/>
-                </a:lnTo>
-                <a:close/>
-                <a:lnTo>
-                  <a:pt x="883206" y="245472"/>
-                </a:lnTo>
-                <a:close/>
-                <a:lnTo>
-                  <a:pt x="889017" y="243425"/>
-                </a:lnTo>
-                <a:close/>
-                <a:lnTo>
-                  <a:pt x="894828" y="241393"/>
-                </a:lnTo>
-                <a:close/>
-                <a:lnTo>
-                  <a:pt x="900638" y="239361"/>
-                </a:lnTo>
-                <a:close/>
-                <a:lnTo>
-                  <a:pt x="906449" y="237327"/>
-                </a:lnTo>
-                <a:close/>
-                <a:lnTo>
-                  <a:pt x="912259" y="235293"/>
-                </a:lnTo>
-                <a:close/>
-                <a:lnTo>
-                  <a:pt x="918070" y="233259"/>
-                </a:lnTo>
-                <a:close/>
-                <a:lnTo>
-                  <a:pt x="923880" y="231226"/>
-                </a:lnTo>
-                <a:close/>
-                <a:lnTo>
-                  <a:pt x="929691" y="229193"/>
-                </a:lnTo>
-                <a:close/>
-                <a:lnTo>
-                  <a:pt x="935502" y="227156"/>
-                </a:lnTo>
-                <a:close/>
-                <a:lnTo>
-                  <a:pt x="941312" y="225124"/>
-                </a:lnTo>
-                <a:close/>
-                <a:lnTo>
-                  <a:pt x="947123" y="223104"/>
-                </a:lnTo>
-                <a:close/>
-                <a:lnTo>
-                  <a:pt x="952933" y="221037"/>
-                </a:lnTo>
-                <a:close/>
-                <a:lnTo>
-                  <a:pt x="958744" y="218991"/>
-                </a:lnTo>
-                <a:close/>
-                <a:lnTo>
-                  <a:pt x="964554" y="217207"/>
-                </a:lnTo>
-                <a:close/>
-                <a:lnTo>
-                  <a:pt x="970365" y="215444"/>
-                </a:lnTo>
-                <a:close/>
-                <a:lnTo>
-                  <a:pt x="976176" y="213416"/>
-                </a:lnTo>
-                <a:close/>
-                <a:lnTo>
-                  <a:pt x="981986" y="211291"/>
-                </a:lnTo>
-                <a:close/>
-                <a:lnTo>
-                  <a:pt x="987797" y="209321"/>
-                </a:lnTo>
-                <a:close/>
-                <a:lnTo>
-                  <a:pt x="993607" y="207610"/>
-                </a:lnTo>
-                <a:close/>
-                <a:lnTo>
-                  <a:pt x="999418" y="205717"/>
-                </a:lnTo>
-                <a:close/>
-                <a:lnTo>
-                  <a:pt x="1005228" y="203655"/>
-                </a:lnTo>
-                <a:close/>
-                <a:lnTo>
-                  <a:pt x="1011039" y="201903"/>
-                </a:lnTo>
-                <a:close/>
-                <a:lnTo>
-                  <a:pt x="1016849" y="200080"/>
-                </a:lnTo>
-                <a:close/>
-                <a:lnTo>
-                  <a:pt x="1022660" y="198003"/>
-                </a:lnTo>
-                <a:close/>
-                <a:lnTo>
-                  <a:pt x="1028471" y="196205"/>
-                </a:lnTo>
-                <a:close/>
-                <a:lnTo>
-                  <a:pt x="1034281" y="194432"/>
-                </a:lnTo>
-                <a:close/>
-                <a:lnTo>
-                  <a:pt x="1040092" y="192360"/>
-                </a:lnTo>
-                <a:close/>
-                <a:lnTo>
-                  <a:pt x="1045902" y="190505"/>
-                </a:lnTo>
-                <a:close/>
-                <a:lnTo>
-                  <a:pt x="1051713" y="188774"/>
-                </a:lnTo>
-                <a:close/>
-                <a:lnTo>
-                  <a:pt x="1057523" y="186738"/>
-                </a:lnTo>
-                <a:close/>
-                <a:lnTo>
-                  <a:pt x="1063334" y="184776"/>
-                </a:lnTo>
-                <a:close/>
-                <a:lnTo>
-                  <a:pt x="1069145" y="183079"/>
-                </a:lnTo>
-                <a:close/>
-                <a:lnTo>
-                  <a:pt x="1074955" y="181409"/>
-                </a:lnTo>
-                <a:close/>
-                <a:lnTo>
-                  <a:pt x="1080766" y="179529"/>
-                </a:lnTo>
-                <a:close/>
-                <a:lnTo>
-                  <a:pt x="1086576" y="177466"/>
-                </a:lnTo>
-                <a:close/>
-                <a:lnTo>
-                  <a:pt x="1092387" y="175615"/>
-                </a:lnTo>
-                <a:close/>
-                <a:lnTo>
-                  <a:pt x="1098197" y="173924"/>
-                </a:lnTo>
-                <a:close/>
-                <a:lnTo>
-                  <a:pt x="1104008" y="172181"/>
-                </a:lnTo>
-                <a:close/>
-                <a:lnTo>
-                  <a:pt x="1109819" y="170431"/>
-                </a:lnTo>
-                <a:close/>
-                <a:lnTo>
-                  <a:pt x="1115629" y="168689"/>
-                </a:lnTo>
-                <a:close/>
-                <a:lnTo>
-                  <a:pt x="1121440" y="166933"/>
-                </a:lnTo>
-                <a:close/>
-                <a:lnTo>
-                  <a:pt x="1127250" y="165229"/>
-                </a:lnTo>
-                <a:close/>
-                <a:lnTo>
-                  <a:pt x="1133061" y="163481"/>
-                </a:lnTo>
-                <a:close/>
-                <a:lnTo>
-                  <a:pt x="1138871" y="161461"/>
-                </a:lnTo>
-                <a:close/>
-                <a:lnTo>
-                  <a:pt x="1144682" y="159478"/>
-                </a:lnTo>
-                <a:close/>
-                <a:lnTo>
-                  <a:pt x="1150493" y="157755"/>
-                </a:lnTo>
-                <a:close/>
-                <a:lnTo>
-                  <a:pt x="1156303" y="156042"/>
-                </a:lnTo>
-                <a:close/>
-                <a:lnTo>
-                  <a:pt x="1162114" y="154284"/>
-                </a:lnTo>
-                <a:close/>
-                <a:lnTo>
-                  <a:pt x="1167924" y="152541"/>
-                </a:lnTo>
-                <a:close/>
-                <a:lnTo>
-                  <a:pt x="1173735" y="150801"/>
-                </a:lnTo>
-                <a:close/>
-                <a:lnTo>
-                  <a:pt x="1179545" y="149057"/>
-                </a:lnTo>
-                <a:close/>
-                <a:lnTo>
-                  <a:pt x="1185356" y="147313"/>
-                </a:lnTo>
-                <a:close/>
-                <a:lnTo>
-                  <a:pt x="1191167" y="145570"/>
-                </a:lnTo>
-                <a:close/>
-                <a:lnTo>
-                  <a:pt x="1196977" y="143827"/>
-                </a:lnTo>
-                <a:close/>
-                <a:lnTo>
-                  <a:pt x="1202788" y="142084"/>
-                </a:lnTo>
-                <a:close/>
-                <a:lnTo>
-                  <a:pt x="1208598" y="140341"/>
-                </a:lnTo>
-                <a:close/>
-                <a:lnTo>
-                  <a:pt x="1214409" y="138598"/>
-                </a:lnTo>
-                <a:close/>
-                <a:lnTo>
-                  <a:pt x="1220219" y="136851"/>
-                </a:lnTo>
-                <a:close/>
-                <a:lnTo>
-                  <a:pt x="1226030" y="135113"/>
-                </a:lnTo>
-                <a:close/>
-                <a:lnTo>
-                  <a:pt x="1231841" y="133381"/>
-                </a:lnTo>
-                <a:close/>
-                <a:lnTo>
-                  <a:pt x="1237651" y="131590"/>
-                </a:lnTo>
-                <a:close/>
-                <a:lnTo>
-                  <a:pt x="1243462" y="129878"/>
-                </a:lnTo>
-                <a:close/>
-                <a:lnTo>
-                  <a:pt x="1249272" y="128433"/>
-                </a:lnTo>
-                <a:close/>
-                <a:lnTo>
-                  <a:pt x="1255083" y="126896"/>
-                </a:lnTo>
-                <a:close/>
-                <a:lnTo>
-                  <a:pt x="1260893" y="125117"/>
-                </a:lnTo>
-                <a:close/>
-                <a:lnTo>
-                  <a:pt x="1266704" y="123367"/>
-                </a:lnTo>
-                <a:close/>
-                <a:lnTo>
-                  <a:pt x="1272515" y="121610"/>
-                </a:lnTo>
-                <a:close/>
-                <a:lnTo>
-                  <a:pt x="1278325" y="119842"/>
-                </a:lnTo>
-                <a:close/>
-                <a:lnTo>
-                  <a:pt x="1284136" y="118326"/>
-                </a:lnTo>
-                <a:close/>
-                <a:lnTo>
-                  <a:pt x="1289946" y="116870"/>
-                </a:lnTo>
-                <a:close/>
-                <a:lnTo>
-                  <a:pt x="1295757" y="115149"/>
-                </a:lnTo>
-                <a:close/>
-                <a:lnTo>
-                  <a:pt x="1301567" y="113318"/>
-                </a:lnTo>
-                <a:close/>
-                <a:lnTo>
-                  <a:pt x="1307378" y="111614"/>
-                </a:lnTo>
-                <a:close/>
-                <a:lnTo>
-                  <a:pt x="1313188" y="110166"/>
-                </a:lnTo>
-                <a:close/>
-                <a:lnTo>
-                  <a:pt x="1318999" y="108642"/>
-                </a:lnTo>
-                <a:close/>
-                <a:lnTo>
-                  <a:pt x="1324810" y="106867"/>
-                </a:lnTo>
-                <a:close/>
-                <a:lnTo>
-                  <a:pt x="1330620" y="105043"/>
-                </a:lnTo>
-                <a:close/>
-                <a:lnTo>
-                  <a:pt x="1336431" y="103424"/>
-                </a:lnTo>
-                <a:close/>
-                <a:lnTo>
-                  <a:pt x="1342241" y="102010"/>
-                </a:lnTo>
-                <a:close/>
-                <a:lnTo>
-                  <a:pt x="1348052" y="100337"/>
-                </a:lnTo>
-                <a:close/>
-                <a:lnTo>
-                  <a:pt x="1353862" y="98607"/>
-                </a:lnTo>
-                <a:close/>
-                <a:lnTo>
-                  <a:pt x="1359673" y="97185"/>
-                </a:lnTo>
-                <a:close/>
-                <a:lnTo>
-                  <a:pt x="1365484" y="95578"/>
-                </a:lnTo>
-                <a:close/>
-                <a:lnTo>
-                  <a:pt x="1371294" y="93811"/>
-                </a:lnTo>
-                <a:close/>
-                <a:lnTo>
-                  <a:pt x="1377105" y="92361"/>
-                </a:lnTo>
-                <a:close/>
-                <a:lnTo>
-                  <a:pt x="1382915" y="90811"/>
-                </a:lnTo>
-                <a:close/>
-                <a:lnTo>
-                  <a:pt x="1388726" y="89027"/>
-                </a:lnTo>
-                <a:close/>
-                <a:lnTo>
-                  <a:pt x="1394536" y="87536"/>
-                </a:lnTo>
-                <a:close/>
-                <a:lnTo>
-                  <a:pt x="1400347" y="86037"/>
-                </a:lnTo>
-                <a:close/>
-                <a:lnTo>
-                  <a:pt x="1406158" y="84252"/>
-                </a:lnTo>
-                <a:close/>
-                <a:lnTo>
-                  <a:pt x="1411968" y="82706"/>
-                </a:lnTo>
-                <a:close/>
-                <a:lnTo>
-                  <a:pt x="1417779" y="81255"/>
-                </a:lnTo>
-                <a:close/>
-                <a:lnTo>
-                  <a:pt x="1423589" y="79500"/>
-                </a:lnTo>
-                <a:close/>
-                <a:lnTo>
-                  <a:pt x="1429400" y="77844"/>
-                </a:lnTo>
-                <a:close/>
-                <a:lnTo>
-                  <a:pt x="1435210" y="76445"/>
-                </a:lnTo>
-                <a:close/>
-                <a:lnTo>
-                  <a:pt x="1441021" y="75059"/>
-                </a:lnTo>
-                <a:close/>
-                <a:lnTo>
-                  <a:pt x="1446832" y="73457"/>
-                </a:lnTo>
-                <a:close/>
-                <a:lnTo>
-                  <a:pt x="1452642" y="71686"/>
-                </a:lnTo>
-                <a:close/>
-                <a:lnTo>
-                  <a:pt x="1458453" y="70127"/>
-                </a:lnTo>
-                <a:close/>
-                <a:lnTo>
-                  <a:pt x="1464263" y="68752"/>
-                </a:lnTo>
-                <a:close/>
-                <a:lnTo>
-                  <a:pt x="1470074" y="67328"/>
-                </a:lnTo>
-                <a:close/>
-                <a:lnTo>
-                  <a:pt x="1475884" y="65645"/>
-                </a:lnTo>
-                <a:close/>
-                <a:lnTo>
-                  <a:pt x="1481695" y="63906"/>
-                </a:lnTo>
-                <a:close/>
-                <a:lnTo>
-                  <a:pt x="1487506" y="62436"/>
-                </a:lnTo>
-                <a:close/>
-                <a:lnTo>
-                  <a:pt x="1493316" y="61016"/>
-                </a:lnTo>
-                <a:close/>
-                <a:lnTo>
-                  <a:pt x="1499127" y="59556"/>
-                </a:lnTo>
-                <a:close/>
-                <a:lnTo>
-                  <a:pt x="1504937" y="58152"/>
-                </a:lnTo>
-                <a:close/>
-                <a:lnTo>
-                  <a:pt x="1510748" y="56571"/>
-                </a:lnTo>
-                <a:close/>
-                <a:lnTo>
-                  <a:pt x="1516558" y="54796"/>
-                </a:lnTo>
-                <a:close/>
-                <a:lnTo>
-                  <a:pt x="1522369" y="53243"/>
-                </a:lnTo>
-                <a:close/>
-                <a:lnTo>
-                  <a:pt x="1528180" y="51847"/>
-                </a:lnTo>
-                <a:close/>
-                <a:lnTo>
-                  <a:pt x="1533990" y="50395"/>
-                </a:lnTo>
-                <a:close/>
-                <a:lnTo>
-                  <a:pt x="1539801" y="48919"/>
-                </a:lnTo>
-                <a:close/>
-                <a:lnTo>
-                  <a:pt x="1545611" y="47483"/>
-                </a:lnTo>
-                <a:close/>
-                <a:lnTo>
-                  <a:pt x="1551422" y="46077"/>
-                </a:lnTo>
-                <a:close/>
-                <a:lnTo>
-                  <a:pt x="1557232" y="44451"/>
-                </a:lnTo>
-                <a:close/>
-                <a:lnTo>
-                  <a:pt x="1563043" y="42685"/>
-                </a:lnTo>
-                <a:close/>
-                <a:lnTo>
-                  <a:pt x="1568854" y="41171"/>
-                </a:lnTo>
-                <a:close/>
-                <a:lnTo>
-                  <a:pt x="1574664" y="39771"/>
-                </a:lnTo>
-                <a:close/>
-                <a:lnTo>
-                  <a:pt x="1580475" y="38311"/>
-                </a:lnTo>
-                <a:close/>
-                <a:lnTo>
-                  <a:pt x="1586285" y="36851"/>
-                </a:lnTo>
-                <a:close/>
-                <a:lnTo>
-                  <a:pt x="1592096" y="35402"/>
-                </a:lnTo>
-                <a:close/>
-                <a:lnTo>
-                  <a:pt x="1597906" y="33950"/>
-                </a:lnTo>
-                <a:close/>
-                <a:lnTo>
-                  <a:pt x="1603717" y="32496"/>
-                </a:lnTo>
-                <a:close/>
-                <a:lnTo>
-                  <a:pt x="1609527" y="31044"/>
-                </a:lnTo>
-                <a:close/>
-                <a:lnTo>
-                  <a:pt x="1615338" y="29591"/>
-                </a:lnTo>
-                <a:close/>
-                <a:lnTo>
-                  <a:pt x="1621149" y="28139"/>
-                </a:lnTo>
-                <a:close/>
-                <a:lnTo>
-                  <a:pt x="1626959" y="26686"/>
-                </a:lnTo>
-                <a:close/>
-                <a:lnTo>
-                  <a:pt x="1632770" y="25233"/>
-                </a:lnTo>
-                <a:close/>
-                <a:lnTo>
-                  <a:pt x="1638580" y="23781"/>
-                </a:lnTo>
-                <a:close/>
-                <a:lnTo>
-                  <a:pt x="1644391" y="22328"/>
-                </a:lnTo>
-                <a:close/>
-                <a:lnTo>
-                  <a:pt x="1650201" y="20876"/>
-                </a:lnTo>
-                <a:close/>
-                <a:lnTo>
-                  <a:pt x="1656012" y="19422"/>
-                </a:lnTo>
-                <a:close/>
-                <a:lnTo>
-                  <a:pt x="1661823" y="17967"/>
-                </a:lnTo>
-                <a:close/>
-                <a:lnTo>
-                  <a:pt x="1667633" y="16527"/>
-                </a:lnTo>
-                <a:close/>
-                <a:lnTo>
-                  <a:pt x="1673444" y="15064"/>
-                </a:lnTo>
-                <a:close/>
-                <a:lnTo>
-                  <a:pt x="1679254" y="13563"/>
-                </a:lnTo>
-                <a:close/>
-                <a:lnTo>
-                  <a:pt x="1685065" y="12273"/>
-                </a:lnTo>
-                <a:close/>
-                <a:lnTo>
-                  <a:pt x="1690875" y="11137"/>
-                </a:lnTo>
-                <a:close/>
-                <a:lnTo>
-                  <a:pt x="1696686" y="9755"/>
-                </a:lnTo>
-                <a:close/>
-                <a:lnTo>
-                  <a:pt x="1702497" y="8248"/>
-                </a:lnTo>
-                <a:close/>
-                <a:lnTo>
-                  <a:pt x="1708307" y="6800"/>
-                </a:lnTo>
-                <a:close/>
-                <a:lnTo>
-                  <a:pt x="1714118" y="5362"/>
-                </a:lnTo>
-                <a:close/>
-                <a:lnTo>
-                  <a:pt x="1719928" y="3897"/>
-                </a:lnTo>
-                <a:close/>
-                <a:lnTo>
-                  <a:pt x="1725739" y="2427"/>
-                </a:lnTo>
-                <a:close/>
-                <a:lnTo>
-                  <a:pt x="1731549" y="1080"/>
-                </a:lnTo>
-                <a:close/>
-                <a:lnTo>
-                  <a:pt x="1737360" y="0"/>
+                  <a:pt x="5406" y="1053775"/>
+                </a:lnTo>
+                <a:close/>
+                <a:lnTo>
+                  <a:pt x="10376" y="1036875"/>
+                </a:lnTo>
+                <a:close/>
+                <a:lnTo>
+                  <a:pt x="14949" y="1021353"/>
+                </a:lnTo>
+                <a:close/>
+                <a:lnTo>
+                  <a:pt x="19163" y="1007130"/>
+                </a:lnTo>
+                <a:close/>
+                <a:lnTo>
+                  <a:pt x="23055" y="994125"/>
+                </a:lnTo>
+                <a:close/>
+                <a:lnTo>
+                  <a:pt x="26663" y="982260"/>
+                </a:lnTo>
+                <a:close/>
+                <a:lnTo>
+                  <a:pt x="30026" y="971454"/>
+                </a:lnTo>
+                <a:close/>
+                <a:lnTo>
+                  <a:pt x="33181" y="961629"/>
+                </a:lnTo>
+                <a:close/>
+                <a:lnTo>
+                  <a:pt x="36167" y="952703"/>
+                </a:lnTo>
+                <a:close/>
+                <a:lnTo>
+                  <a:pt x="39022" y="944599"/>
+                </a:lnTo>
+                <a:close/>
+                <a:lnTo>
+                  <a:pt x="41783" y="937235"/>
+                </a:lnTo>
+                <a:close/>
+                <a:lnTo>
+                  <a:pt x="44488" y="930532"/>
+                </a:lnTo>
+                <a:close/>
+                <a:lnTo>
+                  <a:pt x="47176" y="924410"/>
+                </a:lnTo>
+                <a:close/>
+                <a:lnTo>
+                  <a:pt x="49885" y="918791"/>
+                </a:lnTo>
+                <a:close/>
+                <a:lnTo>
+                  <a:pt x="52652" y="913593"/>
+                </a:lnTo>
+                <a:close/>
+                <a:lnTo>
+                  <a:pt x="55516" y="908738"/>
+                </a:lnTo>
+                <a:close/>
+                <a:lnTo>
+                  <a:pt x="58515" y="904146"/>
+                </a:lnTo>
+                <a:close/>
+                <a:lnTo>
+                  <a:pt x="61686" y="899737"/>
+                </a:lnTo>
+                <a:close/>
+                <a:lnTo>
+                  <a:pt x="65068" y="895431"/>
+                </a:lnTo>
+                <a:close/>
+                <a:lnTo>
+                  <a:pt x="68698" y="891149"/>
+                </a:lnTo>
+                <a:close/>
+                <a:lnTo>
+                  <a:pt x="72616" y="886810"/>
+                </a:lnTo>
+                <a:close/>
+                <a:lnTo>
+                  <a:pt x="76857" y="882336"/>
+                </a:lnTo>
+                <a:close/>
+                <a:lnTo>
+                  <a:pt x="81462" y="877647"/>
+                </a:lnTo>
+                <a:close/>
+                <a:lnTo>
+                  <a:pt x="86467" y="872662"/>
+                </a:lnTo>
+                <a:close/>
+                <a:lnTo>
+                  <a:pt x="91911" y="867303"/>
+                </a:lnTo>
+                <a:close/>
+                <a:lnTo>
+                  <a:pt x="97814" y="861518"/>
+                </a:lnTo>
+                <a:close/>
+                <a:lnTo>
+                  <a:pt x="104138" y="855350"/>
+                </a:lnTo>
+                <a:close/>
+                <a:lnTo>
+                  <a:pt x="110835" y="848858"/>
+                </a:lnTo>
+                <a:close/>
+                <a:lnTo>
+                  <a:pt x="117857" y="842102"/>
+                </a:lnTo>
+                <a:close/>
+                <a:lnTo>
+                  <a:pt x="125156" y="835140"/>
+                </a:lnTo>
+                <a:close/>
+                <a:lnTo>
+                  <a:pt x="132683" y="828032"/>
+                </a:lnTo>
+                <a:close/>
+                <a:lnTo>
+                  <a:pt x="140391" y="820837"/>
+                </a:lnTo>
+                <a:close/>
+                <a:lnTo>
+                  <a:pt x="148231" y="813615"/>
+                </a:lnTo>
+                <a:close/>
+                <a:lnTo>
+                  <a:pt x="156154" y="806425"/>
+                </a:lnTo>
+                <a:close/>
+                <a:lnTo>
+                  <a:pt x="164114" y="799327"/>
+                </a:lnTo>
+                <a:close/>
+                <a:lnTo>
+                  <a:pt x="172061" y="792380"/>
+                </a:lnTo>
+                <a:close/>
+                <a:lnTo>
+                  <a:pt x="179948" y="785644"/>
+                </a:lnTo>
+                <a:close/>
+                <a:lnTo>
+                  <a:pt x="187728" y="779173"/>
+                </a:lnTo>
+                <a:close/>
+                <a:lnTo>
+                  <a:pt x="195390" y="772981"/>
+                </a:lnTo>
+                <a:close/>
+                <a:lnTo>
+                  <a:pt x="202946" y="767045"/>
+                </a:lnTo>
+                <a:close/>
+                <a:lnTo>
+                  <a:pt x="210410" y="761344"/>
+                </a:lnTo>
+                <a:close/>
+                <a:lnTo>
+                  <a:pt x="217793" y="755857"/>
+                </a:lnTo>
+                <a:close/>
+                <a:lnTo>
+                  <a:pt x="225109" y="750562"/>
+                </a:lnTo>
+                <a:close/>
+                <a:lnTo>
+                  <a:pt x="232370" y="745437"/>
+                </a:lnTo>
+                <a:close/>
+                <a:lnTo>
+                  <a:pt x="239590" y="740460"/>
+                </a:lnTo>
+                <a:close/>
+                <a:lnTo>
+                  <a:pt x="246782" y="735610"/>
+                </a:lnTo>
+                <a:close/>
+                <a:lnTo>
+                  <a:pt x="253959" y="730865"/>
+                </a:lnTo>
+                <a:close/>
+                <a:lnTo>
+                  <a:pt x="261132" y="726204"/>
+                </a:lnTo>
+                <a:close/>
+                <a:lnTo>
+                  <a:pt x="268316" y="721605"/>
+                </a:lnTo>
+                <a:close/>
+                <a:lnTo>
+                  <a:pt x="275523" y="717046"/>
+                </a:lnTo>
+                <a:close/>
+                <a:lnTo>
+                  <a:pt x="282762" y="712512"/>
+                </a:lnTo>
+                <a:close/>
+                <a:lnTo>
+                  <a:pt x="290031" y="708002"/>
+                </a:lnTo>
+                <a:close/>
+                <a:lnTo>
+                  <a:pt x="297326" y="703517"/>
+                </a:lnTo>
+                <a:close/>
+                <a:lnTo>
+                  <a:pt x="304645" y="699061"/>
+                </a:lnTo>
+                <a:close/>
+                <a:lnTo>
+                  <a:pt x="311983" y="694633"/>
+                </a:lnTo>
+                <a:close/>
+                <a:lnTo>
+                  <a:pt x="319337" y="690237"/>
+                </a:lnTo>
+                <a:close/>
+                <a:lnTo>
+                  <a:pt x="326704" y="685873"/>
+                </a:lnTo>
+                <a:close/>
+                <a:lnTo>
+                  <a:pt x="334080" y="681544"/>
+                </a:lnTo>
+                <a:close/>
+                <a:lnTo>
+                  <a:pt x="341462" y="677251"/>
+                </a:lnTo>
+                <a:close/>
+                <a:lnTo>
+                  <a:pt x="348847" y="672996"/>
+                </a:lnTo>
+                <a:close/>
+                <a:lnTo>
+                  <a:pt x="356230" y="668781"/>
+                </a:lnTo>
+                <a:close/>
+                <a:lnTo>
+                  <a:pt x="363609" y="664607"/>
+                </a:lnTo>
+                <a:close/>
+                <a:lnTo>
+                  <a:pt x="370980" y="660475"/>
+                </a:lnTo>
+                <a:close/>
+                <a:lnTo>
+                  <a:pt x="378343" y="656387"/>
+                </a:lnTo>
+                <a:close/>
+                <a:lnTo>
+                  <a:pt x="385699" y="652341"/>
+                </a:lnTo>
+                <a:close/>
+                <a:lnTo>
+                  <a:pt x="393048" y="648336"/>
+                </a:lnTo>
+                <a:close/>
+                <a:lnTo>
+                  <a:pt x="400391" y="644372"/>
+                </a:lnTo>
+                <a:close/>
+                <a:lnTo>
+                  <a:pt x="407729" y="640447"/>
+                </a:lnTo>
+                <a:close/>
+                <a:lnTo>
+                  <a:pt x="415064" y="636562"/>
+                </a:lnTo>
+                <a:close/>
+                <a:lnTo>
+                  <a:pt x="422395" y="632714"/>
+                </a:lnTo>
+                <a:close/>
+                <a:lnTo>
+                  <a:pt x="429723" y="628904"/>
+                </a:lnTo>
+                <a:close/>
+                <a:lnTo>
+                  <a:pt x="437051" y="625130"/>
+                </a:lnTo>
+                <a:close/>
+                <a:lnTo>
+                  <a:pt x="444377" y="621392"/>
+                </a:lnTo>
+                <a:close/>
+                <a:lnTo>
+                  <a:pt x="451704" y="617689"/>
+                </a:lnTo>
+                <a:close/>
+                <a:lnTo>
+                  <a:pt x="459032" y="614020"/>
+                </a:lnTo>
+                <a:close/>
+                <a:lnTo>
+                  <a:pt x="466362" y="610384"/>
+                </a:lnTo>
+                <a:close/>
+                <a:lnTo>
+                  <a:pt x="473693" y="606780"/>
+                </a:lnTo>
+                <a:close/>
+                <a:lnTo>
+                  <a:pt x="481026" y="603206"/>
+                </a:lnTo>
+                <a:close/>
+                <a:lnTo>
+                  <a:pt x="488361" y="599662"/>
+                </a:lnTo>
+                <a:close/>
+                <a:lnTo>
+                  <a:pt x="495698" y="596145"/>
+                </a:lnTo>
+                <a:close/>
+                <a:lnTo>
+                  <a:pt x="503037" y="592655"/>
+                </a:lnTo>
+                <a:close/>
+                <a:lnTo>
+                  <a:pt x="510377" y="589190"/>
+                </a:lnTo>
+                <a:close/>
+                <a:lnTo>
+                  <a:pt x="517720" y="585749"/>
+                </a:lnTo>
+                <a:close/>
+                <a:lnTo>
+                  <a:pt x="525064" y="582331"/>
+                </a:lnTo>
+                <a:close/>
+                <a:lnTo>
+                  <a:pt x="532410" y="578933"/>
+                </a:lnTo>
+                <a:close/>
+                <a:lnTo>
+                  <a:pt x="539758" y="575556"/>
+                </a:lnTo>
+                <a:close/>
+                <a:lnTo>
+                  <a:pt x="547108" y="572197"/>
+                </a:lnTo>
+                <a:close/>
+                <a:lnTo>
+                  <a:pt x="554460" y="568856"/>
+                </a:lnTo>
+                <a:close/>
+                <a:lnTo>
+                  <a:pt x="561814" y="565532"/>
+                </a:lnTo>
+                <a:close/>
+                <a:lnTo>
+                  <a:pt x="569167" y="562226"/>
+                </a:lnTo>
+                <a:close/>
+                <a:lnTo>
+                  <a:pt x="576520" y="558938"/>
+                </a:lnTo>
+                <a:close/>
+                <a:lnTo>
+                  <a:pt x="583871" y="555669"/>
+                </a:lnTo>
+                <a:close/>
+                <a:lnTo>
+                  <a:pt x="591220" y="552419"/>
+                </a:lnTo>
+                <a:close/>
+                <a:lnTo>
+                  <a:pt x="598566" y="549188"/>
+                </a:lnTo>
+                <a:close/>
+                <a:lnTo>
+                  <a:pt x="605907" y="545977"/>
+                </a:lnTo>
+                <a:close/>
+                <a:lnTo>
+                  <a:pt x="613242" y="542786"/>
+                </a:lnTo>
+                <a:close/>
+                <a:lnTo>
+                  <a:pt x="620572" y="539616"/>
+                </a:lnTo>
+                <a:close/>
+                <a:lnTo>
+                  <a:pt x="627894" y="536467"/>
+                </a:lnTo>
+                <a:close/>
+                <a:lnTo>
+                  <a:pt x="635209" y="533339"/>
+                </a:lnTo>
+                <a:close/>
+                <a:lnTo>
+                  <a:pt x="642514" y="530234"/>
+                </a:lnTo>
+                <a:close/>
+                <a:lnTo>
+                  <a:pt x="649811" y="527150"/>
+                </a:lnTo>
+                <a:close/>
+                <a:lnTo>
+                  <a:pt x="657104" y="524085"/>
+                </a:lnTo>
+                <a:close/>
+                <a:lnTo>
+                  <a:pt x="664395" y="521039"/>
+                </a:lnTo>
+                <a:close/>
+                <a:lnTo>
+                  <a:pt x="671689" y="518009"/>
+                </a:lnTo>
+                <a:close/>
+                <a:lnTo>
+                  <a:pt x="678990" y="514994"/>
+                </a:lnTo>
+                <a:close/>
+                <a:lnTo>
+                  <a:pt x="686301" y="511992"/>
+                </a:lnTo>
+                <a:close/>
+                <a:lnTo>
+                  <a:pt x="693625" y="509000"/>
+                </a:lnTo>
+                <a:close/>
+                <a:lnTo>
+                  <a:pt x="700968" y="506018"/>
+                </a:lnTo>
+                <a:close/>
+                <a:lnTo>
+                  <a:pt x="708331" y="503043"/>
+                </a:lnTo>
+                <a:close/>
+                <a:lnTo>
+                  <a:pt x="715720" y="500074"/>
+                </a:lnTo>
+                <a:close/>
+                <a:lnTo>
+                  <a:pt x="723137" y="497109"/>
+                </a:lnTo>
+                <a:close/>
+                <a:lnTo>
+                  <a:pt x="730586" y="494146"/>
+                </a:lnTo>
+                <a:close/>
+                <a:lnTo>
+                  <a:pt x="738070" y="491185"/>
+                </a:lnTo>
+                <a:close/>
+                <a:lnTo>
+                  <a:pt x="745578" y="488228"/>
+                </a:lnTo>
+                <a:close/>
+                <a:lnTo>
+                  <a:pt x="753097" y="485281"/>
+                </a:lnTo>
+                <a:close/>
+                <a:lnTo>
+                  <a:pt x="760612" y="482349"/>
+                </a:lnTo>
+                <a:close/>
+                <a:lnTo>
+                  <a:pt x="768110" y="479438"/>
+                </a:lnTo>
+                <a:close/>
+                <a:lnTo>
+                  <a:pt x="775576" y="476552"/>
+                </a:lnTo>
+                <a:close/>
+                <a:lnTo>
+                  <a:pt x="782998" y="473698"/>
+                </a:lnTo>
+                <a:close/>
+                <a:lnTo>
+                  <a:pt x="790361" y="470879"/>
+                </a:lnTo>
+                <a:close/>
+                <a:lnTo>
+                  <a:pt x="797650" y="468102"/>
+                </a:lnTo>
+                <a:close/>
+                <a:lnTo>
+                  <a:pt x="804853" y="465372"/>
+                </a:lnTo>
+                <a:close/>
+                <a:lnTo>
+                  <a:pt x="811955" y="462694"/>
+                </a:lnTo>
+                <a:close/>
+                <a:lnTo>
+                  <a:pt x="818942" y="460072"/>
+                </a:lnTo>
+                <a:close/>
+                <a:lnTo>
+                  <a:pt x="825802" y="457513"/>
+                </a:lnTo>
+                <a:close/>
+                <a:lnTo>
+                  <a:pt x="832549" y="455010"/>
+                </a:lnTo>
+                <a:close/>
+                <a:lnTo>
+                  <a:pt x="839233" y="452546"/>
+                </a:lnTo>
+                <a:close/>
+                <a:lnTo>
+                  <a:pt x="845905" y="450101"/>
+                </a:lnTo>
+                <a:close/>
+                <a:lnTo>
+                  <a:pt x="852618" y="447655"/>
+                </a:lnTo>
+                <a:close/>
+                <a:lnTo>
+                  <a:pt x="859424" y="445191"/>
+                </a:lnTo>
+                <a:close/>
+                <a:lnTo>
+                  <a:pt x="866375" y="442687"/>
+                </a:lnTo>
+                <a:close/>
+                <a:lnTo>
+                  <a:pt x="873521" y="440127"/>
+                </a:lnTo>
+                <a:close/>
+                <a:lnTo>
+                  <a:pt x="880917" y="437489"/>
+                </a:lnTo>
+                <a:close/>
+                <a:lnTo>
+                  <a:pt x="888612" y="434756"/>
+                </a:lnTo>
+                <a:close/>
+                <a:lnTo>
+                  <a:pt x="896659" y="431907"/>
+                </a:lnTo>
+                <a:close/>
+                <a:lnTo>
+                  <a:pt x="905111" y="428924"/>
+                </a:lnTo>
+                <a:close/>
+                <a:lnTo>
+                  <a:pt x="914018" y="425788"/>
+                </a:lnTo>
+                <a:close/>
+                <a:lnTo>
+                  <a:pt x="923418" y="422484"/>
+                </a:lnTo>
+                <a:close/>
+                <a:lnTo>
+                  <a:pt x="933279" y="419027"/>
+                </a:lnTo>
+                <a:close/>
+                <a:lnTo>
+                  <a:pt x="943547" y="415436"/>
+                </a:lnTo>
+                <a:close/>
+                <a:lnTo>
+                  <a:pt x="954173" y="411732"/>
+                </a:lnTo>
+                <a:close/>
+                <a:lnTo>
+                  <a:pt x="965103" y="407935"/>
+                </a:lnTo>
+                <a:close/>
+                <a:lnTo>
+                  <a:pt x="976286" y="404066"/>
+                </a:lnTo>
+                <a:close/>
+                <a:lnTo>
+                  <a:pt x="987670" y="400145"/>
+                </a:lnTo>
+                <a:close/>
+                <a:lnTo>
+                  <a:pt x="999204" y="396193"/>
+                </a:lnTo>
+                <a:close/>
+                <a:lnTo>
+                  <a:pt x="1010835" y="392229"/>
+                </a:lnTo>
+                <a:close/>
+                <a:lnTo>
+                  <a:pt x="1022511" y="388274"/>
+                </a:lnTo>
+                <a:close/>
+                <a:lnTo>
+                  <a:pt x="1034181" y="384349"/>
+                </a:lnTo>
+                <a:close/>
+                <a:lnTo>
+                  <a:pt x="1045792" y="380474"/>
+                </a:lnTo>
+                <a:close/>
+                <a:lnTo>
+                  <a:pt x="1057295" y="376669"/>
+                </a:lnTo>
+                <a:close/>
+                <a:lnTo>
+                  <a:pt x="1068670" y="372940"/>
+                </a:lnTo>
+                <a:close/>
+                <a:lnTo>
+                  <a:pt x="1079930" y="369281"/>
+                </a:lnTo>
+                <a:close/>
+                <a:lnTo>
+                  <a:pt x="1091087" y="365685"/>
+                </a:lnTo>
+                <a:close/>
+                <a:lnTo>
+                  <a:pt x="1102157" y="362145"/>
+                </a:lnTo>
+                <a:close/>
+                <a:lnTo>
+                  <a:pt x="1113152" y="358653"/>
+                </a:lnTo>
+                <a:close/>
+                <a:lnTo>
+                  <a:pt x="1124086" y="355204"/>
+                </a:lnTo>
+                <a:close/>
+                <a:lnTo>
+                  <a:pt x="1134972" y="351789"/>
+                </a:lnTo>
+                <a:close/>
+                <a:lnTo>
+                  <a:pt x="1145825" y="348402"/>
+                </a:lnTo>
+                <a:close/>
+                <a:lnTo>
+                  <a:pt x="1156658" y="345035"/>
+                </a:lnTo>
+                <a:close/>
+                <a:lnTo>
+                  <a:pt x="1167484" y="341682"/>
+                </a:lnTo>
+                <a:close/>
+                <a:lnTo>
+                  <a:pt x="1178318" y="338335"/>
+                </a:lnTo>
+                <a:close/>
+                <a:lnTo>
+                  <a:pt x="1189173" y="334988"/>
+                </a:lnTo>
+                <a:close/>
+                <a:lnTo>
+                  <a:pt x="1200059" y="331635"/>
+                </a:lnTo>
+                <a:close/>
+                <a:lnTo>
+                  <a:pt x="1210976" y="328277"/>
+                </a:lnTo>
+                <a:close/>
+                <a:lnTo>
+                  <a:pt x="1221922" y="324915"/>
+                </a:lnTo>
+                <a:close/>
+                <a:lnTo>
+                  <a:pt x="1232894" y="321553"/>
+                </a:lnTo>
+                <a:close/>
+                <a:lnTo>
+                  <a:pt x="1243888" y="318193"/>
+                </a:lnTo>
+                <a:close/>
+                <a:lnTo>
+                  <a:pt x="1254903" y="314836"/>
+                </a:lnTo>
+                <a:close/>
+                <a:lnTo>
+                  <a:pt x="1265935" y="311484"/>
+                </a:lnTo>
+                <a:close/>
+                <a:lnTo>
+                  <a:pt x="1276982" y="308141"/>
+                </a:lnTo>
+                <a:close/>
+                <a:lnTo>
+                  <a:pt x="1288041" y="304807"/>
+                </a:lnTo>
+                <a:close/>
+                <a:lnTo>
+                  <a:pt x="1299109" y="301486"/>
+                </a:lnTo>
+                <a:close/>
+                <a:lnTo>
+                  <a:pt x="1310184" y="298179"/>
+                </a:lnTo>
+                <a:close/>
+                <a:lnTo>
+                  <a:pt x="1321263" y="294888"/>
+                </a:lnTo>
+                <a:close/>
+                <a:lnTo>
+                  <a:pt x="1332343" y="291616"/>
+                </a:lnTo>
+                <a:close/>
+                <a:lnTo>
+                  <a:pt x="1343422" y="288363"/>
+                </a:lnTo>
+                <a:close/>
+                <a:lnTo>
+                  <a:pt x="1354496" y="285130"/>
+                </a:lnTo>
+                <a:close/>
+                <a:lnTo>
+                  <a:pt x="1365563" y="281916"/>
+                </a:lnTo>
+                <a:close/>
+                <a:lnTo>
+                  <a:pt x="1376620" y="278720"/>
+                </a:lnTo>
+                <a:close/>
+                <a:lnTo>
+                  <a:pt x="1387665" y="275544"/>
+                </a:lnTo>
+                <a:close/>
+                <a:lnTo>
+                  <a:pt x="1398694" y="272386"/>
+                </a:lnTo>
+                <a:close/>
+                <a:lnTo>
+                  <a:pt x="1409706" y="269247"/>
+                </a:lnTo>
+                <a:close/>
+                <a:lnTo>
+                  <a:pt x="1420697" y="266126"/>
+                </a:lnTo>
+                <a:close/>
+                <a:lnTo>
+                  <a:pt x="1431664" y="263023"/>
+                </a:lnTo>
+                <a:close/>
+                <a:lnTo>
+                  <a:pt x="1442605" y="259939"/>
+                </a:lnTo>
+                <a:close/>
+                <a:lnTo>
+                  <a:pt x="1453518" y="256872"/>
+                </a:lnTo>
+                <a:close/>
+                <a:lnTo>
+                  <a:pt x="1464398" y="253823"/>
+                </a:lnTo>
+                <a:close/>
+                <a:lnTo>
+                  <a:pt x="1475248" y="250791"/>
+                </a:lnTo>
+                <a:close/>
+                <a:lnTo>
+                  <a:pt x="1486080" y="247773"/>
+                </a:lnTo>
+                <a:close/>
+                <a:lnTo>
+                  <a:pt x="1496906" y="244767"/>
+                </a:lnTo>
+                <a:close/>
+                <a:lnTo>
+                  <a:pt x="1507741" y="241769"/>
+                </a:lnTo>
+                <a:close/>
+                <a:lnTo>
+                  <a:pt x="1518599" y="238776"/>
+                </a:lnTo>
+                <a:close/>
+                <a:lnTo>
+                  <a:pt x="1529492" y="235786"/>
+                </a:lnTo>
+                <a:close/>
+                <a:lnTo>
+                  <a:pt x="1540435" y="232795"/>
+                </a:lnTo>
+                <a:close/>
+                <a:lnTo>
+                  <a:pt x="1551441" y="229801"/>
+                </a:lnTo>
+                <a:close/>
+                <a:lnTo>
+                  <a:pt x="1562525" y="226800"/>
+                </a:lnTo>
+                <a:close/>
+                <a:lnTo>
+                  <a:pt x="1573699" y="223790"/>
+                </a:lnTo>
+                <a:close/>
+                <a:lnTo>
+                  <a:pt x="1584977" y="220767"/>
+                </a:lnTo>
+                <a:close/>
+                <a:lnTo>
+                  <a:pt x="1596373" y="217729"/>
+                </a:lnTo>
+                <a:close/>
+                <a:lnTo>
+                  <a:pt x="1607897" y="214674"/>
+                </a:lnTo>
+                <a:close/>
+                <a:lnTo>
+                  <a:pt x="1619523" y="211607"/>
+                </a:lnTo>
+                <a:close/>
+                <a:lnTo>
+                  <a:pt x="1631198" y="208541"/>
+                </a:lnTo>
+                <a:close/>
+                <a:lnTo>
+                  <a:pt x="1642871" y="205487"/>
+                </a:lnTo>
+                <a:close/>
+                <a:lnTo>
+                  <a:pt x="1654490" y="202458"/>
+                </a:lnTo>
+                <a:close/>
+                <a:lnTo>
+                  <a:pt x="1666002" y="199466"/>
+                </a:lnTo>
+                <a:close/>
+                <a:lnTo>
+                  <a:pt x="1677357" y="196523"/>
+                </a:lnTo>
+                <a:close/>
+                <a:lnTo>
+                  <a:pt x="1688502" y="193641"/>
+                </a:lnTo>
+                <a:close/>
+                <a:lnTo>
+                  <a:pt x="1699385" y="190831"/>
+                </a:lnTo>
+                <a:close/>
+                <a:lnTo>
+                  <a:pt x="1709954" y="188107"/>
+                </a:lnTo>
+                <a:close/>
+                <a:lnTo>
+                  <a:pt x="1720157" y="185479"/>
+                </a:lnTo>
+                <a:close/>
+                <a:lnTo>
+                  <a:pt x="1729943" y="182960"/>
+                </a:lnTo>
+                <a:close/>
+                <a:lnTo>
+                  <a:pt x="1739260" y="180562"/>
+                </a:lnTo>
+                <a:close/>
+                <a:lnTo>
+                  <a:pt x="1748085" y="178290"/>
+                </a:lnTo>
+                <a:close/>
+                <a:lnTo>
+                  <a:pt x="1756463" y="176133"/>
+                </a:lnTo>
+                <a:close/>
+                <a:lnTo>
+                  <a:pt x="1764446" y="174079"/>
+                </a:lnTo>
+                <a:close/>
+                <a:lnTo>
+                  <a:pt x="1772085" y="172116"/>
+                </a:lnTo>
+                <a:close/>
+                <a:lnTo>
+                  <a:pt x="1779433" y="170230"/>
+                </a:lnTo>
+                <a:close/>
+                <a:lnTo>
+                  <a:pt x="1786541" y="168410"/>
+                </a:lnTo>
+                <a:close/>
+                <a:lnTo>
+                  <a:pt x="1793463" y="166642"/>
+                </a:lnTo>
+                <a:close/>
+                <a:lnTo>
+                  <a:pt x="1800250" y="164915"/>
+                </a:lnTo>
+                <a:close/>
+                <a:lnTo>
+                  <a:pt x="1806954" y="163216"/>
+                </a:lnTo>
+                <a:close/>
+                <a:lnTo>
+                  <a:pt x="1813627" y="161532"/>
+                </a:lnTo>
+                <a:close/>
+                <a:lnTo>
+                  <a:pt x="1820322" y="159851"/>
+                </a:lnTo>
+                <a:close/>
+                <a:lnTo>
+                  <a:pt x="1827090" y="158160"/>
+                </a:lnTo>
+                <a:close/>
+                <a:lnTo>
+                  <a:pt x="1833980" y="156448"/>
+                </a:lnTo>
+                <a:close/>
+                <a:lnTo>
+                  <a:pt x="1840996" y="154712"/>
+                </a:lnTo>
+                <a:close/>
+                <a:lnTo>
+                  <a:pt x="1848126" y="152956"/>
+                </a:lnTo>
+                <a:close/>
+                <a:lnTo>
+                  <a:pt x="1855354" y="151182"/>
+                </a:lnTo>
+                <a:close/>
+                <a:lnTo>
+                  <a:pt x="1862666" y="149391"/>
+                </a:lnTo>
+                <a:close/>
+                <a:lnTo>
+                  <a:pt x="1870047" y="147587"/>
+                </a:lnTo>
+                <a:close/>
+                <a:lnTo>
+                  <a:pt x="1877482" y="145773"/>
+                </a:lnTo>
+                <a:close/>
+                <a:lnTo>
+                  <a:pt x="1884956" y="143950"/>
+                </a:lnTo>
+                <a:close/>
+                <a:lnTo>
+                  <a:pt x="1892456" y="142121"/>
+                </a:lnTo>
+                <a:close/>
+                <a:lnTo>
+                  <a:pt x="1899965" y="140289"/>
+                </a:lnTo>
+                <a:close/>
+                <a:lnTo>
+                  <a:pt x="1907471" y="138457"/>
+                </a:lnTo>
+                <a:close/>
+                <a:lnTo>
+                  <a:pt x="1914957" y="136626"/>
+                </a:lnTo>
+                <a:close/>
+                <a:lnTo>
+                  <a:pt x="1922409" y="134799"/>
+                </a:lnTo>
+                <a:close/>
+                <a:lnTo>
+                  <a:pt x="1929821" y="132978"/>
+                </a:lnTo>
+                <a:close/>
+                <a:lnTo>
+                  <a:pt x="1937196" y="131163"/>
+                </a:lnTo>
+                <a:close/>
+                <a:lnTo>
+                  <a:pt x="1944543" y="129353"/>
+                </a:lnTo>
+                <a:close/>
+                <a:lnTo>
+                  <a:pt x="1951867" y="127547"/>
+                </a:lnTo>
+                <a:close/>
+                <a:lnTo>
+                  <a:pt x="1959176" y="125746"/>
+                </a:lnTo>
+                <a:close/>
+                <a:lnTo>
+                  <a:pt x="1966475" y="123949"/>
+                </a:lnTo>
+                <a:close/>
+                <a:lnTo>
+                  <a:pt x="1973771" y="122155"/>
+                </a:lnTo>
+                <a:close/>
+                <a:lnTo>
+                  <a:pt x="1981072" y="120365"/>
+                </a:lnTo>
+                <a:close/>
+                <a:lnTo>
+                  <a:pt x="1988383" y="118577"/>
+                </a:lnTo>
+                <a:close/>
+                <a:lnTo>
+                  <a:pt x="1995711" y="116791"/>
+                </a:lnTo>
+                <a:close/>
+                <a:lnTo>
+                  <a:pt x="2003064" y="115008"/>
+                </a:lnTo>
+                <a:close/>
+                <a:lnTo>
+                  <a:pt x="2010446" y="113225"/>
+                </a:lnTo>
+                <a:close/>
+                <a:lnTo>
+                  <a:pt x="2017864" y="111444"/>
+                </a:lnTo>
+                <a:close/>
+                <a:lnTo>
+                  <a:pt x="2025310" y="109666"/>
+                </a:lnTo>
+                <a:close/>
+                <a:lnTo>
+                  <a:pt x="2032773" y="107892"/>
+                </a:lnTo>
+                <a:close/>
+                <a:lnTo>
+                  <a:pt x="2040241" y="106125"/>
+                </a:lnTo>
+                <a:close/>
+                <a:lnTo>
+                  <a:pt x="2047701" y="104366"/>
+                </a:lnTo>
+                <a:close/>
+                <a:lnTo>
+                  <a:pt x="2055143" y="102618"/>
+                </a:lnTo>
+                <a:close/>
+                <a:lnTo>
+                  <a:pt x="2062555" y="100882"/>
+                </a:lnTo>
+                <a:close/>
+                <a:lnTo>
+                  <a:pt x="2069924" y="99161"/>
+                </a:lnTo>
+                <a:close/>
+                <a:lnTo>
+                  <a:pt x="2077239" y="97455"/>
+                </a:lnTo>
+                <a:close/>
+                <a:lnTo>
+                  <a:pt x="2084489" y="95768"/>
+                </a:lnTo>
+                <a:close/>
+                <a:lnTo>
+                  <a:pt x="2091661" y="94101"/>
+                </a:lnTo>
+                <a:close/>
+                <a:lnTo>
+                  <a:pt x="2098744" y="92456"/>
+                </a:lnTo>
+                <a:close/>
+                <a:lnTo>
+                  <a:pt x="2105726" y="90835"/>
+                </a:lnTo>
+                <a:close/>
+                <a:lnTo>
+                  <a:pt x="2112617" y="89236"/>
+                </a:lnTo>
+                <a:close/>
+                <a:lnTo>
+                  <a:pt x="2119456" y="87649"/>
+                </a:lnTo>
+                <a:close/>
+                <a:lnTo>
+                  <a:pt x="2126282" y="86067"/>
+                </a:lnTo>
+                <a:close/>
+                <a:lnTo>
+                  <a:pt x="2133136" y="84481"/>
+                </a:lnTo>
+                <a:close/>
+                <a:lnTo>
+                  <a:pt x="2140059" y="82881"/>
+                </a:lnTo>
+                <a:close/>
+                <a:lnTo>
+                  <a:pt x="2147090" y="81260"/>
+                </a:lnTo>
+                <a:close/>
+                <a:lnTo>
+                  <a:pt x="2154271" y="79607"/>
+                </a:lnTo>
+                <a:close/>
+                <a:lnTo>
+                  <a:pt x="2161642" y="77915"/>
+                </a:lnTo>
+                <a:close/>
+                <a:lnTo>
+                  <a:pt x="2169243" y="76174"/>
+                </a:lnTo>
+                <a:close/>
+                <a:lnTo>
+                  <a:pt x="2177115" y="74377"/>
+                </a:lnTo>
+                <a:close/>
+                <a:lnTo>
+                  <a:pt x="2185297" y="72513"/>
+                </a:lnTo>
+                <a:close/>
+                <a:lnTo>
+                  <a:pt x="2193832" y="70574"/>
+                </a:lnTo>
+                <a:close/>
+                <a:lnTo>
+                  <a:pt x="2202752" y="68553"/>
+                </a:lnTo>
+                <a:close/>
+                <a:lnTo>
+                  <a:pt x="2212059" y="66450"/>
+                </a:lnTo>
+                <a:close/>
+                <a:lnTo>
+                  <a:pt x="2221747" y="64266"/>
+                </a:lnTo>
+                <a:close/>
+                <a:lnTo>
+                  <a:pt x="2231806" y="62003"/>
+                </a:lnTo>
+                <a:close/>
+                <a:lnTo>
+                  <a:pt x="2242229" y="59665"/>
+                </a:lnTo>
+                <a:close/>
+                <a:lnTo>
+                  <a:pt x="2253008" y="57252"/>
+                </a:lnTo>
+                <a:close/>
+                <a:lnTo>
+                  <a:pt x="2264134" y="54766"/>
+                </a:lnTo>
+                <a:close/>
+                <a:lnTo>
+                  <a:pt x="2275599" y="52211"/>
+                </a:lnTo>
+                <a:close/>
+                <a:lnTo>
+                  <a:pt x="2287396" y="49587"/>
+                </a:lnTo>
+                <a:close/>
+                <a:lnTo>
+                  <a:pt x="2299516" y="46897"/>
+                </a:lnTo>
+                <a:close/>
+                <a:lnTo>
+                  <a:pt x="2311951" y="44143"/>
+                </a:lnTo>
+                <a:close/>
+                <a:lnTo>
+                  <a:pt x="2324693" y="41327"/>
+                </a:lnTo>
+                <a:close/>
+                <a:lnTo>
+                  <a:pt x="2337734" y="38451"/>
+                </a:lnTo>
+                <a:close/>
+                <a:lnTo>
+                  <a:pt x="2351066" y="35517"/>
+                </a:lnTo>
+                <a:close/>
+                <a:lnTo>
+                  <a:pt x="2364680" y="32527"/>
+                </a:lnTo>
+                <a:close/>
+                <a:lnTo>
+                  <a:pt x="2378569" y="29483"/>
+                </a:lnTo>
+                <a:close/>
+                <a:lnTo>
+                  <a:pt x="2392725" y="26387"/>
+                </a:lnTo>
+                <a:close/>
+                <a:lnTo>
+                  <a:pt x="2407140" y="23242"/>
+                </a:lnTo>
+                <a:close/>
+                <a:lnTo>
+                  <a:pt x="2421805" y="20048"/>
+                </a:lnTo>
+                <a:close/>
+                <a:lnTo>
+                  <a:pt x="2436712" y="16809"/>
+                </a:lnTo>
+                <a:close/>
+                <a:lnTo>
+                  <a:pt x="2451853" y="13527"/>
+                </a:lnTo>
+                <a:close/>
+                <a:lnTo>
+                  <a:pt x="2467221" y="10202"/>
+                </a:lnTo>
+                <a:close/>
+                <a:lnTo>
+                  <a:pt x="2482807" y="6838"/>
+                </a:lnTo>
+                <a:close/>
+                <a:lnTo>
+                  <a:pt x="2498602" y="3437"/>
+                </a:lnTo>
+                <a:close/>
+                <a:lnTo>
+                  <a:pt x="2514600" y="0"/>
                 </a:lnTo>
                 <a:close/>
               </a:path>
@@ -4389,7 +4389,7 @@
           </a:custGeom>
           <a:ln w="31750">
             <a:solidFill>
-              <a:srgbClr val="FFFFFF"/>
+              <a:srgbClr val="000000"/>
             </a:solidFill>
           </a:ln>
         </p:spPr>
@@ -4423,8 +4423,8 @@
         </p:nvCxnSpPr>
         <p:spPr>
           <a:xfrm flipV="1">
-            <a:off x="5715000.0" y="1628089.2"/>
-            <a:ext cx="0.0" cy="943660.8"/>
+            <a:off x="6400800.0" y="1657350.0"/>
+            <a:ext cx="0.0" cy="914400.0"/>
           </a:xfrm>
           <a:prstGeom prst="line">
             <a:avLst/>
@@ -4459,8 +4459,8 @@
         </p:nvSpPr>
         <p:spPr>
           <a:xfrm>
-            <a:off x="5664200" y="1577289"/>
-            <a:ext cx="101600" cy="101600"/>
+            <a:off x="6324600" y="1581150"/>
+            <a:ext cx="152400" cy="152400"/>
           </a:xfrm>
           <a:prstGeom prst="ellipse">
             <a:avLst/>
@@ -4504,7 +4504,7 @@
         </p:nvSpPr>
         <p:spPr>
           <a:xfrm>
-            <a:off x="5438140" y="2345690"/>
+            <a:off x="6146800" y="2391410"/>
             <a:ext cx="1524000" cy="508000"/>
           </a:xfrm>
           <a:prstGeom prst="rect">
@@ -4519,7 +4519,7 @@
           <a:lstStyle/>
           <a:p>
             <a:pPr>
-              <a:defRPr sz="1400" b="1">
+              <a:defRPr sz="1800" b="1">
                 <a:solidFill>
                   <a:srgbClr val="FFFFFF"/>
                 </a:solidFill>

--- a/output/4.pptx
+++ b/output/4.pptx
@@ -3174,8 +3174,8 @@
         </p:nvSpPr>
         <p:spPr>
           <a:xfrm>
-            <a:off x="4572000" y="1499616"/>
-            <a:ext cx="2514600" cy="1072134"/>
+            <a:off x="4572000" y="1165083"/>
+            <a:ext cx="2743200" cy="1406667"/>
           </a:xfrm>
           <a:custGeom>
             <a:avLst/>
@@ -3184,1210 +3184,2410 @@
             <a:cxnLst/>
             <a:rect l="l" t="t" r="r" b="b"/>
             <a:pathLst>
-              <a:path w="2514600" h="1072134">
+              <a:path w="2743200" h="1406667">
                 <a:moveTo>
-                  <a:pt x="0" y="1072134"/>
+                  <a:pt x="0" y="1406667"/>
                 </a:moveTo>
                 <a:lnTo>
-                  <a:pt x="5406" y="1053775"/>
-                </a:lnTo>
-                <a:close/>
-                <a:lnTo>
-                  <a:pt x="10376" y="1036875"/>
-                </a:lnTo>
-                <a:close/>
-                <a:lnTo>
-                  <a:pt x="14949" y="1021353"/>
-                </a:lnTo>
-                <a:close/>
-                <a:lnTo>
-                  <a:pt x="19163" y="1007130"/>
-                </a:lnTo>
-                <a:close/>
-                <a:lnTo>
-                  <a:pt x="23055" y="994125"/>
-                </a:lnTo>
-                <a:close/>
-                <a:lnTo>
-                  <a:pt x="26663" y="982260"/>
-                </a:lnTo>
-                <a:close/>
-                <a:lnTo>
-                  <a:pt x="30026" y="971454"/>
-                </a:lnTo>
-                <a:close/>
-                <a:lnTo>
-                  <a:pt x="33181" y="961629"/>
-                </a:lnTo>
-                <a:close/>
-                <a:lnTo>
-                  <a:pt x="36167" y="952703"/>
-                </a:lnTo>
-                <a:close/>
-                <a:lnTo>
-                  <a:pt x="39022" y="944599"/>
-                </a:lnTo>
-                <a:close/>
-                <a:lnTo>
-                  <a:pt x="41783" y="937235"/>
-                </a:lnTo>
-                <a:close/>
-                <a:lnTo>
-                  <a:pt x="44488" y="930532"/>
-                </a:lnTo>
-                <a:close/>
-                <a:lnTo>
-                  <a:pt x="47176" y="924410"/>
-                </a:lnTo>
-                <a:close/>
-                <a:lnTo>
-                  <a:pt x="49885" y="918791"/>
-                </a:lnTo>
-                <a:close/>
-                <a:lnTo>
-                  <a:pt x="52652" y="913593"/>
-                </a:lnTo>
-                <a:close/>
-                <a:lnTo>
-                  <a:pt x="55516" y="908738"/>
-                </a:lnTo>
-                <a:close/>
-                <a:lnTo>
-                  <a:pt x="58515" y="904146"/>
-                </a:lnTo>
-                <a:close/>
-                <a:lnTo>
-                  <a:pt x="61686" y="899737"/>
-                </a:lnTo>
-                <a:close/>
-                <a:lnTo>
-                  <a:pt x="65068" y="895431"/>
-                </a:lnTo>
-                <a:close/>
-                <a:lnTo>
-                  <a:pt x="68698" y="891149"/>
-                </a:lnTo>
-                <a:close/>
-                <a:lnTo>
-                  <a:pt x="72616" y="886810"/>
-                </a:lnTo>
-                <a:close/>
-                <a:lnTo>
-                  <a:pt x="76857" y="882336"/>
-                </a:lnTo>
-                <a:close/>
-                <a:lnTo>
-                  <a:pt x="81462" y="877647"/>
-                </a:lnTo>
-                <a:close/>
-                <a:lnTo>
-                  <a:pt x="86467" y="872662"/>
-                </a:lnTo>
-                <a:close/>
-                <a:lnTo>
-                  <a:pt x="91911" y="867303"/>
-                </a:lnTo>
-                <a:close/>
-                <a:lnTo>
-                  <a:pt x="97814" y="861518"/>
-                </a:lnTo>
-                <a:close/>
-                <a:lnTo>
-                  <a:pt x="104138" y="855350"/>
-                </a:lnTo>
-                <a:close/>
-                <a:lnTo>
-                  <a:pt x="110835" y="848858"/>
-                </a:lnTo>
-                <a:close/>
-                <a:lnTo>
-                  <a:pt x="117857" y="842102"/>
-                </a:lnTo>
-                <a:close/>
-                <a:lnTo>
-                  <a:pt x="125156" y="835140"/>
-                </a:lnTo>
-                <a:close/>
-                <a:lnTo>
-                  <a:pt x="132683" y="828032"/>
-                </a:lnTo>
-                <a:close/>
-                <a:lnTo>
-                  <a:pt x="140391" y="820837"/>
-                </a:lnTo>
-                <a:close/>
-                <a:lnTo>
-                  <a:pt x="148231" y="813615"/>
-                </a:lnTo>
-                <a:close/>
-                <a:lnTo>
-                  <a:pt x="156154" y="806425"/>
-                </a:lnTo>
-                <a:close/>
-                <a:lnTo>
-                  <a:pt x="164114" y="799327"/>
-                </a:lnTo>
-                <a:close/>
-                <a:lnTo>
-                  <a:pt x="172061" y="792380"/>
-                </a:lnTo>
-                <a:close/>
-                <a:lnTo>
-                  <a:pt x="179948" y="785644"/>
-                </a:lnTo>
-                <a:close/>
-                <a:lnTo>
-                  <a:pt x="187728" y="779173"/>
-                </a:lnTo>
-                <a:close/>
-                <a:lnTo>
-                  <a:pt x="195390" y="772981"/>
-                </a:lnTo>
-                <a:close/>
-                <a:lnTo>
-                  <a:pt x="202946" y="767045"/>
-                </a:lnTo>
-                <a:close/>
-                <a:lnTo>
-                  <a:pt x="210410" y="761344"/>
-                </a:lnTo>
-                <a:close/>
-                <a:lnTo>
-                  <a:pt x="217793" y="755857"/>
-                </a:lnTo>
-                <a:close/>
-                <a:lnTo>
-                  <a:pt x="225109" y="750562"/>
-                </a:lnTo>
-                <a:close/>
-                <a:lnTo>
-                  <a:pt x="232370" y="745437"/>
-                </a:lnTo>
-                <a:close/>
-                <a:lnTo>
-                  <a:pt x="239590" y="740460"/>
-                </a:lnTo>
-                <a:close/>
-                <a:lnTo>
-                  <a:pt x="246782" y="735610"/>
-                </a:lnTo>
-                <a:close/>
-                <a:lnTo>
-                  <a:pt x="253959" y="730865"/>
-                </a:lnTo>
-                <a:close/>
-                <a:lnTo>
-                  <a:pt x="261132" y="726204"/>
-                </a:lnTo>
-                <a:close/>
-                <a:lnTo>
-                  <a:pt x="268316" y="721605"/>
-                </a:lnTo>
-                <a:close/>
-                <a:lnTo>
-                  <a:pt x="275523" y="717046"/>
-                </a:lnTo>
-                <a:close/>
-                <a:lnTo>
-                  <a:pt x="282762" y="712512"/>
-                </a:lnTo>
-                <a:close/>
-                <a:lnTo>
-                  <a:pt x="290031" y="708002"/>
-                </a:lnTo>
-                <a:close/>
-                <a:lnTo>
-                  <a:pt x="297326" y="703517"/>
-                </a:lnTo>
-                <a:close/>
-                <a:lnTo>
-                  <a:pt x="304645" y="699061"/>
-                </a:lnTo>
-                <a:close/>
-                <a:lnTo>
-                  <a:pt x="311983" y="694633"/>
-                </a:lnTo>
-                <a:close/>
-                <a:lnTo>
-                  <a:pt x="319337" y="690237"/>
-                </a:lnTo>
-                <a:close/>
-                <a:lnTo>
-                  <a:pt x="326704" y="685873"/>
-                </a:lnTo>
-                <a:close/>
-                <a:lnTo>
-                  <a:pt x="334080" y="681544"/>
-                </a:lnTo>
-                <a:close/>
-                <a:lnTo>
-                  <a:pt x="341462" y="677251"/>
-                </a:lnTo>
-                <a:close/>
-                <a:lnTo>
-                  <a:pt x="348847" y="672996"/>
-                </a:lnTo>
-                <a:close/>
-                <a:lnTo>
-                  <a:pt x="356230" y="668781"/>
-                </a:lnTo>
-                <a:close/>
-                <a:lnTo>
-                  <a:pt x="363609" y="664607"/>
-                </a:lnTo>
-                <a:close/>
-                <a:lnTo>
-                  <a:pt x="370980" y="660475"/>
-                </a:lnTo>
-                <a:close/>
-                <a:lnTo>
-                  <a:pt x="378343" y="656387"/>
-                </a:lnTo>
-                <a:close/>
-                <a:lnTo>
-                  <a:pt x="385699" y="652341"/>
-                </a:lnTo>
-                <a:close/>
-                <a:lnTo>
-                  <a:pt x="393048" y="648336"/>
-                </a:lnTo>
-                <a:close/>
-                <a:lnTo>
-                  <a:pt x="400391" y="644372"/>
-                </a:lnTo>
-                <a:close/>
-                <a:lnTo>
-                  <a:pt x="407729" y="640447"/>
-                </a:lnTo>
-                <a:close/>
-                <a:lnTo>
-                  <a:pt x="415064" y="636562"/>
-                </a:lnTo>
-                <a:close/>
-                <a:lnTo>
-                  <a:pt x="422395" y="632714"/>
-                </a:lnTo>
-                <a:close/>
-                <a:lnTo>
-                  <a:pt x="429723" y="628904"/>
-                </a:lnTo>
-                <a:close/>
-                <a:lnTo>
-                  <a:pt x="437051" y="625130"/>
-                </a:lnTo>
-                <a:close/>
-                <a:lnTo>
-                  <a:pt x="444377" y="621392"/>
-                </a:lnTo>
-                <a:close/>
-                <a:lnTo>
-                  <a:pt x="451704" y="617689"/>
-                </a:lnTo>
-                <a:close/>
-                <a:lnTo>
-                  <a:pt x="459032" y="614020"/>
-                </a:lnTo>
-                <a:close/>
-                <a:lnTo>
-                  <a:pt x="466362" y="610384"/>
-                </a:lnTo>
-                <a:close/>
-                <a:lnTo>
-                  <a:pt x="473693" y="606780"/>
-                </a:lnTo>
-                <a:close/>
-                <a:lnTo>
-                  <a:pt x="481026" y="603206"/>
-                </a:lnTo>
-                <a:close/>
-                <a:lnTo>
-                  <a:pt x="488361" y="599662"/>
-                </a:lnTo>
-                <a:close/>
-                <a:lnTo>
-                  <a:pt x="495698" y="596145"/>
-                </a:lnTo>
-                <a:close/>
-                <a:lnTo>
-                  <a:pt x="503037" y="592655"/>
-                </a:lnTo>
-                <a:close/>
-                <a:lnTo>
-                  <a:pt x="510377" y="589190"/>
-                </a:lnTo>
-                <a:close/>
-                <a:lnTo>
-                  <a:pt x="517720" y="585749"/>
-                </a:lnTo>
-                <a:close/>
-                <a:lnTo>
-                  <a:pt x="525064" y="582331"/>
-                </a:lnTo>
-                <a:close/>
-                <a:lnTo>
-                  <a:pt x="532410" y="578933"/>
-                </a:lnTo>
-                <a:close/>
-                <a:lnTo>
-                  <a:pt x="539758" y="575556"/>
-                </a:lnTo>
-                <a:close/>
-                <a:lnTo>
-                  <a:pt x="547108" y="572197"/>
-                </a:lnTo>
-                <a:close/>
-                <a:lnTo>
-                  <a:pt x="554460" y="568856"/>
-                </a:lnTo>
-                <a:close/>
-                <a:lnTo>
-                  <a:pt x="561814" y="565532"/>
-                </a:lnTo>
-                <a:close/>
-                <a:lnTo>
-                  <a:pt x="569167" y="562226"/>
-                </a:lnTo>
-                <a:close/>
-                <a:lnTo>
-                  <a:pt x="576520" y="558938"/>
-                </a:lnTo>
-                <a:close/>
-                <a:lnTo>
-                  <a:pt x="583871" y="555669"/>
-                </a:lnTo>
-                <a:close/>
-                <a:lnTo>
-                  <a:pt x="591220" y="552419"/>
-                </a:lnTo>
-                <a:close/>
-                <a:lnTo>
-                  <a:pt x="598566" y="549188"/>
-                </a:lnTo>
-                <a:close/>
-                <a:lnTo>
-                  <a:pt x="605907" y="545977"/>
-                </a:lnTo>
-                <a:close/>
-                <a:lnTo>
-                  <a:pt x="613242" y="542786"/>
-                </a:lnTo>
-                <a:close/>
-                <a:lnTo>
-                  <a:pt x="620572" y="539616"/>
-                </a:lnTo>
-                <a:close/>
-                <a:lnTo>
-                  <a:pt x="627894" y="536467"/>
-                </a:lnTo>
-                <a:close/>
-                <a:lnTo>
-                  <a:pt x="635209" y="533339"/>
-                </a:lnTo>
-                <a:close/>
-                <a:lnTo>
-                  <a:pt x="642514" y="530234"/>
-                </a:lnTo>
-                <a:close/>
-                <a:lnTo>
-                  <a:pt x="649811" y="527150"/>
-                </a:lnTo>
-                <a:close/>
-                <a:lnTo>
-                  <a:pt x="657104" y="524085"/>
-                </a:lnTo>
-                <a:close/>
-                <a:lnTo>
-                  <a:pt x="664395" y="521039"/>
-                </a:lnTo>
-                <a:close/>
-                <a:lnTo>
-                  <a:pt x="671689" y="518009"/>
-                </a:lnTo>
-                <a:close/>
-                <a:lnTo>
-                  <a:pt x="678990" y="514994"/>
-                </a:lnTo>
-                <a:close/>
-                <a:lnTo>
-                  <a:pt x="686301" y="511992"/>
-                </a:lnTo>
-                <a:close/>
-                <a:lnTo>
-                  <a:pt x="693625" y="509000"/>
-                </a:lnTo>
-                <a:close/>
-                <a:lnTo>
-                  <a:pt x="700968" y="506018"/>
-                </a:lnTo>
-                <a:close/>
-                <a:lnTo>
-                  <a:pt x="708331" y="503043"/>
-                </a:lnTo>
-                <a:close/>
-                <a:lnTo>
-                  <a:pt x="715720" y="500074"/>
-                </a:lnTo>
-                <a:close/>
-                <a:lnTo>
-                  <a:pt x="723137" y="497109"/>
-                </a:lnTo>
-                <a:close/>
-                <a:lnTo>
-                  <a:pt x="730586" y="494146"/>
-                </a:lnTo>
-                <a:close/>
-                <a:lnTo>
-                  <a:pt x="738070" y="491185"/>
-                </a:lnTo>
-                <a:close/>
-                <a:lnTo>
-                  <a:pt x="745578" y="488228"/>
-                </a:lnTo>
-                <a:close/>
-                <a:lnTo>
-                  <a:pt x="753097" y="485281"/>
-                </a:lnTo>
-                <a:close/>
-                <a:lnTo>
-                  <a:pt x="760612" y="482349"/>
-                </a:lnTo>
-                <a:close/>
-                <a:lnTo>
-                  <a:pt x="768110" y="479438"/>
-                </a:lnTo>
-                <a:close/>
-                <a:lnTo>
-                  <a:pt x="775576" y="476552"/>
-                </a:lnTo>
-                <a:close/>
-                <a:lnTo>
-                  <a:pt x="782998" y="473698"/>
-                </a:lnTo>
-                <a:close/>
-                <a:lnTo>
-                  <a:pt x="790361" y="470879"/>
-                </a:lnTo>
-                <a:close/>
-                <a:lnTo>
-                  <a:pt x="797650" y="468102"/>
-                </a:lnTo>
-                <a:close/>
-                <a:lnTo>
-                  <a:pt x="804853" y="465372"/>
-                </a:lnTo>
-                <a:close/>
-                <a:lnTo>
-                  <a:pt x="811955" y="462694"/>
-                </a:lnTo>
-                <a:close/>
-                <a:lnTo>
-                  <a:pt x="818942" y="460072"/>
-                </a:lnTo>
-                <a:close/>
-                <a:lnTo>
-                  <a:pt x="825802" y="457513"/>
-                </a:lnTo>
-                <a:close/>
-                <a:lnTo>
-                  <a:pt x="832549" y="455010"/>
-                </a:lnTo>
-                <a:close/>
-                <a:lnTo>
-                  <a:pt x="839233" y="452546"/>
-                </a:lnTo>
-                <a:close/>
-                <a:lnTo>
-                  <a:pt x="845905" y="450101"/>
-                </a:lnTo>
-                <a:close/>
-                <a:lnTo>
-                  <a:pt x="852618" y="447655"/>
-                </a:lnTo>
-                <a:close/>
-                <a:lnTo>
-                  <a:pt x="859424" y="445191"/>
-                </a:lnTo>
-                <a:close/>
-                <a:lnTo>
-                  <a:pt x="866375" y="442687"/>
-                </a:lnTo>
-                <a:close/>
-                <a:lnTo>
-                  <a:pt x="873521" y="440127"/>
-                </a:lnTo>
-                <a:close/>
-                <a:lnTo>
-                  <a:pt x="880917" y="437489"/>
-                </a:lnTo>
-                <a:close/>
-                <a:lnTo>
-                  <a:pt x="888612" y="434756"/>
-                </a:lnTo>
-                <a:close/>
-                <a:lnTo>
-                  <a:pt x="896659" y="431907"/>
-                </a:lnTo>
-                <a:close/>
-                <a:lnTo>
-                  <a:pt x="905111" y="428924"/>
-                </a:lnTo>
-                <a:close/>
-                <a:lnTo>
-                  <a:pt x="914018" y="425788"/>
-                </a:lnTo>
-                <a:close/>
-                <a:lnTo>
-                  <a:pt x="923418" y="422484"/>
-                </a:lnTo>
-                <a:close/>
-                <a:lnTo>
-                  <a:pt x="933279" y="419027"/>
-                </a:lnTo>
-                <a:close/>
-                <a:lnTo>
-                  <a:pt x="943547" y="415436"/>
-                </a:lnTo>
-                <a:close/>
-                <a:lnTo>
-                  <a:pt x="954173" y="411732"/>
-                </a:lnTo>
-                <a:close/>
-                <a:lnTo>
-                  <a:pt x="965103" y="407935"/>
-                </a:lnTo>
-                <a:close/>
-                <a:lnTo>
-                  <a:pt x="976286" y="404066"/>
-                </a:lnTo>
-                <a:close/>
-                <a:lnTo>
-                  <a:pt x="987670" y="400145"/>
-                </a:lnTo>
-                <a:close/>
-                <a:lnTo>
-                  <a:pt x="999204" y="396193"/>
-                </a:lnTo>
-                <a:close/>
-                <a:lnTo>
-                  <a:pt x="1010835" y="392229"/>
-                </a:lnTo>
-                <a:close/>
-                <a:lnTo>
-                  <a:pt x="1022511" y="388274"/>
-                </a:lnTo>
-                <a:close/>
-                <a:lnTo>
-                  <a:pt x="1034181" y="384349"/>
-                </a:lnTo>
-                <a:close/>
-                <a:lnTo>
-                  <a:pt x="1045792" y="380474"/>
-                </a:lnTo>
-                <a:close/>
-                <a:lnTo>
-                  <a:pt x="1057295" y="376669"/>
-                </a:lnTo>
-                <a:close/>
-                <a:lnTo>
-                  <a:pt x="1068670" y="372940"/>
-                </a:lnTo>
-                <a:close/>
-                <a:lnTo>
-                  <a:pt x="1079930" y="369281"/>
-                </a:lnTo>
-                <a:close/>
-                <a:lnTo>
-                  <a:pt x="1091087" y="365685"/>
-                </a:lnTo>
-                <a:close/>
-                <a:lnTo>
-                  <a:pt x="1102157" y="362145"/>
-                </a:lnTo>
-                <a:close/>
-                <a:lnTo>
-                  <a:pt x="1113152" y="358653"/>
-                </a:lnTo>
-                <a:close/>
-                <a:lnTo>
-                  <a:pt x="1124086" y="355204"/>
-                </a:lnTo>
-                <a:close/>
-                <a:lnTo>
-                  <a:pt x="1134972" y="351789"/>
-                </a:lnTo>
-                <a:close/>
-                <a:lnTo>
-                  <a:pt x="1145825" y="348402"/>
-                </a:lnTo>
-                <a:close/>
-                <a:lnTo>
-                  <a:pt x="1156658" y="345035"/>
-                </a:lnTo>
-                <a:close/>
-                <a:lnTo>
-                  <a:pt x="1167484" y="341682"/>
-                </a:lnTo>
-                <a:close/>
-                <a:lnTo>
-                  <a:pt x="1178318" y="338335"/>
-                </a:lnTo>
-                <a:close/>
-                <a:lnTo>
-                  <a:pt x="1189173" y="334988"/>
-                </a:lnTo>
-                <a:close/>
-                <a:lnTo>
-                  <a:pt x="1200059" y="331635"/>
-                </a:lnTo>
-                <a:close/>
-                <a:lnTo>
-                  <a:pt x="1210976" y="328277"/>
-                </a:lnTo>
-                <a:close/>
-                <a:lnTo>
-                  <a:pt x="1221922" y="324915"/>
-                </a:lnTo>
-                <a:close/>
-                <a:lnTo>
-                  <a:pt x="1232894" y="321553"/>
-                </a:lnTo>
-                <a:close/>
-                <a:lnTo>
-                  <a:pt x="1243888" y="318193"/>
-                </a:lnTo>
-                <a:close/>
-                <a:lnTo>
-                  <a:pt x="1254903" y="314836"/>
-                </a:lnTo>
-                <a:close/>
-                <a:lnTo>
-                  <a:pt x="1265935" y="311484"/>
-                </a:lnTo>
-                <a:close/>
-                <a:lnTo>
-                  <a:pt x="1276982" y="308141"/>
-                </a:lnTo>
-                <a:close/>
-                <a:lnTo>
-                  <a:pt x="1288041" y="304807"/>
-                </a:lnTo>
-                <a:close/>
-                <a:lnTo>
-                  <a:pt x="1299109" y="301486"/>
-                </a:lnTo>
-                <a:close/>
-                <a:lnTo>
-                  <a:pt x="1310184" y="298179"/>
-                </a:lnTo>
-                <a:close/>
-                <a:lnTo>
-                  <a:pt x="1321263" y="294888"/>
-                </a:lnTo>
-                <a:close/>
-                <a:lnTo>
-                  <a:pt x="1332343" y="291616"/>
-                </a:lnTo>
-                <a:close/>
-                <a:lnTo>
-                  <a:pt x="1343422" y="288363"/>
-                </a:lnTo>
-                <a:close/>
-                <a:lnTo>
-                  <a:pt x="1354496" y="285130"/>
-                </a:lnTo>
-                <a:close/>
-                <a:lnTo>
-                  <a:pt x="1365563" y="281916"/>
-                </a:lnTo>
-                <a:close/>
-                <a:lnTo>
-                  <a:pt x="1376620" y="278720"/>
-                </a:lnTo>
-                <a:close/>
-                <a:lnTo>
-                  <a:pt x="1387665" y="275544"/>
-                </a:lnTo>
-                <a:close/>
-                <a:lnTo>
-                  <a:pt x="1398694" y="272386"/>
-                </a:lnTo>
-                <a:close/>
-                <a:lnTo>
-                  <a:pt x="1409706" y="269247"/>
-                </a:lnTo>
-                <a:close/>
-                <a:lnTo>
-                  <a:pt x="1420697" y="266126"/>
-                </a:lnTo>
-                <a:close/>
-                <a:lnTo>
-                  <a:pt x="1431664" y="263023"/>
-                </a:lnTo>
-                <a:close/>
-                <a:lnTo>
-                  <a:pt x="1442605" y="259939"/>
-                </a:lnTo>
-                <a:close/>
-                <a:lnTo>
-                  <a:pt x="1453518" y="256872"/>
-                </a:lnTo>
-                <a:close/>
-                <a:lnTo>
-                  <a:pt x="1464398" y="253823"/>
-                </a:lnTo>
-                <a:close/>
-                <a:lnTo>
-                  <a:pt x="1475248" y="250791"/>
-                </a:lnTo>
-                <a:close/>
-                <a:lnTo>
-                  <a:pt x="1486080" y="247773"/>
-                </a:lnTo>
-                <a:close/>
-                <a:lnTo>
-                  <a:pt x="1496906" y="244767"/>
-                </a:lnTo>
-                <a:close/>
-                <a:lnTo>
-                  <a:pt x="1507741" y="241769"/>
-                </a:lnTo>
-                <a:close/>
-                <a:lnTo>
-                  <a:pt x="1518599" y="238776"/>
-                </a:lnTo>
-                <a:close/>
-                <a:lnTo>
-                  <a:pt x="1529492" y="235786"/>
-                </a:lnTo>
-                <a:close/>
-                <a:lnTo>
-                  <a:pt x="1540435" y="232795"/>
-                </a:lnTo>
-                <a:close/>
-                <a:lnTo>
-                  <a:pt x="1551441" y="229801"/>
-                </a:lnTo>
-                <a:close/>
-                <a:lnTo>
-                  <a:pt x="1562525" y="226800"/>
-                </a:lnTo>
-                <a:close/>
-                <a:lnTo>
-                  <a:pt x="1573699" y="223790"/>
-                </a:lnTo>
-                <a:close/>
-                <a:lnTo>
-                  <a:pt x="1584977" y="220767"/>
-                </a:lnTo>
-                <a:close/>
-                <a:lnTo>
-                  <a:pt x="1596373" y="217729"/>
-                </a:lnTo>
-                <a:close/>
-                <a:lnTo>
-                  <a:pt x="1607897" y="214674"/>
-                </a:lnTo>
-                <a:close/>
-                <a:lnTo>
-                  <a:pt x="1619523" y="211607"/>
-                </a:lnTo>
-                <a:close/>
-                <a:lnTo>
-                  <a:pt x="1631198" y="208541"/>
-                </a:lnTo>
-                <a:close/>
-                <a:lnTo>
-                  <a:pt x="1642871" y="205487"/>
-                </a:lnTo>
-                <a:close/>
-                <a:lnTo>
-                  <a:pt x="1654490" y="202458"/>
-                </a:lnTo>
-                <a:close/>
-                <a:lnTo>
-                  <a:pt x="1666002" y="199466"/>
-                </a:lnTo>
-                <a:close/>
-                <a:lnTo>
-                  <a:pt x="1677357" y="196523"/>
-                </a:lnTo>
-                <a:close/>
-                <a:lnTo>
-                  <a:pt x="1688502" y="193641"/>
-                </a:lnTo>
-                <a:close/>
-                <a:lnTo>
-                  <a:pt x="1699385" y="190831"/>
-                </a:lnTo>
-                <a:close/>
-                <a:lnTo>
-                  <a:pt x="1709954" y="188107"/>
-                </a:lnTo>
-                <a:close/>
-                <a:lnTo>
-                  <a:pt x="1720157" y="185479"/>
-                </a:lnTo>
-                <a:close/>
-                <a:lnTo>
-                  <a:pt x="1729943" y="182960"/>
-                </a:lnTo>
-                <a:close/>
-                <a:lnTo>
-                  <a:pt x="1739260" y="180562"/>
-                </a:lnTo>
-                <a:close/>
-                <a:lnTo>
-                  <a:pt x="1748085" y="178290"/>
-                </a:lnTo>
-                <a:close/>
-                <a:lnTo>
-                  <a:pt x="1756463" y="176133"/>
-                </a:lnTo>
-                <a:close/>
-                <a:lnTo>
-                  <a:pt x="1764446" y="174079"/>
-                </a:lnTo>
-                <a:close/>
-                <a:lnTo>
-                  <a:pt x="1772085" y="172116"/>
-                </a:lnTo>
-                <a:close/>
-                <a:lnTo>
-                  <a:pt x="1779433" y="170230"/>
-                </a:lnTo>
-                <a:close/>
-                <a:lnTo>
-                  <a:pt x="1786541" y="168410"/>
-                </a:lnTo>
-                <a:close/>
-                <a:lnTo>
-                  <a:pt x="1793463" y="166642"/>
-                </a:lnTo>
-                <a:close/>
-                <a:lnTo>
-                  <a:pt x="1800250" y="164915"/>
-                </a:lnTo>
-                <a:close/>
-                <a:lnTo>
-                  <a:pt x="1806954" y="163216"/>
-                </a:lnTo>
-                <a:close/>
-                <a:lnTo>
-                  <a:pt x="1813627" y="161532"/>
-                </a:lnTo>
-                <a:close/>
-                <a:lnTo>
-                  <a:pt x="1820322" y="159851"/>
-                </a:lnTo>
-                <a:close/>
-                <a:lnTo>
-                  <a:pt x="1827090" y="158160"/>
-                </a:lnTo>
-                <a:close/>
-                <a:lnTo>
-                  <a:pt x="1833980" y="156448"/>
-                </a:lnTo>
-                <a:close/>
-                <a:lnTo>
-                  <a:pt x="1840996" y="154712"/>
-                </a:lnTo>
-                <a:close/>
-                <a:lnTo>
-                  <a:pt x="1848126" y="152956"/>
-                </a:lnTo>
-                <a:close/>
-                <a:lnTo>
-                  <a:pt x="1855354" y="151182"/>
-                </a:lnTo>
-                <a:close/>
-                <a:lnTo>
-                  <a:pt x="1862666" y="149391"/>
-                </a:lnTo>
-                <a:close/>
-                <a:lnTo>
-                  <a:pt x="1870047" y="147587"/>
-                </a:lnTo>
-                <a:close/>
-                <a:lnTo>
-                  <a:pt x="1877482" y="145773"/>
-                </a:lnTo>
-                <a:close/>
-                <a:lnTo>
-                  <a:pt x="1884956" y="143950"/>
-                </a:lnTo>
-                <a:close/>
-                <a:lnTo>
-                  <a:pt x="1892456" y="142121"/>
-                </a:lnTo>
-                <a:close/>
-                <a:lnTo>
-                  <a:pt x="1899965" y="140289"/>
-                </a:lnTo>
-                <a:close/>
-                <a:lnTo>
-                  <a:pt x="1907471" y="138457"/>
-                </a:lnTo>
-                <a:close/>
-                <a:lnTo>
-                  <a:pt x="1914957" y="136626"/>
-                </a:lnTo>
-                <a:close/>
-                <a:lnTo>
-                  <a:pt x="1922409" y="134799"/>
-                </a:lnTo>
-                <a:close/>
-                <a:lnTo>
-                  <a:pt x="1929821" y="132978"/>
-                </a:lnTo>
-                <a:close/>
-                <a:lnTo>
-                  <a:pt x="1937196" y="131163"/>
-                </a:lnTo>
-                <a:close/>
-                <a:lnTo>
-                  <a:pt x="1944543" y="129353"/>
-                </a:lnTo>
-                <a:close/>
-                <a:lnTo>
-                  <a:pt x="1951867" y="127547"/>
-                </a:lnTo>
-                <a:close/>
-                <a:lnTo>
-                  <a:pt x="1959176" y="125746"/>
-                </a:lnTo>
-                <a:close/>
-                <a:lnTo>
-                  <a:pt x="1966475" y="123949"/>
-                </a:lnTo>
-                <a:close/>
-                <a:lnTo>
-                  <a:pt x="1973771" y="122155"/>
-                </a:lnTo>
-                <a:close/>
-                <a:lnTo>
-                  <a:pt x="1981072" y="120365"/>
-                </a:lnTo>
-                <a:close/>
-                <a:lnTo>
-                  <a:pt x="1988383" y="118577"/>
-                </a:lnTo>
-                <a:close/>
-                <a:lnTo>
-                  <a:pt x="1995711" y="116791"/>
-                </a:lnTo>
-                <a:close/>
-                <a:lnTo>
-                  <a:pt x="2003064" y="115008"/>
-                </a:lnTo>
-                <a:close/>
-                <a:lnTo>
-                  <a:pt x="2010446" y="113225"/>
-                </a:lnTo>
-                <a:close/>
-                <a:lnTo>
-                  <a:pt x="2017864" y="111444"/>
-                </a:lnTo>
-                <a:close/>
-                <a:lnTo>
-                  <a:pt x="2025310" y="109666"/>
-                </a:lnTo>
-                <a:close/>
-                <a:lnTo>
-                  <a:pt x="2032773" y="107892"/>
-                </a:lnTo>
-                <a:close/>
-                <a:lnTo>
-                  <a:pt x="2040241" y="106125"/>
-                </a:lnTo>
-                <a:close/>
-                <a:lnTo>
-                  <a:pt x="2047701" y="104366"/>
-                </a:lnTo>
-                <a:close/>
-                <a:lnTo>
-                  <a:pt x="2055143" y="102618"/>
-                </a:lnTo>
-                <a:close/>
-                <a:lnTo>
-                  <a:pt x="2062555" y="100882"/>
-                </a:lnTo>
-                <a:close/>
-                <a:lnTo>
-                  <a:pt x="2069924" y="99161"/>
-                </a:lnTo>
-                <a:close/>
-                <a:lnTo>
-                  <a:pt x="2077239" y="97455"/>
-                </a:lnTo>
-                <a:close/>
-                <a:lnTo>
-                  <a:pt x="2084489" y="95768"/>
-                </a:lnTo>
-                <a:close/>
-                <a:lnTo>
-                  <a:pt x="2091661" y="94101"/>
-                </a:lnTo>
-                <a:close/>
-                <a:lnTo>
-                  <a:pt x="2098744" y="92456"/>
-                </a:lnTo>
-                <a:close/>
-                <a:lnTo>
-                  <a:pt x="2105726" y="90835"/>
-                </a:lnTo>
-                <a:close/>
-                <a:lnTo>
-                  <a:pt x="2112617" y="89236"/>
-                </a:lnTo>
-                <a:close/>
-                <a:lnTo>
-                  <a:pt x="2119456" y="87649"/>
-                </a:lnTo>
-                <a:close/>
-                <a:lnTo>
-                  <a:pt x="2126282" y="86067"/>
-                </a:lnTo>
-                <a:close/>
-                <a:lnTo>
-                  <a:pt x="2133136" y="84481"/>
-                </a:lnTo>
-                <a:close/>
-                <a:lnTo>
-                  <a:pt x="2140059" y="82881"/>
-                </a:lnTo>
-                <a:close/>
-                <a:lnTo>
-                  <a:pt x="2147090" y="81260"/>
-                </a:lnTo>
-                <a:close/>
-                <a:lnTo>
-                  <a:pt x="2154271" y="79607"/>
-                </a:lnTo>
-                <a:close/>
-                <a:lnTo>
-                  <a:pt x="2161642" y="77915"/>
-                </a:lnTo>
-                <a:close/>
-                <a:lnTo>
-                  <a:pt x="2169243" y="76174"/>
-                </a:lnTo>
-                <a:close/>
-                <a:lnTo>
-                  <a:pt x="2177115" y="74377"/>
-                </a:lnTo>
-                <a:close/>
-                <a:lnTo>
-                  <a:pt x="2185297" y="72513"/>
-                </a:lnTo>
-                <a:close/>
-                <a:lnTo>
-                  <a:pt x="2193832" y="70574"/>
-                </a:lnTo>
-                <a:close/>
-                <a:lnTo>
-                  <a:pt x="2202752" y="68553"/>
-                </a:lnTo>
-                <a:close/>
-                <a:lnTo>
-                  <a:pt x="2212059" y="66450"/>
-                </a:lnTo>
-                <a:close/>
-                <a:lnTo>
-                  <a:pt x="2221747" y="64266"/>
-                </a:lnTo>
-                <a:close/>
-                <a:lnTo>
-                  <a:pt x="2231806" y="62003"/>
-                </a:lnTo>
-                <a:close/>
-                <a:lnTo>
-                  <a:pt x="2242229" y="59665"/>
-                </a:lnTo>
-                <a:close/>
-                <a:lnTo>
-                  <a:pt x="2253008" y="57252"/>
-                </a:lnTo>
-                <a:close/>
-                <a:lnTo>
-                  <a:pt x="2264134" y="54766"/>
-                </a:lnTo>
-                <a:close/>
-                <a:lnTo>
-                  <a:pt x="2275599" y="52211"/>
-                </a:lnTo>
-                <a:close/>
-                <a:lnTo>
-                  <a:pt x="2287396" y="49587"/>
-                </a:lnTo>
-                <a:close/>
-                <a:lnTo>
-                  <a:pt x="2299516" y="46897"/>
-                </a:lnTo>
-                <a:close/>
-                <a:lnTo>
-                  <a:pt x="2311951" y="44143"/>
-                </a:lnTo>
-                <a:close/>
-                <a:lnTo>
-                  <a:pt x="2324693" y="41327"/>
-                </a:lnTo>
-                <a:close/>
-                <a:lnTo>
-                  <a:pt x="2337734" y="38451"/>
-                </a:lnTo>
-                <a:close/>
-                <a:lnTo>
-                  <a:pt x="2351066" y="35517"/>
-                </a:lnTo>
-                <a:close/>
-                <a:lnTo>
-                  <a:pt x="2364680" y="32527"/>
-                </a:lnTo>
-                <a:close/>
-                <a:lnTo>
-                  <a:pt x="2378569" y="29483"/>
-                </a:lnTo>
-                <a:close/>
-                <a:lnTo>
-                  <a:pt x="2392725" y="26387"/>
-                </a:lnTo>
-                <a:close/>
-                <a:lnTo>
-                  <a:pt x="2407140" y="23242"/>
-                </a:lnTo>
-                <a:close/>
-                <a:lnTo>
-                  <a:pt x="2421805" y="20048"/>
-                </a:lnTo>
-                <a:close/>
-                <a:lnTo>
-                  <a:pt x="2436712" y="16809"/>
-                </a:lnTo>
-                <a:close/>
-                <a:lnTo>
-                  <a:pt x="2451853" y="13527"/>
-                </a:lnTo>
-                <a:close/>
-                <a:lnTo>
-                  <a:pt x="2467221" y="10202"/>
-                </a:lnTo>
-                <a:close/>
-                <a:lnTo>
-                  <a:pt x="2482807" y="6838"/>
-                </a:lnTo>
-                <a:close/>
-                <a:lnTo>
-                  <a:pt x="2498602" y="3437"/>
-                </a:lnTo>
-                <a:close/>
-                <a:lnTo>
-                  <a:pt x="2514600" y="0"/>
+                  <a:pt x="4580" y="1378932"/>
+                </a:lnTo>
+                <a:close/>
+                <a:lnTo>
+                  <a:pt x="9159" y="1353385"/>
+                </a:lnTo>
+                <a:close/>
+                <a:lnTo>
+                  <a:pt x="13739" y="1329911"/>
+                </a:lnTo>
+                <a:close/>
+                <a:lnTo>
+                  <a:pt x="18319" y="1308390"/>
+                </a:lnTo>
+                <a:close/>
+                <a:lnTo>
+                  <a:pt x="22898" y="1288706"/>
+                </a:lnTo>
+                <a:close/>
+                <a:lnTo>
+                  <a:pt x="27478" y="1270740"/>
+                </a:lnTo>
+                <a:close/>
+                <a:lnTo>
+                  <a:pt x="32057" y="1254376"/>
+                </a:lnTo>
+                <a:close/>
+                <a:lnTo>
+                  <a:pt x="36637" y="1239496"/>
+                </a:lnTo>
+                <a:close/>
+                <a:lnTo>
+                  <a:pt x="41217" y="1225982"/>
+                </a:lnTo>
+                <a:close/>
+                <a:lnTo>
+                  <a:pt x="45796" y="1213717"/>
+                </a:lnTo>
+                <a:close/>
+                <a:lnTo>
+                  <a:pt x="50376" y="1202582"/>
+                </a:lnTo>
+                <a:close/>
+                <a:lnTo>
+                  <a:pt x="54956" y="1192462"/>
+                </a:lnTo>
+                <a:close/>
+                <a:lnTo>
+                  <a:pt x="59535" y="1183237"/>
+                </a:lnTo>
+                <a:close/>
+                <a:lnTo>
+                  <a:pt x="64115" y="1174791"/>
+                </a:lnTo>
+                <a:close/>
+                <a:lnTo>
+                  <a:pt x="68694" y="1167005"/>
+                </a:lnTo>
+                <a:close/>
+                <a:lnTo>
+                  <a:pt x="73274" y="1159763"/>
+                </a:lnTo>
+                <a:close/>
+                <a:lnTo>
+                  <a:pt x="77854" y="1152947"/>
+                </a:lnTo>
+                <a:close/>
+                <a:lnTo>
+                  <a:pt x="82433" y="1146438"/>
+                </a:lnTo>
+                <a:close/>
+                <a:lnTo>
+                  <a:pt x="87013" y="1140121"/>
+                </a:lnTo>
+                <a:close/>
+                <a:lnTo>
+                  <a:pt x="91593" y="1133876"/>
+                </a:lnTo>
+                <a:close/>
+                <a:lnTo>
+                  <a:pt x="96172" y="1127612"/>
+                </a:lnTo>
+                <a:close/>
+                <a:lnTo>
+                  <a:pt x="100752" y="1121327"/>
+                </a:lnTo>
+                <a:close/>
+                <a:lnTo>
+                  <a:pt x="105332" y="1115038"/>
+                </a:lnTo>
+                <a:close/>
+                <a:lnTo>
+                  <a:pt x="109911" y="1108765"/>
+                </a:lnTo>
+                <a:close/>
+                <a:lnTo>
+                  <a:pt x="114491" y="1102526"/>
+                </a:lnTo>
+                <a:close/>
+                <a:lnTo>
+                  <a:pt x="119070" y="1096339"/>
+                </a:lnTo>
+                <a:close/>
+                <a:lnTo>
+                  <a:pt x="123650" y="1090224"/>
+                </a:lnTo>
+                <a:close/>
+                <a:lnTo>
+                  <a:pt x="128230" y="1084197"/>
+                </a:lnTo>
+                <a:close/>
+                <a:lnTo>
+                  <a:pt x="132809" y="1078279"/>
+                </a:lnTo>
+                <a:close/>
+                <a:lnTo>
+                  <a:pt x="137389" y="1072488"/>
+                </a:lnTo>
+                <a:close/>
+                <a:lnTo>
+                  <a:pt x="141969" y="1066835"/>
+                </a:lnTo>
+                <a:close/>
+                <a:lnTo>
+                  <a:pt x="146548" y="1061317"/>
+                </a:lnTo>
+                <a:close/>
+                <a:lnTo>
+                  <a:pt x="151128" y="1055922"/>
+                </a:lnTo>
+                <a:close/>
+                <a:lnTo>
+                  <a:pt x="155708" y="1050641"/>
+                </a:lnTo>
+                <a:close/>
+                <a:lnTo>
+                  <a:pt x="160287" y="1045463"/>
+                </a:lnTo>
+                <a:close/>
+                <a:lnTo>
+                  <a:pt x="164867" y="1040380"/>
+                </a:lnTo>
+                <a:close/>
+                <a:lnTo>
+                  <a:pt x="169446" y="1035382"/>
+                </a:lnTo>
+                <a:close/>
+                <a:lnTo>
+                  <a:pt x="174026" y="1030457"/>
+                </a:lnTo>
+                <a:close/>
+                <a:lnTo>
+                  <a:pt x="178606" y="1025597"/>
+                </a:lnTo>
+                <a:close/>
+                <a:lnTo>
+                  <a:pt x="183185" y="1020791"/>
+                </a:lnTo>
+                <a:close/>
+                <a:lnTo>
+                  <a:pt x="187765" y="1016032"/>
+                </a:lnTo>
+                <a:close/>
+                <a:lnTo>
+                  <a:pt x="192345" y="1011319"/>
+                </a:lnTo>
+                <a:close/>
+                <a:lnTo>
+                  <a:pt x="196924" y="1006651"/>
+                </a:lnTo>
+                <a:close/>
+                <a:lnTo>
+                  <a:pt x="201504" y="1002029"/>
+                </a:lnTo>
+                <a:close/>
+                <a:lnTo>
+                  <a:pt x="206083" y="997452"/>
+                </a:lnTo>
+                <a:close/>
+                <a:lnTo>
+                  <a:pt x="210663" y="992921"/>
+                </a:lnTo>
+                <a:close/>
+                <a:lnTo>
+                  <a:pt x="215243" y="988436"/>
+                </a:lnTo>
+                <a:close/>
+                <a:lnTo>
+                  <a:pt x="219822" y="983997"/>
+                </a:lnTo>
+                <a:close/>
+                <a:lnTo>
+                  <a:pt x="224402" y="979605"/>
+                </a:lnTo>
+                <a:close/>
+                <a:lnTo>
+                  <a:pt x="228982" y="975258"/>
+                </a:lnTo>
+                <a:close/>
+                <a:lnTo>
+                  <a:pt x="233561" y="970958"/>
+                </a:lnTo>
+                <a:close/>
+                <a:lnTo>
+                  <a:pt x="238141" y="966702"/>
+                </a:lnTo>
+                <a:close/>
+                <a:lnTo>
+                  <a:pt x="242721" y="962490"/>
+                </a:lnTo>
+                <a:close/>
+                <a:lnTo>
+                  <a:pt x="247300" y="958318"/>
+                </a:lnTo>
+                <a:close/>
+                <a:lnTo>
+                  <a:pt x="251880" y="954187"/>
+                </a:lnTo>
+                <a:close/>
+                <a:lnTo>
+                  <a:pt x="256459" y="950095"/>
+                </a:lnTo>
+                <a:close/>
+                <a:lnTo>
+                  <a:pt x="261039" y="946039"/>
+                </a:lnTo>
+                <a:close/>
+                <a:lnTo>
+                  <a:pt x="265619" y="942018"/>
+                </a:lnTo>
+                <a:close/>
+                <a:lnTo>
+                  <a:pt x="270198" y="938031"/>
+                </a:lnTo>
+                <a:close/>
+                <a:lnTo>
+                  <a:pt x="274778" y="934077"/>
+                </a:lnTo>
+                <a:close/>
+                <a:lnTo>
+                  <a:pt x="279358" y="930153"/>
+                </a:lnTo>
+                <a:close/>
+                <a:lnTo>
+                  <a:pt x="283937" y="926260"/>
+                </a:lnTo>
+                <a:close/>
+                <a:lnTo>
+                  <a:pt x="288517" y="922396"/>
+                </a:lnTo>
+                <a:close/>
+                <a:lnTo>
+                  <a:pt x="293096" y="918561"/>
+                </a:lnTo>
+                <a:close/>
+                <a:lnTo>
+                  <a:pt x="297676" y="914756"/>
+                </a:lnTo>
+                <a:close/>
+                <a:lnTo>
+                  <a:pt x="302256" y="910978"/>
+                </a:lnTo>
+                <a:close/>
+                <a:lnTo>
+                  <a:pt x="306835" y="907229"/>
+                </a:lnTo>
+                <a:close/>
+                <a:lnTo>
+                  <a:pt x="311415" y="903507"/>
+                </a:lnTo>
+                <a:close/>
+                <a:lnTo>
+                  <a:pt x="315995" y="899811"/>
+                </a:lnTo>
+                <a:close/>
+                <a:lnTo>
+                  <a:pt x="320574" y="896142"/>
+                </a:lnTo>
+                <a:close/>
+                <a:lnTo>
+                  <a:pt x="325154" y="892499"/>
+                </a:lnTo>
+                <a:close/>
+                <a:lnTo>
+                  <a:pt x="329734" y="888882"/>
+                </a:lnTo>
+                <a:close/>
+                <a:lnTo>
+                  <a:pt x="334313" y="885289"/>
+                </a:lnTo>
+                <a:close/>
+                <a:lnTo>
+                  <a:pt x="338893" y="881722"/>
+                </a:lnTo>
+                <a:close/>
+                <a:lnTo>
+                  <a:pt x="343472" y="878179"/>
+                </a:lnTo>
+                <a:close/>
+                <a:lnTo>
+                  <a:pt x="348052" y="874660"/>
+                </a:lnTo>
+                <a:close/>
+                <a:lnTo>
+                  <a:pt x="352632" y="871165"/>
+                </a:lnTo>
+                <a:close/>
+                <a:lnTo>
+                  <a:pt x="357211" y="867693"/>
+                </a:lnTo>
+                <a:close/>
+                <a:lnTo>
+                  <a:pt x="361791" y="864244"/>
+                </a:lnTo>
+                <a:close/>
+                <a:lnTo>
+                  <a:pt x="366371" y="860818"/>
+                </a:lnTo>
+                <a:close/>
+                <a:lnTo>
+                  <a:pt x="370950" y="857414"/>
+                </a:lnTo>
+                <a:close/>
+                <a:lnTo>
+                  <a:pt x="375530" y="854032"/>
+                </a:lnTo>
+                <a:close/>
+                <a:lnTo>
+                  <a:pt x="380110" y="850672"/>
+                </a:lnTo>
+                <a:close/>
+                <a:lnTo>
+                  <a:pt x="384689" y="847333"/>
+                </a:lnTo>
+                <a:close/>
+                <a:lnTo>
+                  <a:pt x="389269" y="844015"/>
+                </a:lnTo>
+                <a:close/>
+                <a:lnTo>
+                  <a:pt x="393848" y="840719"/>
+                </a:lnTo>
+                <a:close/>
+                <a:lnTo>
+                  <a:pt x="398428" y="837443"/>
+                </a:lnTo>
+                <a:close/>
+                <a:lnTo>
+                  <a:pt x="403008" y="834187"/>
+                </a:lnTo>
+                <a:close/>
+                <a:lnTo>
+                  <a:pt x="407587" y="830952"/>
+                </a:lnTo>
+                <a:close/>
+                <a:lnTo>
+                  <a:pt x="412167" y="827736"/>
+                </a:lnTo>
+                <a:close/>
+                <a:lnTo>
+                  <a:pt x="416747" y="824540"/>
+                </a:lnTo>
+                <a:close/>
+                <a:lnTo>
+                  <a:pt x="421326" y="821364"/>
+                </a:lnTo>
+                <a:close/>
+                <a:lnTo>
+                  <a:pt x="425906" y="818205"/>
+                </a:lnTo>
+                <a:close/>
+                <a:lnTo>
+                  <a:pt x="430485" y="815065"/>
+                </a:lnTo>
+                <a:close/>
+                <a:lnTo>
+                  <a:pt x="435065" y="811942"/>
+                </a:lnTo>
+                <a:close/>
+                <a:lnTo>
+                  <a:pt x="439645" y="808837"/>
+                </a:lnTo>
+                <a:close/>
+                <a:lnTo>
+                  <a:pt x="444224" y="805748"/>
+                </a:lnTo>
+                <a:close/>
+                <a:lnTo>
+                  <a:pt x="448804" y="802675"/>
+                </a:lnTo>
+                <a:close/>
+                <a:lnTo>
+                  <a:pt x="453384" y="799618"/>
+                </a:lnTo>
+                <a:close/>
+                <a:lnTo>
+                  <a:pt x="457963" y="796576"/>
+                </a:lnTo>
+                <a:close/>
+                <a:lnTo>
+                  <a:pt x="462543" y="793549"/>
+                </a:lnTo>
+                <a:close/>
+                <a:lnTo>
+                  <a:pt x="467123" y="790537"/>
+                </a:lnTo>
+                <a:close/>
+                <a:lnTo>
+                  <a:pt x="471702" y="787540"/>
+                </a:lnTo>
+                <a:close/>
+                <a:lnTo>
+                  <a:pt x="476282" y="784557"/>
+                </a:lnTo>
+                <a:close/>
+                <a:lnTo>
+                  <a:pt x="480861" y="781589"/>
+                </a:lnTo>
+                <a:close/>
+                <a:lnTo>
+                  <a:pt x="485441" y="778636"/>
+                </a:lnTo>
+                <a:close/>
+                <a:lnTo>
+                  <a:pt x="490021" y="775698"/>
+                </a:lnTo>
+                <a:close/>
+                <a:lnTo>
+                  <a:pt x="494600" y="772775"/>
+                </a:lnTo>
+                <a:close/>
+                <a:lnTo>
+                  <a:pt x="499180" y="769866"/>
+                </a:lnTo>
+                <a:close/>
+                <a:lnTo>
+                  <a:pt x="503760" y="766972"/>
+                </a:lnTo>
+                <a:close/>
+                <a:lnTo>
+                  <a:pt x="508339" y="764093"/>
+                </a:lnTo>
+                <a:close/>
+                <a:lnTo>
+                  <a:pt x="512919" y="761228"/>
+                </a:lnTo>
+                <a:close/>
+                <a:lnTo>
+                  <a:pt x="517498" y="758377"/>
+                </a:lnTo>
+                <a:close/>
+                <a:lnTo>
+                  <a:pt x="522078" y="755540"/>
+                </a:lnTo>
+                <a:close/>
+                <a:lnTo>
+                  <a:pt x="526658" y="752716"/>
+                </a:lnTo>
+                <a:close/>
+                <a:lnTo>
+                  <a:pt x="531237" y="749905"/>
+                </a:lnTo>
+                <a:close/>
+                <a:lnTo>
+                  <a:pt x="535817" y="747107"/>
+                </a:lnTo>
+                <a:close/>
+                <a:lnTo>
+                  <a:pt x="540397" y="744322"/>
+                </a:lnTo>
+                <a:close/>
+                <a:lnTo>
+                  <a:pt x="544976" y="741548"/>
+                </a:lnTo>
+                <a:close/>
+                <a:lnTo>
+                  <a:pt x="549556" y="738786"/>
+                </a:lnTo>
+                <a:close/>
+                <a:lnTo>
+                  <a:pt x="554136" y="736036"/>
+                </a:lnTo>
+                <a:close/>
+                <a:lnTo>
+                  <a:pt x="558715" y="733297"/>
+                </a:lnTo>
+                <a:close/>
+                <a:lnTo>
+                  <a:pt x="563295" y="730569"/>
+                </a:lnTo>
+                <a:close/>
+                <a:lnTo>
+                  <a:pt x="567874" y="727853"/>
+                </a:lnTo>
+                <a:close/>
+                <a:lnTo>
+                  <a:pt x="572454" y="725148"/>
+                </a:lnTo>
+                <a:close/>
+                <a:lnTo>
+                  <a:pt x="577034" y="722454"/>
+                </a:lnTo>
+                <a:close/>
+                <a:lnTo>
+                  <a:pt x="581613" y="719771"/>
+                </a:lnTo>
+                <a:close/>
+                <a:lnTo>
+                  <a:pt x="586193" y="717100"/>
+                </a:lnTo>
+                <a:close/>
+                <a:lnTo>
+                  <a:pt x="590773" y="714439"/>
+                </a:lnTo>
+                <a:close/>
+                <a:lnTo>
+                  <a:pt x="595352" y="711790"/>
+                </a:lnTo>
+                <a:close/>
+                <a:lnTo>
+                  <a:pt x="599932" y="709152"/>
+                </a:lnTo>
+                <a:close/>
+                <a:lnTo>
+                  <a:pt x="604512" y="706524"/>
+                </a:lnTo>
+                <a:close/>
+                <a:lnTo>
+                  <a:pt x="609091" y="703908"/>
+                </a:lnTo>
+                <a:close/>
+                <a:lnTo>
+                  <a:pt x="613671" y="701302"/>
+                </a:lnTo>
+                <a:close/>
+                <a:lnTo>
+                  <a:pt x="618250" y="698707"/>
+                </a:lnTo>
+                <a:close/>
+                <a:lnTo>
+                  <a:pt x="622830" y="696123"/>
+                </a:lnTo>
+                <a:close/>
+                <a:lnTo>
+                  <a:pt x="627410" y="693550"/>
+                </a:lnTo>
+                <a:close/>
+                <a:lnTo>
+                  <a:pt x="631989" y="690987"/>
+                </a:lnTo>
+                <a:close/>
+                <a:lnTo>
+                  <a:pt x="636569" y="688435"/>
+                </a:lnTo>
+                <a:close/>
+                <a:lnTo>
+                  <a:pt x="641149" y="685893"/>
+                </a:lnTo>
+                <a:close/>
+                <a:lnTo>
+                  <a:pt x="645728" y="683362"/>
+                </a:lnTo>
+                <a:close/>
+                <a:lnTo>
+                  <a:pt x="650308" y="680842"/>
+                </a:lnTo>
+                <a:close/>
+                <a:lnTo>
+                  <a:pt x="654887" y="678331"/>
+                </a:lnTo>
+                <a:close/>
+                <a:lnTo>
+                  <a:pt x="659467" y="675829"/>
+                </a:lnTo>
+                <a:close/>
+                <a:lnTo>
+                  <a:pt x="664047" y="673337"/>
+                </a:lnTo>
+                <a:close/>
+                <a:lnTo>
+                  <a:pt x="668626" y="670853"/>
+                </a:lnTo>
+                <a:close/>
+                <a:lnTo>
+                  <a:pt x="673206" y="668378"/>
+                </a:lnTo>
+                <a:close/>
+                <a:lnTo>
+                  <a:pt x="677786" y="665912"/>
+                </a:lnTo>
+                <a:close/>
+                <a:lnTo>
+                  <a:pt x="682365" y="663453"/>
+                </a:lnTo>
+                <a:close/>
+                <a:lnTo>
+                  <a:pt x="686945" y="661002"/>
+                </a:lnTo>
+                <a:close/>
+                <a:lnTo>
+                  <a:pt x="691525" y="658558"/>
+                </a:lnTo>
+                <a:close/>
+                <a:lnTo>
+                  <a:pt x="696104" y="656122"/>
+                </a:lnTo>
+                <a:close/>
+                <a:lnTo>
+                  <a:pt x="700684" y="653694"/>
+                </a:lnTo>
+                <a:close/>
+                <a:lnTo>
+                  <a:pt x="705263" y="651274"/>
+                </a:lnTo>
+                <a:close/>
+                <a:lnTo>
+                  <a:pt x="709843" y="648862"/>
+                </a:lnTo>
+                <a:close/>
+                <a:lnTo>
+                  <a:pt x="714423" y="646459"/>
+                </a:lnTo>
+                <a:close/>
+                <a:lnTo>
+                  <a:pt x="719002" y="644064"/>
+                </a:lnTo>
+                <a:close/>
+                <a:lnTo>
+                  <a:pt x="723582" y="641679"/>
+                </a:lnTo>
+                <a:close/>
+                <a:lnTo>
+                  <a:pt x="728162" y="639302"/>
+                </a:lnTo>
+                <a:close/>
+                <a:lnTo>
+                  <a:pt x="732741" y="636935"/>
+                </a:lnTo>
+                <a:close/>
+                <a:lnTo>
+                  <a:pt x="737321" y="634577"/>
+                </a:lnTo>
+                <a:close/>
+                <a:lnTo>
+                  <a:pt x="741901" y="632228"/>
+                </a:lnTo>
+                <a:close/>
+                <a:lnTo>
+                  <a:pt x="746480" y="629889"/>
+                </a:lnTo>
+                <a:close/>
+                <a:lnTo>
+                  <a:pt x="751060" y="627558"/>
+                </a:lnTo>
+                <a:close/>
+                <a:lnTo>
+                  <a:pt x="755639" y="625235"/>
+                </a:lnTo>
+                <a:close/>
+                <a:lnTo>
+                  <a:pt x="760219" y="622921"/>
+                </a:lnTo>
+                <a:close/>
+                <a:lnTo>
+                  <a:pt x="764799" y="620614"/>
+                </a:lnTo>
+                <a:close/>
+                <a:lnTo>
+                  <a:pt x="769378" y="618315"/>
+                </a:lnTo>
+                <a:close/>
+                <a:lnTo>
+                  <a:pt x="773958" y="616023"/>
+                </a:lnTo>
+                <a:close/>
+                <a:lnTo>
+                  <a:pt x="778538" y="613739"/>
+                </a:lnTo>
+                <a:close/>
+                <a:lnTo>
+                  <a:pt x="783117" y="611461"/>
+                </a:lnTo>
+                <a:close/>
+                <a:lnTo>
+                  <a:pt x="787697" y="609190"/>
+                </a:lnTo>
+                <a:close/>
+                <a:lnTo>
+                  <a:pt x="792276" y="606926"/>
+                </a:lnTo>
+                <a:close/>
+                <a:lnTo>
+                  <a:pt x="796856" y="604669"/>
+                </a:lnTo>
+                <a:close/>
+                <a:lnTo>
+                  <a:pt x="801436" y="602419"/>
+                </a:lnTo>
+                <a:close/>
+                <a:lnTo>
+                  <a:pt x="806015" y="600176"/>
+                </a:lnTo>
+                <a:close/>
+                <a:lnTo>
+                  <a:pt x="810595" y="597940"/>
+                </a:lnTo>
+                <a:close/>
+                <a:lnTo>
+                  <a:pt x="815175" y="595710"/>
+                </a:lnTo>
+                <a:close/>
+                <a:lnTo>
+                  <a:pt x="819754" y="593488"/>
+                </a:lnTo>
+                <a:close/>
+                <a:lnTo>
+                  <a:pt x="824334" y="591273"/>
+                </a:lnTo>
+                <a:close/>
+                <a:lnTo>
+                  <a:pt x="828914" y="589064"/>
+                </a:lnTo>
+                <a:close/>
+                <a:lnTo>
+                  <a:pt x="833493" y="586863"/>
+                </a:lnTo>
+                <a:close/>
+                <a:lnTo>
+                  <a:pt x="838073" y="584668"/>
+                </a:lnTo>
+                <a:close/>
+                <a:lnTo>
+                  <a:pt x="842652" y="582480"/>
+                </a:lnTo>
+                <a:close/>
+                <a:lnTo>
+                  <a:pt x="847232" y="580299"/>
+                </a:lnTo>
+                <a:close/>
+                <a:lnTo>
+                  <a:pt x="851812" y="578125"/>
+                </a:lnTo>
+                <a:close/>
+                <a:lnTo>
+                  <a:pt x="856391" y="575957"/>
+                </a:lnTo>
+                <a:close/>
+                <a:lnTo>
+                  <a:pt x="860971" y="573796"/>
+                </a:lnTo>
+                <a:close/>
+                <a:lnTo>
+                  <a:pt x="865551" y="571642"/>
+                </a:lnTo>
+                <a:close/>
+                <a:lnTo>
+                  <a:pt x="870130" y="569495"/>
+                </a:lnTo>
+                <a:close/>
+                <a:lnTo>
+                  <a:pt x="874710" y="567354"/>
+                </a:lnTo>
+                <a:close/>
+                <a:lnTo>
+                  <a:pt x="879289" y="565219"/>
+                </a:lnTo>
+                <a:close/>
+                <a:lnTo>
+                  <a:pt x="883869" y="563091"/>
+                </a:lnTo>
+                <a:close/>
+                <a:lnTo>
+                  <a:pt x="888449" y="560968"/>
+                </a:lnTo>
+                <a:close/>
+                <a:lnTo>
+                  <a:pt x="893028" y="558852"/>
+                </a:lnTo>
+                <a:close/>
+                <a:lnTo>
+                  <a:pt x="897608" y="556742"/>
+                </a:lnTo>
+                <a:close/>
+                <a:lnTo>
+                  <a:pt x="902188" y="554637"/>
+                </a:lnTo>
+                <a:close/>
+                <a:lnTo>
+                  <a:pt x="906767" y="552538"/>
+                </a:lnTo>
+                <a:close/>
+                <a:lnTo>
+                  <a:pt x="911347" y="550444"/>
+                </a:lnTo>
+                <a:close/>
+                <a:lnTo>
+                  <a:pt x="915927" y="548356"/>
+                </a:lnTo>
+                <a:close/>
+                <a:lnTo>
+                  <a:pt x="920506" y="546272"/>
+                </a:lnTo>
+                <a:close/>
+                <a:lnTo>
+                  <a:pt x="925086" y="544194"/>
+                </a:lnTo>
+                <a:close/>
+                <a:lnTo>
+                  <a:pt x="929665" y="542121"/>
+                </a:lnTo>
+                <a:close/>
+                <a:lnTo>
+                  <a:pt x="934245" y="540054"/>
+                </a:lnTo>
+                <a:close/>
+                <a:lnTo>
+                  <a:pt x="938825" y="537992"/>
+                </a:lnTo>
+                <a:close/>
+                <a:lnTo>
+                  <a:pt x="943404" y="535936"/>
+                </a:lnTo>
+                <a:close/>
+                <a:lnTo>
+                  <a:pt x="947984" y="533885"/>
+                </a:lnTo>
+                <a:close/>
+                <a:lnTo>
+                  <a:pt x="952564" y="531839"/>
+                </a:lnTo>
+                <a:close/>
+                <a:lnTo>
+                  <a:pt x="957143" y="529800"/>
+                </a:lnTo>
+                <a:close/>
+                <a:lnTo>
+                  <a:pt x="961723" y="527766"/>
+                </a:lnTo>
+                <a:close/>
+                <a:lnTo>
+                  <a:pt x="966303" y="525738"/>
+                </a:lnTo>
+                <a:close/>
+                <a:lnTo>
+                  <a:pt x="970882" y="523716"/>
+                </a:lnTo>
+                <a:close/>
+                <a:lnTo>
+                  <a:pt x="975462" y="521699"/>
+                </a:lnTo>
+                <a:close/>
+                <a:lnTo>
+                  <a:pt x="980041" y="519688"/>
+                </a:lnTo>
+                <a:close/>
+                <a:lnTo>
+                  <a:pt x="984621" y="517681"/>
+                </a:lnTo>
+                <a:close/>
+                <a:lnTo>
+                  <a:pt x="989201" y="515680"/>
+                </a:lnTo>
+                <a:close/>
+                <a:lnTo>
+                  <a:pt x="993780" y="513685"/>
+                </a:lnTo>
+                <a:close/>
+                <a:lnTo>
+                  <a:pt x="998360" y="511694"/>
+                </a:lnTo>
+                <a:close/>
+                <a:lnTo>
+                  <a:pt x="1002940" y="509707"/>
+                </a:lnTo>
+                <a:close/>
+                <a:lnTo>
+                  <a:pt x="1007519" y="507726"/>
+                </a:lnTo>
+                <a:close/>
+                <a:lnTo>
+                  <a:pt x="1012099" y="505749"/>
+                </a:lnTo>
+                <a:close/>
+                <a:lnTo>
+                  <a:pt x="1016678" y="503777"/>
+                </a:lnTo>
+                <a:close/>
+                <a:lnTo>
+                  <a:pt x="1021258" y="501810"/>
+                </a:lnTo>
+                <a:close/>
+                <a:lnTo>
+                  <a:pt x="1025838" y="499848"/>
+                </a:lnTo>
+                <a:close/>
+                <a:lnTo>
+                  <a:pt x="1030417" y="497891"/>
+                </a:lnTo>
+                <a:close/>
+                <a:lnTo>
+                  <a:pt x="1034997" y="495940"/>
+                </a:lnTo>
+                <a:close/>
+                <a:lnTo>
+                  <a:pt x="1039577" y="493994"/>
+                </a:lnTo>
+                <a:close/>
+                <a:lnTo>
+                  <a:pt x="1044156" y="492054"/>
+                </a:lnTo>
+                <a:close/>
+                <a:lnTo>
+                  <a:pt x="1048736" y="490119"/>
+                </a:lnTo>
+                <a:close/>
+                <a:lnTo>
+                  <a:pt x="1053316" y="488191"/>
+                </a:lnTo>
+                <a:close/>
+                <a:lnTo>
+                  <a:pt x="1057895" y="486269"/>
+                </a:lnTo>
+                <a:close/>
+                <a:lnTo>
+                  <a:pt x="1062475" y="484352"/>
+                </a:lnTo>
+                <a:close/>
+                <a:lnTo>
+                  <a:pt x="1067054" y="482441"/>
+                </a:lnTo>
+                <a:close/>
+                <a:lnTo>
+                  <a:pt x="1071634" y="480536"/>
+                </a:lnTo>
+                <a:close/>
+                <a:lnTo>
+                  <a:pt x="1076214" y="478636"/>
+                </a:lnTo>
+                <a:close/>
+                <a:lnTo>
+                  <a:pt x="1080793" y="476740"/>
+                </a:lnTo>
+                <a:close/>
+                <a:lnTo>
+                  <a:pt x="1085373" y="474850"/>
+                </a:lnTo>
+                <a:close/>
+                <a:lnTo>
+                  <a:pt x="1089953" y="472964"/>
+                </a:lnTo>
+                <a:close/>
+                <a:lnTo>
+                  <a:pt x="1094532" y="471083"/>
+                </a:lnTo>
+                <a:close/>
+                <a:lnTo>
+                  <a:pt x="1099112" y="469205"/>
+                </a:lnTo>
+                <a:close/>
+                <a:lnTo>
+                  <a:pt x="1103691" y="467332"/>
+                </a:lnTo>
+                <a:close/>
+                <a:lnTo>
+                  <a:pt x="1108271" y="465463"/>
+                </a:lnTo>
+                <a:close/>
+                <a:lnTo>
+                  <a:pt x="1112851" y="463598"/>
+                </a:lnTo>
+                <a:close/>
+                <a:lnTo>
+                  <a:pt x="1117430" y="461738"/>
+                </a:lnTo>
+                <a:close/>
+                <a:lnTo>
+                  <a:pt x="1122010" y="459883"/>
+                </a:lnTo>
+                <a:close/>
+                <a:lnTo>
+                  <a:pt x="1126590" y="458032"/>
+                </a:lnTo>
+                <a:close/>
+                <a:lnTo>
+                  <a:pt x="1131169" y="456185"/>
+                </a:lnTo>
+                <a:close/>
+                <a:lnTo>
+                  <a:pt x="1135749" y="454344"/>
+                </a:lnTo>
+                <a:close/>
+                <a:lnTo>
+                  <a:pt x="1140329" y="452508"/>
+                </a:lnTo>
+                <a:close/>
+                <a:lnTo>
+                  <a:pt x="1144908" y="450677"/>
+                </a:lnTo>
+                <a:close/>
+                <a:lnTo>
+                  <a:pt x="1149488" y="448851"/>
+                </a:lnTo>
+                <a:close/>
+                <a:lnTo>
+                  <a:pt x="1154067" y="447029"/>
+                </a:lnTo>
+                <a:close/>
+                <a:lnTo>
+                  <a:pt x="1158647" y="445212"/>
+                </a:lnTo>
+                <a:close/>
+                <a:lnTo>
+                  <a:pt x="1163227" y="443400"/>
+                </a:lnTo>
+                <a:close/>
+                <a:lnTo>
+                  <a:pt x="1167806" y="441592"/>
+                </a:lnTo>
+                <a:close/>
+                <a:lnTo>
+                  <a:pt x="1172386" y="439787"/>
+                </a:lnTo>
+                <a:close/>
+                <a:lnTo>
+                  <a:pt x="1176966" y="437987"/>
+                </a:lnTo>
+                <a:close/>
+                <a:lnTo>
+                  <a:pt x="1181545" y="436189"/>
+                </a:lnTo>
+                <a:close/>
+                <a:lnTo>
+                  <a:pt x="1186125" y="434395"/>
+                </a:lnTo>
+                <a:close/>
+                <a:lnTo>
+                  <a:pt x="1190705" y="432604"/>
+                </a:lnTo>
+                <a:close/>
+                <a:lnTo>
+                  <a:pt x="1195284" y="430815"/>
+                </a:lnTo>
+                <a:close/>
+                <a:lnTo>
+                  <a:pt x="1199864" y="429030"/>
+                </a:lnTo>
+                <a:close/>
+                <a:lnTo>
+                  <a:pt x="1204443" y="427248"/>
+                </a:lnTo>
+                <a:close/>
+                <a:lnTo>
+                  <a:pt x="1209023" y="425471"/>
+                </a:lnTo>
+                <a:close/>
+                <a:lnTo>
+                  <a:pt x="1213603" y="423697"/>
+                </a:lnTo>
+                <a:close/>
+                <a:lnTo>
+                  <a:pt x="1218182" y="421927"/>
+                </a:lnTo>
+                <a:close/>
+                <a:lnTo>
+                  <a:pt x="1222762" y="420163"/>
+                </a:lnTo>
+                <a:close/>
+                <a:lnTo>
+                  <a:pt x="1227342" y="418403"/>
+                </a:lnTo>
+                <a:close/>
+                <a:lnTo>
+                  <a:pt x="1231921" y="416649"/>
+                </a:lnTo>
+                <a:close/>
+                <a:lnTo>
+                  <a:pt x="1236501" y="414900"/>
+                </a:lnTo>
+                <a:close/>
+                <a:lnTo>
+                  <a:pt x="1241080" y="413156"/>
+                </a:lnTo>
+                <a:close/>
+                <a:lnTo>
+                  <a:pt x="1245660" y="411418"/>
+                </a:lnTo>
+                <a:close/>
+                <a:lnTo>
+                  <a:pt x="1250240" y="409685"/>
+                </a:lnTo>
+                <a:close/>
+                <a:lnTo>
+                  <a:pt x="1254819" y="407956"/>
+                </a:lnTo>
+                <a:close/>
+                <a:lnTo>
+                  <a:pt x="1259399" y="406231"/>
+                </a:lnTo>
+                <a:close/>
+                <a:lnTo>
+                  <a:pt x="1263979" y="404509"/>
+                </a:lnTo>
+                <a:close/>
+                <a:lnTo>
+                  <a:pt x="1268558" y="402791"/>
+                </a:lnTo>
+                <a:close/>
+                <a:lnTo>
+                  <a:pt x="1273138" y="401076"/>
+                </a:lnTo>
+                <a:close/>
+                <a:lnTo>
+                  <a:pt x="1277718" y="399362"/>
+                </a:lnTo>
+                <a:close/>
+                <a:lnTo>
+                  <a:pt x="1282297" y="397651"/>
+                </a:lnTo>
+                <a:close/>
+                <a:lnTo>
+                  <a:pt x="1286877" y="395942"/>
+                </a:lnTo>
+                <a:close/>
+                <a:lnTo>
+                  <a:pt x="1291456" y="394235"/>
+                </a:lnTo>
+                <a:close/>
+                <a:lnTo>
+                  <a:pt x="1296036" y="392531"/>
+                </a:lnTo>
+                <a:close/>
+                <a:lnTo>
+                  <a:pt x="1300616" y="390831"/>
+                </a:lnTo>
+                <a:close/>
+                <a:lnTo>
+                  <a:pt x="1305195" y="389134"/>
+                </a:lnTo>
+                <a:close/>
+                <a:lnTo>
+                  <a:pt x="1309775" y="387442"/>
+                </a:lnTo>
+                <a:close/>
+                <a:lnTo>
+                  <a:pt x="1314355" y="385755"/>
+                </a:lnTo>
+                <a:close/>
+                <a:lnTo>
+                  <a:pt x="1318934" y="384073"/>
+                </a:lnTo>
+                <a:close/>
+                <a:lnTo>
+                  <a:pt x="1323514" y="382397"/>
+                </a:lnTo>
+                <a:close/>
+                <a:lnTo>
+                  <a:pt x="1328093" y="380727"/>
+                </a:lnTo>
+                <a:close/>
+                <a:lnTo>
+                  <a:pt x="1332673" y="379063"/>
+                </a:lnTo>
+                <a:close/>
+                <a:lnTo>
+                  <a:pt x="1337253" y="377405"/>
+                </a:lnTo>
+                <a:close/>
+                <a:lnTo>
+                  <a:pt x="1341832" y="375752"/>
+                </a:lnTo>
+                <a:close/>
+                <a:lnTo>
+                  <a:pt x="1346412" y="374102"/>
+                </a:lnTo>
+                <a:close/>
+                <a:lnTo>
+                  <a:pt x="1350992" y="372457"/>
+                </a:lnTo>
+                <a:close/>
+                <a:lnTo>
+                  <a:pt x="1355571" y="370813"/>
+                </a:lnTo>
+                <a:close/>
+                <a:lnTo>
+                  <a:pt x="1360151" y="369172"/>
+                </a:lnTo>
+                <a:close/>
+                <a:lnTo>
+                  <a:pt x="1364731" y="367533"/>
+                </a:lnTo>
+                <a:close/>
+                <a:lnTo>
+                  <a:pt x="1369310" y="365893"/>
+                </a:lnTo>
+                <a:close/>
+                <a:lnTo>
+                  <a:pt x="1373890" y="364254"/>
+                </a:lnTo>
+                <a:close/>
+                <a:lnTo>
+                  <a:pt x="1378469" y="362616"/>
+                </a:lnTo>
+                <a:close/>
+                <a:lnTo>
+                  <a:pt x="1383049" y="360979"/>
+                </a:lnTo>
+                <a:close/>
+                <a:lnTo>
+                  <a:pt x="1387629" y="359345"/>
+                </a:lnTo>
+                <a:close/>
+                <a:lnTo>
+                  <a:pt x="1392208" y="357716"/>
+                </a:lnTo>
+                <a:close/>
+                <a:lnTo>
+                  <a:pt x="1396788" y="356093"/>
+                </a:lnTo>
+                <a:close/>
+                <a:lnTo>
+                  <a:pt x="1401368" y="354479"/>
+                </a:lnTo>
+                <a:close/>
+                <a:lnTo>
+                  <a:pt x="1405947" y="352873"/>
+                </a:lnTo>
+                <a:close/>
+                <a:lnTo>
+                  <a:pt x="1410527" y="351278"/>
+                </a:lnTo>
+                <a:close/>
+                <a:lnTo>
+                  <a:pt x="1415107" y="349695"/>
+                </a:lnTo>
+                <a:close/>
+                <a:lnTo>
+                  <a:pt x="1419686" y="348126"/>
+                </a:lnTo>
+                <a:close/>
+                <a:lnTo>
+                  <a:pt x="1424266" y="346568"/>
+                </a:lnTo>
+                <a:close/>
+                <a:lnTo>
+                  <a:pt x="1428845" y="345017"/>
+                </a:lnTo>
+                <a:close/>
+                <a:lnTo>
+                  <a:pt x="1433425" y="343466"/>
+                </a:lnTo>
+                <a:close/>
+                <a:lnTo>
+                  <a:pt x="1438005" y="341912"/>
+                </a:lnTo>
+                <a:close/>
+                <a:lnTo>
+                  <a:pt x="1442584" y="340349"/>
+                </a:lnTo>
+                <a:close/>
+                <a:lnTo>
+                  <a:pt x="1447164" y="338771"/>
+                </a:lnTo>
+                <a:close/>
+                <a:lnTo>
+                  <a:pt x="1451744" y="337174"/>
+                </a:lnTo>
+                <a:close/>
+                <a:lnTo>
+                  <a:pt x="1456323" y="335551"/>
+                </a:lnTo>
+                <a:close/>
+                <a:lnTo>
+                  <a:pt x="1460903" y="333899"/>
+                </a:lnTo>
+                <a:close/>
+                <a:lnTo>
+                  <a:pt x="1465482" y="332211"/>
+                </a:lnTo>
+                <a:close/>
+                <a:lnTo>
+                  <a:pt x="1470062" y="330497"/>
+                </a:lnTo>
+                <a:close/>
+                <a:lnTo>
+                  <a:pt x="1474642" y="328775"/>
+                </a:lnTo>
+                <a:close/>
+                <a:lnTo>
+                  <a:pt x="1479221" y="327064"/>
+                </a:lnTo>
+                <a:close/>
+                <a:lnTo>
+                  <a:pt x="1483801" y="325384"/>
+                </a:lnTo>
+                <a:close/>
+                <a:lnTo>
+                  <a:pt x="1488381" y="323754"/>
+                </a:lnTo>
+                <a:close/>
+                <a:lnTo>
+                  <a:pt x="1492960" y="322194"/>
+                </a:lnTo>
+                <a:close/>
+                <a:lnTo>
+                  <a:pt x="1497540" y="320723"/>
+                </a:lnTo>
+                <a:close/>
+                <a:lnTo>
+                  <a:pt x="1502120" y="319360"/>
+                </a:lnTo>
+                <a:close/>
+                <a:lnTo>
+                  <a:pt x="1506699" y="318125"/>
+                </a:lnTo>
+                <a:close/>
+                <a:lnTo>
+                  <a:pt x="1511279" y="317035"/>
+                </a:lnTo>
+                <a:close/>
+                <a:lnTo>
+                  <a:pt x="1515858" y="316060"/>
+                </a:lnTo>
+                <a:close/>
+                <a:lnTo>
+                  <a:pt x="1520438" y="315128"/>
+                </a:lnTo>
+                <a:close/>
+                <a:lnTo>
+                  <a:pt x="1525018" y="314166"/>
+                </a:lnTo>
+                <a:close/>
+                <a:lnTo>
+                  <a:pt x="1529597" y="313103"/>
+                </a:lnTo>
+                <a:close/>
+                <a:lnTo>
+                  <a:pt x="1534177" y="311865"/>
+                </a:lnTo>
+                <a:close/>
+                <a:lnTo>
+                  <a:pt x="1538757" y="310379"/>
+                </a:lnTo>
+                <a:close/>
+                <a:lnTo>
+                  <a:pt x="1543336" y="308573"/>
+                </a:lnTo>
+                <a:close/>
+                <a:lnTo>
+                  <a:pt x="1547916" y="306374"/>
+                </a:lnTo>
+                <a:close/>
+                <a:lnTo>
+                  <a:pt x="1552495" y="303709"/>
+                </a:lnTo>
+                <a:close/>
+                <a:lnTo>
+                  <a:pt x="1557075" y="300513"/>
+                </a:lnTo>
+                <a:close/>
+                <a:lnTo>
+                  <a:pt x="1561655" y="296821"/>
+                </a:lnTo>
+                <a:close/>
+                <a:lnTo>
+                  <a:pt x="1566234" y="292761"/>
+                </a:lnTo>
+                <a:close/>
+                <a:lnTo>
+                  <a:pt x="1570814" y="288459"/>
+                </a:lnTo>
+                <a:close/>
+                <a:lnTo>
+                  <a:pt x="1575394" y="284045"/>
+                </a:lnTo>
+                <a:close/>
+                <a:lnTo>
+                  <a:pt x="1579973" y="279645"/>
+                </a:lnTo>
+                <a:close/>
+                <a:lnTo>
+                  <a:pt x="1584553" y="275388"/>
+                </a:lnTo>
+                <a:close/>
+                <a:lnTo>
+                  <a:pt x="1589133" y="271402"/>
+                </a:lnTo>
+                <a:close/>
+                <a:lnTo>
+                  <a:pt x="1593712" y="267815"/>
+                </a:lnTo>
+                <a:close/>
+                <a:lnTo>
+                  <a:pt x="1598292" y="264756"/>
+                </a:lnTo>
+                <a:close/>
+                <a:lnTo>
+                  <a:pt x="1602871" y="262344"/>
+                </a:lnTo>
+                <a:close/>
+                <a:lnTo>
+                  <a:pt x="1607451" y="260579"/>
+                </a:lnTo>
+                <a:close/>
+                <a:lnTo>
+                  <a:pt x="1612031" y="259362"/>
+                </a:lnTo>
+                <a:close/>
+                <a:lnTo>
+                  <a:pt x="1616610" y="258593"/>
+                </a:lnTo>
+                <a:close/>
+                <a:lnTo>
+                  <a:pt x="1621190" y="258172"/>
+                </a:lnTo>
+                <a:close/>
+                <a:lnTo>
+                  <a:pt x="1625770" y="257996"/>
+                </a:lnTo>
+                <a:close/>
+                <a:lnTo>
+                  <a:pt x="1630349" y="257965"/>
+                </a:lnTo>
+                <a:close/>
+                <a:lnTo>
+                  <a:pt x="1634929" y="257978"/>
+                </a:lnTo>
+                <a:close/>
+                <a:lnTo>
+                  <a:pt x="1639509" y="257935"/>
+                </a:lnTo>
+                <a:close/>
+                <a:lnTo>
+                  <a:pt x="1644088" y="257734"/>
+                </a:lnTo>
+                <a:close/>
+                <a:lnTo>
+                  <a:pt x="1648668" y="257279"/>
+                </a:lnTo>
+                <a:close/>
+                <a:lnTo>
+                  <a:pt x="1653247" y="256549"/>
+                </a:lnTo>
+                <a:close/>
+                <a:lnTo>
+                  <a:pt x="1657827" y="255582"/>
+                </a:lnTo>
+                <a:close/>
+                <a:lnTo>
+                  <a:pt x="1662407" y="254415"/>
+                </a:lnTo>
+                <a:close/>
+                <a:lnTo>
+                  <a:pt x="1666986" y="253087"/>
+                </a:lnTo>
+                <a:close/>
+                <a:lnTo>
+                  <a:pt x="1671566" y="251636"/>
+                </a:lnTo>
+                <a:close/>
+                <a:lnTo>
+                  <a:pt x="1676146" y="250100"/>
+                </a:lnTo>
+                <a:close/>
+                <a:lnTo>
+                  <a:pt x="1680725" y="248518"/>
+                </a:lnTo>
+                <a:close/>
+                <a:lnTo>
+                  <a:pt x="1685305" y="246927"/>
+                </a:lnTo>
+                <a:close/>
+                <a:lnTo>
+                  <a:pt x="1689884" y="245367"/>
+                </a:lnTo>
+                <a:close/>
+                <a:lnTo>
+                  <a:pt x="1694464" y="243873"/>
+                </a:lnTo>
+                <a:close/>
+                <a:lnTo>
+                  <a:pt x="1699044" y="242455"/>
+                </a:lnTo>
+                <a:close/>
+                <a:lnTo>
+                  <a:pt x="1703623" y="241103"/>
+                </a:lnTo>
+                <a:close/>
+                <a:lnTo>
+                  <a:pt x="1708203" y="239808"/>
+                </a:lnTo>
+                <a:close/>
+                <a:lnTo>
+                  <a:pt x="1712783" y="238559"/>
+                </a:lnTo>
+                <a:close/>
+                <a:lnTo>
+                  <a:pt x="1717362" y="237346"/>
+                </a:lnTo>
+                <a:close/>
+                <a:lnTo>
+                  <a:pt x="1721942" y="236158"/>
+                </a:lnTo>
+                <a:close/>
+                <a:lnTo>
+                  <a:pt x="1726522" y="234985"/>
+                </a:lnTo>
+                <a:close/>
+                <a:lnTo>
+                  <a:pt x="1731101" y="233818"/>
+                </a:lnTo>
+                <a:close/>
+                <a:lnTo>
+                  <a:pt x="1735681" y="232645"/>
+                </a:lnTo>
+                <a:close/>
+                <a:lnTo>
+                  <a:pt x="1740260" y="231457"/>
+                </a:lnTo>
+                <a:close/>
+                <a:lnTo>
+                  <a:pt x="1744840" y="230253"/>
+                </a:lnTo>
+                <a:close/>
+                <a:lnTo>
+                  <a:pt x="1749420" y="229033"/>
+                </a:lnTo>
+                <a:close/>
+                <a:lnTo>
+                  <a:pt x="1753999" y="227801"/>
+                </a:lnTo>
+                <a:close/>
+                <a:lnTo>
+                  <a:pt x="1758579" y="226560"/>
+                </a:lnTo>
+                <a:close/>
+                <a:lnTo>
+                  <a:pt x="1763159" y="225312"/>
+                </a:lnTo>
+                <a:close/>
+                <a:lnTo>
+                  <a:pt x="1767738" y="224059"/>
+                </a:lnTo>
+                <a:close/>
+                <a:lnTo>
+                  <a:pt x="1772318" y="222805"/>
+                </a:lnTo>
+                <a:close/>
+                <a:lnTo>
+                  <a:pt x="1776897" y="221552"/>
+                </a:lnTo>
+                <a:close/>
+                <a:lnTo>
+                  <a:pt x="1781477" y="220303"/>
+                </a:lnTo>
+                <a:close/>
+                <a:lnTo>
+                  <a:pt x="1786057" y="219060"/>
+                </a:lnTo>
+                <a:close/>
+                <a:lnTo>
+                  <a:pt x="1790636" y="217824"/>
+                </a:lnTo>
+                <a:close/>
+                <a:lnTo>
+                  <a:pt x="1795216" y="216594"/>
+                </a:lnTo>
+                <a:close/>
+                <a:lnTo>
+                  <a:pt x="1799796" y="215369"/>
+                </a:lnTo>
+                <a:close/>
+                <a:lnTo>
+                  <a:pt x="1804375" y="214150"/>
+                </a:lnTo>
+                <a:close/>
+                <a:lnTo>
+                  <a:pt x="1808955" y="212935"/>
+                </a:lnTo>
+                <a:close/>
+                <a:lnTo>
+                  <a:pt x="1813535" y="211723"/>
+                </a:lnTo>
+                <a:close/>
+                <a:lnTo>
+                  <a:pt x="1818114" y="210515"/>
+                </a:lnTo>
+                <a:close/>
+                <a:lnTo>
+                  <a:pt x="1822694" y="209310"/>
+                </a:lnTo>
+                <a:close/>
+                <a:lnTo>
+                  <a:pt x="1827273" y="208107"/>
+                </a:lnTo>
+                <a:close/>
+                <a:lnTo>
+                  <a:pt x="1831853" y="206904"/>
+                </a:lnTo>
+                <a:close/>
+                <a:lnTo>
+                  <a:pt x="1836433" y="205704"/>
+                </a:lnTo>
+                <a:close/>
+                <a:lnTo>
+                  <a:pt x="1841012" y="204504"/>
+                </a:lnTo>
+                <a:close/>
+                <a:lnTo>
+                  <a:pt x="1845592" y="203306"/>
+                </a:lnTo>
+                <a:close/>
+                <a:lnTo>
+                  <a:pt x="1850172" y="202109"/>
+                </a:lnTo>
+                <a:close/>
+                <a:lnTo>
+                  <a:pt x="1854751" y="200914"/>
+                </a:lnTo>
+                <a:close/>
+                <a:lnTo>
+                  <a:pt x="1859331" y="199720"/>
+                </a:lnTo>
+                <a:close/>
+                <a:lnTo>
+                  <a:pt x="1863911" y="198528"/>
+                </a:lnTo>
+                <a:close/>
+                <a:lnTo>
+                  <a:pt x="1868490" y="197338"/>
+                </a:lnTo>
+                <a:close/>
+                <a:lnTo>
+                  <a:pt x="1873070" y="196149"/>
+                </a:lnTo>
+                <a:close/>
+                <a:lnTo>
+                  <a:pt x="1877649" y="194962"/>
+                </a:lnTo>
+                <a:close/>
+                <a:lnTo>
+                  <a:pt x="1882229" y="193777"/>
+                </a:lnTo>
+                <a:close/>
+                <a:lnTo>
+                  <a:pt x="1886809" y="192594"/>
+                </a:lnTo>
+                <a:close/>
+                <a:lnTo>
+                  <a:pt x="1891388" y="191413"/>
+                </a:lnTo>
+                <a:close/>
+                <a:lnTo>
+                  <a:pt x="1895968" y="190234"/>
+                </a:lnTo>
+                <a:close/>
+                <a:lnTo>
+                  <a:pt x="1900548" y="189057"/>
+                </a:lnTo>
+                <a:close/>
+                <a:lnTo>
+                  <a:pt x="1905127" y="187882"/>
+                </a:lnTo>
+                <a:close/>
+                <a:lnTo>
+                  <a:pt x="1909707" y="186710"/>
+                </a:lnTo>
+                <a:close/>
+                <a:lnTo>
+                  <a:pt x="1914286" y="185540"/>
+                </a:lnTo>
+                <a:close/>
+                <a:lnTo>
+                  <a:pt x="1918866" y="184373"/>
+                </a:lnTo>
+                <a:close/>
+                <a:lnTo>
+                  <a:pt x="1923446" y="183208"/>
+                </a:lnTo>
+                <a:close/>
+                <a:lnTo>
+                  <a:pt x="1928025" y="182045"/>
+                </a:lnTo>
+                <a:close/>
+                <a:lnTo>
+                  <a:pt x="1932605" y="180885"/>
+                </a:lnTo>
+                <a:close/>
+                <a:lnTo>
+                  <a:pt x="1937185" y="179727"/>
+                </a:lnTo>
+                <a:close/>
+                <a:lnTo>
+                  <a:pt x="1941764" y="178571"/>
+                </a:lnTo>
+                <a:close/>
+                <a:lnTo>
+                  <a:pt x="1946344" y="177418"/>
+                </a:lnTo>
+                <a:close/>
+                <a:lnTo>
+                  <a:pt x="1950924" y="176267"/>
+                </a:lnTo>
+                <a:close/>
+                <a:lnTo>
+                  <a:pt x="1955503" y="175118"/>
+                </a:lnTo>
+                <a:close/>
+                <a:lnTo>
+                  <a:pt x="1960083" y="173971"/>
+                </a:lnTo>
+                <a:close/>
+                <a:lnTo>
+                  <a:pt x="1964662" y="172825"/>
+                </a:lnTo>
+                <a:close/>
+                <a:lnTo>
+                  <a:pt x="1969242" y="171682"/>
+                </a:lnTo>
+                <a:close/>
+                <a:lnTo>
+                  <a:pt x="1973822" y="170541"/>
+                </a:lnTo>
+                <a:close/>
+                <a:lnTo>
+                  <a:pt x="1978401" y="169401"/>
+                </a:lnTo>
+                <a:close/>
+                <a:lnTo>
+                  <a:pt x="1982981" y="168263"/>
+                </a:lnTo>
+                <a:close/>
+                <a:lnTo>
+                  <a:pt x="1987561" y="167126"/>
+                </a:lnTo>
+                <a:close/>
+                <a:lnTo>
+                  <a:pt x="1992140" y="165991"/>
+                </a:lnTo>
+                <a:close/>
+                <a:lnTo>
+                  <a:pt x="1996720" y="164857"/>
+                </a:lnTo>
+                <a:close/>
+                <a:lnTo>
+                  <a:pt x="2001299" y="163725"/>
+                </a:lnTo>
+                <a:close/>
+                <a:lnTo>
+                  <a:pt x="2005879" y="162594"/>
+                </a:lnTo>
+                <a:close/>
+                <a:lnTo>
+                  <a:pt x="2010459" y="161464"/>
+                </a:lnTo>
+                <a:close/>
+                <a:lnTo>
+                  <a:pt x="2015038" y="160335"/>
+                </a:lnTo>
+                <a:close/>
+                <a:lnTo>
+                  <a:pt x="2019618" y="159208"/>
+                </a:lnTo>
+                <a:close/>
+                <a:lnTo>
+                  <a:pt x="2024198" y="158081"/>
+                </a:lnTo>
+                <a:close/>
+                <a:lnTo>
+                  <a:pt x="2028777" y="156956"/>
+                </a:lnTo>
+                <a:close/>
+                <a:lnTo>
+                  <a:pt x="2033357" y="155833"/>
+                </a:lnTo>
+                <a:close/>
+                <a:lnTo>
+                  <a:pt x="2037937" y="154711"/>
+                </a:lnTo>
+                <a:close/>
+                <a:lnTo>
+                  <a:pt x="2042516" y="153590"/>
+                </a:lnTo>
+                <a:close/>
+                <a:lnTo>
+                  <a:pt x="2047096" y="152472"/>
+                </a:lnTo>
+                <a:close/>
+                <a:lnTo>
+                  <a:pt x="2051675" y="151355"/>
+                </a:lnTo>
+                <a:close/>
+                <a:lnTo>
+                  <a:pt x="2056255" y="150240"/>
+                </a:lnTo>
+                <a:close/>
+                <a:lnTo>
+                  <a:pt x="2060835" y="149127"/>
+                </a:lnTo>
+                <a:close/>
+                <a:lnTo>
+                  <a:pt x="2065414" y="148016"/>
+                </a:lnTo>
+                <a:close/>
+                <a:lnTo>
+                  <a:pt x="2069994" y="146907"/>
+                </a:lnTo>
+                <a:close/>
+                <a:lnTo>
+                  <a:pt x="2074574" y="145800"/>
+                </a:lnTo>
+                <a:close/>
+                <a:lnTo>
+                  <a:pt x="2079153" y="144694"/>
+                </a:lnTo>
+                <a:close/>
+                <a:lnTo>
+                  <a:pt x="2083733" y="143591"/>
+                </a:lnTo>
+                <a:close/>
+                <a:lnTo>
+                  <a:pt x="2088313" y="142490"/>
+                </a:lnTo>
+                <a:close/>
+                <a:lnTo>
+                  <a:pt x="2092892" y="141391"/>
+                </a:lnTo>
+                <a:close/>
+                <a:lnTo>
+                  <a:pt x="2097472" y="140294"/>
+                </a:lnTo>
+                <a:close/>
+                <a:lnTo>
+                  <a:pt x="2102051" y="139198"/>
+                </a:lnTo>
+                <a:close/>
+                <a:lnTo>
+                  <a:pt x="2106631" y="138105"/>
+                </a:lnTo>
+                <a:close/>
+                <a:lnTo>
+                  <a:pt x="2111211" y="137013"/>
+                </a:lnTo>
+                <a:close/>
+                <a:lnTo>
+                  <a:pt x="2115790" y="135923"/>
+                </a:lnTo>
+                <a:close/>
+                <a:lnTo>
+                  <a:pt x="2120370" y="134835"/>
+                </a:lnTo>
+                <a:close/>
+                <a:lnTo>
+                  <a:pt x="2124950" y="133749"/>
+                </a:lnTo>
+                <a:close/>
+                <a:lnTo>
+                  <a:pt x="2129529" y="132665"/>
+                </a:lnTo>
+                <a:close/>
+                <a:lnTo>
+                  <a:pt x="2134109" y="131581"/>
+                </a:lnTo>
+                <a:close/>
+                <a:lnTo>
+                  <a:pt x="2138688" y="130500"/>
+                </a:lnTo>
+                <a:close/>
+                <a:lnTo>
+                  <a:pt x="2143268" y="129420"/>
+                </a:lnTo>
+                <a:close/>
+                <a:lnTo>
+                  <a:pt x="2147848" y="128341"/>
+                </a:lnTo>
+                <a:close/>
+                <a:lnTo>
+                  <a:pt x="2152427" y="127263"/>
+                </a:lnTo>
+                <a:close/>
+                <a:lnTo>
+                  <a:pt x="2157007" y="126187"/>
+                </a:lnTo>
+                <a:close/>
+                <a:lnTo>
+                  <a:pt x="2161587" y="125112"/>
+                </a:lnTo>
+                <a:close/>
+                <a:lnTo>
+                  <a:pt x="2166166" y="124038"/>
+                </a:lnTo>
+                <a:close/>
+                <a:lnTo>
+                  <a:pt x="2170746" y="122966"/>
+                </a:lnTo>
+                <a:close/>
+                <a:lnTo>
+                  <a:pt x="2175326" y="121895"/>
+                </a:lnTo>
+                <a:close/>
+                <a:lnTo>
+                  <a:pt x="2179905" y="120825"/>
+                </a:lnTo>
+                <a:close/>
+                <a:lnTo>
+                  <a:pt x="2184485" y="119756"/>
+                </a:lnTo>
+                <a:close/>
+                <a:lnTo>
+                  <a:pt x="2189064" y="118688"/>
+                </a:lnTo>
+                <a:close/>
+                <a:lnTo>
+                  <a:pt x="2193644" y="117622"/>
+                </a:lnTo>
+                <a:close/>
+                <a:lnTo>
+                  <a:pt x="2198224" y="116557"/>
+                </a:lnTo>
+                <a:close/>
+                <a:lnTo>
+                  <a:pt x="2202803" y="115493"/>
+                </a:lnTo>
+                <a:close/>
+                <a:lnTo>
+                  <a:pt x="2207383" y="114430"/>
+                </a:lnTo>
+                <a:close/>
+                <a:lnTo>
+                  <a:pt x="2211963" y="113369"/>
+                </a:lnTo>
+                <a:close/>
+                <a:lnTo>
+                  <a:pt x="2216542" y="112310"/>
+                </a:lnTo>
+                <a:close/>
+                <a:lnTo>
+                  <a:pt x="2221122" y="111252"/>
+                </a:lnTo>
+                <a:close/>
+                <a:lnTo>
+                  <a:pt x="2225702" y="110196"/>
+                </a:lnTo>
+                <a:close/>
+                <a:lnTo>
+                  <a:pt x="2230281" y="109142"/>
+                </a:lnTo>
+                <a:close/>
+                <a:lnTo>
+                  <a:pt x="2234861" y="108090"/>
+                </a:lnTo>
+                <a:close/>
+                <a:lnTo>
+                  <a:pt x="2239440" y="107040"/>
+                </a:lnTo>
+                <a:close/>
+                <a:lnTo>
+                  <a:pt x="2244020" y="105992"/>
+                </a:lnTo>
+                <a:close/>
+                <a:lnTo>
+                  <a:pt x="2248600" y="104946"/>
+                </a:lnTo>
+                <a:close/>
+                <a:lnTo>
+                  <a:pt x="2253179" y="103902"/>
+                </a:lnTo>
+                <a:close/>
+                <a:lnTo>
+                  <a:pt x="2257759" y="102860"/>
+                </a:lnTo>
+                <a:close/>
+                <a:lnTo>
+                  <a:pt x="2262339" y="101819"/>
+                </a:lnTo>
+                <a:close/>
+                <a:lnTo>
+                  <a:pt x="2266918" y="100781"/>
+                </a:lnTo>
+                <a:close/>
+                <a:lnTo>
+                  <a:pt x="2271498" y="99744"/>
+                </a:lnTo>
+                <a:close/>
+                <a:lnTo>
+                  <a:pt x="2276077" y="98708"/>
+                </a:lnTo>
+                <a:close/>
+                <a:lnTo>
+                  <a:pt x="2280657" y="97674"/>
+                </a:lnTo>
+                <a:close/>
+                <a:lnTo>
+                  <a:pt x="2285237" y="96641"/>
+                </a:lnTo>
+                <a:close/>
+                <a:lnTo>
+                  <a:pt x="2289816" y="95609"/>
+                </a:lnTo>
+                <a:close/>
+                <a:lnTo>
+                  <a:pt x="2294396" y="94579"/>
+                </a:lnTo>
+                <a:close/>
+                <a:lnTo>
+                  <a:pt x="2298976" y="93549"/>
+                </a:lnTo>
+                <a:close/>
+                <a:lnTo>
+                  <a:pt x="2303555" y="92521"/>
+                </a:lnTo>
+                <a:close/>
+                <a:lnTo>
+                  <a:pt x="2308135" y="91495"/>
+                </a:lnTo>
+                <a:close/>
+                <a:lnTo>
+                  <a:pt x="2312715" y="90469"/>
+                </a:lnTo>
+                <a:close/>
+                <a:lnTo>
+                  <a:pt x="2317294" y="89445"/>
+                </a:lnTo>
+                <a:close/>
+                <a:lnTo>
+                  <a:pt x="2321874" y="88422"/>
+                </a:lnTo>
+                <a:close/>
+                <a:lnTo>
+                  <a:pt x="2326453" y="87401"/>
+                </a:lnTo>
+                <a:close/>
+                <a:lnTo>
+                  <a:pt x="2331033" y="86381"/>
+                </a:lnTo>
+                <a:close/>
+                <a:lnTo>
+                  <a:pt x="2335613" y="85362"/>
+                </a:lnTo>
+                <a:close/>
+                <a:lnTo>
+                  <a:pt x="2340192" y="84345"/>
+                </a:lnTo>
+                <a:close/>
+                <a:lnTo>
+                  <a:pt x="2344772" y="83329"/>
+                </a:lnTo>
+                <a:close/>
+                <a:lnTo>
+                  <a:pt x="2349352" y="82315"/>
+                </a:lnTo>
+                <a:close/>
+                <a:lnTo>
+                  <a:pt x="2353931" y="81302"/>
+                </a:lnTo>
+                <a:close/>
+                <a:lnTo>
+                  <a:pt x="2358511" y="80290"/>
+                </a:lnTo>
+                <a:close/>
+                <a:lnTo>
+                  <a:pt x="2363090" y="79280"/>
+                </a:lnTo>
+                <a:close/>
+                <a:lnTo>
+                  <a:pt x="2367670" y="78271"/>
+                </a:lnTo>
+                <a:close/>
+                <a:lnTo>
+                  <a:pt x="2372250" y="77264"/>
+                </a:lnTo>
+                <a:close/>
+                <a:lnTo>
+                  <a:pt x="2376829" y="76258"/>
+                </a:lnTo>
+                <a:close/>
+                <a:lnTo>
+                  <a:pt x="2381409" y="75253"/>
+                </a:lnTo>
+                <a:close/>
+                <a:lnTo>
+                  <a:pt x="2385989" y="74250"/>
+                </a:lnTo>
+                <a:close/>
+                <a:lnTo>
+                  <a:pt x="2390568" y="73248"/>
+                </a:lnTo>
+                <a:close/>
+                <a:lnTo>
+                  <a:pt x="2395148" y="72247"/>
+                </a:lnTo>
+                <a:close/>
+                <a:lnTo>
+                  <a:pt x="2399728" y="71248"/>
+                </a:lnTo>
+                <a:close/>
+                <a:lnTo>
+                  <a:pt x="2404307" y="70250"/>
+                </a:lnTo>
+                <a:close/>
+                <a:lnTo>
+                  <a:pt x="2408887" y="69253"/>
+                </a:lnTo>
+                <a:close/>
+                <a:lnTo>
+                  <a:pt x="2413466" y="68258"/>
+                </a:lnTo>
+                <a:close/>
+                <a:lnTo>
+                  <a:pt x="2418046" y="67265"/>
+                </a:lnTo>
+                <a:close/>
+                <a:lnTo>
+                  <a:pt x="2422626" y="66272"/>
+                </a:lnTo>
+                <a:close/>
+                <a:lnTo>
+                  <a:pt x="2427205" y="65281"/>
+                </a:lnTo>
+                <a:close/>
+                <a:lnTo>
+                  <a:pt x="2431785" y="64292"/>
+                </a:lnTo>
+                <a:close/>
+                <a:lnTo>
+                  <a:pt x="2436365" y="63304"/>
+                </a:lnTo>
+                <a:close/>
+                <a:lnTo>
+                  <a:pt x="2440944" y="62317"/>
+                </a:lnTo>
+                <a:close/>
+                <a:lnTo>
+                  <a:pt x="2445524" y="61331"/>
+                </a:lnTo>
+                <a:close/>
+                <a:lnTo>
+                  <a:pt x="2450104" y="60347"/>
+                </a:lnTo>
+                <a:close/>
+                <a:lnTo>
+                  <a:pt x="2454683" y="59365"/>
+                </a:lnTo>
+                <a:close/>
+                <a:lnTo>
+                  <a:pt x="2459263" y="58383"/>
+                </a:lnTo>
+                <a:close/>
+                <a:lnTo>
+                  <a:pt x="2463842" y="57403"/>
+                </a:lnTo>
+                <a:close/>
+                <a:lnTo>
+                  <a:pt x="2468422" y="56425"/>
+                </a:lnTo>
+                <a:close/>
+                <a:lnTo>
+                  <a:pt x="2473002" y="55447"/>
+                </a:lnTo>
+                <a:close/>
+                <a:lnTo>
+                  <a:pt x="2477581" y="54471"/>
+                </a:lnTo>
+                <a:close/>
+                <a:lnTo>
+                  <a:pt x="2482161" y="53497"/>
+                </a:lnTo>
+                <a:close/>
+                <a:lnTo>
+                  <a:pt x="2486741" y="52523"/>
+                </a:lnTo>
+                <a:close/>
+                <a:lnTo>
+                  <a:pt x="2491320" y="51551"/>
+                </a:lnTo>
+                <a:close/>
+                <a:lnTo>
+                  <a:pt x="2495900" y="50581"/>
+                </a:lnTo>
+                <a:close/>
+                <a:lnTo>
+                  <a:pt x="2500479" y="49612"/>
+                </a:lnTo>
+                <a:close/>
+                <a:lnTo>
+                  <a:pt x="2505059" y="48645"/>
+                </a:lnTo>
+                <a:close/>
+                <a:lnTo>
+                  <a:pt x="2509639" y="47679"/>
+                </a:lnTo>
+                <a:close/>
+                <a:lnTo>
+                  <a:pt x="2514218" y="46714"/>
+                </a:lnTo>
+                <a:close/>
+                <a:lnTo>
+                  <a:pt x="2518798" y="45752"/>
+                </a:lnTo>
+                <a:close/>
+                <a:lnTo>
+                  <a:pt x="2523378" y="44790"/>
+                </a:lnTo>
+                <a:close/>
+                <a:lnTo>
+                  <a:pt x="2527957" y="43831"/>
+                </a:lnTo>
+                <a:close/>
+                <a:lnTo>
+                  <a:pt x="2532537" y="42872"/>
+                </a:lnTo>
+                <a:close/>
+                <a:lnTo>
+                  <a:pt x="2537117" y="41915"/>
+                </a:lnTo>
+                <a:close/>
+                <a:lnTo>
+                  <a:pt x="2541696" y="40958"/>
+                </a:lnTo>
+                <a:close/>
+                <a:lnTo>
+                  <a:pt x="2546276" y="40003"/>
+                </a:lnTo>
+                <a:close/>
+                <a:lnTo>
+                  <a:pt x="2550855" y="39049"/>
+                </a:lnTo>
+                <a:close/>
+                <a:lnTo>
+                  <a:pt x="2555435" y="38095"/>
+                </a:lnTo>
+                <a:close/>
+                <a:lnTo>
+                  <a:pt x="2560015" y="37142"/>
+                </a:lnTo>
+                <a:close/>
+                <a:lnTo>
+                  <a:pt x="2564594" y="36190"/>
+                </a:lnTo>
+                <a:close/>
+                <a:lnTo>
+                  <a:pt x="2569174" y="35238"/>
+                </a:lnTo>
+                <a:close/>
+                <a:lnTo>
+                  <a:pt x="2573754" y="34288"/>
+                </a:lnTo>
+                <a:close/>
+                <a:lnTo>
+                  <a:pt x="2578333" y="33338"/>
+                </a:lnTo>
+                <a:close/>
+                <a:lnTo>
+                  <a:pt x="2582913" y="32389"/>
+                </a:lnTo>
+                <a:close/>
+                <a:lnTo>
+                  <a:pt x="2587492" y="31441"/>
+                </a:lnTo>
+                <a:close/>
+                <a:lnTo>
+                  <a:pt x="2592072" y="30494"/>
+                </a:lnTo>
+                <a:close/>
+                <a:lnTo>
+                  <a:pt x="2596652" y="29549"/>
+                </a:lnTo>
+                <a:close/>
+                <a:lnTo>
+                  <a:pt x="2601231" y="28604"/>
+                </a:lnTo>
+                <a:close/>
+                <a:lnTo>
+                  <a:pt x="2605811" y="27662"/>
+                </a:lnTo>
+                <a:close/>
+                <a:lnTo>
+                  <a:pt x="2610391" y="26721"/>
+                </a:lnTo>
+                <a:close/>
+                <a:lnTo>
+                  <a:pt x="2614970" y="25781"/>
+                </a:lnTo>
+                <a:close/>
+                <a:lnTo>
+                  <a:pt x="2619550" y="24843"/>
+                </a:lnTo>
+                <a:close/>
+                <a:lnTo>
+                  <a:pt x="2624130" y="23906"/>
+                </a:lnTo>
+                <a:close/>
+                <a:lnTo>
+                  <a:pt x="2628709" y="22971"/>
+                </a:lnTo>
+                <a:close/>
+                <a:lnTo>
+                  <a:pt x="2633289" y="22038"/>
+                </a:lnTo>
+                <a:close/>
+                <a:lnTo>
+                  <a:pt x="2637868" y="21106"/>
+                </a:lnTo>
+                <a:close/>
+                <a:lnTo>
+                  <a:pt x="2642448" y="20175"/>
+                </a:lnTo>
+                <a:close/>
+                <a:lnTo>
+                  <a:pt x="2647028" y="19246"/>
+                </a:lnTo>
+                <a:close/>
+                <a:lnTo>
+                  <a:pt x="2651607" y="18319"/>
+                </a:lnTo>
+                <a:close/>
+                <a:lnTo>
+                  <a:pt x="2656187" y="17392"/>
+                </a:lnTo>
+                <a:close/>
+                <a:lnTo>
+                  <a:pt x="2660767" y="16468"/>
+                </a:lnTo>
+                <a:close/>
+                <a:lnTo>
+                  <a:pt x="2665346" y="15544"/>
+                </a:lnTo>
+                <a:close/>
+                <a:lnTo>
+                  <a:pt x="2669926" y="14622"/>
+                </a:lnTo>
+                <a:close/>
+                <a:lnTo>
+                  <a:pt x="2674506" y="13701"/>
+                </a:lnTo>
+                <a:close/>
+                <a:lnTo>
+                  <a:pt x="2679085" y="12781"/>
+                </a:lnTo>
+                <a:close/>
+                <a:lnTo>
+                  <a:pt x="2683665" y="11863"/>
+                </a:lnTo>
+                <a:close/>
+                <a:lnTo>
+                  <a:pt x="2688244" y="10945"/>
+                </a:lnTo>
+                <a:close/>
+                <a:lnTo>
+                  <a:pt x="2692824" y="10029"/>
+                </a:lnTo>
+                <a:close/>
+                <a:lnTo>
+                  <a:pt x="2697404" y="9113"/>
+                </a:lnTo>
+                <a:close/>
+                <a:lnTo>
+                  <a:pt x="2701983" y="8199"/>
+                </a:lnTo>
+                <a:close/>
+                <a:lnTo>
+                  <a:pt x="2706563" y="7285"/>
+                </a:lnTo>
+                <a:close/>
+                <a:lnTo>
+                  <a:pt x="2711143" y="6372"/>
+                </a:lnTo>
+                <a:close/>
+                <a:lnTo>
+                  <a:pt x="2715722" y="5460"/>
+                </a:lnTo>
+                <a:close/>
+                <a:lnTo>
+                  <a:pt x="2720302" y="4548"/>
+                </a:lnTo>
+                <a:close/>
+                <a:lnTo>
+                  <a:pt x="2724881" y="3638"/>
+                </a:lnTo>
+                <a:close/>
+                <a:lnTo>
+                  <a:pt x="2729461" y="2727"/>
+                </a:lnTo>
+                <a:close/>
+                <a:lnTo>
+                  <a:pt x="2734041" y="1818"/>
+                </a:lnTo>
+                <a:close/>
+                <a:lnTo>
+                  <a:pt x="2738620" y="908"/>
+                </a:lnTo>
+                <a:close/>
+                <a:lnTo>
+                  <a:pt x="2743200" y="0"/>
                 </a:lnTo>
                 <a:close/>
               </a:path>
             </a:pathLst>
           </a:custGeom>
-          <a:ln w="31750">
+          <a:ln w="38100">
             <a:solidFill>
               <a:srgbClr val="000000"/>
             </a:solidFill>
@@ -4423,8 +5623,8 @@
         </p:nvCxnSpPr>
         <p:spPr>
           <a:xfrm flipV="1">
-            <a:off x="6400800.0" y="1657350.0"/>
-            <a:ext cx="0.0" cy="914400.0"/>
+            <a:off x="6172200.0" y="1428750.0"/>
+            <a:ext cx="0.0" cy="1143000.0"/>
           </a:xfrm>
           <a:prstGeom prst="line">
             <a:avLst/>
@@ -4459,8 +5659,8 @@
         </p:nvSpPr>
         <p:spPr>
           <a:xfrm>
-            <a:off x="6324600" y="1581150"/>
-            <a:ext cx="152400" cy="152400"/>
+            <a:off x="6083300" y="1339850"/>
+            <a:ext cx="177800" cy="177800"/>
           </a:xfrm>
           <a:prstGeom prst="ellipse">
             <a:avLst/>
@@ -4468,7 +5668,7 @@
           <a:solidFill>
             <a:srgbClr val="000000"/>
           </a:solidFill>
-          <a:ln w="12700">
+          <a:ln w="19050">
             <a:solidFill>
               <a:srgbClr val="FFFFFF"/>
             </a:solidFill>
@@ -4504,7 +5704,7 @@
         </p:nvSpPr>
         <p:spPr>
           <a:xfrm>
-            <a:off x="6146800" y="2391410"/>
+            <a:off x="6146800" y="791210"/>
             <a:ext cx="1524000" cy="508000"/>
           </a:xfrm>
           <a:prstGeom prst="rect">
@@ -4519,15 +5719,87 @@
           <a:lstStyle/>
           <a:p>
             <a:pPr>
-              <a:defRPr sz="1800" b="1">
+              <a:defRPr sz="2200" b="1">
                 <a:solidFill>
                   <a:srgbClr val="FFFFFF"/>
                 </a:solidFill>
-                <a:latin typeface="Inter"/>
+                <a:latin typeface="Arial"/>
               </a:defRPr>
             </a:pPr>
             <a:r>
+              <a:t>y=f(x)</a:t>
+            </a:r>
+          </a:p>
+        </p:txBody>
+      </p:sp>
+      <p:sp>
+        <p:nvSpPr>
+          <p:cNvPr id="8" name="TextBox 7"/>
+          <p:cNvSpPr txBox="1"/>
+          <p:nvPr/>
+        </p:nvSpPr>
+        <p:spPr>
+          <a:xfrm>
+            <a:off x="5918200" y="2391410"/>
+            <a:ext cx="1524000" cy="508000"/>
+          </a:xfrm>
+          <a:prstGeom prst="rect">
+            <a:avLst/>
+          </a:prstGeom>
+          <a:noFill/>
+        </p:spPr>
+        <p:txBody>
+          <a:bodyPr wrap="none">
+            <a:spAutoFit/>
+          </a:bodyPr>
+          <a:lstStyle/>
+          <a:p>
+            <a:pPr>
+              <a:defRPr sz="2200" b="1">
+                <a:solidFill>
+                  <a:srgbClr val="FFFFFF"/>
+                </a:solidFill>
+                <a:latin typeface="Arial"/>
+              </a:defRPr>
+            </a:pPr>
+            <a:r>
               <a:t>a</a:t>
+            </a:r>
+          </a:p>
+        </p:txBody>
+      </p:sp>
+      <p:sp>
+        <p:nvSpPr>
+          <p:cNvPr id="9" name="TextBox 8"/>
+          <p:cNvSpPr txBox="1"/>
+          <p:nvPr/>
+        </p:nvSpPr>
+        <p:spPr>
+          <a:xfrm>
+            <a:off x="4180840" y="2391410"/>
+            <a:ext cx="1524000" cy="508000"/>
+          </a:xfrm>
+          <a:prstGeom prst="rect">
+            <a:avLst/>
+          </a:prstGeom>
+          <a:noFill/>
+        </p:spPr>
+        <p:txBody>
+          <a:bodyPr wrap="none">
+            <a:spAutoFit/>
+          </a:bodyPr>
+          <a:lstStyle/>
+          <a:p>
+            <a:pPr>
+              <a:defRPr sz="2200" b="1">
+                <a:solidFill>
+                  <a:srgbClr val="FFFFFF"/>
+                </a:solidFill>
+                <a:latin typeface="Arial"/>
+              </a:defRPr>
+            </a:pPr>
+            <a:r>
+              <a:t>O</a:t>
             </a:r>
           </a:p>
         </p:txBody>

--- a/output/4.pptx
+++ b/output/4.pptx
@@ -3104,8 +3104,8 @@
         </p:nvCxnSpPr>
         <p:spPr>
           <a:xfrm>
-            <a:off x="4114800.0" y="2571750.0"/>
-            <a:ext cx="3200400.0" cy="0.0"/>
+            <a:off x="4206240.0" y="2571750.0"/>
+            <a:ext cx="2880360.0" cy="0.0"/>
           </a:xfrm>
           <a:prstGeom prst="line">
             <a:avLst/>
@@ -3139,8 +3139,8 @@
         </p:nvCxnSpPr>
         <p:spPr>
           <a:xfrm flipV="1">
-            <a:off x="4572000.0" y="742950.0"/>
-            <a:ext cx="0.0" cy="2286000.0"/>
+            <a:off x="4572000.0" y="1428750.0"/>
+            <a:ext cx="0.0" cy="1371600.0"/>
           </a:xfrm>
           <a:prstGeom prst="line">
             <a:avLst/>
@@ -3174,8 +3174,8 @@
         </p:nvSpPr>
         <p:spPr>
           <a:xfrm>
-            <a:off x="4572000" y="1165083"/>
-            <a:ext cx="2743200" cy="1406667"/>
+            <a:off x="4572000" y="1752539"/>
+            <a:ext cx="2514600" cy="819211"/>
           </a:xfrm>
           <a:custGeom>
             <a:avLst/>
@@ -3184,2404 +3184,2404 @@
             <a:cxnLst/>
             <a:rect l="l" t="t" r="r" b="b"/>
             <a:pathLst>
-              <a:path w="2743200" h="1406667">
+              <a:path w="2514600" h="819211">
                 <a:moveTo>
-                  <a:pt x="0" y="1406667"/>
+                  <a:pt x="0" y="819211"/>
                 </a:moveTo>
                 <a:lnTo>
-                  <a:pt x="4580" y="1378932"/>
-                </a:lnTo>
-                <a:close/>
-                <a:lnTo>
-                  <a:pt x="9159" y="1353385"/>
-                </a:lnTo>
-                <a:close/>
-                <a:lnTo>
-                  <a:pt x="13739" y="1329911"/>
-                </a:lnTo>
-                <a:close/>
-                <a:lnTo>
-                  <a:pt x="18319" y="1308390"/>
-                </a:lnTo>
-                <a:close/>
-                <a:lnTo>
-                  <a:pt x="22898" y="1288706"/>
-                </a:lnTo>
-                <a:close/>
-                <a:lnTo>
-                  <a:pt x="27478" y="1270740"/>
-                </a:lnTo>
-                <a:close/>
-                <a:lnTo>
-                  <a:pt x="32057" y="1254376"/>
-                </a:lnTo>
-                <a:close/>
-                <a:lnTo>
-                  <a:pt x="36637" y="1239496"/>
-                </a:lnTo>
-                <a:close/>
-                <a:lnTo>
-                  <a:pt x="41217" y="1225982"/>
-                </a:lnTo>
-                <a:close/>
-                <a:lnTo>
-                  <a:pt x="45796" y="1213717"/>
-                </a:lnTo>
-                <a:close/>
-                <a:lnTo>
-                  <a:pt x="50376" y="1202582"/>
-                </a:lnTo>
-                <a:close/>
-                <a:lnTo>
-                  <a:pt x="54956" y="1192462"/>
-                </a:lnTo>
-                <a:close/>
-                <a:lnTo>
-                  <a:pt x="59535" y="1183237"/>
-                </a:lnTo>
-                <a:close/>
-                <a:lnTo>
-                  <a:pt x="64115" y="1174791"/>
-                </a:lnTo>
-                <a:close/>
-                <a:lnTo>
-                  <a:pt x="68694" y="1167005"/>
-                </a:lnTo>
-                <a:close/>
-                <a:lnTo>
-                  <a:pt x="73274" y="1159763"/>
-                </a:lnTo>
-                <a:close/>
-                <a:lnTo>
-                  <a:pt x="77854" y="1152947"/>
-                </a:lnTo>
-                <a:close/>
-                <a:lnTo>
-                  <a:pt x="82433" y="1146438"/>
-                </a:lnTo>
-                <a:close/>
-                <a:lnTo>
-                  <a:pt x="87013" y="1140121"/>
-                </a:lnTo>
-                <a:close/>
-                <a:lnTo>
-                  <a:pt x="91593" y="1133876"/>
-                </a:lnTo>
-                <a:close/>
-                <a:lnTo>
-                  <a:pt x="96172" y="1127612"/>
-                </a:lnTo>
-                <a:close/>
-                <a:lnTo>
-                  <a:pt x="100752" y="1121327"/>
-                </a:lnTo>
-                <a:close/>
-                <a:lnTo>
-                  <a:pt x="105332" y="1115038"/>
-                </a:lnTo>
-                <a:close/>
-                <a:lnTo>
-                  <a:pt x="109911" y="1108765"/>
-                </a:lnTo>
-                <a:close/>
-                <a:lnTo>
-                  <a:pt x="114491" y="1102526"/>
-                </a:lnTo>
-                <a:close/>
-                <a:lnTo>
-                  <a:pt x="119070" y="1096339"/>
-                </a:lnTo>
-                <a:close/>
-                <a:lnTo>
-                  <a:pt x="123650" y="1090224"/>
-                </a:lnTo>
-                <a:close/>
-                <a:lnTo>
-                  <a:pt x="128230" y="1084197"/>
-                </a:lnTo>
-                <a:close/>
-                <a:lnTo>
-                  <a:pt x="132809" y="1078279"/>
-                </a:lnTo>
-                <a:close/>
-                <a:lnTo>
-                  <a:pt x="137389" y="1072488"/>
-                </a:lnTo>
-                <a:close/>
-                <a:lnTo>
-                  <a:pt x="141969" y="1066835"/>
-                </a:lnTo>
-                <a:close/>
-                <a:lnTo>
-                  <a:pt x="146548" y="1061317"/>
-                </a:lnTo>
-                <a:close/>
-                <a:lnTo>
-                  <a:pt x="151128" y="1055922"/>
-                </a:lnTo>
-                <a:close/>
-                <a:lnTo>
-                  <a:pt x="155708" y="1050641"/>
-                </a:lnTo>
-                <a:close/>
-                <a:lnTo>
-                  <a:pt x="160287" y="1045463"/>
-                </a:lnTo>
-                <a:close/>
-                <a:lnTo>
-                  <a:pt x="164867" y="1040380"/>
-                </a:lnTo>
-                <a:close/>
-                <a:lnTo>
-                  <a:pt x="169446" y="1035382"/>
-                </a:lnTo>
-                <a:close/>
-                <a:lnTo>
-                  <a:pt x="174026" y="1030457"/>
-                </a:lnTo>
-                <a:close/>
-                <a:lnTo>
-                  <a:pt x="178606" y="1025597"/>
-                </a:lnTo>
-                <a:close/>
-                <a:lnTo>
-                  <a:pt x="183185" y="1020791"/>
-                </a:lnTo>
-                <a:close/>
-                <a:lnTo>
-                  <a:pt x="187765" y="1016032"/>
-                </a:lnTo>
-                <a:close/>
-                <a:lnTo>
-                  <a:pt x="192345" y="1011319"/>
-                </a:lnTo>
-                <a:close/>
-                <a:lnTo>
-                  <a:pt x="196924" y="1006651"/>
-                </a:lnTo>
-                <a:close/>
-                <a:lnTo>
-                  <a:pt x="201504" y="1002029"/>
-                </a:lnTo>
-                <a:close/>
-                <a:lnTo>
-                  <a:pt x="206083" y="997452"/>
-                </a:lnTo>
-                <a:close/>
-                <a:lnTo>
-                  <a:pt x="210663" y="992921"/>
-                </a:lnTo>
-                <a:close/>
-                <a:lnTo>
-                  <a:pt x="215243" y="988436"/>
-                </a:lnTo>
-                <a:close/>
-                <a:lnTo>
-                  <a:pt x="219822" y="983997"/>
-                </a:lnTo>
-                <a:close/>
-                <a:lnTo>
-                  <a:pt x="224402" y="979605"/>
-                </a:lnTo>
-                <a:close/>
-                <a:lnTo>
-                  <a:pt x="228982" y="975258"/>
-                </a:lnTo>
-                <a:close/>
-                <a:lnTo>
-                  <a:pt x="233561" y="970958"/>
-                </a:lnTo>
-                <a:close/>
-                <a:lnTo>
-                  <a:pt x="238141" y="966702"/>
-                </a:lnTo>
-                <a:close/>
-                <a:lnTo>
-                  <a:pt x="242721" y="962490"/>
-                </a:lnTo>
-                <a:close/>
-                <a:lnTo>
-                  <a:pt x="247300" y="958318"/>
-                </a:lnTo>
-                <a:close/>
-                <a:lnTo>
-                  <a:pt x="251880" y="954187"/>
-                </a:lnTo>
-                <a:close/>
-                <a:lnTo>
-                  <a:pt x="256459" y="950095"/>
-                </a:lnTo>
-                <a:close/>
-                <a:lnTo>
-                  <a:pt x="261039" y="946039"/>
-                </a:lnTo>
-                <a:close/>
-                <a:lnTo>
-                  <a:pt x="265619" y="942018"/>
-                </a:lnTo>
-                <a:close/>
-                <a:lnTo>
-                  <a:pt x="270198" y="938031"/>
-                </a:lnTo>
-                <a:close/>
-                <a:lnTo>
-                  <a:pt x="274778" y="934077"/>
-                </a:lnTo>
-                <a:close/>
-                <a:lnTo>
-                  <a:pt x="279358" y="930153"/>
-                </a:lnTo>
-                <a:close/>
-                <a:lnTo>
-                  <a:pt x="283937" y="926260"/>
-                </a:lnTo>
-                <a:close/>
-                <a:lnTo>
-                  <a:pt x="288517" y="922396"/>
-                </a:lnTo>
-                <a:close/>
-                <a:lnTo>
-                  <a:pt x="293096" y="918561"/>
-                </a:lnTo>
-                <a:close/>
-                <a:lnTo>
-                  <a:pt x="297676" y="914756"/>
-                </a:lnTo>
-                <a:close/>
-                <a:lnTo>
-                  <a:pt x="302256" y="910978"/>
-                </a:lnTo>
-                <a:close/>
-                <a:lnTo>
-                  <a:pt x="306835" y="907229"/>
-                </a:lnTo>
-                <a:close/>
-                <a:lnTo>
-                  <a:pt x="311415" y="903507"/>
-                </a:lnTo>
-                <a:close/>
-                <a:lnTo>
-                  <a:pt x="315995" y="899811"/>
-                </a:lnTo>
-                <a:close/>
-                <a:lnTo>
-                  <a:pt x="320574" y="896142"/>
-                </a:lnTo>
-                <a:close/>
-                <a:lnTo>
-                  <a:pt x="325154" y="892499"/>
-                </a:lnTo>
-                <a:close/>
-                <a:lnTo>
-                  <a:pt x="329734" y="888882"/>
-                </a:lnTo>
-                <a:close/>
-                <a:lnTo>
-                  <a:pt x="334313" y="885289"/>
-                </a:lnTo>
-                <a:close/>
-                <a:lnTo>
-                  <a:pt x="338893" y="881722"/>
-                </a:lnTo>
-                <a:close/>
-                <a:lnTo>
-                  <a:pt x="343472" y="878179"/>
-                </a:lnTo>
-                <a:close/>
-                <a:lnTo>
-                  <a:pt x="348052" y="874660"/>
-                </a:lnTo>
-                <a:close/>
-                <a:lnTo>
-                  <a:pt x="352632" y="871165"/>
-                </a:lnTo>
-                <a:close/>
-                <a:lnTo>
-                  <a:pt x="357211" y="867693"/>
-                </a:lnTo>
-                <a:close/>
-                <a:lnTo>
-                  <a:pt x="361791" y="864244"/>
-                </a:lnTo>
-                <a:close/>
-                <a:lnTo>
-                  <a:pt x="366371" y="860818"/>
-                </a:lnTo>
-                <a:close/>
-                <a:lnTo>
-                  <a:pt x="370950" y="857414"/>
-                </a:lnTo>
-                <a:close/>
-                <a:lnTo>
-                  <a:pt x="375530" y="854032"/>
-                </a:lnTo>
-                <a:close/>
-                <a:lnTo>
-                  <a:pt x="380110" y="850672"/>
-                </a:lnTo>
-                <a:close/>
-                <a:lnTo>
-                  <a:pt x="384689" y="847333"/>
-                </a:lnTo>
-                <a:close/>
-                <a:lnTo>
-                  <a:pt x="389269" y="844015"/>
-                </a:lnTo>
-                <a:close/>
-                <a:lnTo>
-                  <a:pt x="393848" y="840719"/>
-                </a:lnTo>
-                <a:close/>
-                <a:lnTo>
-                  <a:pt x="398428" y="837443"/>
-                </a:lnTo>
-                <a:close/>
-                <a:lnTo>
-                  <a:pt x="403008" y="834187"/>
-                </a:lnTo>
-                <a:close/>
-                <a:lnTo>
-                  <a:pt x="407587" y="830952"/>
-                </a:lnTo>
-                <a:close/>
-                <a:lnTo>
-                  <a:pt x="412167" y="827736"/>
-                </a:lnTo>
-                <a:close/>
-                <a:lnTo>
-                  <a:pt x="416747" y="824540"/>
-                </a:lnTo>
-                <a:close/>
-                <a:lnTo>
-                  <a:pt x="421326" y="821364"/>
-                </a:lnTo>
-                <a:close/>
-                <a:lnTo>
-                  <a:pt x="425906" y="818205"/>
-                </a:lnTo>
-                <a:close/>
-                <a:lnTo>
-                  <a:pt x="430485" y="815065"/>
-                </a:lnTo>
-                <a:close/>
-                <a:lnTo>
-                  <a:pt x="435065" y="811942"/>
-                </a:lnTo>
-                <a:close/>
-                <a:lnTo>
-                  <a:pt x="439645" y="808837"/>
-                </a:lnTo>
-                <a:close/>
-                <a:lnTo>
-                  <a:pt x="444224" y="805748"/>
-                </a:lnTo>
-                <a:close/>
-                <a:lnTo>
-                  <a:pt x="448804" y="802675"/>
-                </a:lnTo>
-                <a:close/>
-                <a:lnTo>
-                  <a:pt x="453384" y="799618"/>
-                </a:lnTo>
-                <a:close/>
-                <a:lnTo>
-                  <a:pt x="457963" y="796576"/>
-                </a:lnTo>
-                <a:close/>
-                <a:lnTo>
-                  <a:pt x="462543" y="793549"/>
-                </a:lnTo>
-                <a:close/>
-                <a:lnTo>
-                  <a:pt x="467123" y="790537"/>
-                </a:lnTo>
-                <a:close/>
-                <a:lnTo>
-                  <a:pt x="471702" y="787540"/>
-                </a:lnTo>
-                <a:close/>
-                <a:lnTo>
-                  <a:pt x="476282" y="784557"/>
-                </a:lnTo>
-                <a:close/>
-                <a:lnTo>
-                  <a:pt x="480861" y="781589"/>
-                </a:lnTo>
-                <a:close/>
-                <a:lnTo>
-                  <a:pt x="485441" y="778636"/>
-                </a:lnTo>
-                <a:close/>
-                <a:lnTo>
-                  <a:pt x="490021" y="775698"/>
-                </a:lnTo>
-                <a:close/>
-                <a:lnTo>
-                  <a:pt x="494600" y="772775"/>
-                </a:lnTo>
-                <a:close/>
-                <a:lnTo>
-                  <a:pt x="499180" y="769866"/>
-                </a:lnTo>
-                <a:close/>
-                <a:lnTo>
-                  <a:pt x="503760" y="766972"/>
-                </a:lnTo>
-                <a:close/>
-                <a:lnTo>
-                  <a:pt x="508339" y="764093"/>
-                </a:lnTo>
-                <a:close/>
-                <a:lnTo>
-                  <a:pt x="512919" y="761228"/>
-                </a:lnTo>
-                <a:close/>
-                <a:lnTo>
-                  <a:pt x="517498" y="758377"/>
-                </a:lnTo>
-                <a:close/>
-                <a:lnTo>
-                  <a:pt x="522078" y="755540"/>
-                </a:lnTo>
-                <a:close/>
-                <a:lnTo>
-                  <a:pt x="526658" y="752716"/>
-                </a:lnTo>
-                <a:close/>
-                <a:lnTo>
-                  <a:pt x="531237" y="749905"/>
-                </a:lnTo>
-                <a:close/>
-                <a:lnTo>
-                  <a:pt x="535817" y="747107"/>
-                </a:lnTo>
-                <a:close/>
-                <a:lnTo>
-                  <a:pt x="540397" y="744322"/>
-                </a:lnTo>
-                <a:close/>
-                <a:lnTo>
-                  <a:pt x="544976" y="741548"/>
-                </a:lnTo>
-                <a:close/>
-                <a:lnTo>
-                  <a:pt x="549556" y="738786"/>
-                </a:lnTo>
-                <a:close/>
-                <a:lnTo>
-                  <a:pt x="554136" y="736036"/>
-                </a:lnTo>
-                <a:close/>
-                <a:lnTo>
-                  <a:pt x="558715" y="733297"/>
-                </a:lnTo>
-                <a:close/>
-                <a:lnTo>
-                  <a:pt x="563295" y="730569"/>
-                </a:lnTo>
-                <a:close/>
-                <a:lnTo>
-                  <a:pt x="567874" y="727853"/>
-                </a:lnTo>
-                <a:close/>
-                <a:lnTo>
-                  <a:pt x="572454" y="725148"/>
-                </a:lnTo>
-                <a:close/>
-                <a:lnTo>
-                  <a:pt x="577034" y="722454"/>
-                </a:lnTo>
-                <a:close/>
-                <a:lnTo>
-                  <a:pt x="581613" y="719771"/>
-                </a:lnTo>
-                <a:close/>
-                <a:lnTo>
-                  <a:pt x="586193" y="717100"/>
-                </a:lnTo>
-                <a:close/>
-                <a:lnTo>
-                  <a:pt x="590773" y="714439"/>
-                </a:lnTo>
-                <a:close/>
-                <a:lnTo>
-                  <a:pt x="595352" y="711790"/>
-                </a:lnTo>
-                <a:close/>
-                <a:lnTo>
-                  <a:pt x="599932" y="709152"/>
-                </a:lnTo>
-                <a:close/>
-                <a:lnTo>
-                  <a:pt x="604512" y="706524"/>
-                </a:lnTo>
-                <a:close/>
-                <a:lnTo>
-                  <a:pt x="609091" y="703908"/>
-                </a:lnTo>
-                <a:close/>
-                <a:lnTo>
-                  <a:pt x="613671" y="701302"/>
-                </a:lnTo>
-                <a:close/>
-                <a:lnTo>
-                  <a:pt x="618250" y="698707"/>
-                </a:lnTo>
-                <a:close/>
-                <a:lnTo>
-                  <a:pt x="622830" y="696123"/>
-                </a:lnTo>
-                <a:close/>
-                <a:lnTo>
-                  <a:pt x="627410" y="693550"/>
-                </a:lnTo>
-                <a:close/>
-                <a:lnTo>
-                  <a:pt x="631989" y="690987"/>
-                </a:lnTo>
-                <a:close/>
-                <a:lnTo>
-                  <a:pt x="636569" y="688435"/>
-                </a:lnTo>
-                <a:close/>
-                <a:lnTo>
-                  <a:pt x="641149" y="685893"/>
-                </a:lnTo>
-                <a:close/>
-                <a:lnTo>
-                  <a:pt x="645728" y="683362"/>
-                </a:lnTo>
-                <a:close/>
-                <a:lnTo>
-                  <a:pt x="650308" y="680842"/>
-                </a:lnTo>
-                <a:close/>
-                <a:lnTo>
-                  <a:pt x="654887" y="678331"/>
-                </a:lnTo>
-                <a:close/>
-                <a:lnTo>
-                  <a:pt x="659467" y="675829"/>
-                </a:lnTo>
-                <a:close/>
-                <a:lnTo>
-                  <a:pt x="664047" y="673337"/>
-                </a:lnTo>
-                <a:close/>
-                <a:lnTo>
-                  <a:pt x="668626" y="670853"/>
-                </a:lnTo>
-                <a:close/>
-                <a:lnTo>
-                  <a:pt x="673206" y="668378"/>
-                </a:lnTo>
-                <a:close/>
-                <a:lnTo>
-                  <a:pt x="677786" y="665912"/>
-                </a:lnTo>
-                <a:close/>
-                <a:lnTo>
-                  <a:pt x="682365" y="663453"/>
-                </a:lnTo>
-                <a:close/>
-                <a:lnTo>
-                  <a:pt x="686945" y="661002"/>
-                </a:lnTo>
-                <a:close/>
-                <a:lnTo>
-                  <a:pt x="691525" y="658558"/>
-                </a:lnTo>
-                <a:close/>
-                <a:lnTo>
-                  <a:pt x="696104" y="656122"/>
-                </a:lnTo>
-                <a:close/>
-                <a:lnTo>
-                  <a:pt x="700684" y="653694"/>
-                </a:lnTo>
-                <a:close/>
-                <a:lnTo>
-                  <a:pt x="705263" y="651274"/>
-                </a:lnTo>
-                <a:close/>
-                <a:lnTo>
-                  <a:pt x="709843" y="648862"/>
-                </a:lnTo>
-                <a:close/>
-                <a:lnTo>
-                  <a:pt x="714423" y="646459"/>
-                </a:lnTo>
-                <a:close/>
-                <a:lnTo>
-                  <a:pt x="719002" y="644064"/>
-                </a:lnTo>
-                <a:close/>
-                <a:lnTo>
-                  <a:pt x="723582" y="641679"/>
-                </a:lnTo>
-                <a:close/>
-                <a:lnTo>
-                  <a:pt x="728162" y="639302"/>
-                </a:lnTo>
-                <a:close/>
-                <a:lnTo>
-                  <a:pt x="732741" y="636935"/>
-                </a:lnTo>
-                <a:close/>
-                <a:lnTo>
-                  <a:pt x="737321" y="634577"/>
-                </a:lnTo>
-                <a:close/>
-                <a:lnTo>
-                  <a:pt x="741901" y="632228"/>
-                </a:lnTo>
-                <a:close/>
-                <a:lnTo>
-                  <a:pt x="746480" y="629889"/>
-                </a:lnTo>
-                <a:close/>
-                <a:lnTo>
-                  <a:pt x="751060" y="627558"/>
-                </a:lnTo>
-                <a:close/>
-                <a:lnTo>
-                  <a:pt x="755639" y="625235"/>
-                </a:lnTo>
-                <a:close/>
-                <a:lnTo>
-                  <a:pt x="760219" y="622921"/>
-                </a:lnTo>
-                <a:close/>
-                <a:lnTo>
-                  <a:pt x="764799" y="620614"/>
-                </a:lnTo>
-                <a:close/>
-                <a:lnTo>
-                  <a:pt x="769378" y="618315"/>
-                </a:lnTo>
-                <a:close/>
-                <a:lnTo>
-                  <a:pt x="773958" y="616023"/>
-                </a:lnTo>
-                <a:close/>
-                <a:lnTo>
-                  <a:pt x="778538" y="613739"/>
-                </a:lnTo>
-                <a:close/>
-                <a:lnTo>
-                  <a:pt x="783117" y="611461"/>
-                </a:lnTo>
-                <a:close/>
-                <a:lnTo>
-                  <a:pt x="787697" y="609190"/>
-                </a:lnTo>
-                <a:close/>
-                <a:lnTo>
-                  <a:pt x="792276" y="606926"/>
-                </a:lnTo>
-                <a:close/>
-                <a:lnTo>
-                  <a:pt x="796856" y="604669"/>
-                </a:lnTo>
-                <a:close/>
-                <a:lnTo>
-                  <a:pt x="801436" y="602419"/>
-                </a:lnTo>
-                <a:close/>
-                <a:lnTo>
-                  <a:pt x="806015" y="600176"/>
-                </a:lnTo>
-                <a:close/>
-                <a:lnTo>
-                  <a:pt x="810595" y="597940"/>
-                </a:lnTo>
-                <a:close/>
-                <a:lnTo>
-                  <a:pt x="815175" y="595710"/>
-                </a:lnTo>
-                <a:close/>
-                <a:lnTo>
-                  <a:pt x="819754" y="593488"/>
-                </a:lnTo>
-                <a:close/>
-                <a:lnTo>
-                  <a:pt x="824334" y="591273"/>
-                </a:lnTo>
-                <a:close/>
-                <a:lnTo>
-                  <a:pt x="828914" y="589064"/>
-                </a:lnTo>
-                <a:close/>
-                <a:lnTo>
-                  <a:pt x="833493" y="586863"/>
-                </a:lnTo>
-                <a:close/>
-                <a:lnTo>
-                  <a:pt x="838073" y="584668"/>
-                </a:lnTo>
-                <a:close/>
-                <a:lnTo>
-                  <a:pt x="842652" y="582480"/>
-                </a:lnTo>
-                <a:close/>
-                <a:lnTo>
-                  <a:pt x="847232" y="580299"/>
-                </a:lnTo>
-                <a:close/>
-                <a:lnTo>
-                  <a:pt x="851812" y="578125"/>
-                </a:lnTo>
-                <a:close/>
-                <a:lnTo>
-                  <a:pt x="856391" y="575957"/>
-                </a:lnTo>
-                <a:close/>
-                <a:lnTo>
-                  <a:pt x="860971" y="573796"/>
-                </a:lnTo>
-                <a:close/>
-                <a:lnTo>
-                  <a:pt x="865551" y="571642"/>
-                </a:lnTo>
-                <a:close/>
-                <a:lnTo>
-                  <a:pt x="870130" y="569495"/>
-                </a:lnTo>
-                <a:close/>
-                <a:lnTo>
-                  <a:pt x="874710" y="567354"/>
-                </a:lnTo>
-                <a:close/>
-                <a:lnTo>
-                  <a:pt x="879289" y="565219"/>
-                </a:lnTo>
-                <a:close/>
-                <a:lnTo>
-                  <a:pt x="883869" y="563091"/>
-                </a:lnTo>
-                <a:close/>
-                <a:lnTo>
-                  <a:pt x="888449" y="560968"/>
-                </a:lnTo>
-                <a:close/>
-                <a:lnTo>
-                  <a:pt x="893028" y="558852"/>
-                </a:lnTo>
-                <a:close/>
-                <a:lnTo>
-                  <a:pt x="897608" y="556742"/>
-                </a:lnTo>
-                <a:close/>
-                <a:lnTo>
-                  <a:pt x="902188" y="554637"/>
-                </a:lnTo>
-                <a:close/>
-                <a:lnTo>
-                  <a:pt x="906767" y="552538"/>
-                </a:lnTo>
-                <a:close/>
-                <a:lnTo>
-                  <a:pt x="911347" y="550444"/>
-                </a:lnTo>
-                <a:close/>
-                <a:lnTo>
-                  <a:pt x="915927" y="548356"/>
-                </a:lnTo>
-                <a:close/>
-                <a:lnTo>
-                  <a:pt x="920506" y="546272"/>
-                </a:lnTo>
-                <a:close/>
-                <a:lnTo>
-                  <a:pt x="925086" y="544194"/>
-                </a:lnTo>
-                <a:close/>
-                <a:lnTo>
-                  <a:pt x="929665" y="542121"/>
-                </a:lnTo>
-                <a:close/>
-                <a:lnTo>
-                  <a:pt x="934245" y="540054"/>
-                </a:lnTo>
-                <a:close/>
-                <a:lnTo>
-                  <a:pt x="938825" y="537992"/>
-                </a:lnTo>
-                <a:close/>
-                <a:lnTo>
-                  <a:pt x="943404" y="535936"/>
-                </a:lnTo>
-                <a:close/>
-                <a:lnTo>
-                  <a:pt x="947984" y="533885"/>
-                </a:lnTo>
-                <a:close/>
-                <a:lnTo>
-                  <a:pt x="952564" y="531839"/>
-                </a:lnTo>
-                <a:close/>
-                <a:lnTo>
-                  <a:pt x="957143" y="529800"/>
-                </a:lnTo>
-                <a:close/>
-                <a:lnTo>
-                  <a:pt x="961723" y="527766"/>
-                </a:lnTo>
-                <a:close/>
-                <a:lnTo>
-                  <a:pt x="966303" y="525738"/>
-                </a:lnTo>
-                <a:close/>
-                <a:lnTo>
-                  <a:pt x="970882" y="523716"/>
-                </a:lnTo>
-                <a:close/>
-                <a:lnTo>
-                  <a:pt x="975462" y="521699"/>
-                </a:lnTo>
-                <a:close/>
-                <a:lnTo>
-                  <a:pt x="980041" y="519688"/>
-                </a:lnTo>
-                <a:close/>
-                <a:lnTo>
-                  <a:pt x="984621" y="517681"/>
-                </a:lnTo>
-                <a:close/>
-                <a:lnTo>
-                  <a:pt x="989201" y="515680"/>
-                </a:lnTo>
-                <a:close/>
-                <a:lnTo>
-                  <a:pt x="993780" y="513685"/>
-                </a:lnTo>
-                <a:close/>
-                <a:lnTo>
-                  <a:pt x="998360" y="511694"/>
-                </a:lnTo>
-                <a:close/>
-                <a:lnTo>
-                  <a:pt x="1002940" y="509707"/>
-                </a:lnTo>
-                <a:close/>
-                <a:lnTo>
-                  <a:pt x="1007519" y="507726"/>
-                </a:lnTo>
-                <a:close/>
-                <a:lnTo>
-                  <a:pt x="1012099" y="505749"/>
-                </a:lnTo>
-                <a:close/>
-                <a:lnTo>
-                  <a:pt x="1016678" y="503777"/>
-                </a:lnTo>
-                <a:close/>
-                <a:lnTo>
-                  <a:pt x="1021258" y="501810"/>
-                </a:lnTo>
-                <a:close/>
-                <a:lnTo>
-                  <a:pt x="1025838" y="499848"/>
-                </a:lnTo>
-                <a:close/>
-                <a:lnTo>
-                  <a:pt x="1030417" y="497891"/>
-                </a:lnTo>
-                <a:close/>
-                <a:lnTo>
-                  <a:pt x="1034997" y="495940"/>
-                </a:lnTo>
-                <a:close/>
-                <a:lnTo>
-                  <a:pt x="1039577" y="493994"/>
-                </a:lnTo>
-                <a:close/>
-                <a:lnTo>
-                  <a:pt x="1044156" y="492054"/>
-                </a:lnTo>
-                <a:close/>
-                <a:lnTo>
-                  <a:pt x="1048736" y="490119"/>
-                </a:lnTo>
-                <a:close/>
-                <a:lnTo>
-                  <a:pt x="1053316" y="488191"/>
-                </a:lnTo>
-                <a:close/>
-                <a:lnTo>
-                  <a:pt x="1057895" y="486269"/>
-                </a:lnTo>
-                <a:close/>
-                <a:lnTo>
-                  <a:pt x="1062475" y="484352"/>
-                </a:lnTo>
-                <a:close/>
-                <a:lnTo>
-                  <a:pt x="1067054" y="482441"/>
-                </a:lnTo>
-                <a:close/>
-                <a:lnTo>
-                  <a:pt x="1071634" y="480536"/>
-                </a:lnTo>
-                <a:close/>
-                <a:lnTo>
-                  <a:pt x="1076214" y="478636"/>
-                </a:lnTo>
-                <a:close/>
-                <a:lnTo>
-                  <a:pt x="1080793" y="476740"/>
-                </a:lnTo>
-                <a:close/>
-                <a:lnTo>
-                  <a:pt x="1085373" y="474850"/>
-                </a:lnTo>
-                <a:close/>
-                <a:lnTo>
-                  <a:pt x="1089953" y="472964"/>
-                </a:lnTo>
-                <a:close/>
-                <a:lnTo>
-                  <a:pt x="1094532" y="471083"/>
-                </a:lnTo>
-                <a:close/>
-                <a:lnTo>
-                  <a:pt x="1099112" y="469205"/>
-                </a:lnTo>
-                <a:close/>
-                <a:lnTo>
-                  <a:pt x="1103691" y="467332"/>
-                </a:lnTo>
-                <a:close/>
-                <a:lnTo>
-                  <a:pt x="1108271" y="465463"/>
-                </a:lnTo>
-                <a:close/>
-                <a:lnTo>
-                  <a:pt x="1112851" y="463598"/>
-                </a:lnTo>
-                <a:close/>
-                <a:lnTo>
-                  <a:pt x="1117430" y="461738"/>
-                </a:lnTo>
-                <a:close/>
-                <a:lnTo>
-                  <a:pt x="1122010" y="459883"/>
-                </a:lnTo>
-                <a:close/>
-                <a:lnTo>
-                  <a:pt x="1126590" y="458032"/>
-                </a:lnTo>
-                <a:close/>
-                <a:lnTo>
-                  <a:pt x="1131169" y="456185"/>
-                </a:lnTo>
-                <a:close/>
-                <a:lnTo>
-                  <a:pt x="1135749" y="454344"/>
-                </a:lnTo>
-                <a:close/>
-                <a:lnTo>
-                  <a:pt x="1140329" y="452508"/>
-                </a:lnTo>
-                <a:close/>
-                <a:lnTo>
-                  <a:pt x="1144908" y="450677"/>
-                </a:lnTo>
-                <a:close/>
-                <a:lnTo>
-                  <a:pt x="1149488" y="448851"/>
-                </a:lnTo>
-                <a:close/>
-                <a:lnTo>
-                  <a:pt x="1154067" y="447029"/>
-                </a:lnTo>
-                <a:close/>
-                <a:lnTo>
-                  <a:pt x="1158647" y="445212"/>
-                </a:lnTo>
-                <a:close/>
-                <a:lnTo>
-                  <a:pt x="1163227" y="443400"/>
-                </a:lnTo>
-                <a:close/>
-                <a:lnTo>
-                  <a:pt x="1167806" y="441592"/>
-                </a:lnTo>
-                <a:close/>
-                <a:lnTo>
-                  <a:pt x="1172386" y="439787"/>
-                </a:lnTo>
-                <a:close/>
-                <a:lnTo>
-                  <a:pt x="1176966" y="437987"/>
-                </a:lnTo>
-                <a:close/>
-                <a:lnTo>
-                  <a:pt x="1181545" y="436189"/>
-                </a:lnTo>
-                <a:close/>
-                <a:lnTo>
-                  <a:pt x="1186125" y="434395"/>
-                </a:lnTo>
-                <a:close/>
-                <a:lnTo>
-                  <a:pt x="1190705" y="432604"/>
-                </a:lnTo>
-                <a:close/>
-                <a:lnTo>
-                  <a:pt x="1195284" y="430815"/>
-                </a:lnTo>
-                <a:close/>
-                <a:lnTo>
-                  <a:pt x="1199864" y="429030"/>
-                </a:lnTo>
-                <a:close/>
-                <a:lnTo>
-                  <a:pt x="1204443" y="427248"/>
-                </a:lnTo>
-                <a:close/>
-                <a:lnTo>
-                  <a:pt x="1209023" y="425471"/>
-                </a:lnTo>
-                <a:close/>
-                <a:lnTo>
-                  <a:pt x="1213603" y="423697"/>
-                </a:lnTo>
-                <a:close/>
-                <a:lnTo>
-                  <a:pt x="1218182" y="421927"/>
-                </a:lnTo>
-                <a:close/>
-                <a:lnTo>
-                  <a:pt x="1222762" y="420163"/>
-                </a:lnTo>
-                <a:close/>
-                <a:lnTo>
-                  <a:pt x="1227342" y="418403"/>
-                </a:lnTo>
-                <a:close/>
-                <a:lnTo>
-                  <a:pt x="1231921" y="416649"/>
-                </a:lnTo>
-                <a:close/>
-                <a:lnTo>
-                  <a:pt x="1236501" y="414900"/>
-                </a:lnTo>
-                <a:close/>
-                <a:lnTo>
-                  <a:pt x="1241080" y="413156"/>
-                </a:lnTo>
-                <a:close/>
-                <a:lnTo>
-                  <a:pt x="1245660" y="411418"/>
-                </a:lnTo>
-                <a:close/>
-                <a:lnTo>
-                  <a:pt x="1250240" y="409685"/>
-                </a:lnTo>
-                <a:close/>
-                <a:lnTo>
-                  <a:pt x="1254819" y="407956"/>
-                </a:lnTo>
-                <a:close/>
-                <a:lnTo>
-                  <a:pt x="1259399" y="406231"/>
-                </a:lnTo>
-                <a:close/>
-                <a:lnTo>
-                  <a:pt x="1263979" y="404509"/>
-                </a:lnTo>
-                <a:close/>
-                <a:lnTo>
-                  <a:pt x="1268558" y="402791"/>
-                </a:lnTo>
-                <a:close/>
-                <a:lnTo>
-                  <a:pt x="1273138" y="401076"/>
-                </a:lnTo>
-                <a:close/>
-                <a:lnTo>
-                  <a:pt x="1277718" y="399362"/>
-                </a:lnTo>
-                <a:close/>
-                <a:lnTo>
-                  <a:pt x="1282297" y="397651"/>
-                </a:lnTo>
-                <a:close/>
-                <a:lnTo>
-                  <a:pt x="1286877" y="395942"/>
-                </a:lnTo>
-                <a:close/>
-                <a:lnTo>
-                  <a:pt x="1291456" y="394235"/>
-                </a:lnTo>
-                <a:close/>
-                <a:lnTo>
-                  <a:pt x="1296036" y="392531"/>
-                </a:lnTo>
-                <a:close/>
-                <a:lnTo>
-                  <a:pt x="1300616" y="390831"/>
-                </a:lnTo>
-                <a:close/>
-                <a:lnTo>
-                  <a:pt x="1305195" y="389134"/>
-                </a:lnTo>
-                <a:close/>
-                <a:lnTo>
-                  <a:pt x="1309775" y="387442"/>
-                </a:lnTo>
-                <a:close/>
-                <a:lnTo>
-                  <a:pt x="1314355" y="385755"/>
-                </a:lnTo>
-                <a:close/>
-                <a:lnTo>
-                  <a:pt x="1318934" y="384073"/>
-                </a:lnTo>
-                <a:close/>
-                <a:lnTo>
-                  <a:pt x="1323514" y="382397"/>
-                </a:lnTo>
-                <a:close/>
-                <a:lnTo>
-                  <a:pt x="1328093" y="380727"/>
-                </a:lnTo>
-                <a:close/>
-                <a:lnTo>
-                  <a:pt x="1332673" y="379063"/>
-                </a:lnTo>
-                <a:close/>
-                <a:lnTo>
-                  <a:pt x="1337253" y="377405"/>
-                </a:lnTo>
-                <a:close/>
-                <a:lnTo>
-                  <a:pt x="1341832" y="375752"/>
-                </a:lnTo>
-                <a:close/>
-                <a:lnTo>
-                  <a:pt x="1346412" y="374102"/>
-                </a:lnTo>
-                <a:close/>
-                <a:lnTo>
-                  <a:pt x="1350992" y="372457"/>
-                </a:lnTo>
-                <a:close/>
-                <a:lnTo>
-                  <a:pt x="1355571" y="370813"/>
-                </a:lnTo>
-                <a:close/>
-                <a:lnTo>
-                  <a:pt x="1360151" y="369172"/>
-                </a:lnTo>
-                <a:close/>
-                <a:lnTo>
-                  <a:pt x="1364731" y="367533"/>
-                </a:lnTo>
-                <a:close/>
-                <a:lnTo>
-                  <a:pt x="1369310" y="365893"/>
-                </a:lnTo>
-                <a:close/>
-                <a:lnTo>
-                  <a:pt x="1373890" y="364254"/>
-                </a:lnTo>
-                <a:close/>
-                <a:lnTo>
-                  <a:pt x="1378469" y="362616"/>
-                </a:lnTo>
-                <a:close/>
-                <a:lnTo>
-                  <a:pt x="1383049" y="360979"/>
-                </a:lnTo>
-                <a:close/>
-                <a:lnTo>
-                  <a:pt x="1387629" y="359345"/>
-                </a:lnTo>
-                <a:close/>
-                <a:lnTo>
-                  <a:pt x="1392208" y="357716"/>
-                </a:lnTo>
-                <a:close/>
-                <a:lnTo>
-                  <a:pt x="1396788" y="356093"/>
-                </a:lnTo>
-                <a:close/>
-                <a:lnTo>
-                  <a:pt x="1401368" y="354479"/>
-                </a:lnTo>
-                <a:close/>
-                <a:lnTo>
-                  <a:pt x="1405947" y="352873"/>
-                </a:lnTo>
-                <a:close/>
-                <a:lnTo>
-                  <a:pt x="1410527" y="351278"/>
-                </a:lnTo>
-                <a:close/>
-                <a:lnTo>
-                  <a:pt x="1415107" y="349695"/>
-                </a:lnTo>
-                <a:close/>
-                <a:lnTo>
-                  <a:pt x="1419686" y="348126"/>
-                </a:lnTo>
-                <a:close/>
-                <a:lnTo>
-                  <a:pt x="1424266" y="346568"/>
-                </a:lnTo>
-                <a:close/>
-                <a:lnTo>
-                  <a:pt x="1428845" y="345017"/>
-                </a:lnTo>
-                <a:close/>
-                <a:lnTo>
-                  <a:pt x="1433425" y="343466"/>
-                </a:lnTo>
-                <a:close/>
-                <a:lnTo>
-                  <a:pt x="1438005" y="341912"/>
-                </a:lnTo>
-                <a:close/>
-                <a:lnTo>
-                  <a:pt x="1442584" y="340349"/>
-                </a:lnTo>
-                <a:close/>
-                <a:lnTo>
-                  <a:pt x="1447164" y="338771"/>
-                </a:lnTo>
-                <a:close/>
-                <a:lnTo>
-                  <a:pt x="1451744" y="337174"/>
-                </a:lnTo>
-                <a:close/>
-                <a:lnTo>
-                  <a:pt x="1456323" y="335551"/>
-                </a:lnTo>
-                <a:close/>
-                <a:lnTo>
-                  <a:pt x="1460903" y="333899"/>
-                </a:lnTo>
-                <a:close/>
-                <a:lnTo>
-                  <a:pt x="1465482" y="332211"/>
-                </a:lnTo>
-                <a:close/>
-                <a:lnTo>
-                  <a:pt x="1470062" y="330497"/>
-                </a:lnTo>
-                <a:close/>
-                <a:lnTo>
-                  <a:pt x="1474642" y="328775"/>
-                </a:lnTo>
-                <a:close/>
-                <a:lnTo>
-                  <a:pt x="1479221" y="327064"/>
-                </a:lnTo>
-                <a:close/>
-                <a:lnTo>
-                  <a:pt x="1483801" y="325384"/>
-                </a:lnTo>
-                <a:close/>
-                <a:lnTo>
-                  <a:pt x="1488381" y="323754"/>
-                </a:lnTo>
-                <a:close/>
-                <a:lnTo>
-                  <a:pt x="1492960" y="322194"/>
-                </a:lnTo>
-                <a:close/>
-                <a:lnTo>
-                  <a:pt x="1497540" y="320723"/>
-                </a:lnTo>
-                <a:close/>
-                <a:lnTo>
-                  <a:pt x="1502120" y="319360"/>
-                </a:lnTo>
-                <a:close/>
-                <a:lnTo>
-                  <a:pt x="1506699" y="318125"/>
-                </a:lnTo>
-                <a:close/>
-                <a:lnTo>
-                  <a:pt x="1511279" y="317035"/>
-                </a:lnTo>
-                <a:close/>
-                <a:lnTo>
-                  <a:pt x="1515858" y="316060"/>
-                </a:lnTo>
-                <a:close/>
-                <a:lnTo>
-                  <a:pt x="1520438" y="315128"/>
-                </a:lnTo>
-                <a:close/>
-                <a:lnTo>
-                  <a:pt x="1525018" y="314166"/>
-                </a:lnTo>
-                <a:close/>
-                <a:lnTo>
-                  <a:pt x="1529597" y="313103"/>
-                </a:lnTo>
-                <a:close/>
-                <a:lnTo>
-                  <a:pt x="1534177" y="311865"/>
-                </a:lnTo>
-                <a:close/>
-                <a:lnTo>
-                  <a:pt x="1538757" y="310379"/>
-                </a:lnTo>
-                <a:close/>
-                <a:lnTo>
-                  <a:pt x="1543336" y="308573"/>
-                </a:lnTo>
-                <a:close/>
-                <a:lnTo>
-                  <a:pt x="1547916" y="306374"/>
-                </a:lnTo>
-                <a:close/>
-                <a:lnTo>
-                  <a:pt x="1552495" y="303709"/>
-                </a:lnTo>
-                <a:close/>
-                <a:lnTo>
-                  <a:pt x="1557075" y="300513"/>
-                </a:lnTo>
-                <a:close/>
-                <a:lnTo>
-                  <a:pt x="1561655" y="296821"/>
-                </a:lnTo>
-                <a:close/>
-                <a:lnTo>
-                  <a:pt x="1566234" y="292761"/>
-                </a:lnTo>
-                <a:close/>
-                <a:lnTo>
-                  <a:pt x="1570814" y="288459"/>
-                </a:lnTo>
-                <a:close/>
-                <a:lnTo>
-                  <a:pt x="1575394" y="284045"/>
-                </a:lnTo>
-                <a:close/>
-                <a:lnTo>
-                  <a:pt x="1579973" y="279645"/>
-                </a:lnTo>
-                <a:close/>
-                <a:lnTo>
-                  <a:pt x="1584553" y="275388"/>
-                </a:lnTo>
-                <a:close/>
-                <a:lnTo>
-                  <a:pt x="1589133" y="271402"/>
-                </a:lnTo>
-                <a:close/>
-                <a:lnTo>
-                  <a:pt x="1593712" y="267815"/>
-                </a:lnTo>
-                <a:close/>
-                <a:lnTo>
-                  <a:pt x="1598292" y="264756"/>
-                </a:lnTo>
-                <a:close/>
-                <a:lnTo>
-                  <a:pt x="1602871" y="262344"/>
-                </a:lnTo>
-                <a:close/>
-                <a:lnTo>
-                  <a:pt x="1607451" y="260579"/>
-                </a:lnTo>
-                <a:close/>
-                <a:lnTo>
-                  <a:pt x="1612031" y="259362"/>
-                </a:lnTo>
-                <a:close/>
-                <a:lnTo>
-                  <a:pt x="1616610" y="258593"/>
-                </a:lnTo>
-                <a:close/>
-                <a:lnTo>
-                  <a:pt x="1621190" y="258172"/>
-                </a:lnTo>
-                <a:close/>
-                <a:lnTo>
-                  <a:pt x="1625770" y="257996"/>
-                </a:lnTo>
-                <a:close/>
-                <a:lnTo>
-                  <a:pt x="1630349" y="257965"/>
-                </a:lnTo>
-                <a:close/>
-                <a:lnTo>
-                  <a:pt x="1634929" y="257978"/>
-                </a:lnTo>
-                <a:close/>
-                <a:lnTo>
-                  <a:pt x="1639509" y="257935"/>
-                </a:lnTo>
-                <a:close/>
-                <a:lnTo>
-                  <a:pt x="1644088" y="257734"/>
-                </a:lnTo>
-                <a:close/>
-                <a:lnTo>
-                  <a:pt x="1648668" y="257279"/>
-                </a:lnTo>
-                <a:close/>
-                <a:lnTo>
-                  <a:pt x="1653247" y="256549"/>
-                </a:lnTo>
-                <a:close/>
-                <a:lnTo>
-                  <a:pt x="1657827" y="255582"/>
-                </a:lnTo>
-                <a:close/>
-                <a:lnTo>
-                  <a:pt x="1662407" y="254415"/>
-                </a:lnTo>
-                <a:close/>
-                <a:lnTo>
-                  <a:pt x="1666986" y="253087"/>
-                </a:lnTo>
-                <a:close/>
-                <a:lnTo>
-                  <a:pt x="1671566" y="251636"/>
-                </a:lnTo>
-                <a:close/>
-                <a:lnTo>
-                  <a:pt x="1676146" y="250100"/>
-                </a:lnTo>
-                <a:close/>
-                <a:lnTo>
-                  <a:pt x="1680725" y="248518"/>
-                </a:lnTo>
-                <a:close/>
-                <a:lnTo>
-                  <a:pt x="1685305" y="246927"/>
-                </a:lnTo>
-                <a:close/>
-                <a:lnTo>
-                  <a:pt x="1689884" y="245367"/>
-                </a:lnTo>
-                <a:close/>
-                <a:lnTo>
-                  <a:pt x="1694464" y="243873"/>
-                </a:lnTo>
-                <a:close/>
-                <a:lnTo>
-                  <a:pt x="1699044" y="242455"/>
-                </a:lnTo>
-                <a:close/>
-                <a:lnTo>
-                  <a:pt x="1703623" y="241103"/>
-                </a:lnTo>
-                <a:close/>
-                <a:lnTo>
-                  <a:pt x="1708203" y="239808"/>
-                </a:lnTo>
-                <a:close/>
-                <a:lnTo>
-                  <a:pt x="1712783" y="238559"/>
-                </a:lnTo>
-                <a:close/>
-                <a:lnTo>
-                  <a:pt x="1717362" y="237346"/>
-                </a:lnTo>
-                <a:close/>
-                <a:lnTo>
-                  <a:pt x="1721942" y="236158"/>
-                </a:lnTo>
-                <a:close/>
-                <a:lnTo>
-                  <a:pt x="1726522" y="234985"/>
-                </a:lnTo>
-                <a:close/>
-                <a:lnTo>
-                  <a:pt x="1731101" y="233818"/>
-                </a:lnTo>
-                <a:close/>
-                <a:lnTo>
-                  <a:pt x="1735681" y="232645"/>
-                </a:lnTo>
-                <a:close/>
-                <a:lnTo>
-                  <a:pt x="1740260" y="231457"/>
-                </a:lnTo>
-                <a:close/>
-                <a:lnTo>
-                  <a:pt x="1744840" y="230253"/>
-                </a:lnTo>
-                <a:close/>
-                <a:lnTo>
-                  <a:pt x="1749420" y="229033"/>
-                </a:lnTo>
-                <a:close/>
-                <a:lnTo>
-                  <a:pt x="1753999" y="227801"/>
-                </a:lnTo>
-                <a:close/>
-                <a:lnTo>
-                  <a:pt x="1758579" y="226560"/>
-                </a:lnTo>
-                <a:close/>
-                <a:lnTo>
-                  <a:pt x="1763159" y="225312"/>
-                </a:lnTo>
-                <a:close/>
-                <a:lnTo>
-                  <a:pt x="1767738" y="224059"/>
-                </a:lnTo>
-                <a:close/>
-                <a:lnTo>
-                  <a:pt x="1772318" y="222805"/>
-                </a:lnTo>
-                <a:close/>
-                <a:lnTo>
-                  <a:pt x="1776897" y="221552"/>
-                </a:lnTo>
-                <a:close/>
-                <a:lnTo>
-                  <a:pt x="1781477" y="220303"/>
-                </a:lnTo>
-                <a:close/>
-                <a:lnTo>
-                  <a:pt x="1786057" y="219060"/>
-                </a:lnTo>
-                <a:close/>
-                <a:lnTo>
-                  <a:pt x="1790636" y="217824"/>
-                </a:lnTo>
-                <a:close/>
-                <a:lnTo>
-                  <a:pt x="1795216" y="216594"/>
-                </a:lnTo>
-                <a:close/>
-                <a:lnTo>
-                  <a:pt x="1799796" y="215369"/>
-                </a:lnTo>
-                <a:close/>
-                <a:lnTo>
-                  <a:pt x="1804375" y="214150"/>
-                </a:lnTo>
-                <a:close/>
-                <a:lnTo>
-                  <a:pt x="1808955" y="212935"/>
-                </a:lnTo>
-                <a:close/>
-                <a:lnTo>
-                  <a:pt x="1813535" y="211723"/>
-                </a:lnTo>
-                <a:close/>
-                <a:lnTo>
-                  <a:pt x="1818114" y="210515"/>
-                </a:lnTo>
-                <a:close/>
-                <a:lnTo>
-                  <a:pt x="1822694" y="209310"/>
-                </a:lnTo>
-                <a:close/>
-                <a:lnTo>
-                  <a:pt x="1827273" y="208107"/>
-                </a:lnTo>
-                <a:close/>
-                <a:lnTo>
-                  <a:pt x="1831853" y="206904"/>
-                </a:lnTo>
-                <a:close/>
-                <a:lnTo>
-                  <a:pt x="1836433" y="205704"/>
-                </a:lnTo>
-                <a:close/>
-                <a:lnTo>
-                  <a:pt x="1841012" y="204504"/>
-                </a:lnTo>
-                <a:close/>
-                <a:lnTo>
-                  <a:pt x="1845592" y="203306"/>
-                </a:lnTo>
-                <a:close/>
-                <a:lnTo>
-                  <a:pt x="1850172" y="202109"/>
-                </a:lnTo>
-                <a:close/>
-                <a:lnTo>
-                  <a:pt x="1854751" y="200914"/>
-                </a:lnTo>
-                <a:close/>
-                <a:lnTo>
-                  <a:pt x="1859331" y="199720"/>
-                </a:lnTo>
-                <a:close/>
-                <a:lnTo>
-                  <a:pt x="1863911" y="198528"/>
-                </a:lnTo>
-                <a:close/>
-                <a:lnTo>
-                  <a:pt x="1868490" y="197338"/>
-                </a:lnTo>
-                <a:close/>
-                <a:lnTo>
-                  <a:pt x="1873070" y="196149"/>
-                </a:lnTo>
-                <a:close/>
-                <a:lnTo>
-                  <a:pt x="1877649" y="194962"/>
-                </a:lnTo>
-                <a:close/>
-                <a:lnTo>
-                  <a:pt x="1882229" y="193777"/>
-                </a:lnTo>
-                <a:close/>
-                <a:lnTo>
-                  <a:pt x="1886809" y="192594"/>
-                </a:lnTo>
-                <a:close/>
-                <a:lnTo>
-                  <a:pt x="1891388" y="191413"/>
-                </a:lnTo>
-                <a:close/>
-                <a:lnTo>
-                  <a:pt x="1895968" y="190234"/>
-                </a:lnTo>
-                <a:close/>
-                <a:lnTo>
-                  <a:pt x="1900548" y="189057"/>
-                </a:lnTo>
-                <a:close/>
-                <a:lnTo>
-                  <a:pt x="1905127" y="187882"/>
-                </a:lnTo>
-                <a:close/>
-                <a:lnTo>
-                  <a:pt x="1909707" y="186710"/>
-                </a:lnTo>
-                <a:close/>
-                <a:lnTo>
-                  <a:pt x="1914286" y="185540"/>
-                </a:lnTo>
-                <a:close/>
-                <a:lnTo>
-                  <a:pt x="1918866" y="184373"/>
-                </a:lnTo>
-                <a:close/>
-                <a:lnTo>
-                  <a:pt x="1923446" y="183208"/>
-                </a:lnTo>
-                <a:close/>
-                <a:lnTo>
-                  <a:pt x="1928025" y="182045"/>
-                </a:lnTo>
-                <a:close/>
-                <a:lnTo>
-                  <a:pt x="1932605" y="180885"/>
-                </a:lnTo>
-                <a:close/>
-                <a:lnTo>
-                  <a:pt x="1937185" y="179727"/>
-                </a:lnTo>
-                <a:close/>
-                <a:lnTo>
-                  <a:pt x="1941764" y="178571"/>
-                </a:lnTo>
-                <a:close/>
-                <a:lnTo>
-                  <a:pt x="1946344" y="177418"/>
-                </a:lnTo>
-                <a:close/>
-                <a:lnTo>
-                  <a:pt x="1950924" y="176267"/>
-                </a:lnTo>
-                <a:close/>
-                <a:lnTo>
-                  <a:pt x="1955503" y="175118"/>
-                </a:lnTo>
-                <a:close/>
-                <a:lnTo>
-                  <a:pt x="1960083" y="173971"/>
-                </a:lnTo>
-                <a:close/>
-                <a:lnTo>
-                  <a:pt x="1964662" y="172825"/>
-                </a:lnTo>
-                <a:close/>
-                <a:lnTo>
-                  <a:pt x="1969242" y="171682"/>
-                </a:lnTo>
-                <a:close/>
-                <a:lnTo>
-                  <a:pt x="1973822" y="170541"/>
-                </a:lnTo>
-                <a:close/>
-                <a:lnTo>
-                  <a:pt x="1978401" y="169401"/>
-                </a:lnTo>
-                <a:close/>
-                <a:lnTo>
-                  <a:pt x="1982981" y="168263"/>
-                </a:lnTo>
-                <a:close/>
-                <a:lnTo>
-                  <a:pt x="1987561" y="167126"/>
-                </a:lnTo>
-                <a:close/>
-                <a:lnTo>
-                  <a:pt x="1992140" y="165991"/>
-                </a:lnTo>
-                <a:close/>
-                <a:lnTo>
-                  <a:pt x="1996720" y="164857"/>
-                </a:lnTo>
-                <a:close/>
-                <a:lnTo>
-                  <a:pt x="2001299" y="163725"/>
-                </a:lnTo>
-                <a:close/>
-                <a:lnTo>
-                  <a:pt x="2005879" y="162594"/>
-                </a:lnTo>
-                <a:close/>
-                <a:lnTo>
-                  <a:pt x="2010459" y="161464"/>
-                </a:lnTo>
-                <a:close/>
-                <a:lnTo>
-                  <a:pt x="2015038" y="160335"/>
-                </a:lnTo>
-                <a:close/>
-                <a:lnTo>
-                  <a:pt x="2019618" y="159208"/>
-                </a:lnTo>
-                <a:close/>
-                <a:lnTo>
-                  <a:pt x="2024198" y="158081"/>
-                </a:lnTo>
-                <a:close/>
-                <a:lnTo>
-                  <a:pt x="2028777" y="156956"/>
-                </a:lnTo>
-                <a:close/>
-                <a:lnTo>
-                  <a:pt x="2033357" y="155833"/>
-                </a:lnTo>
-                <a:close/>
-                <a:lnTo>
-                  <a:pt x="2037937" y="154711"/>
-                </a:lnTo>
-                <a:close/>
-                <a:lnTo>
-                  <a:pt x="2042516" y="153590"/>
-                </a:lnTo>
-                <a:close/>
-                <a:lnTo>
-                  <a:pt x="2047096" y="152472"/>
-                </a:lnTo>
-                <a:close/>
-                <a:lnTo>
-                  <a:pt x="2051675" y="151355"/>
-                </a:lnTo>
-                <a:close/>
-                <a:lnTo>
-                  <a:pt x="2056255" y="150240"/>
-                </a:lnTo>
-                <a:close/>
-                <a:lnTo>
-                  <a:pt x="2060835" y="149127"/>
-                </a:lnTo>
-                <a:close/>
-                <a:lnTo>
-                  <a:pt x="2065414" y="148016"/>
-                </a:lnTo>
-                <a:close/>
-                <a:lnTo>
-                  <a:pt x="2069994" y="146907"/>
-                </a:lnTo>
-                <a:close/>
-                <a:lnTo>
-                  <a:pt x="2074574" y="145800"/>
-                </a:lnTo>
-                <a:close/>
-                <a:lnTo>
-                  <a:pt x="2079153" y="144694"/>
-                </a:lnTo>
-                <a:close/>
-                <a:lnTo>
-                  <a:pt x="2083733" y="143591"/>
-                </a:lnTo>
-                <a:close/>
-                <a:lnTo>
-                  <a:pt x="2088313" y="142490"/>
-                </a:lnTo>
-                <a:close/>
-                <a:lnTo>
-                  <a:pt x="2092892" y="141391"/>
-                </a:lnTo>
-                <a:close/>
-                <a:lnTo>
-                  <a:pt x="2097472" y="140294"/>
-                </a:lnTo>
-                <a:close/>
-                <a:lnTo>
-                  <a:pt x="2102051" y="139198"/>
-                </a:lnTo>
-                <a:close/>
-                <a:lnTo>
-                  <a:pt x="2106631" y="138105"/>
-                </a:lnTo>
-                <a:close/>
-                <a:lnTo>
-                  <a:pt x="2111211" y="137013"/>
-                </a:lnTo>
-                <a:close/>
-                <a:lnTo>
-                  <a:pt x="2115790" y="135923"/>
-                </a:lnTo>
-                <a:close/>
-                <a:lnTo>
-                  <a:pt x="2120370" y="134835"/>
-                </a:lnTo>
-                <a:close/>
-                <a:lnTo>
-                  <a:pt x="2124950" y="133749"/>
-                </a:lnTo>
-                <a:close/>
-                <a:lnTo>
-                  <a:pt x="2129529" y="132665"/>
-                </a:lnTo>
-                <a:close/>
-                <a:lnTo>
-                  <a:pt x="2134109" y="131581"/>
-                </a:lnTo>
-                <a:close/>
-                <a:lnTo>
-                  <a:pt x="2138688" y="130500"/>
-                </a:lnTo>
-                <a:close/>
-                <a:lnTo>
-                  <a:pt x="2143268" y="129420"/>
-                </a:lnTo>
-                <a:close/>
-                <a:lnTo>
-                  <a:pt x="2147848" y="128341"/>
-                </a:lnTo>
-                <a:close/>
-                <a:lnTo>
-                  <a:pt x="2152427" y="127263"/>
-                </a:lnTo>
-                <a:close/>
-                <a:lnTo>
-                  <a:pt x="2157007" y="126187"/>
-                </a:lnTo>
-                <a:close/>
-                <a:lnTo>
-                  <a:pt x="2161587" y="125112"/>
-                </a:lnTo>
-                <a:close/>
-                <a:lnTo>
-                  <a:pt x="2166166" y="124038"/>
-                </a:lnTo>
-                <a:close/>
-                <a:lnTo>
-                  <a:pt x="2170746" y="122966"/>
-                </a:lnTo>
-                <a:close/>
-                <a:lnTo>
-                  <a:pt x="2175326" y="121895"/>
-                </a:lnTo>
-                <a:close/>
-                <a:lnTo>
-                  <a:pt x="2179905" y="120825"/>
-                </a:lnTo>
-                <a:close/>
-                <a:lnTo>
-                  <a:pt x="2184485" y="119756"/>
-                </a:lnTo>
-                <a:close/>
-                <a:lnTo>
-                  <a:pt x="2189064" y="118688"/>
-                </a:lnTo>
-                <a:close/>
-                <a:lnTo>
-                  <a:pt x="2193644" y="117622"/>
-                </a:lnTo>
-                <a:close/>
-                <a:lnTo>
-                  <a:pt x="2198224" y="116557"/>
-                </a:lnTo>
-                <a:close/>
-                <a:lnTo>
-                  <a:pt x="2202803" y="115493"/>
-                </a:lnTo>
-                <a:close/>
-                <a:lnTo>
-                  <a:pt x="2207383" y="114430"/>
-                </a:lnTo>
-                <a:close/>
-                <a:lnTo>
-                  <a:pt x="2211963" y="113369"/>
-                </a:lnTo>
-                <a:close/>
-                <a:lnTo>
-                  <a:pt x="2216542" y="112310"/>
-                </a:lnTo>
-                <a:close/>
-                <a:lnTo>
-                  <a:pt x="2221122" y="111252"/>
-                </a:lnTo>
-                <a:close/>
-                <a:lnTo>
-                  <a:pt x="2225702" y="110196"/>
-                </a:lnTo>
-                <a:close/>
-                <a:lnTo>
-                  <a:pt x="2230281" y="109142"/>
-                </a:lnTo>
-                <a:close/>
-                <a:lnTo>
-                  <a:pt x="2234861" y="108090"/>
-                </a:lnTo>
-                <a:close/>
-                <a:lnTo>
-                  <a:pt x="2239440" y="107040"/>
-                </a:lnTo>
-                <a:close/>
-                <a:lnTo>
-                  <a:pt x="2244020" y="105992"/>
-                </a:lnTo>
-                <a:close/>
-                <a:lnTo>
-                  <a:pt x="2248600" y="104946"/>
-                </a:lnTo>
-                <a:close/>
-                <a:lnTo>
-                  <a:pt x="2253179" y="103902"/>
-                </a:lnTo>
-                <a:close/>
-                <a:lnTo>
-                  <a:pt x="2257759" y="102860"/>
-                </a:lnTo>
-                <a:close/>
-                <a:lnTo>
-                  <a:pt x="2262339" y="101819"/>
-                </a:lnTo>
-                <a:close/>
-                <a:lnTo>
-                  <a:pt x="2266918" y="100781"/>
-                </a:lnTo>
-                <a:close/>
-                <a:lnTo>
-                  <a:pt x="2271498" y="99744"/>
-                </a:lnTo>
-                <a:close/>
-                <a:lnTo>
-                  <a:pt x="2276077" y="98708"/>
-                </a:lnTo>
-                <a:close/>
-                <a:lnTo>
-                  <a:pt x="2280657" y="97674"/>
-                </a:lnTo>
-                <a:close/>
-                <a:lnTo>
-                  <a:pt x="2285237" y="96641"/>
-                </a:lnTo>
-                <a:close/>
-                <a:lnTo>
-                  <a:pt x="2289816" y="95609"/>
-                </a:lnTo>
-                <a:close/>
-                <a:lnTo>
-                  <a:pt x="2294396" y="94579"/>
-                </a:lnTo>
-                <a:close/>
-                <a:lnTo>
-                  <a:pt x="2298976" y="93549"/>
-                </a:lnTo>
-                <a:close/>
-                <a:lnTo>
-                  <a:pt x="2303555" y="92521"/>
-                </a:lnTo>
-                <a:close/>
-                <a:lnTo>
-                  <a:pt x="2308135" y="91495"/>
-                </a:lnTo>
-                <a:close/>
-                <a:lnTo>
-                  <a:pt x="2312715" y="90469"/>
-                </a:lnTo>
-                <a:close/>
-                <a:lnTo>
-                  <a:pt x="2317294" y="89445"/>
-                </a:lnTo>
-                <a:close/>
-                <a:lnTo>
-                  <a:pt x="2321874" y="88422"/>
-                </a:lnTo>
-                <a:close/>
-                <a:lnTo>
-                  <a:pt x="2326453" y="87401"/>
-                </a:lnTo>
-                <a:close/>
-                <a:lnTo>
-                  <a:pt x="2331033" y="86381"/>
-                </a:lnTo>
-                <a:close/>
-                <a:lnTo>
-                  <a:pt x="2335613" y="85362"/>
-                </a:lnTo>
-                <a:close/>
-                <a:lnTo>
-                  <a:pt x="2340192" y="84345"/>
-                </a:lnTo>
-                <a:close/>
-                <a:lnTo>
-                  <a:pt x="2344772" y="83329"/>
-                </a:lnTo>
-                <a:close/>
-                <a:lnTo>
-                  <a:pt x="2349352" y="82315"/>
-                </a:lnTo>
-                <a:close/>
-                <a:lnTo>
-                  <a:pt x="2353931" y="81302"/>
-                </a:lnTo>
-                <a:close/>
-                <a:lnTo>
-                  <a:pt x="2358511" y="80290"/>
-                </a:lnTo>
-                <a:close/>
-                <a:lnTo>
-                  <a:pt x="2363090" y="79280"/>
-                </a:lnTo>
-                <a:close/>
-                <a:lnTo>
-                  <a:pt x="2367670" y="78271"/>
-                </a:lnTo>
-                <a:close/>
-                <a:lnTo>
-                  <a:pt x="2372250" y="77264"/>
-                </a:lnTo>
-                <a:close/>
-                <a:lnTo>
-                  <a:pt x="2376829" y="76258"/>
-                </a:lnTo>
-                <a:close/>
-                <a:lnTo>
-                  <a:pt x="2381409" y="75253"/>
-                </a:lnTo>
-                <a:close/>
-                <a:lnTo>
-                  <a:pt x="2385989" y="74250"/>
-                </a:lnTo>
-                <a:close/>
-                <a:lnTo>
-                  <a:pt x="2390568" y="73248"/>
-                </a:lnTo>
-                <a:close/>
-                <a:lnTo>
-                  <a:pt x="2395148" y="72247"/>
-                </a:lnTo>
-                <a:close/>
-                <a:lnTo>
-                  <a:pt x="2399728" y="71248"/>
-                </a:lnTo>
-                <a:close/>
-                <a:lnTo>
-                  <a:pt x="2404307" y="70250"/>
-                </a:lnTo>
-                <a:close/>
-                <a:lnTo>
-                  <a:pt x="2408887" y="69253"/>
-                </a:lnTo>
-                <a:close/>
-                <a:lnTo>
-                  <a:pt x="2413466" y="68258"/>
-                </a:lnTo>
-                <a:close/>
-                <a:lnTo>
-                  <a:pt x="2418046" y="67265"/>
-                </a:lnTo>
-                <a:close/>
-                <a:lnTo>
-                  <a:pt x="2422626" y="66272"/>
-                </a:lnTo>
-                <a:close/>
-                <a:lnTo>
-                  <a:pt x="2427205" y="65281"/>
-                </a:lnTo>
-                <a:close/>
-                <a:lnTo>
-                  <a:pt x="2431785" y="64292"/>
-                </a:lnTo>
-                <a:close/>
-                <a:lnTo>
-                  <a:pt x="2436365" y="63304"/>
-                </a:lnTo>
-                <a:close/>
-                <a:lnTo>
-                  <a:pt x="2440944" y="62317"/>
-                </a:lnTo>
-                <a:close/>
-                <a:lnTo>
-                  <a:pt x="2445524" y="61331"/>
-                </a:lnTo>
-                <a:close/>
-                <a:lnTo>
-                  <a:pt x="2450104" y="60347"/>
-                </a:lnTo>
-                <a:close/>
-                <a:lnTo>
-                  <a:pt x="2454683" y="59365"/>
-                </a:lnTo>
-                <a:close/>
-                <a:lnTo>
-                  <a:pt x="2459263" y="58383"/>
-                </a:lnTo>
-                <a:close/>
-                <a:lnTo>
-                  <a:pt x="2463842" y="57403"/>
-                </a:lnTo>
-                <a:close/>
-                <a:lnTo>
-                  <a:pt x="2468422" y="56425"/>
-                </a:lnTo>
-                <a:close/>
-                <a:lnTo>
-                  <a:pt x="2473002" y="55447"/>
-                </a:lnTo>
-                <a:close/>
-                <a:lnTo>
-                  <a:pt x="2477581" y="54471"/>
-                </a:lnTo>
-                <a:close/>
-                <a:lnTo>
-                  <a:pt x="2482161" y="53497"/>
-                </a:lnTo>
-                <a:close/>
-                <a:lnTo>
-                  <a:pt x="2486741" y="52523"/>
-                </a:lnTo>
-                <a:close/>
-                <a:lnTo>
-                  <a:pt x="2491320" y="51551"/>
-                </a:lnTo>
-                <a:close/>
-                <a:lnTo>
-                  <a:pt x="2495900" y="50581"/>
-                </a:lnTo>
-                <a:close/>
-                <a:lnTo>
-                  <a:pt x="2500479" y="49612"/>
-                </a:lnTo>
-                <a:close/>
-                <a:lnTo>
-                  <a:pt x="2505059" y="48645"/>
-                </a:lnTo>
-                <a:close/>
-                <a:lnTo>
-                  <a:pt x="2509639" y="47679"/>
-                </a:lnTo>
-                <a:close/>
-                <a:lnTo>
-                  <a:pt x="2514218" y="46714"/>
-                </a:lnTo>
-                <a:close/>
-                <a:lnTo>
-                  <a:pt x="2518798" y="45752"/>
-                </a:lnTo>
-                <a:close/>
-                <a:lnTo>
-                  <a:pt x="2523378" y="44790"/>
-                </a:lnTo>
-                <a:close/>
-                <a:lnTo>
-                  <a:pt x="2527957" y="43831"/>
-                </a:lnTo>
-                <a:close/>
-                <a:lnTo>
-                  <a:pt x="2532537" y="42872"/>
-                </a:lnTo>
-                <a:close/>
-                <a:lnTo>
-                  <a:pt x="2537117" y="41915"/>
-                </a:lnTo>
-                <a:close/>
-                <a:lnTo>
-                  <a:pt x="2541696" y="40958"/>
-                </a:lnTo>
-                <a:close/>
-                <a:lnTo>
-                  <a:pt x="2546276" y="40003"/>
-                </a:lnTo>
-                <a:close/>
-                <a:lnTo>
-                  <a:pt x="2550855" y="39049"/>
-                </a:lnTo>
-                <a:close/>
-                <a:lnTo>
-                  <a:pt x="2555435" y="38095"/>
-                </a:lnTo>
-                <a:close/>
-                <a:lnTo>
-                  <a:pt x="2560015" y="37142"/>
-                </a:lnTo>
-                <a:close/>
-                <a:lnTo>
-                  <a:pt x="2564594" y="36190"/>
-                </a:lnTo>
-                <a:close/>
-                <a:lnTo>
-                  <a:pt x="2569174" y="35238"/>
-                </a:lnTo>
-                <a:close/>
-                <a:lnTo>
-                  <a:pt x="2573754" y="34288"/>
-                </a:lnTo>
-                <a:close/>
-                <a:lnTo>
-                  <a:pt x="2578333" y="33338"/>
-                </a:lnTo>
-                <a:close/>
-                <a:lnTo>
-                  <a:pt x="2582913" y="32389"/>
-                </a:lnTo>
-                <a:close/>
-                <a:lnTo>
-                  <a:pt x="2587492" y="31441"/>
-                </a:lnTo>
-                <a:close/>
-                <a:lnTo>
-                  <a:pt x="2592072" y="30494"/>
-                </a:lnTo>
-                <a:close/>
-                <a:lnTo>
-                  <a:pt x="2596652" y="29549"/>
-                </a:lnTo>
-                <a:close/>
-                <a:lnTo>
-                  <a:pt x="2601231" y="28604"/>
-                </a:lnTo>
-                <a:close/>
-                <a:lnTo>
-                  <a:pt x="2605811" y="27662"/>
-                </a:lnTo>
-                <a:close/>
-                <a:lnTo>
-                  <a:pt x="2610391" y="26721"/>
-                </a:lnTo>
-                <a:close/>
-                <a:lnTo>
-                  <a:pt x="2614970" y="25781"/>
-                </a:lnTo>
-                <a:close/>
-                <a:lnTo>
-                  <a:pt x="2619550" y="24843"/>
-                </a:lnTo>
-                <a:close/>
-                <a:lnTo>
-                  <a:pt x="2624130" y="23906"/>
-                </a:lnTo>
-                <a:close/>
-                <a:lnTo>
-                  <a:pt x="2628709" y="22971"/>
-                </a:lnTo>
-                <a:close/>
-                <a:lnTo>
-                  <a:pt x="2633289" y="22038"/>
-                </a:lnTo>
-                <a:close/>
-                <a:lnTo>
-                  <a:pt x="2637868" y="21106"/>
-                </a:lnTo>
-                <a:close/>
-                <a:lnTo>
-                  <a:pt x="2642448" y="20175"/>
-                </a:lnTo>
-                <a:close/>
-                <a:lnTo>
-                  <a:pt x="2647028" y="19246"/>
-                </a:lnTo>
-                <a:close/>
-                <a:lnTo>
-                  <a:pt x="2651607" y="18319"/>
-                </a:lnTo>
-                <a:close/>
-                <a:lnTo>
-                  <a:pt x="2656187" y="17392"/>
-                </a:lnTo>
-                <a:close/>
-                <a:lnTo>
-                  <a:pt x="2660767" y="16468"/>
-                </a:lnTo>
-                <a:close/>
-                <a:lnTo>
-                  <a:pt x="2665346" y="15544"/>
-                </a:lnTo>
-                <a:close/>
-                <a:lnTo>
-                  <a:pt x="2669926" y="14622"/>
-                </a:lnTo>
-                <a:close/>
-                <a:lnTo>
-                  <a:pt x="2674506" y="13701"/>
-                </a:lnTo>
-                <a:close/>
-                <a:lnTo>
-                  <a:pt x="2679085" y="12781"/>
-                </a:lnTo>
-                <a:close/>
-                <a:lnTo>
-                  <a:pt x="2683665" y="11863"/>
-                </a:lnTo>
-                <a:close/>
-                <a:lnTo>
-                  <a:pt x="2688244" y="10945"/>
-                </a:lnTo>
-                <a:close/>
-                <a:lnTo>
-                  <a:pt x="2692824" y="10029"/>
-                </a:lnTo>
-                <a:close/>
-                <a:lnTo>
-                  <a:pt x="2697404" y="9113"/>
-                </a:lnTo>
-                <a:close/>
-                <a:lnTo>
-                  <a:pt x="2701983" y="8199"/>
-                </a:lnTo>
-                <a:close/>
-                <a:lnTo>
-                  <a:pt x="2706563" y="7285"/>
-                </a:lnTo>
-                <a:close/>
-                <a:lnTo>
-                  <a:pt x="2711143" y="6372"/>
-                </a:lnTo>
-                <a:close/>
-                <a:lnTo>
-                  <a:pt x="2715722" y="5460"/>
-                </a:lnTo>
-                <a:close/>
-                <a:lnTo>
-                  <a:pt x="2720302" y="4548"/>
-                </a:lnTo>
-                <a:close/>
-                <a:lnTo>
-                  <a:pt x="2724881" y="3638"/>
-                </a:lnTo>
-                <a:close/>
-                <a:lnTo>
-                  <a:pt x="2729461" y="2727"/>
-                </a:lnTo>
-                <a:close/>
-                <a:lnTo>
-                  <a:pt x="2734041" y="1818"/>
-                </a:lnTo>
-                <a:close/>
-                <a:lnTo>
-                  <a:pt x="2738620" y="908"/>
-                </a:lnTo>
-                <a:close/>
-                <a:lnTo>
-                  <a:pt x="2743200" y="0"/>
+                  <a:pt x="12" y="817298"/>
+                </a:lnTo>
+                <a:close/>
+                <a:lnTo>
+                  <a:pt x="47" y="815401"/>
+                </a:lnTo>
+                <a:close/>
+                <a:lnTo>
+                  <a:pt x="107" y="813520"/>
+                </a:lnTo>
+                <a:close/>
+                <a:lnTo>
+                  <a:pt x="189" y="811651"/>
+                </a:lnTo>
+                <a:close/>
+                <a:lnTo>
+                  <a:pt x="296" y="809792"/>
+                </a:lnTo>
+                <a:close/>
+                <a:lnTo>
+                  <a:pt x="426" y="807943"/>
+                </a:lnTo>
+                <a:close/>
+                <a:lnTo>
+                  <a:pt x="580" y="806099"/>
+                </a:lnTo>
+                <a:close/>
+                <a:lnTo>
+                  <a:pt x="758" y="804261"/>
+                </a:lnTo>
+                <a:close/>
+                <a:lnTo>
+                  <a:pt x="959" y="802425"/>
+                </a:lnTo>
+                <a:close/>
+                <a:lnTo>
+                  <a:pt x="1184" y="800589"/>
+                </a:lnTo>
+                <a:close/>
+                <a:lnTo>
+                  <a:pt x="1433" y="798752"/>
+                </a:lnTo>
+                <a:close/>
+                <a:lnTo>
+                  <a:pt x="1705" y="796911"/>
+                </a:lnTo>
+                <a:close/>
+                <a:lnTo>
+                  <a:pt x="2001" y="795065"/>
+                </a:lnTo>
+                <a:close/>
+                <a:lnTo>
+                  <a:pt x="2321" y="793210"/>
+                </a:lnTo>
+                <a:close/>
+                <a:lnTo>
+                  <a:pt x="2664" y="791348"/>
+                </a:lnTo>
+                <a:close/>
+                <a:lnTo>
+                  <a:pt x="3031" y="789481"/>
+                </a:lnTo>
+                <a:close/>
+                <a:lnTo>
+                  <a:pt x="3422" y="787610"/>
+                </a:lnTo>
+                <a:close/>
+                <a:lnTo>
+                  <a:pt x="3837" y="785738"/>
+                </a:lnTo>
+                <a:close/>
+                <a:lnTo>
+                  <a:pt x="4275" y="783867"/>
+                </a:lnTo>
+                <a:close/>
+                <a:lnTo>
+                  <a:pt x="4737" y="782001"/>
+                </a:lnTo>
+                <a:close/>
+                <a:lnTo>
+                  <a:pt x="5222" y="780140"/>
+                </a:lnTo>
+                <a:close/>
+                <a:lnTo>
+                  <a:pt x="5731" y="778285"/>
+                </a:lnTo>
+                <a:close/>
+                <a:lnTo>
+                  <a:pt x="6264" y="776434"/>
+                </a:lnTo>
+                <a:close/>
+                <a:lnTo>
+                  <a:pt x="6821" y="774585"/>
+                </a:lnTo>
+                <a:close/>
+                <a:lnTo>
+                  <a:pt x="7401" y="772734"/>
+                </a:lnTo>
+                <a:close/>
+                <a:lnTo>
+                  <a:pt x="8005" y="770881"/>
+                </a:lnTo>
+                <a:close/>
+                <a:lnTo>
+                  <a:pt x="8632" y="769022"/>
+                </a:lnTo>
+                <a:close/>
+                <a:lnTo>
+                  <a:pt x="9284" y="767157"/>
+                </a:lnTo>
+                <a:close/>
+                <a:lnTo>
+                  <a:pt x="9959" y="765285"/>
+                </a:lnTo>
+                <a:close/>
+                <a:lnTo>
+                  <a:pt x="10657" y="763408"/>
+                </a:lnTo>
+                <a:close/>
+                <a:lnTo>
+                  <a:pt x="11379" y="761530"/>
+                </a:lnTo>
+                <a:close/>
+                <a:lnTo>
+                  <a:pt x="12125" y="759653"/>
+                </a:lnTo>
+                <a:close/>
+                <a:lnTo>
+                  <a:pt x="12895" y="757777"/>
+                </a:lnTo>
+                <a:close/>
+                <a:lnTo>
+                  <a:pt x="13689" y="755907"/>
+                </a:lnTo>
+                <a:close/>
+                <a:lnTo>
+                  <a:pt x="14506" y="754043"/>
+                </a:lnTo>
+                <a:close/>
+                <a:lnTo>
+                  <a:pt x="15346" y="752185"/>
+                </a:lnTo>
+                <a:close/>
+                <a:lnTo>
+                  <a:pt x="16211" y="750334"/>
+                </a:lnTo>
+                <a:close/>
+                <a:lnTo>
+                  <a:pt x="17099" y="748488"/>
+                </a:lnTo>
+                <a:close/>
+                <a:lnTo>
+                  <a:pt x="18011" y="746647"/>
+                </a:lnTo>
+                <a:close/>
+                <a:lnTo>
+                  <a:pt x="18946" y="744811"/>
+                </a:lnTo>
+                <a:close/>
+                <a:lnTo>
+                  <a:pt x="19905" y="742979"/>
+                </a:lnTo>
+                <a:close/>
+                <a:lnTo>
+                  <a:pt x="20888" y="741151"/>
+                </a:lnTo>
+                <a:close/>
+                <a:lnTo>
+                  <a:pt x="21895" y="739326"/>
+                </a:lnTo>
+                <a:close/>
+                <a:lnTo>
+                  <a:pt x="22925" y="737505"/>
+                </a:lnTo>
+                <a:close/>
+                <a:lnTo>
+                  <a:pt x="23979" y="735686"/>
+                </a:lnTo>
+                <a:close/>
+                <a:lnTo>
+                  <a:pt x="25056" y="733869"/>
+                </a:lnTo>
+                <a:close/>
+                <a:lnTo>
+                  <a:pt x="26157" y="732055"/>
+                </a:lnTo>
+                <a:close/>
+                <a:lnTo>
+                  <a:pt x="27282" y="730241"/>
+                </a:lnTo>
+                <a:close/>
+                <a:lnTo>
+                  <a:pt x="28431" y="728430"/>
+                </a:lnTo>
+                <a:close/>
+                <a:lnTo>
+                  <a:pt x="29603" y="726619"/>
+                </a:lnTo>
+                <a:close/>
+                <a:lnTo>
+                  <a:pt x="30799" y="724811"/>
+                </a:lnTo>
+                <a:close/>
+                <a:lnTo>
+                  <a:pt x="32019" y="723005"/>
+                </a:lnTo>
+                <a:close/>
+                <a:lnTo>
+                  <a:pt x="33262" y="721201"/>
+                </a:lnTo>
+                <a:close/>
+                <a:lnTo>
+                  <a:pt x="34529" y="719399"/>
+                </a:lnTo>
+                <a:close/>
+                <a:lnTo>
+                  <a:pt x="35820" y="717601"/>
+                </a:lnTo>
+                <a:close/>
+                <a:lnTo>
+                  <a:pt x="37134" y="715805"/>
+                </a:lnTo>
+                <a:close/>
+                <a:lnTo>
+                  <a:pt x="38472" y="714013"/>
+                </a:lnTo>
+                <a:close/>
+                <a:lnTo>
+                  <a:pt x="39834" y="712225"/>
+                </a:lnTo>
+                <a:close/>
+                <a:lnTo>
+                  <a:pt x="41220" y="710440"/>
+                </a:lnTo>
+                <a:close/>
+                <a:lnTo>
+                  <a:pt x="42629" y="708659"/>
+                </a:lnTo>
+                <a:close/>
+                <a:lnTo>
+                  <a:pt x="44061" y="706883"/>
+                </a:lnTo>
+                <a:close/>
+                <a:lnTo>
+                  <a:pt x="45518" y="705112"/>
+                </a:lnTo>
+                <a:close/>
+                <a:lnTo>
+                  <a:pt x="46998" y="703344"/>
+                </a:lnTo>
+                <a:close/>
+                <a:lnTo>
+                  <a:pt x="48502" y="701581"/>
+                </a:lnTo>
+                <a:close/>
+                <a:lnTo>
+                  <a:pt x="50029" y="699821"/>
+                </a:lnTo>
+                <a:close/>
+                <a:lnTo>
+                  <a:pt x="51581" y="698065"/>
+                </a:lnTo>
+                <a:close/>
+                <a:lnTo>
+                  <a:pt x="53156" y="696311"/>
+                </a:lnTo>
+                <a:close/>
+                <a:lnTo>
+                  <a:pt x="54754" y="694560"/>
+                </a:lnTo>
+                <a:close/>
+                <a:lnTo>
+                  <a:pt x="56376" y="692812"/>
+                </a:lnTo>
+                <a:close/>
+                <a:lnTo>
+                  <a:pt x="58022" y="691065"/>
+                </a:lnTo>
+                <a:close/>
+                <a:lnTo>
+                  <a:pt x="59692" y="689322"/>
+                </a:lnTo>
+                <a:close/>
+                <a:lnTo>
+                  <a:pt x="61385" y="687582"/>
+                </a:lnTo>
+                <a:close/>
+                <a:lnTo>
+                  <a:pt x="63102" y="685845"/>
+                </a:lnTo>
+                <a:close/>
+                <a:lnTo>
+                  <a:pt x="64843" y="684112"/>
+                </a:lnTo>
+                <a:close/>
+                <a:lnTo>
+                  <a:pt x="66607" y="682384"/>
+                </a:lnTo>
+                <a:close/>
+                <a:lnTo>
+                  <a:pt x="68395" y="680660"/>
+                </a:lnTo>
+                <a:close/>
+                <a:lnTo>
+                  <a:pt x="70207" y="678940"/>
+                </a:lnTo>
+                <a:close/>
+                <a:lnTo>
+                  <a:pt x="72042" y="677224"/>
+                </a:lnTo>
+                <a:close/>
+                <a:lnTo>
+                  <a:pt x="73902" y="675513"/>
+                </a:lnTo>
+                <a:close/>
+                <a:lnTo>
+                  <a:pt x="75784" y="673805"/>
+                </a:lnTo>
+                <a:close/>
+                <a:lnTo>
+                  <a:pt x="77691" y="672101"/>
+                </a:lnTo>
+                <a:close/>
+                <a:lnTo>
+                  <a:pt x="79621" y="670400"/>
+                </a:lnTo>
+                <a:close/>
+                <a:lnTo>
+                  <a:pt x="81575" y="668703"/>
+                </a:lnTo>
+                <a:close/>
+                <a:lnTo>
+                  <a:pt x="83552" y="667010"/>
+                </a:lnTo>
+                <a:close/>
+                <a:lnTo>
+                  <a:pt x="85553" y="665320"/>
+                </a:lnTo>
+                <a:close/>
+                <a:lnTo>
+                  <a:pt x="87578" y="663636"/>
+                </a:lnTo>
+                <a:close/>
+                <a:lnTo>
+                  <a:pt x="89627" y="661956"/>
+                </a:lnTo>
+                <a:close/>
+                <a:lnTo>
+                  <a:pt x="91699" y="660282"/>
+                </a:lnTo>
+                <a:close/>
+                <a:lnTo>
+                  <a:pt x="93795" y="658613"/>
+                </a:lnTo>
+                <a:close/>
+                <a:lnTo>
+                  <a:pt x="95914" y="656949"/>
+                </a:lnTo>
+                <a:close/>
+                <a:lnTo>
+                  <a:pt x="98058" y="655291"/>
+                </a:lnTo>
+                <a:close/>
+                <a:lnTo>
+                  <a:pt x="100225" y="653638"/>
+                </a:lnTo>
+                <a:close/>
+                <a:lnTo>
+                  <a:pt x="102415" y="651989"/>
+                </a:lnTo>
+                <a:close/>
+                <a:lnTo>
+                  <a:pt x="104630" y="650344"/>
+                </a:lnTo>
+                <a:close/>
+                <a:lnTo>
+                  <a:pt x="106868" y="648703"/>
+                </a:lnTo>
+                <a:close/>
+                <a:lnTo>
+                  <a:pt x="109129" y="647064"/>
+                </a:lnTo>
+                <a:close/>
+                <a:lnTo>
+                  <a:pt x="111415" y="645429"/>
+                </a:lnTo>
+                <a:close/>
+                <a:lnTo>
+                  <a:pt x="113724" y="643798"/>
+                </a:lnTo>
+                <a:close/>
+                <a:lnTo>
+                  <a:pt x="116057" y="642171"/>
+                </a:lnTo>
+                <a:close/>
+                <a:lnTo>
+                  <a:pt x="118413" y="640548"/>
+                </a:lnTo>
+                <a:close/>
+                <a:lnTo>
+                  <a:pt x="120793" y="638931"/>
+                </a:lnTo>
+                <a:close/>
+                <a:lnTo>
+                  <a:pt x="123197" y="637319"/>
+                </a:lnTo>
+                <a:close/>
+                <a:lnTo>
+                  <a:pt x="125624" y="635712"/>
+                </a:lnTo>
+                <a:close/>
+                <a:lnTo>
+                  <a:pt x="128075" y="634111"/>
+                </a:lnTo>
+                <a:close/>
+                <a:lnTo>
+                  <a:pt x="130550" y="632516"/>
+                </a:lnTo>
+                <a:close/>
+                <a:lnTo>
+                  <a:pt x="133049" y="630924"/>
+                </a:lnTo>
+                <a:close/>
+                <a:lnTo>
+                  <a:pt x="135571" y="629338"/>
+                </a:lnTo>
+                <a:close/>
+                <a:lnTo>
+                  <a:pt x="138117" y="627755"/>
+                </a:lnTo>
+                <a:close/>
+                <a:lnTo>
+                  <a:pt x="140686" y="626175"/>
+                </a:lnTo>
+                <a:close/>
+                <a:lnTo>
+                  <a:pt x="143280" y="624598"/>
+                </a:lnTo>
+                <a:close/>
+                <a:lnTo>
+                  <a:pt x="145897" y="623025"/>
+                </a:lnTo>
+                <a:close/>
+                <a:lnTo>
+                  <a:pt x="148537" y="621456"/>
+                </a:lnTo>
+                <a:close/>
+                <a:lnTo>
+                  <a:pt x="151201" y="619891"/>
+                </a:lnTo>
+                <a:close/>
+                <a:lnTo>
+                  <a:pt x="153889" y="618331"/>
+                </a:lnTo>
+                <a:close/>
+                <a:lnTo>
+                  <a:pt x="156601" y="616775"/>
+                </a:lnTo>
+                <a:close/>
+                <a:lnTo>
+                  <a:pt x="159336" y="615226"/>
+                </a:lnTo>
+                <a:close/>
+                <a:lnTo>
+                  <a:pt x="162095" y="613682"/>
+                </a:lnTo>
+                <a:close/>
+                <a:lnTo>
+                  <a:pt x="164878" y="612144"/>
+                </a:lnTo>
+                <a:close/>
+                <a:lnTo>
+                  <a:pt x="167685" y="610610"/>
+                </a:lnTo>
+                <a:close/>
+                <a:lnTo>
+                  <a:pt x="170515" y="609081"/>
+                </a:lnTo>
+                <a:close/>
+                <a:lnTo>
+                  <a:pt x="173368" y="607557"/>
+                </a:lnTo>
+                <a:close/>
+                <a:lnTo>
+                  <a:pt x="176246" y="606035"/>
+                </a:lnTo>
+                <a:close/>
+                <a:lnTo>
+                  <a:pt x="179147" y="604517"/>
+                </a:lnTo>
+                <a:close/>
+                <a:lnTo>
+                  <a:pt x="182072" y="603002"/>
+                </a:lnTo>
+                <a:close/>
+                <a:lnTo>
+                  <a:pt x="185020" y="601491"/>
+                </a:lnTo>
+                <a:close/>
+                <a:lnTo>
+                  <a:pt x="187992" y="599984"/>
+                </a:lnTo>
+                <a:close/>
+                <a:lnTo>
+                  <a:pt x="190988" y="598481"/>
+                </a:lnTo>
+                <a:close/>
+                <a:lnTo>
+                  <a:pt x="194008" y="596983"/>
+                </a:lnTo>
+                <a:close/>
+                <a:lnTo>
+                  <a:pt x="197051" y="595491"/>
+                </a:lnTo>
+                <a:close/>
+                <a:lnTo>
+                  <a:pt x="200118" y="594004"/>
+                </a:lnTo>
+                <a:close/>
+                <a:lnTo>
+                  <a:pt x="203208" y="592523"/>
+                </a:lnTo>
+                <a:close/>
+                <a:lnTo>
+                  <a:pt x="206323" y="591047"/>
+                </a:lnTo>
+                <a:close/>
+                <a:lnTo>
+                  <a:pt x="209461" y="589576"/>
+                </a:lnTo>
+                <a:close/>
+                <a:lnTo>
+                  <a:pt x="212622" y="588109"/>
+                </a:lnTo>
+                <a:close/>
+                <a:lnTo>
+                  <a:pt x="215808" y="586646"/>
+                </a:lnTo>
+                <a:close/>
+                <a:lnTo>
+                  <a:pt x="219017" y="585186"/>
+                </a:lnTo>
+                <a:close/>
+                <a:lnTo>
+                  <a:pt x="222249" y="583730"/>
+                </a:lnTo>
+                <a:close/>
+                <a:lnTo>
+                  <a:pt x="225506" y="582277"/>
+                </a:lnTo>
+                <a:close/>
+                <a:lnTo>
+                  <a:pt x="228786" y="580827"/>
+                </a:lnTo>
+                <a:close/>
+                <a:lnTo>
+                  <a:pt x="232089" y="579382"/>
+                </a:lnTo>
+                <a:close/>
+                <a:lnTo>
+                  <a:pt x="235417" y="577942"/>
+                </a:lnTo>
+                <a:close/>
+                <a:lnTo>
+                  <a:pt x="238768" y="576506"/>
+                </a:lnTo>
+                <a:close/>
+                <a:lnTo>
+                  <a:pt x="242143" y="575077"/>
+                </a:lnTo>
+                <a:close/>
+                <a:lnTo>
+                  <a:pt x="245541" y="573653"/>
+                </a:lnTo>
+                <a:close/>
+                <a:lnTo>
+                  <a:pt x="248963" y="572234"/>
+                </a:lnTo>
+                <a:close/>
+                <a:lnTo>
+                  <a:pt x="252409" y="570821"/>
+                </a:lnTo>
+                <a:close/>
+                <a:lnTo>
+                  <a:pt x="255879" y="569412"/>
+                </a:lnTo>
+                <a:close/>
+                <a:lnTo>
+                  <a:pt x="259372" y="568007"/>
+                </a:lnTo>
+                <a:close/>
+                <a:lnTo>
+                  <a:pt x="262889" y="566606"/>
+                </a:lnTo>
+                <a:close/>
+                <a:lnTo>
+                  <a:pt x="266429" y="565207"/>
+                </a:lnTo>
+                <a:close/>
+                <a:lnTo>
+                  <a:pt x="269993" y="563811"/>
+                </a:lnTo>
+                <a:close/>
+                <a:lnTo>
+                  <a:pt x="273581" y="562419"/>
+                </a:lnTo>
+                <a:close/>
+                <a:lnTo>
+                  <a:pt x="277192" y="561031"/>
+                </a:lnTo>
+                <a:close/>
+                <a:lnTo>
+                  <a:pt x="280827" y="559648"/>
+                </a:lnTo>
+                <a:close/>
+                <a:lnTo>
+                  <a:pt x="284486" y="558270"/>
+                </a:lnTo>
+                <a:close/>
+                <a:lnTo>
+                  <a:pt x="288169" y="556899"/>
+                </a:lnTo>
+                <a:close/>
+                <a:lnTo>
+                  <a:pt x="291876" y="555534"/>
+                </a:lnTo>
+                <a:close/>
+                <a:lnTo>
+                  <a:pt x="295607" y="554176"/>
+                </a:lnTo>
+                <a:close/>
+                <a:lnTo>
+                  <a:pt x="299362" y="552821"/>
+                </a:lnTo>
+                <a:close/>
+                <a:lnTo>
+                  <a:pt x="303140" y="551469"/>
+                </a:lnTo>
+                <a:close/>
+                <a:lnTo>
+                  <a:pt x="306941" y="550115"/>
+                </a:lnTo>
+                <a:close/>
+                <a:lnTo>
+                  <a:pt x="310765" y="548760"/>
+                </a:lnTo>
+                <a:close/>
+                <a:lnTo>
+                  <a:pt x="314612" y="547399"/>
+                </a:lnTo>
+                <a:close/>
+                <a:lnTo>
+                  <a:pt x="318482" y="546032"/>
+                </a:lnTo>
+                <a:close/>
+                <a:lnTo>
+                  <a:pt x="322374" y="544662"/>
+                </a:lnTo>
+                <a:close/>
+                <a:lnTo>
+                  <a:pt x="326291" y="543298"/>
+                </a:lnTo>
+                <a:close/>
+                <a:lnTo>
+                  <a:pt x="330232" y="541947"/>
+                </a:lnTo>
+                <a:close/>
+                <a:lnTo>
+                  <a:pt x="334199" y="540619"/>
+                </a:lnTo>
+                <a:close/>
+                <a:lnTo>
+                  <a:pt x="338192" y="539320"/>
+                </a:lnTo>
+                <a:close/>
+                <a:lnTo>
+                  <a:pt x="342212" y="538060"/>
+                </a:lnTo>
+                <a:close/>
+                <a:lnTo>
+                  <a:pt x="346260" y="536844"/>
+                </a:lnTo>
+                <a:close/>
+                <a:lnTo>
+                  <a:pt x="350333" y="535649"/>
+                </a:lnTo>
+                <a:close/>
+                <a:lnTo>
+                  <a:pt x="354428" y="534447"/>
+                </a:lnTo>
+                <a:close/>
+                <a:lnTo>
+                  <a:pt x="358543" y="533206"/>
+                </a:lnTo>
+                <a:close/>
+                <a:lnTo>
+                  <a:pt x="362675" y="531896"/>
+                </a:lnTo>
+                <a:close/>
+                <a:lnTo>
+                  <a:pt x="366820" y="530485"/>
+                </a:lnTo>
+                <a:close/>
+                <a:lnTo>
+                  <a:pt x="370975" y="528944"/>
+                </a:lnTo>
+                <a:close/>
+                <a:lnTo>
+                  <a:pt x="375140" y="527267"/>
+                </a:lnTo>
+                <a:close/>
+                <a:lnTo>
+                  <a:pt x="379324" y="525547"/>
+                </a:lnTo>
+                <a:close/>
+                <a:lnTo>
+                  <a:pt x="383539" y="523900"/>
+                </a:lnTo>
+                <a:close/>
+                <a:lnTo>
+                  <a:pt x="387795" y="522441"/>
+                </a:lnTo>
+                <a:close/>
+                <a:lnTo>
+                  <a:pt x="392104" y="521285"/>
+                </a:lnTo>
+                <a:close/>
+                <a:lnTo>
+                  <a:pt x="396477" y="520549"/>
+                </a:lnTo>
+                <a:close/>
+                <a:lnTo>
+                  <a:pt x="400926" y="520346"/>
+                </a:lnTo>
+                <a:close/>
+                <a:lnTo>
+                  <a:pt x="405446" y="520631"/>
+                </a:lnTo>
+                <a:close/>
+                <a:lnTo>
+                  <a:pt x="409999" y="521015"/>
+                </a:lnTo>
+                <a:close/>
+                <a:lnTo>
+                  <a:pt x="414543" y="521067"/>
+                </a:lnTo>
+                <a:close/>
+                <a:lnTo>
+                  <a:pt x="419035" y="520356"/>
+                </a:lnTo>
+                <a:close/>
+                <a:lnTo>
+                  <a:pt x="423434" y="518448"/>
+                </a:lnTo>
+                <a:close/>
+                <a:lnTo>
+                  <a:pt x="427696" y="514911"/>
+                </a:lnTo>
+                <a:close/>
+                <a:lnTo>
+                  <a:pt x="431782" y="509328"/>
+                </a:lnTo>
+                <a:close/>
+                <a:lnTo>
+                  <a:pt x="435700" y="501735"/>
+                </a:lnTo>
+                <a:close/>
+                <a:lnTo>
+                  <a:pt x="439524" y="492755"/>
+                </a:lnTo>
+                <a:close/>
+                <a:lnTo>
+                  <a:pt x="443333" y="483045"/>
+                </a:lnTo>
+                <a:close/>
+                <a:lnTo>
+                  <a:pt x="447203" y="473264"/>
+                </a:lnTo>
+                <a:close/>
+                <a:lnTo>
+                  <a:pt x="451213" y="464070"/>
+                </a:lnTo>
+                <a:close/>
+                <a:lnTo>
+                  <a:pt x="455441" y="456120"/>
+                </a:lnTo>
+                <a:close/>
+                <a:lnTo>
+                  <a:pt x="459959" y="450036"/>
+                </a:lnTo>
+                <a:close/>
+                <a:lnTo>
+                  <a:pt x="464765" y="445863"/>
+                </a:lnTo>
+                <a:close/>
+                <a:lnTo>
+                  <a:pt x="469799" y="443213"/>
+                </a:lnTo>
+                <a:close/>
+                <a:lnTo>
+                  <a:pt x="475001" y="441684"/>
+                </a:lnTo>
+                <a:close/>
+                <a:lnTo>
+                  <a:pt x="480309" y="440874"/>
+                </a:lnTo>
+                <a:close/>
+                <a:lnTo>
+                  <a:pt x="485663" y="440382"/>
+                </a:lnTo>
+                <a:close/>
+                <a:lnTo>
+                  <a:pt x="491000" y="439808"/>
+                </a:lnTo>
+                <a:close/>
+                <a:lnTo>
+                  <a:pt x="496267" y="438791"/>
+                </a:lnTo>
+                <a:close/>
+                <a:lnTo>
+                  <a:pt x="501458" y="437295"/>
+                </a:lnTo>
+                <a:close/>
+                <a:lnTo>
+                  <a:pt x="506590" y="435425"/>
+                </a:lnTo>
+                <a:close/>
+                <a:lnTo>
+                  <a:pt x="511680" y="433289"/>
+                </a:lnTo>
+                <a:close/>
+                <a:lnTo>
+                  <a:pt x="516745" y="430996"/>
+                </a:lnTo>
+                <a:close/>
+                <a:lnTo>
+                  <a:pt x="521801" y="428651"/>
+                </a:lnTo>
+                <a:close/>
+                <a:lnTo>
+                  <a:pt x="526865" y="426364"/>
+                </a:lnTo>
+                <a:close/>
+                <a:lnTo>
+                  <a:pt x="531952" y="424220"/>
+                </a:lnTo>
+                <a:close/>
+                <a:lnTo>
+                  <a:pt x="537059" y="422212"/>
+                </a:lnTo>
+                <a:close/>
+                <a:lnTo>
+                  <a:pt x="542183" y="420313"/>
+                </a:lnTo>
+                <a:close/>
+                <a:lnTo>
+                  <a:pt x="547317" y="418493"/>
+                </a:lnTo>
+                <a:close/>
+                <a:lnTo>
+                  <a:pt x="552459" y="416723"/>
+                </a:lnTo>
+                <a:close/>
+                <a:lnTo>
+                  <a:pt x="557602" y="414973"/>
+                </a:lnTo>
+                <a:close/>
+                <a:lnTo>
+                  <a:pt x="562741" y="413216"/>
+                </a:lnTo>
+                <a:close/>
+                <a:lnTo>
+                  <a:pt x="567875" y="411432"/>
+                </a:lnTo>
+                <a:close/>
+                <a:lnTo>
+                  <a:pt x="573003" y="409625"/>
+                </a:lnTo>
+                <a:close/>
+                <a:lnTo>
+                  <a:pt x="578128" y="407803"/>
+                </a:lnTo>
+                <a:close/>
+                <a:lnTo>
+                  <a:pt x="583249" y="405973"/>
+                </a:lnTo>
+                <a:close/>
+                <a:lnTo>
+                  <a:pt x="588370" y="404144"/>
+                </a:lnTo>
+                <a:close/>
+                <a:lnTo>
+                  <a:pt x="593491" y="402324"/>
+                </a:lnTo>
+                <a:close/>
+                <a:lnTo>
+                  <a:pt x="598613" y="400518"/>
+                </a:lnTo>
+                <a:close/>
+                <a:lnTo>
+                  <a:pt x="603737" y="398732"/>
+                </a:lnTo>
+                <a:close/>
+                <a:lnTo>
+                  <a:pt x="608863" y="396963"/>
+                </a:lnTo>
+                <a:close/>
+                <a:lnTo>
+                  <a:pt x="613989" y="395208"/>
+                </a:lnTo>
+                <a:close/>
+                <a:lnTo>
+                  <a:pt x="619115" y="393466"/>
+                </a:lnTo>
+                <a:close/>
+                <a:lnTo>
+                  <a:pt x="624240" y="391732"/>
+                </a:lnTo>
+                <a:close/>
+                <a:lnTo>
+                  <a:pt x="629364" y="390005"/>
+                </a:lnTo>
+                <a:close/>
+                <a:lnTo>
+                  <a:pt x="634486" y="388281"/>
+                </a:lnTo>
+                <a:close/>
+                <a:lnTo>
+                  <a:pt x="639605" y="386562"/>
+                </a:lnTo>
+                <a:close/>
+                <a:lnTo>
+                  <a:pt x="644723" y="384847"/>
+                </a:lnTo>
+                <a:close/>
+                <a:lnTo>
+                  <a:pt x="649840" y="383137"/>
+                </a:lnTo>
+                <a:close/>
+                <a:lnTo>
+                  <a:pt x="654957" y="381433"/>
+                </a:lnTo>
+                <a:close/>
+                <a:lnTo>
+                  <a:pt x="660074" y="379737"/>
+                </a:lnTo>
+                <a:close/>
+                <a:lnTo>
+                  <a:pt x="665193" y="378049"/>
+                </a:lnTo>
+                <a:close/>
+                <a:lnTo>
+                  <a:pt x="670314" y="376370"/>
+                </a:lnTo>
+                <a:close/>
+                <a:lnTo>
+                  <a:pt x="675436" y="374700"/>
+                </a:lnTo>
+                <a:close/>
+                <a:lnTo>
+                  <a:pt x="680560" y="373039"/>
+                </a:lnTo>
+                <a:close/>
+                <a:lnTo>
+                  <a:pt x="685686" y="371386"/>
+                </a:lnTo>
+                <a:close/>
+                <a:lnTo>
+                  <a:pt x="690812" y="369742"/>
+                </a:lnTo>
+                <a:close/>
+                <a:lnTo>
+                  <a:pt x="695939" y="368104"/>
+                </a:lnTo>
+                <a:close/>
+                <a:lnTo>
+                  <a:pt x="701066" y="366474"/>
+                </a:lnTo>
+                <a:close/>
+                <a:lnTo>
+                  <a:pt x="706193" y="364850"/>
+                </a:lnTo>
+                <a:close/>
+                <a:lnTo>
+                  <a:pt x="711320" y="363233"/>
+                </a:lnTo>
+                <a:close/>
+                <a:lnTo>
+                  <a:pt x="716446" y="361622"/>
+                </a:lnTo>
+                <a:close/>
+                <a:lnTo>
+                  <a:pt x="721572" y="360018"/>
+                </a:lnTo>
+                <a:close/>
+                <a:lnTo>
+                  <a:pt x="726696" y="358419"/>
+                </a:lnTo>
+                <a:close/>
+                <a:lnTo>
+                  <a:pt x="731819" y="356826"/>
+                </a:lnTo>
+                <a:close/>
+                <a:lnTo>
+                  <a:pt x="736940" y="355239"/>
+                </a:lnTo>
+                <a:close/>
+                <a:lnTo>
+                  <a:pt x="742059" y="353658"/>
+                </a:lnTo>
+                <a:close/>
+                <a:lnTo>
+                  <a:pt x="747177" y="352082"/>
+                </a:lnTo>
+                <a:close/>
+                <a:lnTo>
+                  <a:pt x="752294" y="350512"/>
+                </a:lnTo>
+                <a:close/>
+                <a:lnTo>
+                  <a:pt x="757411" y="348948"/>
+                </a:lnTo>
+                <a:close/>
+                <a:lnTo>
+                  <a:pt x="762529" y="347391"/>
+                </a:lnTo>
+                <a:close/>
+                <a:lnTo>
+                  <a:pt x="767647" y="345839"/>
+                </a:lnTo>
+                <a:close/>
+                <a:lnTo>
+                  <a:pt x="772768" y="344294"/>
+                </a:lnTo>
+                <a:close/>
+                <a:lnTo>
+                  <a:pt x="777890" y="342756"/>
+                </a:lnTo>
+                <a:close/>
+                <a:lnTo>
+                  <a:pt x="783014" y="341223"/>
+                </a:lnTo>
+                <a:close/>
+                <a:lnTo>
+                  <a:pt x="788140" y="339696"/>
+                </a:lnTo>
+                <a:close/>
+                <a:lnTo>
+                  <a:pt x="793266" y="338174"/>
+                </a:lnTo>
+                <a:close/>
+                <a:lnTo>
+                  <a:pt x="798392" y="336657"/>
+                </a:lnTo>
+                <a:close/>
+                <a:lnTo>
+                  <a:pt x="803518" y="335145"/>
+                </a:lnTo>
+                <a:close/>
+                <a:lnTo>
+                  <a:pt x="808644" y="333637"/>
+                </a:lnTo>
+                <a:close/>
+                <a:lnTo>
+                  <a:pt x="813769" y="332133"/>
+                </a:lnTo>
+                <a:close/>
+                <a:lnTo>
+                  <a:pt x="818894" y="330634"/>
+                </a:lnTo>
+                <a:close/>
+                <a:lnTo>
+                  <a:pt x="824018" y="329141"/>
+                </a:lnTo>
+                <a:close/>
+                <a:lnTo>
+                  <a:pt x="829143" y="327652"/>
+                </a:lnTo>
+                <a:close/>
+                <a:lnTo>
+                  <a:pt x="834268" y="326170"/>
+                </a:lnTo>
+                <a:close/>
+                <a:lnTo>
+                  <a:pt x="839393" y="324693"/>
+                </a:lnTo>
+                <a:close/>
+                <a:lnTo>
+                  <a:pt x="844519" y="323224"/>
+                </a:lnTo>
+                <a:close/>
+                <a:lnTo>
+                  <a:pt x="849645" y="321761"/>
+                </a:lnTo>
+                <a:close/>
+                <a:lnTo>
+                  <a:pt x="854771" y="320304"/>
+                </a:lnTo>
+                <a:close/>
+                <a:lnTo>
+                  <a:pt x="859897" y="318853"/>
+                </a:lnTo>
+                <a:close/>
+                <a:lnTo>
+                  <a:pt x="865022" y="317407"/>
+                </a:lnTo>
+                <a:close/>
+                <a:lnTo>
+                  <a:pt x="870146" y="315966"/>
+                </a:lnTo>
+                <a:close/>
+                <a:lnTo>
+                  <a:pt x="875268" y="314531"/>
+                </a:lnTo>
+                <a:close/>
+                <a:lnTo>
+                  <a:pt x="880388" y="313099"/>
+                </a:lnTo>
+                <a:close/>
+                <a:lnTo>
+                  <a:pt x="885506" y="311672"/>
+                </a:lnTo>
+                <a:close/>
+                <a:lnTo>
+                  <a:pt x="890624" y="310250"/>
+                </a:lnTo>
+                <a:close/>
+                <a:lnTo>
+                  <a:pt x="895741" y="308833"/>
+                </a:lnTo>
+                <a:close/>
+                <a:lnTo>
+                  <a:pt x="900858" y="307420"/>
+                </a:lnTo>
+                <a:close/>
+                <a:lnTo>
+                  <a:pt x="905976" y="306013"/>
+                </a:lnTo>
+                <a:close/>
+                <a:lnTo>
+                  <a:pt x="911096" y="304610"/>
+                </a:lnTo>
+                <a:close/>
+                <a:lnTo>
+                  <a:pt x="916217" y="303214"/>
+                </a:lnTo>
+                <a:close/>
+                <a:lnTo>
+                  <a:pt x="921340" y="301822"/>
+                </a:lnTo>
+                <a:close/>
+                <a:lnTo>
+                  <a:pt x="926465" y="300435"/>
+                </a:lnTo>
+                <a:close/>
+                <a:lnTo>
+                  <a:pt x="931591" y="299053"/>
+                </a:lnTo>
+                <a:close/>
+                <a:lnTo>
+                  <a:pt x="936717" y="297675"/>
+                </a:lnTo>
+                <a:close/>
+                <a:lnTo>
+                  <a:pt x="941844" y="296301"/>
+                </a:lnTo>
+                <a:close/>
+                <a:lnTo>
+                  <a:pt x="946971" y="294931"/>
+                </a:lnTo>
+                <a:close/>
+                <a:lnTo>
+                  <a:pt x="952098" y="293565"/>
+                </a:lnTo>
+                <a:close/>
+                <a:lnTo>
+                  <a:pt x="957225" y="292203"/>
+                </a:lnTo>
+                <a:close/>
+                <a:lnTo>
+                  <a:pt x="962351" y="290844"/>
+                </a:lnTo>
+                <a:close/>
+                <a:lnTo>
+                  <a:pt x="967476" y="289489"/>
+                </a:lnTo>
+                <a:close/>
+                <a:lnTo>
+                  <a:pt x="972600" y="288137"/>
+                </a:lnTo>
+                <a:close/>
+                <a:lnTo>
+                  <a:pt x="977722" y="286789"/>
+                </a:lnTo>
+                <a:close/>
+                <a:lnTo>
+                  <a:pt x="982842" y="285444"/>
+                </a:lnTo>
+                <a:close/>
+                <a:lnTo>
+                  <a:pt x="987961" y="284103"/>
+                </a:lnTo>
+                <a:close/>
+                <a:lnTo>
+                  <a:pt x="993079" y="282766"/>
+                </a:lnTo>
+                <a:close/>
+                <a:lnTo>
+                  <a:pt x="998196" y="281433"/>
+                </a:lnTo>
+                <a:close/>
+                <a:lnTo>
+                  <a:pt x="1003313" y="280106"/>
+                </a:lnTo>
+                <a:close/>
+                <a:lnTo>
+                  <a:pt x="1008431" y="278783"/>
+                </a:lnTo>
+                <a:close/>
+                <a:lnTo>
+                  <a:pt x="1013550" y="277466"/>
+                </a:lnTo>
+                <a:close/>
+                <a:lnTo>
+                  <a:pt x="1018671" y="276155"/>
+                </a:lnTo>
+                <a:close/>
+                <a:lnTo>
+                  <a:pt x="1023794" y="274850"/>
+                </a:lnTo>
+                <a:close/>
+                <a:lnTo>
+                  <a:pt x="1028919" y="273549"/>
+                </a:lnTo>
+                <a:close/>
+                <a:lnTo>
+                  <a:pt x="1034044" y="272253"/>
+                </a:lnTo>
+                <a:close/>
+                <a:lnTo>
+                  <a:pt x="1039171" y="270961"/>
+                </a:lnTo>
+                <a:close/>
+                <a:lnTo>
+                  <a:pt x="1044297" y="269672"/>
+                </a:lnTo>
+                <a:close/>
+                <a:lnTo>
+                  <a:pt x="1049423" y="268385"/>
+                </a:lnTo>
+                <a:close/>
+                <a:lnTo>
+                  <a:pt x="1054549" y="267101"/>
+                </a:lnTo>
+                <a:close/>
+                <a:lnTo>
+                  <a:pt x="1059673" y="265818"/>
+                </a:lnTo>
+                <a:close/>
+                <a:lnTo>
+                  <a:pt x="1064798" y="264538"/>
+                </a:lnTo>
+                <a:close/>
+                <a:lnTo>
+                  <a:pt x="1069923" y="263261"/>
+                </a:lnTo>
+                <a:close/>
+                <a:lnTo>
+                  <a:pt x="1075047" y="261988"/>
+                </a:lnTo>
+                <a:close/>
+                <a:lnTo>
+                  <a:pt x="1080172" y="260718"/>
+                </a:lnTo>
+                <a:close/>
+                <a:lnTo>
+                  <a:pt x="1085298" y="259452"/>
+                </a:lnTo>
+                <a:close/>
+                <a:lnTo>
+                  <a:pt x="1090424" y="258190"/>
+                </a:lnTo>
+                <a:close/>
+                <a:lnTo>
+                  <a:pt x="1095550" y="256933"/>
+                </a:lnTo>
+                <a:close/>
+                <a:lnTo>
+                  <a:pt x="1100676" y="255681"/>
+                </a:lnTo>
+                <a:close/>
+                <a:lnTo>
+                  <a:pt x="1105802" y="254432"/>
+                </a:lnTo>
+                <a:close/>
+                <a:lnTo>
+                  <a:pt x="1110926" y="253188"/>
+                </a:lnTo>
+                <a:close/>
+                <a:lnTo>
+                  <a:pt x="1116049" y="251948"/>
+                </a:lnTo>
+                <a:close/>
+                <a:lnTo>
+                  <a:pt x="1121171" y="250712"/>
+                </a:lnTo>
+                <a:close/>
+                <a:lnTo>
+                  <a:pt x="1126290" y="249480"/>
+                </a:lnTo>
+                <a:close/>
+                <a:lnTo>
+                  <a:pt x="1131408" y="248252"/>
+                </a:lnTo>
+                <a:close/>
+                <a:lnTo>
+                  <a:pt x="1136525" y="247028"/>
+                </a:lnTo>
+                <a:close/>
+                <a:lnTo>
+                  <a:pt x="1141642" y="245807"/>
+                </a:lnTo>
+                <a:close/>
+                <a:lnTo>
+                  <a:pt x="1146760" y="244589"/>
+                </a:lnTo>
+                <a:close/>
+                <a:lnTo>
+                  <a:pt x="1151878" y="243375"/>
+                </a:lnTo>
+                <a:close/>
+                <a:lnTo>
+                  <a:pt x="1156999" y="242163"/>
+                </a:lnTo>
+                <a:close/>
+                <a:lnTo>
+                  <a:pt x="1162121" y="240954"/>
+                </a:lnTo>
+                <a:close/>
+                <a:lnTo>
+                  <a:pt x="1167245" y="239748"/>
+                </a:lnTo>
+                <a:close/>
+                <a:lnTo>
+                  <a:pt x="1172370" y="238545"/>
+                </a:lnTo>
+                <a:close/>
+                <a:lnTo>
+                  <a:pt x="1177496" y="237344"/>
+                </a:lnTo>
+                <a:close/>
+                <a:lnTo>
+                  <a:pt x="1182622" y="236146"/>
+                </a:lnTo>
+                <a:close/>
+                <a:lnTo>
+                  <a:pt x="1187749" y="234951"/>
+                </a:lnTo>
+                <a:close/>
+                <a:lnTo>
+                  <a:pt x="1192877" y="233758"/>
+                </a:lnTo>
+                <a:close/>
+                <a:lnTo>
+                  <a:pt x="1198004" y="232568"/>
+                </a:lnTo>
+                <a:close/>
+                <a:lnTo>
+                  <a:pt x="1203130" y="231381"/>
+                </a:lnTo>
+                <a:close/>
+                <a:lnTo>
+                  <a:pt x="1208256" y="230197"/>
+                </a:lnTo>
+                <a:close/>
+                <a:lnTo>
+                  <a:pt x="1213380" y="229018"/>
+                </a:lnTo>
+                <a:close/>
+                <a:lnTo>
+                  <a:pt x="1218504" y="227841"/>
+                </a:lnTo>
+                <a:close/>
+                <a:lnTo>
+                  <a:pt x="1223625" y="226670"/>
+                </a:lnTo>
+                <a:close/>
+                <a:lnTo>
+                  <a:pt x="1228745" y="225502"/>
+                </a:lnTo>
+                <a:close/>
+                <a:lnTo>
+                  <a:pt x="1233863" y="224339"/>
+                </a:lnTo>
+                <a:close/>
+                <a:lnTo>
+                  <a:pt x="1238980" y="223180"/>
+                </a:lnTo>
+                <a:close/>
+                <a:lnTo>
+                  <a:pt x="1244097" y="222025"/>
+                </a:lnTo>
+                <a:close/>
+                <a:lnTo>
+                  <a:pt x="1249215" y="220874"/>
+                </a:lnTo>
+                <a:close/>
+                <a:lnTo>
+                  <a:pt x="1254333" y="219726"/>
+                </a:lnTo>
+                <a:close/>
+                <a:lnTo>
+                  <a:pt x="1259453" y="218581"/>
+                </a:lnTo>
+                <a:close/>
+                <a:lnTo>
+                  <a:pt x="1264575" y="217440"/>
+                </a:lnTo>
+                <a:close/>
+                <a:lnTo>
+                  <a:pt x="1269699" y="216301"/>
+                </a:lnTo>
+                <a:close/>
+                <a:lnTo>
+                  <a:pt x="1274824" y="215165"/>
+                </a:lnTo>
+                <a:close/>
+                <a:lnTo>
+                  <a:pt x="1279949" y="214030"/>
+                </a:lnTo>
+                <a:close/>
+                <a:lnTo>
+                  <a:pt x="1285076" y="212898"/>
+                </a:lnTo>
+                <a:close/>
+                <a:lnTo>
+                  <a:pt x="1290202" y="211767"/>
+                </a:lnTo>
+                <a:close/>
+                <a:lnTo>
+                  <a:pt x="1295328" y="210637"/>
+                </a:lnTo>
+                <a:close/>
+                <a:lnTo>
+                  <a:pt x="1300453" y="209508"/>
+                </a:lnTo>
+                <a:close/>
+                <a:lnTo>
+                  <a:pt x="1305578" y="208380"/>
+                </a:lnTo>
+                <a:close/>
+                <a:lnTo>
+                  <a:pt x="1310702" y="207255"/>
+                </a:lnTo>
+                <a:close/>
+                <a:lnTo>
+                  <a:pt x="1315827" y="206133"/>
+                </a:lnTo>
+                <a:close/>
+                <a:lnTo>
+                  <a:pt x="1320952" y="205015"/>
+                </a:lnTo>
+                <a:close/>
+                <a:lnTo>
+                  <a:pt x="1326077" y="203902"/>
+                </a:lnTo>
+                <a:close/>
+                <a:lnTo>
+                  <a:pt x="1331202" y="202793"/>
+                </a:lnTo>
+                <a:close/>
+                <a:lnTo>
+                  <a:pt x="1336329" y="201690"/>
+                </a:lnTo>
+                <a:close/>
+                <a:lnTo>
+                  <a:pt x="1341455" y="200591"/>
+                </a:lnTo>
+                <a:close/>
+                <a:lnTo>
+                  <a:pt x="1346581" y="199496"/>
+                </a:lnTo>
+                <a:close/>
+                <a:lnTo>
+                  <a:pt x="1351706" y="198404"/>
+                </a:lnTo>
+                <a:close/>
+                <a:lnTo>
+                  <a:pt x="1356830" y="197315"/>
+                </a:lnTo>
+                <a:close/>
+                <a:lnTo>
+                  <a:pt x="1361953" y="196227"/>
+                </a:lnTo>
+                <a:close/>
+                <a:lnTo>
+                  <a:pt x="1367073" y="195139"/>
+                </a:lnTo>
+                <a:close/>
+                <a:lnTo>
+                  <a:pt x="1372192" y="194053"/>
+                </a:lnTo>
+                <a:close/>
+                <a:lnTo>
+                  <a:pt x="1377310" y="192968"/>
+                </a:lnTo>
+                <a:close/>
+                <a:lnTo>
+                  <a:pt x="1382427" y="191885"/>
+                </a:lnTo>
+                <a:close/>
+                <a:lnTo>
+                  <a:pt x="1387544" y="190805"/>
+                </a:lnTo>
+                <a:close/>
+                <a:lnTo>
+                  <a:pt x="1392662" y="189727"/>
+                </a:lnTo>
+                <a:close/>
+                <a:lnTo>
+                  <a:pt x="1397781" y="188653"/>
+                </a:lnTo>
+                <a:close/>
+                <a:lnTo>
+                  <a:pt x="1402902" y="187582"/>
+                </a:lnTo>
+                <a:close/>
+                <a:lnTo>
+                  <a:pt x="1408025" y="186516"/>
+                </a:lnTo>
+                <a:close/>
+                <a:lnTo>
+                  <a:pt x="1413149" y="185452"/>
+                </a:lnTo>
+                <a:close/>
+                <a:lnTo>
+                  <a:pt x="1418274" y="184392"/>
+                </a:lnTo>
+                <a:close/>
+                <a:lnTo>
+                  <a:pt x="1423401" y="183333"/>
+                </a:lnTo>
+                <a:close/>
+                <a:lnTo>
+                  <a:pt x="1428527" y="182277"/>
+                </a:lnTo>
+                <a:close/>
+                <a:lnTo>
+                  <a:pt x="1433655" y="181222"/>
+                </a:lnTo>
+                <a:close/>
+                <a:lnTo>
+                  <a:pt x="1438782" y="180168"/>
+                </a:lnTo>
+                <a:close/>
+                <a:lnTo>
+                  <a:pt x="1443909" y="179116"/>
+                </a:lnTo>
+                <a:close/>
+                <a:lnTo>
+                  <a:pt x="1449035" y="178065"/>
+                </a:lnTo>
+                <a:close/>
+                <a:lnTo>
+                  <a:pt x="1454160" y="177017"/>
+                </a:lnTo>
+                <a:close/>
+                <a:lnTo>
+                  <a:pt x="1459284" y="175971"/>
+                </a:lnTo>
+                <a:close/>
+                <a:lnTo>
+                  <a:pt x="1464407" y="174929"/>
+                </a:lnTo>
+                <a:close/>
+                <a:lnTo>
+                  <a:pt x="1469528" y="173890"/>
+                </a:lnTo>
+                <a:close/>
+                <a:lnTo>
+                  <a:pt x="1474647" y="172854"/>
+                </a:lnTo>
+                <a:close/>
+                <a:lnTo>
+                  <a:pt x="1479765" y="171822"/>
+                </a:lnTo>
+                <a:close/>
+                <a:lnTo>
+                  <a:pt x="1484882" y="170793"/>
+                </a:lnTo>
+                <a:close/>
+                <a:lnTo>
+                  <a:pt x="1490000" y="169767"/>
+                </a:lnTo>
+                <a:close/>
+                <a:lnTo>
+                  <a:pt x="1495117" y="168743"/>
+                </a:lnTo>
+                <a:close/>
+                <a:lnTo>
+                  <a:pt x="1500236" y="167721"/>
+                </a:lnTo>
+                <a:close/>
+                <a:lnTo>
+                  <a:pt x="1505356" y="166701"/>
+                </a:lnTo>
+                <a:close/>
+                <a:lnTo>
+                  <a:pt x="1510478" y="165683"/>
+                </a:lnTo>
+                <a:close/>
+                <a:lnTo>
+                  <a:pt x="1515602" y="164666"/>
+                </a:lnTo>
+                <a:close/>
+                <a:lnTo>
+                  <a:pt x="1520727" y="163651"/>
+                </a:lnTo>
+                <a:close/>
+                <a:lnTo>
+                  <a:pt x="1525853" y="162638"/>
+                </a:lnTo>
+                <a:close/>
+                <a:lnTo>
+                  <a:pt x="1530979" y="161626"/>
+                </a:lnTo>
+                <a:close/>
+                <a:lnTo>
+                  <a:pt x="1536106" y="160616"/>
+                </a:lnTo>
+                <a:close/>
+                <a:lnTo>
+                  <a:pt x="1541233" y="159607"/>
+                </a:lnTo>
+                <a:close/>
+                <a:lnTo>
+                  <a:pt x="1546360" y="158600"/>
+                </a:lnTo>
+                <a:close/>
+                <a:lnTo>
+                  <a:pt x="1551487" y="157595"/>
+                </a:lnTo>
+                <a:close/>
+                <a:lnTo>
+                  <a:pt x="1556613" y="156592"/>
+                </a:lnTo>
+                <a:close/>
+                <a:lnTo>
+                  <a:pt x="1561737" y="155593"/>
+                </a:lnTo>
+                <a:close/>
+                <a:lnTo>
+                  <a:pt x="1566861" y="154597"/>
+                </a:lnTo>
+                <a:close/>
+                <a:lnTo>
+                  <a:pt x="1571982" y="153604"/>
+                </a:lnTo>
+                <a:close/>
+                <a:lnTo>
+                  <a:pt x="1577102" y="152616"/>
+                </a:lnTo>
+                <a:close/>
+                <a:lnTo>
+                  <a:pt x="1582221" y="151631"/>
+                </a:lnTo>
+                <a:close/>
+                <a:lnTo>
+                  <a:pt x="1587338" y="150649"/>
+                </a:lnTo>
+                <a:close/>
+                <a:lnTo>
+                  <a:pt x="1592455" y="149670"/>
+                </a:lnTo>
+                <a:close/>
+                <a:lnTo>
+                  <a:pt x="1597572" y="148692"/>
+                </a:lnTo>
+                <a:close/>
+                <a:lnTo>
+                  <a:pt x="1602691" y="147715"/>
+                </a:lnTo>
+                <a:close/>
+                <a:lnTo>
+                  <a:pt x="1607810" y="146738"/>
+                </a:lnTo>
+                <a:close/>
+                <a:lnTo>
+                  <a:pt x="1612932" y="145760"/>
+                </a:lnTo>
+                <a:close/>
+                <a:lnTo>
+                  <a:pt x="1618056" y="144783"/>
+                </a:lnTo>
+                <a:close/>
+                <a:lnTo>
+                  <a:pt x="1623180" y="143806"/>
+                </a:lnTo>
+                <a:close/>
+                <a:lnTo>
+                  <a:pt x="1628306" y="142831"/>
+                </a:lnTo>
+                <a:close/>
+                <a:lnTo>
+                  <a:pt x="1633433" y="141858"/>
+                </a:lnTo>
+                <a:close/>
+                <a:lnTo>
+                  <a:pt x="1638559" y="140888"/>
+                </a:lnTo>
+                <a:close/>
+                <a:lnTo>
+                  <a:pt x="1643685" y="139922"/>
+                </a:lnTo>
+                <a:close/>
+                <a:lnTo>
+                  <a:pt x="1648810" y="138959"/>
+                </a:lnTo>
+                <a:close/>
+                <a:lnTo>
+                  <a:pt x="1653935" y="138000"/>
+                </a:lnTo>
+                <a:close/>
+                <a:lnTo>
+                  <a:pt x="1659059" y="137045"/>
+                </a:lnTo>
+                <a:close/>
+                <a:lnTo>
+                  <a:pt x="1664184" y="136092"/>
+                </a:lnTo>
+                <a:close/>
+                <a:lnTo>
+                  <a:pt x="1669309" y="135143"/>
+                </a:lnTo>
+                <a:close/>
+                <a:lnTo>
+                  <a:pt x="1674434" y="134195"/>
+                </a:lnTo>
+                <a:close/>
+                <a:lnTo>
+                  <a:pt x="1679559" y="133250"/>
+                </a:lnTo>
+                <a:close/>
+                <a:lnTo>
+                  <a:pt x="1684686" y="132307"/>
+                </a:lnTo>
+                <a:close/>
+                <a:lnTo>
+                  <a:pt x="1689812" y="131366"/>
+                </a:lnTo>
+                <a:close/>
+                <a:lnTo>
+                  <a:pt x="1694938" y="130426"/>
+                </a:lnTo>
+                <a:close/>
+                <a:lnTo>
+                  <a:pt x="1700063" y="129486"/>
+                </a:lnTo>
+                <a:close/>
+                <a:lnTo>
+                  <a:pt x="1705187" y="128547"/>
+                </a:lnTo>
+                <a:close/>
+                <a:lnTo>
+                  <a:pt x="1710310" y="127609"/>
+                </a:lnTo>
+                <a:close/>
+                <a:lnTo>
+                  <a:pt x="1715431" y="126671"/>
+                </a:lnTo>
+                <a:close/>
+                <a:lnTo>
+                  <a:pt x="1720550" y="125732"/>
+                </a:lnTo>
+                <a:close/>
+                <a:lnTo>
+                  <a:pt x="1725667" y="124795"/>
+                </a:lnTo>
+                <a:close/>
+                <a:lnTo>
+                  <a:pt x="1730784" y="123859"/>
+                </a:lnTo>
+                <a:close/>
+                <a:lnTo>
+                  <a:pt x="1735902" y="122926"/>
+                </a:lnTo>
+                <a:close/>
+                <a:lnTo>
+                  <a:pt x="1741019" y="121996"/>
+                </a:lnTo>
+                <a:close/>
+                <a:lnTo>
+                  <a:pt x="1746138" y="121069"/>
+                </a:lnTo>
+                <a:close/>
+                <a:lnTo>
+                  <a:pt x="1751259" y="120147"/>
+                </a:lnTo>
+                <a:close/>
+                <a:lnTo>
+                  <a:pt x="1756382" y="119228"/>
+                </a:lnTo>
+                <a:close/>
+                <a:lnTo>
+                  <a:pt x="1761506" y="118313"/>
+                </a:lnTo>
+                <a:close/>
+                <a:lnTo>
+                  <a:pt x="1766631" y="117401"/>
+                </a:lnTo>
+                <a:close/>
+                <a:lnTo>
+                  <a:pt x="1771757" y="116490"/>
+                </a:lnTo>
+                <a:close/>
+                <a:lnTo>
+                  <a:pt x="1776884" y="115581"/>
+                </a:lnTo>
+                <a:close/>
+                <a:lnTo>
+                  <a:pt x="1782011" y="114672"/>
+                </a:lnTo>
+                <a:close/>
+                <a:lnTo>
+                  <a:pt x="1787139" y="113763"/>
+                </a:lnTo>
+                <a:close/>
+                <a:lnTo>
+                  <a:pt x="1792265" y="112854"/>
+                </a:lnTo>
+                <a:close/>
+                <a:lnTo>
+                  <a:pt x="1797392" y="111945"/>
+                </a:lnTo>
+                <a:close/>
+                <a:lnTo>
+                  <a:pt x="1802517" y="111038"/>
+                </a:lnTo>
+                <a:close/>
+                <a:lnTo>
+                  <a:pt x="1807642" y="110131"/>
+                </a:lnTo>
+                <a:close/>
+                <a:lnTo>
+                  <a:pt x="1812764" y="109227"/>
+                </a:lnTo>
+                <a:close/>
+                <a:lnTo>
+                  <a:pt x="1817885" y="108325"/>
+                </a:lnTo>
+                <a:close/>
+                <a:lnTo>
+                  <a:pt x="1823005" y="107425"/>
+                </a:lnTo>
+                <a:close/>
+                <a:lnTo>
+                  <a:pt x="1828122" y="106528"/>
+                </a:lnTo>
+                <a:close/>
+                <a:lnTo>
+                  <a:pt x="1833240" y="105634"/>
+                </a:lnTo>
+                <a:close/>
+                <a:lnTo>
+                  <a:pt x="1838357" y="104741"/>
+                </a:lnTo>
+                <a:close/>
+                <a:lnTo>
+                  <a:pt x="1843474" y="103851"/>
+                </a:lnTo>
+                <a:close/>
+                <a:lnTo>
+                  <a:pt x="1848593" y="102962"/>
+                </a:lnTo>
+                <a:close/>
+                <a:lnTo>
+                  <a:pt x="1853713" y="102075"/>
+                </a:lnTo>
+                <a:close/>
+                <a:lnTo>
+                  <a:pt x="1858836" y="101190"/>
+                </a:lnTo>
+                <a:close/>
+                <a:lnTo>
+                  <a:pt x="1863960" y="100307"/>
+                </a:lnTo>
+                <a:close/>
+                <a:lnTo>
+                  <a:pt x="1869085" y="99425"/>
+                </a:lnTo>
+                <a:close/>
+                <a:lnTo>
+                  <a:pt x="1874211" y="98546"/>
+                </a:lnTo>
+                <a:close/>
+                <a:lnTo>
+                  <a:pt x="1879337" y="97669"/>
+                </a:lnTo>
+                <a:close/>
+                <a:lnTo>
+                  <a:pt x="1884464" y="96794"/>
+                </a:lnTo>
+                <a:close/>
+                <a:lnTo>
+                  <a:pt x="1889589" y="95922"/>
+                </a:lnTo>
+                <a:close/>
+                <a:lnTo>
+                  <a:pt x="1894715" y="95052"/>
+                </a:lnTo>
+                <a:close/>
+                <a:lnTo>
+                  <a:pt x="1899839" y="94184"/>
+                </a:lnTo>
+                <a:close/>
+                <a:lnTo>
+                  <a:pt x="1904964" y="93318"/>
+                </a:lnTo>
+                <a:close/>
+                <a:lnTo>
+                  <a:pt x="1910088" y="92453"/>
+                </a:lnTo>
+                <a:close/>
+                <a:lnTo>
+                  <a:pt x="1915213" y="91589"/>
+                </a:lnTo>
+                <a:close/>
+                <a:lnTo>
+                  <a:pt x="1920338" y="90725"/>
+                </a:lnTo>
+                <a:close/>
+                <a:lnTo>
+                  <a:pt x="1925464" y="89862"/>
+                </a:lnTo>
+                <a:close/>
+                <a:lnTo>
+                  <a:pt x="1930590" y="88999"/>
+                </a:lnTo>
+                <a:close/>
+                <a:lnTo>
+                  <a:pt x="1935717" y="88137"/>
+                </a:lnTo>
+                <a:close/>
+                <a:lnTo>
+                  <a:pt x="1940843" y="87276"/>
+                </a:lnTo>
+                <a:close/>
+                <a:lnTo>
+                  <a:pt x="1945968" y="86417"/>
+                </a:lnTo>
+                <a:close/>
+                <a:lnTo>
+                  <a:pt x="1951091" y="85560"/>
+                </a:lnTo>
+                <a:close/>
+                <a:lnTo>
+                  <a:pt x="1956213" y="84705"/>
+                </a:lnTo>
+                <a:close/>
+                <a:lnTo>
+                  <a:pt x="1961333" y="83853"/>
+                </a:lnTo>
+                <a:close/>
+                <a:lnTo>
+                  <a:pt x="1966452" y="83004"/>
+                </a:lnTo>
+                <a:close/>
+                <a:lnTo>
+                  <a:pt x="1971569" y="82157"/>
+                </a:lnTo>
+                <a:close/>
+                <a:lnTo>
+                  <a:pt x="1976686" y="81311"/>
+                </a:lnTo>
+                <a:close/>
+                <a:lnTo>
+                  <a:pt x="1981803" y="80467"/>
+                </a:lnTo>
+                <a:close/>
+                <a:lnTo>
+                  <a:pt x="1986922" y="79624"/>
+                </a:lnTo>
+                <a:close/>
+                <a:lnTo>
+                  <a:pt x="1992041" y="78781"/>
+                </a:lnTo>
+                <a:close/>
+                <a:lnTo>
+                  <a:pt x="1997163" y="77938"/>
+                </a:lnTo>
+                <a:close/>
+                <a:lnTo>
+                  <a:pt x="2002286" y="77096"/>
+                </a:lnTo>
+                <a:close/>
+                <a:lnTo>
+                  <a:pt x="2007410" y="76255"/>
+                </a:lnTo>
+                <a:close/>
+                <a:lnTo>
+                  <a:pt x="2012536" y="75415"/>
+                </a:lnTo>
+                <a:close/>
+                <a:lnTo>
+                  <a:pt x="2017663" y="74577"/>
+                </a:lnTo>
+                <a:close/>
+                <a:lnTo>
+                  <a:pt x="2022790" y="73740"/>
+                </a:lnTo>
+                <a:close/>
+                <a:lnTo>
+                  <a:pt x="2027917" y="72906"/>
+                </a:lnTo>
+                <a:close/>
+                <a:lnTo>
+                  <a:pt x="2033044" y="72074"/>
+                </a:lnTo>
+                <a:close/>
+                <a:lnTo>
+                  <a:pt x="2038171" y="71244"/>
+                </a:lnTo>
+                <a:close/>
+                <a:lnTo>
+                  <a:pt x="2043297" y="70416"/>
+                </a:lnTo>
+                <a:close/>
+                <a:lnTo>
+                  <a:pt x="2048422" y="69591"/>
+                </a:lnTo>
+                <a:close/>
+                <a:lnTo>
+                  <a:pt x="2053545" y="68768"/>
+                </a:lnTo>
+                <a:close/>
+                <a:lnTo>
+                  <a:pt x="2058668" y="67947"/>
+                </a:lnTo>
+                <a:close/>
+                <a:lnTo>
+                  <a:pt x="2063788" y="67129"/>
+                </a:lnTo>
+                <a:close/>
+                <a:lnTo>
+                  <a:pt x="2068907" y="66312"/>
+                </a:lnTo>
+                <a:close/>
+                <a:lnTo>
+                  <a:pt x="2074024" y="65498"/>
+                </a:lnTo>
+                <a:close/>
+                <a:lnTo>
+                  <a:pt x="2079141" y="64685"/>
+                </a:lnTo>
+                <a:close/>
+                <a:lnTo>
+                  <a:pt x="2084258" y="63873"/>
+                </a:lnTo>
+                <a:close/>
+                <a:lnTo>
+                  <a:pt x="2089376" y="63063"/>
+                </a:lnTo>
+                <a:close/>
+                <a:lnTo>
+                  <a:pt x="2094496" y="62254"/>
+                </a:lnTo>
+                <a:close/>
+                <a:lnTo>
+                  <a:pt x="2099617" y="61445"/>
+                </a:lnTo>
+                <a:close/>
+                <a:lnTo>
+                  <a:pt x="2104740" y="60638"/>
+                </a:lnTo>
+                <a:close/>
+                <a:lnTo>
+                  <a:pt x="2109864" y="59831"/>
+                </a:lnTo>
+                <a:close/>
+                <a:lnTo>
+                  <a:pt x="2114990" y="59025"/>
+                </a:lnTo>
+                <a:close/>
+                <a:lnTo>
+                  <a:pt x="2120116" y="58219"/>
+                </a:lnTo>
+                <a:close/>
+                <a:lnTo>
+                  <a:pt x="2125242" y="57415"/>
+                </a:lnTo>
+                <a:close/>
+                <a:lnTo>
+                  <a:pt x="2130368" y="56610"/>
+                </a:lnTo>
+                <a:close/>
+                <a:lnTo>
+                  <a:pt x="2135494" y="55807"/>
+                </a:lnTo>
+                <a:close/>
+                <a:lnTo>
+                  <a:pt x="2140619" y="55004"/>
+                </a:lnTo>
+                <a:close/>
+                <a:lnTo>
+                  <a:pt x="2145744" y="54203"/>
+                </a:lnTo>
+                <a:close/>
+                <a:lnTo>
+                  <a:pt x="2150868" y="53403"/>
+                </a:lnTo>
+                <a:close/>
+                <a:lnTo>
+                  <a:pt x="2155993" y="52605"/>
+                </a:lnTo>
+                <a:close/>
+                <a:lnTo>
+                  <a:pt x="2161118" y="51809"/>
+                </a:lnTo>
+                <a:close/>
+                <a:lnTo>
+                  <a:pt x="2166243" y="51015"/>
+                </a:lnTo>
+                <a:close/>
+                <a:lnTo>
+                  <a:pt x="2171369" y="50224"/>
+                </a:lnTo>
+                <a:close/>
+                <a:lnTo>
+                  <a:pt x="2176495" y="49435"/>
+                </a:lnTo>
+                <a:close/>
+                <a:lnTo>
+                  <a:pt x="2181622" y="48648"/>
+                </a:lnTo>
+                <a:close/>
+                <a:lnTo>
+                  <a:pt x="2186747" y="47863"/>
+                </a:lnTo>
+                <a:close/>
+                <a:lnTo>
+                  <a:pt x="2191872" y="47080"/>
+                </a:lnTo>
+                <a:close/>
+                <a:lnTo>
+                  <a:pt x="2196995" y="46297"/>
+                </a:lnTo>
+                <a:close/>
+                <a:lnTo>
+                  <a:pt x="2202116" y="45516"/>
+                </a:lnTo>
+                <a:close/>
+                <a:lnTo>
+                  <a:pt x="2207236" y="44735"/>
+                </a:lnTo>
+                <a:close/>
+                <a:lnTo>
+                  <a:pt x="2212354" y="43955"/>
+                </a:lnTo>
+                <a:close/>
+                <a:lnTo>
+                  <a:pt x="2217471" y="43175"/>
+                </a:lnTo>
+                <a:close/>
+                <a:lnTo>
+                  <a:pt x="2222588" y="42396"/>
+                </a:lnTo>
+                <a:close/>
+                <a:lnTo>
+                  <a:pt x="2227705" y="41618"/>
+                </a:lnTo>
+                <a:close/>
+                <a:lnTo>
+                  <a:pt x="2232824" y="40840"/>
+                </a:lnTo>
+                <a:close/>
+                <a:lnTo>
+                  <a:pt x="2237944" y="40063"/>
+                </a:lnTo>
+                <a:close/>
+                <a:lnTo>
+                  <a:pt x="2243066" y="39287"/>
+                </a:lnTo>
+                <a:close/>
+                <a:lnTo>
+                  <a:pt x="2248190" y="38512"/>
+                </a:lnTo>
+                <a:close/>
+                <a:lnTo>
+                  <a:pt x="2253315" y="37738"/>
+                </a:lnTo>
+                <a:close/>
+                <a:lnTo>
+                  <a:pt x="2258441" y="36966"/>
+                </a:lnTo>
+                <a:close/>
+                <a:lnTo>
+                  <a:pt x="2263568" y="36196"/>
+                </a:lnTo>
+                <a:close/>
+                <a:lnTo>
+                  <a:pt x="2268695" y="35429"/>
+                </a:lnTo>
+                <a:close/>
+                <a:lnTo>
+                  <a:pt x="2273822" y="34663"/>
+                </a:lnTo>
+                <a:close/>
+                <a:lnTo>
+                  <a:pt x="2278949" y="33901"/>
+                </a:lnTo>
+                <a:close/>
+                <a:lnTo>
+                  <a:pt x="2284075" y="33140"/>
+                </a:lnTo>
+                <a:close/>
+                <a:lnTo>
+                  <a:pt x="2289201" y="32381"/>
+                </a:lnTo>
+                <a:close/>
+                <a:lnTo>
+                  <a:pt x="2294326" y="31624"/>
+                </a:lnTo>
+                <a:close/>
+                <a:lnTo>
+                  <a:pt x="2299449" y="30868"/>
+                </a:lnTo>
+                <a:close/>
+                <a:lnTo>
+                  <a:pt x="2304571" y="30112"/>
+                </a:lnTo>
+                <a:close/>
+                <a:lnTo>
+                  <a:pt x="2309690" y="29358"/>
+                </a:lnTo>
+                <a:close/>
+                <a:lnTo>
+                  <a:pt x="2314809" y="28604"/>
+                </a:lnTo>
+                <a:close/>
+                <a:lnTo>
+                  <a:pt x="2319926" y="27850"/>
+                </a:lnTo>
+                <a:close/>
+                <a:lnTo>
+                  <a:pt x="2325043" y="27098"/>
+                </a:lnTo>
+                <a:close/>
+                <a:lnTo>
+                  <a:pt x="2330160" y="26346"/>
+                </a:lnTo>
+                <a:close/>
+                <a:lnTo>
+                  <a:pt x="2335279" y="25596"/>
+                </a:lnTo>
+                <a:close/>
+                <a:lnTo>
+                  <a:pt x="2340398" y="24846"/>
+                </a:lnTo>
+                <a:close/>
+                <a:lnTo>
+                  <a:pt x="2345520" y="24098"/>
+                </a:lnTo>
+                <a:close/>
+                <a:lnTo>
+                  <a:pt x="2350644" y="23351"/>
+                </a:lnTo>
+                <a:close/>
+                <a:lnTo>
+                  <a:pt x="2355769" y="22605"/>
+                </a:lnTo>
+                <a:close/>
+                <a:lnTo>
+                  <a:pt x="2360895" y="21860"/>
+                </a:lnTo>
+                <a:close/>
+                <a:lnTo>
+                  <a:pt x="2366021" y="21115"/>
+                </a:lnTo>
+                <a:close/>
+                <a:lnTo>
+                  <a:pt x="2371147" y="20371"/>
+                </a:lnTo>
+                <a:close/>
+                <a:lnTo>
+                  <a:pt x="2376273" y="19628"/>
+                </a:lnTo>
+                <a:close/>
+                <a:lnTo>
+                  <a:pt x="2381399" y="18885"/>
+                </a:lnTo>
+                <a:close/>
+                <a:lnTo>
+                  <a:pt x="2386523" y="18143"/>
+                </a:lnTo>
+                <a:close/>
+                <a:lnTo>
+                  <a:pt x="2391648" y="17402"/>
+                </a:lnTo>
+                <a:close/>
+                <a:lnTo>
+                  <a:pt x="2396773" y="16663"/>
+                </a:lnTo>
+                <a:close/>
+                <a:lnTo>
+                  <a:pt x="2401897" y="15926"/>
+                </a:lnTo>
+                <a:close/>
+                <a:lnTo>
+                  <a:pt x="2407022" y="15192"/>
+                </a:lnTo>
+                <a:close/>
+                <a:lnTo>
+                  <a:pt x="2412148" y="14460"/>
+                </a:lnTo>
+                <a:close/>
+                <a:lnTo>
+                  <a:pt x="2417274" y="13732"/>
+                </a:lnTo>
+                <a:close/>
+                <a:lnTo>
+                  <a:pt x="2422400" y="13005"/>
+                </a:lnTo>
+                <a:close/>
+                <a:lnTo>
+                  <a:pt x="2427526" y="12280"/>
+                </a:lnTo>
+                <a:close/>
+                <a:lnTo>
+                  <a:pt x="2432651" y="11557"/>
+                </a:lnTo>
+                <a:close/>
+                <a:lnTo>
+                  <a:pt x="2437775" y="10833"/>
+                </a:lnTo>
+                <a:close/>
+                <a:lnTo>
+                  <a:pt x="2442898" y="10110"/>
+                </a:lnTo>
+                <a:close/>
+                <a:lnTo>
+                  <a:pt x="2448019" y="9385"/>
+                </a:lnTo>
+                <a:close/>
+                <a:lnTo>
+                  <a:pt x="2453139" y="8660"/>
+                </a:lnTo>
+                <a:close/>
+                <a:lnTo>
+                  <a:pt x="2458257" y="7934"/>
+                </a:lnTo>
+                <a:close/>
+                <a:lnTo>
+                  <a:pt x="2463375" y="7208"/>
+                </a:lnTo>
+                <a:close/>
+                <a:lnTo>
+                  <a:pt x="2468492" y="6483"/>
+                </a:lnTo>
+                <a:close/>
+                <a:lnTo>
+                  <a:pt x="2473609" y="5757"/>
+                </a:lnTo>
+                <a:close/>
+                <a:lnTo>
+                  <a:pt x="2478727" y="5032"/>
+                </a:lnTo>
+                <a:close/>
+                <a:lnTo>
+                  <a:pt x="2483846" y="4308"/>
+                </a:lnTo>
+                <a:close/>
+                <a:lnTo>
+                  <a:pt x="2488965" y="3585"/>
+                </a:lnTo>
+                <a:close/>
+                <a:lnTo>
+                  <a:pt x="2494087" y="2864"/>
+                </a:lnTo>
+                <a:close/>
+                <a:lnTo>
+                  <a:pt x="2499211" y="2145"/>
+                </a:lnTo>
+                <a:close/>
+                <a:lnTo>
+                  <a:pt x="2504338" y="1427"/>
+                </a:lnTo>
+                <a:close/>
+                <a:lnTo>
+                  <a:pt x="2509467" y="712"/>
+                </a:lnTo>
+                <a:close/>
+                <a:lnTo>
+                  <a:pt x="2514600" y="0"/>
                 </a:lnTo>
                 <a:close/>
               </a:path>
@@ -5623,8 +5623,8 @@
         </p:nvCxnSpPr>
         <p:spPr>
           <a:xfrm flipV="1">
-            <a:off x="6172200.0" y="1428750.0"/>
-            <a:ext cx="0.0" cy="1143000.0"/>
+            <a:off x="6400800.0" y="1840230.0"/>
+            <a:ext cx="0.0" cy="731520.0"/>
           </a:xfrm>
           <a:prstGeom prst="line">
             <a:avLst/>
@@ -5659,7 +5659,7 @@
         </p:nvSpPr>
         <p:spPr>
           <a:xfrm>
-            <a:off x="6083300" y="1339850"/>
+            <a:off x="6311900" y="1751330"/>
             <a:ext cx="177800" cy="177800"/>
           </a:xfrm>
           <a:prstGeom prst="ellipse">
@@ -5704,7 +5704,7 @@
         </p:nvSpPr>
         <p:spPr>
           <a:xfrm>
-            <a:off x="6146800" y="791210"/>
+            <a:off x="6146800" y="1248410"/>
             <a:ext cx="1524000" cy="508000"/>
           </a:xfrm>
           <a:prstGeom prst="rect">
@@ -5740,7 +5740,7 @@
         </p:nvSpPr>
         <p:spPr>
           <a:xfrm>
-            <a:off x="5918200" y="2391410"/>
+            <a:off x="6146800" y="2368550"/>
             <a:ext cx="1524000" cy="508000"/>
           </a:xfrm>
           <a:prstGeom prst="rect">
@@ -5776,7 +5776,7 @@
         </p:nvSpPr>
         <p:spPr>
           <a:xfrm>
-            <a:off x="4180840" y="2391410"/>
+            <a:off x="4203700" y="2368550"/>
             <a:ext cx="1524000" cy="508000"/>
           </a:xfrm>
           <a:prstGeom prst="rect">

--- a/output/4.pptx
+++ b/output/4.pptx
@@ -3104,8 +3104,8 @@
         </p:nvCxnSpPr>
         <p:spPr>
           <a:xfrm>
-            <a:off x="4206240.0" y="2571750.0"/>
-            <a:ext cx="2880360.0" cy="0.0"/>
+            <a:off x="2286000.0" y="2571750.0"/>
+            <a:ext cx="4572000.0" cy="0.0"/>
           </a:xfrm>
           <a:prstGeom prst="line">
             <a:avLst/>
@@ -3139,8 +3139,8 @@
         </p:nvCxnSpPr>
         <p:spPr>
           <a:xfrm flipV="1">
-            <a:off x="4572000.0" y="1428750.0"/>
-            <a:ext cx="0.0" cy="1371600.0"/>
+            <a:off x="4572000.0" y="285750.0"/>
+            <a:ext cx="0.0" cy="4572000.0"/>
           </a:xfrm>
           <a:prstGeom prst="line">
             <a:avLst/>
@@ -3174,8 +3174,8 @@
         </p:nvSpPr>
         <p:spPr>
           <a:xfrm>
-            <a:off x="4572000" y="1752539"/>
-            <a:ext cx="2514600" cy="819211"/>
+            <a:off x="4572000" y="690764"/>
+            <a:ext cx="3439369" cy="1880986"/>
           </a:xfrm>
           <a:custGeom>
             <a:avLst/>
@@ -3184,2404 +3184,2404 @@
             <a:cxnLst/>
             <a:rect l="l" t="t" r="r" b="b"/>
             <a:pathLst>
-              <a:path w="2514600" h="819211">
+              <a:path w="3439369" h="1880986">
                 <a:moveTo>
-                  <a:pt x="0" y="819211"/>
+                  <a:pt x="0" y="1880986"/>
                 </a:moveTo>
                 <a:lnTo>
-                  <a:pt x="12" y="817298"/>
-                </a:lnTo>
-                <a:close/>
-                <a:lnTo>
-                  <a:pt x="47" y="815401"/>
-                </a:lnTo>
-                <a:close/>
-                <a:lnTo>
-                  <a:pt x="107" y="813520"/>
-                </a:lnTo>
-                <a:close/>
-                <a:lnTo>
-                  <a:pt x="189" y="811651"/>
-                </a:lnTo>
-                <a:close/>
-                <a:lnTo>
-                  <a:pt x="296" y="809792"/>
-                </a:lnTo>
-                <a:close/>
-                <a:lnTo>
-                  <a:pt x="426" y="807943"/>
-                </a:lnTo>
-                <a:close/>
-                <a:lnTo>
-                  <a:pt x="580" y="806099"/>
-                </a:lnTo>
-                <a:close/>
-                <a:lnTo>
-                  <a:pt x="758" y="804261"/>
-                </a:lnTo>
-                <a:close/>
-                <a:lnTo>
-                  <a:pt x="959" y="802425"/>
-                </a:lnTo>
-                <a:close/>
-                <a:lnTo>
-                  <a:pt x="1184" y="800589"/>
-                </a:lnTo>
-                <a:close/>
-                <a:lnTo>
-                  <a:pt x="1433" y="798752"/>
-                </a:lnTo>
-                <a:close/>
-                <a:lnTo>
-                  <a:pt x="1705" y="796911"/>
-                </a:lnTo>
-                <a:close/>
-                <a:lnTo>
-                  <a:pt x="2001" y="795065"/>
-                </a:lnTo>
-                <a:close/>
-                <a:lnTo>
-                  <a:pt x="2321" y="793210"/>
-                </a:lnTo>
-                <a:close/>
-                <a:lnTo>
-                  <a:pt x="2664" y="791348"/>
-                </a:lnTo>
-                <a:close/>
-                <a:lnTo>
-                  <a:pt x="3031" y="789481"/>
-                </a:lnTo>
-                <a:close/>
-                <a:lnTo>
-                  <a:pt x="3422" y="787610"/>
-                </a:lnTo>
-                <a:close/>
-                <a:lnTo>
-                  <a:pt x="3837" y="785738"/>
-                </a:lnTo>
-                <a:close/>
-                <a:lnTo>
-                  <a:pt x="4275" y="783867"/>
-                </a:lnTo>
-                <a:close/>
-                <a:lnTo>
-                  <a:pt x="4737" y="782001"/>
-                </a:lnTo>
-                <a:close/>
-                <a:lnTo>
-                  <a:pt x="5222" y="780140"/>
-                </a:lnTo>
-                <a:close/>
-                <a:lnTo>
-                  <a:pt x="5731" y="778285"/>
-                </a:lnTo>
-                <a:close/>
-                <a:lnTo>
-                  <a:pt x="6264" y="776434"/>
-                </a:lnTo>
-                <a:close/>
-                <a:lnTo>
-                  <a:pt x="6821" y="774585"/>
-                </a:lnTo>
-                <a:close/>
-                <a:lnTo>
-                  <a:pt x="7401" y="772734"/>
-                </a:lnTo>
-                <a:close/>
-                <a:lnTo>
-                  <a:pt x="8005" y="770881"/>
-                </a:lnTo>
-                <a:close/>
-                <a:lnTo>
-                  <a:pt x="8632" y="769022"/>
-                </a:lnTo>
-                <a:close/>
-                <a:lnTo>
-                  <a:pt x="9284" y="767157"/>
-                </a:lnTo>
-                <a:close/>
-                <a:lnTo>
-                  <a:pt x="9959" y="765285"/>
-                </a:lnTo>
-                <a:close/>
-                <a:lnTo>
-                  <a:pt x="10657" y="763408"/>
-                </a:lnTo>
-                <a:close/>
-                <a:lnTo>
-                  <a:pt x="11379" y="761530"/>
-                </a:lnTo>
-                <a:close/>
-                <a:lnTo>
-                  <a:pt x="12125" y="759653"/>
-                </a:lnTo>
-                <a:close/>
-                <a:lnTo>
-                  <a:pt x="12895" y="757777"/>
-                </a:lnTo>
-                <a:close/>
-                <a:lnTo>
-                  <a:pt x="13689" y="755907"/>
-                </a:lnTo>
-                <a:close/>
-                <a:lnTo>
-                  <a:pt x="14506" y="754043"/>
-                </a:lnTo>
-                <a:close/>
-                <a:lnTo>
-                  <a:pt x="15346" y="752185"/>
-                </a:lnTo>
-                <a:close/>
-                <a:lnTo>
-                  <a:pt x="16211" y="750334"/>
-                </a:lnTo>
-                <a:close/>
-                <a:lnTo>
-                  <a:pt x="17099" y="748488"/>
-                </a:lnTo>
-                <a:close/>
-                <a:lnTo>
-                  <a:pt x="18011" y="746647"/>
-                </a:lnTo>
-                <a:close/>
-                <a:lnTo>
-                  <a:pt x="18946" y="744811"/>
-                </a:lnTo>
-                <a:close/>
-                <a:lnTo>
-                  <a:pt x="19905" y="742979"/>
-                </a:lnTo>
-                <a:close/>
-                <a:lnTo>
-                  <a:pt x="20888" y="741151"/>
-                </a:lnTo>
-                <a:close/>
-                <a:lnTo>
-                  <a:pt x="21895" y="739326"/>
-                </a:lnTo>
-                <a:close/>
-                <a:lnTo>
-                  <a:pt x="22925" y="737505"/>
-                </a:lnTo>
-                <a:close/>
-                <a:lnTo>
-                  <a:pt x="23979" y="735686"/>
-                </a:lnTo>
-                <a:close/>
-                <a:lnTo>
-                  <a:pt x="25056" y="733869"/>
-                </a:lnTo>
-                <a:close/>
-                <a:lnTo>
-                  <a:pt x="26157" y="732055"/>
-                </a:lnTo>
-                <a:close/>
-                <a:lnTo>
-                  <a:pt x="27282" y="730241"/>
-                </a:lnTo>
-                <a:close/>
-                <a:lnTo>
-                  <a:pt x="28431" y="728430"/>
-                </a:lnTo>
-                <a:close/>
-                <a:lnTo>
-                  <a:pt x="29603" y="726619"/>
-                </a:lnTo>
-                <a:close/>
-                <a:lnTo>
-                  <a:pt x="30799" y="724811"/>
-                </a:lnTo>
-                <a:close/>
-                <a:lnTo>
-                  <a:pt x="32019" y="723005"/>
-                </a:lnTo>
-                <a:close/>
-                <a:lnTo>
-                  <a:pt x="33262" y="721201"/>
-                </a:lnTo>
-                <a:close/>
-                <a:lnTo>
-                  <a:pt x="34529" y="719399"/>
-                </a:lnTo>
-                <a:close/>
-                <a:lnTo>
-                  <a:pt x="35820" y="717601"/>
-                </a:lnTo>
-                <a:close/>
-                <a:lnTo>
-                  <a:pt x="37134" y="715805"/>
-                </a:lnTo>
-                <a:close/>
-                <a:lnTo>
-                  <a:pt x="38472" y="714013"/>
-                </a:lnTo>
-                <a:close/>
-                <a:lnTo>
-                  <a:pt x="39834" y="712225"/>
-                </a:lnTo>
-                <a:close/>
-                <a:lnTo>
-                  <a:pt x="41220" y="710440"/>
-                </a:lnTo>
-                <a:close/>
-                <a:lnTo>
-                  <a:pt x="42629" y="708659"/>
-                </a:lnTo>
-                <a:close/>
-                <a:lnTo>
-                  <a:pt x="44061" y="706883"/>
-                </a:lnTo>
-                <a:close/>
-                <a:lnTo>
-                  <a:pt x="45518" y="705112"/>
-                </a:lnTo>
-                <a:close/>
-                <a:lnTo>
-                  <a:pt x="46998" y="703344"/>
-                </a:lnTo>
-                <a:close/>
-                <a:lnTo>
-                  <a:pt x="48502" y="701581"/>
-                </a:lnTo>
-                <a:close/>
-                <a:lnTo>
-                  <a:pt x="50029" y="699821"/>
-                </a:lnTo>
-                <a:close/>
-                <a:lnTo>
-                  <a:pt x="51581" y="698065"/>
-                </a:lnTo>
-                <a:close/>
-                <a:lnTo>
-                  <a:pt x="53156" y="696311"/>
-                </a:lnTo>
-                <a:close/>
-                <a:lnTo>
-                  <a:pt x="54754" y="694560"/>
-                </a:lnTo>
-                <a:close/>
-                <a:lnTo>
-                  <a:pt x="56376" y="692812"/>
-                </a:lnTo>
-                <a:close/>
-                <a:lnTo>
-                  <a:pt x="58022" y="691065"/>
-                </a:lnTo>
-                <a:close/>
-                <a:lnTo>
-                  <a:pt x="59692" y="689322"/>
-                </a:lnTo>
-                <a:close/>
-                <a:lnTo>
-                  <a:pt x="61385" y="687582"/>
-                </a:lnTo>
-                <a:close/>
-                <a:lnTo>
-                  <a:pt x="63102" y="685845"/>
-                </a:lnTo>
-                <a:close/>
-                <a:lnTo>
-                  <a:pt x="64843" y="684112"/>
-                </a:lnTo>
-                <a:close/>
-                <a:lnTo>
-                  <a:pt x="66607" y="682384"/>
-                </a:lnTo>
-                <a:close/>
-                <a:lnTo>
-                  <a:pt x="68395" y="680660"/>
-                </a:lnTo>
-                <a:close/>
-                <a:lnTo>
-                  <a:pt x="70207" y="678940"/>
-                </a:lnTo>
-                <a:close/>
-                <a:lnTo>
-                  <a:pt x="72042" y="677224"/>
-                </a:lnTo>
-                <a:close/>
-                <a:lnTo>
-                  <a:pt x="73902" y="675513"/>
-                </a:lnTo>
-                <a:close/>
-                <a:lnTo>
-                  <a:pt x="75784" y="673805"/>
-                </a:lnTo>
-                <a:close/>
-                <a:lnTo>
-                  <a:pt x="77691" y="672101"/>
-                </a:lnTo>
-                <a:close/>
-                <a:lnTo>
-                  <a:pt x="79621" y="670400"/>
-                </a:lnTo>
-                <a:close/>
-                <a:lnTo>
-                  <a:pt x="81575" y="668703"/>
-                </a:lnTo>
-                <a:close/>
-                <a:lnTo>
-                  <a:pt x="83552" y="667010"/>
-                </a:lnTo>
-                <a:close/>
-                <a:lnTo>
-                  <a:pt x="85553" y="665320"/>
-                </a:lnTo>
-                <a:close/>
-                <a:lnTo>
-                  <a:pt x="87578" y="663636"/>
-                </a:lnTo>
-                <a:close/>
-                <a:lnTo>
-                  <a:pt x="89627" y="661956"/>
-                </a:lnTo>
-                <a:close/>
-                <a:lnTo>
-                  <a:pt x="91699" y="660282"/>
-                </a:lnTo>
-                <a:close/>
-                <a:lnTo>
-                  <a:pt x="93795" y="658613"/>
-                </a:lnTo>
-                <a:close/>
-                <a:lnTo>
-                  <a:pt x="95914" y="656949"/>
-                </a:lnTo>
-                <a:close/>
-                <a:lnTo>
-                  <a:pt x="98058" y="655291"/>
-                </a:lnTo>
-                <a:close/>
-                <a:lnTo>
-                  <a:pt x="100225" y="653638"/>
-                </a:lnTo>
-                <a:close/>
-                <a:lnTo>
-                  <a:pt x="102415" y="651989"/>
-                </a:lnTo>
-                <a:close/>
-                <a:lnTo>
-                  <a:pt x="104630" y="650344"/>
-                </a:lnTo>
-                <a:close/>
-                <a:lnTo>
-                  <a:pt x="106868" y="648703"/>
-                </a:lnTo>
-                <a:close/>
-                <a:lnTo>
-                  <a:pt x="109129" y="647064"/>
-                </a:lnTo>
-                <a:close/>
-                <a:lnTo>
-                  <a:pt x="111415" y="645429"/>
-                </a:lnTo>
-                <a:close/>
-                <a:lnTo>
-                  <a:pt x="113724" y="643798"/>
-                </a:lnTo>
-                <a:close/>
-                <a:lnTo>
-                  <a:pt x="116057" y="642171"/>
-                </a:lnTo>
-                <a:close/>
-                <a:lnTo>
-                  <a:pt x="118413" y="640548"/>
-                </a:lnTo>
-                <a:close/>
-                <a:lnTo>
-                  <a:pt x="120793" y="638931"/>
-                </a:lnTo>
-                <a:close/>
-                <a:lnTo>
-                  <a:pt x="123197" y="637319"/>
-                </a:lnTo>
-                <a:close/>
-                <a:lnTo>
-                  <a:pt x="125624" y="635712"/>
-                </a:lnTo>
-                <a:close/>
-                <a:lnTo>
-                  <a:pt x="128075" y="634111"/>
-                </a:lnTo>
-                <a:close/>
-                <a:lnTo>
-                  <a:pt x="130550" y="632516"/>
-                </a:lnTo>
-                <a:close/>
-                <a:lnTo>
-                  <a:pt x="133049" y="630924"/>
-                </a:lnTo>
-                <a:close/>
-                <a:lnTo>
-                  <a:pt x="135571" y="629338"/>
-                </a:lnTo>
-                <a:close/>
-                <a:lnTo>
-                  <a:pt x="138117" y="627755"/>
-                </a:lnTo>
-                <a:close/>
-                <a:lnTo>
-                  <a:pt x="140686" y="626175"/>
-                </a:lnTo>
-                <a:close/>
-                <a:lnTo>
-                  <a:pt x="143280" y="624598"/>
-                </a:lnTo>
-                <a:close/>
-                <a:lnTo>
-                  <a:pt x="145897" y="623025"/>
-                </a:lnTo>
-                <a:close/>
-                <a:lnTo>
-                  <a:pt x="148537" y="621456"/>
-                </a:lnTo>
-                <a:close/>
-                <a:lnTo>
-                  <a:pt x="151201" y="619891"/>
-                </a:lnTo>
-                <a:close/>
-                <a:lnTo>
-                  <a:pt x="153889" y="618331"/>
-                </a:lnTo>
-                <a:close/>
-                <a:lnTo>
-                  <a:pt x="156601" y="616775"/>
-                </a:lnTo>
-                <a:close/>
-                <a:lnTo>
-                  <a:pt x="159336" y="615226"/>
-                </a:lnTo>
-                <a:close/>
-                <a:lnTo>
-                  <a:pt x="162095" y="613682"/>
-                </a:lnTo>
-                <a:close/>
-                <a:lnTo>
-                  <a:pt x="164878" y="612144"/>
-                </a:lnTo>
-                <a:close/>
-                <a:lnTo>
-                  <a:pt x="167685" y="610610"/>
-                </a:lnTo>
-                <a:close/>
-                <a:lnTo>
-                  <a:pt x="170515" y="609081"/>
-                </a:lnTo>
-                <a:close/>
-                <a:lnTo>
-                  <a:pt x="173368" y="607557"/>
-                </a:lnTo>
-                <a:close/>
-                <a:lnTo>
-                  <a:pt x="176246" y="606035"/>
-                </a:lnTo>
-                <a:close/>
-                <a:lnTo>
-                  <a:pt x="179147" y="604517"/>
-                </a:lnTo>
-                <a:close/>
-                <a:lnTo>
-                  <a:pt x="182072" y="603002"/>
-                </a:lnTo>
-                <a:close/>
-                <a:lnTo>
-                  <a:pt x="185020" y="601491"/>
-                </a:lnTo>
-                <a:close/>
-                <a:lnTo>
-                  <a:pt x="187992" y="599984"/>
-                </a:lnTo>
-                <a:close/>
-                <a:lnTo>
-                  <a:pt x="190988" y="598481"/>
-                </a:lnTo>
-                <a:close/>
-                <a:lnTo>
-                  <a:pt x="194008" y="596983"/>
-                </a:lnTo>
-                <a:close/>
-                <a:lnTo>
-                  <a:pt x="197051" y="595491"/>
-                </a:lnTo>
-                <a:close/>
-                <a:lnTo>
-                  <a:pt x="200118" y="594004"/>
-                </a:lnTo>
-                <a:close/>
-                <a:lnTo>
-                  <a:pt x="203208" y="592523"/>
-                </a:lnTo>
-                <a:close/>
-                <a:lnTo>
-                  <a:pt x="206323" y="591047"/>
-                </a:lnTo>
-                <a:close/>
-                <a:lnTo>
-                  <a:pt x="209461" y="589576"/>
-                </a:lnTo>
-                <a:close/>
-                <a:lnTo>
-                  <a:pt x="212622" y="588109"/>
-                </a:lnTo>
-                <a:close/>
-                <a:lnTo>
-                  <a:pt x="215808" y="586646"/>
-                </a:lnTo>
-                <a:close/>
-                <a:lnTo>
-                  <a:pt x="219017" y="585186"/>
-                </a:lnTo>
-                <a:close/>
-                <a:lnTo>
-                  <a:pt x="222249" y="583730"/>
-                </a:lnTo>
-                <a:close/>
-                <a:lnTo>
-                  <a:pt x="225506" y="582277"/>
-                </a:lnTo>
-                <a:close/>
-                <a:lnTo>
-                  <a:pt x="228786" y="580827"/>
-                </a:lnTo>
-                <a:close/>
-                <a:lnTo>
-                  <a:pt x="232089" y="579382"/>
-                </a:lnTo>
-                <a:close/>
-                <a:lnTo>
-                  <a:pt x="235417" y="577942"/>
-                </a:lnTo>
-                <a:close/>
-                <a:lnTo>
-                  <a:pt x="238768" y="576506"/>
-                </a:lnTo>
-                <a:close/>
-                <a:lnTo>
-                  <a:pt x="242143" y="575077"/>
-                </a:lnTo>
-                <a:close/>
-                <a:lnTo>
-                  <a:pt x="245541" y="573653"/>
-                </a:lnTo>
-                <a:close/>
-                <a:lnTo>
-                  <a:pt x="248963" y="572234"/>
-                </a:lnTo>
-                <a:close/>
-                <a:lnTo>
-                  <a:pt x="252409" y="570821"/>
-                </a:lnTo>
-                <a:close/>
-                <a:lnTo>
-                  <a:pt x="255879" y="569412"/>
-                </a:lnTo>
-                <a:close/>
-                <a:lnTo>
-                  <a:pt x="259372" y="568007"/>
-                </a:lnTo>
-                <a:close/>
-                <a:lnTo>
-                  <a:pt x="262889" y="566606"/>
-                </a:lnTo>
-                <a:close/>
-                <a:lnTo>
-                  <a:pt x="266429" y="565207"/>
-                </a:lnTo>
-                <a:close/>
-                <a:lnTo>
-                  <a:pt x="269993" y="563811"/>
-                </a:lnTo>
-                <a:close/>
-                <a:lnTo>
-                  <a:pt x="273581" y="562419"/>
-                </a:lnTo>
-                <a:close/>
-                <a:lnTo>
-                  <a:pt x="277192" y="561031"/>
-                </a:lnTo>
-                <a:close/>
-                <a:lnTo>
-                  <a:pt x="280827" y="559648"/>
-                </a:lnTo>
-                <a:close/>
-                <a:lnTo>
-                  <a:pt x="284486" y="558270"/>
-                </a:lnTo>
-                <a:close/>
-                <a:lnTo>
-                  <a:pt x="288169" y="556899"/>
-                </a:lnTo>
-                <a:close/>
-                <a:lnTo>
-                  <a:pt x="291876" y="555534"/>
-                </a:lnTo>
-                <a:close/>
-                <a:lnTo>
-                  <a:pt x="295607" y="554176"/>
-                </a:lnTo>
-                <a:close/>
-                <a:lnTo>
-                  <a:pt x="299362" y="552821"/>
-                </a:lnTo>
-                <a:close/>
-                <a:lnTo>
-                  <a:pt x="303140" y="551469"/>
-                </a:lnTo>
-                <a:close/>
-                <a:lnTo>
-                  <a:pt x="306941" y="550115"/>
-                </a:lnTo>
-                <a:close/>
-                <a:lnTo>
-                  <a:pt x="310765" y="548760"/>
-                </a:lnTo>
-                <a:close/>
-                <a:lnTo>
-                  <a:pt x="314612" y="547399"/>
-                </a:lnTo>
-                <a:close/>
-                <a:lnTo>
-                  <a:pt x="318482" y="546032"/>
-                </a:lnTo>
-                <a:close/>
-                <a:lnTo>
-                  <a:pt x="322374" y="544662"/>
-                </a:lnTo>
-                <a:close/>
-                <a:lnTo>
-                  <a:pt x="326291" y="543298"/>
-                </a:lnTo>
-                <a:close/>
-                <a:lnTo>
-                  <a:pt x="330232" y="541947"/>
-                </a:lnTo>
-                <a:close/>
-                <a:lnTo>
-                  <a:pt x="334199" y="540619"/>
-                </a:lnTo>
-                <a:close/>
-                <a:lnTo>
-                  <a:pt x="338192" y="539320"/>
-                </a:lnTo>
-                <a:close/>
-                <a:lnTo>
-                  <a:pt x="342212" y="538060"/>
-                </a:lnTo>
-                <a:close/>
-                <a:lnTo>
-                  <a:pt x="346260" y="536844"/>
-                </a:lnTo>
-                <a:close/>
-                <a:lnTo>
-                  <a:pt x="350333" y="535649"/>
-                </a:lnTo>
-                <a:close/>
-                <a:lnTo>
-                  <a:pt x="354428" y="534447"/>
-                </a:lnTo>
-                <a:close/>
-                <a:lnTo>
-                  <a:pt x="358543" y="533206"/>
-                </a:lnTo>
-                <a:close/>
-                <a:lnTo>
-                  <a:pt x="362675" y="531896"/>
-                </a:lnTo>
-                <a:close/>
-                <a:lnTo>
-                  <a:pt x="366820" y="530485"/>
-                </a:lnTo>
-                <a:close/>
-                <a:lnTo>
-                  <a:pt x="370975" y="528944"/>
-                </a:lnTo>
-                <a:close/>
-                <a:lnTo>
-                  <a:pt x="375140" y="527267"/>
-                </a:lnTo>
-                <a:close/>
-                <a:lnTo>
-                  <a:pt x="379324" y="525547"/>
-                </a:lnTo>
-                <a:close/>
-                <a:lnTo>
-                  <a:pt x="383539" y="523900"/>
-                </a:lnTo>
-                <a:close/>
-                <a:lnTo>
-                  <a:pt x="387795" y="522441"/>
-                </a:lnTo>
-                <a:close/>
-                <a:lnTo>
-                  <a:pt x="392104" y="521285"/>
-                </a:lnTo>
-                <a:close/>
-                <a:lnTo>
-                  <a:pt x="396477" y="520549"/>
-                </a:lnTo>
-                <a:close/>
-                <a:lnTo>
-                  <a:pt x="400926" y="520346"/>
-                </a:lnTo>
-                <a:close/>
-                <a:lnTo>
-                  <a:pt x="405446" y="520631"/>
-                </a:lnTo>
-                <a:close/>
-                <a:lnTo>
-                  <a:pt x="409999" y="521015"/>
-                </a:lnTo>
-                <a:close/>
-                <a:lnTo>
-                  <a:pt x="414543" y="521067"/>
-                </a:lnTo>
-                <a:close/>
-                <a:lnTo>
-                  <a:pt x="419035" y="520356"/>
-                </a:lnTo>
-                <a:close/>
-                <a:lnTo>
-                  <a:pt x="423434" y="518448"/>
-                </a:lnTo>
-                <a:close/>
-                <a:lnTo>
-                  <a:pt x="427696" y="514911"/>
-                </a:lnTo>
-                <a:close/>
-                <a:lnTo>
-                  <a:pt x="431782" y="509328"/>
-                </a:lnTo>
-                <a:close/>
-                <a:lnTo>
-                  <a:pt x="435700" y="501735"/>
-                </a:lnTo>
-                <a:close/>
-                <a:lnTo>
-                  <a:pt x="439524" y="492755"/>
-                </a:lnTo>
-                <a:close/>
-                <a:lnTo>
-                  <a:pt x="443333" y="483045"/>
-                </a:lnTo>
-                <a:close/>
-                <a:lnTo>
-                  <a:pt x="447203" y="473264"/>
-                </a:lnTo>
-                <a:close/>
-                <a:lnTo>
-                  <a:pt x="451213" y="464070"/>
-                </a:lnTo>
-                <a:close/>
-                <a:lnTo>
-                  <a:pt x="455441" y="456120"/>
-                </a:lnTo>
-                <a:close/>
-                <a:lnTo>
-                  <a:pt x="459959" y="450036"/>
-                </a:lnTo>
-                <a:close/>
-                <a:lnTo>
-                  <a:pt x="464765" y="445863"/>
-                </a:lnTo>
-                <a:close/>
-                <a:lnTo>
-                  <a:pt x="469799" y="443213"/>
-                </a:lnTo>
-                <a:close/>
-                <a:lnTo>
-                  <a:pt x="475001" y="441684"/>
-                </a:lnTo>
-                <a:close/>
-                <a:lnTo>
-                  <a:pt x="480309" y="440874"/>
-                </a:lnTo>
-                <a:close/>
-                <a:lnTo>
-                  <a:pt x="485663" y="440382"/>
-                </a:lnTo>
-                <a:close/>
-                <a:lnTo>
-                  <a:pt x="491000" y="439808"/>
-                </a:lnTo>
-                <a:close/>
-                <a:lnTo>
-                  <a:pt x="496267" y="438791"/>
-                </a:lnTo>
-                <a:close/>
-                <a:lnTo>
-                  <a:pt x="501458" y="437295"/>
-                </a:lnTo>
-                <a:close/>
-                <a:lnTo>
-                  <a:pt x="506590" y="435425"/>
-                </a:lnTo>
-                <a:close/>
-                <a:lnTo>
-                  <a:pt x="511680" y="433289"/>
-                </a:lnTo>
-                <a:close/>
-                <a:lnTo>
-                  <a:pt x="516745" y="430996"/>
-                </a:lnTo>
-                <a:close/>
-                <a:lnTo>
-                  <a:pt x="521801" y="428651"/>
-                </a:lnTo>
-                <a:close/>
-                <a:lnTo>
-                  <a:pt x="526865" y="426364"/>
-                </a:lnTo>
-                <a:close/>
-                <a:lnTo>
-                  <a:pt x="531952" y="424220"/>
-                </a:lnTo>
-                <a:close/>
-                <a:lnTo>
-                  <a:pt x="537059" y="422212"/>
-                </a:lnTo>
-                <a:close/>
-                <a:lnTo>
-                  <a:pt x="542183" y="420313"/>
-                </a:lnTo>
-                <a:close/>
-                <a:lnTo>
-                  <a:pt x="547317" y="418493"/>
-                </a:lnTo>
-                <a:close/>
-                <a:lnTo>
-                  <a:pt x="552459" y="416723"/>
-                </a:lnTo>
-                <a:close/>
-                <a:lnTo>
-                  <a:pt x="557602" y="414973"/>
-                </a:lnTo>
-                <a:close/>
-                <a:lnTo>
-                  <a:pt x="562741" y="413216"/>
-                </a:lnTo>
-                <a:close/>
-                <a:lnTo>
-                  <a:pt x="567875" y="411432"/>
-                </a:lnTo>
-                <a:close/>
-                <a:lnTo>
-                  <a:pt x="573003" y="409625"/>
-                </a:lnTo>
-                <a:close/>
-                <a:lnTo>
-                  <a:pt x="578128" y="407803"/>
-                </a:lnTo>
-                <a:close/>
-                <a:lnTo>
-                  <a:pt x="583249" y="405973"/>
-                </a:lnTo>
-                <a:close/>
-                <a:lnTo>
-                  <a:pt x="588370" y="404144"/>
-                </a:lnTo>
-                <a:close/>
-                <a:lnTo>
-                  <a:pt x="593491" y="402324"/>
-                </a:lnTo>
-                <a:close/>
-                <a:lnTo>
-                  <a:pt x="598613" y="400518"/>
-                </a:lnTo>
-                <a:close/>
-                <a:lnTo>
-                  <a:pt x="603737" y="398732"/>
-                </a:lnTo>
-                <a:close/>
-                <a:lnTo>
-                  <a:pt x="608863" y="396963"/>
-                </a:lnTo>
-                <a:close/>
-                <a:lnTo>
-                  <a:pt x="613989" y="395208"/>
-                </a:lnTo>
-                <a:close/>
-                <a:lnTo>
-                  <a:pt x="619115" y="393466"/>
-                </a:lnTo>
-                <a:close/>
-                <a:lnTo>
-                  <a:pt x="624240" y="391732"/>
-                </a:lnTo>
-                <a:close/>
-                <a:lnTo>
-                  <a:pt x="629364" y="390005"/>
-                </a:lnTo>
-                <a:close/>
-                <a:lnTo>
-                  <a:pt x="634486" y="388281"/>
-                </a:lnTo>
-                <a:close/>
-                <a:lnTo>
-                  <a:pt x="639605" y="386562"/>
-                </a:lnTo>
-                <a:close/>
-                <a:lnTo>
-                  <a:pt x="644723" y="384847"/>
-                </a:lnTo>
-                <a:close/>
-                <a:lnTo>
-                  <a:pt x="649840" y="383137"/>
-                </a:lnTo>
-                <a:close/>
-                <a:lnTo>
-                  <a:pt x="654957" y="381433"/>
-                </a:lnTo>
-                <a:close/>
-                <a:lnTo>
-                  <a:pt x="660074" y="379737"/>
-                </a:lnTo>
-                <a:close/>
-                <a:lnTo>
-                  <a:pt x="665193" y="378049"/>
-                </a:lnTo>
-                <a:close/>
-                <a:lnTo>
-                  <a:pt x="670314" y="376370"/>
-                </a:lnTo>
-                <a:close/>
-                <a:lnTo>
-                  <a:pt x="675436" y="374700"/>
-                </a:lnTo>
-                <a:close/>
-                <a:lnTo>
-                  <a:pt x="680560" y="373039"/>
-                </a:lnTo>
-                <a:close/>
-                <a:lnTo>
-                  <a:pt x="685686" y="371386"/>
-                </a:lnTo>
-                <a:close/>
-                <a:lnTo>
-                  <a:pt x="690812" y="369742"/>
-                </a:lnTo>
-                <a:close/>
-                <a:lnTo>
-                  <a:pt x="695939" y="368104"/>
-                </a:lnTo>
-                <a:close/>
-                <a:lnTo>
-                  <a:pt x="701066" y="366474"/>
-                </a:lnTo>
-                <a:close/>
-                <a:lnTo>
-                  <a:pt x="706193" y="364850"/>
-                </a:lnTo>
-                <a:close/>
-                <a:lnTo>
-                  <a:pt x="711320" y="363233"/>
-                </a:lnTo>
-                <a:close/>
-                <a:lnTo>
-                  <a:pt x="716446" y="361622"/>
-                </a:lnTo>
-                <a:close/>
-                <a:lnTo>
-                  <a:pt x="721572" y="360018"/>
-                </a:lnTo>
-                <a:close/>
-                <a:lnTo>
-                  <a:pt x="726696" y="358419"/>
-                </a:lnTo>
-                <a:close/>
-                <a:lnTo>
-                  <a:pt x="731819" y="356826"/>
-                </a:lnTo>
-                <a:close/>
-                <a:lnTo>
-                  <a:pt x="736940" y="355239"/>
-                </a:lnTo>
-                <a:close/>
-                <a:lnTo>
-                  <a:pt x="742059" y="353658"/>
-                </a:lnTo>
-                <a:close/>
-                <a:lnTo>
-                  <a:pt x="747177" y="352082"/>
-                </a:lnTo>
-                <a:close/>
-                <a:lnTo>
-                  <a:pt x="752294" y="350512"/>
-                </a:lnTo>
-                <a:close/>
-                <a:lnTo>
-                  <a:pt x="757411" y="348948"/>
-                </a:lnTo>
-                <a:close/>
-                <a:lnTo>
-                  <a:pt x="762529" y="347391"/>
-                </a:lnTo>
-                <a:close/>
-                <a:lnTo>
-                  <a:pt x="767647" y="345839"/>
-                </a:lnTo>
-                <a:close/>
-                <a:lnTo>
-                  <a:pt x="772768" y="344294"/>
-                </a:lnTo>
-                <a:close/>
-                <a:lnTo>
-                  <a:pt x="777890" y="342756"/>
-                </a:lnTo>
-                <a:close/>
-                <a:lnTo>
-                  <a:pt x="783014" y="341223"/>
-                </a:lnTo>
-                <a:close/>
-                <a:lnTo>
-                  <a:pt x="788140" y="339696"/>
-                </a:lnTo>
-                <a:close/>
-                <a:lnTo>
-                  <a:pt x="793266" y="338174"/>
-                </a:lnTo>
-                <a:close/>
-                <a:lnTo>
-                  <a:pt x="798392" y="336657"/>
-                </a:lnTo>
-                <a:close/>
-                <a:lnTo>
-                  <a:pt x="803518" y="335145"/>
-                </a:lnTo>
-                <a:close/>
-                <a:lnTo>
-                  <a:pt x="808644" y="333637"/>
-                </a:lnTo>
-                <a:close/>
-                <a:lnTo>
-                  <a:pt x="813769" y="332133"/>
-                </a:lnTo>
-                <a:close/>
-                <a:lnTo>
-                  <a:pt x="818894" y="330634"/>
-                </a:lnTo>
-                <a:close/>
-                <a:lnTo>
-                  <a:pt x="824018" y="329141"/>
-                </a:lnTo>
-                <a:close/>
-                <a:lnTo>
-                  <a:pt x="829143" y="327652"/>
-                </a:lnTo>
-                <a:close/>
-                <a:lnTo>
-                  <a:pt x="834268" y="326170"/>
-                </a:lnTo>
-                <a:close/>
-                <a:lnTo>
-                  <a:pt x="839393" y="324693"/>
-                </a:lnTo>
-                <a:close/>
-                <a:lnTo>
-                  <a:pt x="844519" y="323224"/>
-                </a:lnTo>
-                <a:close/>
-                <a:lnTo>
-                  <a:pt x="849645" y="321761"/>
-                </a:lnTo>
-                <a:close/>
-                <a:lnTo>
-                  <a:pt x="854771" y="320304"/>
-                </a:lnTo>
-                <a:close/>
-                <a:lnTo>
-                  <a:pt x="859897" y="318853"/>
-                </a:lnTo>
-                <a:close/>
-                <a:lnTo>
-                  <a:pt x="865022" y="317407"/>
-                </a:lnTo>
-                <a:close/>
-                <a:lnTo>
-                  <a:pt x="870146" y="315966"/>
-                </a:lnTo>
-                <a:close/>
-                <a:lnTo>
-                  <a:pt x="875268" y="314531"/>
-                </a:lnTo>
-                <a:close/>
-                <a:lnTo>
-                  <a:pt x="880388" y="313099"/>
-                </a:lnTo>
-                <a:close/>
-                <a:lnTo>
-                  <a:pt x="885506" y="311672"/>
-                </a:lnTo>
-                <a:close/>
-                <a:lnTo>
-                  <a:pt x="890624" y="310250"/>
-                </a:lnTo>
-                <a:close/>
-                <a:lnTo>
-                  <a:pt x="895741" y="308833"/>
-                </a:lnTo>
-                <a:close/>
-                <a:lnTo>
-                  <a:pt x="900858" y="307420"/>
-                </a:lnTo>
-                <a:close/>
-                <a:lnTo>
-                  <a:pt x="905976" y="306013"/>
-                </a:lnTo>
-                <a:close/>
-                <a:lnTo>
-                  <a:pt x="911096" y="304610"/>
-                </a:lnTo>
-                <a:close/>
-                <a:lnTo>
-                  <a:pt x="916217" y="303214"/>
-                </a:lnTo>
-                <a:close/>
-                <a:lnTo>
-                  <a:pt x="921340" y="301822"/>
-                </a:lnTo>
-                <a:close/>
-                <a:lnTo>
-                  <a:pt x="926465" y="300435"/>
-                </a:lnTo>
-                <a:close/>
-                <a:lnTo>
-                  <a:pt x="931591" y="299053"/>
-                </a:lnTo>
-                <a:close/>
-                <a:lnTo>
-                  <a:pt x="936717" y="297675"/>
-                </a:lnTo>
-                <a:close/>
-                <a:lnTo>
-                  <a:pt x="941844" y="296301"/>
-                </a:lnTo>
-                <a:close/>
-                <a:lnTo>
-                  <a:pt x="946971" y="294931"/>
-                </a:lnTo>
-                <a:close/>
-                <a:lnTo>
-                  <a:pt x="952098" y="293565"/>
-                </a:lnTo>
-                <a:close/>
-                <a:lnTo>
-                  <a:pt x="957225" y="292203"/>
-                </a:lnTo>
-                <a:close/>
-                <a:lnTo>
-                  <a:pt x="962351" y="290844"/>
-                </a:lnTo>
-                <a:close/>
-                <a:lnTo>
-                  <a:pt x="967476" y="289489"/>
-                </a:lnTo>
-                <a:close/>
-                <a:lnTo>
-                  <a:pt x="972600" y="288137"/>
-                </a:lnTo>
-                <a:close/>
-                <a:lnTo>
-                  <a:pt x="977722" y="286789"/>
-                </a:lnTo>
-                <a:close/>
-                <a:lnTo>
-                  <a:pt x="982842" y="285444"/>
-                </a:lnTo>
-                <a:close/>
-                <a:lnTo>
-                  <a:pt x="987961" y="284103"/>
-                </a:lnTo>
-                <a:close/>
-                <a:lnTo>
-                  <a:pt x="993079" y="282766"/>
-                </a:lnTo>
-                <a:close/>
-                <a:lnTo>
-                  <a:pt x="998196" y="281433"/>
-                </a:lnTo>
-                <a:close/>
-                <a:lnTo>
-                  <a:pt x="1003313" y="280106"/>
-                </a:lnTo>
-                <a:close/>
-                <a:lnTo>
-                  <a:pt x="1008431" y="278783"/>
-                </a:lnTo>
-                <a:close/>
-                <a:lnTo>
-                  <a:pt x="1013550" y="277466"/>
-                </a:lnTo>
-                <a:close/>
-                <a:lnTo>
-                  <a:pt x="1018671" y="276155"/>
-                </a:lnTo>
-                <a:close/>
-                <a:lnTo>
-                  <a:pt x="1023794" y="274850"/>
-                </a:lnTo>
-                <a:close/>
-                <a:lnTo>
-                  <a:pt x="1028919" y="273549"/>
-                </a:lnTo>
-                <a:close/>
-                <a:lnTo>
-                  <a:pt x="1034044" y="272253"/>
-                </a:lnTo>
-                <a:close/>
-                <a:lnTo>
-                  <a:pt x="1039171" y="270961"/>
-                </a:lnTo>
-                <a:close/>
-                <a:lnTo>
-                  <a:pt x="1044297" y="269672"/>
-                </a:lnTo>
-                <a:close/>
-                <a:lnTo>
-                  <a:pt x="1049423" y="268385"/>
-                </a:lnTo>
-                <a:close/>
-                <a:lnTo>
-                  <a:pt x="1054549" y="267101"/>
-                </a:lnTo>
-                <a:close/>
-                <a:lnTo>
-                  <a:pt x="1059673" y="265818"/>
-                </a:lnTo>
-                <a:close/>
-                <a:lnTo>
-                  <a:pt x="1064798" y="264538"/>
-                </a:lnTo>
-                <a:close/>
-                <a:lnTo>
-                  <a:pt x="1069923" y="263261"/>
-                </a:lnTo>
-                <a:close/>
-                <a:lnTo>
-                  <a:pt x="1075047" y="261988"/>
-                </a:lnTo>
-                <a:close/>
-                <a:lnTo>
-                  <a:pt x="1080172" y="260718"/>
-                </a:lnTo>
-                <a:close/>
-                <a:lnTo>
-                  <a:pt x="1085298" y="259452"/>
-                </a:lnTo>
-                <a:close/>
-                <a:lnTo>
-                  <a:pt x="1090424" y="258190"/>
-                </a:lnTo>
-                <a:close/>
-                <a:lnTo>
-                  <a:pt x="1095550" y="256933"/>
-                </a:lnTo>
-                <a:close/>
-                <a:lnTo>
-                  <a:pt x="1100676" y="255681"/>
-                </a:lnTo>
-                <a:close/>
-                <a:lnTo>
-                  <a:pt x="1105802" y="254432"/>
-                </a:lnTo>
-                <a:close/>
-                <a:lnTo>
-                  <a:pt x="1110926" y="253188"/>
-                </a:lnTo>
-                <a:close/>
-                <a:lnTo>
-                  <a:pt x="1116049" y="251948"/>
-                </a:lnTo>
-                <a:close/>
-                <a:lnTo>
-                  <a:pt x="1121171" y="250712"/>
-                </a:lnTo>
-                <a:close/>
-                <a:lnTo>
-                  <a:pt x="1126290" y="249480"/>
-                </a:lnTo>
-                <a:close/>
-                <a:lnTo>
-                  <a:pt x="1131408" y="248252"/>
-                </a:lnTo>
-                <a:close/>
-                <a:lnTo>
-                  <a:pt x="1136525" y="247028"/>
-                </a:lnTo>
-                <a:close/>
-                <a:lnTo>
-                  <a:pt x="1141642" y="245807"/>
-                </a:lnTo>
-                <a:close/>
-                <a:lnTo>
-                  <a:pt x="1146760" y="244589"/>
-                </a:lnTo>
-                <a:close/>
-                <a:lnTo>
-                  <a:pt x="1151878" y="243375"/>
-                </a:lnTo>
-                <a:close/>
-                <a:lnTo>
-                  <a:pt x="1156999" y="242163"/>
-                </a:lnTo>
-                <a:close/>
-                <a:lnTo>
-                  <a:pt x="1162121" y="240954"/>
-                </a:lnTo>
-                <a:close/>
-                <a:lnTo>
-                  <a:pt x="1167245" y="239748"/>
-                </a:lnTo>
-                <a:close/>
-                <a:lnTo>
-                  <a:pt x="1172370" y="238545"/>
-                </a:lnTo>
-                <a:close/>
-                <a:lnTo>
-                  <a:pt x="1177496" y="237344"/>
-                </a:lnTo>
-                <a:close/>
-                <a:lnTo>
-                  <a:pt x="1182622" y="236146"/>
-                </a:lnTo>
-                <a:close/>
-                <a:lnTo>
-                  <a:pt x="1187749" y="234951"/>
-                </a:lnTo>
-                <a:close/>
-                <a:lnTo>
-                  <a:pt x="1192877" y="233758"/>
-                </a:lnTo>
-                <a:close/>
-                <a:lnTo>
-                  <a:pt x="1198004" y="232568"/>
-                </a:lnTo>
-                <a:close/>
-                <a:lnTo>
-                  <a:pt x="1203130" y="231381"/>
-                </a:lnTo>
-                <a:close/>
-                <a:lnTo>
-                  <a:pt x="1208256" y="230197"/>
-                </a:lnTo>
-                <a:close/>
-                <a:lnTo>
-                  <a:pt x="1213380" y="229018"/>
-                </a:lnTo>
-                <a:close/>
-                <a:lnTo>
-                  <a:pt x="1218504" y="227841"/>
-                </a:lnTo>
-                <a:close/>
-                <a:lnTo>
-                  <a:pt x="1223625" y="226670"/>
-                </a:lnTo>
-                <a:close/>
-                <a:lnTo>
-                  <a:pt x="1228745" y="225502"/>
-                </a:lnTo>
-                <a:close/>
-                <a:lnTo>
-                  <a:pt x="1233863" y="224339"/>
-                </a:lnTo>
-                <a:close/>
-                <a:lnTo>
-                  <a:pt x="1238980" y="223180"/>
-                </a:lnTo>
-                <a:close/>
-                <a:lnTo>
-                  <a:pt x="1244097" y="222025"/>
-                </a:lnTo>
-                <a:close/>
-                <a:lnTo>
-                  <a:pt x="1249215" y="220874"/>
-                </a:lnTo>
-                <a:close/>
-                <a:lnTo>
-                  <a:pt x="1254333" y="219726"/>
-                </a:lnTo>
-                <a:close/>
-                <a:lnTo>
-                  <a:pt x="1259453" y="218581"/>
-                </a:lnTo>
-                <a:close/>
-                <a:lnTo>
-                  <a:pt x="1264575" y="217440"/>
-                </a:lnTo>
-                <a:close/>
-                <a:lnTo>
-                  <a:pt x="1269699" y="216301"/>
-                </a:lnTo>
-                <a:close/>
-                <a:lnTo>
-                  <a:pt x="1274824" y="215165"/>
-                </a:lnTo>
-                <a:close/>
-                <a:lnTo>
-                  <a:pt x="1279949" y="214030"/>
-                </a:lnTo>
-                <a:close/>
-                <a:lnTo>
-                  <a:pt x="1285076" y="212898"/>
-                </a:lnTo>
-                <a:close/>
-                <a:lnTo>
-                  <a:pt x="1290202" y="211767"/>
-                </a:lnTo>
-                <a:close/>
-                <a:lnTo>
-                  <a:pt x="1295328" y="210637"/>
-                </a:lnTo>
-                <a:close/>
-                <a:lnTo>
-                  <a:pt x="1300453" y="209508"/>
-                </a:lnTo>
-                <a:close/>
-                <a:lnTo>
-                  <a:pt x="1305578" y="208380"/>
-                </a:lnTo>
-                <a:close/>
-                <a:lnTo>
-                  <a:pt x="1310702" y="207255"/>
-                </a:lnTo>
-                <a:close/>
-                <a:lnTo>
-                  <a:pt x="1315827" y="206133"/>
-                </a:lnTo>
-                <a:close/>
-                <a:lnTo>
-                  <a:pt x="1320952" y="205015"/>
-                </a:lnTo>
-                <a:close/>
-                <a:lnTo>
-                  <a:pt x="1326077" y="203902"/>
-                </a:lnTo>
-                <a:close/>
-                <a:lnTo>
-                  <a:pt x="1331202" y="202793"/>
-                </a:lnTo>
-                <a:close/>
-                <a:lnTo>
-                  <a:pt x="1336329" y="201690"/>
-                </a:lnTo>
-                <a:close/>
-                <a:lnTo>
-                  <a:pt x="1341455" y="200591"/>
-                </a:lnTo>
-                <a:close/>
-                <a:lnTo>
-                  <a:pt x="1346581" y="199496"/>
-                </a:lnTo>
-                <a:close/>
-                <a:lnTo>
-                  <a:pt x="1351706" y="198404"/>
-                </a:lnTo>
-                <a:close/>
-                <a:lnTo>
-                  <a:pt x="1356830" y="197315"/>
-                </a:lnTo>
-                <a:close/>
-                <a:lnTo>
-                  <a:pt x="1361953" y="196227"/>
-                </a:lnTo>
-                <a:close/>
-                <a:lnTo>
-                  <a:pt x="1367073" y="195139"/>
-                </a:lnTo>
-                <a:close/>
-                <a:lnTo>
-                  <a:pt x="1372192" y="194053"/>
-                </a:lnTo>
-                <a:close/>
-                <a:lnTo>
-                  <a:pt x="1377310" y="192968"/>
-                </a:lnTo>
-                <a:close/>
-                <a:lnTo>
-                  <a:pt x="1382427" y="191885"/>
-                </a:lnTo>
-                <a:close/>
-                <a:lnTo>
-                  <a:pt x="1387544" y="190805"/>
-                </a:lnTo>
-                <a:close/>
-                <a:lnTo>
-                  <a:pt x="1392662" y="189727"/>
-                </a:lnTo>
-                <a:close/>
-                <a:lnTo>
-                  <a:pt x="1397781" y="188653"/>
-                </a:lnTo>
-                <a:close/>
-                <a:lnTo>
-                  <a:pt x="1402902" y="187582"/>
-                </a:lnTo>
-                <a:close/>
-                <a:lnTo>
-                  <a:pt x="1408025" y="186516"/>
-                </a:lnTo>
-                <a:close/>
-                <a:lnTo>
-                  <a:pt x="1413149" y="185452"/>
-                </a:lnTo>
-                <a:close/>
-                <a:lnTo>
-                  <a:pt x="1418274" y="184392"/>
-                </a:lnTo>
-                <a:close/>
-                <a:lnTo>
-                  <a:pt x="1423401" y="183333"/>
-                </a:lnTo>
-                <a:close/>
-                <a:lnTo>
-                  <a:pt x="1428527" y="182277"/>
-                </a:lnTo>
-                <a:close/>
-                <a:lnTo>
-                  <a:pt x="1433655" y="181222"/>
-                </a:lnTo>
-                <a:close/>
-                <a:lnTo>
-                  <a:pt x="1438782" y="180168"/>
-                </a:lnTo>
-                <a:close/>
-                <a:lnTo>
-                  <a:pt x="1443909" y="179116"/>
-                </a:lnTo>
-                <a:close/>
-                <a:lnTo>
-                  <a:pt x="1449035" y="178065"/>
-                </a:lnTo>
-                <a:close/>
-                <a:lnTo>
-                  <a:pt x="1454160" y="177017"/>
-                </a:lnTo>
-                <a:close/>
-                <a:lnTo>
-                  <a:pt x="1459284" y="175971"/>
-                </a:lnTo>
-                <a:close/>
-                <a:lnTo>
-                  <a:pt x="1464407" y="174929"/>
-                </a:lnTo>
-                <a:close/>
-                <a:lnTo>
-                  <a:pt x="1469528" y="173890"/>
-                </a:lnTo>
-                <a:close/>
-                <a:lnTo>
-                  <a:pt x="1474647" y="172854"/>
-                </a:lnTo>
-                <a:close/>
-                <a:lnTo>
-                  <a:pt x="1479765" y="171822"/>
-                </a:lnTo>
-                <a:close/>
-                <a:lnTo>
-                  <a:pt x="1484882" y="170793"/>
-                </a:lnTo>
-                <a:close/>
-                <a:lnTo>
-                  <a:pt x="1490000" y="169767"/>
-                </a:lnTo>
-                <a:close/>
-                <a:lnTo>
-                  <a:pt x="1495117" y="168743"/>
-                </a:lnTo>
-                <a:close/>
-                <a:lnTo>
-                  <a:pt x="1500236" y="167721"/>
-                </a:lnTo>
-                <a:close/>
-                <a:lnTo>
-                  <a:pt x="1505356" y="166701"/>
-                </a:lnTo>
-                <a:close/>
-                <a:lnTo>
-                  <a:pt x="1510478" y="165683"/>
-                </a:lnTo>
-                <a:close/>
-                <a:lnTo>
-                  <a:pt x="1515602" y="164666"/>
-                </a:lnTo>
-                <a:close/>
-                <a:lnTo>
-                  <a:pt x="1520727" y="163651"/>
-                </a:lnTo>
-                <a:close/>
-                <a:lnTo>
-                  <a:pt x="1525853" y="162638"/>
-                </a:lnTo>
-                <a:close/>
-                <a:lnTo>
-                  <a:pt x="1530979" y="161626"/>
-                </a:lnTo>
-                <a:close/>
-                <a:lnTo>
-                  <a:pt x="1536106" y="160616"/>
-                </a:lnTo>
-                <a:close/>
-                <a:lnTo>
-                  <a:pt x="1541233" y="159607"/>
-                </a:lnTo>
-                <a:close/>
-                <a:lnTo>
-                  <a:pt x="1546360" y="158600"/>
-                </a:lnTo>
-                <a:close/>
-                <a:lnTo>
-                  <a:pt x="1551487" y="157595"/>
-                </a:lnTo>
-                <a:close/>
-                <a:lnTo>
-                  <a:pt x="1556613" y="156592"/>
-                </a:lnTo>
-                <a:close/>
-                <a:lnTo>
-                  <a:pt x="1561737" y="155593"/>
-                </a:lnTo>
-                <a:close/>
-                <a:lnTo>
-                  <a:pt x="1566861" y="154597"/>
-                </a:lnTo>
-                <a:close/>
-                <a:lnTo>
-                  <a:pt x="1571982" y="153604"/>
-                </a:lnTo>
-                <a:close/>
-                <a:lnTo>
-                  <a:pt x="1577102" y="152616"/>
-                </a:lnTo>
-                <a:close/>
-                <a:lnTo>
-                  <a:pt x="1582221" y="151631"/>
-                </a:lnTo>
-                <a:close/>
-                <a:lnTo>
-                  <a:pt x="1587338" y="150649"/>
-                </a:lnTo>
-                <a:close/>
-                <a:lnTo>
-                  <a:pt x="1592455" y="149670"/>
-                </a:lnTo>
-                <a:close/>
-                <a:lnTo>
-                  <a:pt x="1597572" y="148692"/>
-                </a:lnTo>
-                <a:close/>
-                <a:lnTo>
-                  <a:pt x="1602691" y="147715"/>
-                </a:lnTo>
-                <a:close/>
-                <a:lnTo>
-                  <a:pt x="1607810" y="146738"/>
-                </a:lnTo>
-                <a:close/>
-                <a:lnTo>
-                  <a:pt x="1612932" y="145760"/>
-                </a:lnTo>
-                <a:close/>
-                <a:lnTo>
-                  <a:pt x="1618056" y="144783"/>
-                </a:lnTo>
-                <a:close/>
-                <a:lnTo>
-                  <a:pt x="1623180" y="143806"/>
-                </a:lnTo>
-                <a:close/>
-                <a:lnTo>
-                  <a:pt x="1628306" y="142831"/>
-                </a:lnTo>
-                <a:close/>
-                <a:lnTo>
-                  <a:pt x="1633433" y="141858"/>
-                </a:lnTo>
-                <a:close/>
-                <a:lnTo>
-                  <a:pt x="1638559" y="140888"/>
-                </a:lnTo>
-                <a:close/>
-                <a:lnTo>
-                  <a:pt x="1643685" y="139922"/>
-                </a:lnTo>
-                <a:close/>
-                <a:lnTo>
-                  <a:pt x="1648810" y="138959"/>
-                </a:lnTo>
-                <a:close/>
-                <a:lnTo>
-                  <a:pt x="1653935" y="138000"/>
-                </a:lnTo>
-                <a:close/>
-                <a:lnTo>
-                  <a:pt x="1659059" y="137045"/>
-                </a:lnTo>
-                <a:close/>
-                <a:lnTo>
-                  <a:pt x="1664184" y="136092"/>
-                </a:lnTo>
-                <a:close/>
-                <a:lnTo>
-                  <a:pt x="1669309" y="135143"/>
-                </a:lnTo>
-                <a:close/>
-                <a:lnTo>
-                  <a:pt x="1674434" y="134195"/>
-                </a:lnTo>
-                <a:close/>
-                <a:lnTo>
-                  <a:pt x="1679559" y="133250"/>
-                </a:lnTo>
-                <a:close/>
-                <a:lnTo>
-                  <a:pt x="1684686" y="132307"/>
-                </a:lnTo>
-                <a:close/>
-                <a:lnTo>
-                  <a:pt x="1689812" y="131366"/>
-                </a:lnTo>
-                <a:close/>
-                <a:lnTo>
-                  <a:pt x="1694938" y="130426"/>
-                </a:lnTo>
-                <a:close/>
-                <a:lnTo>
-                  <a:pt x="1700063" y="129486"/>
-                </a:lnTo>
-                <a:close/>
-                <a:lnTo>
-                  <a:pt x="1705187" y="128547"/>
-                </a:lnTo>
-                <a:close/>
-                <a:lnTo>
-                  <a:pt x="1710310" y="127609"/>
-                </a:lnTo>
-                <a:close/>
-                <a:lnTo>
-                  <a:pt x="1715431" y="126671"/>
-                </a:lnTo>
-                <a:close/>
-                <a:lnTo>
-                  <a:pt x="1720550" y="125732"/>
-                </a:lnTo>
-                <a:close/>
-                <a:lnTo>
-                  <a:pt x="1725667" y="124795"/>
-                </a:lnTo>
-                <a:close/>
-                <a:lnTo>
-                  <a:pt x="1730784" y="123859"/>
-                </a:lnTo>
-                <a:close/>
-                <a:lnTo>
-                  <a:pt x="1735902" y="122926"/>
-                </a:lnTo>
-                <a:close/>
-                <a:lnTo>
-                  <a:pt x="1741019" y="121996"/>
-                </a:lnTo>
-                <a:close/>
-                <a:lnTo>
-                  <a:pt x="1746138" y="121069"/>
-                </a:lnTo>
-                <a:close/>
-                <a:lnTo>
-                  <a:pt x="1751259" y="120147"/>
-                </a:lnTo>
-                <a:close/>
-                <a:lnTo>
-                  <a:pt x="1756382" y="119228"/>
-                </a:lnTo>
-                <a:close/>
-                <a:lnTo>
-                  <a:pt x="1761506" y="118313"/>
-                </a:lnTo>
-                <a:close/>
-                <a:lnTo>
-                  <a:pt x="1766631" y="117401"/>
-                </a:lnTo>
-                <a:close/>
-                <a:lnTo>
-                  <a:pt x="1771757" y="116490"/>
-                </a:lnTo>
-                <a:close/>
-                <a:lnTo>
-                  <a:pt x="1776884" y="115581"/>
-                </a:lnTo>
-                <a:close/>
-                <a:lnTo>
-                  <a:pt x="1782011" y="114672"/>
-                </a:lnTo>
-                <a:close/>
-                <a:lnTo>
-                  <a:pt x="1787139" y="113763"/>
-                </a:lnTo>
-                <a:close/>
-                <a:lnTo>
-                  <a:pt x="1792265" y="112854"/>
-                </a:lnTo>
-                <a:close/>
-                <a:lnTo>
-                  <a:pt x="1797392" y="111945"/>
-                </a:lnTo>
-                <a:close/>
-                <a:lnTo>
-                  <a:pt x="1802517" y="111038"/>
-                </a:lnTo>
-                <a:close/>
-                <a:lnTo>
-                  <a:pt x="1807642" y="110131"/>
-                </a:lnTo>
-                <a:close/>
-                <a:lnTo>
-                  <a:pt x="1812764" y="109227"/>
-                </a:lnTo>
-                <a:close/>
-                <a:lnTo>
-                  <a:pt x="1817885" y="108325"/>
-                </a:lnTo>
-                <a:close/>
-                <a:lnTo>
-                  <a:pt x="1823005" y="107425"/>
-                </a:lnTo>
-                <a:close/>
-                <a:lnTo>
-                  <a:pt x="1828122" y="106528"/>
-                </a:lnTo>
-                <a:close/>
-                <a:lnTo>
-                  <a:pt x="1833240" y="105634"/>
-                </a:lnTo>
-                <a:close/>
-                <a:lnTo>
-                  <a:pt x="1838357" y="104741"/>
-                </a:lnTo>
-                <a:close/>
-                <a:lnTo>
-                  <a:pt x="1843474" y="103851"/>
-                </a:lnTo>
-                <a:close/>
-                <a:lnTo>
-                  <a:pt x="1848593" y="102962"/>
-                </a:lnTo>
-                <a:close/>
-                <a:lnTo>
-                  <a:pt x="1853713" y="102075"/>
-                </a:lnTo>
-                <a:close/>
-                <a:lnTo>
-                  <a:pt x="1858836" y="101190"/>
-                </a:lnTo>
-                <a:close/>
-                <a:lnTo>
-                  <a:pt x="1863960" y="100307"/>
-                </a:lnTo>
-                <a:close/>
-                <a:lnTo>
-                  <a:pt x="1869085" y="99425"/>
-                </a:lnTo>
-                <a:close/>
-                <a:lnTo>
-                  <a:pt x="1874211" y="98546"/>
-                </a:lnTo>
-                <a:close/>
-                <a:lnTo>
-                  <a:pt x="1879337" y="97669"/>
-                </a:lnTo>
-                <a:close/>
-                <a:lnTo>
-                  <a:pt x="1884464" y="96794"/>
-                </a:lnTo>
-                <a:close/>
-                <a:lnTo>
-                  <a:pt x="1889589" y="95922"/>
-                </a:lnTo>
-                <a:close/>
-                <a:lnTo>
-                  <a:pt x="1894715" y="95052"/>
-                </a:lnTo>
-                <a:close/>
-                <a:lnTo>
-                  <a:pt x="1899839" y="94184"/>
-                </a:lnTo>
-                <a:close/>
-                <a:lnTo>
-                  <a:pt x="1904964" y="93318"/>
-                </a:lnTo>
-                <a:close/>
-                <a:lnTo>
-                  <a:pt x="1910088" y="92453"/>
-                </a:lnTo>
-                <a:close/>
-                <a:lnTo>
-                  <a:pt x="1915213" y="91589"/>
-                </a:lnTo>
-                <a:close/>
-                <a:lnTo>
-                  <a:pt x="1920338" y="90725"/>
-                </a:lnTo>
-                <a:close/>
-                <a:lnTo>
-                  <a:pt x="1925464" y="89862"/>
-                </a:lnTo>
-                <a:close/>
-                <a:lnTo>
-                  <a:pt x="1930590" y="88999"/>
-                </a:lnTo>
-                <a:close/>
-                <a:lnTo>
-                  <a:pt x="1935717" y="88137"/>
-                </a:lnTo>
-                <a:close/>
-                <a:lnTo>
-                  <a:pt x="1940843" y="87276"/>
-                </a:lnTo>
-                <a:close/>
-                <a:lnTo>
-                  <a:pt x="1945968" y="86417"/>
-                </a:lnTo>
-                <a:close/>
-                <a:lnTo>
-                  <a:pt x="1951091" y="85560"/>
-                </a:lnTo>
-                <a:close/>
-                <a:lnTo>
-                  <a:pt x="1956213" y="84705"/>
-                </a:lnTo>
-                <a:close/>
-                <a:lnTo>
-                  <a:pt x="1961333" y="83853"/>
-                </a:lnTo>
-                <a:close/>
-                <a:lnTo>
-                  <a:pt x="1966452" y="83004"/>
-                </a:lnTo>
-                <a:close/>
-                <a:lnTo>
-                  <a:pt x="1971569" y="82157"/>
-                </a:lnTo>
-                <a:close/>
-                <a:lnTo>
-                  <a:pt x="1976686" y="81311"/>
-                </a:lnTo>
-                <a:close/>
-                <a:lnTo>
-                  <a:pt x="1981803" y="80467"/>
-                </a:lnTo>
-                <a:close/>
-                <a:lnTo>
-                  <a:pt x="1986922" y="79624"/>
-                </a:lnTo>
-                <a:close/>
-                <a:lnTo>
-                  <a:pt x="1992041" y="78781"/>
-                </a:lnTo>
-                <a:close/>
-                <a:lnTo>
-                  <a:pt x="1997163" y="77938"/>
-                </a:lnTo>
-                <a:close/>
-                <a:lnTo>
-                  <a:pt x="2002286" y="77096"/>
-                </a:lnTo>
-                <a:close/>
-                <a:lnTo>
-                  <a:pt x="2007410" y="76255"/>
-                </a:lnTo>
-                <a:close/>
-                <a:lnTo>
-                  <a:pt x="2012536" y="75415"/>
-                </a:lnTo>
-                <a:close/>
-                <a:lnTo>
-                  <a:pt x="2017663" y="74577"/>
-                </a:lnTo>
-                <a:close/>
-                <a:lnTo>
-                  <a:pt x="2022790" y="73740"/>
-                </a:lnTo>
-                <a:close/>
-                <a:lnTo>
-                  <a:pt x="2027917" y="72906"/>
-                </a:lnTo>
-                <a:close/>
-                <a:lnTo>
-                  <a:pt x="2033044" y="72074"/>
-                </a:lnTo>
-                <a:close/>
-                <a:lnTo>
-                  <a:pt x="2038171" y="71244"/>
-                </a:lnTo>
-                <a:close/>
-                <a:lnTo>
-                  <a:pt x="2043297" y="70416"/>
-                </a:lnTo>
-                <a:close/>
-                <a:lnTo>
-                  <a:pt x="2048422" y="69591"/>
-                </a:lnTo>
-                <a:close/>
-                <a:lnTo>
-                  <a:pt x="2053545" y="68768"/>
-                </a:lnTo>
-                <a:close/>
-                <a:lnTo>
-                  <a:pt x="2058668" y="67947"/>
-                </a:lnTo>
-                <a:close/>
-                <a:lnTo>
-                  <a:pt x="2063788" y="67129"/>
-                </a:lnTo>
-                <a:close/>
-                <a:lnTo>
-                  <a:pt x="2068907" y="66312"/>
-                </a:lnTo>
-                <a:close/>
-                <a:lnTo>
-                  <a:pt x="2074024" y="65498"/>
-                </a:lnTo>
-                <a:close/>
-                <a:lnTo>
-                  <a:pt x="2079141" y="64685"/>
-                </a:lnTo>
-                <a:close/>
-                <a:lnTo>
-                  <a:pt x="2084258" y="63873"/>
-                </a:lnTo>
-                <a:close/>
-                <a:lnTo>
-                  <a:pt x="2089376" y="63063"/>
-                </a:lnTo>
-                <a:close/>
-                <a:lnTo>
-                  <a:pt x="2094496" y="62254"/>
-                </a:lnTo>
-                <a:close/>
-                <a:lnTo>
-                  <a:pt x="2099617" y="61445"/>
-                </a:lnTo>
-                <a:close/>
-                <a:lnTo>
-                  <a:pt x="2104740" y="60638"/>
-                </a:lnTo>
-                <a:close/>
-                <a:lnTo>
-                  <a:pt x="2109864" y="59831"/>
-                </a:lnTo>
-                <a:close/>
-                <a:lnTo>
-                  <a:pt x="2114990" y="59025"/>
-                </a:lnTo>
-                <a:close/>
-                <a:lnTo>
-                  <a:pt x="2120116" y="58219"/>
-                </a:lnTo>
-                <a:close/>
-                <a:lnTo>
-                  <a:pt x="2125242" y="57415"/>
-                </a:lnTo>
-                <a:close/>
-                <a:lnTo>
-                  <a:pt x="2130368" y="56610"/>
-                </a:lnTo>
-                <a:close/>
-                <a:lnTo>
-                  <a:pt x="2135494" y="55807"/>
-                </a:lnTo>
-                <a:close/>
-                <a:lnTo>
-                  <a:pt x="2140619" y="55004"/>
-                </a:lnTo>
-                <a:close/>
-                <a:lnTo>
-                  <a:pt x="2145744" y="54203"/>
-                </a:lnTo>
-                <a:close/>
-                <a:lnTo>
-                  <a:pt x="2150868" y="53403"/>
-                </a:lnTo>
-                <a:close/>
-                <a:lnTo>
-                  <a:pt x="2155993" y="52605"/>
-                </a:lnTo>
-                <a:close/>
-                <a:lnTo>
-                  <a:pt x="2161118" y="51809"/>
-                </a:lnTo>
-                <a:close/>
-                <a:lnTo>
-                  <a:pt x="2166243" y="51015"/>
-                </a:lnTo>
-                <a:close/>
-                <a:lnTo>
-                  <a:pt x="2171369" y="50224"/>
-                </a:lnTo>
-                <a:close/>
-                <a:lnTo>
-                  <a:pt x="2176495" y="49435"/>
-                </a:lnTo>
-                <a:close/>
-                <a:lnTo>
-                  <a:pt x="2181622" y="48648"/>
-                </a:lnTo>
-                <a:close/>
-                <a:lnTo>
-                  <a:pt x="2186747" y="47863"/>
-                </a:lnTo>
-                <a:close/>
-                <a:lnTo>
-                  <a:pt x="2191872" y="47080"/>
-                </a:lnTo>
-                <a:close/>
-                <a:lnTo>
-                  <a:pt x="2196995" y="46297"/>
-                </a:lnTo>
-                <a:close/>
-                <a:lnTo>
-                  <a:pt x="2202116" y="45516"/>
-                </a:lnTo>
-                <a:close/>
-                <a:lnTo>
-                  <a:pt x="2207236" y="44735"/>
-                </a:lnTo>
-                <a:close/>
-                <a:lnTo>
-                  <a:pt x="2212354" y="43955"/>
-                </a:lnTo>
-                <a:close/>
-                <a:lnTo>
-                  <a:pt x="2217471" y="43175"/>
-                </a:lnTo>
-                <a:close/>
-                <a:lnTo>
-                  <a:pt x="2222588" y="42396"/>
-                </a:lnTo>
-                <a:close/>
-                <a:lnTo>
-                  <a:pt x="2227705" y="41618"/>
-                </a:lnTo>
-                <a:close/>
-                <a:lnTo>
-                  <a:pt x="2232824" y="40840"/>
-                </a:lnTo>
-                <a:close/>
-                <a:lnTo>
-                  <a:pt x="2237944" y="40063"/>
-                </a:lnTo>
-                <a:close/>
-                <a:lnTo>
-                  <a:pt x="2243066" y="39287"/>
-                </a:lnTo>
-                <a:close/>
-                <a:lnTo>
-                  <a:pt x="2248190" y="38512"/>
-                </a:lnTo>
-                <a:close/>
-                <a:lnTo>
-                  <a:pt x="2253315" y="37738"/>
-                </a:lnTo>
-                <a:close/>
-                <a:lnTo>
-                  <a:pt x="2258441" y="36966"/>
-                </a:lnTo>
-                <a:close/>
-                <a:lnTo>
-                  <a:pt x="2263568" y="36196"/>
-                </a:lnTo>
-                <a:close/>
-                <a:lnTo>
-                  <a:pt x="2268695" y="35429"/>
-                </a:lnTo>
-                <a:close/>
-                <a:lnTo>
-                  <a:pt x="2273822" y="34663"/>
-                </a:lnTo>
-                <a:close/>
-                <a:lnTo>
-                  <a:pt x="2278949" y="33901"/>
-                </a:lnTo>
-                <a:close/>
-                <a:lnTo>
-                  <a:pt x="2284075" y="33140"/>
-                </a:lnTo>
-                <a:close/>
-                <a:lnTo>
-                  <a:pt x="2289201" y="32381"/>
-                </a:lnTo>
-                <a:close/>
-                <a:lnTo>
-                  <a:pt x="2294326" y="31624"/>
-                </a:lnTo>
-                <a:close/>
-                <a:lnTo>
-                  <a:pt x="2299449" y="30868"/>
-                </a:lnTo>
-                <a:close/>
-                <a:lnTo>
-                  <a:pt x="2304571" y="30112"/>
-                </a:lnTo>
-                <a:close/>
-                <a:lnTo>
-                  <a:pt x="2309690" y="29358"/>
-                </a:lnTo>
-                <a:close/>
-                <a:lnTo>
-                  <a:pt x="2314809" y="28604"/>
-                </a:lnTo>
-                <a:close/>
-                <a:lnTo>
-                  <a:pt x="2319926" y="27850"/>
-                </a:lnTo>
-                <a:close/>
-                <a:lnTo>
-                  <a:pt x="2325043" y="27098"/>
-                </a:lnTo>
-                <a:close/>
-                <a:lnTo>
-                  <a:pt x="2330160" y="26346"/>
-                </a:lnTo>
-                <a:close/>
-                <a:lnTo>
-                  <a:pt x="2335279" y="25596"/>
-                </a:lnTo>
-                <a:close/>
-                <a:lnTo>
-                  <a:pt x="2340398" y="24846"/>
-                </a:lnTo>
-                <a:close/>
-                <a:lnTo>
-                  <a:pt x="2345520" y="24098"/>
-                </a:lnTo>
-                <a:close/>
-                <a:lnTo>
-                  <a:pt x="2350644" y="23351"/>
-                </a:lnTo>
-                <a:close/>
-                <a:lnTo>
-                  <a:pt x="2355769" y="22605"/>
-                </a:lnTo>
-                <a:close/>
-                <a:lnTo>
-                  <a:pt x="2360895" y="21860"/>
-                </a:lnTo>
-                <a:close/>
-                <a:lnTo>
-                  <a:pt x="2366021" y="21115"/>
-                </a:lnTo>
-                <a:close/>
-                <a:lnTo>
-                  <a:pt x="2371147" y="20371"/>
-                </a:lnTo>
-                <a:close/>
-                <a:lnTo>
-                  <a:pt x="2376273" y="19628"/>
-                </a:lnTo>
-                <a:close/>
-                <a:lnTo>
-                  <a:pt x="2381399" y="18885"/>
-                </a:lnTo>
-                <a:close/>
-                <a:lnTo>
-                  <a:pt x="2386523" y="18143"/>
-                </a:lnTo>
-                <a:close/>
-                <a:lnTo>
-                  <a:pt x="2391648" y="17402"/>
-                </a:lnTo>
-                <a:close/>
-                <a:lnTo>
-                  <a:pt x="2396773" y="16663"/>
-                </a:lnTo>
-                <a:close/>
-                <a:lnTo>
-                  <a:pt x="2401897" y="15926"/>
-                </a:lnTo>
-                <a:close/>
-                <a:lnTo>
-                  <a:pt x="2407022" y="15192"/>
-                </a:lnTo>
-                <a:close/>
-                <a:lnTo>
-                  <a:pt x="2412148" y="14460"/>
-                </a:lnTo>
-                <a:close/>
-                <a:lnTo>
-                  <a:pt x="2417274" y="13732"/>
-                </a:lnTo>
-                <a:close/>
-                <a:lnTo>
-                  <a:pt x="2422400" y="13005"/>
-                </a:lnTo>
-                <a:close/>
-                <a:lnTo>
-                  <a:pt x="2427526" y="12280"/>
-                </a:lnTo>
-                <a:close/>
-                <a:lnTo>
-                  <a:pt x="2432651" y="11557"/>
-                </a:lnTo>
-                <a:close/>
-                <a:lnTo>
-                  <a:pt x="2437775" y="10833"/>
-                </a:lnTo>
-                <a:close/>
-                <a:lnTo>
-                  <a:pt x="2442898" y="10110"/>
-                </a:lnTo>
-                <a:close/>
-                <a:lnTo>
-                  <a:pt x="2448019" y="9385"/>
-                </a:lnTo>
-                <a:close/>
-                <a:lnTo>
-                  <a:pt x="2453139" y="8660"/>
-                </a:lnTo>
-                <a:close/>
-                <a:lnTo>
-                  <a:pt x="2458257" y="7934"/>
-                </a:lnTo>
-                <a:close/>
-                <a:lnTo>
-                  <a:pt x="2463375" y="7208"/>
-                </a:lnTo>
-                <a:close/>
-                <a:lnTo>
-                  <a:pt x="2468492" y="6483"/>
-                </a:lnTo>
-                <a:close/>
-                <a:lnTo>
-                  <a:pt x="2473609" y="5757"/>
-                </a:lnTo>
-                <a:close/>
-                <a:lnTo>
-                  <a:pt x="2478727" y="5032"/>
-                </a:lnTo>
-                <a:close/>
-                <a:lnTo>
-                  <a:pt x="2483846" y="4308"/>
-                </a:lnTo>
-                <a:close/>
-                <a:lnTo>
-                  <a:pt x="2488965" y="3585"/>
-                </a:lnTo>
-                <a:close/>
-                <a:lnTo>
-                  <a:pt x="2494087" y="2864"/>
-                </a:lnTo>
-                <a:close/>
-                <a:lnTo>
-                  <a:pt x="2499211" y="2145"/>
-                </a:lnTo>
-                <a:close/>
-                <a:lnTo>
-                  <a:pt x="2504338" y="1427"/>
-                </a:lnTo>
-                <a:close/>
-                <a:lnTo>
-                  <a:pt x="2509467" y="712"/>
-                </a:lnTo>
-                <a:close/>
-                <a:lnTo>
-                  <a:pt x="2514600" y="0"/>
+                  <a:pt x="14" y="1877770"/>
+                </a:lnTo>
+                <a:close/>
+                <a:lnTo>
+                  <a:pt x="48" y="1874548"/>
+                </a:lnTo>
+                <a:close/>
+                <a:lnTo>
+                  <a:pt x="103" y="1871321"/>
+                </a:lnTo>
+                <a:close/>
+                <a:lnTo>
+                  <a:pt x="178" y="1868089"/>
+                </a:lnTo>
+                <a:close/>
+                <a:lnTo>
+                  <a:pt x="274" y="1864852"/>
+                </a:lnTo>
+                <a:close/>
+                <a:lnTo>
+                  <a:pt x="390" y="1861611"/>
+                </a:lnTo>
+                <a:close/>
+                <a:lnTo>
+                  <a:pt x="527" y="1858366"/>
+                </a:lnTo>
+                <a:close/>
+                <a:lnTo>
+                  <a:pt x="685" y="1855118"/>
+                </a:lnTo>
+                <a:close/>
+                <a:lnTo>
+                  <a:pt x="862" y="1851865"/>
+                </a:lnTo>
+                <a:close/>
+                <a:lnTo>
+                  <a:pt x="1060" y="1848610"/>
+                </a:lnTo>
+                <a:close/>
+                <a:lnTo>
+                  <a:pt x="1279" y="1845352"/>
+                </a:lnTo>
+                <a:close/>
+                <a:lnTo>
+                  <a:pt x="1517" y="1842091"/>
+                </a:lnTo>
+                <a:close/>
+                <a:lnTo>
+                  <a:pt x="1776" y="1838828"/>
+                </a:lnTo>
+                <a:close/>
+                <a:lnTo>
+                  <a:pt x="2055" y="1835562"/>
+                </a:lnTo>
+                <a:close/>
+                <a:lnTo>
+                  <a:pt x="2354" y="1832295"/>
+                </a:lnTo>
+                <a:close/>
+                <a:lnTo>
+                  <a:pt x="2673" y="1829027"/>
+                </a:lnTo>
+                <a:close/>
+                <a:lnTo>
+                  <a:pt x="3013" y="1825757"/>
+                </a:lnTo>
+                <a:close/>
+                <a:lnTo>
+                  <a:pt x="3372" y="1822487"/>
+                </a:lnTo>
+                <a:close/>
+                <a:lnTo>
+                  <a:pt x="3752" y="1819216"/>
+                </a:lnTo>
+                <a:close/>
+                <a:lnTo>
+                  <a:pt x="4151" y="1815944"/>
+                </a:lnTo>
+                <a:close/>
+                <a:lnTo>
+                  <a:pt x="4570" y="1812673"/>
+                </a:lnTo>
+                <a:close/>
+                <a:lnTo>
+                  <a:pt x="5009" y="1809402"/>
+                </a:lnTo>
+                <a:close/>
+                <a:lnTo>
+                  <a:pt x="5468" y="1806131"/>
+                </a:lnTo>
+                <a:close/>
+                <a:lnTo>
+                  <a:pt x="5947" y="1802861"/>
+                </a:lnTo>
+                <a:close/>
+                <a:lnTo>
+                  <a:pt x="6446" y="1799593"/>
+                </a:lnTo>
+                <a:close/>
+                <a:lnTo>
+                  <a:pt x="6964" y="1796325"/>
+                </a:lnTo>
+                <a:close/>
+                <a:lnTo>
+                  <a:pt x="7502" y="1793060"/>
+                </a:lnTo>
+                <a:close/>
+                <a:lnTo>
+                  <a:pt x="8060" y="1789797"/>
+                </a:lnTo>
+                <a:close/>
+                <a:lnTo>
+                  <a:pt x="8637" y="1786535"/>
+                </a:lnTo>
+                <a:close/>
+                <a:lnTo>
+                  <a:pt x="9234" y="1783277"/>
+                </a:lnTo>
+                <a:close/>
+                <a:lnTo>
+                  <a:pt x="9851" y="1780021"/>
+                </a:lnTo>
+                <a:close/>
+                <a:lnTo>
+                  <a:pt x="10487" y="1776769"/>
+                </a:lnTo>
+                <a:close/>
+                <a:lnTo>
+                  <a:pt x="11142" y="1773519"/>
+                </a:lnTo>
+                <a:close/>
+                <a:lnTo>
+                  <a:pt x="11817" y="1770274"/>
+                </a:lnTo>
+                <a:close/>
+                <a:lnTo>
+                  <a:pt x="12511" y="1767033"/>
+                </a:lnTo>
+                <a:close/>
+                <a:lnTo>
+                  <a:pt x="13225" y="1763796"/>
+                </a:lnTo>
+                <a:close/>
+                <a:lnTo>
+                  <a:pt x="13958" y="1760563"/>
+                </a:lnTo>
+                <a:close/>
+                <a:lnTo>
+                  <a:pt x="14710" y="1757336"/>
+                </a:lnTo>
+                <a:close/>
+                <a:lnTo>
+                  <a:pt x="15482" y="1754113"/>
+                </a:lnTo>
+                <a:close/>
+                <a:lnTo>
+                  <a:pt x="16272" y="1750896"/>
+                </a:lnTo>
+                <a:close/>
+                <a:lnTo>
+                  <a:pt x="17082" y="1747685"/>
+                </a:lnTo>
+                <a:close/>
+                <a:lnTo>
+                  <a:pt x="17911" y="1744480"/>
+                </a:lnTo>
+                <a:close/>
+                <a:lnTo>
+                  <a:pt x="18759" y="1741281"/>
+                </a:lnTo>
+                <a:close/>
+                <a:lnTo>
+                  <a:pt x="19627" y="1738089"/>
+                </a:lnTo>
+                <a:close/>
+                <a:lnTo>
+                  <a:pt x="20513" y="1734904"/>
+                </a:lnTo>
+                <a:close/>
+                <a:lnTo>
+                  <a:pt x="21418" y="1731726"/>
+                </a:lnTo>
+                <a:close/>
+                <a:lnTo>
+                  <a:pt x="22342" y="1728555"/>
+                </a:lnTo>
+                <a:close/>
+                <a:lnTo>
+                  <a:pt x="23285" y="1725391"/>
+                </a:lnTo>
+                <a:close/>
+                <a:lnTo>
+                  <a:pt x="24248" y="1722233"/>
+                </a:lnTo>
+                <a:close/>
+                <a:lnTo>
+                  <a:pt x="25230" y="1719081"/>
+                </a:lnTo>
+                <a:close/>
+                <a:lnTo>
+                  <a:pt x="26232" y="1715932"/>
+                </a:lnTo>
+                <a:close/>
+                <a:lnTo>
+                  <a:pt x="27253" y="1712788"/>
+                </a:lnTo>
+                <a:close/>
+                <a:lnTo>
+                  <a:pt x="28295" y="1709646"/>
+                </a:lnTo>
+                <a:close/>
+                <a:lnTo>
+                  <a:pt x="29357" y="1706507"/>
+                </a:lnTo>
+                <a:close/>
+                <a:lnTo>
+                  <a:pt x="30439" y="1703369"/>
+                </a:lnTo>
+                <a:close/>
+                <a:lnTo>
+                  <a:pt x="31542" y="1700232"/>
+                </a:lnTo>
+                <a:close/>
+                <a:lnTo>
+                  <a:pt x="32666" y="1697095"/>
+                </a:lnTo>
+                <a:close/>
+                <a:lnTo>
+                  <a:pt x="33811" y="1693956"/>
+                </a:lnTo>
+                <a:close/>
+                <a:lnTo>
+                  <a:pt x="34977" y="1690816"/>
+                </a:lnTo>
+                <a:close/>
+                <a:lnTo>
+                  <a:pt x="36164" y="1687674"/>
+                </a:lnTo>
+                <a:close/>
+                <a:lnTo>
+                  <a:pt x="37373" y="1684528"/>
+                </a:lnTo>
+                <a:close/>
+                <a:lnTo>
+                  <a:pt x="38604" y="1681379"/>
+                </a:lnTo>
+                <a:close/>
+                <a:lnTo>
+                  <a:pt x="39857" y="1678225"/>
+                </a:lnTo>
+                <a:close/>
+                <a:lnTo>
+                  <a:pt x="41132" y="1675065"/>
+                </a:lnTo>
+                <a:close/>
+                <a:lnTo>
+                  <a:pt x="42429" y="1671899"/>
+                </a:lnTo>
+                <a:close/>
+                <a:lnTo>
+                  <a:pt x="43748" y="1668726"/>
+                </a:lnTo>
+                <a:close/>
+                <a:lnTo>
+                  <a:pt x="45091" y="1665545"/>
+                </a:lnTo>
+                <a:close/>
+                <a:lnTo>
+                  <a:pt x="46456" y="1662355"/>
+                </a:lnTo>
+                <a:close/>
+                <a:lnTo>
+                  <a:pt x="47844" y="1659157"/>
+                </a:lnTo>
+                <a:close/>
+                <a:lnTo>
+                  <a:pt x="49256" y="1655948"/>
+                </a:lnTo>
+                <a:close/>
+                <a:lnTo>
+                  <a:pt x="50690" y="1652729"/>
+                </a:lnTo>
+                <a:close/>
+                <a:lnTo>
+                  <a:pt x="52148" y="1649502"/>
+                </a:lnTo>
+                <a:close/>
+                <a:lnTo>
+                  <a:pt x="53628" y="1646267"/>
+                </a:lnTo>
+                <a:close/>
+                <a:lnTo>
+                  <a:pt x="55130" y="1643025"/>
+                </a:lnTo>
+                <a:close/>
+                <a:lnTo>
+                  <a:pt x="56654" y="1639776"/>
+                </a:lnTo>
+                <a:close/>
+                <a:lnTo>
+                  <a:pt x="58200" y="1636522"/>
+                </a:lnTo>
+                <a:close/>
+                <a:lnTo>
+                  <a:pt x="59767" y="1633263"/>
+                </a:lnTo>
+                <a:close/>
+                <a:lnTo>
+                  <a:pt x="61356" y="1629999"/>
+                </a:lnTo>
+                <a:close/>
+                <a:lnTo>
+                  <a:pt x="62965" y="1626732"/>
+                </a:lnTo>
+                <a:close/>
+                <a:lnTo>
+                  <a:pt x="64595" y="1623463"/>
+                </a:lnTo>
+                <a:close/>
+                <a:lnTo>
+                  <a:pt x="66245" y="1620191"/>
+                </a:lnTo>
+                <a:close/>
+                <a:lnTo>
+                  <a:pt x="67916" y="1616919"/>
+                </a:lnTo>
+                <a:close/>
+                <a:lnTo>
+                  <a:pt x="69606" y="1613646"/>
+                </a:lnTo>
+                <a:close/>
+                <a:lnTo>
+                  <a:pt x="71316" y="1610374"/>
+                </a:lnTo>
+                <a:close/>
+                <a:lnTo>
+                  <a:pt x="73045" y="1607103"/>
+                </a:lnTo>
+                <a:close/>
+                <a:lnTo>
+                  <a:pt x="74793" y="1603834"/>
+                </a:lnTo>
+                <a:close/>
+                <a:lnTo>
+                  <a:pt x="76560" y="1600567"/>
+                </a:lnTo>
+                <a:close/>
+                <a:lnTo>
+                  <a:pt x="78345" y="1597305"/>
+                </a:lnTo>
+                <a:close/>
+                <a:lnTo>
+                  <a:pt x="80149" y="1594046"/>
+                </a:lnTo>
+                <a:close/>
+                <a:lnTo>
+                  <a:pt x="81971" y="1590793"/>
+                </a:lnTo>
+                <a:close/>
+                <a:lnTo>
+                  <a:pt x="83810" y="1587545"/>
+                </a:lnTo>
+                <a:close/>
+                <a:lnTo>
+                  <a:pt x="85666" y="1584304"/>
+                </a:lnTo>
+                <a:close/>
+                <a:lnTo>
+                  <a:pt x="87540" y="1581070"/>
+                </a:lnTo>
+                <a:close/>
+                <a:lnTo>
+                  <a:pt x="89431" y="1577843"/>
+                </a:lnTo>
+                <a:close/>
+                <a:lnTo>
+                  <a:pt x="91340" y="1574623"/>
+                </a:lnTo>
+                <a:close/>
+                <a:lnTo>
+                  <a:pt x="93266" y="1571409"/>
+                </a:lnTo>
+                <a:close/>
+                <a:lnTo>
+                  <a:pt x="95210" y="1568201"/>
+                </a:lnTo>
+                <a:close/>
+                <a:lnTo>
+                  <a:pt x="97173" y="1564997"/>
+                </a:lnTo>
+                <a:close/>
+                <a:lnTo>
+                  <a:pt x="99153" y="1561798"/>
+                </a:lnTo>
+                <a:close/>
+                <a:lnTo>
+                  <a:pt x="101153" y="1558603"/>
+                </a:lnTo>
+                <a:close/>
+                <a:lnTo>
+                  <a:pt x="103171" y="1555411"/>
+                </a:lnTo>
+                <a:close/>
+                <a:lnTo>
+                  <a:pt x="105208" y="1552223"/>
+                </a:lnTo>
+                <a:close/>
+                <a:lnTo>
+                  <a:pt x="107264" y="1549037"/>
+                </a:lnTo>
+                <a:close/>
+                <a:lnTo>
+                  <a:pt x="109339" y="1545853"/>
+                </a:lnTo>
+                <a:close/>
+                <a:lnTo>
+                  <a:pt x="111435" y="1542670"/>
+                </a:lnTo>
+                <a:close/>
+                <a:lnTo>
+                  <a:pt x="113550" y="1539488"/>
+                </a:lnTo>
+                <a:close/>
+                <a:lnTo>
+                  <a:pt x="115685" y="1536307"/>
+                </a:lnTo>
+                <a:close/>
+                <a:lnTo>
+                  <a:pt x="117840" y="1533126"/>
+                </a:lnTo>
+                <a:close/>
+                <a:lnTo>
+                  <a:pt x="120016" y="1529944"/>
+                </a:lnTo>
+                <a:close/>
+                <a:lnTo>
+                  <a:pt x="122213" y="1526761"/>
+                </a:lnTo>
+                <a:close/>
+                <a:lnTo>
+                  <a:pt x="124430" y="1523576"/>
+                </a:lnTo>
+                <a:close/>
+                <a:lnTo>
+                  <a:pt x="126669" y="1520389"/>
+                </a:lnTo>
+                <a:close/>
+                <a:lnTo>
+                  <a:pt x="128929" y="1517200"/>
+                </a:lnTo>
+                <a:close/>
+                <a:lnTo>
+                  <a:pt x="131211" y="1514008"/>
+                </a:lnTo>
+                <a:close/>
+                <a:lnTo>
+                  <a:pt x="133514" y="1510812"/>
+                </a:lnTo>
+                <a:close/>
+                <a:lnTo>
+                  <a:pt x="135839" y="1507612"/>
+                </a:lnTo>
+                <a:close/>
+                <a:lnTo>
+                  <a:pt x="138187" y="1504408"/>
+                </a:lnTo>
+                <a:close/>
+                <a:lnTo>
+                  <a:pt x="140556" y="1501200"/>
+                </a:lnTo>
+                <a:close/>
+                <a:lnTo>
+                  <a:pt x="142946" y="1497990"/>
+                </a:lnTo>
+                <a:close/>
+                <a:lnTo>
+                  <a:pt x="145359" y="1494776"/>
+                </a:lnTo>
+                <a:close/>
+                <a:lnTo>
+                  <a:pt x="147792" y="1491560"/>
+                </a:lnTo>
+                <a:close/>
+                <a:lnTo>
+                  <a:pt x="150247" y="1488342"/>
+                </a:lnTo>
+                <a:close/>
+                <a:lnTo>
+                  <a:pt x="152723" y="1485122"/>
+                </a:lnTo>
+                <a:close/>
+                <a:lnTo>
+                  <a:pt x="155220" y="1481901"/>
+                </a:lnTo>
+                <a:close/>
+                <a:lnTo>
+                  <a:pt x="157737" y="1478679"/>
+                </a:lnTo>
+                <a:close/>
+                <a:lnTo>
+                  <a:pt x="160275" y="1475456"/>
+                </a:lnTo>
+                <a:close/>
+                <a:lnTo>
+                  <a:pt x="162834" y="1472233"/>
+                </a:lnTo>
+                <a:close/>
+                <a:lnTo>
+                  <a:pt x="165413" y="1469010"/>
+                </a:lnTo>
+                <a:close/>
+                <a:lnTo>
+                  <a:pt x="168013" y="1465788"/>
+                </a:lnTo>
+                <a:close/>
+                <a:lnTo>
+                  <a:pt x="170632" y="1462566"/>
+                </a:lnTo>
+                <a:close/>
+                <a:lnTo>
+                  <a:pt x="173272" y="1459346"/>
+                </a:lnTo>
+                <a:close/>
+                <a:lnTo>
+                  <a:pt x="175931" y="1456127"/>
+                </a:lnTo>
+                <a:close/>
+                <a:lnTo>
+                  <a:pt x="178610" y="1452910"/>
+                </a:lnTo>
+                <a:close/>
+                <a:lnTo>
+                  <a:pt x="181308" y="1449696"/>
+                </a:lnTo>
+                <a:close/>
+                <a:lnTo>
+                  <a:pt x="184026" y="1446484"/>
+                </a:lnTo>
+                <a:close/>
+                <a:lnTo>
+                  <a:pt x="186764" y="1443275"/>
+                </a:lnTo>
+                <a:close/>
+                <a:lnTo>
+                  <a:pt x="189520" y="1440070"/>
+                </a:lnTo>
+                <a:close/>
+                <a:lnTo>
+                  <a:pt x="192295" y="1436869"/>
+                </a:lnTo>
+                <a:close/>
+                <a:lnTo>
+                  <a:pt x="195089" y="1433671"/>
+                </a:lnTo>
+                <a:close/>
+                <a:lnTo>
+                  <a:pt x="197903" y="1430478"/>
+                </a:lnTo>
+                <a:close/>
+                <a:lnTo>
+                  <a:pt x="200735" y="1427288"/>
+                </a:lnTo>
+                <a:close/>
+                <a:lnTo>
+                  <a:pt x="203586" y="1424100"/>
+                </a:lnTo>
+                <a:close/>
+                <a:lnTo>
+                  <a:pt x="206456" y="1420915"/>
+                </a:lnTo>
+                <a:close/>
+                <a:lnTo>
+                  <a:pt x="209346" y="1417732"/>
+                </a:lnTo>
+                <a:close/>
+                <a:lnTo>
+                  <a:pt x="212256" y="1414550"/>
+                </a:lnTo>
+                <a:close/>
+                <a:lnTo>
+                  <a:pt x="215185" y="1411369"/>
+                </a:lnTo>
+                <a:close/>
+                <a:lnTo>
+                  <a:pt x="218134" y="1408188"/>
+                </a:lnTo>
+                <a:close/>
+                <a:lnTo>
+                  <a:pt x="221102" y="1405006"/>
+                </a:lnTo>
+                <a:close/>
+                <a:lnTo>
+                  <a:pt x="224091" y="1401824"/>
+                </a:lnTo>
+                <a:close/>
+                <a:lnTo>
+                  <a:pt x="227100" y="1398641"/>
+                </a:lnTo>
+                <a:close/>
+                <a:lnTo>
+                  <a:pt x="230129" y="1395456"/>
+                </a:lnTo>
+                <a:close/>
+                <a:lnTo>
+                  <a:pt x="233178" y="1392269"/>
+                </a:lnTo>
+                <a:close/>
+                <a:lnTo>
+                  <a:pt x="236248" y="1389078"/>
+                </a:lnTo>
+                <a:close/>
+                <a:lnTo>
+                  <a:pt x="239338" y="1385885"/>
+                </a:lnTo>
+                <a:close/>
+                <a:lnTo>
+                  <a:pt x="242449" y="1382687"/>
+                </a:lnTo>
+                <a:close/>
+                <a:lnTo>
+                  <a:pt x="245581" y="1379485"/>
+                </a:lnTo>
+                <a:close/>
+                <a:lnTo>
+                  <a:pt x="248734" y="1376279"/>
+                </a:lnTo>
+                <a:close/>
+                <a:lnTo>
+                  <a:pt x="251908" y="1373067"/>
+                </a:lnTo>
+                <a:close/>
+                <a:lnTo>
+                  <a:pt x="255103" y="1369848"/>
+                </a:lnTo>
+                <a:close/>
+                <a:lnTo>
+                  <a:pt x="258320" y="1366624"/>
+                </a:lnTo>
+                <a:close/>
+                <a:lnTo>
+                  <a:pt x="261557" y="1363392"/>
+                </a:lnTo>
+                <a:close/>
+                <a:lnTo>
+                  <a:pt x="264817" y="1360154"/>
+                </a:lnTo>
+                <a:close/>
+                <a:lnTo>
+                  <a:pt x="268098" y="1356908"/>
+                </a:lnTo>
+                <a:close/>
+                <a:lnTo>
+                  <a:pt x="271400" y="1353655"/>
+                </a:lnTo>
+                <a:close/>
+                <a:lnTo>
+                  <a:pt x="274723" y="1350396"/>
+                </a:lnTo>
+                <a:close/>
+                <a:lnTo>
+                  <a:pt x="278068" y="1347132"/>
+                </a:lnTo>
+                <a:close/>
+                <a:lnTo>
+                  <a:pt x="281434" y="1343863"/>
+                </a:lnTo>
+                <a:close/>
+                <a:lnTo>
+                  <a:pt x="284820" y="1340589"/>
+                </a:lnTo>
+                <a:close/>
+                <a:lnTo>
+                  <a:pt x="288227" y="1337312"/>
+                </a:lnTo>
+                <a:close/>
+                <a:lnTo>
+                  <a:pt x="291655" y="1334032"/>
+                </a:lnTo>
+                <a:close/>
+                <a:lnTo>
+                  <a:pt x="295104" y="1330748"/>
+                </a:lnTo>
+                <a:close/>
+                <a:lnTo>
+                  <a:pt x="298573" y="1327463"/>
+                </a:lnTo>
+                <a:close/>
+                <a:lnTo>
+                  <a:pt x="302063" y="1324177"/>
+                </a:lnTo>
+                <a:close/>
+                <a:lnTo>
+                  <a:pt x="305572" y="1320889"/>
+                </a:lnTo>
+                <a:close/>
+                <a:lnTo>
+                  <a:pt x="309102" y="1317601"/>
+                </a:lnTo>
+                <a:close/>
+                <a:lnTo>
+                  <a:pt x="312652" y="1314313"/>
+                </a:lnTo>
+                <a:close/>
+                <a:lnTo>
+                  <a:pt x="316221" y="1311026"/>
+                </a:lnTo>
+                <a:close/>
+                <a:lnTo>
+                  <a:pt x="319811" y="1307741"/>
+                </a:lnTo>
+                <a:close/>
+                <a:lnTo>
+                  <a:pt x="323420" y="1304457"/>
+                </a:lnTo>
+                <a:close/>
+                <a:lnTo>
+                  <a:pt x="327048" y="1301176"/>
+                </a:lnTo>
+                <a:close/>
+                <a:lnTo>
+                  <a:pt x="330696" y="1297898"/>
+                </a:lnTo>
+                <a:close/>
+                <a:lnTo>
+                  <a:pt x="334364" y="1294623"/>
+                </a:lnTo>
+                <a:close/>
+                <a:lnTo>
+                  <a:pt x="338050" y="1291353"/>
+                </a:lnTo>
+                <a:close/>
+                <a:lnTo>
+                  <a:pt x="341756" y="1288087"/>
+                </a:lnTo>
+                <a:close/>
+                <a:lnTo>
+                  <a:pt x="345481" y="1284827"/>
+                </a:lnTo>
+                <a:close/>
+                <a:lnTo>
+                  <a:pt x="349224" y="1281572"/>
+                </a:lnTo>
+                <a:close/>
+                <a:lnTo>
+                  <a:pt x="352987" y="1278322"/>
+                </a:lnTo>
+                <a:close/>
+                <a:lnTo>
+                  <a:pt x="356769" y="1275077"/>
+                </a:lnTo>
+                <a:close/>
+                <a:lnTo>
+                  <a:pt x="360570" y="1271837"/>
+                </a:lnTo>
+                <a:close/>
+                <a:lnTo>
+                  <a:pt x="364391" y="1268602"/>
+                </a:lnTo>
+                <a:close/>
+                <a:lnTo>
+                  <a:pt x="368231" y="1265371"/>
+                </a:lnTo>
+                <a:close/>
+                <a:lnTo>
+                  <a:pt x="372092" y="1262144"/>
+                </a:lnTo>
+                <a:close/>
+                <a:lnTo>
+                  <a:pt x="375971" y="1258921"/>
+                </a:lnTo>
+                <a:close/>
+                <a:lnTo>
+                  <a:pt x="379871" y="1255702"/>
+                </a:lnTo>
+                <a:close/>
+                <a:lnTo>
+                  <a:pt x="383791" y="1252487"/>
+                </a:lnTo>
+                <a:close/>
+                <a:lnTo>
+                  <a:pt x="387731" y="1249275"/>
+                </a:lnTo>
+                <a:close/>
+                <a:lnTo>
+                  <a:pt x="391691" y="1246067"/>
+                </a:lnTo>
+                <a:close/>
+                <a:lnTo>
+                  <a:pt x="395672" y="1242862"/>
+                </a:lnTo>
+                <a:close/>
+                <a:lnTo>
+                  <a:pt x="399673" y="1239659"/>
+                </a:lnTo>
+                <a:close/>
+                <a:lnTo>
+                  <a:pt x="403695" y="1236459"/>
+                </a:lnTo>
+                <a:close/>
+                <a:lnTo>
+                  <a:pt x="407738" y="1233262"/>
+                </a:lnTo>
+                <a:close/>
+                <a:lnTo>
+                  <a:pt x="411801" y="1230067"/>
+                </a:lnTo>
+                <a:close/>
+                <a:lnTo>
+                  <a:pt x="415885" y="1226874"/>
+                </a:lnTo>
+                <a:close/>
+                <a:lnTo>
+                  <a:pt x="419991" y="1223683"/>
+                </a:lnTo>
+                <a:close/>
+                <a:lnTo>
+                  <a:pt x="424117" y="1220494"/>
+                </a:lnTo>
+                <a:close/>
+                <a:lnTo>
+                  <a:pt x="428265" y="1217306"/>
+                </a:lnTo>
+                <a:close/>
+                <a:lnTo>
+                  <a:pt x="432435" y="1214119"/>
+                </a:lnTo>
+                <a:close/>
+                <a:lnTo>
+                  <a:pt x="436625" y="1210934"/>
+                </a:lnTo>
+                <a:close/>
+                <a:lnTo>
+                  <a:pt x="440838" y="1207750"/>
+                </a:lnTo>
+                <a:close/>
+                <a:lnTo>
+                  <a:pt x="445071" y="1204566"/>
+                </a:lnTo>
+                <a:close/>
+                <a:lnTo>
+                  <a:pt x="449326" y="1201383"/>
+                </a:lnTo>
+                <a:close/>
+                <a:lnTo>
+                  <a:pt x="453603" y="1198200"/>
+                </a:lnTo>
+                <a:close/>
+                <a:lnTo>
+                  <a:pt x="457900" y="1195017"/>
+                </a:lnTo>
+                <a:close/>
+                <a:lnTo>
+                  <a:pt x="462218" y="1191834"/>
+                </a:lnTo>
+                <a:close/>
+                <a:lnTo>
+                  <a:pt x="466556" y="1188650"/>
+                </a:lnTo>
+                <a:close/>
+                <a:lnTo>
+                  <a:pt x="470916" y="1185465"/>
+                </a:lnTo>
+                <a:close/>
+                <a:lnTo>
+                  <a:pt x="475296" y="1182279"/>
+                </a:lnTo>
+                <a:close/>
+                <a:lnTo>
+                  <a:pt x="479696" y="1179092"/>
+                </a:lnTo>
+                <a:close/>
+                <a:lnTo>
+                  <a:pt x="484117" y="1175903"/>
+                </a:lnTo>
+                <a:close/>
+                <a:lnTo>
+                  <a:pt x="488558" y="1172712"/>
+                </a:lnTo>
+                <a:close/>
+                <a:lnTo>
+                  <a:pt x="493019" y="1169519"/>
+                </a:lnTo>
+                <a:close/>
+                <a:lnTo>
+                  <a:pt x="497500" y="1166324"/>
+                </a:lnTo>
+                <a:close/>
+                <a:lnTo>
+                  <a:pt x="502000" y="1163127"/>
+                </a:lnTo>
+                <a:close/>
+                <a:lnTo>
+                  <a:pt x="506521" y="1159926"/>
+                </a:lnTo>
+                <a:close/>
+                <a:lnTo>
+                  <a:pt x="511061" y="1156722"/>
+                </a:lnTo>
+                <a:close/>
+                <a:lnTo>
+                  <a:pt x="515620" y="1153515"/>
+                </a:lnTo>
+                <a:close/>
+                <a:lnTo>
+                  <a:pt x="520199" y="1150305"/>
+                </a:lnTo>
+                <a:close/>
+                <a:lnTo>
+                  <a:pt x="524797" y="1147090"/>
+                </a:lnTo>
+                <a:close/>
+                <a:lnTo>
+                  <a:pt x="529414" y="1143871"/>
+                </a:lnTo>
+                <a:close/>
+                <a:lnTo>
+                  <a:pt x="534050" y="1140648"/>
+                </a:lnTo>
+                <a:close/>
+                <a:lnTo>
+                  <a:pt x="538705" y="1137421"/>
+                </a:lnTo>
+                <a:close/>
+                <a:lnTo>
+                  <a:pt x="543379" y="1134189"/>
+                </a:lnTo>
+                <a:close/>
+                <a:lnTo>
+                  <a:pt x="548072" y="1130952"/>
+                </a:lnTo>
+                <a:close/>
+                <a:lnTo>
+                  <a:pt x="552784" y="1127712"/>
+                </a:lnTo>
+                <a:close/>
+                <a:lnTo>
+                  <a:pt x="557516" y="1124468"/>
+                </a:lnTo>
+                <a:close/>
+                <a:lnTo>
+                  <a:pt x="562266" y="1121221"/>
+                </a:lnTo>
+                <a:close/>
+                <a:lnTo>
+                  <a:pt x="567037" y="1117971"/>
+                </a:lnTo>
+                <a:close/>
+                <a:lnTo>
+                  <a:pt x="571827" y="1114718"/>
+                </a:lnTo>
+                <a:close/>
+                <a:lnTo>
+                  <a:pt x="576637" y="1111463"/>
+                </a:lnTo>
+                <a:close/>
+                <a:lnTo>
+                  <a:pt x="581467" y="1108205"/>
+                </a:lnTo>
+                <a:close/>
+                <a:lnTo>
+                  <a:pt x="586318" y="1104946"/>
+                </a:lnTo>
+                <a:close/>
+                <a:lnTo>
+                  <a:pt x="591188" y="1101685"/>
+                </a:lnTo>
+                <a:close/>
+                <a:lnTo>
+                  <a:pt x="596079" y="1098423"/>
+                </a:lnTo>
+                <a:close/>
+                <a:lnTo>
+                  <a:pt x="600991" y="1095160"/>
+                </a:lnTo>
+                <a:close/>
+                <a:lnTo>
+                  <a:pt x="605923" y="1091897"/>
+                </a:lnTo>
+                <a:close/>
+                <a:lnTo>
+                  <a:pt x="610876" y="1088633"/>
+                </a:lnTo>
+                <a:close/>
+                <a:lnTo>
+                  <a:pt x="615850" y="1085369"/>
+                </a:lnTo>
+                <a:close/>
+                <a:lnTo>
+                  <a:pt x="620846" y="1082106"/>
+                </a:lnTo>
+                <a:close/>
+                <a:lnTo>
+                  <a:pt x="625862" y="1078843"/>
+                </a:lnTo>
+                <a:close/>
+                <a:lnTo>
+                  <a:pt x="630900" y="1075581"/>
+                </a:lnTo>
+                <a:close/>
+                <a:lnTo>
+                  <a:pt x="635960" y="1072321"/>
+                </a:lnTo>
+                <a:close/>
+                <a:lnTo>
+                  <a:pt x="641041" y="1069062"/>
+                </a:lnTo>
+                <a:close/>
+                <a:lnTo>
+                  <a:pt x="646144" y="1065804"/>
+                </a:lnTo>
+                <a:close/>
+                <a:lnTo>
+                  <a:pt x="651269" y="1062549"/>
+                </a:lnTo>
+                <a:close/>
+                <a:lnTo>
+                  <a:pt x="656416" y="1059296"/>
+                </a:lnTo>
+                <a:close/>
+                <a:lnTo>
+                  <a:pt x="661585" y="1056045"/>
+                </a:lnTo>
+                <a:close/>
+                <a:lnTo>
+                  <a:pt x="666775" y="1052797"/>
+                </a:lnTo>
+                <a:close/>
+                <a:lnTo>
+                  <a:pt x="671986" y="1049550"/>
+                </a:lnTo>
+                <a:close/>
+                <a:lnTo>
+                  <a:pt x="677218" y="1046305"/>
+                </a:lnTo>
+                <a:close/>
+                <a:lnTo>
+                  <a:pt x="682472" y="1043063"/>
+                </a:lnTo>
+                <a:close/>
+                <a:lnTo>
+                  <a:pt x="687746" y="1039822"/>
+                </a:lnTo>
+                <a:close/>
+                <a:lnTo>
+                  <a:pt x="693040" y="1036583"/>
+                </a:lnTo>
+                <a:close/>
+                <a:lnTo>
+                  <a:pt x="698354" y="1033345"/>
+                </a:lnTo>
+                <a:close/>
+                <a:lnTo>
+                  <a:pt x="703689" y="1030109"/>
+                </a:lnTo>
+                <a:close/>
+                <a:lnTo>
+                  <a:pt x="709043" y="1026875"/>
+                </a:lnTo>
+                <a:close/>
+                <a:lnTo>
+                  <a:pt x="714417" y="1023643"/>
+                </a:lnTo>
+                <a:close/>
+                <a:lnTo>
+                  <a:pt x="719810" y="1020412"/>
+                </a:lnTo>
+                <a:close/>
+                <a:lnTo>
+                  <a:pt x="725222" y="1017182"/>
+                </a:lnTo>
+                <a:close/>
+                <a:lnTo>
+                  <a:pt x="730653" y="1013954"/>
+                </a:lnTo>
+                <a:close/>
+                <a:lnTo>
+                  <a:pt x="736103" y="1010727"/>
+                </a:lnTo>
+                <a:close/>
+                <a:lnTo>
+                  <a:pt x="741571" y="1007501"/>
+                </a:lnTo>
+                <a:close/>
+                <a:lnTo>
+                  <a:pt x="747058" y="1004277"/>
+                </a:lnTo>
+                <a:close/>
+                <a:lnTo>
+                  <a:pt x="752563" y="1001053"/>
+                </a:lnTo>
+                <a:close/>
+                <a:lnTo>
+                  <a:pt x="758085" y="997831"/>
+                </a:lnTo>
+                <a:close/>
+                <a:lnTo>
+                  <a:pt x="763625" y="994610"/>
+                </a:lnTo>
+                <a:close/>
+                <a:lnTo>
+                  <a:pt x="769183" y="991389"/>
+                </a:lnTo>
+                <a:close/>
+                <a:lnTo>
+                  <a:pt x="774758" y="988170"/>
+                </a:lnTo>
+                <a:close/>
+                <a:lnTo>
+                  <a:pt x="780349" y="984951"/>
+                </a:lnTo>
+                <a:close/>
+                <a:lnTo>
+                  <a:pt x="785959" y="981733"/>
+                </a:lnTo>
+                <a:close/>
+                <a:lnTo>
+                  <a:pt x="791586" y="978516"/>
+                </a:lnTo>
+                <a:close/>
+                <a:lnTo>
+                  <a:pt x="797232" y="975299"/>
+                </a:lnTo>
+                <a:close/>
+                <a:lnTo>
+                  <a:pt x="802895" y="972083"/>
+                </a:lnTo>
+                <a:close/>
+                <a:lnTo>
+                  <a:pt x="808577" y="968868"/>
+                </a:lnTo>
+                <a:close/>
+                <a:lnTo>
+                  <a:pt x="814278" y="965653"/>
+                </a:lnTo>
+                <a:close/>
+                <a:lnTo>
+                  <a:pt x="819999" y="962438"/>
+                </a:lnTo>
+                <a:close/>
+                <a:lnTo>
+                  <a:pt x="825738" y="959224"/>
+                </a:lnTo>
+                <a:close/>
+                <a:lnTo>
+                  <a:pt x="831497" y="956010"/>
+                </a:lnTo>
+                <a:close/>
+                <a:lnTo>
+                  <a:pt x="837277" y="952796"/>
+                </a:lnTo>
+                <a:close/>
+                <a:lnTo>
+                  <a:pt x="843076" y="949583"/>
+                </a:lnTo>
+                <a:close/>
+                <a:lnTo>
+                  <a:pt x="848896" y="946369"/>
+                </a:lnTo>
+                <a:close/>
+                <a:lnTo>
+                  <a:pt x="854736" y="943156"/>
+                </a:lnTo>
+                <a:close/>
+                <a:lnTo>
+                  <a:pt x="860598" y="939943"/>
+                </a:lnTo>
+                <a:close/>
+                <a:lnTo>
+                  <a:pt x="866481" y="936729"/>
+                </a:lnTo>
+                <a:close/>
+                <a:lnTo>
+                  <a:pt x="872385" y="933516"/>
+                </a:lnTo>
+                <a:close/>
+                <a:lnTo>
+                  <a:pt x="878311" y="930302"/>
+                </a:lnTo>
+                <a:close/>
+                <a:lnTo>
+                  <a:pt x="884259" y="927088"/>
+                </a:lnTo>
+                <a:close/>
+                <a:lnTo>
+                  <a:pt x="890230" y="923874"/>
+                </a:lnTo>
+                <a:close/>
+                <a:lnTo>
+                  <a:pt x="896223" y="920659"/>
+                </a:lnTo>
+                <a:close/>
+                <a:lnTo>
+                  <a:pt x="902239" y="917444"/>
+                </a:lnTo>
+                <a:close/>
+                <a:lnTo>
+                  <a:pt x="908279" y="914229"/>
+                </a:lnTo>
+                <a:close/>
+                <a:lnTo>
+                  <a:pt x="914341" y="911013"/>
+                </a:lnTo>
+                <a:close/>
+                <a:lnTo>
+                  <a:pt x="920426" y="907797"/>
+                </a:lnTo>
+                <a:close/>
+                <a:lnTo>
+                  <a:pt x="926535" y="904580"/>
+                </a:lnTo>
+                <a:close/>
+                <a:lnTo>
+                  <a:pt x="932665" y="901364"/>
+                </a:lnTo>
+                <a:close/>
+                <a:lnTo>
+                  <a:pt x="938819" y="898147"/>
+                </a:lnTo>
+                <a:close/>
+                <a:lnTo>
+                  <a:pt x="944994" y="894929"/>
+                </a:lnTo>
+                <a:close/>
+                <a:lnTo>
+                  <a:pt x="951192" y="891712"/>
+                </a:lnTo>
+                <a:close/>
+                <a:lnTo>
+                  <a:pt x="957411" y="888495"/>
+                </a:lnTo>
+                <a:close/>
+                <a:lnTo>
+                  <a:pt x="963653" y="885278"/>
+                </a:lnTo>
+                <a:close/>
+                <a:lnTo>
+                  <a:pt x="969915" y="882061"/>
+                </a:lnTo>
+                <a:close/>
+                <a:lnTo>
+                  <a:pt x="976199" y="878845"/>
+                </a:lnTo>
+                <a:close/>
+                <a:lnTo>
+                  <a:pt x="982504" y="875628"/>
+                </a:lnTo>
+                <a:close/>
+                <a:lnTo>
+                  <a:pt x="988830" y="872413"/>
+                </a:lnTo>
+                <a:close/>
+                <a:lnTo>
+                  <a:pt x="995177" y="869197"/>
+                </a:lnTo>
+                <a:close/>
+                <a:lnTo>
+                  <a:pt x="1001545" y="865982"/>
+                </a:lnTo>
+                <a:close/>
+                <a:lnTo>
+                  <a:pt x="1007933" y="862768"/>
+                </a:lnTo>
+                <a:close/>
+                <a:lnTo>
+                  <a:pt x="1014341" y="859554"/>
+                </a:lnTo>
+                <a:close/>
+                <a:lnTo>
+                  <a:pt x="1020769" y="856341"/>
+                </a:lnTo>
+                <a:close/>
+                <a:lnTo>
+                  <a:pt x="1027216" y="853129"/>
+                </a:lnTo>
+                <a:close/>
+                <a:lnTo>
+                  <a:pt x="1033684" y="849918"/>
+                </a:lnTo>
+                <a:close/>
+                <a:lnTo>
+                  <a:pt x="1040171" y="846707"/>
+                </a:lnTo>
+                <a:close/>
+                <a:lnTo>
+                  <a:pt x="1046677" y="843498"/>
+                </a:lnTo>
+                <a:close/>
+                <a:lnTo>
+                  <a:pt x="1053202" y="840290"/>
+                </a:lnTo>
+                <a:close/>
+                <a:lnTo>
+                  <a:pt x="1059747" y="837083"/>
+                </a:lnTo>
+                <a:close/>
+                <a:lnTo>
+                  <a:pt x="1066310" y="833876"/>
+                </a:lnTo>
+                <a:close/>
+                <a:lnTo>
+                  <a:pt x="1072892" y="830670"/>
+                </a:lnTo>
+                <a:close/>
+                <a:lnTo>
+                  <a:pt x="1079494" y="827465"/>
+                </a:lnTo>
+                <a:close/>
+                <a:lnTo>
+                  <a:pt x="1086114" y="824259"/>
+                </a:lnTo>
+                <a:close/>
+                <a:lnTo>
+                  <a:pt x="1092754" y="821054"/>
+                </a:lnTo>
+                <a:close/>
+                <a:lnTo>
+                  <a:pt x="1099413" y="817848"/>
+                </a:lnTo>
+                <a:close/>
+                <a:lnTo>
+                  <a:pt x="1106091" y="814642"/>
+                </a:lnTo>
+                <a:close/>
+                <a:lnTo>
+                  <a:pt x="1112788" y="811435"/>
+                </a:lnTo>
+                <a:close/>
+                <a:lnTo>
+                  <a:pt x="1119505" y="808226"/>
+                </a:lnTo>
+                <a:close/>
+                <a:lnTo>
+                  <a:pt x="1126241" y="805017"/>
+                </a:lnTo>
+                <a:close/>
+                <a:lnTo>
+                  <a:pt x="1132996" y="801807"/>
+                </a:lnTo>
+                <a:close/>
+                <a:lnTo>
+                  <a:pt x="1139771" y="798594"/>
+                </a:lnTo>
+                <a:close/>
+                <a:lnTo>
+                  <a:pt x="1146565" y="795380"/>
+                </a:lnTo>
+                <a:close/>
+                <a:lnTo>
+                  <a:pt x="1153378" y="792164"/>
+                </a:lnTo>
+                <a:close/>
+                <a:lnTo>
+                  <a:pt x="1160211" y="788945"/>
+                </a:lnTo>
+                <a:close/>
+                <a:lnTo>
+                  <a:pt x="1167063" y="785724"/>
+                </a:lnTo>
+                <a:close/>
+                <a:lnTo>
+                  <a:pt x="1173935" y="782500"/>
+                </a:lnTo>
+                <a:close/>
+                <a:lnTo>
+                  <a:pt x="1180826" y="779274"/>
+                </a:lnTo>
+                <a:close/>
+                <a:lnTo>
+                  <a:pt x="1187737" y="776044"/>
+                </a:lnTo>
+                <a:close/>
+                <a:lnTo>
+                  <a:pt x="1194668" y="772810"/>
+                </a:lnTo>
+                <a:close/>
+                <a:lnTo>
+                  <a:pt x="1201618" y="769573"/>
+                </a:lnTo>
+                <a:close/>
+                <a:lnTo>
+                  <a:pt x="1208588" y="766332"/>
+                </a:lnTo>
+                <a:close/>
+                <a:lnTo>
+                  <a:pt x="1215577" y="763088"/>
+                </a:lnTo>
+                <a:close/>
+                <a:lnTo>
+                  <a:pt x="1222586" y="759840"/>
+                </a:lnTo>
+                <a:close/>
+                <a:lnTo>
+                  <a:pt x="1229616" y="756590"/>
+                </a:lnTo>
+                <a:close/>
+                <a:lnTo>
+                  <a:pt x="1236665" y="753338"/>
+                </a:lnTo>
+                <a:close/>
+                <a:lnTo>
+                  <a:pt x="1243734" y="750084"/>
+                </a:lnTo>
+                <a:close/>
+                <a:lnTo>
+                  <a:pt x="1250823" y="746830"/>
+                </a:lnTo>
+                <a:close/>
+                <a:lnTo>
+                  <a:pt x="1257932" y="743575"/>
+                </a:lnTo>
+                <a:close/>
+                <a:lnTo>
+                  <a:pt x="1265061" y="740321"/>
+                </a:lnTo>
+                <a:close/>
+                <a:lnTo>
+                  <a:pt x="1272211" y="737068"/>
+                </a:lnTo>
+                <a:close/>
+                <a:lnTo>
+                  <a:pt x="1279380" y="733817"/>
+                </a:lnTo>
+                <a:close/>
+                <a:lnTo>
+                  <a:pt x="1286571" y="730567"/>
+                </a:lnTo>
+                <a:close/>
+                <a:lnTo>
+                  <a:pt x="1293781" y="727321"/>
+                </a:lnTo>
+                <a:close/>
+                <a:lnTo>
+                  <a:pt x="1301012" y="724077"/>
+                </a:lnTo>
+                <a:close/>
+                <a:lnTo>
+                  <a:pt x="1308264" y="720838"/>
+                </a:lnTo>
+                <a:close/>
+                <a:lnTo>
+                  <a:pt x="1315536" y="717603"/>
+                </a:lnTo>
+                <a:close/>
+                <a:lnTo>
+                  <a:pt x="1322829" y="714374"/>
+                </a:lnTo>
+                <a:close/>
+                <a:lnTo>
+                  <a:pt x="1330143" y="711150"/>
+                </a:lnTo>
+                <a:close/>
+                <a:lnTo>
+                  <a:pt x="1337477" y="707932"/>
+                </a:lnTo>
+                <a:close/>
+                <a:lnTo>
+                  <a:pt x="1344832" y="704722"/>
+                </a:lnTo>
+                <a:close/>
+                <a:lnTo>
+                  <a:pt x="1352209" y="701518"/>
+                </a:lnTo>
+                <a:close/>
+                <a:lnTo>
+                  <a:pt x="1359606" y="698323"/>
+                </a:lnTo>
+                <a:close/>
+                <a:lnTo>
+                  <a:pt x="1367024" y="695137"/>
+                </a:lnTo>
+                <a:close/>
+                <a:lnTo>
+                  <a:pt x="1374464" y="691960"/>
+                </a:lnTo>
+                <a:close/>
+                <a:lnTo>
+                  <a:pt x="1381924" y="688792"/>
+                </a:lnTo>
+                <a:close/>
+                <a:lnTo>
+                  <a:pt x="1389406" y="685632"/>
+                </a:lnTo>
+                <a:close/>
+                <a:lnTo>
+                  <a:pt x="1396909" y="682480"/>
+                </a:lnTo>
+                <a:close/>
+                <a:lnTo>
+                  <a:pt x="1404433" y="679336"/>
+                </a:lnTo>
+                <a:close/>
+                <a:lnTo>
+                  <a:pt x="1411977" y="676197"/>
+                </a:lnTo>
+                <a:close/>
+                <a:lnTo>
+                  <a:pt x="1419543" y="673064"/>
+                </a:lnTo>
+                <a:close/>
+                <a:lnTo>
+                  <a:pt x="1427129" y="669935"/>
+                </a:lnTo>
+                <a:close/>
+                <a:lnTo>
+                  <a:pt x="1434736" y="666810"/>
+                </a:lnTo>
+                <a:close/>
+                <a:lnTo>
+                  <a:pt x="1442363" y="663688"/>
+                </a:lnTo>
+                <a:close/>
+                <a:lnTo>
+                  <a:pt x="1450011" y="660568"/>
+                </a:lnTo>
+                <a:close/>
+                <a:lnTo>
+                  <a:pt x="1457680" y="657449"/>
+                </a:lnTo>
+                <a:close/>
+                <a:lnTo>
+                  <a:pt x="1465368" y="654332"/>
+                </a:lnTo>
+                <a:close/>
+                <a:lnTo>
+                  <a:pt x="1473078" y="651213"/>
+                </a:lnTo>
+                <a:close/>
+                <a:lnTo>
+                  <a:pt x="1480807" y="648094"/>
+                </a:lnTo>
+                <a:close/>
+                <a:lnTo>
+                  <a:pt x="1488557" y="644973"/>
+                </a:lnTo>
+                <a:close/>
+                <a:lnTo>
+                  <a:pt x="1496327" y="641850"/>
+                </a:lnTo>
+                <a:close/>
+                <a:lnTo>
+                  <a:pt x="1504117" y="638723"/>
+                </a:lnTo>
+                <a:close/>
+                <a:lnTo>
+                  <a:pt x="1511927" y="635592"/>
+                </a:lnTo>
+                <a:close/>
+                <a:lnTo>
+                  <a:pt x="1519758" y="632456"/>
+                </a:lnTo>
+                <a:close/>
+                <a:lnTo>
+                  <a:pt x="1527608" y="629314"/>
+                </a:lnTo>
+                <a:close/>
+                <a:lnTo>
+                  <a:pt x="1535477" y="626166"/>
+                </a:lnTo>
+                <a:close/>
+                <a:lnTo>
+                  <a:pt x="1543367" y="623010"/>
+                </a:lnTo>
+                <a:close/>
+                <a:lnTo>
+                  <a:pt x="1551276" y="619847"/>
+                </a:lnTo>
+                <a:close/>
+                <a:lnTo>
+                  <a:pt x="1559205" y="616674"/>
+                </a:lnTo>
+                <a:close/>
+                <a:lnTo>
+                  <a:pt x="1567154" y="613494"/>
+                </a:lnTo>
+                <a:close/>
+                <a:lnTo>
+                  <a:pt x="1575122" y="610306"/>
+                </a:lnTo>
+                <a:close/>
+                <a:lnTo>
+                  <a:pt x="1583110" y="607110"/>
+                </a:lnTo>
+                <a:close/>
+                <a:lnTo>
+                  <a:pt x="1591118" y="603907"/>
+                </a:lnTo>
+                <a:close/>
+                <a:lnTo>
+                  <a:pt x="1599144" y="600697"/>
+                </a:lnTo>
+                <a:close/>
+                <a:lnTo>
+                  <a:pt x="1607191" y="597481"/>
+                </a:lnTo>
+                <a:close/>
+                <a:lnTo>
+                  <a:pt x="1615257" y="594258"/>
+                </a:lnTo>
+                <a:close/>
+                <a:lnTo>
+                  <a:pt x="1623342" y="591030"/>
+                </a:lnTo>
+                <a:close/>
+                <a:lnTo>
+                  <a:pt x="1631447" y="587796"/>
+                </a:lnTo>
+                <a:close/>
+                <a:lnTo>
+                  <a:pt x="1639571" y="584557"/>
+                </a:lnTo>
+                <a:close/>
+                <a:lnTo>
+                  <a:pt x="1647714" y="581313"/>
+                </a:lnTo>
+                <a:close/>
+                <a:lnTo>
+                  <a:pt x="1655877" y="578065"/>
+                </a:lnTo>
+                <a:close/>
+                <a:lnTo>
+                  <a:pt x="1664059" y="574812"/>
+                </a:lnTo>
+                <a:close/>
+                <a:lnTo>
+                  <a:pt x="1672260" y="571556"/>
+                </a:lnTo>
+                <a:close/>
+                <a:lnTo>
+                  <a:pt x="1680481" y="568297"/>
+                </a:lnTo>
+                <a:close/>
+                <a:lnTo>
+                  <a:pt x="1688721" y="565034"/>
+                </a:lnTo>
+                <a:close/>
+                <a:lnTo>
+                  <a:pt x="1696980" y="561769"/>
+                </a:lnTo>
+                <a:close/>
+                <a:lnTo>
+                  <a:pt x="1705258" y="558501"/>
+                </a:lnTo>
+                <a:close/>
+                <a:lnTo>
+                  <a:pt x="1713555" y="555231"/>
+                </a:lnTo>
+                <a:close/>
+                <a:lnTo>
+                  <a:pt x="1721871" y="551959"/>
+                </a:lnTo>
+                <a:close/>
+                <a:lnTo>
+                  <a:pt x="1730207" y="548686"/>
+                </a:lnTo>
+                <a:close/>
+                <a:lnTo>
+                  <a:pt x="1738561" y="545412"/>
+                </a:lnTo>
+                <a:close/>
+                <a:lnTo>
+                  <a:pt x="1746935" y="542137"/>
+                </a:lnTo>
+                <a:close/>
+                <a:lnTo>
+                  <a:pt x="1755327" y="538861"/>
+                </a:lnTo>
+                <a:close/>
+                <a:lnTo>
+                  <a:pt x="1763740" y="535585"/>
+                </a:lnTo>
+                <a:close/>
+                <a:lnTo>
+                  <a:pt x="1772171" y="532308"/>
+                </a:lnTo>
+                <a:close/>
+                <a:lnTo>
+                  <a:pt x="1780623" y="529031"/>
+                </a:lnTo>
+                <a:close/>
+                <a:lnTo>
+                  <a:pt x="1789095" y="525753"/>
+                </a:lnTo>
+                <a:close/>
+                <a:lnTo>
+                  <a:pt x="1797586" y="522476"/>
+                </a:lnTo>
+                <a:close/>
+                <a:lnTo>
+                  <a:pt x="1806098" y="519198"/>
+                </a:lnTo>
+                <a:close/>
+                <a:lnTo>
+                  <a:pt x="1814631" y="515921"/>
+                </a:lnTo>
+                <a:close/>
+                <a:lnTo>
+                  <a:pt x="1823184" y="512643"/>
+                </a:lnTo>
+                <a:close/>
+                <a:lnTo>
+                  <a:pt x="1831758" y="509366"/>
+                </a:lnTo>
+                <a:close/>
+                <a:lnTo>
+                  <a:pt x="1840353" y="506090"/>
+                </a:lnTo>
+                <a:close/>
+                <a:lnTo>
+                  <a:pt x="1848970" y="502813"/>
+                </a:lnTo>
+                <a:close/>
+                <a:lnTo>
+                  <a:pt x="1857607" y="499538"/>
+                </a:lnTo>
+                <a:close/>
+                <a:lnTo>
+                  <a:pt x="1866267" y="496263"/>
+                </a:lnTo>
+                <a:close/>
+                <a:lnTo>
+                  <a:pt x="1874948" y="492989"/>
+                </a:lnTo>
+                <a:close/>
+                <a:lnTo>
+                  <a:pt x="1883650" y="489716"/>
+                </a:lnTo>
+                <a:close/>
+                <a:lnTo>
+                  <a:pt x="1892375" y="486444"/>
+                </a:lnTo>
+                <a:close/>
+                <a:lnTo>
+                  <a:pt x="1901123" y="483173"/>
+                </a:lnTo>
+                <a:close/>
+                <a:lnTo>
+                  <a:pt x="1909892" y="479903"/>
+                </a:lnTo>
+                <a:close/>
+                <a:lnTo>
+                  <a:pt x="1918685" y="476635"/>
+                </a:lnTo>
+                <a:close/>
+                <a:lnTo>
+                  <a:pt x="1927500" y="473368"/>
+                </a:lnTo>
+                <a:close/>
+                <a:lnTo>
+                  <a:pt x="1936338" y="470102"/>
+                </a:lnTo>
+                <a:close/>
+                <a:lnTo>
+                  <a:pt x="1945199" y="466838"/>
+                </a:lnTo>
+                <a:close/>
+                <a:lnTo>
+                  <a:pt x="1954083" y="463576"/>
+                </a:lnTo>
+                <a:close/>
+                <a:lnTo>
+                  <a:pt x="1962989" y="460315"/>
+                </a:lnTo>
+                <a:close/>
+                <a:lnTo>
+                  <a:pt x="1971918" y="457056"/>
+                </a:lnTo>
+                <a:close/>
+                <a:lnTo>
+                  <a:pt x="1980869" y="453798"/>
+                </a:lnTo>
+                <a:close/>
+                <a:lnTo>
+                  <a:pt x="1989842" y="450541"/>
+                </a:lnTo>
+                <a:close/>
+                <a:lnTo>
+                  <a:pt x="1998836" y="447285"/>
+                </a:lnTo>
+                <a:close/>
+                <a:lnTo>
+                  <a:pt x="2007852" y="444029"/>
+                </a:lnTo>
+                <a:close/>
+                <a:lnTo>
+                  <a:pt x="2016889" y="440775"/>
+                </a:lnTo>
+                <a:close/>
+                <a:lnTo>
+                  <a:pt x="2025947" y="437522"/>
+                </a:lnTo>
+                <a:close/>
+                <a:lnTo>
+                  <a:pt x="2035026" y="434269"/>
+                </a:lnTo>
+                <a:close/>
+                <a:lnTo>
+                  <a:pt x="2044125" y="431016"/>
+                </a:lnTo>
+                <a:close/>
+                <a:lnTo>
+                  <a:pt x="2053245" y="427765"/>
+                </a:lnTo>
+                <a:close/>
+                <a:lnTo>
+                  <a:pt x="2062384" y="424513"/>
+                </a:lnTo>
+                <a:close/>
+                <a:lnTo>
+                  <a:pt x="2071544" y="421262"/>
+                </a:lnTo>
+                <a:close/>
+                <a:lnTo>
+                  <a:pt x="2080723" y="418011"/>
+                </a:lnTo>
+                <a:close/>
+                <a:lnTo>
+                  <a:pt x="2089921" y="414760"/>
+                </a:lnTo>
+                <a:close/>
+                <a:lnTo>
+                  <a:pt x="2099138" y="411509"/>
+                </a:lnTo>
+                <a:close/>
+                <a:lnTo>
+                  <a:pt x="2108374" y="408258"/>
+                </a:lnTo>
+                <a:close/>
+                <a:lnTo>
+                  <a:pt x="2117629" y="405006"/>
+                </a:lnTo>
+                <a:close/>
+                <a:lnTo>
+                  <a:pt x="2126903" y="401754"/>
+                </a:lnTo>
+                <a:close/>
+                <a:lnTo>
+                  <a:pt x="2136194" y="398502"/>
+                </a:lnTo>
+                <a:close/>
+                <a:lnTo>
+                  <a:pt x="2145504" y="395250"/>
+                </a:lnTo>
+                <a:close/>
+                <a:lnTo>
+                  <a:pt x="2154831" y="391997"/>
+                </a:lnTo>
+                <a:close/>
+                <a:lnTo>
+                  <a:pt x="2164176" y="388743"/>
+                </a:lnTo>
+                <a:close/>
+                <a:lnTo>
+                  <a:pt x="2173539" y="385489"/>
+                </a:lnTo>
+                <a:close/>
+                <a:lnTo>
+                  <a:pt x="2182920" y="382234"/>
+                </a:lnTo>
+                <a:close/>
+                <a:lnTo>
+                  <a:pt x="2192319" y="378979"/>
+                </a:lnTo>
+                <a:close/>
+                <a:lnTo>
+                  <a:pt x="2201736" y="375724"/>
+                </a:lnTo>
+                <a:close/>
+                <a:lnTo>
+                  <a:pt x="2211172" y="372469"/>
+                </a:lnTo>
+                <a:close/>
+                <a:lnTo>
+                  <a:pt x="2220626" y="369213"/>
+                </a:lnTo>
+                <a:close/>
+                <a:lnTo>
+                  <a:pt x="2230098" y="365957"/>
+                </a:lnTo>
+                <a:close/>
+                <a:lnTo>
+                  <a:pt x="2239589" y="362701"/>
+                </a:lnTo>
+                <a:close/>
+                <a:lnTo>
+                  <a:pt x="2249098" y="359445"/>
+                </a:lnTo>
+                <a:close/>
+                <a:lnTo>
+                  <a:pt x="2258626" y="356190"/>
+                </a:lnTo>
+                <a:close/>
+                <a:lnTo>
+                  <a:pt x="2268173" y="352934"/>
+                </a:lnTo>
+                <a:close/>
+                <a:lnTo>
+                  <a:pt x="2277738" y="349678"/>
+                </a:lnTo>
+                <a:close/>
+                <a:lnTo>
+                  <a:pt x="2287322" y="346423"/>
+                </a:lnTo>
+                <a:close/>
+                <a:lnTo>
+                  <a:pt x="2296925" y="343168"/>
+                </a:lnTo>
+                <a:close/>
+                <a:lnTo>
+                  <a:pt x="2306548" y="339913"/>
+                </a:lnTo>
+                <a:close/>
+                <a:lnTo>
+                  <a:pt x="2316189" y="336659"/>
+                </a:lnTo>
+                <a:close/>
+                <a:lnTo>
+                  <a:pt x="2325849" y="333405"/>
+                </a:lnTo>
+                <a:close/>
+                <a:lnTo>
+                  <a:pt x="2335529" y="330151"/>
+                </a:lnTo>
+                <a:close/>
+                <a:lnTo>
+                  <a:pt x="2345228" y="326898"/>
+                </a:lnTo>
+                <a:close/>
+                <a:lnTo>
+                  <a:pt x="2354946" y="323646"/>
+                </a:lnTo>
+                <a:close/>
+                <a:lnTo>
+                  <a:pt x="2364684" y="320394"/>
+                </a:lnTo>
+                <a:close/>
+                <a:lnTo>
+                  <a:pt x="2374441" y="317143"/>
+                </a:lnTo>
+                <a:close/>
+                <a:lnTo>
+                  <a:pt x="2384218" y="313893"/>
+                </a:lnTo>
+                <a:close/>
+                <a:lnTo>
+                  <a:pt x="2394016" y="310644"/>
+                </a:lnTo>
+                <a:close/>
+                <a:lnTo>
+                  <a:pt x="2403834" y="307396"/>
+                </a:lnTo>
+                <a:close/>
+                <a:lnTo>
+                  <a:pt x="2413674" y="304149"/>
+                </a:lnTo>
+                <a:close/>
+                <a:lnTo>
+                  <a:pt x="2423535" y="300903"/>
+                </a:lnTo>
+                <a:close/>
+                <a:lnTo>
+                  <a:pt x="2433418" y="297658"/>
+                </a:lnTo>
+                <a:close/>
+                <a:lnTo>
+                  <a:pt x="2443323" y="294415"/>
+                </a:lnTo>
+                <a:close/>
+                <a:lnTo>
+                  <a:pt x="2453250" y="291173"/>
+                </a:lnTo>
+                <a:close/>
+                <a:lnTo>
+                  <a:pt x="2463201" y="287933"/>
+                </a:lnTo>
+                <a:close/>
+                <a:lnTo>
+                  <a:pt x="2473175" y="284695"/>
+                </a:lnTo>
+                <a:close/>
+                <a:lnTo>
+                  <a:pt x="2483173" y="281458"/>
+                </a:lnTo>
+                <a:close/>
+                <a:lnTo>
+                  <a:pt x="2493194" y="278223"/>
+                </a:lnTo>
+                <a:close/>
+                <a:lnTo>
+                  <a:pt x="2503241" y="274991"/>
+                </a:lnTo>
+                <a:close/>
+                <a:lnTo>
+                  <a:pt x="2513312" y="271760"/>
+                </a:lnTo>
+                <a:close/>
+                <a:lnTo>
+                  <a:pt x="2523408" y="268532"/>
+                </a:lnTo>
+                <a:close/>
+                <a:lnTo>
+                  <a:pt x="2533531" y="265305"/>
+                </a:lnTo>
+                <a:close/>
+                <a:lnTo>
+                  <a:pt x="2543679" y="262082"/>
+                </a:lnTo>
+                <a:close/>
+                <a:lnTo>
+                  <a:pt x="2553853" y="258860"/>
+                </a:lnTo>
+                <a:close/>
+                <a:lnTo>
+                  <a:pt x="2564054" y="255642"/>
+                </a:lnTo>
+                <a:close/>
+                <a:lnTo>
+                  <a:pt x="2574283" y="252426"/>
+                </a:lnTo>
+                <a:close/>
+                <a:lnTo>
+                  <a:pt x="2584539" y="249213"/>
+                </a:lnTo>
+                <a:close/>
+                <a:lnTo>
+                  <a:pt x="2594822" y="246002"/>
+                </a:lnTo>
+                <a:close/>
+                <a:lnTo>
+                  <a:pt x="2605134" y="242795"/>
+                </a:lnTo>
+                <a:close/>
+                <a:lnTo>
+                  <a:pt x="2615472" y="239591"/>
+                </a:lnTo>
+                <a:close/>
+                <a:lnTo>
+                  <a:pt x="2625835" y="236389"/>
+                </a:lnTo>
+                <a:close/>
+                <a:lnTo>
+                  <a:pt x="2636221" y="233191"/>
+                </a:lnTo>
+                <a:close/>
+                <a:lnTo>
+                  <a:pt x="2646628" y="229995"/>
+                </a:lnTo>
+                <a:close/>
+                <a:lnTo>
+                  <a:pt x="2657056" y="226803"/>
+                </a:lnTo>
+                <a:close/>
+                <a:lnTo>
+                  <a:pt x="2667502" y="223613"/>
+                </a:lnTo>
+                <a:close/>
+                <a:lnTo>
+                  <a:pt x="2677965" y="220426"/>
+                </a:lnTo>
+                <a:close/>
+                <a:lnTo>
+                  <a:pt x="2688443" y="217243"/>
+                </a:lnTo>
+                <a:close/>
+                <a:lnTo>
+                  <a:pt x="2698935" y="214062"/>
+                </a:lnTo>
+                <a:close/>
+                <a:lnTo>
+                  <a:pt x="2709439" y="210884"/>
+                </a:lnTo>
+                <a:close/>
+                <a:lnTo>
+                  <a:pt x="2719953" y="207710"/>
+                </a:lnTo>
+                <a:close/>
+                <a:lnTo>
+                  <a:pt x="2730477" y="204538"/>
+                </a:lnTo>
+                <a:close/>
+                <a:lnTo>
+                  <a:pt x="2741008" y="201369"/>
+                </a:lnTo>
+                <a:close/>
+                <a:lnTo>
+                  <a:pt x="2751544" y="198203"/>
+                </a:lnTo>
+                <a:close/>
+                <a:lnTo>
+                  <a:pt x="2762085" y="195040"/>
+                </a:lnTo>
+                <a:close/>
+                <a:lnTo>
+                  <a:pt x="2772628" y="191880"/>
+                </a:lnTo>
+                <a:close/>
+                <a:lnTo>
+                  <a:pt x="2783173" y="188723"/>
+                </a:lnTo>
+                <a:close/>
+                <a:lnTo>
+                  <a:pt x="2793716" y="185569"/>
+                </a:lnTo>
+                <a:close/>
+                <a:lnTo>
+                  <a:pt x="2804258" y="182417"/>
+                </a:lnTo>
+                <a:close/>
+                <a:lnTo>
+                  <a:pt x="2814796" y="179269"/>
+                </a:lnTo>
+                <a:close/>
+                <a:lnTo>
+                  <a:pt x="2825328" y="176124"/>
+                </a:lnTo>
+                <a:close/>
+                <a:lnTo>
+                  <a:pt x="2835854" y="172982"/>
+                </a:lnTo>
+                <a:close/>
+                <a:lnTo>
+                  <a:pt x="2846373" y="169842"/>
+                </a:lnTo>
+                <a:close/>
+                <a:lnTo>
+                  <a:pt x="2856889" y="166704"/>
+                </a:lnTo>
+                <a:close/>
+                <a:lnTo>
+                  <a:pt x="2867409" y="163566"/>
+                </a:lnTo>
+                <a:close/>
+                <a:lnTo>
+                  <a:pt x="2877938" y="160427"/>
+                </a:lnTo>
+                <a:close/>
+                <a:lnTo>
+                  <a:pt x="2888481" y="157287"/>
+                </a:lnTo>
+                <a:close/>
+                <a:lnTo>
+                  <a:pt x="2899044" y="154143"/>
+                </a:lnTo>
+                <a:close/>
+                <a:lnTo>
+                  <a:pt x="2909633" y="150994"/>
+                </a:lnTo>
+                <a:close/>
+                <a:lnTo>
+                  <a:pt x="2920252" y="147840"/>
+                </a:lnTo>
+                <a:close/>
+                <a:lnTo>
+                  <a:pt x="2930908" y="144679"/>
+                </a:lnTo>
+                <a:close/>
+                <a:lnTo>
+                  <a:pt x="2941606" y="141510"/>
+                </a:lnTo>
+                <a:close/>
+                <a:lnTo>
+                  <a:pt x="2952351" y="138331"/>
+                </a:lnTo>
+                <a:close/>
+                <a:lnTo>
+                  <a:pt x="2963149" y="135142"/>
+                </a:lnTo>
+                <a:close/>
+                <a:lnTo>
+                  <a:pt x="2974006" y="131941"/>
+                </a:lnTo>
+                <a:close/>
+                <a:lnTo>
+                  <a:pt x="2984927" y="128727"/>
+                </a:lnTo>
+                <a:close/>
+                <a:lnTo>
+                  <a:pt x="2995918" y="125499"/>
+                </a:lnTo>
+                <a:close/>
+                <a:lnTo>
+                  <a:pt x="3006983" y="122256"/>
+                </a:lnTo>
+                <a:close/>
+                <a:lnTo>
+                  <a:pt x="3018129" y="118995"/>
+                </a:lnTo>
+                <a:close/>
+                <a:lnTo>
+                  <a:pt x="3029362" y="115717"/>
+                </a:lnTo>
+                <a:close/>
+                <a:lnTo>
+                  <a:pt x="3040685" y="112420"/>
+                </a:lnTo>
+                <a:close/>
+                <a:lnTo>
+                  <a:pt x="3052106" y="109103"/>
+                </a:lnTo>
+                <a:close/>
+                <a:lnTo>
+                  <a:pt x="3063630" y="105764"/>
+                </a:lnTo>
+                <a:close/>
+                <a:lnTo>
+                  <a:pt x="3075262" y="102402"/>
+                </a:lnTo>
+                <a:close/>
+                <a:lnTo>
+                  <a:pt x="3087008" y="99016"/>
+                </a:lnTo>
+                <a:close/>
+                <a:lnTo>
+                  <a:pt x="3098867" y="95607"/>
+                </a:lnTo>
+                <a:close/>
+                <a:lnTo>
+                  <a:pt x="3110824" y="92178"/>
+                </a:lnTo>
+                <a:close/>
+                <a:lnTo>
+                  <a:pt x="3122858" y="88735"/>
+                </a:lnTo>
+                <a:close/>
+                <a:lnTo>
+                  <a:pt x="3134949" y="85284"/>
+                </a:lnTo>
+                <a:close/>
+                <a:lnTo>
+                  <a:pt x="3147077" y="81829"/>
+                </a:lnTo>
+                <a:close/>
+                <a:lnTo>
+                  <a:pt x="3159222" y="78375"/>
+                </a:lnTo>
+                <a:close/>
+                <a:lnTo>
+                  <a:pt x="3171365" y="74930"/>
+                </a:lnTo>
+                <a:close/>
+                <a:lnTo>
+                  <a:pt x="3183484" y="71496"/>
+                </a:lnTo>
+                <a:close/>
+                <a:lnTo>
+                  <a:pt x="3195560" y="68081"/>
+                </a:lnTo>
+                <a:close/>
+                <a:lnTo>
+                  <a:pt x="3207573" y="64688"/>
+                </a:lnTo>
+                <a:close/>
+                <a:lnTo>
+                  <a:pt x="3219503" y="61324"/>
+                </a:lnTo>
+                <a:close/>
+                <a:lnTo>
+                  <a:pt x="3231330" y="57994"/>
+                </a:lnTo>
+                <a:close/>
+                <a:lnTo>
+                  <a:pt x="3243034" y="54703"/>
+                </a:lnTo>
+                <a:close/>
+                <a:lnTo>
+                  <a:pt x="3254594" y="51457"/>
+                </a:lnTo>
+                <a:close/>
+                <a:lnTo>
+                  <a:pt x="3265991" y="48260"/>
+                </a:lnTo>
+                <a:close/>
+                <a:lnTo>
+                  <a:pt x="3277205" y="45118"/>
+                </a:lnTo>
+                <a:close/>
+                <a:lnTo>
+                  <a:pt x="3288216" y="42037"/>
+                </a:lnTo>
+                <a:close/>
+                <a:lnTo>
+                  <a:pt x="3299003" y="39021"/>
+                </a:lnTo>
+                <a:close/>
+                <a:lnTo>
+                  <a:pt x="3309547" y="36076"/>
+                </a:lnTo>
+                <a:close/>
+                <a:lnTo>
+                  <a:pt x="3319827" y="33207"/>
+                </a:lnTo>
+                <a:close/>
+                <a:lnTo>
+                  <a:pt x="3329824" y="30421"/>
+                </a:lnTo>
+                <a:close/>
+                <a:lnTo>
+                  <a:pt x="3339517" y="27720"/>
+                </a:lnTo>
+                <a:close/>
+                <a:lnTo>
+                  <a:pt x="3348887" y="25113"/>
+                </a:lnTo>
+                <a:close/>
+                <a:lnTo>
+                  <a:pt x="3357913" y="22602"/>
+                </a:lnTo>
+                <a:close/>
+                <a:lnTo>
+                  <a:pt x="3366576" y="20195"/>
+                </a:lnTo>
+                <a:close/>
+                <a:lnTo>
+                  <a:pt x="3374854" y="17896"/>
+                </a:lnTo>
+                <a:close/>
+                <a:lnTo>
+                  <a:pt x="3382729" y="15710"/>
+                </a:lnTo>
+                <a:close/>
+                <a:lnTo>
+                  <a:pt x="3390181" y="13643"/>
+                </a:lnTo>
+                <a:close/>
+                <a:lnTo>
+                  <a:pt x="3397188" y="11700"/>
+                </a:lnTo>
+                <a:close/>
+                <a:lnTo>
+                  <a:pt x="3403732" y="9887"/>
+                </a:lnTo>
+                <a:close/>
+                <a:lnTo>
+                  <a:pt x="3409792" y="8208"/>
+                </a:lnTo>
+                <a:close/>
+                <a:lnTo>
+                  <a:pt x="3415348" y="6669"/>
+                </a:lnTo>
+                <a:close/>
+                <a:lnTo>
+                  <a:pt x="3420380" y="5276"/>
+                </a:lnTo>
+                <a:close/>
+                <a:lnTo>
+                  <a:pt x="3424868" y="4033"/>
+                </a:lnTo>
+                <a:close/>
+                <a:lnTo>
+                  <a:pt x="3428792" y="2947"/>
+                </a:lnTo>
+                <a:close/>
+                <a:lnTo>
+                  <a:pt x="3432132" y="2021"/>
+                </a:lnTo>
+                <a:close/>
+                <a:lnTo>
+                  <a:pt x="3434868" y="1263"/>
+                </a:lnTo>
+                <a:close/>
+                <a:lnTo>
+                  <a:pt x="3436979" y="676"/>
+                </a:lnTo>
+                <a:close/>
+                <a:lnTo>
+                  <a:pt x="3438447" y="266"/>
+                </a:lnTo>
+                <a:close/>
+                <a:lnTo>
+                  <a:pt x="3439250" y="39"/>
+                </a:lnTo>
+                <a:close/>
+                <a:lnTo>
+                  <a:pt x="3439369" y="0"/>
+                </a:lnTo>
+                <a:close/>
+                <a:lnTo>
+                  <a:pt x="3438784" y="154"/>
+                </a:lnTo>
+                <a:close/>
+                <a:lnTo>
+                  <a:pt x="3437475" y="507"/>
+                </a:lnTo>
+                <a:close/>
+                <a:lnTo>
+                  <a:pt x="3435421" y="1063"/>
+                </a:lnTo>
+                <a:close/>
+                <a:lnTo>
+                  <a:pt x="3432603" y="1829"/>
+                </a:lnTo>
+                <a:close/>
+                <a:lnTo>
+                  <a:pt x="3429000" y="2808"/>
                 </a:lnTo>
                 <a:close/>
               </a:path>
@@ -5623,8 +5623,8 @@
         </p:nvCxnSpPr>
         <p:spPr>
           <a:xfrm flipV="1">
-            <a:off x="6400800.0" y="1840230.0"/>
-            <a:ext cx="0.0" cy="731520.0"/>
+            <a:off x="6400800.0" y="1200150.0"/>
+            <a:ext cx="0.0" cy="1371600.0"/>
           </a:xfrm>
           <a:prstGeom prst="line">
             <a:avLst/>
@@ -5659,7 +5659,7 @@
         </p:nvSpPr>
         <p:spPr>
           <a:xfrm>
-            <a:off x="6311900" y="1751330"/>
+            <a:off x="6311900" y="1111250"/>
             <a:ext cx="177800" cy="177800"/>
           </a:xfrm>
           <a:prstGeom prst="ellipse">
@@ -5704,7 +5704,7 @@
         </p:nvSpPr>
         <p:spPr>
           <a:xfrm>
-            <a:off x="6146800" y="1248410"/>
+            <a:off x="6512560" y="196850"/>
             <a:ext cx="1524000" cy="508000"/>
           </a:xfrm>
           <a:prstGeom prst="rect">
@@ -5740,7 +5740,7 @@
         </p:nvSpPr>
         <p:spPr>
           <a:xfrm>
-            <a:off x="6146800" y="2368550"/>
+            <a:off x="6146800" y="2437130"/>
             <a:ext cx="1524000" cy="508000"/>
           </a:xfrm>
           <a:prstGeom prst="rect">
@@ -5776,7 +5776,7 @@
         </p:nvSpPr>
         <p:spPr>
           <a:xfrm>
-            <a:off x="4203700" y="2368550"/>
+            <a:off x="4135120" y="2437130"/>
             <a:ext cx="1524000" cy="508000"/>
           </a:xfrm>
           <a:prstGeom prst="rect">

--- a/output/4.pptx
+++ b/output/4.pptx
@@ -3104,8 +3104,8 @@
         </p:nvCxnSpPr>
         <p:spPr>
           <a:xfrm>
-            <a:off x="2286000.0" y="2571750.0"/>
-            <a:ext cx="4572000.0" cy="0.0"/>
+            <a:off x="4114800.0" y="2571750.0"/>
+            <a:ext cx="3200400.0" cy="0.0"/>
           </a:xfrm>
           <a:prstGeom prst="line">
             <a:avLst/>
@@ -3139,8 +3139,8 @@
         </p:nvCxnSpPr>
         <p:spPr>
           <a:xfrm flipV="1">
-            <a:off x="4572000.0" y="285750.0"/>
-            <a:ext cx="0.0" cy="4572000.0"/>
+            <a:off x="4572000.0" y="742950.0"/>
+            <a:ext cx="0.0" cy="2286000.0"/>
           </a:xfrm>
           <a:prstGeom prst="line">
             <a:avLst/>
@@ -3174,8 +3174,8 @@
         </p:nvSpPr>
         <p:spPr>
           <a:xfrm>
-            <a:off x="4572000" y="690764"/>
-            <a:ext cx="3439369" cy="1880986"/>
+            <a:off x="4572000" y="1232154"/>
+            <a:ext cx="2514600" cy="1339596"/>
           </a:xfrm>
           <a:custGeom>
             <a:avLst/>
@@ -3184,2404 +3184,2404 @@
             <a:cxnLst/>
             <a:rect l="l" t="t" r="r" b="b"/>
             <a:pathLst>
-              <a:path w="3439369" h="1880986">
+              <a:path w="2514600" h="1339596">
                 <a:moveTo>
-                  <a:pt x="0" y="1880986"/>
+                  <a:pt x="0" y="1339596"/>
                 </a:moveTo>
                 <a:lnTo>
-                  <a:pt x="14" y="1877770"/>
-                </a:lnTo>
-                <a:close/>
-                <a:lnTo>
-                  <a:pt x="48" y="1874548"/>
-                </a:lnTo>
-                <a:close/>
-                <a:lnTo>
-                  <a:pt x="103" y="1871321"/>
-                </a:lnTo>
-                <a:close/>
-                <a:lnTo>
-                  <a:pt x="178" y="1868089"/>
-                </a:lnTo>
-                <a:close/>
-                <a:lnTo>
-                  <a:pt x="274" y="1864852"/>
-                </a:lnTo>
-                <a:close/>
-                <a:lnTo>
-                  <a:pt x="390" y="1861611"/>
-                </a:lnTo>
-                <a:close/>
-                <a:lnTo>
-                  <a:pt x="527" y="1858366"/>
-                </a:lnTo>
-                <a:close/>
-                <a:lnTo>
-                  <a:pt x="685" y="1855118"/>
-                </a:lnTo>
-                <a:close/>
-                <a:lnTo>
-                  <a:pt x="862" y="1851865"/>
-                </a:lnTo>
-                <a:close/>
-                <a:lnTo>
-                  <a:pt x="1060" y="1848610"/>
-                </a:lnTo>
-                <a:close/>
-                <a:lnTo>
-                  <a:pt x="1279" y="1845352"/>
-                </a:lnTo>
-                <a:close/>
-                <a:lnTo>
-                  <a:pt x="1517" y="1842091"/>
-                </a:lnTo>
-                <a:close/>
-                <a:lnTo>
-                  <a:pt x="1776" y="1838828"/>
-                </a:lnTo>
-                <a:close/>
-                <a:lnTo>
-                  <a:pt x="2055" y="1835562"/>
-                </a:lnTo>
-                <a:close/>
-                <a:lnTo>
-                  <a:pt x="2354" y="1832295"/>
-                </a:lnTo>
-                <a:close/>
-                <a:lnTo>
-                  <a:pt x="2673" y="1829027"/>
-                </a:lnTo>
-                <a:close/>
-                <a:lnTo>
-                  <a:pt x="3013" y="1825757"/>
-                </a:lnTo>
-                <a:close/>
-                <a:lnTo>
-                  <a:pt x="3372" y="1822487"/>
-                </a:lnTo>
-                <a:close/>
-                <a:lnTo>
-                  <a:pt x="3752" y="1819216"/>
-                </a:lnTo>
-                <a:close/>
-                <a:lnTo>
-                  <a:pt x="4151" y="1815944"/>
-                </a:lnTo>
-                <a:close/>
-                <a:lnTo>
-                  <a:pt x="4570" y="1812673"/>
-                </a:lnTo>
-                <a:close/>
-                <a:lnTo>
-                  <a:pt x="5009" y="1809402"/>
-                </a:lnTo>
-                <a:close/>
-                <a:lnTo>
-                  <a:pt x="5468" y="1806131"/>
-                </a:lnTo>
-                <a:close/>
-                <a:lnTo>
-                  <a:pt x="5947" y="1802861"/>
-                </a:lnTo>
-                <a:close/>
-                <a:lnTo>
-                  <a:pt x="6446" y="1799593"/>
-                </a:lnTo>
-                <a:close/>
-                <a:lnTo>
-                  <a:pt x="6964" y="1796325"/>
-                </a:lnTo>
-                <a:close/>
-                <a:lnTo>
-                  <a:pt x="7502" y="1793060"/>
-                </a:lnTo>
-                <a:close/>
-                <a:lnTo>
-                  <a:pt x="8060" y="1789797"/>
-                </a:lnTo>
-                <a:close/>
-                <a:lnTo>
-                  <a:pt x="8637" y="1786535"/>
-                </a:lnTo>
-                <a:close/>
-                <a:lnTo>
-                  <a:pt x="9234" y="1783277"/>
-                </a:lnTo>
-                <a:close/>
-                <a:lnTo>
-                  <a:pt x="9851" y="1780021"/>
-                </a:lnTo>
-                <a:close/>
-                <a:lnTo>
-                  <a:pt x="10487" y="1776769"/>
-                </a:lnTo>
-                <a:close/>
-                <a:lnTo>
-                  <a:pt x="11142" y="1773519"/>
-                </a:lnTo>
-                <a:close/>
-                <a:lnTo>
-                  <a:pt x="11817" y="1770274"/>
-                </a:lnTo>
-                <a:close/>
-                <a:lnTo>
-                  <a:pt x="12511" y="1767033"/>
-                </a:lnTo>
-                <a:close/>
-                <a:lnTo>
-                  <a:pt x="13225" y="1763796"/>
-                </a:lnTo>
-                <a:close/>
-                <a:lnTo>
-                  <a:pt x="13958" y="1760563"/>
-                </a:lnTo>
-                <a:close/>
-                <a:lnTo>
-                  <a:pt x="14710" y="1757336"/>
-                </a:lnTo>
-                <a:close/>
-                <a:lnTo>
-                  <a:pt x="15482" y="1754113"/>
-                </a:lnTo>
-                <a:close/>
-                <a:lnTo>
-                  <a:pt x="16272" y="1750896"/>
-                </a:lnTo>
-                <a:close/>
-                <a:lnTo>
-                  <a:pt x="17082" y="1747685"/>
-                </a:lnTo>
-                <a:close/>
-                <a:lnTo>
-                  <a:pt x="17911" y="1744480"/>
-                </a:lnTo>
-                <a:close/>
-                <a:lnTo>
-                  <a:pt x="18759" y="1741281"/>
-                </a:lnTo>
-                <a:close/>
-                <a:lnTo>
-                  <a:pt x="19627" y="1738089"/>
-                </a:lnTo>
-                <a:close/>
-                <a:lnTo>
-                  <a:pt x="20513" y="1734904"/>
-                </a:lnTo>
-                <a:close/>
-                <a:lnTo>
-                  <a:pt x="21418" y="1731726"/>
-                </a:lnTo>
-                <a:close/>
-                <a:lnTo>
-                  <a:pt x="22342" y="1728555"/>
-                </a:lnTo>
-                <a:close/>
-                <a:lnTo>
-                  <a:pt x="23285" y="1725391"/>
-                </a:lnTo>
-                <a:close/>
-                <a:lnTo>
-                  <a:pt x="24248" y="1722233"/>
-                </a:lnTo>
-                <a:close/>
-                <a:lnTo>
-                  <a:pt x="25230" y="1719081"/>
-                </a:lnTo>
-                <a:close/>
-                <a:lnTo>
-                  <a:pt x="26232" y="1715932"/>
-                </a:lnTo>
-                <a:close/>
-                <a:lnTo>
-                  <a:pt x="27253" y="1712788"/>
-                </a:lnTo>
-                <a:close/>
-                <a:lnTo>
-                  <a:pt x="28295" y="1709646"/>
-                </a:lnTo>
-                <a:close/>
-                <a:lnTo>
-                  <a:pt x="29357" y="1706507"/>
-                </a:lnTo>
-                <a:close/>
-                <a:lnTo>
-                  <a:pt x="30439" y="1703369"/>
-                </a:lnTo>
-                <a:close/>
-                <a:lnTo>
-                  <a:pt x="31542" y="1700232"/>
-                </a:lnTo>
-                <a:close/>
-                <a:lnTo>
-                  <a:pt x="32666" y="1697095"/>
-                </a:lnTo>
-                <a:close/>
-                <a:lnTo>
-                  <a:pt x="33811" y="1693956"/>
-                </a:lnTo>
-                <a:close/>
-                <a:lnTo>
-                  <a:pt x="34977" y="1690816"/>
-                </a:lnTo>
-                <a:close/>
-                <a:lnTo>
-                  <a:pt x="36164" y="1687674"/>
-                </a:lnTo>
-                <a:close/>
-                <a:lnTo>
-                  <a:pt x="37373" y="1684528"/>
-                </a:lnTo>
-                <a:close/>
-                <a:lnTo>
-                  <a:pt x="38604" y="1681379"/>
-                </a:lnTo>
-                <a:close/>
-                <a:lnTo>
-                  <a:pt x="39857" y="1678225"/>
-                </a:lnTo>
-                <a:close/>
-                <a:lnTo>
-                  <a:pt x="41132" y="1675065"/>
-                </a:lnTo>
-                <a:close/>
-                <a:lnTo>
-                  <a:pt x="42429" y="1671899"/>
-                </a:lnTo>
-                <a:close/>
-                <a:lnTo>
-                  <a:pt x="43748" y="1668726"/>
-                </a:lnTo>
-                <a:close/>
-                <a:lnTo>
-                  <a:pt x="45091" y="1665545"/>
-                </a:lnTo>
-                <a:close/>
-                <a:lnTo>
-                  <a:pt x="46456" y="1662355"/>
-                </a:lnTo>
-                <a:close/>
-                <a:lnTo>
-                  <a:pt x="47844" y="1659157"/>
-                </a:lnTo>
-                <a:close/>
-                <a:lnTo>
-                  <a:pt x="49256" y="1655948"/>
-                </a:lnTo>
-                <a:close/>
-                <a:lnTo>
-                  <a:pt x="50690" y="1652729"/>
-                </a:lnTo>
-                <a:close/>
-                <a:lnTo>
-                  <a:pt x="52148" y="1649502"/>
-                </a:lnTo>
-                <a:close/>
-                <a:lnTo>
-                  <a:pt x="53628" y="1646267"/>
-                </a:lnTo>
-                <a:close/>
-                <a:lnTo>
-                  <a:pt x="55130" y="1643025"/>
-                </a:lnTo>
-                <a:close/>
-                <a:lnTo>
-                  <a:pt x="56654" y="1639776"/>
-                </a:lnTo>
-                <a:close/>
-                <a:lnTo>
-                  <a:pt x="58200" y="1636522"/>
-                </a:lnTo>
-                <a:close/>
-                <a:lnTo>
-                  <a:pt x="59767" y="1633263"/>
-                </a:lnTo>
-                <a:close/>
-                <a:lnTo>
-                  <a:pt x="61356" y="1629999"/>
-                </a:lnTo>
-                <a:close/>
-                <a:lnTo>
-                  <a:pt x="62965" y="1626732"/>
-                </a:lnTo>
-                <a:close/>
-                <a:lnTo>
-                  <a:pt x="64595" y="1623463"/>
-                </a:lnTo>
-                <a:close/>
-                <a:lnTo>
-                  <a:pt x="66245" y="1620191"/>
-                </a:lnTo>
-                <a:close/>
-                <a:lnTo>
-                  <a:pt x="67916" y="1616919"/>
-                </a:lnTo>
-                <a:close/>
-                <a:lnTo>
-                  <a:pt x="69606" y="1613646"/>
-                </a:lnTo>
-                <a:close/>
-                <a:lnTo>
-                  <a:pt x="71316" y="1610374"/>
-                </a:lnTo>
-                <a:close/>
-                <a:lnTo>
-                  <a:pt x="73045" y="1607103"/>
-                </a:lnTo>
-                <a:close/>
-                <a:lnTo>
-                  <a:pt x="74793" y="1603834"/>
-                </a:lnTo>
-                <a:close/>
-                <a:lnTo>
-                  <a:pt x="76560" y="1600567"/>
-                </a:lnTo>
-                <a:close/>
-                <a:lnTo>
-                  <a:pt x="78345" y="1597305"/>
-                </a:lnTo>
-                <a:close/>
-                <a:lnTo>
-                  <a:pt x="80149" y="1594046"/>
-                </a:lnTo>
-                <a:close/>
-                <a:lnTo>
-                  <a:pt x="81971" y="1590793"/>
-                </a:lnTo>
-                <a:close/>
-                <a:lnTo>
-                  <a:pt x="83810" y="1587545"/>
-                </a:lnTo>
-                <a:close/>
-                <a:lnTo>
-                  <a:pt x="85666" y="1584304"/>
-                </a:lnTo>
-                <a:close/>
-                <a:lnTo>
-                  <a:pt x="87540" y="1581070"/>
-                </a:lnTo>
-                <a:close/>
-                <a:lnTo>
-                  <a:pt x="89431" y="1577843"/>
-                </a:lnTo>
-                <a:close/>
-                <a:lnTo>
-                  <a:pt x="91340" y="1574623"/>
-                </a:lnTo>
-                <a:close/>
-                <a:lnTo>
-                  <a:pt x="93266" y="1571409"/>
-                </a:lnTo>
-                <a:close/>
-                <a:lnTo>
-                  <a:pt x="95210" y="1568201"/>
-                </a:lnTo>
-                <a:close/>
-                <a:lnTo>
-                  <a:pt x="97173" y="1564997"/>
-                </a:lnTo>
-                <a:close/>
-                <a:lnTo>
-                  <a:pt x="99153" y="1561798"/>
-                </a:lnTo>
-                <a:close/>
-                <a:lnTo>
-                  <a:pt x="101153" y="1558603"/>
-                </a:lnTo>
-                <a:close/>
-                <a:lnTo>
-                  <a:pt x="103171" y="1555411"/>
-                </a:lnTo>
-                <a:close/>
-                <a:lnTo>
-                  <a:pt x="105208" y="1552223"/>
-                </a:lnTo>
-                <a:close/>
-                <a:lnTo>
-                  <a:pt x="107264" y="1549037"/>
-                </a:lnTo>
-                <a:close/>
-                <a:lnTo>
-                  <a:pt x="109339" y="1545853"/>
-                </a:lnTo>
-                <a:close/>
-                <a:lnTo>
-                  <a:pt x="111435" y="1542670"/>
-                </a:lnTo>
-                <a:close/>
-                <a:lnTo>
-                  <a:pt x="113550" y="1539488"/>
-                </a:lnTo>
-                <a:close/>
-                <a:lnTo>
-                  <a:pt x="115685" y="1536307"/>
-                </a:lnTo>
-                <a:close/>
-                <a:lnTo>
-                  <a:pt x="117840" y="1533126"/>
-                </a:lnTo>
-                <a:close/>
-                <a:lnTo>
-                  <a:pt x="120016" y="1529944"/>
-                </a:lnTo>
-                <a:close/>
-                <a:lnTo>
-                  <a:pt x="122213" y="1526761"/>
-                </a:lnTo>
-                <a:close/>
-                <a:lnTo>
-                  <a:pt x="124430" y="1523576"/>
-                </a:lnTo>
-                <a:close/>
-                <a:lnTo>
-                  <a:pt x="126669" y="1520389"/>
-                </a:lnTo>
-                <a:close/>
-                <a:lnTo>
-                  <a:pt x="128929" y="1517200"/>
-                </a:lnTo>
-                <a:close/>
-                <a:lnTo>
-                  <a:pt x="131211" y="1514008"/>
-                </a:lnTo>
-                <a:close/>
-                <a:lnTo>
-                  <a:pt x="133514" y="1510812"/>
-                </a:lnTo>
-                <a:close/>
-                <a:lnTo>
-                  <a:pt x="135839" y="1507612"/>
-                </a:lnTo>
-                <a:close/>
-                <a:lnTo>
-                  <a:pt x="138187" y="1504408"/>
-                </a:lnTo>
-                <a:close/>
-                <a:lnTo>
-                  <a:pt x="140556" y="1501200"/>
-                </a:lnTo>
-                <a:close/>
-                <a:lnTo>
-                  <a:pt x="142946" y="1497990"/>
-                </a:lnTo>
-                <a:close/>
-                <a:lnTo>
-                  <a:pt x="145359" y="1494776"/>
-                </a:lnTo>
-                <a:close/>
-                <a:lnTo>
-                  <a:pt x="147792" y="1491560"/>
-                </a:lnTo>
-                <a:close/>
-                <a:lnTo>
-                  <a:pt x="150247" y="1488342"/>
-                </a:lnTo>
-                <a:close/>
-                <a:lnTo>
-                  <a:pt x="152723" y="1485122"/>
-                </a:lnTo>
-                <a:close/>
-                <a:lnTo>
-                  <a:pt x="155220" y="1481901"/>
-                </a:lnTo>
-                <a:close/>
-                <a:lnTo>
-                  <a:pt x="157737" y="1478679"/>
-                </a:lnTo>
-                <a:close/>
-                <a:lnTo>
-                  <a:pt x="160275" y="1475456"/>
-                </a:lnTo>
-                <a:close/>
-                <a:lnTo>
-                  <a:pt x="162834" y="1472233"/>
-                </a:lnTo>
-                <a:close/>
-                <a:lnTo>
-                  <a:pt x="165413" y="1469010"/>
-                </a:lnTo>
-                <a:close/>
-                <a:lnTo>
-                  <a:pt x="168013" y="1465788"/>
-                </a:lnTo>
-                <a:close/>
-                <a:lnTo>
-                  <a:pt x="170632" y="1462566"/>
-                </a:lnTo>
-                <a:close/>
-                <a:lnTo>
-                  <a:pt x="173272" y="1459346"/>
-                </a:lnTo>
-                <a:close/>
-                <a:lnTo>
-                  <a:pt x="175931" y="1456127"/>
-                </a:lnTo>
-                <a:close/>
-                <a:lnTo>
-                  <a:pt x="178610" y="1452910"/>
-                </a:lnTo>
-                <a:close/>
-                <a:lnTo>
-                  <a:pt x="181308" y="1449696"/>
-                </a:lnTo>
-                <a:close/>
-                <a:lnTo>
-                  <a:pt x="184026" y="1446484"/>
-                </a:lnTo>
-                <a:close/>
-                <a:lnTo>
-                  <a:pt x="186764" y="1443275"/>
-                </a:lnTo>
-                <a:close/>
-                <a:lnTo>
-                  <a:pt x="189520" y="1440070"/>
-                </a:lnTo>
-                <a:close/>
-                <a:lnTo>
-                  <a:pt x="192295" y="1436869"/>
-                </a:lnTo>
-                <a:close/>
-                <a:lnTo>
-                  <a:pt x="195089" y="1433671"/>
-                </a:lnTo>
-                <a:close/>
-                <a:lnTo>
-                  <a:pt x="197903" y="1430478"/>
-                </a:lnTo>
-                <a:close/>
-                <a:lnTo>
-                  <a:pt x="200735" y="1427288"/>
-                </a:lnTo>
-                <a:close/>
-                <a:lnTo>
-                  <a:pt x="203586" y="1424100"/>
-                </a:lnTo>
-                <a:close/>
-                <a:lnTo>
-                  <a:pt x="206456" y="1420915"/>
-                </a:lnTo>
-                <a:close/>
-                <a:lnTo>
-                  <a:pt x="209346" y="1417732"/>
-                </a:lnTo>
-                <a:close/>
-                <a:lnTo>
-                  <a:pt x="212256" y="1414550"/>
-                </a:lnTo>
-                <a:close/>
-                <a:lnTo>
-                  <a:pt x="215185" y="1411369"/>
-                </a:lnTo>
-                <a:close/>
-                <a:lnTo>
-                  <a:pt x="218134" y="1408188"/>
-                </a:lnTo>
-                <a:close/>
-                <a:lnTo>
-                  <a:pt x="221102" y="1405006"/>
-                </a:lnTo>
-                <a:close/>
-                <a:lnTo>
-                  <a:pt x="224091" y="1401824"/>
-                </a:lnTo>
-                <a:close/>
-                <a:lnTo>
-                  <a:pt x="227100" y="1398641"/>
-                </a:lnTo>
-                <a:close/>
-                <a:lnTo>
-                  <a:pt x="230129" y="1395456"/>
-                </a:lnTo>
-                <a:close/>
-                <a:lnTo>
-                  <a:pt x="233178" y="1392269"/>
-                </a:lnTo>
-                <a:close/>
-                <a:lnTo>
-                  <a:pt x="236248" y="1389078"/>
-                </a:lnTo>
-                <a:close/>
-                <a:lnTo>
-                  <a:pt x="239338" y="1385885"/>
-                </a:lnTo>
-                <a:close/>
-                <a:lnTo>
-                  <a:pt x="242449" y="1382687"/>
-                </a:lnTo>
-                <a:close/>
-                <a:lnTo>
-                  <a:pt x="245581" y="1379485"/>
-                </a:lnTo>
-                <a:close/>
-                <a:lnTo>
-                  <a:pt x="248734" y="1376279"/>
-                </a:lnTo>
-                <a:close/>
-                <a:lnTo>
-                  <a:pt x="251908" y="1373067"/>
-                </a:lnTo>
-                <a:close/>
-                <a:lnTo>
-                  <a:pt x="255103" y="1369848"/>
-                </a:lnTo>
-                <a:close/>
-                <a:lnTo>
-                  <a:pt x="258320" y="1366624"/>
-                </a:lnTo>
-                <a:close/>
-                <a:lnTo>
-                  <a:pt x="261557" y="1363392"/>
-                </a:lnTo>
-                <a:close/>
-                <a:lnTo>
-                  <a:pt x="264817" y="1360154"/>
-                </a:lnTo>
-                <a:close/>
-                <a:lnTo>
-                  <a:pt x="268098" y="1356908"/>
-                </a:lnTo>
-                <a:close/>
-                <a:lnTo>
-                  <a:pt x="271400" y="1353655"/>
-                </a:lnTo>
-                <a:close/>
-                <a:lnTo>
-                  <a:pt x="274723" y="1350396"/>
-                </a:lnTo>
-                <a:close/>
-                <a:lnTo>
-                  <a:pt x="278068" y="1347132"/>
-                </a:lnTo>
-                <a:close/>
-                <a:lnTo>
-                  <a:pt x="281434" y="1343863"/>
-                </a:lnTo>
-                <a:close/>
-                <a:lnTo>
-                  <a:pt x="284820" y="1340589"/>
-                </a:lnTo>
-                <a:close/>
-                <a:lnTo>
-                  <a:pt x="288227" y="1337312"/>
-                </a:lnTo>
-                <a:close/>
-                <a:lnTo>
-                  <a:pt x="291655" y="1334032"/>
-                </a:lnTo>
-                <a:close/>
-                <a:lnTo>
-                  <a:pt x="295104" y="1330748"/>
-                </a:lnTo>
-                <a:close/>
-                <a:lnTo>
-                  <a:pt x="298573" y="1327463"/>
-                </a:lnTo>
-                <a:close/>
-                <a:lnTo>
-                  <a:pt x="302063" y="1324177"/>
-                </a:lnTo>
-                <a:close/>
-                <a:lnTo>
-                  <a:pt x="305572" y="1320889"/>
-                </a:lnTo>
-                <a:close/>
-                <a:lnTo>
-                  <a:pt x="309102" y="1317601"/>
-                </a:lnTo>
-                <a:close/>
-                <a:lnTo>
-                  <a:pt x="312652" y="1314313"/>
-                </a:lnTo>
-                <a:close/>
-                <a:lnTo>
-                  <a:pt x="316221" y="1311026"/>
-                </a:lnTo>
-                <a:close/>
-                <a:lnTo>
-                  <a:pt x="319811" y="1307741"/>
-                </a:lnTo>
-                <a:close/>
-                <a:lnTo>
-                  <a:pt x="323420" y="1304457"/>
-                </a:lnTo>
-                <a:close/>
-                <a:lnTo>
-                  <a:pt x="327048" y="1301176"/>
-                </a:lnTo>
-                <a:close/>
-                <a:lnTo>
-                  <a:pt x="330696" y="1297898"/>
-                </a:lnTo>
-                <a:close/>
-                <a:lnTo>
-                  <a:pt x="334364" y="1294623"/>
-                </a:lnTo>
-                <a:close/>
-                <a:lnTo>
-                  <a:pt x="338050" y="1291353"/>
-                </a:lnTo>
-                <a:close/>
-                <a:lnTo>
-                  <a:pt x="341756" y="1288087"/>
-                </a:lnTo>
-                <a:close/>
-                <a:lnTo>
-                  <a:pt x="345481" y="1284827"/>
-                </a:lnTo>
-                <a:close/>
-                <a:lnTo>
-                  <a:pt x="349224" y="1281572"/>
-                </a:lnTo>
-                <a:close/>
-                <a:lnTo>
-                  <a:pt x="352987" y="1278322"/>
-                </a:lnTo>
-                <a:close/>
-                <a:lnTo>
-                  <a:pt x="356769" y="1275077"/>
-                </a:lnTo>
-                <a:close/>
-                <a:lnTo>
-                  <a:pt x="360570" y="1271837"/>
-                </a:lnTo>
-                <a:close/>
-                <a:lnTo>
-                  <a:pt x="364391" y="1268602"/>
-                </a:lnTo>
-                <a:close/>
-                <a:lnTo>
-                  <a:pt x="368231" y="1265371"/>
-                </a:lnTo>
-                <a:close/>
-                <a:lnTo>
-                  <a:pt x="372092" y="1262144"/>
-                </a:lnTo>
-                <a:close/>
-                <a:lnTo>
-                  <a:pt x="375971" y="1258921"/>
-                </a:lnTo>
-                <a:close/>
-                <a:lnTo>
-                  <a:pt x="379871" y="1255702"/>
-                </a:lnTo>
-                <a:close/>
-                <a:lnTo>
-                  <a:pt x="383791" y="1252487"/>
-                </a:lnTo>
-                <a:close/>
-                <a:lnTo>
-                  <a:pt x="387731" y="1249275"/>
-                </a:lnTo>
-                <a:close/>
-                <a:lnTo>
-                  <a:pt x="391691" y="1246067"/>
-                </a:lnTo>
-                <a:close/>
-                <a:lnTo>
-                  <a:pt x="395672" y="1242862"/>
-                </a:lnTo>
-                <a:close/>
-                <a:lnTo>
-                  <a:pt x="399673" y="1239659"/>
-                </a:lnTo>
-                <a:close/>
-                <a:lnTo>
-                  <a:pt x="403695" y="1236459"/>
-                </a:lnTo>
-                <a:close/>
-                <a:lnTo>
-                  <a:pt x="407738" y="1233262"/>
-                </a:lnTo>
-                <a:close/>
-                <a:lnTo>
-                  <a:pt x="411801" y="1230067"/>
-                </a:lnTo>
-                <a:close/>
-                <a:lnTo>
-                  <a:pt x="415885" y="1226874"/>
-                </a:lnTo>
-                <a:close/>
-                <a:lnTo>
-                  <a:pt x="419991" y="1223683"/>
-                </a:lnTo>
-                <a:close/>
-                <a:lnTo>
-                  <a:pt x="424117" y="1220494"/>
-                </a:lnTo>
-                <a:close/>
-                <a:lnTo>
-                  <a:pt x="428265" y="1217306"/>
-                </a:lnTo>
-                <a:close/>
-                <a:lnTo>
-                  <a:pt x="432435" y="1214119"/>
-                </a:lnTo>
-                <a:close/>
-                <a:lnTo>
-                  <a:pt x="436625" y="1210934"/>
-                </a:lnTo>
-                <a:close/>
-                <a:lnTo>
-                  <a:pt x="440838" y="1207750"/>
-                </a:lnTo>
-                <a:close/>
-                <a:lnTo>
-                  <a:pt x="445071" y="1204566"/>
-                </a:lnTo>
-                <a:close/>
-                <a:lnTo>
-                  <a:pt x="449326" y="1201383"/>
-                </a:lnTo>
-                <a:close/>
-                <a:lnTo>
-                  <a:pt x="453603" y="1198200"/>
-                </a:lnTo>
-                <a:close/>
-                <a:lnTo>
-                  <a:pt x="457900" y="1195017"/>
-                </a:lnTo>
-                <a:close/>
-                <a:lnTo>
-                  <a:pt x="462218" y="1191834"/>
-                </a:lnTo>
-                <a:close/>
-                <a:lnTo>
-                  <a:pt x="466556" y="1188650"/>
-                </a:lnTo>
-                <a:close/>
-                <a:lnTo>
-                  <a:pt x="470916" y="1185465"/>
-                </a:lnTo>
-                <a:close/>
-                <a:lnTo>
-                  <a:pt x="475296" y="1182279"/>
-                </a:lnTo>
-                <a:close/>
-                <a:lnTo>
-                  <a:pt x="479696" y="1179092"/>
-                </a:lnTo>
-                <a:close/>
-                <a:lnTo>
-                  <a:pt x="484117" y="1175903"/>
-                </a:lnTo>
-                <a:close/>
-                <a:lnTo>
-                  <a:pt x="488558" y="1172712"/>
-                </a:lnTo>
-                <a:close/>
-                <a:lnTo>
-                  <a:pt x="493019" y="1169519"/>
-                </a:lnTo>
-                <a:close/>
-                <a:lnTo>
-                  <a:pt x="497500" y="1166324"/>
-                </a:lnTo>
-                <a:close/>
-                <a:lnTo>
-                  <a:pt x="502000" y="1163127"/>
-                </a:lnTo>
-                <a:close/>
-                <a:lnTo>
-                  <a:pt x="506521" y="1159926"/>
-                </a:lnTo>
-                <a:close/>
-                <a:lnTo>
-                  <a:pt x="511061" y="1156722"/>
-                </a:lnTo>
-                <a:close/>
-                <a:lnTo>
-                  <a:pt x="515620" y="1153515"/>
-                </a:lnTo>
-                <a:close/>
-                <a:lnTo>
-                  <a:pt x="520199" y="1150305"/>
-                </a:lnTo>
-                <a:close/>
-                <a:lnTo>
-                  <a:pt x="524797" y="1147090"/>
-                </a:lnTo>
-                <a:close/>
-                <a:lnTo>
-                  <a:pt x="529414" y="1143871"/>
-                </a:lnTo>
-                <a:close/>
-                <a:lnTo>
-                  <a:pt x="534050" y="1140648"/>
-                </a:lnTo>
-                <a:close/>
-                <a:lnTo>
-                  <a:pt x="538705" y="1137421"/>
-                </a:lnTo>
-                <a:close/>
-                <a:lnTo>
-                  <a:pt x="543379" y="1134189"/>
-                </a:lnTo>
-                <a:close/>
-                <a:lnTo>
-                  <a:pt x="548072" y="1130952"/>
-                </a:lnTo>
-                <a:close/>
-                <a:lnTo>
-                  <a:pt x="552784" y="1127712"/>
-                </a:lnTo>
-                <a:close/>
-                <a:lnTo>
-                  <a:pt x="557516" y="1124468"/>
-                </a:lnTo>
-                <a:close/>
-                <a:lnTo>
-                  <a:pt x="562266" y="1121221"/>
-                </a:lnTo>
-                <a:close/>
-                <a:lnTo>
-                  <a:pt x="567037" y="1117971"/>
-                </a:lnTo>
-                <a:close/>
-                <a:lnTo>
-                  <a:pt x="571827" y="1114718"/>
-                </a:lnTo>
-                <a:close/>
-                <a:lnTo>
-                  <a:pt x="576637" y="1111463"/>
-                </a:lnTo>
-                <a:close/>
-                <a:lnTo>
-                  <a:pt x="581467" y="1108205"/>
-                </a:lnTo>
-                <a:close/>
-                <a:lnTo>
-                  <a:pt x="586318" y="1104946"/>
-                </a:lnTo>
-                <a:close/>
-                <a:lnTo>
-                  <a:pt x="591188" y="1101685"/>
-                </a:lnTo>
-                <a:close/>
-                <a:lnTo>
-                  <a:pt x="596079" y="1098423"/>
-                </a:lnTo>
-                <a:close/>
-                <a:lnTo>
-                  <a:pt x="600991" y="1095160"/>
-                </a:lnTo>
-                <a:close/>
-                <a:lnTo>
-                  <a:pt x="605923" y="1091897"/>
-                </a:lnTo>
-                <a:close/>
-                <a:lnTo>
-                  <a:pt x="610876" y="1088633"/>
-                </a:lnTo>
-                <a:close/>
-                <a:lnTo>
-                  <a:pt x="615850" y="1085369"/>
-                </a:lnTo>
-                <a:close/>
-                <a:lnTo>
-                  <a:pt x="620846" y="1082106"/>
-                </a:lnTo>
-                <a:close/>
-                <a:lnTo>
-                  <a:pt x="625862" y="1078843"/>
-                </a:lnTo>
-                <a:close/>
-                <a:lnTo>
-                  <a:pt x="630900" y="1075581"/>
-                </a:lnTo>
-                <a:close/>
-                <a:lnTo>
-                  <a:pt x="635960" y="1072321"/>
-                </a:lnTo>
-                <a:close/>
-                <a:lnTo>
-                  <a:pt x="641041" y="1069062"/>
-                </a:lnTo>
-                <a:close/>
-                <a:lnTo>
-                  <a:pt x="646144" y="1065804"/>
-                </a:lnTo>
-                <a:close/>
-                <a:lnTo>
-                  <a:pt x="651269" y="1062549"/>
-                </a:lnTo>
-                <a:close/>
-                <a:lnTo>
-                  <a:pt x="656416" y="1059296"/>
-                </a:lnTo>
-                <a:close/>
-                <a:lnTo>
-                  <a:pt x="661585" y="1056045"/>
-                </a:lnTo>
-                <a:close/>
-                <a:lnTo>
-                  <a:pt x="666775" y="1052797"/>
-                </a:lnTo>
-                <a:close/>
-                <a:lnTo>
-                  <a:pt x="671986" y="1049550"/>
-                </a:lnTo>
-                <a:close/>
-                <a:lnTo>
-                  <a:pt x="677218" y="1046305"/>
-                </a:lnTo>
-                <a:close/>
-                <a:lnTo>
-                  <a:pt x="682472" y="1043063"/>
-                </a:lnTo>
-                <a:close/>
-                <a:lnTo>
-                  <a:pt x="687746" y="1039822"/>
-                </a:lnTo>
-                <a:close/>
-                <a:lnTo>
-                  <a:pt x="693040" y="1036583"/>
-                </a:lnTo>
-                <a:close/>
-                <a:lnTo>
-                  <a:pt x="698354" y="1033345"/>
-                </a:lnTo>
-                <a:close/>
-                <a:lnTo>
-                  <a:pt x="703689" y="1030109"/>
-                </a:lnTo>
-                <a:close/>
-                <a:lnTo>
-                  <a:pt x="709043" y="1026875"/>
-                </a:lnTo>
-                <a:close/>
-                <a:lnTo>
-                  <a:pt x="714417" y="1023643"/>
-                </a:lnTo>
-                <a:close/>
-                <a:lnTo>
-                  <a:pt x="719810" y="1020412"/>
-                </a:lnTo>
-                <a:close/>
-                <a:lnTo>
-                  <a:pt x="725222" y="1017182"/>
-                </a:lnTo>
-                <a:close/>
-                <a:lnTo>
-                  <a:pt x="730653" y="1013954"/>
-                </a:lnTo>
-                <a:close/>
-                <a:lnTo>
-                  <a:pt x="736103" y="1010727"/>
-                </a:lnTo>
-                <a:close/>
-                <a:lnTo>
-                  <a:pt x="741571" y="1007501"/>
-                </a:lnTo>
-                <a:close/>
-                <a:lnTo>
-                  <a:pt x="747058" y="1004277"/>
-                </a:lnTo>
-                <a:close/>
-                <a:lnTo>
-                  <a:pt x="752563" y="1001053"/>
-                </a:lnTo>
-                <a:close/>
-                <a:lnTo>
-                  <a:pt x="758085" y="997831"/>
-                </a:lnTo>
-                <a:close/>
-                <a:lnTo>
-                  <a:pt x="763625" y="994610"/>
-                </a:lnTo>
-                <a:close/>
-                <a:lnTo>
-                  <a:pt x="769183" y="991389"/>
-                </a:lnTo>
-                <a:close/>
-                <a:lnTo>
-                  <a:pt x="774758" y="988170"/>
-                </a:lnTo>
-                <a:close/>
-                <a:lnTo>
-                  <a:pt x="780349" y="984951"/>
-                </a:lnTo>
-                <a:close/>
-                <a:lnTo>
-                  <a:pt x="785959" y="981733"/>
-                </a:lnTo>
-                <a:close/>
-                <a:lnTo>
-                  <a:pt x="791586" y="978516"/>
-                </a:lnTo>
-                <a:close/>
-                <a:lnTo>
-                  <a:pt x="797232" y="975299"/>
-                </a:lnTo>
-                <a:close/>
-                <a:lnTo>
-                  <a:pt x="802895" y="972083"/>
-                </a:lnTo>
-                <a:close/>
-                <a:lnTo>
-                  <a:pt x="808577" y="968868"/>
-                </a:lnTo>
-                <a:close/>
-                <a:lnTo>
-                  <a:pt x="814278" y="965653"/>
-                </a:lnTo>
-                <a:close/>
-                <a:lnTo>
-                  <a:pt x="819999" y="962438"/>
-                </a:lnTo>
-                <a:close/>
-                <a:lnTo>
-                  <a:pt x="825738" y="959224"/>
-                </a:lnTo>
-                <a:close/>
-                <a:lnTo>
-                  <a:pt x="831497" y="956010"/>
-                </a:lnTo>
-                <a:close/>
-                <a:lnTo>
-                  <a:pt x="837277" y="952796"/>
-                </a:lnTo>
-                <a:close/>
-                <a:lnTo>
-                  <a:pt x="843076" y="949583"/>
-                </a:lnTo>
-                <a:close/>
-                <a:lnTo>
-                  <a:pt x="848896" y="946369"/>
-                </a:lnTo>
-                <a:close/>
-                <a:lnTo>
-                  <a:pt x="854736" y="943156"/>
-                </a:lnTo>
-                <a:close/>
-                <a:lnTo>
-                  <a:pt x="860598" y="939943"/>
-                </a:lnTo>
-                <a:close/>
-                <a:lnTo>
-                  <a:pt x="866481" y="936729"/>
-                </a:lnTo>
-                <a:close/>
-                <a:lnTo>
-                  <a:pt x="872385" y="933516"/>
-                </a:lnTo>
-                <a:close/>
-                <a:lnTo>
-                  <a:pt x="878311" y="930302"/>
-                </a:lnTo>
-                <a:close/>
-                <a:lnTo>
-                  <a:pt x="884259" y="927088"/>
-                </a:lnTo>
-                <a:close/>
-                <a:lnTo>
-                  <a:pt x="890230" y="923874"/>
-                </a:lnTo>
-                <a:close/>
-                <a:lnTo>
-                  <a:pt x="896223" y="920659"/>
-                </a:lnTo>
-                <a:close/>
-                <a:lnTo>
-                  <a:pt x="902239" y="917444"/>
-                </a:lnTo>
-                <a:close/>
-                <a:lnTo>
-                  <a:pt x="908279" y="914229"/>
-                </a:lnTo>
-                <a:close/>
-                <a:lnTo>
-                  <a:pt x="914341" y="911013"/>
-                </a:lnTo>
-                <a:close/>
-                <a:lnTo>
-                  <a:pt x="920426" y="907797"/>
-                </a:lnTo>
-                <a:close/>
-                <a:lnTo>
-                  <a:pt x="926535" y="904580"/>
-                </a:lnTo>
-                <a:close/>
-                <a:lnTo>
-                  <a:pt x="932665" y="901364"/>
-                </a:lnTo>
-                <a:close/>
-                <a:lnTo>
-                  <a:pt x="938819" y="898147"/>
-                </a:lnTo>
-                <a:close/>
-                <a:lnTo>
-                  <a:pt x="944994" y="894929"/>
-                </a:lnTo>
-                <a:close/>
-                <a:lnTo>
-                  <a:pt x="951192" y="891712"/>
-                </a:lnTo>
-                <a:close/>
-                <a:lnTo>
-                  <a:pt x="957411" y="888495"/>
-                </a:lnTo>
-                <a:close/>
-                <a:lnTo>
-                  <a:pt x="963653" y="885278"/>
-                </a:lnTo>
-                <a:close/>
-                <a:lnTo>
-                  <a:pt x="969915" y="882061"/>
-                </a:lnTo>
-                <a:close/>
-                <a:lnTo>
-                  <a:pt x="976199" y="878845"/>
-                </a:lnTo>
-                <a:close/>
-                <a:lnTo>
-                  <a:pt x="982504" y="875628"/>
-                </a:lnTo>
-                <a:close/>
-                <a:lnTo>
-                  <a:pt x="988830" y="872413"/>
-                </a:lnTo>
-                <a:close/>
-                <a:lnTo>
-                  <a:pt x="995177" y="869197"/>
-                </a:lnTo>
-                <a:close/>
-                <a:lnTo>
-                  <a:pt x="1001545" y="865982"/>
-                </a:lnTo>
-                <a:close/>
-                <a:lnTo>
-                  <a:pt x="1007933" y="862768"/>
-                </a:lnTo>
-                <a:close/>
-                <a:lnTo>
-                  <a:pt x="1014341" y="859554"/>
-                </a:lnTo>
-                <a:close/>
-                <a:lnTo>
-                  <a:pt x="1020769" y="856341"/>
-                </a:lnTo>
-                <a:close/>
-                <a:lnTo>
-                  <a:pt x="1027216" y="853129"/>
-                </a:lnTo>
-                <a:close/>
-                <a:lnTo>
-                  <a:pt x="1033684" y="849918"/>
-                </a:lnTo>
-                <a:close/>
-                <a:lnTo>
-                  <a:pt x="1040171" y="846707"/>
-                </a:lnTo>
-                <a:close/>
-                <a:lnTo>
-                  <a:pt x="1046677" y="843498"/>
-                </a:lnTo>
-                <a:close/>
-                <a:lnTo>
-                  <a:pt x="1053202" y="840290"/>
-                </a:lnTo>
-                <a:close/>
-                <a:lnTo>
-                  <a:pt x="1059747" y="837083"/>
-                </a:lnTo>
-                <a:close/>
-                <a:lnTo>
-                  <a:pt x="1066310" y="833876"/>
-                </a:lnTo>
-                <a:close/>
-                <a:lnTo>
-                  <a:pt x="1072892" y="830670"/>
-                </a:lnTo>
-                <a:close/>
-                <a:lnTo>
-                  <a:pt x="1079494" y="827465"/>
-                </a:lnTo>
-                <a:close/>
-                <a:lnTo>
-                  <a:pt x="1086114" y="824259"/>
-                </a:lnTo>
-                <a:close/>
-                <a:lnTo>
-                  <a:pt x="1092754" y="821054"/>
-                </a:lnTo>
-                <a:close/>
-                <a:lnTo>
-                  <a:pt x="1099413" y="817848"/>
-                </a:lnTo>
-                <a:close/>
-                <a:lnTo>
-                  <a:pt x="1106091" y="814642"/>
-                </a:lnTo>
-                <a:close/>
-                <a:lnTo>
-                  <a:pt x="1112788" y="811435"/>
-                </a:lnTo>
-                <a:close/>
-                <a:lnTo>
-                  <a:pt x="1119505" y="808226"/>
-                </a:lnTo>
-                <a:close/>
-                <a:lnTo>
-                  <a:pt x="1126241" y="805017"/>
-                </a:lnTo>
-                <a:close/>
-                <a:lnTo>
-                  <a:pt x="1132996" y="801807"/>
-                </a:lnTo>
-                <a:close/>
-                <a:lnTo>
-                  <a:pt x="1139771" y="798594"/>
-                </a:lnTo>
-                <a:close/>
-                <a:lnTo>
-                  <a:pt x="1146565" y="795380"/>
-                </a:lnTo>
-                <a:close/>
-                <a:lnTo>
-                  <a:pt x="1153378" y="792164"/>
-                </a:lnTo>
-                <a:close/>
-                <a:lnTo>
-                  <a:pt x="1160211" y="788945"/>
-                </a:lnTo>
-                <a:close/>
-                <a:lnTo>
-                  <a:pt x="1167063" y="785724"/>
-                </a:lnTo>
-                <a:close/>
-                <a:lnTo>
-                  <a:pt x="1173935" y="782500"/>
-                </a:lnTo>
-                <a:close/>
-                <a:lnTo>
-                  <a:pt x="1180826" y="779274"/>
-                </a:lnTo>
-                <a:close/>
-                <a:lnTo>
-                  <a:pt x="1187737" y="776044"/>
-                </a:lnTo>
-                <a:close/>
-                <a:lnTo>
-                  <a:pt x="1194668" y="772810"/>
-                </a:lnTo>
-                <a:close/>
-                <a:lnTo>
-                  <a:pt x="1201618" y="769573"/>
-                </a:lnTo>
-                <a:close/>
-                <a:lnTo>
-                  <a:pt x="1208588" y="766332"/>
-                </a:lnTo>
-                <a:close/>
-                <a:lnTo>
-                  <a:pt x="1215577" y="763088"/>
-                </a:lnTo>
-                <a:close/>
-                <a:lnTo>
-                  <a:pt x="1222586" y="759840"/>
-                </a:lnTo>
-                <a:close/>
-                <a:lnTo>
-                  <a:pt x="1229616" y="756590"/>
-                </a:lnTo>
-                <a:close/>
-                <a:lnTo>
-                  <a:pt x="1236665" y="753338"/>
-                </a:lnTo>
-                <a:close/>
-                <a:lnTo>
-                  <a:pt x="1243734" y="750084"/>
-                </a:lnTo>
-                <a:close/>
-                <a:lnTo>
-                  <a:pt x="1250823" y="746830"/>
-                </a:lnTo>
-                <a:close/>
-                <a:lnTo>
-                  <a:pt x="1257932" y="743575"/>
-                </a:lnTo>
-                <a:close/>
-                <a:lnTo>
-                  <a:pt x="1265061" y="740321"/>
-                </a:lnTo>
-                <a:close/>
-                <a:lnTo>
-                  <a:pt x="1272211" y="737068"/>
-                </a:lnTo>
-                <a:close/>
-                <a:lnTo>
-                  <a:pt x="1279380" y="733817"/>
-                </a:lnTo>
-                <a:close/>
-                <a:lnTo>
-                  <a:pt x="1286571" y="730567"/>
-                </a:lnTo>
-                <a:close/>
-                <a:lnTo>
-                  <a:pt x="1293781" y="727321"/>
-                </a:lnTo>
-                <a:close/>
-                <a:lnTo>
-                  <a:pt x="1301012" y="724077"/>
-                </a:lnTo>
-                <a:close/>
-                <a:lnTo>
-                  <a:pt x="1308264" y="720838"/>
-                </a:lnTo>
-                <a:close/>
-                <a:lnTo>
-                  <a:pt x="1315536" y="717603"/>
-                </a:lnTo>
-                <a:close/>
-                <a:lnTo>
-                  <a:pt x="1322829" y="714374"/>
-                </a:lnTo>
-                <a:close/>
-                <a:lnTo>
-                  <a:pt x="1330143" y="711150"/>
-                </a:lnTo>
-                <a:close/>
-                <a:lnTo>
-                  <a:pt x="1337477" y="707932"/>
-                </a:lnTo>
-                <a:close/>
-                <a:lnTo>
-                  <a:pt x="1344832" y="704722"/>
-                </a:lnTo>
-                <a:close/>
-                <a:lnTo>
-                  <a:pt x="1352209" y="701518"/>
-                </a:lnTo>
-                <a:close/>
-                <a:lnTo>
-                  <a:pt x="1359606" y="698323"/>
-                </a:lnTo>
-                <a:close/>
-                <a:lnTo>
-                  <a:pt x="1367024" y="695137"/>
-                </a:lnTo>
-                <a:close/>
-                <a:lnTo>
-                  <a:pt x="1374464" y="691960"/>
-                </a:lnTo>
-                <a:close/>
-                <a:lnTo>
-                  <a:pt x="1381924" y="688792"/>
-                </a:lnTo>
-                <a:close/>
-                <a:lnTo>
-                  <a:pt x="1389406" y="685632"/>
-                </a:lnTo>
-                <a:close/>
-                <a:lnTo>
-                  <a:pt x="1396909" y="682480"/>
-                </a:lnTo>
-                <a:close/>
-                <a:lnTo>
-                  <a:pt x="1404433" y="679336"/>
-                </a:lnTo>
-                <a:close/>
-                <a:lnTo>
-                  <a:pt x="1411977" y="676197"/>
-                </a:lnTo>
-                <a:close/>
-                <a:lnTo>
-                  <a:pt x="1419543" y="673064"/>
-                </a:lnTo>
-                <a:close/>
-                <a:lnTo>
-                  <a:pt x="1427129" y="669935"/>
-                </a:lnTo>
-                <a:close/>
-                <a:lnTo>
-                  <a:pt x="1434736" y="666810"/>
-                </a:lnTo>
-                <a:close/>
-                <a:lnTo>
-                  <a:pt x="1442363" y="663688"/>
-                </a:lnTo>
-                <a:close/>
-                <a:lnTo>
-                  <a:pt x="1450011" y="660568"/>
-                </a:lnTo>
-                <a:close/>
-                <a:lnTo>
-                  <a:pt x="1457680" y="657449"/>
-                </a:lnTo>
-                <a:close/>
-                <a:lnTo>
-                  <a:pt x="1465368" y="654332"/>
-                </a:lnTo>
-                <a:close/>
-                <a:lnTo>
-                  <a:pt x="1473078" y="651213"/>
-                </a:lnTo>
-                <a:close/>
-                <a:lnTo>
-                  <a:pt x="1480807" y="648094"/>
-                </a:lnTo>
-                <a:close/>
-                <a:lnTo>
-                  <a:pt x="1488557" y="644973"/>
-                </a:lnTo>
-                <a:close/>
-                <a:lnTo>
-                  <a:pt x="1496327" y="641850"/>
-                </a:lnTo>
-                <a:close/>
-                <a:lnTo>
-                  <a:pt x="1504117" y="638723"/>
-                </a:lnTo>
-                <a:close/>
-                <a:lnTo>
-                  <a:pt x="1511927" y="635592"/>
-                </a:lnTo>
-                <a:close/>
-                <a:lnTo>
-                  <a:pt x="1519758" y="632456"/>
-                </a:lnTo>
-                <a:close/>
-                <a:lnTo>
-                  <a:pt x="1527608" y="629314"/>
-                </a:lnTo>
-                <a:close/>
-                <a:lnTo>
-                  <a:pt x="1535477" y="626166"/>
-                </a:lnTo>
-                <a:close/>
-                <a:lnTo>
-                  <a:pt x="1543367" y="623010"/>
-                </a:lnTo>
-                <a:close/>
-                <a:lnTo>
-                  <a:pt x="1551276" y="619847"/>
-                </a:lnTo>
-                <a:close/>
-                <a:lnTo>
-                  <a:pt x="1559205" y="616674"/>
-                </a:lnTo>
-                <a:close/>
-                <a:lnTo>
-                  <a:pt x="1567154" y="613494"/>
-                </a:lnTo>
-                <a:close/>
-                <a:lnTo>
-                  <a:pt x="1575122" y="610306"/>
-                </a:lnTo>
-                <a:close/>
-                <a:lnTo>
-                  <a:pt x="1583110" y="607110"/>
-                </a:lnTo>
-                <a:close/>
-                <a:lnTo>
-                  <a:pt x="1591118" y="603907"/>
-                </a:lnTo>
-                <a:close/>
-                <a:lnTo>
-                  <a:pt x="1599144" y="600697"/>
-                </a:lnTo>
-                <a:close/>
-                <a:lnTo>
-                  <a:pt x="1607191" y="597481"/>
-                </a:lnTo>
-                <a:close/>
-                <a:lnTo>
-                  <a:pt x="1615257" y="594258"/>
-                </a:lnTo>
-                <a:close/>
-                <a:lnTo>
-                  <a:pt x="1623342" y="591030"/>
-                </a:lnTo>
-                <a:close/>
-                <a:lnTo>
-                  <a:pt x="1631447" y="587796"/>
-                </a:lnTo>
-                <a:close/>
-                <a:lnTo>
-                  <a:pt x="1639571" y="584557"/>
-                </a:lnTo>
-                <a:close/>
-                <a:lnTo>
-                  <a:pt x="1647714" y="581313"/>
-                </a:lnTo>
-                <a:close/>
-                <a:lnTo>
-                  <a:pt x="1655877" y="578065"/>
-                </a:lnTo>
-                <a:close/>
-                <a:lnTo>
-                  <a:pt x="1664059" y="574812"/>
-                </a:lnTo>
-                <a:close/>
-                <a:lnTo>
-                  <a:pt x="1672260" y="571556"/>
-                </a:lnTo>
-                <a:close/>
-                <a:lnTo>
-                  <a:pt x="1680481" y="568297"/>
-                </a:lnTo>
-                <a:close/>
-                <a:lnTo>
-                  <a:pt x="1688721" y="565034"/>
-                </a:lnTo>
-                <a:close/>
-                <a:lnTo>
-                  <a:pt x="1696980" y="561769"/>
-                </a:lnTo>
-                <a:close/>
-                <a:lnTo>
-                  <a:pt x="1705258" y="558501"/>
-                </a:lnTo>
-                <a:close/>
-                <a:lnTo>
-                  <a:pt x="1713555" y="555231"/>
-                </a:lnTo>
-                <a:close/>
-                <a:lnTo>
-                  <a:pt x="1721871" y="551959"/>
-                </a:lnTo>
-                <a:close/>
-                <a:lnTo>
-                  <a:pt x="1730207" y="548686"/>
-                </a:lnTo>
-                <a:close/>
-                <a:lnTo>
-                  <a:pt x="1738561" y="545412"/>
-                </a:lnTo>
-                <a:close/>
-                <a:lnTo>
-                  <a:pt x="1746935" y="542137"/>
-                </a:lnTo>
-                <a:close/>
-                <a:lnTo>
-                  <a:pt x="1755327" y="538861"/>
-                </a:lnTo>
-                <a:close/>
-                <a:lnTo>
-                  <a:pt x="1763740" y="535585"/>
-                </a:lnTo>
-                <a:close/>
-                <a:lnTo>
-                  <a:pt x="1772171" y="532308"/>
-                </a:lnTo>
-                <a:close/>
-                <a:lnTo>
-                  <a:pt x="1780623" y="529031"/>
-                </a:lnTo>
-                <a:close/>
-                <a:lnTo>
-                  <a:pt x="1789095" y="525753"/>
-                </a:lnTo>
-                <a:close/>
-                <a:lnTo>
-                  <a:pt x="1797586" y="522476"/>
-                </a:lnTo>
-                <a:close/>
-                <a:lnTo>
-                  <a:pt x="1806098" y="519198"/>
-                </a:lnTo>
-                <a:close/>
-                <a:lnTo>
-                  <a:pt x="1814631" y="515921"/>
-                </a:lnTo>
-                <a:close/>
-                <a:lnTo>
-                  <a:pt x="1823184" y="512643"/>
-                </a:lnTo>
-                <a:close/>
-                <a:lnTo>
-                  <a:pt x="1831758" y="509366"/>
-                </a:lnTo>
-                <a:close/>
-                <a:lnTo>
-                  <a:pt x="1840353" y="506090"/>
-                </a:lnTo>
-                <a:close/>
-                <a:lnTo>
-                  <a:pt x="1848970" y="502813"/>
-                </a:lnTo>
-                <a:close/>
-                <a:lnTo>
-                  <a:pt x="1857607" y="499538"/>
-                </a:lnTo>
-                <a:close/>
-                <a:lnTo>
-                  <a:pt x="1866267" y="496263"/>
-                </a:lnTo>
-                <a:close/>
-                <a:lnTo>
-                  <a:pt x="1874948" y="492989"/>
-                </a:lnTo>
-                <a:close/>
-                <a:lnTo>
-                  <a:pt x="1883650" y="489716"/>
-                </a:lnTo>
-                <a:close/>
-                <a:lnTo>
-                  <a:pt x="1892375" y="486444"/>
-                </a:lnTo>
-                <a:close/>
-                <a:lnTo>
-                  <a:pt x="1901123" y="483173"/>
-                </a:lnTo>
-                <a:close/>
-                <a:lnTo>
-                  <a:pt x="1909892" y="479903"/>
-                </a:lnTo>
-                <a:close/>
-                <a:lnTo>
-                  <a:pt x="1918685" y="476635"/>
-                </a:lnTo>
-                <a:close/>
-                <a:lnTo>
-                  <a:pt x="1927500" y="473368"/>
-                </a:lnTo>
-                <a:close/>
-                <a:lnTo>
-                  <a:pt x="1936338" y="470102"/>
-                </a:lnTo>
-                <a:close/>
-                <a:lnTo>
-                  <a:pt x="1945199" y="466838"/>
-                </a:lnTo>
-                <a:close/>
-                <a:lnTo>
-                  <a:pt x="1954083" y="463576"/>
-                </a:lnTo>
-                <a:close/>
-                <a:lnTo>
-                  <a:pt x="1962989" y="460315"/>
-                </a:lnTo>
-                <a:close/>
-                <a:lnTo>
-                  <a:pt x="1971918" y="457056"/>
-                </a:lnTo>
-                <a:close/>
-                <a:lnTo>
-                  <a:pt x="1980869" y="453798"/>
-                </a:lnTo>
-                <a:close/>
-                <a:lnTo>
-                  <a:pt x="1989842" y="450541"/>
-                </a:lnTo>
-                <a:close/>
-                <a:lnTo>
-                  <a:pt x="1998836" y="447285"/>
-                </a:lnTo>
-                <a:close/>
-                <a:lnTo>
-                  <a:pt x="2007852" y="444029"/>
-                </a:lnTo>
-                <a:close/>
-                <a:lnTo>
-                  <a:pt x="2016889" y="440775"/>
-                </a:lnTo>
-                <a:close/>
-                <a:lnTo>
-                  <a:pt x="2025947" y="437522"/>
-                </a:lnTo>
-                <a:close/>
-                <a:lnTo>
-                  <a:pt x="2035026" y="434269"/>
-                </a:lnTo>
-                <a:close/>
-                <a:lnTo>
-                  <a:pt x="2044125" y="431016"/>
-                </a:lnTo>
-                <a:close/>
-                <a:lnTo>
-                  <a:pt x="2053245" y="427765"/>
-                </a:lnTo>
-                <a:close/>
-                <a:lnTo>
-                  <a:pt x="2062384" y="424513"/>
-                </a:lnTo>
-                <a:close/>
-                <a:lnTo>
-                  <a:pt x="2071544" y="421262"/>
-                </a:lnTo>
-                <a:close/>
-                <a:lnTo>
-                  <a:pt x="2080723" y="418011"/>
-                </a:lnTo>
-                <a:close/>
-                <a:lnTo>
-                  <a:pt x="2089921" y="414760"/>
-                </a:lnTo>
-                <a:close/>
-                <a:lnTo>
-                  <a:pt x="2099138" y="411509"/>
-                </a:lnTo>
-                <a:close/>
-                <a:lnTo>
-                  <a:pt x="2108374" y="408258"/>
-                </a:lnTo>
-                <a:close/>
-                <a:lnTo>
-                  <a:pt x="2117629" y="405006"/>
-                </a:lnTo>
-                <a:close/>
-                <a:lnTo>
-                  <a:pt x="2126903" y="401754"/>
-                </a:lnTo>
-                <a:close/>
-                <a:lnTo>
-                  <a:pt x="2136194" y="398502"/>
-                </a:lnTo>
-                <a:close/>
-                <a:lnTo>
-                  <a:pt x="2145504" y="395250"/>
-                </a:lnTo>
-                <a:close/>
-                <a:lnTo>
-                  <a:pt x="2154831" y="391997"/>
-                </a:lnTo>
-                <a:close/>
-                <a:lnTo>
-                  <a:pt x="2164176" y="388743"/>
-                </a:lnTo>
-                <a:close/>
-                <a:lnTo>
-                  <a:pt x="2173539" y="385489"/>
-                </a:lnTo>
-                <a:close/>
-                <a:lnTo>
-                  <a:pt x="2182920" y="382234"/>
-                </a:lnTo>
-                <a:close/>
-                <a:lnTo>
-                  <a:pt x="2192319" y="378979"/>
-                </a:lnTo>
-                <a:close/>
-                <a:lnTo>
-                  <a:pt x="2201736" y="375724"/>
-                </a:lnTo>
-                <a:close/>
-                <a:lnTo>
-                  <a:pt x="2211172" y="372469"/>
-                </a:lnTo>
-                <a:close/>
-                <a:lnTo>
-                  <a:pt x="2220626" y="369213"/>
-                </a:lnTo>
-                <a:close/>
-                <a:lnTo>
-                  <a:pt x="2230098" y="365957"/>
-                </a:lnTo>
-                <a:close/>
-                <a:lnTo>
-                  <a:pt x="2239589" y="362701"/>
-                </a:lnTo>
-                <a:close/>
-                <a:lnTo>
-                  <a:pt x="2249098" y="359445"/>
-                </a:lnTo>
-                <a:close/>
-                <a:lnTo>
-                  <a:pt x="2258626" y="356190"/>
-                </a:lnTo>
-                <a:close/>
-                <a:lnTo>
-                  <a:pt x="2268173" y="352934"/>
-                </a:lnTo>
-                <a:close/>
-                <a:lnTo>
-                  <a:pt x="2277738" y="349678"/>
-                </a:lnTo>
-                <a:close/>
-                <a:lnTo>
-                  <a:pt x="2287322" y="346423"/>
-                </a:lnTo>
-                <a:close/>
-                <a:lnTo>
-                  <a:pt x="2296925" y="343168"/>
-                </a:lnTo>
-                <a:close/>
-                <a:lnTo>
-                  <a:pt x="2306548" y="339913"/>
-                </a:lnTo>
-                <a:close/>
-                <a:lnTo>
-                  <a:pt x="2316189" y="336659"/>
-                </a:lnTo>
-                <a:close/>
-                <a:lnTo>
-                  <a:pt x="2325849" y="333405"/>
-                </a:lnTo>
-                <a:close/>
-                <a:lnTo>
-                  <a:pt x="2335529" y="330151"/>
-                </a:lnTo>
-                <a:close/>
-                <a:lnTo>
-                  <a:pt x="2345228" y="326898"/>
-                </a:lnTo>
-                <a:close/>
-                <a:lnTo>
-                  <a:pt x="2354946" y="323646"/>
-                </a:lnTo>
-                <a:close/>
-                <a:lnTo>
-                  <a:pt x="2364684" y="320394"/>
-                </a:lnTo>
-                <a:close/>
-                <a:lnTo>
-                  <a:pt x="2374441" y="317143"/>
-                </a:lnTo>
-                <a:close/>
-                <a:lnTo>
-                  <a:pt x="2384218" y="313893"/>
-                </a:lnTo>
-                <a:close/>
-                <a:lnTo>
-                  <a:pt x="2394016" y="310644"/>
-                </a:lnTo>
-                <a:close/>
-                <a:lnTo>
-                  <a:pt x="2403834" y="307396"/>
-                </a:lnTo>
-                <a:close/>
-                <a:lnTo>
-                  <a:pt x="2413674" y="304149"/>
-                </a:lnTo>
-                <a:close/>
-                <a:lnTo>
-                  <a:pt x="2423535" y="300903"/>
-                </a:lnTo>
-                <a:close/>
-                <a:lnTo>
-                  <a:pt x="2433418" y="297658"/>
-                </a:lnTo>
-                <a:close/>
-                <a:lnTo>
-                  <a:pt x="2443323" y="294415"/>
-                </a:lnTo>
-                <a:close/>
-                <a:lnTo>
-                  <a:pt x="2453250" y="291173"/>
-                </a:lnTo>
-                <a:close/>
-                <a:lnTo>
-                  <a:pt x="2463201" y="287933"/>
-                </a:lnTo>
-                <a:close/>
-                <a:lnTo>
-                  <a:pt x="2473175" y="284695"/>
-                </a:lnTo>
-                <a:close/>
-                <a:lnTo>
-                  <a:pt x="2483173" y="281458"/>
-                </a:lnTo>
-                <a:close/>
-                <a:lnTo>
-                  <a:pt x="2493194" y="278223"/>
-                </a:lnTo>
-                <a:close/>
-                <a:lnTo>
-                  <a:pt x="2503241" y="274991"/>
-                </a:lnTo>
-                <a:close/>
-                <a:lnTo>
-                  <a:pt x="2513312" y="271760"/>
-                </a:lnTo>
-                <a:close/>
-                <a:lnTo>
-                  <a:pt x="2523408" y="268532"/>
-                </a:lnTo>
-                <a:close/>
-                <a:lnTo>
-                  <a:pt x="2533531" y="265305"/>
-                </a:lnTo>
-                <a:close/>
-                <a:lnTo>
-                  <a:pt x="2543679" y="262082"/>
-                </a:lnTo>
-                <a:close/>
-                <a:lnTo>
-                  <a:pt x="2553853" y="258860"/>
-                </a:lnTo>
-                <a:close/>
-                <a:lnTo>
-                  <a:pt x="2564054" y="255642"/>
-                </a:lnTo>
-                <a:close/>
-                <a:lnTo>
-                  <a:pt x="2574283" y="252426"/>
-                </a:lnTo>
-                <a:close/>
-                <a:lnTo>
-                  <a:pt x="2584539" y="249213"/>
-                </a:lnTo>
-                <a:close/>
-                <a:lnTo>
-                  <a:pt x="2594822" y="246002"/>
-                </a:lnTo>
-                <a:close/>
-                <a:lnTo>
-                  <a:pt x="2605134" y="242795"/>
-                </a:lnTo>
-                <a:close/>
-                <a:lnTo>
-                  <a:pt x="2615472" y="239591"/>
-                </a:lnTo>
-                <a:close/>
-                <a:lnTo>
-                  <a:pt x="2625835" y="236389"/>
-                </a:lnTo>
-                <a:close/>
-                <a:lnTo>
-                  <a:pt x="2636221" y="233191"/>
-                </a:lnTo>
-                <a:close/>
-                <a:lnTo>
-                  <a:pt x="2646628" y="229995"/>
-                </a:lnTo>
-                <a:close/>
-                <a:lnTo>
-                  <a:pt x="2657056" y="226803"/>
-                </a:lnTo>
-                <a:close/>
-                <a:lnTo>
-                  <a:pt x="2667502" y="223613"/>
-                </a:lnTo>
-                <a:close/>
-                <a:lnTo>
-                  <a:pt x="2677965" y="220426"/>
-                </a:lnTo>
-                <a:close/>
-                <a:lnTo>
-                  <a:pt x="2688443" y="217243"/>
-                </a:lnTo>
-                <a:close/>
-                <a:lnTo>
-                  <a:pt x="2698935" y="214062"/>
-                </a:lnTo>
-                <a:close/>
-                <a:lnTo>
-                  <a:pt x="2709439" y="210884"/>
-                </a:lnTo>
-                <a:close/>
-                <a:lnTo>
-                  <a:pt x="2719953" y="207710"/>
-                </a:lnTo>
-                <a:close/>
-                <a:lnTo>
-                  <a:pt x="2730477" y="204538"/>
-                </a:lnTo>
-                <a:close/>
-                <a:lnTo>
-                  <a:pt x="2741008" y="201369"/>
-                </a:lnTo>
-                <a:close/>
-                <a:lnTo>
-                  <a:pt x="2751544" y="198203"/>
-                </a:lnTo>
-                <a:close/>
-                <a:lnTo>
-                  <a:pt x="2762085" y="195040"/>
-                </a:lnTo>
-                <a:close/>
-                <a:lnTo>
-                  <a:pt x="2772628" y="191880"/>
-                </a:lnTo>
-                <a:close/>
-                <a:lnTo>
-                  <a:pt x="2783173" y="188723"/>
-                </a:lnTo>
-                <a:close/>
-                <a:lnTo>
-                  <a:pt x="2793716" y="185569"/>
-                </a:lnTo>
-                <a:close/>
-                <a:lnTo>
-                  <a:pt x="2804258" y="182417"/>
-                </a:lnTo>
-                <a:close/>
-                <a:lnTo>
-                  <a:pt x="2814796" y="179269"/>
-                </a:lnTo>
-                <a:close/>
-                <a:lnTo>
-                  <a:pt x="2825328" y="176124"/>
-                </a:lnTo>
-                <a:close/>
-                <a:lnTo>
-                  <a:pt x="2835854" y="172982"/>
-                </a:lnTo>
-                <a:close/>
-                <a:lnTo>
-                  <a:pt x="2846373" y="169842"/>
-                </a:lnTo>
-                <a:close/>
-                <a:lnTo>
-                  <a:pt x="2856889" y="166704"/>
-                </a:lnTo>
-                <a:close/>
-                <a:lnTo>
-                  <a:pt x="2867409" y="163566"/>
-                </a:lnTo>
-                <a:close/>
-                <a:lnTo>
-                  <a:pt x="2877938" y="160427"/>
-                </a:lnTo>
-                <a:close/>
-                <a:lnTo>
-                  <a:pt x="2888481" y="157287"/>
-                </a:lnTo>
-                <a:close/>
-                <a:lnTo>
-                  <a:pt x="2899044" y="154143"/>
-                </a:lnTo>
-                <a:close/>
-                <a:lnTo>
-                  <a:pt x="2909633" y="150994"/>
-                </a:lnTo>
-                <a:close/>
-                <a:lnTo>
-                  <a:pt x="2920252" y="147840"/>
-                </a:lnTo>
-                <a:close/>
-                <a:lnTo>
-                  <a:pt x="2930908" y="144679"/>
-                </a:lnTo>
-                <a:close/>
-                <a:lnTo>
-                  <a:pt x="2941606" y="141510"/>
-                </a:lnTo>
-                <a:close/>
-                <a:lnTo>
-                  <a:pt x="2952351" y="138331"/>
-                </a:lnTo>
-                <a:close/>
-                <a:lnTo>
-                  <a:pt x="2963149" y="135142"/>
-                </a:lnTo>
-                <a:close/>
-                <a:lnTo>
-                  <a:pt x="2974006" y="131941"/>
-                </a:lnTo>
-                <a:close/>
-                <a:lnTo>
-                  <a:pt x="2984927" y="128727"/>
-                </a:lnTo>
-                <a:close/>
-                <a:lnTo>
-                  <a:pt x="2995918" y="125499"/>
-                </a:lnTo>
-                <a:close/>
-                <a:lnTo>
-                  <a:pt x="3006983" y="122256"/>
-                </a:lnTo>
-                <a:close/>
-                <a:lnTo>
-                  <a:pt x="3018129" y="118995"/>
-                </a:lnTo>
-                <a:close/>
-                <a:lnTo>
-                  <a:pt x="3029362" y="115717"/>
-                </a:lnTo>
-                <a:close/>
-                <a:lnTo>
-                  <a:pt x="3040685" y="112420"/>
-                </a:lnTo>
-                <a:close/>
-                <a:lnTo>
-                  <a:pt x="3052106" y="109103"/>
-                </a:lnTo>
-                <a:close/>
-                <a:lnTo>
-                  <a:pt x="3063630" y="105764"/>
-                </a:lnTo>
-                <a:close/>
-                <a:lnTo>
-                  <a:pt x="3075262" y="102402"/>
-                </a:lnTo>
-                <a:close/>
-                <a:lnTo>
-                  <a:pt x="3087008" y="99016"/>
-                </a:lnTo>
-                <a:close/>
-                <a:lnTo>
-                  <a:pt x="3098867" y="95607"/>
-                </a:lnTo>
-                <a:close/>
-                <a:lnTo>
-                  <a:pt x="3110824" y="92178"/>
-                </a:lnTo>
-                <a:close/>
-                <a:lnTo>
-                  <a:pt x="3122858" y="88735"/>
-                </a:lnTo>
-                <a:close/>
-                <a:lnTo>
-                  <a:pt x="3134949" y="85284"/>
-                </a:lnTo>
-                <a:close/>
-                <a:lnTo>
-                  <a:pt x="3147077" y="81829"/>
-                </a:lnTo>
-                <a:close/>
-                <a:lnTo>
-                  <a:pt x="3159222" y="78375"/>
-                </a:lnTo>
-                <a:close/>
-                <a:lnTo>
-                  <a:pt x="3171365" y="74930"/>
-                </a:lnTo>
-                <a:close/>
-                <a:lnTo>
-                  <a:pt x="3183484" y="71496"/>
-                </a:lnTo>
-                <a:close/>
-                <a:lnTo>
-                  <a:pt x="3195560" y="68081"/>
-                </a:lnTo>
-                <a:close/>
-                <a:lnTo>
-                  <a:pt x="3207573" y="64688"/>
-                </a:lnTo>
-                <a:close/>
-                <a:lnTo>
-                  <a:pt x="3219503" y="61324"/>
-                </a:lnTo>
-                <a:close/>
-                <a:lnTo>
-                  <a:pt x="3231330" y="57994"/>
-                </a:lnTo>
-                <a:close/>
-                <a:lnTo>
-                  <a:pt x="3243034" y="54703"/>
-                </a:lnTo>
-                <a:close/>
-                <a:lnTo>
-                  <a:pt x="3254594" y="51457"/>
-                </a:lnTo>
-                <a:close/>
-                <a:lnTo>
-                  <a:pt x="3265991" y="48260"/>
-                </a:lnTo>
-                <a:close/>
-                <a:lnTo>
-                  <a:pt x="3277205" y="45118"/>
-                </a:lnTo>
-                <a:close/>
-                <a:lnTo>
-                  <a:pt x="3288216" y="42037"/>
-                </a:lnTo>
-                <a:close/>
-                <a:lnTo>
-                  <a:pt x="3299003" y="39021"/>
-                </a:lnTo>
-                <a:close/>
-                <a:lnTo>
-                  <a:pt x="3309547" y="36076"/>
-                </a:lnTo>
-                <a:close/>
-                <a:lnTo>
-                  <a:pt x="3319827" y="33207"/>
-                </a:lnTo>
-                <a:close/>
-                <a:lnTo>
-                  <a:pt x="3329824" y="30421"/>
-                </a:lnTo>
-                <a:close/>
-                <a:lnTo>
-                  <a:pt x="3339517" y="27720"/>
-                </a:lnTo>
-                <a:close/>
-                <a:lnTo>
-                  <a:pt x="3348887" y="25113"/>
-                </a:lnTo>
-                <a:close/>
-                <a:lnTo>
-                  <a:pt x="3357913" y="22602"/>
-                </a:lnTo>
-                <a:close/>
-                <a:lnTo>
-                  <a:pt x="3366576" y="20195"/>
-                </a:lnTo>
-                <a:close/>
-                <a:lnTo>
-                  <a:pt x="3374854" y="17896"/>
-                </a:lnTo>
-                <a:close/>
-                <a:lnTo>
-                  <a:pt x="3382729" y="15710"/>
-                </a:lnTo>
-                <a:close/>
-                <a:lnTo>
-                  <a:pt x="3390181" y="13643"/>
-                </a:lnTo>
-                <a:close/>
-                <a:lnTo>
-                  <a:pt x="3397188" y="11700"/>
-                </a:lnTo>
-                <a:close/>
-                <a:lnTo>
-                  <a:pt x="3403732" y="9887"/>
-                </a:lnTo>
-                <a:close/>
-                <a:lnTo>
-                  <a:pt x="3409792" y="8208"/>
-                </a:lnTo>
-                <a:close/>
-                <a:lnTo>
-                  <a:pt x="3415348" y="6669"/>
-                </a:lnTo>
-                <a:close/>
-                <a:lnTo>
-                  <a:pt x="3420380" y="5276"/>
-                </a:lnTo>
-                <a:close/>
-                <a:lnTo>
-                  <a:pt x="3424868" y="4033"/>
-                </a:lnTo>
-                <a:close/>
-                <a:lnTo>
-                  <a:pt x="3428792" y="2947"/>
-                </a:lnTo>
-                <a:close/>
-                <a:lnTo>
-                  <a:pt x="3432132" y="2021"/>
-                </a:lnTo>
-                <a:close/>
-                <a:lnTo>
-                  <a:pt x="3434868" y="1263"/>
-                </a:lnTo>
-                <a:close/>
-                <a:lnTo>
-                  <a:pt x="3436979" y="676"/>
-                </a:lnTo>
-                <a:close/>
-                <a:lnTo>
-                  <a:pt x="3438447" y="266"/>
-                </a:lnTo>
-                <a:close/>
-                <a:lnTo>
-                  <a:pt x="3439250" y="39"/>
-                </a:lnTo>
-                <a:close/>
-                <a:lnTo>
-                  <a:pt x="3439369" y="0"/>
-                </a:lnTo>
-                <a:close/>
-                <a:lnTo>
-                  <a:pt x="3438784" y="154"/>
-                </a:lnTo>
-                <a:close/>
-                <a:lnTo>
-                  <a:pt x="3437475" y="507"/>
-                </a:lnTo>
-                <a:close/>
-                <a:lnTo>
-                  <a:pt x="3435421" y="1063"/>
-                </a:lnTo>
-                <a:close/>
-                <a:lnTo>
-                  <a:pt x="3432603" y="1829"/>
-                </a:lnTo>
-                <a:close/>
-                <a:lnTo>
-                  <a:pt x="3429000" y="2808"/>
+                  <a:pt x="3178" y="1333996"/>
+                </a:lnTo>
+                <a:close/>
+                <a:lnTo>
+                  <a:pt x="6350" y="1328425"/>
+                </a:lnTo>
+                <a:close/>
+                <a:lnTo>
+                  <a:pt x="9518" y="1322884"/>
+                </a:lnTo>
+                <a:close/>
+                <a:lnTo>
+                  <a:pt x="12681" y="1317372"/>
+                </a:lnTo>
+                <a:close/>
+                <a:lnTo>
+                  <a:pt x="15839" y="1311889"/>
+                </a:lnTo>
+                <a:close/>
+                <a:lnTo>
+                  <a:pt x="18993" y="1306435"/>
+                </a:lnTo>
+                <a:close/>
+                <a:lnTo>
+                  <a:pt x="22141" y="1301010"/>
+                </a:lnTo>
+                <a:close/>
+                <a:lnTo>
+                  <a:pt x="25285" y="1295615"/>
+                </a:lnTo>
+                <a:close/>
+                <a:lnTo>
+                  <a:pt x="28425" y="1290247"/>
+                </a:lnTo>
+                <a:close/>
+                <a:lnTo>
+                  <a:pt x="31560" y="1284909"/>
+                </a:lnTo>
+                <a:close/>
+                <a:lnTo>
+                  <a:pt x="34690" y="1279599"/>
+                </a:lnTo>
+                <a:close/>
+                <a:lnTo>
+                  <a:pt x="37816" y="1274318"/>
+                </a:lnTo>
+                <a:close/>
+                <a:lnTo>
+                  <a:pt x="40938" y="1269064"/>
+                </a:lnTo>
+                <a:close/>
+                <a:lnTo>
+                  <a:pt x="44056" y="1263839"/>
+                </a:lnTo>
+                <a:close/>
+                <a:lnTo>
+                  <a:pt x="47169" y="1258643"/>
+                </a:lnTo>
+                <a:close/>
+                <a:lnTo>
+                  <a:pt x="50279" y="1253474"/>
+                </a:lnTo>
+                <a:close/>
+                <a:lnTo>
+                  <a:pt x="53384" y="1248333"/>
+                </a:lnTo>
+                <a:close/>
+                <a:lnTo>
+                  <a:pt x="56486" y="1243219"/>
+                </a:lnTo>
+                <a:close/>
+                <a:lnTo>
+                  <a:pt x="59584" y="1238134"/>
+                </a:lnTo>
+                <a:close/>
+                <a:lnTo>
+                  <a:pt x="62677" y="1233075"/>
+                </a:lnTo>
+                <a:close/>
+                <a:lnTo>
+                  <a:pt x="65767" y="1228045"/>
+                </a:lnTo>
+                <a:close/>
+                <a:lnTo>
+                  <a:pt x="68854" y="1223041"/>
+                </a:lnTo>
+                <a:close/>
+                <a:lnTo>
+                  <a:pt x="71937" y="1218065"/>
+                </a:lnTo>
+                <a:close/>
+                <a:lnTo>
+                  <a:pt x="75016" y="1213116"/>
+                </a:lnTo>
+                <a:close/>
+                <a:lnTo>
+                  <a:pt x="78092" y="1208193"/>
+                </a:lnTo>
+                <a:close/>
+                <a:lnTo>
+                  <a:pt x="81164" y="1203298"/>
+                </a:lnTo>
+                <a:close/>
+                <a:lnTo>
+                  <a:pt x="84234" y="1198429"/>
+                </a:lnTo>
+                <a:close/>
+                <a:lnTo>
+                  <a:pt x="87299" y="1193587"/>
+                </a:lnTo>
+                <a:close/>
+                <a:lnTo>
+                  <a:pt x="90362" y="1188772"/>
+                </a:lnTo>
+                <a:close/>
+                <a:lnTo>
+                  <a:pt x="93422" y="1183982"/>
+                </a:lnTo>
+                <a:close/>
+                <a:lnTo>
+                  <a:pt x="96478" y="1179219"/>
+                </a:lnTo>
+                <a:close/>
+                <a:lnTo>
+                  <a:pt x="99532" y="1174483"/>
+                </a:lnTo>
+                <a:close/>
+                <a:lnTo>
+                  <a:pt x="102582" y="1169772"/>
+                </a:lnTo>
+                <a:close/>
+                <a:lnTo>
+                  <a:pt x="105630" y="1165087"/>
+                </a:lnTo>
+                <a:close/>
+                <a:lnTo>
+                  <a:pt x="108675" y="1160428"/>
+                </a:lnTo>
+                <a:close/>
+                <a:lnTo>
+                  <a:pt x="111717" y="1155795"/>
+                </a:lnTo>
+                <a:close/>
+                <a:lnTo>
+                  <a:pt x="114757" y="1151187"/>
+                </a:lnTo>
+                <a:close/>
+                <a:lnTo>
+                  <a:pt x="117794" y="1146605"/>
+                </a:lnTo>
+                <a:close/>
+                <a:lnTo>
+                  <a:pt x="120828" y="1142048"/>
+                </a:lnTo>
+                <a:close/>
+                <a:lnTo>
+                  <a:pt x="123861" y="1137517"/>
+                </a:lnTo>
+                <a:close/>
+                <a:lnTo>
+                  <a:pt x="126890" y="1133010"/>
+                </a:lnTo>
+                <a:close/>
+                <a:lnTo>
+                  <a:pt x="129918" y="1128529"/>
+                </a:lnTo>
+                <a:close/>
+                <a:lnTo>
+                  <a:pt x="132943" y="1124072"/>
+                </a:lnTo>
+                <a:close/>
+                <a:lnTo>
+                  <a:pt x="135966" y="1119641"/>
+                </a:lnTo>
+                <a:close/>
+                <a:lnTo>
+                  <a:pt x="138987" y="1115234"/>
+                </a:lnTo>
+                <a:close/>
+                <a:lnTo>
+                  <a:pt x="142006" y="1110851"/>
+                </a:lnTo>
+                <a:close/>
+                <a:lnTo>
+                  <a:pt x="145022" y="1106493"/>
+                </a:lnTo>
+                <a:close/>
+                <a:lnTo>
+                  <a:pt x="148037" y="1102160"/>
+                </a:lnTo>
+                <a:close/>
+                <a:lnTo>
+                  <a:pt x="151051" y="1097851"/>
+                </a:lnTo>
+                <a:close/>
+                <a:lnTo>
+                  <a:pt x="154062" y="1093565"/>
+                </a:lnTo>
+                <a:close/>
+                <a:lnTo>
+                  <a:pt x="157072" y="1089304"/>
+                </a:lnTo>
+                <a:close/>
+                <a:lnTo>
+                  <a:pt x="160080" y="1085067"/>
+                </a:lnTo>
+                <a:close/>
+                <a:lnTo>
+                  <a:pt x="163086" y="1080853"/>
+                </a:lnTo>
+                <a:close/>
+                <a:lnTo>
+                  <a:pt x="166091" y="1076664"/>
+                </a:lnTo>
+                <a:close/>
+                <a:lnTo>
+                  <a:pt x="169095" y="1072497"/>
+                </a:lnTo>
+                <a:close/>
+                <a:lnTo>
+                  <a:pt x="172097" y="1068355"/>
+                </a:lnTo>
+                <a:close/>
+                <a:lnTo>
+                  <a:pt x="175098" y="1064235"/>
+                </a:lnTo>
+                <a:close/>
+                <a:lnTo>
+                  <a:pt x="178098" y="1060139"/>
+                </a:lnTo>
+                <a:close/>
+                <a:lnTo>
+                  <a:pt x="181097" y="1056066"/>
+                </a:lnTo>
+                <a:close/>
+                <a:lnTo>
+                  <a:pt x="184094" y="1052016"/>
+                </a:lnTo>
+                <a:close/>
+                <a:lnTo>
+                  <a:pt x="187091" y="1047988"/>
+                </a:lnTo>
+                <a:close/>
+                <a:lnTo>
+                  <a:pt x="190086" y="1043984"/>
+                </a:lnTo>
+                <a:close/>
+                <a:lnTo>
+                  <a:pt x="193081" y="1040002"/>
+                </a:lnTo>
+                <a:close/>
+                <a:lnTo>
+                  <a:pt x="196075" y="1036043"/>
+                </a:lnTo>
+                <a:close/>
+                <a:lnTo>
+                  <a:pt x="199068" y="1032106"/>
+                </a:lnTo>
+                <a:close/>
+                <a:lnTo>
+                  <a:pt x="202060" y="1028191"/>
+                </a:lnTo>
+                <a:close/>
+                <a:lnTo>
+                  <a:pt x="205052" y="1024299"/>
+                </a:lnTo>
+                <a:close/>
+                <a:lnTo>
+                  <a:pt x="208044" y="1020429"/>
+                </a:lnTo>
+                <a:close/>
+                <a:lnTo>
+                  <a:pt x="211034" y="1016581"/>
+                </a:lnTo>
+                <a:close/>
+                <a:lnTo>
+                  <a:pt x="214025" y="1012754"/>
+                </a:lnTo>
+                <a:close/>
+                <a:lnTo>
+                  <a:pt x="217015" y="1008950"/>
+                </a:lnTo>
+                <a:close/>
+                <a:lnTo>
+                  <a:pt x="220005" y="1005167"/>
+                </a:lnTo>
+                <a:close/>
+                <a:lnTo>
+                  <a:pt x="222995" y="1001405"/>
+                </a:lnTo>
+                <a:close/>
+                <a:lnTo>
+                  <a:pt x="225984" y="997665"/>
+                </a:lnTo>
+                <a:close/>
+                <a:lnTo>
+                  <a:pt x="228974" y="993946"/>
+                </a:lnTo>
+                <a:close/>
+                <a:lnTo>
+                  <a:pt x="231963" y="990249"/>
+                </a:lnTo>
+                <a:close/>
+                <a:lnTo>
+                  <a:pt x="234953" y="986572"/>
+                </a:lnTo>
+                <a:close/>
+                <a:lnTo>
+                  <a:pt x="237942" y="982917"/>
+                </a:lnTo>
+                <a:close/>
+                <a:lnTo>
+                  <a:pt x="240932" y="979282"/>
+                </a:lnTo>
+                <a:close/>
+                <a:lnTo>
+                  <a:pt x="243923" y="975668"/>
+                </a:lnTo>
+                <a:close/>
+                <a:lnTo>
+                  <a:pt x="246913" y="972075"/>
+                </a:lnTo>
+                <a:close/>
+                <a:lnTo>
+                  <a:pt x="249904" y="968502"/>
+                </a:lnTo>
+                <a:close/>
+                <a:lnTo>
+                  <a:pt x="252896" y="964950"/>
+                </a:lnTo>
+                <a:close/>
+                <a:lnTo>
+                  <a:pt x="255888" y="961418"/>
+                </a:lnTo>
+                <a:close/>
+                <a:lnTo>
+                  <a:pt x="258880" y="957906"/>
+                </a:lnTo>
+                <a:close/>
+                <a:lnTo>
+                  <a:pt x="261874" y="954414"/>
+                </a:lnTo>
+                <a:close/>
+                <a:lnTo>
+                  <a:pt x="264868" y="950942"/>
+                </a:lnTo>
+                <a:close/>
+                <a:lnTo>
+                  <a:pt x="267863" y="947490"/>
+                </a:lnTo>
+                <a:close/>
+                <a:lnTo>
+                  <a:pt x="270858" y="944057"/>
+                </a:lnTo>
+                <a:close/>
+                <a:lnTo>
+                  <a:pt x="273855" y="940645"/>
+                </a:lnTo>
+                <a:close/>
+                <a:lnTo>
+                  <a:pt x="276853" y="937251"/>
+                </a:lnTo>
+                <a:close/>
+                <a:lnTo>
+                  <a:pt x="279852" y="933878"/>
+                </a:lnTo>
+                <a:close/>
+                <a:lnTo>
+                  <a:pt x="282852" y="930523"/>
+                </a:lnTo>
+                <a:close/>
+                <a:lnTo>
+                  <a:pt x="285853" y="927187"/>
+                </a:lnTo>
+                <a:close/>
+                <a:lnTo>
+                  <a:pt x="288856" y="923871"/>
+                </a:lnTo>
+                <a:close/>
+                <a:lnTo>
+                  <a:pt x="291860" y="920574"/>
+                </a:lnTo>
+                <a:close/>
+                <a:lnTo>
+                  <a:pt x="294865" y="917295"/>
+                </a:lnTo>
+                <a:close/>
+                <a:lnTo>
+                  <a:pt x="297872" y="914035"/>
+                </a:lnTo>
+                <a:close/>
+                <a:lnTo>
+                  <a:pt x="300881" y="910793"/>
+                </a:lnTo>
+                <a:close/>
+                <a:lnTo>
+                  <a:pt x="303891" y="907571"/>
+                </a:lnTo>
+                <a:close/>
+                <a:lnTo>
+                  <a:pt x="306903" y="904366"/>
+                </a:lnTo>
+                <a:close/>
+                <a:lnTo>
+                  <a:pt x="309916" y="901180"/>
+                </a:lnTo>
+                <a:close/>
+                <a:lnTo>
+                  <a:pt x="312932" y="898012"/>
+                </a:lnTo>
+                <a:close/>
+                <a:lnTo>
+                  <a:pt x="315949" y="894861"/>
+                </a:lnTo>
+                <a:close/>
+                <a:lnTo>
+                  <a:pt x="318968" y="891729"/>
+                </a:lnTo>
+                <a:close/>
+                <a:lnTo>
+                  <a:pt x="321990" y="888615"/>
+                </a:lnTo>
+                <a:close/>
+                <a:lnTo>
+                  <a:pt x="325013" y="885518"/>
+                </a:lnTo>
+                <a:close/>
+                <a:lnTo>
+                  <a:pt x="328039" y="882439"/>
+                </a:lnTo>
+                <a:close/>
+                <a:lnTo>
+                  <a:pt x="331067" y="879377"/>
+                </a:lnTo>
+                <a:close/>
+                <a:lnTo>
+                  <a:pt x="334097" y="876333"/>
+                </a:lnTo>
+                <a:close/>
+                <a:lnTo>
+                  <a:pt x="337130" y="873306"/>
+                </a:lnTo>
+                <a:close/>
+                <a:lnTo>
+                  <a:pt x="340165" y="870296"/>
+                </a:lnTo>
+                <a:close/>
+                <a:lnTo>
+                  <a:pt x="343203" y="867303"/>
+                </a:lnTo>
+                <a:close/>
+                <a:lnTo>
+                  <a:pt x="346243" y="864327"/>
+                </a:lnTo>
+                <a:close/>
+                <a:lnTo>
+                  <a:pt x="349286" y="861367"/>
+                </a:lnTo>
+                <a:close/>
+                <a:lnTo>
+                  <a:pt x="352332" y="858425"/>
+                </a:lnTo>
+                <a:close/>
+                <a:lnTo>
+                  <a:pt x="355380" y="855499"/>
+                </a:lnTo>
+                <a:close/>
+                <a:lnTo>
+                  <a:pt x="358431" y="852589"/>
+                </a:lnTo>
+                <a:close/>
+                <a:lnTo>
+                  <a:pt x="361486" y="849696"/>
+                </a:lnTo>
+                <a:close/>
+                <a:lnTo>
+                  <a:pt x="364543" y="846819"/>
+                </a:lnTo>
+                <a:close/>
+                <a:lnTo>
+                  <a:pt x="367603" y="843958"/>
+                </a:lnTo>
+                <a:close/>
+                <a:lnTo>
+                  <a:pt x="370667" y="841113"/>
+                </a:lnTo>
+                <a:close/>
+                <a:lnTo>
+                  <a:pt x="373733" y="838284"/>
+                </a:lnTo>
+                <a:close/>
+                <a:lnTo>
+                  <a:pt x="376803" y="835470"/>
+                </a:lnTo>
+                <a:close/>
+                <a:lnTo>
+                  <a:pt x="379877" y="832672"/>
+                </a:lnTo>
+                <a:close/>
+                <a:lnTo>
+                  <a:pt x="382953" y="829890"/>
+                </a:lnTo>
+                <a:close/>
+                <a:lnTo>
+                  <a:pt x="386034" y="827124"/>
+                </a:lnTo>
+                <a:close/>
+                <a:lnTo>
+                  <a:pt x="389117" y="824372"/>
+                </a:lnTo>
+                <a:close/>
+                <a:lnTo>
+                  <a:pt x="392205" y="821636"/>
+                </a:lnTo>
+                <a:close/>
+                <a:lnTo>
+                  <a:pt x="395296" y="818915"/>
+                </a:lnTo>
+                <a:close/>
+                <a:lnTo>
+                  <a:pt x="398391" y="816209"/>
+                </a:lnTo>
+                <a:close/>
+                <a:lnTo>
+                  <a:pt x="401489" y="813517"/>
+                </a:lnTo>
+                <a:close/>
+                <a:lnTo>
+                  <a:pt x="404592" y="810841"/>
+                </a:lnTo>
+                <a:close/>
+                <a:lnTo>
+                  <a:pt x="407698" y="808179"/>
+                </a:lnTo>
+                <a:close/>
+                <a:lnTo>
+                  <a:pt x="410809" y="805531"/>
+                </a:lnTo>
+                <a:close/>
+                <a:lnTo>
+                  <a:pt x="413923" y="802899"/>
+                </a:lnTo>
+                <a:close/>
+                <a:lnTo>
+                  <a:pt x="417042" y="800280"/>
+                </a:lnTo>
+                <a:close/>
+                <a:lnTo>
+                  <a:pt x="420165" y="797675"/>
+                </a:lnTo>
+                <a:close/>
+                <a:lnTo>
+                  <a:pt x="423292" y="795085"/>
+                </a:lnTo>
+                <a:close/>
+                <a:lnTo>
+                  <a:pt x="426424" y="792508"/>
+                </a:lnTo>
+                <a:close/>
+                <a:lnTo>
+                  <a:pt x="429560" y="789946"/>
+                </a:lnTo>
+                <a:close/>
+                <a:lnTo>
+                  <a:pt x="432700" y="787397"/>
+                </a:lnTo>
+                <a:close/>
+                <a:lnTo>
+                  <a:pt x="435846" y="784862"/>
+                </a:lnTo>
+                <a:close/>
+                <a:lnTo>
+                  <a:pt x="438995" y="782340"/>
+                </a:lnTo>
+                <a:close/>
+                <a:lnTo>
+                  <a:pt x="442150" y="779831"/>
+                </a:lnTo>
+                <a:close/>
+                <a:lnTo>
+                  <a:pt x="445309" y="777336"/>
+                </a:lnTo>
+                <a:close/>
+                <a:lnTo>
+                  <a:pt x="448473" y="774854"/>
+                </a:lnTo>
+                <a:close/>
+                <a:lnTo>
+                  <a:pt x="451642" y="772385"/>
+                </a:lnTo>
+                <a:close/>
+                <a:lnTo>
+                  <a:pt x="454816" y="769930"/>
+                </a:lnTo>
+                <a:close/>
+                <a:lnTo>
+                  <a:pt x="457995" y="767486"/>
+                </a:lnTo>
+                <a:close/>
+                <a:lnTo>
+                  <a:pt x="461179" y="765056"/>
+                </a:lnTo>
+                <a:close/>
+                <a:lnTo>
+                  <a:pt x="464369" y="762638"/>
+                </a:lnTo>
+                <a:close/>
+                <a:lnTo>
+                  <a:pt x="467563" y="760233"/>
+                </a:lnTo>
+                <a:close/>
+                <a:lnTo>
+                  <a:pt x="470763" y="757840"/>
+                </a:lnTo>
+                <a:close/>
+                <a:lnTo>
+                  <a:pt x="473968" y="755459"/>
+                </a:lnTo>
+                <a:close/>
+                <a:lnTo>
+                  <a:pt x="477179" y="753091"/>
+                </a:lnTo>
+                <a:close/>
+                <a:lnTo>
+                  <a:pt x="480395" y="750734"/>
+                </a:lnTo>
+                <a:close/>
+                <a:lnTo>
+                  <a:pt x="483617" y="748390"/>
+                </a:lnTo>
+                <a:close/>
+                <a:lnTo>
+                  <a:pt x="486845" y="746057"/>
+                </a:lnTo>
+                <a:close/>
+                <a:lnTo>
+                  <a:pt x="490078" y="743736"/>
+                </a:lnTo>
+                <a:close/>
+                <a:lnTo>
+                  <a:pt x="493317" y="741426"/>
+                </a:lnTo>
+                <a:close/>
+                <a:lnTo>
+                  <a:pt x="496562" y="739128"/>
+                </a:lnTo>
+                <a:close/>
+                <a:lnTo>
+                  <a:pt x="499813" y="736842"/>
+                </a:lnTo>
+                <a:close/>
+                <a:lnTo>
+                  <a:pt x="503070" y="734566"/>
+                </a:lnTo>
+                <a:close/>
+                <a:lnTo>
+                  <a:pt x="506333" y="732302"/>
+                </a:lnTo>
+                <a:close/>
+                <a:lnTo>
+                  <a:pt x="509602" y="730049"/>
+                </a:lnTo>
+                <a:close/>
+                <a:lnTo>
+                  <a:pt x="512877" y="727806"/>
+                </a:lnTo>
+                <a:close/>
+                <a:lnTo>
+                  <a:pt x="516158" y="725575"/>
+                </a:lnTo>
+                <a:close/>
+                <a:lnTo>
+                  <a:pt x="519446" y="723354"/>
+                </a:lnTo>
+                <a:close/>
+                <a:lnTo>
+                  <a:pt x="522740" y="721144"/>
+                </a:lnTo>
+                <a:close/>
+                <a:lnTo>
+                  <a:pt x="526041" y="718944"/>
+                </a:lnTo>
+                <a:close/>
+                <a:lnTo>
+                  <a:pt x="529348" y="716754"/>
+                </a:lnTo>
+                <a:close/>
+                <a:lnTo>
+                  <a:pt x="532662" y="714575"/>
+                </a:lnTo>
+                <a:close/>
+                <a:lnTo>
+                  <a:pt x="535983" y="712406"/>
+                </a:lnTo>
+                <a:close/>
+                <a:lnTo>
+                  <a:pt x="539310" y="710247"/>
+                </a:lnTo>
+                <a:close/>
+                <a:lnTo>
+                  <a:pt x="542644" y="708097"/>
+                </a:lnTo>
+                <a:close/>
+                <a:lnTo>
+                  <a:pt x="545985" y="705958"/>
+                </a:lnTo>
+                <a:close/>
+                <a:lnTo>
+                  <a:pt x="549333" y="703828"/>
+                </a:lnTo>
+                <a:close/>
+                <a:lnTo>
+                  <a:pt x="552688" y="701708"/>
+                </a:lnTo>
+                <a:close/>
+                <a:lnTo>
+                  <a:pt x="556050" y="699597"/>
+                </a:lnTo>
+                <a:close/>
+                <a:lnTo>
+                  <a:pt x="559419" y="697495"/>
+                </a:lnTo>
+                <a:close/>
+                <a:lnTo>
+                  <a:pt x="562796" y="695403"/>
+                </a:lnTo>
+                <a:close/>
+                <a:lnTo>
+                  <a:pt x="566180" y="693320"/>
+                </a:lnTo>
+                <a:close/>
+                <a:lnTo>
+                  <a:pt x="569571" y="691246"/>
+                </a:lnTo>
+                <a:close/>
+                <a:lnTo>
+                  <a:pt x="572969" y="689180"/>
+                </a:lnTo>
+                <a:close/>
+                <a:lnTo>
+                  <a:pt x="576375" y="687124"/>
+                </a:lnTo>
+                <a:close/>
+                <a:lnTo>
+                  <a:pt x="579789" y="685076"/>
+                </a:lnTo>
+                <a:close/>
+                <a:lnTo>
+                  <a:pt x="583210" y="683036"/>
+                </a:lnTo>
+                <a:close/>
+                <a:lnTo>
+                  <a:pt x="586639" y="681005"/>
+                </a:lnTo>
+                <a:close/>
+                <a:lnTo>
+                  <a:pt x="590076" y="678983"/>
+                </a:lnTo>
+                <a:close/>
+                <a:lnTo>
+                  <a:pt x="593520" y="676968"/>
+                </a:lnTo>
+                <a:close/>
+                <a:lnTo>
+                  <a:pt x="596973" y="674962"/>
+                </a:lnTo>
+                <a:close/>
+                <a:lnTo>
+                  <a:pt x="600433" y="672963"/>
+                </a:lnTo>
+                <a:close/>
+                <a:lnTo>
+                  <a:pt x="603901" y="670973"/>
+                </a:lnTo>
+                <a:close/>
+                <a:lnTo>
+                  <a:pt x="607378" y="668990"/>
+                </a:lnTo>
+                <a:close/>
+                <a:lnTo>
+                  <a:pt x="610863" y="667015"/>
+                </a:lnTo>
+                <a:close/>
+                <a:lnTo>
+                  <a:pt x="614356" y="665047"/>
+                </a:lnTo>
+                <a:close/>
+                <a:lnTo>
+                  <a:pt x="617857" y="663087"/>
+                </a:lnTo>
+                <a:close/>
+                <a:lnTo>
+                  <a:pt x="621367" y="661134"/>
+                </a:lnTo>
+                <a:close/>
+                <a:lnTo>
+                  <a:pt x="624885" y="659188"/>
+                </a:lnTo>
+                <a:close/>
+                <a:lnTo>
+                  <a:pt x="628411" y="657249"/>
+                </a:lnTo>
+                <a:close/>
+                <a:lnTo>
+                  <a:pt x="631947" y="655317"/>
+                </a:lnTo>
+                <a:close/>
+                <a:lnTo>
+                  <a:pt x="635491" y="653392"/>
+                </a:lnTo>
+                <a:close/>
+                <a:lnTo>
+                  <a:pt x="639043" y="651474"/>
+                </a:lnTo>
+                <a:close/>
+                <a:lnTo>
+                  <a:pt x="642604" y="649562"/>
+                </a:lnTo>
+                <a:close/>
+                <a:lnTo>
+                  <a:pt x="646175" y="647657"/>
+                </a:lnTo>
+                <a:close/>
+                <a:lnTo>
+                  <a:pt x="649754" y="645758"/>
+                </a:lnTo>
+                <a:close/>
+                <a:lnTo>
+                  <a:pt x="653342" y="643866"/>
+                </a:lnTo>
+                <a:close/>
+                <a:lnTo>
+                  <a:pt x="656939" y="641980"/>
+                </a:lnTo>
+                <a:close/>
+                <a:lnTo>
+                  <a:pt x="660546" y="640099"/>
+                </a:lnTo>
+                <a:close/>
+                <a:lnTo>
+                  <a:pt x="664161" y="638225"/>
+                </a:lnTo>
+                <a:close/>
+                <a:lnTo>
+                  <a:pt x="667786" y="636356"/>
+                </a:lnTo>
+                <a:close/>
+                <a:lnTo>
+                  <a:pt x="671420" y="634494"/>
+                </a:lnTo>
+                <a:close/>
+                <a:lnTo>
+                  <a:pt x="675064" y="632636"/>
+                </a:lnTo>
+                <a:close/>
+                <a:lnTo>
+                  <a:pt x="678717" y="630785"/>
+                </a:lnTo>
+                <a:close/>
+                <a:lnTo>
+                  <a:pt x="682379" y="628938"/>
+                </a:lnTo>
+                <a:close/>
+                <a:lnTo>
+                  <a:pt x="686052" y="627097"/>
+                </a:lnTo>
+                <a:close/>
+                <a:lnTo>
+                  <a:pt x="689733" y="625261"/>
+                </a:lnTo>
+                <a:close/>
+                <a:lnTo>
+                  <a:pt x="693425" y="623430"/>
+                </a:lnTo>
+                <a:close/>
+                <a:lnTo>
+                  <a:pt x="697126" y="621604"/>
+                </a:lnTo>
+                <a:close/>
+                <a:lnTo>
+                  <a:pt x="700838" y="619783"/>
+                </a:lnTo>
+                <a:close/>
+                <a:lnTo>
+                  <a:pt x="704559" y="617966"/>
+                </a:lnTo>
+                <a:close/>
+                <a:lnTo>
+                  <a:pt x="708290" y="616154"/>
+                </a:lnTo>
+                <a:close/>
+                <a:lnTo>
+                  <a:pt x="712032" y="614347"/>
+                </a:lnTo>
+                <a:close/>
+                <a:lnTo>
+                  <a:pt x="715783" y="612544"/>
+                </a:lnTo>
+                <a:close/>
+                <a:lnTo>
+                  <a:pt x="719545" y="610745"/>
+                </a:lnTo>
+                <a:close/>
+                <a:lnTo>
+                  <a:pt x="723317" y="608950"/>
+                </a:lnTo>
+                <a:close/>
+                <a:lnTo>
+                  <a:pt x="727099" y="607159"/>
+                </a:lnTo>
+                <a:close/>
+                <a:lnTo>
+                  <a:pt x="730892" y="605373"/>
+                </a:lnTo>
+                <a:close/>
+                <a:lnTo>
+                  <a:pt x="734695" y="603589"/>
+                </a:lnTo>
+                <a:close/>
+                <a:lnTo>
+                  <a:pt x="738509" y="601810"/>
+                </a:lnTo>
+                <a:close/>
+                <a:lnTo>
+                  <a:pt x="742333" y="600034"/>
+                </a:lnTo>
+                <a:close/>
+                <a:lnTo>
+                  <a:pt x="746168" y="598262"/>
+                </a:lnTo>
+                <a:close/>
+                <a:lnTo>
+                  <a:pt x="750014" y="596493"/>
+                </a:lnTo>
+                <a:close/>
+                <a:lnTo>
+                  <a:pt x="753871" y="594727"/>
+                </a:lnTo>
+                <a:close/>
+                <a:lnTo>
+                  <a:pt x="757739" y="592964"/>
+                </a:lnTo>
+                <a:close/>
+                <a:lnTo>
+                  <a:pt x="761617" y="591205"/>
+                </a:lnTo>
+                <a:close/>
+                <a:lnTo>
+                  <a:pt x="765507" y="589448"/>
+                </a:lnTo>
+                <a:close/>
+                <a:lnTo>
+                  <a:pt x="769408" y="587694"/>
+                </a:lnTo>
+                <a:close/>
+                <a:lnTo>
+                  <a:pt x="773320" y="585942"/>
+                </a:lnTo>
+                <a:close/>
+                <a:lnTo>
+                  <a:pt x="777243" y="584193"/>
+                </a:lnTo>
+                <a:close/>
+                <a:lnTo>
+                  <a:pt x="781177" y="582447"/>
+                </a:lnTo>
+                <a:close/>
+                <a:lnTo>
+                  <a:pt x="785123" y="580703"/>
+                </a:lnTo>
+                <a:close/>
+                <a:lnTo>
+                  <a:pt x="789080" y="578961"/>
+                </a:lnTo>
+                <a:close/>
+                <a:lnTo>
+                  <a:pt x="793049" y="577221"/>
+                </a:lnTo>
+                <a:close/>
+                <a:lnTo>
+                  <a:pt x="797030" y="575483"/>
+                </a:lnTo>
+                <a:close/>
+                <a:lnTo>
+                  <a:pt x="801022" y="573747"/>
+                </a:lnTo>
+                <a:close/>
+                <a:lnTo>
+                  <a:pt x="805025" y="572013"/>
+                </a:lnTo>
+                <a:close/>
+                <a:lnTo>
+                  <a:pt x="809041" y="570280"/>
+                </a:lnTo>
+                <a:close/>
+                <a:lnTo>
+                  <a:pt x="813068" y="568549"/>
+                </a:lnTo>
+                <a:close/>
+                <a:lnTo>
+                  <a:pt x="817108" y="566820"/>
+                </a:lnTo>
+                <a:close/>
+                <a:lnTo>
+                  <a:pt x="821159" y="565091"/>
+                </a:lnTo>
+                <a:close/>
+                <a:lnTo>
+                  <a:pt x="825222" y="563364"/>
+                </a:lnTo>
+                <a:close/>
+                <a:lnTo>
+                  <a:pt x="829298" y="561638"/>
+                </a:lnTo>
+                <a:close/>
+                <a:lnTo>
+                  <a:pt x="833386" y="559913"/>
+                </a:lnTo>
+                <a:close/>
+                <a:lnTo>
+                  <a:pt x="837485" y="558189"/>
+                </a:lnTo>
+                <a:close/>
+                <a:lnTo>
+                  <a:pt x="841598" y="556465"/>
+                </a:lnTo>
+                <a:close/>
+                <a:lnTo>
+                  <a:pt x="845722" y="554742"/>
+                </a:lnTo>
+                <a:close/>
+                <a:lnTo>
+                  <a:pt x="849860" y="553020"/>
+                </a:lnTo>
+                <a:close/>
+                <a:lnTo>
+                  <a:pt x="854009" y="551298"/>
+                </a:lnTo>
+                <a:close/>
+                <a:lnTo>
+                  <a:pt x="858172" y="549576"/>
+                </a:lnTo>
+                <a:close/>
+                <a:lnTo>
+                  <a:pt x="862346" y="547855"/>
+                </a:lnTo>
+                <a:close/>
+                <a:lnTo>
+                  <a:pt x="866534" y="546133"/>
+                </a:lnTo>
+                <a:close/>
+                <a:lnTo>
+                  <a:pt x="870735" y="544412"/>
+                </a:lnTo>
+                <a:close/>
+                <a:lnTo>
+                  <a:pt x="874948" y="542690"/>
+                </a:lnTo>
+                <a:close/>
+                <a:lnTo>
+                  <a:pt x="879174" y="540968"/>
+                </a:lnTo>
+                <a:close/>
+                <a:lnTo>
+                  <a:pt x="883414" y="539245"/>
+                </a:lnTo>
+                <a:close/>
+                <a:lnTo>
+                  <a:pt x="887666" y="537523"/>
+                </a:lnTo>
+                <a:close/>
+                <a:lnTo>
+                  <a:pt x="891932" y="535799"/>
+                </a:lnTo>
+                <a:close/>
+                <a:lnTo>
+                  <a:pt x="896210" y="534075"/>
+                </a:lnTo>
+                <a:close/>
+                <a:lnTo>
+                  <a:pt x="900502" y="532350"/>
+                </a:lnTo>
+                <a:close/>
+                <a:lnTo>
+                  <a:pt x="904808" y="530624"/>
+                </a:lnTo>
+                <a:close/>
+                <a:lnTo>
+                  <a:pt x="909127" y="528897"/>
+                </a:lnTo>
+                <a:close/>
+                <a:lnTo>
+                  <a:pt x="913459" y="527168"/>
+                </a:lnTo>
+                <a:close/>
+                <a:lnTo>
+                  <a:pt x="917805" y="525439"/>
+                </a:lnTo>
+                <a:close/>
+                <a:lnTo>
+                  <a:pt x="922164" y="523708"/>
+                </a:lnTo>
+                <a:close/>
+                <a:lnTo>
+                  <a:pt x="926537" y="521975"/>
+                </a:lnTo>
+                <a:close/>
+                <a:lnTo>
+                  <a:pt x="930924" y="520241"/>
+                </a:lnTo>
+                <a:close/>
+                <a:lnTo>
+                  <a:pt x="935325" y="518505"/>
+                </a:lnTo>
+                <a:close/>
+                <a:lnTo>
+                  <a:pt x="939740" y="516767"/>
+                </a:lnTo>
+                <a:close/>
+                <a:lnTo>
+                  <a:pt x="944168" y="515027"/>
+                </a:lnTo>
+                <a:close/>
+                <a:lnTo>
+                  <a:pt x="948611" y="513286"/>
+                </a:lnTo>
+                <a:close/>
+                <a:lnTo>
+                  <a:pt x="953068" y="511542"/>
+                </a:lnTo>
+                <a:close/>
+                <a:lnTo>
+                  <a:pt x="957538" y="509795"/>
+                </a:lnTo>
+                <a:close/>
+                <a:lnTo>
+                  <a:pt x="962024" y="508046"/>
+                </a:lnTo>
+                <a:close/>
+                <a:lnTo>
+                  <a:pt x="966523" y="506295"/>
+                </a:lnTo>
+                <a:close/>
+                <a:lnTo>
+                  <a:pt x="971037" y="504541"/>
+                </a:lnTo>
+                <a:close/>
+                <a:lnTo>
+                  <a:pt x="975565" y="502784"/>
+                </a:lnTo>
+                <a:close/>
+                <a:lnTo>
+                  <a:pt x="980108" y="501025"/>
+                </a:lnTo>
+                <a:close/>
+                <a:lnTo>
+                  <a:pt x="984665" y="499262"/>
+                </a:lnTo>
+                <a:close/>
+                <a:lnTo>
+                  <a:pt x="989237" y="497496"/>
+                </a:lnTo>
+                <a:close/>
+                <a:lnTo>
+                  <a:pt x="993824" y="495727"/>
+                </a:lnTo>
+                <a:close/>
+                <a:lnTo>
+                  <a:pt x="998425" y="493955"/>
+                </a:lnTo>
+                <a:close/>
+                <a:lnTo>
+                  <a:pt x="1003042" y="492179"/>
+                </a:lnTo>
+                <a:close/>
+                <a:lnTo>
+                  <a:pt x="1007673" y="490400"/>
+                </a:lnTo>
+                <a:close/>
+                <a:lnTo>
+                  <a:pt x="1012319" y="488617"/>
+                </a:lnTo>
+                <a:close/>
+                <a:lnTo>
+                  <a:pt x="1016980" y="486830"/>
+                </a:lnTo>
+                <a:close/>
+                <a:lnTo>
+                  <a:pt x="1021657" y="485040"/>
+                </a:lnTo>
+                <a:close/>
+                <a:lnTo>
+                  <a:pt x="1026348" y="483245"/>
+                </a:lnTo>
+                <a:close/>
+                <a:lnTo>
+                  <a:pt x="1031055" y="481446"/>
+                </a:lnTo>
+                <a:close/>
+                <a:lnTo>
+                  <a:pt x="1035777" y="479643"/>
+                </a:lnTo>
+                <a:close/>
+                <a:lnTo>
+                  <a:pt x="1040515" y="477836"/>
+                </a:lnTo>
+                <a:close/>
+                <a:lnTo>
+                  <a:pt x="1045267" y="476025"/>
+                </a:lnTo>
+                <a:close/>
+                <a:lnTo>
+                  <a:pt x="1050034" y="474210"/>
+                </a:lnTo>
+                <a:close/>
+                <a:lnTo>
+                  <a:pt x="1054815" y="472391"/>
+                </a:lnTo>
+                <a:close/>
+                <a:lnTo>
+                  <a:pt x="1059611" y="470568"/>
+                </a:lnTo>
+                <a:close/>
+                <a:lnTo>
+                  <a:pt x="1064422" y="468741"/>
+                </a:lnTo>
+                <a:close/>
+                <a:lnTo>
+                  <a:pt x="1069247" y="466911"/>
+                </a:lnTo>
+                <a:close/>
+                <a:lnTo>
+                  <a:pt x="1074086" y="465077"/>
+                </a:lnTo>
+                <a:close/>
+                <a:lnTo>
+                  <a:pt x="1078939" y="463239"/>
+                </a:lnTo>
+                <a:close/>
+                <a:lnTo>
+                  <a:pt x="1083805" y="461397"/>
+                </a:lnTo>
+                <a:close/>
+                <a:lnTo>
+                  <a:pt x="1088686" y="459552"/>
+                </a:lnTo>
+                <a:close/>
+                <a:lnTo>
+                  <a:pt x="1093580" y="457704"/>
+                </a:lnTo>
+                <a:close/>
+                <a:lnTo>
+                  <a:pt x="1098488" y="455852"/>
+                </a:lnTo>
+                <a:close/>
+                <a:lnTo>
+                  <a:pt x="1103408" y="453997"/>
+                </a:lnTo>
+                <a:close/>
+                <a:lnTo>
+                  <a:pt x="1108342" y="452138"/>
+                </a:lnTo>
+                <a:close/>
+                <a:lnTo>
+                  <a:pt x="1113290" y="450276"/>
+                </a:lnTo>
+                <a:close/>
+                <a:lnTo>
+                  <a:pt x="1118250" y="448411"/>
+                </a:lnTo>
+                <a:close/>
+                <a:lnTo>
+                  <a:pt x="1123222" y="446542"/>
+                </a:lnTo>
+                <a:close/>
+                <a:lnTo>
+                  <a:pt x="1128208" y="444671"/>
+                </a:lnTo>
+                <a:close/>
+                <a:lnTo>
+                  <a:pt x="1133206" y="442796"/>
+                </a:lnTo>
+                <a:close/>
+                <a:lnTo>
+                  <a:pt x="1138216" y="440919"/>
+                </a:lnTo>
+                <a:close/>
+                <a:lnTo>
+                  <a:pt x="1143239" y="439038"/>
+                </a:lnTo>
+                <a:close/>
+                <a:lnTo>
+                  <a:pt x="1148273" y="437155"/>
+                </a:lnTo>
+                <a:close/>
+                <a:lnTo>
+                  <a:pt x="1153320" y="435269"/>
+                </a:lnTo>
+                <a:close/>
+                <a:lnTo>
+                  <a:pt x="1158378" y="433380"/>
+                </a:lnTo>
+                <a:close/>
+                <a:lnTo>
+                  <a:pt x="1163448" y="431488"/>
+                </a:lnTo>
+                <a:close/>
+                <a:lnTo>
+                  <a:pt x="1168530" y="429594"/>
+                </a:lnTo>
+                <a:close/>
+                <a:lnTo>
+                  <a:pt x="1173623" y="427696"/>
+                </a:lnTo>
+                <a:close/>
+                <a:lnTo>
+                  <a:pt x="1178727" y="425797"/>
+                </a:lnTo>
+                <a:close/>
+                <a:lnTo>
+                  <a:pt x="1183843" y="423895"/>
+                </a:lnTo>
+                <a:close/>
+                <a:lnTo>
+                  <a:pt x="1188969" y="421990"/>
+                </a:lnTo>
+                <a:close/>
+                <a:lnTo>
+                  <a:pt x="1194106" y="420083"/>
+                </a:lnTo>
+                <a:close/>
+                <a:lnTo>
+                  <a:pt x="1199254" y="418174"/>
+                </a:lnTo>
+                <a:close/>
+                <a:lnTo>
+                  <a:pt x="1204413" y="416262"/>
+                </a:lnTo>
+                <a:close/>
+                <a:lnTo>
+                  <a:pt x="1209582" y="414348"/>
+                </a:lnTo>
+                <a:close/>
+                <a:lnTo>
+                  <a:pt x="1214762" y="412432"/>
+                </a:lnTo>
+                <a:close/>
+                <a:lnTo>
+                  <a:pt x="1219951" y="410513"/>
+                </a:lnTo>
+                <a:close/>
+                <a:lnTo>
+                  <a:pt x="1225151" y="408593"/>
+                </a:lnTo>
+                <a:close/>
+                <a:lnTo>
+                  <a:pt x="1230360" y="406671"/>
+                </a:lnTo>
+                <a:close/>
+                <a:lnTo>
+                  <a:pt x="1235580" y="404746"/>
+                </a:lnTo>
+                <a:close/>
+                <a:lnTo>
+                  <a:pt x="1240809" y="402820"/>
+                </a:lnTo>
+                <a:close/>
+                <a:lnTo>
+                  <a:pt x="1246047" y="400892"/>
+                </a:lnTo>
+                <a:close/>
+                <a:lnTo>
+                  <a:pt x="1251295" y="398962"/>
+                </a:lnTo>
+                <a:close/>
+                <a:lnTo>
+                  <a:pt x="1256552" y="397030"/>
+                </a:lnTo>
+                <a:close/>
+                <a:lnTo>
+                  <a:pt x="1261818" y="395097"/>
+                </a:lnTo>
+                <a:close/>
+                <a:lnTo>
+                  <a:pt x="1267093" y="393162"/>
+                </a:lnTo>
+                <a:close/>
+                <a:lnTo>
+                  <a:pt x="1272377" y="391225"/>
+                </a:lnTo>
+                <a:close/>
+                <a:lnTo>
+                  <a:pt x="1277670" y="389287"/>
+                </a:lnTo>
+                <a:close/>
+                <a:lnTo>
+                  <a:pt x="1282971" y="387347"/>
+                </a:lnTo>
+                <a:close/>
+                <a:lnTo>
+                  <a:pt x="1288281" y="385406"/>
+                </a:lnTo>
+                <a:close/>
+                <a:lnTo>
+                  <a:pt x="1293599" y="383464"/>
+                </a:lnTo>
+                <a:close/>
+                <a:lnTo>
+                  <a:pt x="1298925" y="381520"/>
+                </a:lnTo>
+                <a:close/>
+                <a:lnTo>
+                  <a:pt x="1304259" y="379575"/>
+                </a:lnTo>
+                <a:close/>
+                <a:lnTo>
+                  <a:pt x="1309601" y="377628"/>
+                </a:lnTo>
+                <a:close/>
+                <a:lnTo>
+                  <a:pt x="1314950" y="375681"/>
+                </a:lnTo>
+                <a:close/>
+                <a:lnTo>
+                  <a:pt x="1320308" y="373733"/>
+                </a:lnTo>
+                <a:close/>
+                <a:lnTo>
+                  <a:pt x="1325672" y="371783"/>
+                </a:lnTo>
+                <a:close/>
+                <a:lnTo>
+                  <a:pt x="1331044" y="369832"/>
+                </a:lnTo>
+                <a:close/>
+                <a:lnTo>
+                  <a:pt x="1336424" y="367881"/>
+                </a:lnTo>
+                <a:close/>
+                <a:lnTo>
+                  <a:pt x="1341810" y="365928"/>
+                </a:lnTo>
+                <a:close/>
+                <a:lnTo>
+                  <a:pt x="1347203" y="363975"/>
+                </a:lnTo>
+                <a:close/>
+                <a:lnTo>
+                  <a:pt x="1352603" y="362021"/>
+                </a:lnTo>
+                <a:close/>
+                <a:lnTo>
+                  <a:pt x="1358010" y="360066"/>
+                </a:lnTo>
+                <a:close/>
+                <a:lnTo>
+                  <a:pt x="1363423" y="358111"/>
+                </a:lnTo>
+                <a:close/>
+                <a:lnTo>
+                  <a:pt x="1368842" y="356155"/>
+                </a:lnTo>
+                <a:close/>
+                <a:lnTo>
+                  <a:pt x="1374268" y="354198"/>
+                </a:lnTo>
+                <a:close/>
+                <a:lnTo>
+                  <a:pt x="1379700" y="352241"/>
+                </a:lnTo>
+                <a:close/>
+                <a:lnTo>
+                  <a:pt x="1385138" y="350284"/>
+                </a:lnTo>
+                <a:close/>
+                <a:lnTo>
+                  <a:pt x="1390581" y="348326"/>
+                </a:lnTo>
+                <a:close/>
+                <a:lnTo>
+                  <a:pt x="1396031" y="346368"/>
+                </a:lnTo>
+                <a:close/>
+                <a:lnTo>
+                  <a:pt x="1401486" y="344409"/>
+                </a:lnTo>
+                <a:close/>
+                <a:lnTo>
+                  <a:pt x="1406946" y="342450"/>
+                </a:lnTo>
+                <a:close/>
+                <a:lnTo>
+                  <a:pt x="1412412" y="340491"/>
+                </a:lnTo>
+                <a:close/>
+                <a:lnTo>
+                  <a:pt x="1417882" y="338532"/>
+                </a:lnTo>
+                <a:close/>
+                <a:lnTo>
+                  <a:pt x="1423358" y="336573"/>
+                </a:lnTo>
+                <a:close/>
+                <a:lnTo>
+                  <a:pt x="1428839" y="334614"/>
+                </a:lnTo>
+                <a:close/>
+                <a:lnTo>
+                  <a:pt x="1434324" y="332655"/>
+                </a:lnTo>
+                <a:close/>
+                <a:lnTo>
+                  <a:pt x="1439814" y="330696"/>
+                </a:lnTo>
+                <a:close/>
+                <a:lnTo>
+                  <a:pt x="1445309" y="328737"/>
+                </a:lnTo>
+                <a:close/>
+                <a:lnTo>
+                  <a:pt x="1450807" y="326778"/>
+                </a:lnTo>
+                <a:close/>
+                <a:lnTo>
+                  <a:pt x="1456310" y="324820"/>
+                </a:lnTo>
+                <a:close/>
+                <a:lnTo>
+                  <a:pt x="1461817" y="322862"/>
+                </a:lnTo>
+                <a:close/>
+                <a:lnTo>
+                  <a:pt x="1467328" y="320904"/>
+                </a:lnTo>
+                <a:close/>
+                <a:lnTo>
+                  <a:pt x="1472843" y="318947"/>
+                </a:lnTo>
+                <a:close/>
+                <a:lnTo>
+                  <a:pt x="1478361" y="316990"/>
+                </a:lnTo>
+                <a:close/>
+                <a:lnTo>
+                  <a:pt x="1483883" y="315034"/>
+                </a:lnTo>
+                <a:close/>
+                <a:lnTo>
+                  <a:pt x="1489409" y="313078"/>
+                </a:lnTo>
+                <a:close/>
+                <a:lnTo>
+                  <a:pt x="1494937" y="311123"/>
+                </a:lnTo>
+                <a:close/>
+                <a:lnTo>
+                  <a:pt x="1500469" y="309169"/>
+                </a:lnTo>
+                <a:close/>
+                <a:lnTo>
+                  <a:pt x="1506003" y="307215"/>
+                </a:lnTo>
+                <a:close/>
+                <a:lnTo>
+                  <a:pt x="1511541" y="305262"/>
+                </a:lnTo>
+                <a:close/>
+                <a:lnTo>
+                  <a:pt x="1517081" y="303310"/>
+                </a:lnTo>
+                <a:close/>
+                <a:lnTo>
+                  <a:pt x="1522624" y="301359"/>
+                </a:lnTo>
+                <a:close/>
+                <a:lnTo>
+                  <a:pt x="1528169" y="299409"/>
+                </a:lnTo>
+                <a:close/>
+                <a:lnTo>
+                  <a:pt x="1533716" y="297460"/>
+                </a:lnTo>
+                <a:close/>
+                <a:lnTo>
+                  <a:pt x="1539266" y="295512"/>
+                </a:lnTo>
+                <a:close/>
+                <a:lnTo>
+                  <a:pt x="1544817" y="293565"/>
+                </a:lnTo>
+                <a:close/>
+                <a:lnTo>
+                  <a:pt x="1550371" y="291619"/>
+                </a:lnTo>
+                <a:close/>
+                <a:lnTo>
+                  <a:pt x="1555926" y="289675"/>
+                </a:lnTo>
+                <a:close/>
+                <a:lnTo>
+                  <a:pt x="1561483" y="287732"/>
+                </a:lnTo>
+                <a:close/>
+                <a:lnTo>
+                  <a:pt x="1567041" y="285790"/>
+                </a:lnTo>
+                <a:close/>
+                <a:lnTo>
+                  <a:pt x="1572601" y="283850"/>
+                </a:lnTo>
+                <a:close/>
+                <a:lnTo>
+                  <a:pt x="1578161" y="281911"/>
+                </a:lnTo>
+                <a:close/>
+                <a:lnTo>
+                  <a:pt x="1583723" y="279973"/>
+                </a:lnTo>
+                <a:close/>
+                <a:lnTo>
+                  <a:pt x="1589286" y="278037"/>
+                </a:lnTo>
+                <a:close/>
+                <a:lnTo>
+                  <a:pt x="1594850" y="276103"/>
+                </a:lnTo>
+                <a:close/>
+                <a:lnTo>
+                  <a:pt x="1600414" y="274171"/>
+                </a:lnTo>
+                <a:close/>
+                <a:lnTo>
+                  <a:pt x="1605979" y="272240"/>
+                </a:lnTo>
+                <a:close/>
+                <a:lnTo>
+                  <a:pt x="1611544" y="270311"/>
+                </a:lnTo>
+                <a:close/>
+                <a:lnTo>
+                  <a:pt x="1617109" y="268384"/>
+                </a:lnTo>
+                <a:close/>
+                <a:lnTo>
+                  <a:pt x="1622675" y="266458"/>
+                </a:lnTo>
+                <a:close/>
+                <a:lnTo>
+                  <a:pt x="1628240" y="264535"/>
+                </a:lnTo>
+                <a:close/>
+                <a:lnTo>
+                  <a:pt x="1633806" y="262613"/>
+                </a:lnTo>
+                <a:close/>
+                <a:lnTo>
+                  <a:pt x="1639371" y="260694"/>
+                </a:lnTo>
+                <a:close/>
+                <a:lnTo>
+                  <a:pt x="1644935" y="258777"/>
+                </a:lnTo>
+                <a:close/>
+                <a:lnTo>
+                  <a:pt x="1650499" y="256862"/>
+                </a:lnTo>
+                <a:close/>
+                <a:lnTo>
+                  <a:pt x="1656063" y="254949"/>
+                </a:lnTo>
+                <a:close/>
+                <a:lnTo>
+                  <a:pt x="1661625" y="253039"/>
+                </a:lnTo>
+                <a:close/>
+                <a:lnTo>
+                  <a:pt x="1667187" y="251130"/>
+                </a:lnTo>
+                <a:close/>
+                <a:lnTo>
+                  <a:pt x="1672747" y="249225"/>
+                </a:lnTo>
+                <a:close/>
+                <a:lnTo>
+                  <a:pt x="1678306" y="247321"/>
+                </a:lnTo>
+                <a:close/>
+                <a:lnTo>
+                  <a:pt x="1683864" y="245420"/>
+                </a:lnTo>
+                <a:close/>
+                <a:lnTo>
+                  <a:pt x="1689420" y="243522"/>
+                </a:lnTo>
+                <a:close/>
+                <a:lnTo>
+                  <a:pt x="1694975" y="241626"/>
+                </a:lnTo>
+                <a:close/>
+                <a:lnTo>
+                  <a:pt x="1700527" y="239733"/>
+                </a:lnTo>
+                <a:close/>
+                <a:lnTo>
+                  <a:pt x="1706078" y="237843"/>
+                </a:lnTo>
+                <a:close/>
+                <a:lnTo>
+                  <a:pt x="1711627" y="235955"/>
+                </a:lnTo>
+                <a:close/>
+                <a:lnTo>
+                  <a:pt x="1717174" y="234070"/>
+                </a:lnTo>
+                <a:close/>
+                <a:lnTo>
+                  <a:pt x="1722718" y="232188"/>
+                </a:lnTo>
+                <a:close/>
+                <a:lnTo>
+                  <a:pt x="1728259" y="230309"/>
+                </a:lnTo>
+                <a:close/>
+                <a:lnTo>
+                  <a:pt x="1733799" y="228433"/>
+                </a:lnTo>
+                <a:close/>
+                <a:lnTo>
+                  <a:pt x="1739335" y="226560"/>
+                </a:lnTo>
+                <a:close/>
+                <a:lnTo>
+                  <a:pt x="1744869" y="224690"/>
+                </a:lnTo>
+                <a:close/>
+                <a:lnTo>
+                  <a:pt x="1750399" y="222824"/>
+                </a:lnTo>
+                <a:close/>
+                <a:lnTo>
+                  <a:pt x="1755926" y="220960"/>
+                </a:lnTo>
+                <a:close/>
+                <a:lnTo>
+                  <a:pt x="1761450" y="219100"/>
+                </a:lnTo>
+                <a:close/>
+                <a:lnTo>
+                  <a:pt x="1766971" y="217243"/>
+                </a:lnTo>
+                <a:close/>
+                <a:lnTo>
+                  <a:pt x="1772488" y="215389"/>
+                </a:lnTo>
+                <a:close/>
+                <a:lnTo>
+                  <a:pt x="1778001" y="213539"/>
+                </a:lnTo>
+                <a:close/>
+                <a:lnTo>
+                  <a:pt x="1783511" y="211692"/>
+                </a:lnTo>
+                <a:close/>
+                <a:lnTo>
+                  <a:pt x="1789016" y="209849"/>
+                </a:lnTo>
+                <a:close/>
+                <a:lnTo>
+                  <a:pt x="1794518" y="208009"/>
+                </a:lnTo>
+                <a:close/>
+                <a:lnTo>
+                  <a:pt x="1800015" y="206173"/>
+                </a:lnTo>
+                <a:close/>
+                <a:lnTo>
+                  <a:pt x="1805508" y="204341"/>
+                </a:lnTo>
+                <a:close/>
+                <a:lnTo>
+                  <a:pt x="1810996" y="202512"/>
+                </a:lnTo>
+                <a:close/>
+                <a:lnTo>
+                  <a:pt x="1816480" y="200688"/>
+                </a:lnTo>
+                <a:close/>
+                <a:lnTo>
+                  <a:pt x="1821958" y="198867"/>
+                </a:lnTo>
+                <a:close/>
+                <a:lnTo>
+                  <a:pt x="1827432" y="197050"/>
+                </a:lnTo>
+                <a:close/>
+                <a:lnTo>
+                  <a:pt x="1832901" y="195237"/>
+                </a:lnTo>
+                <a:close/>
+                <a:lnTo>
+                  <a:pt x="1838365" y="193428"/>
+                </a:lnTo>
+                <a:close/>
+                <a:lnTo>
+                  <a:pt x="1843823" y="191623"/>
+                </a:lnTo>
+                <a:close/>
+                <a:lnTo>
+                  <a:pt x="1849276" y="189822"/>
+                </a:lnTo>
+                <a:close/>
+                <a:lnTo>
+                  <a:pt x="1854723" y="188025"/>
+                </a:lnTo>
+                <a:close/>
+                <a:lnTo>
+                  <a:pt x="1860165" y="186233"/>
+                </a:lnTo>
+                <a:close/>
+                <a:lnTo>
+                  <a:pt x="1865600" y="184445"/>
+                </a:lnTo>
+                <a:close/>
+                <a:lnTo>
+                  <a:pt x="1871030" y="182661"/>
+                </a:lnTo>
+                <a:close/>
+                <a:lnTo>
+                  <a:pt x="1876453" y="180881"/>
+                </a:lnTo>
+                <a:close/>
+                <a:lnTo>
+                  <a:pt x="1881870" y="179106"/>
+                </a:lnTo>
+                <a:close/>
+                <a:lnTo>
+                  <a:pt x="1887281" y="177336"/>
+                </a:lnTo>
+                <a:close/>
+                <a:lnTo>
+                  <a:pt x="1892685" y="175570"/>
+                </a:lnTo>
+                <a:close/>
+                <a:lnTo>
+                  <a:pt x="1898083" y="173809"/>
+                </a:lnTo>
+                <a:close/>
+                <a:lnTo>
+                  <a:pt x="1903473" y="172052"/>
+                </a:lnTo>
+                <a:close/>
+                <a:lnTo>
+                  <a:pt x="1908857" y="170300"/>
+                </a:lnTo>
+                <a:close/>
+                <a:lnTo>
+                  <a:pt x="1914234" y="168553"/>
+                </a:lnTo>
+                <a:close/>
+                <a:lnTo>
+                  <a:pt x="1919603" y="166811"/>
+                </a:lnTo>
+                <a:close/>
+                <a:lnTo>
+                  <a:pt x="1924965" y="165074"/>
+                </a:lnTo>
+                <a:close/>
+                <a:lnTo>
+                  <a:pt x="1930319" y="163341"/>
+                </a:lnTo>
+                <a:close/>
+                <a:lnTo>
+                  <a:pt x="1935666" y="161614"/>
+                </a:lnTo>
+                <a:close/>
+                <a:lnTo>
+                  <a:pt x="1941005" y="159892"/>
+                </a:lnTo>
+                <a:close/>
+                <a:lnTo>
+                  <a:pt x="1946336" y="158174"/>
+                </a:lnTo>
+                <a:close/>
+                <a:lnTo>
+                  <a:pt x="1951659" y="156462"/>
+                </a:lnTo>
+                <a:close/>
+                <a:lnTo>
+                  <a:pt x="1956974" y="154755"/>
+                </a:lnTo>
+                <a:close/>
+                <a:lnTo>
+                  <a:pt x="1962280" y="153054"/>
+                </a:lnTo>
+                <a:close/>
+                <a:lnTo>
+                  <a:pt x="1967578" y="151357"/>
+                </a:lnTo>
+                <a:close/>
+                <a:lnTo>
+                  <a:pt x="1972868" y="149666"/>
+                </a:lnTo>
+                <a:close/>
+                <a:lnTo>
+                  <a:pt x="1978148" y="147981"/>
+                </a:lnTo>
+                <a:close/>
+                <a:lnTo>
+                  <a:pt x="1983420" y="146301"/>
+                </a:lnTo>
+                <a:close/>
+                <a:lnTo>
+                  <a:pt x="1988683" y="144627"/>
+                </a:lnTo>
+                <a:close/>
+                <a:lnTo>
+                  <a:pt x="1993937" y="142958"/>
+                </a:lnTo>
+                <a:close/>
+                <a:lnTo>
+                  <a:pt x="1999181" y="141294"/>
+                </a:lnTo>
+                <a:close/>
+                <a:lnTo>
+                  <a:pt x="2004416" y="139637"/>
+                </a:lnTo>
+                <a:close/>
+                <a:lnTo>
+                  <a:pt x="2009641" y="137985"/>
+                </a:lnTo>
+                <a:close/>
+                <a:lnTo>
+                  <a:pt x="2014857" y="136339"/>
+                </a:lnTo>
+                <a:close/>
+                <a:lnTo>
+                  <a:pt x="2020063" y="134699"/>
+                </a:lnTo>
+                <a:close/>
+                <a:lnTo>
+                  <a:pt x="2025259" y="133065"/>
+                </a:lnTo>
+                <a:close/>
+                <a:lnTo>
+                  <a:pt x="2030444" y="131437"/>
+                </a:lnTo>
+                <a:close/>
+                <a:lnTo>
+                  <a:pt x="2035620" y="129815"/>
+                </a:lnTo>
+                <a:close/>
+                <a:lnTo>
+                  <a:pt x="2040785" y="128199"/>
+                </a:lnTo>
+                <a:close/>
+                <a:lnTo>
+                  <a:pt x="2045940" y="126589"/>
+                </a:lnTo>
+                <a:close/>
+                <a:lnTo>
+                  <a:pt x="2051084" y="124985"/>
+                </a:lnTo>
+                <a:close/>
+                <a:lnTo>
+                  <a:pt x="2056217" y="123388"/>
+                </a:lnTo>
+                <a:close/>
+                <a:lnTo>
+                  <a:pt x="2061339" y="121796"/>
+                </a:lnTo>
+                <a:close/>
+                <a:lnTo>
+                  <a:pt x="2066451" y="120212"/>
+                </a:lnTo>
+                <a:close/>
+                <a:lnTo>
+                  <a:pt x="2071551" y="118633"/>
+                </a:lnTo>
+                <a:close/>
+                <a:lnTo>
+                  <a:pt x="2076640" y="117061"/>
+                </a:lnTo>
+                <a:close/>
+                <a:lnTo>
+                  <a:pt x="2081717" y="115496"/>
+                </a:lnTo>
+                <a:close/>
+                <a:lnTo>
+                  <a:pt x="2086783" y="113937"/>
+                </a:lnTo>
+                <a:close/>
+                <a:lnTo>
+                  <a:pt x="2091837" y="112385"/>
+                </a:lnTo>
+                <a:close/>
+                <a:lnTo>
+                  <a:pt x="2096879" y="110839"/>
+                </a:lnTo>
+                <a:close/>
+                <a:lnTo>
+                  <a:pt x="2101909" y="109301"/>
+                </a:lnTo>
+                <a:close/>
+                <a:lnTo>
+                  <a:pt x="2106927" y="107769"/>
+                </a:lnTo>
+                <a:close/>
+                <a:lnTo>
+                  <a:pt x="2111932" y="106244"/>
+                </a:lnTo>
+                <a:close/>
+                <a:lnTo>
+                  <a:pt x="2116926" y="104725"/>
+                </a:lnTo>
+                <a:close/>
+                <a:lnTo>
+                  <a:pt x="2121906" y="103214"/>
+                </a:lnTo>
+                <a:close/>
+                <a:lnTo>
+                  <a:pt x="2126874" y="101710"/>
+                </a:lnTo>
+                <a:close/>
+                <a:lnTo>
+                  <a:pt x="2131830" y="100213"/>
+                </a:lnTo>
+                <a:close/>
+                <a:lnTo>
+                  <a:pt x="2136772" y="98723"/>
+                </a:lnTo>
+                <a:close/>
+                <a:lnTo>
+                  <a:pt x="2141701" y="97240"/>
+                </a:lnTo>
+                <a:close/>
+                <a:lnTo>
+                  <a:pt x="2146617" y="95764"/>
+                </a:lnTo>
+                <a:close/>
+                <a:lnTo>
+                  <a:pt x="2151519" y="94296"/>
+                </a:lnTo>
+                <a:close/>
+                <a:lnTo>
+                  <a:pt x="2156408" y="92835"/>
+                </a:lnTo>
+                <a:close/>
+                <a:lnTo>
+                  <a:pt x="2161284" y="91381"/>
+                </a:lnTo>
+                <a:close/>
+                <a:lnTo>
+                  <a:pt x="2166145" y="89935"/>
+                </a:lnTo>
+                <a:close/>
+                <a:lnTo>
+                  <a:pt x="2170993" y="88496"/>
+                </a:lnTo>
+                <a:close/>
+                <a:lnTo>
+                  <a:pt x="2175827" y="87065"/>
+                </a:lnTo>
+                <a:close/>
+                <a:lnTo>
+                  <a:pt x="2180646" y="85641"/>
+                </a:lnTo>
+                <a:close/>
+                <a:lnTo>
+                  <a:pt x="2185451" y="84225"/>
+                </a:lnTo>
+                <a:close/>
+                <a:lnTo>
+                  <a:pt x="2190242" y="82817"/>
+                </a:lnTo>
+                <a:close/>
+                <a:lnTo>
+                  <a:pt x="2195018" y="81417"/>
+                </a:lnTo>
+                <a:close/>
+                <a:lnTo>
+                  <a:pt x="2199780" y="80024"/>
+                </a:lnTo>
+                <a:close/>
+                <a:lnTo>
+                  <a:pt x="2204526" y="78640"/>
+                </a:lnTo>
+                <a:close/>
+                <a:lnTo>
+                  <a:pt x="2209258" y="77263"/>
+                </a:lnTo>
+                <a:close/>
+                <a:lnTo>
+                  <a:pt x="2213974" y="75894"/>
+                </a:lnTo>
+                <a:close/>
+                <a:lnTo>
+                  <a:pt x="2218675" y="74534"/>
+                </a:lnTo>
+                <a:close/>
+                <a:lnTo>
+                  <a:pt x="2223361" y="73181"/>
+                </a:lnTo>
+                <a:close/>
+                <a:lnTo>
+                  <a:pt x="2228031" y="71837"/>
+                </a:lnTo>
+                <a:close/>
+                <a:lnTo>
+                  <a:pt x="2232685" y="70500"/>
+                </a:lnTo>
+                <a:close/>
+                <a:lnTo>
+                  <a:pt x="2237324" y="69172"/>
+                </a:lnTo>
+                <a:close/>
+                <a:lnTo>
+                  <a:pt x="2241947" y="67853"/>
+                </a:lnTo>
+                <a:close/>
+                <a:lnTo>
+                  <a:pt x="2246553" y="66541"/>
+                </a:lnTo>
+                <a:close/>
+                <a:lnTo>
+                  <a:pt x="2251144" y="65239"/>
+                </a:lnTo>
+                <a:close/>
+                <a:lnTo>
+                  <a:pt x="2255718" y="63944"/>
+                </a:lnTo>
+                <a:close/>
+                <a:lnTo>
+                  <a:pt x="2260275" y="62658"/>
+                </a:lnTo>
+                <a:close/>
+                <a:lnTo>
+                  <a:pt x="2264816" y="61381"/>
+                </a:lnTo>
+                <a:close/>
+                <a:lnTo>
+                  <a:pt x="2269340" y="60113"/>
+                </a:lnTo>
+                <a:close/>
+                <a:lnTo>
+                  <a:pt x="2273847" y="58853"/>
+                </a:lnTo>
+                <a:close/>
+                <a:lnTo>
+                  <a:pt x="2278337" y="57602"/>
+                </a:lnTo>
+                <a:close/>
+                <a:lnTo>
+                  <a:pt x="2282810" y="56359"/>
+                </a:lnTo>
+                <a:close/>
+                <a:lnTo>
+                  <a:pt x="2287266" y="55126"/>
+                </a:lnTo>
+                <a:close/>
+                <a:lnTo>
+                  <a:pt x="2291704" y="53901"/>
+                </a:lnTo>
+                <a:close/>
+                <a:lnTo>
+                  <a:pt x="2296125" y="52686"/>
+                </a:lnTo>
+                <a:close/>
+                <a:lnTo>
+                  <a:pt x="2300528" y="51479"/>
+                </a:lnTo>
+                <a:close/>
+                <a:lnTo>
+                  <a:pt x="2304913" y="50282"/>
+                </a:lnTo>
+                <a:close/>
+                <a:lnTo>
+                  <a:pt x="2309280" y="49093"/>
+                </a:lnTo>
+                <a:close/>
+                <a:lnTo>
+                  <a:pt x="2313629" y="47914"/>
+                </a:lnTo>
+                <a:close/>
+                <a:lnTo>
+                  <a:pt x="2317959" y="46744"/>
+                </a:lnTo>
+                <a:close/>
+                <a:lnTo>
+                  <a:pt x="2322272" y="45584"/>
+                </a:lnTo>
+                <a:close/>
+                <a:lnTo>
+                  <a:pt x="2326565" y="44433"/>
+                </a:lnTo>
+                <a:close/>
+                <a:lnTo>
+                  <a:pt x="2330840" y="43291"/>
+                </a:lnTo>
+                <a:close/>
+                <a:lnTo>
+                  <a:pt x="2335096" y="42158"/>
+                </a:lnTo>
+                <a:close/>
+                <a:lnTo>
+                  <a:pt x="2339334" y="41036"/>
+                </a:lnTo>
+                <a:close/>
+                <a:lnTo>
+                  <a:pt x="2343552" y="39922"/>
+                </a:lnTo>
+                <a:close/>
+                <a:lnTo>
+                  <a:pt x="2347751" y="38819"/>
+                </a:lnTo>
+                <a:close/>
+                <a:lnTo>
+                  <a:pt x="2351930" y="37725"/>
+                </a:lnTo>
+                <a:close/>
+                <a:lnTo>
+                  <a:pt x="2356090" y="36640"/>
+                </a:lnTo>
+                <a:close/>
+                <a:lnTo>
+                  <a:pt x="2360231" y="35566"/>
+                </a:lnTo>
+                <a:close/>
+                <a:lnTo>
+                  <a:pt x="2364352" y="34501"/>
+                </a:lnTo>
+                <a:close/>
+                <a:lnTo>
+                  <a:pt x="2368452" y="33447"/>
+                </a:lnTo>
+                <a:close/>
+                <a:lnTo>
+                  <a:pt x="2372533" y="32402"/>
+                </a:lnTo>
+                <a:close/>
+                <a:lnTo>
+                  <a:pt x="2376594" y="31367"/>
+                </a:lnTo>
+                <a:close/>
+                <a:lnTo>
+                  <a:pt x="2380634" y="30343"/>
+                </a:lnTo>
+                <a:close/>
+                <a:lnTo>
+                  <a:pt x="2384654" y="29328"/>
+                </a:lnTo>
+                <a:close/>
+                <a:lnTo>
+                  <a:pt x="2388653" y="28324"/>
+                </a:lnTo>
+                <a:close/>
+                <a:lnTo>
+                  <a:pt x="2392631" y="27329"/>
+                </a:lnTo>
+                <a:close/>
+                <a:lnTo>
+                  <a:pt x="2396589" y="26345"/>
+                </a:lnTo>
+                <a:close/>
+                <a:lnTo>
+                  <a:pt x="2400526" y="25372"/>
+                </a:lnTo>
+                <a:close/>
+                <a:lnTo>
+                  <a:pt x="2404441" y="24409"/>
+                </a:lnTo>
+                <a:close/>
+                <a:lnTo>
+                  <a:pt x="2408335" y="23456"/>
+                </a:lnTo>
+                <a:close/>
+                <a:lnTo>
+                  <a:pt x="2412208" y="22514"/>
+                </a:lnTo>
+                <a:close/>
+                <a:lnTo>
+                  <a:pt x="2416060" y="21582"/>
+                </a:lnTo>
+                <a:close/>
+                <a:lnTo>
+                  <a:pt x="2419889" y="20661"/>
+                </a:lnTo>
+                <a:close/>
+                <a:lnTo>
+                  <a:pt x="2423697" y="19751"/>
+                </a:lnTo>
+                <a:close/>
+                <a:lnTo>
+                  <a:pt x="2427483" y="18851"/>
+                </a:lnTo>
+                <a:close/>
+                <a:lnTo>
+                  <a:pt x="2431247" y="17962"/>
+                </a:lnTo>
+                <a:close/>
+                <a:lnTo>
+                  <a:pt x="2434988" y="17084"/>
+                </a:lnTo>
+                <a:close/>
+                <a:lnTo>
+                  <a:pt x="2438708" y="16217"/>
+                </a:lnTo>
+                <a:close/>
+                <a:lnTo>
+                  <a:pt x="2442404" y="15360"/>
+                </a:lnTo>
+                <a:close/>
+                <a:lnTo>
+                  <a:pt x="2446079" y="14515"/>
+                </a:lnTo>
+                <a:close/>
+                <a:lnTo>
+                  <a:pt x="2449730" y="13681"/>
+                </a:lnTo>
+                <a:close/>
+                <a:lnTo>
+                  <a:pt x="2453358" y="12858"/>
+                </a:lnTo>
+                <a:close/>
+                <a:lnTo>
+                  <a:pt x="2456964" y="12046"/>
+                </a:lnTo>
+                <a:close/>
+                <a:lnTo>
+                  <a:pt x="2460546" y="11245"/>
+                </a:lnTo>
+                <a:close/>
+                <a:lnTo>
+                  <a:pt x="2464105" y="10455"/>
+                </a:lnTo>
+                <a:close/>
+                <a:lnTo>
+                  <a:pt x="2467641" y="9677"/>
+                </a:lnTo>
+                <a:close/>
+                <a:lnTo>
+                  <a:pt x="2471152" y="8910"/>
+                </a:lnTo>
+                <a:close/>
+                <a:lnTo>
+                  <a:pt x="2474641" y="8155"/>
+                </a:lnTo>
+                <a:close/>
+                <a:lnTo>
+                  <a:pt x="2478105" y="7411"/>
+                </a:lnTo>
+                <a:close/>
+                <a:lnTo>
+                  <a:pt x="2481545" y="6678"/>
+                </a:lnTo>
+                <a:close/>
+                <a:lnTo>
+                  <a:pt x="2484962" y="5957"/>
+                </a:lnTo>
+                <a:close/>
+                <a:lnTo>
+                  <a:pt x="2488354" y="5248"/>
+                </a:lnTo>
+                <a:close/>
+                <a:lnTo>
+                  <a:pt x="2491721" y="4551"/>
+                </a:lnTo>
+                <a:close/>
+                <a:lnTo>
+                  <a:pt x="2495064" y="3865"/>
+                </a:lnTo>
+                <a:close/>
+                <a:lnTo>
+                  <a:pt x="2498383" y="3191"/>
+                </a:lnTo>
+                <a:close/>
+                <a:lnTo>
+                  <a:pt x="2501676" y="2529"/>
+                </a:lnTo>
+                <a:close/>
+                <a:lnTo>
+                  <a:pt x="2504945" y="1879"/>
+                </a:lnTo>
+                <a:close/>
+                <a:lnTo>
+                  <a:pt x="2508189" y="1240"/>
+                </a:lnTo>
+                <a:close/>
+                <a:lnTo>
+                  <a:pt x="2511407" y="614"/>
+                </a:lnTo>
+                <a:close/>
+                <a:lnTo>
+                  <a:pt x="2514600" y="0"/>
                 </a:lnTo>
                 <a:close/>
               </a:path>
@@ -5623,8 +5623,8 @@
         </p:nvCxnSpPr>
         <p:spPr>
           <a:xfrm flipV="1">
-            <a:off x="6400800.0" y="1200150.0"/>
-            <a:ext cx="0.0" cy="1371600.0"/>
+            <a:off x="6400800.0" y="1428750.0"/>
+            <a:ext cx="0.0" cy="1143000.0"/>
           </a:xfrm>
           <a:prstGeom prst="line">
             <a:avLst/>
@@ -5659,7 +5659,7 @@
         </p:nvSpPr>
         <p:spPr>
           <a:xfrm>
-            <a:off x="6311900" y="1111250"/>
+            <a:off x="6311900" y="1339850"/>
             <a:ext cx="177800" cy="177800"/>
           </a:xfrm>
           <a:prstGeom prst="ellipse">
@@ -5704,7 +5704,7 @@
         </p:nvSpPr>
         <p:spPr>
           <a:xfrm>
-            <a:off x="6512560" y="196850"/>
+            <a:off x="5781040" y="791210"/>
             <a:ext cx="1524000" cy="508000"/>
           </a:xfrm>
           <a:prstGeom prst="rect">
@@ -5740,7 +5740,7 @@
         </p:nvSpPr>
         <p:spPr>
           <a:xfrm>
-            <a:off x="6146800" y="2437130"/>
+            <a:off x="6146800" y="2391410"/>
             <a:ext cx="1524000" cy="508000"/>
           </a:xfrm>
           <a:prstGeom prst="rect">
@@ -5776,7 +5776,7 @@
         </p:nvSpPr>
         <p:spPr>
           <a:xfrm>
-            <a:off x="4135120" y="2437130"/>
+            <a:off x="4157980" y="2391410"/>
             <a:ext cx="1524000" cy="508000"/>
           </a:xfrm>
           <a:prstGeom prst="rect">
